--- a/jaspersoft/docs/deployment_deck/visuals/Standard_Offering_and_Database_Steps.pptx
+++ b/jaspersoft/docs/deployment_deck/visuals/Standard_Offering_and_Database_Steps.pptx
@@ -7679,12 +7679,12 @@
               </a:spcAft>
             </a:pPr>
             <a:r>
-              <a:rPr sz="4600" b="0">
+              <a:rPr sz="6000" b="0">
                 <a:solidFill>
                   <a:srgbClr val="F5EFE9"/>
                 </a:solidFill>
               </a:rPr>
-              <a:t>Standard Offering In Jaspersoft, Step By Step</a:t>
+              <a:t>Standard Offering Deployment Flow</a:t>
             </a:r>
           </a:p>
         </p:txBody>
@@ -7794,11 +7794,506 @@
         <p:spPr>
           <a:xfrm>
             <a:off x="740664" y="1828800"/>
-            <a:ext cx="9212580" cy="1435607"/>
+            <a:ext cx="4443984" cy="5989320"/>
           </a:xfrm>
           <a:prstGeom prst="roundRect">
             <a:avLst>
-              <a:gd name="adj" fmla="val 8000"/>
+              <a:gd name="adj" fmla="val 4000"/>
+            </a:avLst>
+          </a:prstGeom>
+          <a:noFill/>
+          <a:ln w="19050">
+            <a:solidFill>
+              <a:srgbClr val="F5EFE9"/>
+            </a:solidFill>
+          </a:ln>
+          <a:effectLst/>
+        </p:spPr>
+        <p:style>
+          <a:lnRef idx="1">
+            <a:schemeClr val="accent1"/>
+          </a:lnRef>
+          <a:fillRef idx="3">
+            <a:schemeClr val="accent1"/>
+          </a:fillRef>
+          <a:effectRef idx="2">
+            <a:schemeClr val="accent1"/>
+          </a:effectRef>
+          <a:fontRef idx="minor">
+            <a:schemeClr val="lt1"/>
+          </a:fontRef>
+        </p:style>
+        <p:txBody>
+          <a:bodyPr rtlCol="0" anchor="ctr"/>
+          <a:lstStyle/>
+          <a:p>
+            <a:pPr algn="ctr"/>
+          </a:p>
+        </p:txBody>
+      </p:sp>
+      <p:sp>
+        <p:nvSpPr>
+          <p:cNvPr id="6" name="TextBox 5"/>
+          <p:cNvSpPr txBox="1"/>
+          <p:nvPr/>
+        </p:nvSpPr>
+        <p:spPr>
+          <a:xfrm>
+            <a:off x="905256" y="1874519"/>
+            <a:ext cx="4114800" cy="411480"/>
+          </a:xfrm>
+          <a:prstGeom prst="rect">
+            <a:avLst/>
+          </a:prstGeom>
+          <a:noFill/>
+        </p:spPr>
+        <p:txBody>
+          <a:bodyPr wrap="square" anchor="t" lIns="0" rIns="0" tIns="54864" bIns="54864">
+            <a:spAutoFit/>
+          </a:bodyPr>
+          <a:lstStyle/>
+          <a:p>
+            <a:pPr algn="l">
+              <a:spcAft>
+                <a:spcPts val="600"/>
+              </a:spcAft>
+            </a:pPr>
+            <a:r>
+              <a:rPr sz="1400" b="1">
+                <a:solidFill>
+                  <a:srgbClr val="F5EFE9"/>
+                </a:solidFill>
+              </a:rPr>
+              <a:t>Origin_DEV</a:t>
+            </a:r>
+          </a:p>
+          <a:p>
+            <a:pPr algn="l">
+              <a:spcAft>
+                <a:spcPts val="600"/>
+              </a:spcAft>
+            </a:pPr>
+            <a:r>
+              <a:rPr sz="1100" b="0">
+                <a:solidFill>
+                  <a:srgbClr val="F5EFE9"/>
+                </a:solidFill>
+              </a:rPr>
+              <a:t>authoring, the internal server</a:t>
+            </a:r>
+          </a:p>
+        </p:txBody>
+      </p:sp>
+      <p:sp>
+        <p:nvSpPr>
+          <p:cNvPr id="7" name="Rounded Rectangle 6"/>
+          <p:cNvSpPr/>
+          <p:nvPr/>
+        </p:nvSpPr>
+        <p:spPr>
+          <a:xfrm>
+            <a:off x="5477256" y="1828800"/>
+            <a:ext cx="4443984" cy="5989320"/>
+          </a:xfrm>
+          <a:prstGeom prst="roundRect">
+            <a:avLst>
+              <a:gd name="adj" fmla="val 4000"/>
+            </a:avLst>
+          </a:prstGeom>
+          <a:noFill/>
+          <a:ln w="19050">
+            <a:solidFill>
+              <a:srgbClr val="F5EFE9"/>
+            </a:solidFill>
+          </a:ln>
+          <a:effectLst/>
+        </p:spPr>
+        <p:style>
+          <a:lnRef idx="1">
+            <a:schemeClr val="accent1"/>
+          </a:lnRef>
+          <a:fillRef idx="3">
+            <a:schemeClr val="accent1"/>
+          </a:fillRef>
+          <a:effectRef idx="2">
+            <a:schemeClr val="accent1"/>
+          </a:effectRef>
+          <a:fontRef idx="minor">
+            <a:schemeClr val="lt1"/>
+          </a:fontRef>
+        </p:style>
+        <p:txBody>
+          <a:bodyPr rtlCol="0" anchor="ctr"/>
+          <a:lstStyle/>
+          <a:p>
+            <a:pPr algn="ctr"/>
+          </a:p>
+        </p:txBody>
+      </p:sp>
+      <p:sp>
+        <p:nvSpPr>
+          <p:cNvPr id="8" name="TextBox 7"/>
+          <p:cNvSpPr txBox="1"/>
+          <p:nvPr/>
+        </p:nvSpPr>
+        <p:spPr>
+          <a:xfrm>
+            <a:off x="5641848" y="1874519"/>
+            <a:ext cx="4114800" cy="411480"/>
+          </a:xfrm>
+          <a:prstGeom prst="rect">
+            <a:avLst/>
+          </a:prstGeom>
+          <a:noFill/>
+        </p:spPr>
+        <p:txBody>
+          <a:bodyPr wrap="square" anchor="t" lIns="0" rIns="0" tIns="54864" bIns="54864">
+            <a:spAutoFit/>
+          </a:bodyPr>
+          <a:lstStyle/>
+          <a:p>
+            <a:pPr algn="l">
+              <a:spcAft>
+                <a:spcPts val="600"/>
+              </a:spcAft>
+            </a:pPr>
+            <a:r>
+              <a:rPr sz="1400" b="1">
+                <a:solidFill>
+                  <a:srgbClr val="F5EFE9"/>
+                </a:solidFill>
+              </a:rPr>
+              <a:t>Origin_TEST</a:t>
+            </a:r>
+          </a:p>
+          <a:p>
+            <a:pPr algn="l">
+              <a:spcAft>
+                <a:spcPts val="600"/>
+              </a:spcAft>
+            </a:pPr>
+            <a:r>
+              <a:rPr sz="1100" b="0">
+                <a:solidFill>
+                  <a:srgbClr val="F5EFE9"/>
+                </a:solidFill>
+              </a:rPr>
+              <a:t>proving, before any client</a:t>
+            </a:r>
+          </a:p>
+        </p:txBody>
+      </p:sp>
+      <p:sp>
+        <p:nvSpPr>
+          <p:cNvPr id="9" name="Rounded Rectangle 8"/>
+          <p:cNvSpPr/>
+          <p:nvPr/>
+        </p:nvSpPr>
+        <p:spPr>
+          <a:xfrm>
+            <a:off x="10213848" y="1828800"/>
+            <a:ext cx="4443984" cy="5989320"/>
+          </a:xfrm>
+          <a:prstGeom prst="roundRect">
+            <a:avLst>
+              <a:gd name="adj" fmla="val 4000"/>
+            </a:avLst>
+          </a:prstGeom>
+          <a:noFill/>
+          <a:ln w="19050">
+            <a:solidFill>
+              <a:srgbClr val="F5EFE9"/>
+            </a:solidFill>
+          </a:ln>
+          <a:effectLst/>
+        </p:spPr>
+        <p:style>
+          <a:lnRef idx="1">
+            <a:schemeClr val="accent1"/>
+          </a:lnRef>
+          <a:fillRef idx="3">
+            <a:schemeClr val="accent1"/>
+          </a:fillRef>
+          <a:effectRef idx="2">
+            <a:schemeClr val="accent1"/>
+          </a:effectRef>
+          <a:fontRef idx="minor">
+            <a:schemeClr val="lt1"/>
+          </a:fontRef>
+        </p:style>
+        <p:txBody>
+          <a:bodyPr rtlCol="0" anchor="ctr"/>
+          <a:lstStyle/>
+          <a:p>
+            <a:pPr algn="ctr"/>
+          </a:p>
+        </p:txBody>
+      </p:sp>
+      <p:sp>
+        <p:nvSpPr>
+          <p:cNvPr id="10" name="TextBox 9"/>
+          <p:cNvSpPr txBox="1"/>
+          <p:nvPr/>
+        </p:nvSpPr>
+        <p:spPr>
+          <a:xfrm>
+            <a:off x="10378440" y="1874519"/>
+            <a:ext cx="4114800" cy="411480"/>
+          </a:xfrm>
+          <a:prstGeom prst="rect">
+            <a:avLst/>
+          </a:prstGeom>
+          <a:noFill/>
+        </p:spPr>
+        <p:txBody>
+          <a:bodyPr wrap="square" anchor="t" lIns="0" rIns="0" tIns="54864" bIns="54864">
+            <a:spAutoFit/>
+          </a:bodyPr>
+          <a:lstStyle/>
+          <a:p>
+            <a:pPr algn="l">
+              <a:spcAft>
+                <a:spcPts val="600"/>
+              </a:spcAft>
+            </a:pPr>
+            <a:r>
+              <a:rPr sz="1400" b="1">
+                <a:solidFill>
+                  <a:srgbClr val="F5EFE9"/>
+                </a:solidFill>
+              </a:rPr>
+              <a:t>Client test org</a:t>
+            </a:r>
+          </a:p>
+          <a:p>
+            <a:pPr algn="l">
+              <a:spcAft>
+                <a:spcPts val="600"/>
+              </a:spcAft>
+            </a:pPr>
+            <a:r>
+              <a:rPr sz="1100" b="0">
+                <a:solidFill>
+                  <a:srgbClr val="F5EFE9"/>
+                </a:solidFill>
+              </a:rPr>
+              <a:t>the client's own data</a:t>
+            </a:r>
+          </a:p>
+        </p:txBody>
+      </p:sp>
+      <p:sp>
+        <p:nvSpPr>
+          <p:cNvPr id="11" name="Rounded Rectangle 10"/>
+          <p:cNvSpPr/>
+          <p:nvPr/>
+        </p:nvSpPr>
+        <p:spPr>
+          <a:xfrm>
+            <a:off x="14950440" y="1828800"/>
+            <a:ext cx="4443984" cy="5989320"/>
+          </a:xfrm>
+          <a:prstGeom prst="roundRect">
+            <a:avLst>
+              <a:gd name="adj" fmla="val 4000"/>
+            </a:avLst>
+          </a:prstGeom>
+          <a:noFill/>
+          <a:ln w="19050">
+            <a:solidFill>
+              <a:srgbClr val="F5EFE9"/>
+            </a:solidFill>
+          </a:ln>
+          <a:effectLst/>
+        </p:spPr>
+        <p:style>
+          <a:lnRef idx="1">
+            <a:schemeClr val="accent1"/>
+          </a:lnRef>
+          <a:fillRef idx="3">
+            <a:schemeClr val="accent1"/>
+          </a:fillRef>
+          <a:effectRef idx="2">
+            <a:schemeClr val="accent1"/>
+          </a:effectRef>
+          <a:fontRef idx="minor">
+            <a:schemeClr val="lt1"/>
+          </a:fontRef>
+        </p:style>
+        <p:txBody>
+          <a:bodyPr rtlCol="0" anchor="ctr"/>
+          <a:lstStyle/>
+          <a:p>
+            <a:pPr algn="ctr"/>
+          </a:p>
+        </p:txBody>
+      </p:sp>
+      <p:sp>
+        <p:nvSpPr>
+          <p:cNvPr id="12" name="TextBox 11"/>
+          <p:cNvSpPr txBox="1"/>
+          <p:nvPr/>
+        </p:nvSpPr>
+        <p:spPr>
+          <a:xfrm>
+            <a:off x="15115032" y="1874519"/>
+            <a:ext cx="4114800" cy="411480"/>
+          </a:xfrm>
+          <a:prstGeom prst="rect">
+            <a:avLst/>
+          </a:prstGeom>
+          <a:noFill/>
+        </p:spPr>
+        <p:txBody>
+          <a:bodyPr wrap="square" anchor="t" lIns="0" rIns="0" tIns="54864" bIns="54864">
+            <a:spAutoFit/>
+          </a:bodyPr>
+          <a:lstStyle/>
+          <a:p>
+            <a:pPr algn="l">
+              <a:spcAft>
+                <a:spcPts val="600"/>
+              </a:spcAft>
+            </a:pPr>
+            <a:r>
+              <a:rPr sz="1400" b="1">
+                <a:solidFill>
+                  <a:srgbClr val="F5EFE9"/>
+                </a:solidFill>
+              </a:rPr>
+              <a:t>Client prod org</a:t>
+            </a:r>
+          </a:p>
+          <a:p>
+            <a:pPr algn="l">
+              <a:spcAft>
+                <a:spcPts val="600"/>
+              </a:spcAft>
+            </a:pPr>
+            <a:r>
+              <a:rPr sz="1100" b="0">
+                <a:solidFill>
+                  <a:srgbClr val="F5EFE9"/>
+                </a:solidFill>
+              </a:rPr>
+              <a:t>read-only until the prod flag is given</a:t>
+            </a:r>
+          </a:p>
+        </p:txBody>
+      </p:sp>
+      <p:sp>
+        <p:nvSpPr>
+          <p:cNvPr id="13" name="Rounded Rectangle 12"/>
+          <p:cNvSpPr/>
+          <p:nvPr/>
+        </p:nvSpPr>
+        <p:spPr>
+          <a:xfrm>
+            <a:off x="740664" y="8092440"/>
+            <a:ext cx="18653760" cy="1783080"/>
+          </a:xfrm>
+          <a:prstGeom prst="roundRect">
+            <a:avLst>
+              <a:gd name="adj" fmla="val 4000"/>
+            </a:avLst>
+          </a:prstGeom>
+          <a:noFill/>
+          <a:ln w="19050">
+            <a:solidFill>
+              <a:srgbClr val="F5EFE9"/>
+            </a:solidFill>
+          </a:ln>
+          <a:effectLst/>
+        </p:spPr>
+        <p:style>
+          <a:lnRef idx="1">
+            <a:schemeClr val="accent1"/>
+          </a:lnRef>
+          <a:fillRef idx="3">
+            <a:schemeClr val="accent1"/>
+          </a:fillRef>
+          <a:effectRef idx="2">
+            <a:schemeClr val="accent1"/>
+          </a:effectRef>
+          <a:fontRef idx="minor">
+            <a:schemeClr val="lt1"/>
+          </a:fontRef>
+        </p:style>
+        <p:txBody>
+          <a:bodyPr rtlCol="0" anchor="ctr"/>
+          <a:lstStyle/>
+          <a:p>
+            <a:pPr algn="ctr"/>
+          </a:p>
+        </p:txBody>
+      </p:sp>
+      <p:sp>
+        <p:nvSpPr>
+          <p:cNvPr id="14" name="TextBox 13"/>
+          <p:cNvSpPr txBox="1"/>
+          <p:nvPr/>
+        </p:nvSpPr>
+        <p:spPr>
+          <a:xfrm>
+            <a:off x="905256" y="8138160"/>
+            <a:ext cx="18324576" cy="411480"/>
+          </a:xfrm>
+          <a:prstGeom prst="rect">
+            <a:avLst/>
+          </a:prstGeom>
+          <a:noFill/>
+        </p:spPr>
+        <p:txBody>
+          <a:bodyPr wrap="square" anchor="t" lIns="0" rIns="0" tIns="54864" bIns="54864">
+            <a:spAutoFit/>
+          </a:bodyPr>
+          <a:lstStyle/>
+          <a:p>
+            <a:pPr algn="l">
+              <a:spcAft>
+                <a:spcPts val="600"/>
+              </a:spcAft>
+            </a:pPr>
+            <a:r>
+              <a:rPr sz="1400" b="1">
+                <a:solidFill>
+                  <a:srgbClr val="F5EFE9"/>
+                </a:solidFill>
+              </a:rPr>
+              <a:t>After go-live</a:t>
+            </a:r>
+          </a:p>
+          <a:p>
+            <a:pPr algn="l">
+              <a:spcAft>
+                <a:spcPts val="600"/>
+              </a:spcAft>
+            </a:pPr>
+            <a:r>
+              <a:rPr sz="1100" b="0">
+                <a:solidFill>
+                  <a:srgbClr val="F5EFE9"/>
+                </a:solidFill>
+              </a:rPr>
+              <a:t>every change is a tool run with the same proofs, never a hand edit</a:t>
+            </a:r>
+          </a:p>
+        </p:txBody>
+      </p:sp>
+      <p:sp>
+        <p:nvSpPr>
+          <p:cNvPr id="15" name="Rounded Rectangle 14"/>
+          <p:cNvSpPr/>
+          <p:nvPr/>
+        </p:nvSpPr>
+        <p:spPr>
+          <a:xfrm>
+            <a:off x="905256" y="2514600"/>
+            <a:ext cx="4114800" cy="914400"/>
+          </a:xfrm>
+          <a:prstGeom prst="roundRect">
+            <a:avLst>
+              <a:gd name="adj" fmla="val 10000"/>
             </a:avLst>
           </a:prstGeom>
           <a:solidFill>
@@ -7824,25 +8319,198 @@
           </a:fontRef>
         </p:style>
         <p:txBody>
-          <a:bodyPr rtlCol="0" anchor="ctr"/>
+          <a:bodyPr rtlCol="0" anchor="ctr" wrap="square" lIns="109728" rIns="109728" tIns="54864" bIns="54864"/>
           <a:lstStyle/>
           <a:p>
-            <a:pPr algn="ctr"/>
-          </a:p>
-        </p:txBody>
-      </p:sp>
-      <p:sp>
-        <p:nvSpPr>
-          <p:cNvPr id="6" name="Oval 5"/>
+            <a:pPr algn="l">
+              <a:spcAft>
+                <a:spcPts val="600"/>
+              </a:spcAft>
+            </a:pPr>
+            <a:r>
+              <a:rPr sz="1400" b="1">
+                <a:solidFill>
+                  <a:srgbClr val="0B3D7A"/>
+                </a:solidFill>
+              </a:rPr>
+              <a:t>Workstreams tree</a:t>
+            </a:r>
+          </a:p>
+          <a:p>
+            <a:pPr algn="l">
+              <a:spcAft>
+                <a:spcPts val="600"/>
+              </a:spcAft>
+            </a:pPr>
+            <a:r>
+              <a:rPr sz="1100" b="0">
+                <a:solidFill>
+                  <a:srgbClr val="4C5D69"/>
+                </a:solidFill>
+              </a:rPr>
+              <a:t>domains, Ad Hoc views, reports and dashboards: the only content edited by hand</a:t>
+            </a:r>
+          </a:p>
+        </p:txBody>
+      </p:sp>
+      <p:sp>
+        <p:nvSpPr>
+          <p:cNvPr id="16" name="Rounded Rectangle 15"/>
           <p:cNvSpPr/>
           <p:nvPr/>
         </p:nvSpPr>
         <p:spPr>
           <a:xfrm>
-            <a:off x="941832" y="2029968"/>
-            <a:ext cx="457200" cy="457200"/>
-          </a:xfrm>
-          <a:prstGeom prst="ellipse">
+            <a:off x="905256" y="3566160"/>
+            <a:ext cx="4114800" cy="731520"/>
+          </a:xfrm>
+          <a:prstGeom prst="roundRect">
+            <a:avLst>
+              <a:gd name="adj" fmla="val 10000"/>
+            </a:avLst>
+          </a:prstGeom>
+          <a:solidFill>
+            <a:srgbClr val="F5EFE9"/>
+          </a:solidFill>
+          <a:ln>
+            <a:noFill/>
+          </a:ln>
+          <a:effectLst/>
+        </p:spPr>
+        <p:style>
+          <a:lnRef idx="1">
+            <a:schemeClr val="accent1"/>
+          </a:lnRef>
+          <a:fillRef idx="3">
+            <a:schemeClr val="accent1"/>
+          </a:fillRef>
+          <a:effectRef idx="2">
+            <a:schemeClr val="accent1"/>
+          </a:effectRef>
+          <a:fontRef idx="minor">
+            <a:schemeClr val="lt1"/>
+          </a:fontRef>
+        </p:style>
+        <p:txBody>
+          <a:bodyPr rtlCol="0" anchor="ctr" wrap="square" lIns="109728" rIns="109728" tIns="54864" bIns="54864"/>
+          <a:lstStyle/>
+          <a:p>
+            <a:pPr algn="l">
+              <a:spcAft>
+                <a:spcPts val="600"/>
+              </a:spcAft>
+            </a:pPr>
+            <a:r>
+              <a:rPr sz="1400" b="1">
+                <a:solidFill>
+                  <a:srgbClr val="0B3D7A"/>
+                </a:solidFill>
+              </a:rPr>
+              <a:t>Export the org</a:t>
+            </a:r>
+          </a:p>
+          <a:p>
+            <a:pPr algn="l">
+              <a:spcAft>
+                <a:spcPts val="600"/>
+              </a:spcAft>
+            </a:pPr>
+            <a:r>
+              <a:rPr sz="1100" b="0">
+                <a:solidFill>
+                  <a:srgbClr val="4C5D69"/>
+                </a:solidFill>
+              </a:rPr>
+              <a:t>one API export task, polled, downloaded</a:t>
+            </a:r>
+          </a:p>
+        </p:txBody>
+      </p:sp>
+      <p:sp>
+        <p:nvSpPr>
+          <p:cNvPr id="17" name="Rounded Rectangle 16"/>
+          <p:cNvSpPr/>
+          <p:nvPr/>
+        </p:nvSpPr>
+        <p:spPr>
+          <a:xfrm>
+            <a:off x="905256" y="4434840"/>
+            <a:ext cx="4114800" cy="1417320"/>
+          </a:xfrm>
+          <a:prstGeom prst="roundRect">
+            <a:avLst>
+              <a:gd name="adj" fmla="val 10000"/>
+            </a:avLst>
+          </a:prstGeom>
+          <a:solidFill>
+            <a:srgbClr val="F5EFE9"/>
+          </a:solidFill>
+          <a:ln>
+            <a:noFill/>
+          </a:ln>
+          <a:effectLst/>
+        </p:spPr>
+        <p:style>
+          <a:lnRef idx="1">
+            <a:schemeClr val="accent1"/>
+          </a:lnRef>
+          <a:fillRef idx="3">
+            <a:schemeClr val="accent1"/>
+          </a:fillRef>
+          <a:effectRef idx="2">
+            <a:schemeClr val="accent1"/>
+          </a:effectRef>
+          <a:fontRef idx="minor">
+            <a:schemeClr val="lt1"/>
+          </a:fontRef>
+        </p:style>
+        <p:txBody>
+          <a:bodyPr rtlCol="0" anchor="ctr" wrap="square" lIns="109728" rIns="109728" tIns="54864" bIns="54864"/>
+          <a:lstStyle/>
+          <a:p>
+            <a:pPr algn="l">
+              <a:spcAft>
+                <a:spcPts val="600"/>
+              </a:spcAft>
+            </a:pPr>
+            <a:r>
+              <a:rPr sz="1400" b="1">
+                <a:solidFill>
+                  <a:srgbClr val="0B3D7A"/>
+                </a:solidFill>
+              </a:rPr>
+              <a:t>Build the package</a:t>
+            </a:r>
+          </a:p>
+          <a:p>
+            <a:pPr algn="l">
+              <a:spcAft>
+                <a:spcPts val="600"/>
+              </a:spcAft>
+            </a:pPr>
+            <a:r>
+              <a:rPr sz="1100" b="0">
+                <a:solidFill>
+                  <a:srgbClr val="4C5D69"/>
+                </a:solidFill>
+              </a:rPr>
+              <a:t>inventory and classify the export; keep the offering list; one copy of each domain in one home; carry the datasource; rewrite every path; strip print wrappers; narrow the import index</a:t>
+            </a:r>
+          </a:p>
+        </p:txBody>
+      </p:sp>
+      <p:sp>
+        <p:nvSpPr>
+          <p:cNvPr id="18" name="Diamond 17"/>
+          <p:cNvSpPr/>
+          <p:nvPr/>
+        </p:nvSpPr>
+        <p:spPr>
+          <a:xfrm>
+            <a:off x="2185415" y="6126480"/>
+            <a:ext cx="1554480" cy="822960"/>
+          </a:xfrm>
+          <a:prstGeom prst="diamond">
             <a:avLst/>
           </a:prstGeom>
           <a:solidFill>
@@ -7868,7 +8536,7 @@
           </a:fontRef>
         </p:style>
         <p:txBody>
-          <a:bodyPr rtlCol="0" anchor="ctr" wrap="square" lIns="0" rIns="0" tIns="54864" bIns="54864"/>
+          <a:bodyPr rtlCol="0" anchor="ctr" wrap="square" lIns="18288" rIns="18288" tIns="54864" bIns="54864"/>
           <a:lstStyle/>
           <a:p>
             <a:pPr algn="ctr">
@@ -7877,83 +8545,30 @@
               </a:spcAft>
             </a:pPr>
             <a:r>
-              <a:rPr sz="1500" b="1">
+              <a:rPr sz="1100" b="1">
                 <a:solidFill>
                   <a:srgbClr val="0B3D7A"/>
                 </a:solidFill>
               </a:rPr>
-              <a:t>1</a:t>
-            </a:r>
-          </a:p>
-        </p:txBody>
-      </p:sp>
-      <p:sp>
-        <p:nvSpPr>
-          <p:cNvPr id="7" name="TextBox 6"/>
-          <p:cNvSpPr txBox="1"/>
-          <p:nvPr/>
-        </p:nvSpPr>
-        <p:spPr>
-          <a:xfrm>
-            <a:off x="1517904" y="1920240"/>
-            <a:ext cx="8252459" cy="1252728"/>
-          </a:xfrm>
-          <a:prstGeom prst="rect">
-            <a:avLst/>
-          </a:prstGeom>
-          <a:noFill/>
-        </p:spPr>
-        <p:txBody>
-          <a:bodyPr wrap="square" anchor="t" lIns="0" rIns="0" tIns="54864" bIns="54864">
-            <a:spAutoFit/>
-          </a:bodyPr>
-          <a:lstStyle/>
-          <a:p>
-            <a:pPr algn="l">
-              <a:spcAft>
-                <a:spcPts val="600"/>
-              </a:spcAft>
-            </a:pPr>
-            <a:r>
-              <a:rPr sz="1900" b="1">
-                <a:solidFill>
-                  <a:srgbClr val="0B3D7A"/>
-                </a:solidFill>
-              </a:rPr>
-              <a:t>Author on Origin_DEV</a:t>
-            </a:r>
-          </a:p>
-          <a:p>
-            <a:pPr algn="l">
-              <a:spcAft>
-                <a:spcPts val="600"/>
-              </a:spcAft>
-            </a:pPr>
-            <a:r>
-              <a:rPr sz="1500" b="0">
-                <a:solidFill>
-                  <a:srgbClr val="4C5D69"/>
-                </a:solidFill>
-              </a:rPr>
-              <a:t>Every domain, Ad Hoc view, report and dashboard is built in the Workstreams tree on the internal server: the only place anything is edited by hand.</a:t>
-            </a:r>
-          </a:p>
-        </p:txBody>
-      </p:sp>
-      <p:sp>
-        <p:nvSpPr>
-          <p:cNvPr id="8" name="Rounded Rectangle 7"/>
+              <a:t>package verifies?</a:t>
+            </a:r>
+          </a:p>
+        </p:txBody>
+      </p:sp>
+      <p:sp>
+        <p:nvSpPr>
+          <p:cNvPr id="19" name="Rounded Rectangle 18"/>
           <p:cNvSpPr/>
           <p:nvPr/>
         </p:nvSpPr>
         <p:spPr>
           <a:xfrm>
-            <a:off x="740664" y="3493008"/>
-            <a:ext cx="9212580" cy="1435607"/>
+            <a:off x="5641848" y="2514600"/>
+            <a:ext cx="4114800" cy="777240"/>
           </a:xfrm>
           <a:prstGeom prst="roundRect">
             <a:avLst>
-              <a:gd name="adj" fmla="val 8000"/>
+              <a:gd name="adj" fmla="val 10000"/>
             </a:avLst>
           </a:prstGeom>
           <a:solidFill>
@@ -7979,25 +8594,198 @@
           </a:fontRef>
         </p:style>
         <p:txBody>
-          <a:bodyPr rtlCol="0" anchor="ctr"/>
+          <a:bodyPr rtlCol="0" anchor="ctr" wrap="square" lIns="109728" rIns="109728" tIns="54864" bIns="54864"/>
           <a:lstStyle/>
           <a:p>
-            <a:pPr algn="ctr"/>
-          </a:p>
-        </p:txBody>
-      </p:sp>
-      <p:sp>
-        <p:nvSpPr>
-          <p:cNvPr id="9" name="Oval 8"/>
+            <a:pPr algn="l">
+              <a:spcAft>
+                <a:spcPts val="600"/>
+              </a:spcAft>
+            </a:pPr>
+            <a:r>
+              <a:rPr sz="1400" b="1">
+                <a:solidFill>
+                  <a:srgbClr val="0B3D7A"/>
+                </a:solidFill>
+              </a:rPr>
+              <a:t>Import, update in place</a:t>
+            </a:r>
+          </a:p>
+          <a:p>
+            <a:pPr algn="l">
+              <a:spcAft>
+                <a:spcPts val="600"/>
+              </a:spcAft>
+            </a:pPr>
+            <a:r>
+              <a:rPr sz="1100" b="0">
+                <a:solidFill>
+                  <a:srgbClr val="4C5D69"/>
+                </a:solidFill>
+              </a:rPr>
+              <a:t>polled; an importer warning counts as a failure</a:t>
+            </a:r>
+          </a:p>
+        </p:txBody>
+      </p:sp>
+      <p:sp>
+        <p:nvSpPr>
+          <p:cNvPr id="20" name="Rounded Rectangle 19"/>
           <p:cNvSpPr/>
           <p:nvPr/>
         </p:nvSpPr>
         <p:spPr>
           <a:xfrm>
-            <a:off x="941832" y="3694176"/>
-            <a:ext cx="457200" cy="457200"/>
-          </a:xfrm>
-          <a:prstGeom prst="ellipse">
+            <a:off x="5641848" y="3429000"/>
+            <a:ext cx="4114800" cy="777240"/>
+          </a:xfrm>
+          <a:prstGeom prst="roundRect">
+            <a:avLst>
+              <a:gd name="adj" fmla="val 10000"/>
+            </a:avLst>
+          </a:prstGeom>
+          <a:solidFill>
+            <a:srgbClr val="F5EFE9"/>
+          </a:solidFill>
+          <a:ln>
+            <a:noFill/>
+          </a:ln>
+          <a:effectLst/>
+        </p:spPr>
+        <p:style>
+          <a:lnRef idx="1">
+            <a:schemeClr val="accent1"/>
+          </a:lnRef>
+          <a:fillRef idx="3">
+            <a:schemeClr val="accent1"/>
+          </a:fillRef>
+          <a:effectRef idx="2">
+            <a:schemeClr val="accent1"/>
+          </a:effectRef>
+          <a:fontRef idx="minor">
+            <a:schemeClr val="lt1"/>
+          </a:fontRef>
+        </p:style>
+        <p:txBody>
+          <a:bodyPr rtlCol="0" anchor="ctr" wrap="square" lIns="109728" rIns="109728" tIns="54864" bIns="54864"/>
+          <a:lstStyle/>
+          <a:p>
+            <a:pPr algn="l">
+              <a:spcAft>
+                <a:spcPts val="600"/>
+              </a:spcAft>
+            </a:pPr>
+            <a:r>
+              <a:rPr sz="1400" b="1">
+                <a:solidFill>
+                  <a:srgbClr val="0B3D7A"/>
+                </a:solidFill>
+              </a:rPr>
+              <a:t>Re-export and compare</a:t>
+            </a:r>
+          </a:p>
+          <a:p>
+            <a:pPr algn="l">
+              <a:spcAft>
+                <a:spcPts val="600"/>
+              </a:spcAft>
+            </a:pPr>
+            <a:r>
+              <a:rPr sz="1100" b="0">
+                <a:solidFill>
+                  <a:srgbClr val="4C5D69"/>
+                </a:solidFill>
+              </a:rPr>
+              <a:t>byte-equal inside the scope, importer stamps ignored</a:t>
+            </a:r>
+          </a:p>
+        </p:txBody>
+      </p:sp>
+      <p:sp>
+        <p:nvSpPr>
+          <p:cNvPr id="21" name="Rounded Rectangle 20"/>
+          <p:cNvSpPr/>
+          <p:nvPr/>
+        </p:nvSpPr>
+        <p:spPr>
+          <a:xfrm>
+            <a:off x="5641848" y="4343400"/>
+            <a:ext cx="4114800" cy="868680"/>
+          </a:xfrm>
+          <a:prstGeom prst="roundRect">
+            <a:avLst>
+              <a:gd name="adj" fmla="val 10000"/>
+            </a:avLst>
+          </a:prstGeom>
+          <a:solidFill>
+            <a:srgbClr val="F5EFE9"/>
+          </a:solidFill>
+          <a:ln>
+            <a:noFill/>
+          </a:ln>
+          <a:effectLst/>
+        </p:spPr>
+        <p:style>
+          <a:lnRef idx="1">
+            <a:schemeClr val="accent1"/>
+          </a:lnRef>
+          <a:fillRef idx="3">
+            <a:schemeClr val="accent1"/>
+          </a:fillRef>
+          <a:effectRef idx="2">
+            <a:schemeClr val="accent1"/>
+          </a:effectRef>
+          <a:fontRef idx="minor">
+            <a:schemeClr val="lt1"/>
+          </a:fontRef>
+        </p:style>
+        <p:txBody>
+          <a:bodyPr rtlCol="0" anchor="ctr" wrap="square" lIns="109728" rIns="109728" tIns="54864" bIns="54864"/>
+          <a:lstStyle/>
+          <a:p>
+            <a:pPr algn="l">
+              <a:spcAft>
+                <a:spcPts val="600"/>
+              </a:spcAft>
+            </a:pPr>
+            <a:r>
+              <a:rPr sz="1400" b="1">
+                <a:solidFill>
+                  <a:srgbClr val="0B3D7A"/>
+                </a:solidFill>
+              </a:rPr>
+              <a:t>Execute everything</a:t>
+            </a:r>
+          </a:p>
+          <a:p>
+            <a:pPr algn="l">
+              <a:spcAft>
+                <a:spcPts val="600"/>
+              </a:spcAft>
+            </a:pPr>
+            <a:r>
+              <a:rPr sz="1100" b="0">
+                <a:solidFill>
+                  <a:srgbClr val="4C5D69"/>
+                </a:solidFill>
+              </a:rPr>
+              <a:t>views by query, reports as PDF, domains by metadata and probe</a:t>
+            </a:r>
+          </a:p>
+        </p:txBody>
+      </p:sp>
+      <p:sp>
+        <p:nvSpPr>
+          <p:cNvPr id="22" name="Diamond 21"/>
+          <p:cNvSpPr/>
+          <p:nvPr/>
+        </p:nvSpPr>
+        <p:spPr>
+          <a:xfrm>
+            <a:off x="6922008" y="5394960"/>
+            <a:ext cx="1554480" cy="822960"/>
+          </a:xfrm>
+          <a:prstGeom prst="diamond">
             <a:avLst/>
           </a:prstGeom>
           <a:solidFill>
@@ -8023,7 +8811,7 @@
           </a:fontRef>
         </p:style>
         <p:txBody>
-          <a:bodyPr rtlCol="0" anchor="ctr" wrap="square" lIns="0" rIns="0" tIns="54864" bIns="54864"/>
+          <a:bodyPr rtlCol="0" anchor="ctr" wrap="square" lIns="18288" rIns="18288" tIns="54864" bIns="54864"/>
           <a:lstStyle/>
           <a:p>
             <a:pPr algn="ctr">
@@ -8032,83 +8820,30 @@
               </a:spcAft>
             </a:pPr>
             <a:r>
-              <a:rPr sz="1500" b="1">
+              <a:rPr sz="1100" b="1">
                 <a:solidFill>
                   <a:srgbClr val="0B3D7A"/>
                 </a:solidFill>
               </a:rPr>
-              <a:t>2</a:t>
-            </a:r>
-          </a:p>
-        </p:txBody>
-      </p:sp>
-      <p:sp>
-        <p:nvSpPr>
-          <p:cNvPr id="10" name="TextBox 9"/>
-          <p:cNvSpPr txBox="1"/>
-          <p:nvPr/>
-        </p:nvSpPr>
-        <p:spPr>
-          <a:xfrm>
-            <a:off x="1517904" y="3584448"/>
-            <a:ext cx="8252459" cy="1252728"/>
-          </a:xfrm>
-          <a:prstGeom prst="rect">
-            <a:avLst/>
-          </a:prstGeom>
-          <a:noFill/>
-        </p:spPr>
-        <p:txBody>
-          <a:bodyPr wrap="square" anchor="t" lIns="0" rIns="0" tIns="54864" bIns="54864">
-            <a:spAutoFit/>
-          </a:bodyPr>
-          <a:lstStyle/>
-          <a:p>
-            <a:pPr algn="l">
-              <a:spcAft>
-                <a:spcPts val="600"/>
-              </a:spcAft>
-            </a:pPr>
-            <a:r>
-              <a:rPr sz="1900" b="1">
-                <a:solidFill>
-                  <a:srgbClr val="0B3D7A"/>
-                </a:solidFill>
-              </a:rPr>
-              <a:t>Inventory and classify the export</a:t>
-            </a:r>
-          </a:p>
-          <a:p>
-            <a:pPr algn="l">
-              <a:spcAft>
-                <a:spcPts val="600"/>
-              </a:spcAft>
-            </a:pPr>
-            <a:r>
-              <a:rPr sz="1500" b="0">
-                <a:solidFill>
-                  <a:srgbClr val="4C5D69"/>
-                </a:solidFill>
-              </a:rPr>
-              <a:t>The org export is scanned for domains, Ad Hoc views, report units, dashboards and the datasource. Matching uses the business-facing labels, never the generic internal ids.</a:t>
-            </a:r>
-          </a:p>
-        </p:txBody>
-      </p:sp>
-      <p:sp>
-        <p:nvSpPr>
-          <p:cNvPr id="11" name="Rounded Rectangle 10"/>
+              <a:t>seven proofs pass?</a:t>
+            </a:r>
+          </a:p>
+        </p:txBody>
+      </p:sp>
+      <p:sp>
+        <p:nvSpPr>
+          <p:cNvPr id="23" name="Rounded Rectangle 22"/>
           <p:cNvSpPr/>
           <p:nvPr/>
         </p:nvSpPr>
         <p:spPr>
           <a:xfrm>
-            <a:off x="740664" y="5157216"/>
-            <a:ext cx="9212580" cy="1435607"/>
+            <a:off x="5641848" y="6400800"/>
+            <a:ext cx="4114800" cy="777240"/>
           </a:xfrm>
           <a:prstGeom prst="roundRect">
             <a:avLst>
-              <a:gd name="adj" fmla="val 8000"/>
+              <a:gd name="adj" fmla="val 10000"/>
             </a:avLst>
           </a:prstGeom>
           <a:solidFill>
@@ -8134,25 +8869,198 @@
           </a:fontRef>
         </p:style>
         <p:txBody>
-          <a:bodyPr rtlCol="0" anchor="ctr"/>
+          <a:bodyPr rtlCol="0" anchor="ctr" wrap="square" lIns="109728" rIns="109728" tIns="54864" bIns="54864"/>
           <a:lstStyle/>
           <a:p>
-            <a:pPr algn="ctr"/>
-          </a:p>
-        </p:txBody>
-      </p:sp>
-      <p:sp>
-        <p:nvSpPr>
-          <p:cNvPr id="12" name="Oval 11"/>
+            <a:pPr algn="ctr">
+              <a:spcAft>
+                <a:spcPts val="600"/>
+              </a:spcAft>
+            </a:pPr>
+            <a:r>
+              <a:rPr sz="1400" b="1">
+                <a:solidFill>
+                  <a:srgbClr val="0B3D7A"/>
+                </a:solidFill>
+              </a:rPr>
+              <a:t>Proven offering</a:t>
+            </a:r>
+          </a:p>
+          <a:p>
+            <a:pPr algn="ctr">
+              <a:spcAft>
+                <a:spcPts val="600"/>
+              </a:spcAft>
+            </a:pPr>
+            <a:r>
+              <a:rPr sz="1100" b="0">
+                <a:solidFill>
+                  <a:srgbClr val="4C5D69"/>
+                </a:solidFill>
+              </a:rPr>
+              <a:t>the package every client promotion starts from</a:t>
+            </a:r>
+          </a:p>
+        </p:txBody>
+      </p:sp>
+      <p:sp>
+        <p:nvSpPr>
+          <p:cNvPr id="24" name="Rounded Rectangle 23"/>
           <p:cNvSpPr/>
           <p:nvPr/>
         </p:nvSpPr>
         <p:spPr>
           <a:xfrm>
-            <a:off x="941832" y="5358383"/>
-            <a:ext cx="457200" cy="457200"/>
-          </a:xfrm>
-          <a:prstGeom prst="ellipse">
+            <a:off x="10378440" y="2514600"/>
+            <a:ext cx="4114800" cy="731520"/>
+          </a:xfrm>
+          <a:prstGeom prst="roundRect">
+            <a:avLst>
+              <a:gd name="adj" fmla="val 10000"/>
+            </a:avLst>
+          </a:prstGeom>
+          <a:solidFill>
+            <a:srgbClr val="F5EFE9"/>
+          </a:solidFill>
+          <a:ln>
+            <a:noFill/>
+          </a:ln>
+          <a:effectLst/>
+        </p:spPr>
+        <p:style>
+          <a:lnRef idx="1">
+            <a:schemeClr val="accent1"/>
+          </a:lnRef>
+          <a:fillRef idx="3">
+            <a:schemeClr val="accent1"/>
+          </a:fillRef>
+          <a:effectRef idx="2">
+            <a:schemeClr val="accent1"/>
+          </a:effectRef>
+          <a:fontRef idx="minor">
+            <a:schemeClr val="lt1"/>
+          </a:fontRef>
+        </p:style>
+        <p:txBody>
+          <a:bodyPr rtlCol="0" anchor="ctr" wrap="square" lIns="109728" rIns="109728" tIns="54864" bIns="54864"/>
+          <a:lstStyle/>
+          <a:p>
+            <a:pPr algn="l">
+              <a:spcAft>
+                <a:spcPts val="600"/>
+              </a:spcAft>
+            </a:pPr>
+            <a:r>
+              <a:rPr sz="1400" b="1">
+                <a:solidFill>
+                  <a:srgbClr val="0B3D7A"/>
+                </a:solidFill>
+              </a:rPr>
+              <a:t>Inventory snapshot</a:t>
+            </a:r>
+          </a:p>
+          <a:p>
+            <a:pPr algn="l">
+              <a:spcAft>
+                <a:spcPts val="600"/>
+              </a:spcAft>
+            </a:pPr>
+            <a:r>
+              <a:rPr sz="1100" b="0">
+                <a:solidFill>
+                  <a:srgbClr val="4C5D69"/>
+                </a:solidFill>
+              </a:rPr>
+              <a:t>every resource on the org before anything changes</a:t>
+            </a:r>
+          </a:p>
+        </p:txBody>
+      </p:sp>
+      <p:sp>
+        <p:nvSpPr>
+          <p:cNvPr id="25" name="Rounded Rectangle 24"/>
+          <p:cNvSpPr/>
+          <p:nvPr/>
+        </p:nvSpPr>
+        <p:spPr>
+          <a:xfrm>
+            <a:off x="10378440" y="3383280"/>
+            <a:ext cx="4114800" cy="1097280"/>
+          </a:xfrm>
+          <a:prstGeom prst="roundRect">
+            <a:avLst>
+              <a:gd name="adj" fmla="val 10000"/>
+            </a:avLst>
+          </a:prstGeom>
+          <a:solidFill>
+            <a:srgbClr val="F5EFE9"/>
+          </a:solidFill>
+          <a:ln>
+            <a:noFill/>
+          </a:ln>
+          <a:effectLst/>
+        </p:spPr>
+        <p:style>
+          <a:lnRef idx="1">
+            <a:schemeClr val="accent1"/>
+          </a:lnRef>
+          <a:fillRef idx="3">
+            <a:schemeClr val="accent1"/>
+          </a:fillRef>
+          <a:effectRef idx="2">
+            <a:schemeClr val="accent1"/>
+          </a:effectRef>
+          <a:fontRef idx="minor">
+            <a:schemeClr val="lt1"/>
+          </a:fontRef>
+        </p:style>
+        <p:txBody>
+          <a:bodyPr rtlCol="0" anchor="ctr" wrap="square" lIns="109728" rIns="109728" tIns="54864" bIns="54864"/>
+          <a:lstStyle/>
+          <a:p>
+            <a:pPr algn="l">
+              <a:spcAft>
+                <a:spcPts val="600"/>
+              </a:spcAft>
+            </a:pPr>
+            <a:r>
+              <a:rPr sz="1400" b="1">
+                <a:solidFill>
+                  <a:srgbClr val="0B3D7A"/>
+                </a:solidFill>
+              </a:rPr>
+              <a:t>Rebuild for the client</a:t>
+            </a:r>
+          </a:p>
+          <a:p>
+            <a:pPr algn="l">
+              <a:spcAft>
+                <a:spcPts val="600"/>
+              </a:spcAft>
+            </a:pPr>
+            <a:r>
+              <a:rPr sz="1100" b="0">
+                <a:solidFill>
+                  <a:srgbClr val="4C5D69"/>
+                </a:solidFill>
+              </a:rPr>
+              <a:t>the client's own datasource export carried byte for byte; org path, folder, alias and tenant root rewritten</a:t>
+            </a:r>
+          </a:p>
+        </p:txBody>
+      </p:sp>
+      <p:sp>
+        <p:nvSpPr>
+          <p:cNvPr id="26" name="Diamond 25"/>
+          <p:cNvSpPr/>
+          <p:nvPr/>
+        </p:nvSpPr>
+        <p:spPr>
+          <a:xfrm>
+            <a:off x="11247119" y="4617720"/>
+            <a:ext cx="2377440" cy="960120"/>
+          </a:xfrm>
+          <a:prstGeom prst="diamond">
             <a:avLst/>
           </a:prstGeom>
           <a:solidFill>
@@ -8178,7 +9086,7 @@
           </a:fontRef>
         </p:style>
         <p:txBody>
-          <a:bodyPr rtlCol="0" anchor="ctr" wrap="square" lIns="0" rIns="0" tIns="54864" bIns="54864"/>
+          <a:bodyPr rtlCol="0" anchor="ctr" wrap="square" lIns="18288" rIns="18288" tIns="54864" bIns="54864"/>
           <a:lstStyle/>
           <a:p>
             <a:pPr algn="ctr">
@@ -8187,83 +9095,30 @@
               </a:spcAft>
             </a:pPr>
             <a:r>
-              <a:rPr sz="1500" b="1">
+              <a:rPr sz="1000" b="1">
                 <a:solidFill>
                   <a:srgbClr val="0B3D7A"/>
                 </a:solidFill>
               </a:rPr>
-              <a:t>3</a:t>
-            </a:r>
-          </a:p>
-        </p:txBody>
-      </p:sp>
-      <p:sp>
-        <p:nvSpPr>
-          <p:cNvPr id="13" name="TextBox 12"/>
-          <p:cNvSpPr txBox="1"/>
-          <p:nvPr/>
-        </p:nvSpPr>
-        <p:spPr>
-          <a:xfrm>
-            <a:off x="1517904" y="5248655"/>
-            <a:ext cx="8252459" cy="1252728"/>
-          </a:xfrm>
-          <a:prstGeom prst="rect">
-            <a:avLst/>
-          </a:prstGeom>
-          <a:noFill/>
-        </p:spPr>
-        <p:txBody>
-          <a:bodyPr wrap="square" anchor="t" lIns="0" rIns="0" tIns="54864" bIns="54864">
-            <a:spAutoFit/>
-          </a:bodyPr>
-          <a:lstStyle/>
-          <a:p>
-            <a:pPr algn="l">
-              <a:spcAft>
-                <a:spcPts val="600"/>
-              </a:spcAft>
-            </a:pPr>
-            <a:r>
-              <a:rPr sz="1900" b="1">
-                <a:solidFill>
-                  <a:srgbClr val="0B3D7A"/>
-                </a:solidFill>
-              </a:rPr>
-              <a:t>Select the offering</a:t>
-            </a:r>
-          </a:p>
-          <a:p>
-            <a:pPr algn="l">
-              <a:spcAft>
-                <a:spcPts val="600"/>
-              </a:spcAft>
-            </a:pPr>
-            <a:r>
-              <a:rPr sz="1500" b="0">
-                <a:solidFill>
-                  <a:srgbClr val="4C5D69"/>
-                </a:solidFill>
-              </a:rPr>
-              <a:t>Only the Standard Offering list is kept, remapped into nine workstream folders by business process. The Workstreams tree is left untouched: a curated copy, not a move.</a:t>
-            </a:r>
-          </a:p>
-        </p:txBody>
-      </p:sp>
-      <p:sp>
-        <p:nvSpPr>
-          <p:cNvPr id="14" name="Rounded Rectangle 13"/>
+              <a:t>verified? no source strings, references exist, fields resolve</a:t>
+            </a:r>
+          </a:p>
+        </p:txBody>
+      </p:sp>
+      <p:sp>
+        <p:nvSpPr>
+          <p:cNvPr id="27" name="Rounded Rectangle 26"/>
           <p:cNvSpPr/>
           <p:nvPr/>
         </p:nvSpPr>
         <p:spPr>
           <a:xfrm>
-            <a:off x="740664" y="6821423"/>
-            <a:ext cx="9212580" cy="1435607"/>
+            <a:off x="10378440" y="5715000"/>
+            <a:ext cx="4114800" cy="731520"/>
           </a:xfrm>
           <a:prstGeom prst="roundRect">
             <a:avLst>
-              <a:gd name="adj" fmla="val 8000"/>
+              <a:gd name="adj" fmla="val 10000"/>
             </a:avLst>
           </a:prstGeom>
           <a:solidFill>
@@ -8289,26 +9144,128 @@
           </a:fontRef>
         </p:style>
         <p:txBody>
-          <a:bodyPr rtlCol="0" anchor="ctr"/>
+          <a:bodyPr rtlCol="0" anchor="ctr" wrap="square" lIns="109728" rIns="109728" tIns="54864" bIns="54864"/>
           <a:lstStyle/>
           <a:p>
-            <a:pPr algn="ctr"/>
-          </a:p>
-        </p:txBody>
-      </p:sp>
-      <p:sp>
-        <p:nvSpPr>
-          <p:cNvPr id="15" name="Oval 14"/>
+            <a:pPr algn="l">
+              <a:spcAft>
+                <a:spcPts val="600"/>
+              </a:spcAft>
+            </a:pPr>
+            <a:r>
+              <a:rPr sz="1400" b="1">
+                <a:solidFill>
+                  <a:srgbClr val="0B3D7A"/>
+                </a:solidFill>
+              </a:rPr>
+              <a:t>Import, compare, execute</a:t>
+            </a:r>
+          </a:p>
+          <a:p>
+            <a:pPr algn="l">
+              <a:spcAft>
+                <a:spcPts val="600"/>
+              </a:spcAft>
+            </a:pPr>
+            <a:r>
+              <a:rPr sz="1100" b="0">
+                <a:solidFill>
+                  <a:srgbClr val="4C5D69"/>
+                </a:solidFill>
+              </a:rPr>
+              <a:t>the same three proofs as Origin_TEST</a:t>
+            </a:r>
+          </a:p>
+        </p:txBody>
+      </p:sp>
+      <p:sp>
+        <p:nvSpPr>
+          <p:cNvPr id="28" name="Rounded Rectangle 27"/>
           <p:cNvSpPr/>
           <p:nvPr/>
         </p:nvSpPr>
         <p:spPr>
           <a:xfrm>
-            <a:off x="941832" y="7022591"/>
-            <a:ext cx="457200" cy="457200"/>
-          </a:xfrm>
-          <a:prstGeom prst="ellipse">
-            <a:avLst/>
+            <a:off x="10378440" y="6583680"/>
+            <a:ext cx="4114800" cy="914400"/>
+          </a:xfrm>
+          <a:prstGeom prst="roundRect">
+            <a:avLst>
+              <a:gd name="adj" fmla="val 10000"/>
+            </a:avLst>
+          </a:prstGeom>
+          <a:solidFill>
+            <a:srgbClr val="F5EFE9"/>
+          </a:solidFill>
+          <a:ln>
+            <a:noFill/>
+          </a:ln>
+          <a:effectLst/>
+        </p:spPr>
+        <p:style>
+          <a:lnRef idx="1">
+            <a:schemeClr val="accent1"/>
+          </a:lnRef>
+          <a:fillRef idx="3">
+            <a:schemeClr val="accent1"/>
+          </a:fillRef>
+          <a:effectRef idx="2">
+            <a:schemeClr val="accent1"/>
+          </a:effectRef>
+          <a:fontRef idx="minor">
+            <a:schemeClr val="lt1"/>
+          </a:fontRef>
+        </p:style>
+        <p:txBody>
+          <a:bodyPr rtlCol="0" anchor="ctr" wrap="square" lIns="109728" rIns="109728" tIns="54864" bIns="54864"/>
+          <a:lstStyle/>
+          <a:p>
+            <a:pPr algn="l">
+              <a:spcAft>
+                <a:spcPts val="600"/>
+              </a:spcAft>
+            </a:pPr>
+            <a:r>
+              <a:rPr sz="1400" b="1">
+                <a:solidFill>
+                  <a:srgbClr val="0B3D7A"/>
+                </a:solidFill>
+              </a:rPr>
+              <a:t>Sweep and sign off</a:t>
+            </a:r>
+          </a:p>
+          <a:p>
+            <a:pPr algn="l">
+              <a:spcAft>
+                <a:spcPts val="600"/>
+              </a:spcAft>
+            </a:pPr>
+            <a:r>
+              <a:rPr sz="1100" b="0">
+                <a:solidFill>
+                  <a:srgbClr val="4C5D69"/>
+                </a:solidFill>
+              </a:rPr>
+              <a:t>PASS, EMPTY, SLOW or FAIL per resource with timing; one document per org</a:t>
+            </a:r>
+          </a:p>
+        </p:txBody>
+      </p:sp>
+      <p:sp>
+        <p:nvSpPr>
+          <p:cNvPr id="29" name="Rounded Rectangle 28"/>
+          <p:cNvSpPr/>
+          <p:nvPr/>
+        </p:nvSpPr>
+        <p:spPr>
+          <a:xfrm>
+            <a:off x="15115032" y="2514600"/>
+            <a:ext cx="4114800" cy="457200"/>
+          </a:xfrm>
+          <a:prstGeom prst="roundRect">
+            <a:avLst>
+              <a:gd name="adj" fmla="val 50000"/>
+            </a:avLst>
           </a:prstGeom>
           <a:solidFill>
             <a:srgbClr val="FFA418"/>
@@ -8333,7 +9290,7 @@
           </a:fontRef>
         </p:style>
         <p:txBody>
-          <a:bodyPr rtlCol="0" anchor="ctr" wrap="square" lIns="0" rIns="0" tIns="54864" bIns="54864"/>
+          <a:bodyPr rtlCol="0" anchor="ctr" wrap="square" lIns="73152" rIns="73152" tIns="54864" bIns="54864"/>
           <a:lstStyle/>
           <a:p>
             <a:pPr algn="ctr">
@@ -8342,83 +9299,30 @@
               </a:spcAft>
             </a:pPr>
             <a:r>
-              <a:rPr sz="1500" b="1">
+              <a:rPr sz="1200" b="1">
                 <a:solidFill>
                   <a:srgbClr val="0B3D7A"/>
                 </a:solidFill>
               </a:rPr>
-              <a:t>4</a:t>
-            </a:r>
-          </a:p>
-        </p:txBody>
-      </p:sp>
-      <p:sp>
-        <p:nvSpPr>
-          <p:cNvPr id="16" name="TextBox 15"/>
-          <p:cNvSpPr txBox="1"/>
-          <p:nvPr/>
-        </p:nvSpPr>
-        <p:spPr>
-          <a:xfrm>
-            <a:off x="1517904" y="6912863"/>
-            <a:ext cx="8252459" cy="1252728"/>
-          </a:xfrm>
-          <a:prstGeom prst="rect">
-            <a:avLst/>
-          </a:prstGeom>
-          <a:noFill/>
-        </p:spPr>
-        <p:txBody>
-          <a:bodyPr wrap="square" anchor="t" lIns="0" rIns="0" tIns="54864" bIns="54864">
-            <a:spAutoFit/>
-          </a:bodyPr>
-          <a:lstStyle/>
-          <a:p>
-            <a:pPr algn="l">
-              <a:spcAft>
-                <a:spcPts val="600"/>
-              </a:spcAft>
-            </a:pPr>
-            <a:r>
-              <a:rPr sz="1900" b="1">
-                <a:solidFill>
-                  <a:srgbClr val="0B3D7A"/>
-                </a:solidFill>
-              </a:rPr>
-              <a:t>Carry only what it needs</a:t>
-            </a:r>
-          </a:p>
-          <a:p>
-            <a:pPr algn="l">
-              <a:spcAft>
-                <a:spcPts val="600"/>
-              </a:spcAft>
-            </a:pPr>
-            <a:r>
-              <a:rPr sz="1500" b="0">
-                <a:solidFill>
-                  <a:srgbClr val="4C5D69"/>
-                </a:solidFill>
-              </a:rPr>
-              <a:t>One packaged copy of each domain (53 today) in one business-process home, every report and view reference rewritten to that copy, and the datasource resource carried because the domains reference it.</a:t>
-            </a:r>
-          </a:p>
-        </p:txBody>
-      </p:sp>
-      <p:sp>
-        <p:nvSpPr>
-          <p:cNvPr id="17" name="Rounded Rectangle 16"/>
+              <a:t>explicit prod flag required</a:t>
+            </a:r>
+          </a:p>
+        </p:txBody>
+      </p:sp>
+      <p:sp>
+        <p:nvSpPr>
+          <p:cNvPr id="30" name="Rounded Rectangle 29"/>
           <p:cNvSpPr/>
           <p:nvPr/>
         </p:nvSpPr>
         <p:spPr>
           <a:xfrm>
-            <a:off x="740664" y="8485632"/>
-            <a:ext cx="9212580" cy="1435607"/>
+            <a:off x="15115032" y="3108960"/>
+            <a:ext cx="4114800" cy="685800"/>
           </a:xfrm>
           <a:prstGeom prst="roundRect">
             <a:avLst>
-              <a:gd name="adj" fmla="val 8000"/>
+              <a:gd name="adj" fmla="val 10000"/>
             </a:avLst>
           </a:prstGeom>
           <a:solidFill>
@@ -8444,25 +9348,125 @@
           </a:fontRef>
         </p:style>
         <p:txBody>
-          <a:bodyPr rtlCol="0" anchor="ctr"/>
+          <a:bodyPr rtlCol="0" anchor="ctr" wrap="square" lIns="109728" rIns="109728" tIns="54864" bIns="54864"/>
           <a:lstStyle/>
           <a:p>
-            <a:pPr algn="ctr"/>
-          </a:p>
-        </p:txBody>
-      </p:sp>
-      <p:sp>
-        <p:nvSpPr>
-          <p:cNvPr id="18" name="Oval 17"/>
+            <a:pPr algn="l">
+              <a:spcAft>
+                <a:spcPts val="600"/>
+              </a:spcAft>
+            </a:pPr>
+            <a:r>
+              <a:rPr sz="1400" b="1">
+                <a:solidFill>
+                  <a:srgbClr val="0B3D7A"/>
+                </a:solidFill>
+              </a:rPr>
+              <a:t>Inventory snapshot</a:t>
+            </a:r>
+          </a:p>
+          <a:p>
+            <a:pPr algn="l">
+              <a:spcAft>
+                <a:spcPts val="600"/>
+              </a:spcAft>
+            </a:pPr>
+            <a:r>
+              <a:rPr sz="1100" b="0">
+                <a:solidFill>
+                  <a:srgbClr val="4C5D69"/>
+                </a:solidFill>
+              </a:rPr>
+              <a:t>the rollback baseline</a:t>
+            </a:r>
+          </a:p>
+        </p:txBody>
+      </p:sp>
+      <p:sp>
+        <p:nvSpPr>
+          <p:cNvPr id="31" name="Rounded Rectangle 30"/>
           <p:cNvSpPr/>
           <p:nvPr/>
         </p:nvSpPr>
         <p:spPr>
           <a:xfrm>
-            <a:off x="941832" y="8686800"/>
-            <a:ext cx="457200" cy="457200"/>
-          </a:xfrm>
-          <a:prstGeom prst="ellipse">
+            <a:off x="15115032" y="3931920"/>
+            <a:ext cx="4114800" cy="1005840"/>
+          </a:xfrm>
+          <a:prstGeom prst="roundRect">
+            <a:avLst>
+              <a:gd name="adj" fmla="val 10000"/>
+            </a:avLst>
+          </a:prstGeom>
+          <a:solidFill>
+            <a:srgbClr val="F5EFE9"/>
+          </a:solidFill>
+          <a:ln>
+            <a:noFill/>
+          </a:ln>
+          <a:effectLst/>
+        </p:spPr>
+        <p:style>
+          <a:lnRef idx="1">
+            <a:schemeClr val="accent1"/>
+          </a:lnRef>
+          <a:fillRef idx="3">
+            <a:schemeClr val="accent1"/>
+          </a:fillRef>
+          <a:effectRef idx="2">
+            <a:schemeClr val="accent1"/>
+          </a:effectRef>
+          <a:fontRef idx="minor">
+            <a:schemeClr val="lt1"/>
+          </a:fontRef>
+        </p:style>
+        <p:txBody>
+          <a:bodyPr rtlCol="0" anchor="ctr" wrap="square" lIns="109728" rIns="109728" tIns="54864" bIns="54864"/>
+          <a:lstStyle/>
+          <a:p>
+            <a:pPr algn="l">
+              <a:spcAft>
+                <a:spcPts val="600"/>
+              </a:spcAft>
+            </a:pPr>
+            <a:r>
+              <a:rPr sz="1400" b="1">
+                <a:solidFill>
+                  <a:srgbClr val="0B3D7A"/>
+                </a:solidFill>
+              </a:rPr>
+              <a:t>Same promotion, same proofs</a:t>
+            </a:r>
+          </a:p>
+          <a:p>
+            <a:pPr algn="l">
+              <a:spcAft>
+                <a:spcPts val="600"/>
+              </a:spcAft>
+            </a:pPr>
+            <a:r>
+              <a:rPr sz="1100" b="0">
+                <a:solidFill>
+                  <a:srgbClr val="4C5D69"/>
+                </a:solidFill>
+              </a:rPr>
+              <a:t>target datasource carried; rewritten; verified; imported; compared; executed</a:t>
+            </a:r>
+          </a:p>
+        </p:txBody>
+      </p:sp>
+      <p:sp>
+        <p:nvSpPr>
+          <p:cNvPr id="32" name="Diamond 31"/>
+          <p:cNvSpPr/>
+          <p:nvPr/>
+        </p:nvSpPr>
+        <p:spPr>
+          <a:xfrm>
+            <a:off x="16395192" y="5074920"/>
+            <a:ext cx="1554480" cy="822960"/>
+          </a:xfrm>
+          <a:prstGeom prst="diamond">
             <a:avLst/>
           </a:prstGeom>
           <a:solidFill>
@@ -8488,7 +9492,7 @@
           </a:fontRef>
         </p:style>
         <p:txBody>
-          <a:bodyPr rtlCol="0" anchor="ctr" wrap="square" lIns="0" rIns="0" tIns="54864" bIns="54864"/>
+          <a:bodyPr rtlCol="0" anchor="ctr" wrap="square" lIns="18288" rIns="18288" tIns="54864" bIns="54864"/>
           <a:lstStyle/>
           <a:p>
             <a:pPr algn="ctr">
@@ -8497,83 +9501,30 @@
               </a:spcAft>
             </a:pPr>
             <a:r>
-              <a:rPr sz="1500" b="1">
+              <a:rPr sz="1100" b="1">
                 <a:solidFill>
                   <a:srgbClr val="0B3D7A"/>
                 </a:solidFill>
               </a:rPr>
-              <a:t>5</a:t>
-            </a:r>
-          </a:p>
-        </p:txBody>
-      </p:sp>
-      <p:sp>
-        <p:nvSpPr>
-          <p:cNvPr id="19" name="TextBox 18"/>
-          <p:cNvSpPr txBox="1"/>
-          <p:nvPr/>
-        </p:nvSpPr>
-        <p:spPr>
-          <a:xfrm>
-            <a:off x="1517904" y="8577072"/>
-            <a:ext cx="8252459" cy="1252728"/>
-          </a:xfrm>
-          <a:prstGeom prst="rect">
-            <a:avLst/>
-          </a:prstGeom>
-          <a:noFill/>
-        </p:spPr>
-        <p:txBody>
-          <a:bodyPr wrap="square" anchor="t" lIns="0" rIns="0" tIns="54864" bIns="54864">
-            <a:spAutoFit/>
-          </a:bodyPr>
-          <a:lstStyle/>
-          <a:p>
-            <a:pPr algn="l">
-              <a:spcAft>
-                <a:spcPts val="600"/>
-              </a:spcAft>
-            </a:pPr>
-            <a:r>
-              <a:rPr sz="1900" b="1">
-                <a:solidFill>
-                  <a:srgbClr val="0B3D7A"/>
-                </a:solidFill>
-              </a:rPr>
-              <a:t>Clean the package</a:t>
-            </a:r>
-          </a:p>
-          <a:p>
-            <a:pPr algn="l">
-              <a:spcAft>
-                <a:spcPts val="600"/>
-              </a:spcAft>
-            </a:pPr>
-            <a:r>
-              <a:rPr sz="1500" b="0">
-                <a:solidFill>
-                  <a:srgbClr val="4C5D69"/>
-                </a:solidFill>
-              </a:rPr>
-              <a:t>Print-wrapper reports stripped from saved Ad Hoc views, dashboards tied to public templates left out, folder metadata generated, the import index narrowed to the offering folder plus the datasource.</a:t>
-            </a:r>
-          </a:p>
-        </p:txBody>
-      </p:sp>
-      <p:sp>
-        <p:nvSpPr>
-          <p:cNvPr id="20" name="Rounded Rectangle 19"/>
+              <a:t>seven proofs pass?</a:t>
+            </a:r>
+          </a:p>
+        </p:txBody>
+      </p:sp>
+      <p:sp>
+        <p:nvSpPr>
+          <p:cNvPr id="33" name="Rounded Rectangle 32"/>
           <p:cNvSpPr/>
           <p:nvPr/>
         </p:nvSpPr>
         <p:spPr>
           <a:xfrm>
-            <a:off x="10181844" y="1828800"/>
-            <a:ext cx="9212580" cy="1435607"/>
+            <a:off x="15115032" y="6035040"/>
+            <a:ext cx="4114800" cy="685800"/>
           </a:xfrm>
           <a:prstGeom prst="roundRect">
             <a:avLst>
-              <a:gd name="adj" fmla="val 8000"/>
+              <a:gd name="adj" fmla="val 10000"/>
             </a:avLst>
           </a:prstGeom>
           <a:solidFill>
@@ -8599,89 +9550,7 @@
           </a:fontRef>
         </p:style>
         <p:txBody>
-          <a:bodyPr rtlCol="0" anchor="ctr"/>
-          <a:lstStyle/>
-          <a:p>
-            <a:pPr algn="ctr"/>
-          </a:p>
-        </p:txBody>
-      </p:sp>
-      <p:sp>
-        <p:nvSpPr>
-          <p:cNvPr id="21" name="Oval 20"/>
-          <p:cNvSpPr/>
-          <p:nvPr/>
-        </p:nvSpPr>
-        <p:spPr>
-          <a:xfrm>
-            <a:off x="10383012" y="2029968"/>
-            <a:ext cx="457200" cy="457200"/>
-          </a:xfrm>
-          <a:prstGeom prst="ellipse">
-            <a:avLst/>
-          </a:prstGeom>
-          <a:solidFill>
-            <a:srgbClr val="FFA418"/>
-          </a:solidFill>
-          <a:ln>
-            <a:noFill/>
-          </a:ln>
-          <a:effectLst/>
-        </p:spPr>
-        <p:style>
-          <a:lnRef idx="1">
-            <a:schemeClr val="accent1"/>
-          </a:lnRef>
-          <a:fillRef idx="3">
-            <a:schemeClr val="accent1"/>
-          </a:fillRef>
-          <a:effectRef idx="2">
-            <a:schemeClr val="accent1"/>
-          </a:effectRef>
-          <a:fontRef idx="minor">
-            <a:schemeClr val="lt1"/>
-          </a:fontRef>
-        </p:style>
-        <p:txBody>
-          <a:bodyPr rtlCol="0" anchor="ctr" wrap="square" lIns="0" rIns="0" tIns="54864" bIns="54864"/>
-          <a:lstStyle/>
-          <a:p>
-            <a:pPr algn="ctr">
-              <a:spcAft>
-                <a:spcPts val="600"/>
-              </a:spcAft>
-            </a:pPr>
-            <a:r>
-              <a:rPr sz="1500" b="1">
-                <a:solidFill>
-                  <a:srgbClr val="0B3D7A"/>
-                </a:solidFill>
-              </a:rPr>
-              <a:t>6</a:t>
-            </a:r>
-          </a:p>
-        </p:txBody>
-      </p:sp>
-      <p:sp>
-        <p:nvSpPr>
-          <p:cNvPr id="22" name="TextBox 21"/>
-          <p:cNvSpPr txBox="1"/>
-          <p:nvPr/>
-        </p:nvSpPr>
-        <p:spPr>
-          <a:xfrm>
-            <a:off x="10959084" y="1920240"/>
-            <a:ext cx="8252459" cy="1252728"/>
-          </a:xfrm>
-          <a:prstGeom prst="rect">
-            <a:avLst/>
-          </a:prstGeom>
-          <a:noFill/>
-        </p:spPr>
-        <p:txBody>
-          <a:bodyPr wrap="square" anchor="t" lIns="0" rIns="0" tIns="54864" bIns="54864">
-            <a:spAutoFit/>
-          </a:bodyPr>
+          <a:bodyPr rtlCol="0" anchor="ctr" wrap="square" lIns="109728" rIns="109728" tIns="54864" bIns="54864"/>
           <a:lstStyle/>
           <a:p>
             <a:pPr algn="l">
@@ -8690,12 +9559,12 @@
               </a:spcAft>
             </a:pPr>
             <a:r>
-              <a:rPr sz="1900" b="1">
+              <a:rPr sz="1400" b="1">
                 <a:solidFill>
                   <a:srgbClr val="0B3D7A"/>
                 </a:solidFill>
               </a:rPr>
-              <a:t>Prove on Origin_TEST</a:t>
+              <a:t>Sweep and sign off</a:t>
             </a:r>
           </a:p>
           <a:p>
@@ -8705,30 +9574,30 @@
               </a:spcAft>
             </a:pPr>
             <a:r>
-              <a:rPr sz="1500" b="0">
+              <a:rPr sz="1100" b="0">
                 <a:solidFill>
                   <a:srgbClr val="4C5D69"/>
                 </a:solidFill>
               </a:rPr>
-              <a:t>The first promotion, with the seven proofs: import without warnings, re-export byte-equal inside the scope, every resource executed, datasource connection unchanged.</a:t>
-            </a:r>
-          </a:p>
-        </p:txBody>
-      </p:sp>
-      <p:sp>
-        <p:nvSpPr>
-          <p:cNvPr id="23" name="Rounded Rectangle 22"/>
+              <a:t>on the client's prod numbers</a:t>
+            </a:r>
+          </a:p>
+        </p:txBody>
+      </p:sp>
+      <p:sp>
+        <p:nvSpPr>
+          <p:cNvPr id="34" name="Rounded Rectangle 33"/>
           <p:cNvSpPr/>
           <p:nvPr/>
         </p:nvSpPr>
         <p:spPr>
           <a:xfrm>
-            <a:off x="10181844" y="3493008"/>
-            <a:ext cx="9212580" cy="1435607"/>
+            <a:off x="15115032" y="6858000"/>
+            <a:ext cx="4114800" cy="777240"/>
           </a:xfrm>
           <a:prstGeom prst="roundRect">
             <a:avLst>
-              <a:gd name="adj" fmla="val 8000"/>
+              <a:gd name="adj" fmla="val 10000"/>
             </a:avLst>
           </a:prstGeom>
           <a:solidFill>
@@ -8754,89 +9623,7 @@
           </a:fontRef>
         </p:style>
         <p:txBody>
-          <a:bodyPr rtlCol="0" anchor="ctr"/>
-          <a:lstStyle/>
-          <a:p>
-            <a:pPr algn="ctr"/>
-          </a:p>
-        </p:txBody>
-      </p:sp>
-      <p:sp>
-        <p:nvSpPr>
-          <p:cNvPr id="24" name="Oval 23"/>
-          <p:cNvSpPr/>
-          <p:nvPr/>
-        </p:nvSpPr>
-        <p:spPr>
-          <a:xfrm>
-            <a:off x="10383012" y="3694176"/>
-            <a:ext cx="457200" cy="457200"/>
-          </a:xfrm>
-          <a:prstGeom prst="ellipse">
-            <a:avLst/>
-          </a:prstGeom>
-          <a:solidFill>
-            <a:srgbClr val="FFA418"/>
-          </a:solidFill>
-          <a:ln>
-            <a:noFill/>
-          </a:ln>
-          <a:effectLst/>
-        </p:spPr>
-        <p:style>
-          <a:lnRef idx="1">
-            <a:schemeClr val="accent1"/>
-          </a:lnRef>
-          <a:fillRef idx="3">
-            <a:schemeClr val="accent1"/>
-          </a:fillRef>
-          <a:effectRef idx="2">
-            <a:schemeClr val="accent1"/>
-          </a:effectRef>
-          <a:fontRef idx="minor">
-            <a:schemeClr val="lt1"/>
-          </a:fontRef>
-        </p:style>
-        <p:txBody>
-          <a:bodyPr rtlCol="0" anchor="ctr" wrap="square" lIns="0" rIns="0" tIns="54864" bIns="54864"/>
-          <a:lstStyle/>
-          <a:p>
-            <a:pPr algn="ctr">
-              <a:spcAft>
-                <a:spcPts val="600"/>
-              </a:spcAft>
-            </a:pPr>
-            <a:r>
-              <a:rPr sz="1500" b="1">
-                <a:solidFill>
-                  <a:srgbClr val="0B3D7A"/>
-                </a:solidFill>
-              </a:rPr>
-              <a:t>7</a:t>
-            </a:r>
-          </a:p>
-        </p:txBody>
-      </p:sp>
-      <p:sp>
-        <p:nvSpPr>
-          <p:cNvPr id="25" name="TextBox 24"/>
-          <p:cNvSpPr txBox="1"/>
-          <p:nvPr/>
-        </p:nvSpPr>
-        <p:spPr>
-          <a:xfrm>
-            <a:off x="10959084" y="3584448"/>
-            <a:ext cx="8252459" cy="1252728"/>
-          </a:xfrm>
-          <a:prstGeom prst="rect">
-            <a:avLst/>
-          </a:prstGeom>
-          <a:noFill/>
-        </p:spPr>
-        <p:txBody>
-          <a:bodyPr wrap="square" anchor="t" lIns="0" rIns="0" tIns="54864" bIns="54864">
-            <a:spAutoFit/>
-          </a:bodyPr>
+          <a:bodyPr rtlCol="0" anchor="ctr" wrap="square" lIns="109728" rIns="109728" tIns="54864" bIns="54864"/>
           <a:lstStyle/>
           <a:p>
             <a:pPr algn="l">
@@ -8845,12 +9632,12 @@
               </a:spcAft>
             </a:pPr>
             <a:r>
-              <a:rPr sz="1900" b="1">
+              <a:rPr sz="1400" b="1">
                 <a:solidFill>
                   <a:srgbClr val="0B3D7A"/>
                 </a:solidFill>
               </a:rPr>
-              <a:t>Client test org</a:t>
+              <a:t>Diff after = rollback record</a:t>
             </a:r>
           </a:p>
           <a:p>
@@ -8860,30 +9647,30 @@
               </a:spcAft>
             </a:pPr>
             <a:r>
-              <a:rPr sz="1500" b="0">
+              <a:rPr sz="1100" b="0">
                 <a:solidFill>
                   <a:srgbClr val="4C5D69"/>
                 </a:solidFill>
               </a:rPr>
-              <a:t>The datasource switched to the client's test database by carrying the target's own datasource export byte for byte; org path, folder, alias and tenant root rewritten; verified before import.</a:t>
-            </a:r>
-          </a:p>
-        </p:txBody>
-      </p:sp>
-      <p:sp>
-        <p:nvSpPr>
-          <p:cNvPr id="26" name="Rounded Rectangle 25"/>
+              <a:t>inventory before against after: nothing else moved</a:t>
+            </a:r>
+          </a:p>
+        </p:txBody>
+      </p:sp>
+      <p:sp>
+        <p:nvSpPr>
+          <p:cNvPr id="35" name="Rounded Rectangle 34"/>
           <p:cNvSpPr/>
           <p:nvPr/>
         </p:nvSpPr>
         <p:spPr>
           <a:xfrm>
-            <a:off x="10181844" y="5157216"/>
-            <a:ext cx="9212580" cy="1435607"/>
+            <a:off x="914400" y="8641080"/>
+            <a:ext cx="5852160" cy="1051560"/>
           </a:xfrm>
           <a:prstGeom prst="roundRect">
             <a:avLst>
-              <a:gd name="adj" fmla="val 8000"/>
+              <a:gd name="adj" fmla="val 10000"/>
             </a:avLst>
           </a:prstGeom>
           <a:solidFill>
@@ -8909,89 +9696,7 @@
           </a:fontRef>
         </p:style>
         <p:txBody>
-          <a:bodyPr rtlCol="0" anchor="ctr"/>
-          <a:lstStyle/>
-          <a:p>
-            <a:pPr algn="ctr"/>
-          </a:p>
-        </p:txBody>
-      </p:sp>
-      <p:sp>
-        <p:nvSpPr>
-          <p:cNvPr id="27" name="Oval 26"/>
-          <p:cNvSpPr/>
-          <p:nvPr/>
-        </p:nvSpPr>
-        <p:spPr>
-          <a:xfrm>
-            <a:off x="10383012" y="5358383"/>
-            <a:ext cx="457200" cy="457200"/>
-          </a:xfrm>
-          <a:prstGeom prst="ellipse">
-            <a:avLst/>
-          </a:prstGeom>
-          <a:solidFill>
-            <a:srgbClr val="FFA418"/>
-          </a:solidFill>
-          <a:ln>
-            <a:noFill/>
-          </a:ln>
-          <a:effectLst/>
-        </p:spPr>
-        <p:style>
-          <a:lnRef idx="1">
-            <a:schemeClr val="accent1"/>
-          </a:lnRef>
-          <a:fillRef idx="3">
-            <a:schemeClr val="accent1"/>
-          </a:fillRef>
-          <a:effectRef idx="2">
-            <a:schemeClr val="accent1"/>
-          </a:effectRef>
-          <a:fontRef idx="minor">
-            <a:schemeClr val="lt1"/>
-          </a:fontRef>
-        </p:style>
-        <p:txBody>
-          <a:bodyPr rtlCol="0" anchor="ctr" wrap="square" lIns="0" rIns="0" tIns="54864" bIns="54864"/>
-          <a:lstStyle/>
-          <a:p>
-            <a:pPr algn="ctr">
-              <a:spcAft>
-                <a:spcPts val="600"/>
-              </a:spcAft>
-            </a:pPr>
-            <a:r>
-              <a:rPr sz="1500" b="1">
-                <a:solidFill>
-                  <a:srgbClr val="0B3D7A"/>
-                </a:solidFill>
-              </a:rPr>
-              <a:t>8</a:t>
-            </a:r>
-          </a:p>
-        </p:txBody>
-      </p:sp>
-      <p:sp>
-        <p:nvSpPr>
-          <p:cNvPr id="28" name="TextBox 27"/>
-          <p:cNvSpPr txBox="1"/>
-          <p:nvPr/>
-        </p:nvSpPr>
-        <p:spPr>
-          <a:xfrm>
-            <a:off x="10959084" y="5248655"/>
-            <a:ext cx="8252459" cy="1252728"/>
-          </a:xfrm>
-          <a:prstGeom prst="rect">
-            <a:avLst/>
-          </a:prstGeom>
-          <a:noFill/>
-        </p:spPr>
-        <p:txBody>
-          <a:bodyPr wrap="square" anchor="t" lIns="0" rIns="0" tIns="54864" bIns="54864">
-            <a:spAutoFit/>
-          </a:bodyPr>
+          <a:bodyPr rtlCol="0" anchor="ctr" wrap="square" lIns="109728" rIns="109728" tIns="54864" bIns="54864"/>
           <a:lstStyle/>
           <a:p>
             <a:pPr algn="l">
@@ -9000,12 +9705,12 @@
               </a:spcAft>
             </a:pPr>
             <a:r>
-              <a:rPr sz="1900" b="1">
+              <a:rPr sz="1400" b="1">
                 <a:solidFill>
                   <a:srgbClr val="0B3D7A"/>
                 </a:solidFill>
               </a:rPr>
-              <a:t>Sweep and sign off</a:t>
+              <a:t>Additive-only domain patch</a:t>
             </a:r>
           </a:p>
           <a:p>
@@ -9015,30 +9720,30 @@
               </a:spcAft>
             </a:pPr>
             <a:r>
-              <a:rPr sz="1500" b="0">
+              <a:rPr sz="1100" b="0">
                 <a:solidFill>
                   <a:srgbClr val="4C5D69"/>
                 </a:solidFill>
               </a:rPr>
-              <a:t>Every view queried, every report rendered, every domain probed on the client's own numbers. PASS, EMPTY, SLOW or FAIL per resource with its timing; one sign-off document per org.</a:t>
-            </a:r>
-          </a:p>
-        </p:txBody>
-      </p:sp>
-      <p:sp>
-        <p:nvSpPr>
-          <p:cNvPr id="29" name="Rounded Rectangle 28"/>
+              <a:t>the additions guard refuses any change to what is there; seven proofs per org; one-command restore</a:t>
+            </a:r>
+          </a:p>
+        </p:txBody>
+      </p:sp>
+      <p:sp>
+        <p:nvSpPr>
+          <p:cNvPr id="36" name="Rounded Rectangle 35"/>
           <p:cNvSpPr/>
           <p:nvPr/>
         </p:nvSpPr>
         <p:spPr>
           <a:xfrm>
-            <a:off x="10181844" y="6821423"/>
-            <a:ext cx="9212580" cy="1435607"/>
+            <a:off x="7132320" y="8641080"/>
+            <a:ext cx="5852160" cy="1051560"/>
           </a:xfrm>
           <a:prstGeom prst="roundRect">
             <a:avLst>
-              <a:gd name="adj" fmla="val 8000"/>
+              <a:gd name="adj" fmla="val 10000"/>
             </a:avLst>
           </a:prstGeom>
           <a:solidFill>
@@ -9064,89 +9769,7 @@
           </a:fontRef>
         </p:style>
         <p:txBody>
-          <a:bodyPr rtlCol="0" anchor="ctr"/>
-          <a:lstStyle/>
-          <a:p>
-            <a:pPr algn="ctr"/>
-          </a:p>
-        </p:txBody>
-      </p:sp>
-      <p:sp>
-        <p:nvSpPr>
-          <p:cNvPr id="30" name="Oval 29"/>
-          <p:cNvSpPr/>
-          <p:nvPr/>
-        </p:nvSpPr>
-        <p:spPr>
-          <a:xfrm>
-            <a:off x="10383012" y="7022591"/>
-            <a:ext cx="457200" cy="457200"/>
-          </a:xfrm>
-          <a:prstGeom prst="ellipse">
-            <a:avLst/>
-          </a:prstGeom>
-          <a:solidFill>
-            <a:srgbClr val="FFA418"/>
-          </a:solidFill>
-          <a:ln>
-            <a:noFill/>
-          </a:ln>
-          <a:effectLst/>
-        </p:spPr>
-        <p:style>
-          <a:lnRef idx="1">
-            <a:schemeClr val="accent1"/>
-          </a:lnRef>
-          <a:fillRef idx="3">
-            <a:schemeClr val="accent1"/>
-          </a:fillRef>
-          <a:effectRef idx="2">
-            <a:schemeClr val="accent1"/>
-          </a:effectRef>
-          <a:fontRef idx="minor">
-            <a:schemeClr val="lt1"/>
-          </a:fontRef>
-        </p:style>
-        <p:txBody>
-          <a:bodyPr rtlCol="0" anchor="ctr" wrap="square" lIns="0" rIns="0" tIns="54864" bIns="54864"/>
-          <a:lstStyle/>
-          <a:p>
-            <a:pPr algn="ctr">
-              <a:spcAft>
-                <a:spcPts val="600"/>
-              </a:spcAft>
-            </a:pPr>
-            <a:r>
-              <a:rPr sz="1500" b="1">
-                <a:solidFill>
-                  <a:srgbClr val="0B3D7A"/>
-                </a:solidFill>
-              </a:rPr>
-              <a:t>9</a:t>
-            </a:r>
-          </a:p>
-        </p:txBody>
-      </p:sp>
-      <p:sp>
-        <p:nvSpPr>
-          <p:cNvPr id="31" name="TextBox 30"/>
-          <p:cNvSpPr txBox="1"/>
-          <p:nvPr/>
-        </p:nvSpPr>
-        <p:spPr>
-          <a:xfrm>
-            <a:off x="10959084" y="6912863"/>
-            <a:ext cx="8252459" cy="1252728"/>
-          </a:xfrm>
-          <a:prstGeom prst="rect">
-            <a:avLst/>
-          </a:prstGeom>
-          <a:noFill/>
-        </p:spPr>
-        <p:txBody>
-          <a:bodyPr wrap="square" anchor="t" lIns="0" rIns="0" tIns="54864" bIns="54864">
-            <a:spAutoFit/>
-          </a:bodyPr>
+          <a:bodyPr rtlCol="0" anchor="ctr" wrap="square" lIns="109728" rIns="109728" tIns="54864" bIns="54864"/>
           <a:lstStyle/>
           <a:p>
             <a:pPr algn="l">
@@ -9155,12 +9778,12 @@
               </a:spcAft>
             </a:pPr>
             <a:r>
-              <a:rPr sz="1900" b="1">
+              <a:rPr sz="1400" b="1">
                 <a:solidFill>
                   <a:srgbClr val="0B3D7A"/>
                 </a:solidFill>
               </a:rPr>
-              <a:t>Client prod org</a:t>
+              <a:t>Standardized Reports folder</a:t>
             </a:r>
           </a:p>
           <a:p>
@@ -9170,30 +9793,30 @@
               </a:spcAft>
             </a:pPr>
             <a:r>
-              <a:rPr sz="1500" b="0">
+              <a:rPr sz="1100" b="0">
                 <a:solidFill>
                   <a:srgbClr val="4C5D69"/>
                 </a:solidFill>
               </a:rPr>
-              <a:t>The same tool and the same proofs with an explicit prod flag. A repository inventory snapshot before and a diff after are the rollback record.</a:t>
-            </a:r>
-          </a:p>
-        </p:txBody>
-      </p:sp>
-      <p:sp>
-        <p:nvSpPr>
-          <p:cNvPr id="32" name="Rounded Rectangle 31"/>
+              <a:t>scheduled SQL reports in one place on every org, promoted by the same tool</a:t>
+            </a:r>
+          </a:p>
+        </p:txBody>
+      </p:sp>
+      <p:sp>
+        <p:nvSpPr>
+          <p:cNvPr id="37" name="Rounded Rectangle 36"/>
           <p:cNvSpPr/>
           <p:nvPr/>
         </p:nvSpPr>
         <p:spPr>
           <a:xfrm>
-            <a:off x="10181844" y="8485632"/>
-            <a:ext cx="9212580" cy="1435607"/>
+            <a:off x="13350240" y="8641080"/>
+            <a:ext cx="5852160" cy="1051560"/>
           </a:xfrm>
           <a:prstGeom prst="roundRect">
             <a:avLst>
-              <a:gd name="adj" fmla="val 8000"/>
+              <a:gd name="adj" fmla="val 10000"/>
             </a:avLst>
           </a:prstGeom>
           <a:solidFill>
@@ -9219,89 +9842,7 @@
           </a:fontRef>
         </p:style>
         <p:txBody>
-          <a:bodyPr rtlCol="0" anchor="ctr"/>
-          <a:lstStyle/>
-          <a:p>
-            <a:pPr algn="ctr"/>
-          </a:p>
-        </p:txBody>
-      </p:sp>
-      <p:sp>
-        <p:nvSpPr>
-          <p:cNvPr id="33" name="Oval 32"/>
-          <p:cNvSpPr/>
-          <p:nvPr/>
-        </p:nvSpPr>
-        <p:spPr>
-          <a:xfrm>
-            <a:off x="10383012" y="8686800"/>
-            <a:ext cx="457200" cy="457200"/>
-          </a:xfrm>
-          <a:prstGeom prst="ellipse">
-            <a:avLst/>
-          </a:prstGeom>
-          <a:solidFill>
-            <a:srgbClr val="FFA418"/>
-          </a:solidFill>
-          <a:ln>
-            <a:noFill/>
-          </a:ln>
-          <a:effectLst/>
-        </p:spPr>
-        <p:style>
-          <a:lnRef idx="1">
-            <a:schemeClr val="accent1"/>
-          </a:lnRef>
-          <a:fillRef idx="3">
-            <a:schemeClr val="accent1"/>
-          </a:fillRef>
-          <a:effectRef idx="2">
-            <a:schemeClr val="accent1"/>
-          </a:effectRef>
-          <a:fontRef idx="minor">
-            <a:schemeClr val="lt1"/>
-          </a:fontRef>
-        </p:style>
-        <p:txBody>
-          <a:bodyPr rtlCol="0" anchor="ctr" wrap="square" lIns="0" rIns="0" tIns="54864" bIns="54864"/>
-          <a:lstStyle/>
-          <a:p>
-            <a:pPr algn="ctr">
-              <a:spcAft>
-                <a:spcPts val="600"/>
-              </a:spcAft>
-            </a:pPr>
-            <a:r>
-              <a:rPr sz="1500" b="1">
-                <a:solidFill>
-                  <a:srgbClr val="0B3D7A"/>
-                </a:solidFill>
-              </a:rPr>
-              <a:t>10</a:t>
-            </a:r>
-          </a:p>
-        </p:txBody>
-      </p:sp>
-      <p:sp>
-        <p:nvSpPr>
-          <p:cNvPr id="34" name="TextBox 33"/>
-          <p:cNvSpPr txBox="1"/>
-          <p:nvPr/>
-        </p:nvSpPr>
-        <p:spPr>
-          <a:xfrm>
-            <a:off x="10959084" y="8577072"/>
-            <a:ext cx="8252459" cy="1252728"/>
-          </a:xfrm>
-          <a:prstGeom prst="rect">
-            <a:avLst/>
-          </a:prstGeom>
-          <a:noFill/>
-        </p:spPr>
-        <p:txBody>
-          <a:bodyPr wrap="square" anchor="t" lIns="0" rIns="0" tIns="54864" bIns="54864">
-            <a:spAutoFit/>
-          </a:bodyPr>
+          <a:bodyPr rtlCol="0" anchor="ctr" wrap="square" lIns="109728" rIns="109728" tIns="54864" bIns="54864"/>
           <a:lstStyle/>
           <a:p>
             <a:pPr algn="l">
@@ -9310,12 +9851,12 @@
               </a:spcAft>
             </a:pPr>
             <a:r>
-              <a:rPr sz="1900" b="1">
+              <a:rPr sz="1400" b="1">
                 <a:solidFill>
                   <a:srgbClr val="0B3D7A"/>
                 </a:solidFill>
               </a:rPr>
-              <a:t>Keep it current</a:t>
+              <a:t>Sweep after every change</a:t>
             </a:r>
           </a:p>
           <a:p>
@@ -9325,26 +9866,1026 @@
               </a:spcAft>
             </a:pPr>
             <a:r>
-              <a:rPr sz="1500" b="0">
+              <a:rPr sz="1100" b="0">
                 <a:solidFill>
                   <a:srgbClr val="4C5D69"/>
                 </a:solidFill>
               </a:rPr>
-              <a:t>Additive-only domain patches with seven proofs and a one-command restore, the Standardized Reports folder for scheduled SQL reports, and every change swept and re-signed.</a:t>
-            </a:r>
-          </a:p>
-        </p:txBody>
-      </p:sp>
-      <p:sp>
-        <p:nvSpPr>
-          <p:cNvPr id="35" name="TextBox 34"/>
+              <a:t>the sign-off is regenerated; the first red row is the alert</a:t>
+            </a:r>
+          </a:p>
+        </p:txBody>
+      </p:sp>
+      <p:cxnSp>
+        <p:nvCxnSpPr>
+          <p:cNvPr id="38" name="Connector 37"/>
+          <p:cNvCxnSpPr/>
+          <p:nvPr/>
+        </p:nvCxnSpPr>
+        <p:spPr>
+          <a:xfrm>
+            <a:off x="2962656" y="3429000"/>
+            <a:ext cx="0" cy="137160"/>
+          </a:xfrm>
+          <a:prstGeom prst="line">
+            <a:avLst/>
+          </a:prstGeom>
+          <a:ln w="28575">
+            <a:solidFill>
+              <a:srgbClr val="F5EFE9"/>
+            </a:solidFill>
+            <a:tailEnd type="triangle" w="med" len="med"/>
+          </a:ln>
+        </p:spPr>
+        <p:style>
+          <a:lnRef idx="2">
+            <a:schemeClr val="accent1"/>
+          </a:lnRef>
+          <a:fillRef idx="0">
+            <a:schemeClr val="accent1"/>
+          </a:fillRef>
+          <a:effectRef idx="1">
+            <a:schemeClr val="accent1"/>
+          </a:effectRef>
+          <a:fontRef idx="minor">
+            <a:schemeClr val="tx1"/>
+          </a:fontRef>
+        </p:style>
+      </p:cxnSp>
+      <p:cxnSp>
+        <p:nvCxnSpPr>
+          <p:cNvPr id="39" name="Connector 38"/>
+          <p:cNvCxnSpPr/>
+          <p:nvPr/>
+        </p:nvCxnSpPr>
+        <p:spPr>
+          <a:xfrm>
+            <a:off x="2962656" y="4297680"/>
+            <a:ext cx="0" cy="137160"/>
+          </a:xfrm>
+          <a:prstGeom prst="line">
+            <a:avLst/>
+          </a:prstGeom>
+          <a:ln w="28575">
+            <a:solidFill>
+              <a:srgbClr val="F5EFE9"/>
+            </a:solidFill>
+            <a:tailEnd type="triangle" w="med" len="med"/>
+          </a:ln>
+        </p:spPr>
+        <p:style>
+          <a:lnRef idx="2">
+            <a:schemeClr val="accent1"/>
+          </a:lnRef>
+          <a:fillRef idx="0">
+            <a:schemeClr val="accent1"/>
+          </a:fillRef>
+          <a:effectRef idx="1">
+            <a:schemeClr val="accent1"/>
+          </a:effectRef>
+          <a:fontRef idx="minor">
+            <a:schemeClr val="tx1"/>
+          </a:fontRef>
+        </p:style>
+      </p:cxnSp>
+      <p:cxnSp>
+        <p:nvCxnSpPr>
+          <p:cNvPr id="40" name="Connector 39"/>
+          <p:cNvCxnSpPr/>
+          <p:nvPr/>
+        </p:nvCxnSpPr>
+        <p:spPr>
+          <a:xfrm>
+            <a:off x="2962656" y="5852159"/>
+            <a:ext cx="0" cy="274321"/>
+          </a:xfrm>
+          <a:prstGeom prst="line">
+            <a:avLst/>
+          </a:prstGeom>
+          <a:ln w="28575">
+            <a:solidFill>
+              <a:srgbClr val="F5EFE9"/>
+            </a:solidFill>
+            <a:tailEnd type="triangle" w="med" len="med"/>
+          </a:ln>
+        </p:spPr>
+        <p:style>
+          <a:lnRef idx="2">
+            <a:schemeClr val="accent1"/>
+          </a:lnRef>
+          <a:fillRef idx="0">
+            <a:schemeClr val="accent1"/>
+          </a:fillRef>
+          <a:effectRef idx="1">
+            <a:schemeClr val="accent1"/>
+          </a:effectRef>
+          <a:fontRef idx="minor">
+            <a:schemeClr val="tx1"/>
+          </a:fontRef>
+        </p:style>
+      </p:cxnSp>
+      <p:cxnSp>
+        <p:nvCxnSpPr>
+          <p:cNvPr id="41" name="Connector 40"/>
+          <p:cNvCxnSpPr/>
+          <p:nvPr/>
+        </p:nvCxnSpPr>
+        <p:spPr>
+          <a:xfrm>
+            <a:off x="3739896" y="6537960"/>
+            <a:ext cx="1591056" cy="0"/>
+          </a:xfrm>
+          <a:prstGeom prst="line">
+            <a:avLst/>
+          </a:prstGeom>
+          <a:ln w="28575">
+            <a:solidFill>
+              <a:srgbClr val="F5EFE9"/>
+            </a:solidFill>
+          </a:ln>
+        </p:spPr>
+        <p:style>
+          <a:lnRef idx="2">
+            <a:schemeClr val="accent1"/>
+          </a:lnRef>
+          <a:fillRef idx="0">
+            <a:schemeClr val="accent1"/>
+          </a:fillRef>
+          <a:effectRef idx="1">
+            <a:schemeClr val="accent1"/>
+          </a:effectRef>
+          <a:fontRef idx="minor">
+            <a:schemeClr val="tx1"/>
+          </a:fontRef>
+        </p:style>
+      </p:cxnSp>
+      <p:cxnSp>
+        <p:nvCxnSpPr>
+          <p:cNvPr id="42" name="Connector 41"/>
+          <p:cNvCxnSpPr/>
+          <p:nvPr/>
+        </p:nvCxnSpPr>
+        <p:spPr>
+          <a:xfrm flipV="1">
+            <a:off x="5330952" y="2898648"/>
+            <a:ext cx="0" cy="3639312"/>
+          </a:xfrm>
+          <a:prstGeom prst="line">
+            <a:avLst/>
+          </a:prstGeom>
+          <a:ln w="28575">
+            <a:solidFill>
+              <a:srgbClr val="F5EFE9"/>
+            </a:solidFill>
+          </a:ln>
+        </p:spPr>
+        <p:style>
+          <a:lnRef idx="2">
+            <a:schemeClr val="accent1"/>
+          </a:lnRef>
+          <a:fillRef idx="0">
+            <a:schemeClr val="accent1"/>
+          </a:fillRef>
+          <a:effectRef idx="1">
+            <a:schemeClr val="accent1"/>
+          </a:effectRef>
+          <a:fontRef idx="minor">
+            <a:schemeClr val="tx1"/>
+          </a:fontRef>
+        </p:style>
+      </p:cxnSp>
+      <p:cxnSp>
+        <p:nvCxnSpPr>
+          <p:cNvPr id="43" name="Connector 42"/>
+          <p:cNvCxnSpPr/>
+          <p:nvPr/>
+        </p:nvCxnSpPr>
+        <p:spPr>
+          <a:xfrm>
+            <a:off x="5330952" y="2898648"/>
+            <a:ext cx="310896" cy="4572"/>
+          </a:xfrm>
+          <a:prstGeom prst="line">
+            <a:avLst/>
+          </a:prstGeom>
+          <a:ln w="28575">
+            <a:solidFill>
+              <a:srgbClr val="F5EFE9"/>
+            </a:solidFill>
+            <a:tailEnd type="triangle" w="med" len="med"/>
+          </a:ln>
+        </p:spPr>
+        <p:style>
+          <a:lnRef idx="2">
+            <a:schemeClr val="accent1"/>
+          </a:lnRef>
+          <a:fillRef idx="0">
+            <a:schemeClr val="accent1"/>
+          </a:fillRef>
+          <a:effectRef idx="1">
+            <a:schemeClr val="accent1"/>
+          </a:effectRef>
+          <a:fontRef idx="minor">
+            <a:schemeClr val="tx1"/>
+          </a:fontRef>
+        </p:style>
+      </p:cxnSp>
+      <p:cxnSp>
+        <p:nvCxnSpPr>
+          <p:cNvPr id="44" name="Connector 43"/>
+          <p:cNvCxnSpPr/>
+          <p:nvPr/>
+        </p:nvCxnSpPr>
+        <p:spPr>
+          <a:xfrm>
+            <a:off x="7699248" y="3291840"/>
+            <a:ext cx="0" cy="137160"/>
+          </a:xfrm>
+          <a:prstGeom prst="line">
+            <a:avLst/>
+          </a:prstGeom>
+          <a:ln w="28575">
+            <a:solidFill>
+              <a:srgbClr val="F5EFE9"/>
+            </a:solidFill>
+            <a:tailEnd type="triangle" w="med" len="med"/>
+          </a:ln>
+        </p:spPr>
+        <p:style>
+          <a:lnRef idx="2">
+            <a:schemeClr val="accent1"/>
+          </a:lnRef>
+          <a:fillRef idx="0">
+            <a:schemeClr val="accent1"/>
+          </a:fillRef>
+          <a:effectRef idx="1">
+            <a:schemeClr val="accent1"/>
+          </a:effectRef>
+          <a:fontRef idx="minor">
+            <a:schemeClr val="tx1"/>
+          </a:fontRef>
+        </p:style>
+      </p:cxnSp>
+      <p:cxnSp>
+        <p:nvCxnSpPr>
+          <p:cNvPr id="45" name="Connector 44"/>
+          <p:cNvCxnSpPr/>
+          <p:nvPr/>
+        </p:nvCxnSpPr>
+        <p:spPr>
+          <a:xfrm>
+            <a:off x="7699248" y="4206240"/>
+            <a:ext cx="0" cy="137160"/>
+          </a:xfrm>
+          <a:prstGeom prst="line">
+            <a:avLst/>
+          </a:prstGeom>
+          <a:ln w="28575">
+            <a:solidFill>
+              <a:srgbClr val="F5EFE9"/>
+            </a:solidFill>
+            <a:tailEnd type="triangle" w="med" len="med"/>
+          </a:ln>
+        </p:spPr>
+        <p:style>
+          <a:lnRef idx="2">
+            <a:schemeClr val="accent1"/>
+          </a:lnRef>
+          <a:fillRef idx="0">
+            <a:schemeClr val="accent1"/>
+          </a:fillRef>
+          <a:effectRef idx="1">
+            <a:schemeClr val="accent1"/>
+          </a:effectRef>
+          <a:fontRef idx="minor">
+            <a:schemeClr val="tx1"/>
+          </a:fontRef>
+        </p:style>
+      </p:cxnSp>
+      <p:cxnSp>
+        <p:nvCxnSpPr>
+          <p:cNvPr id="46" name="Connector 45"/>
+          <p:cNvCxnSpPr/>
+          <p:nvPr/>
+        </p:nvCxnSpPr>
+        <p:spPr>
+          <a:xfrm>
+            <a:off x="7699248" y="5212080"/>
+            <a:ext cx="0" cy="182880"/>
+          </a:xfrm>
+          <a:prstGeom prst="line">
+            <a:avLst/>
+          </a:prstGeom>
+          <a:ln w="28575">
+            <a:solidFill>
+              <a:srgbClr val="F5EFE9"/>
+            </a:solidFill>
+            <a:tailEnd type="triangle" w="med" len="med"/>
+          </a:ln>
+        </p:spPr>
+        <p:style>
+          <a:lnRef idx="2">
+            <a:schemeClr val="accent1"/>
+          </a:lnRef>
+          <a:fillRef idx="0">
+            <a:schemeClr val="accent1"/>
+          </a:fillRef>
+          <a:effectRef idx="1">
+            <a:schemeClr val="accent1"/>
+          </a:effectRef>
+          <a:fontRef idx="minor">
+            <a:schemeClr val="tx1"/>
+          </a:fontRef>
+        </p:style>
+      </p:cxnSp>
+      <p:cxnSp>
+        <p:nvCxnSpPr>
+          <p:cNvPr id="47" name="Connector 46"/>
+          <p:cNvCxnSpPr/>
+          <p:nvPr/>
+        </p:nvCxnSpPr>
+        <p:spPr>
+          <a:xfrm>
+            <a:off x="7699248" y="6217920"/>
+            <a:ext cx="0" cy="182880"/>
+          </a:xfrm>
+          <a:prstGeom prst="line">
+            <a:avLst/>
+          </a:prstGeom>
+          <a:ln w="28575">
+            <a:solidFill>
+              <a:srgbClr val="F5EFE9"/>
+            </a:solidFill>
+            <a:tailEnd type="triangle" w="med" len="med"/>
+          </a:ln>
+        </p:spPr>
+        <p:style>
+          <a:lnRef idx="2">
+            <a:schemeClr val="accent1"/>
+          </a:lnRef>
+          <a:fillRef idx="0">
+            <a:schemeClr val="accent1"/>
+          </a:fillRef>
+          <a:effectRef idx="1">
+            <a:schemeClr val="accent1"/>
+          </a:effectRef>
+          <a:fontRef idx="minor">
+            <a:schemeClr val="tx1"/>
+          </a:fontRef>
+        </p:style>
+      </p:cxnSp>
+      <p:cxnSp>
+        <p:nvCxnSpPr>
+          <p:cNvPr id="48" name="Connector 47"/>
+          <p:cNvCxnSpPr/>
+          <p:nvPr/>
+        </p:nvCxnSpPr>
+        <p:spPr>
+          <a:xfrm flipV="1">
+            <a:off x="9756648" y="6784848"/>
+            <a:ext cx="310896" cy="4572"/>
+          </a:xfrm>
+          <a:prstGeom prst="line">
+            <a:avLst/>
+          </a:prstGeom>
+          <a:ln w="28575">
+            <a:solidFill>
+              <a:srgbClr val="F5EFE9"/>
+            </a:solidFill>
+          </a:ln>
+        </p:spPr>
+        <p:style>
+          <a:lnRef idx="2">
+            <a:schemeClr val="accent1"/>
+          </a:lnRef>
+          <a:fillRef idx="0">
+            <a:schemeClr val="accent1"/>
+          </a:fillRef>
+          <a:effectRef idx="1">
+            <a:schemeClr val="accent1"/>
+          </a:effectRef>
+          <a:fontRef idx="minor">
+            <a:schemeClr val="tx1"/>
+          </a:fontRef>
+        </p:style>
+      </p:cxnSp>
+      <p:cxnSp>
+        <p:nvCxnSpPr>
+          <p:cNvPr id="49" name="Connector 48"/>
+          <p:cNvCxnSpPr/>
+          <p:nvPr/>
+        </p:nvCxnSpPr>
+        <p:spPr>
+          <a:xfrm flipV="1">
+            <a:off x="10067544" y="2880360"/>
+            <a:ext cx="0" cy="3904488"/>
+          </a:xfrm>
+          <a:prstGeom prst="line">
+            <a:avLst/>
+          </a:prstGeom>
+          <a:ln w="28575">
+            <a:solidFill>
+              <a:srgbClr val="F5EFE9"/>
+            </a:solidFill>
+          </a:ln>
+        </p:spPr>
+        <p:style>
+          <a:lnRef idx="2">
+            <a:schemeClr val="accent1"/>
+          </a:lnRef>
+          <a:fillRef idx="0">
+            <a:schemeClr val="accent1"/>
+          </a:fillRef>
+          <a:effectRef idx="1">
+            <a:schemeClr val="accent1"/>
+          </a:effectRef>
+          <a:fontRef idx="minor">
+            <a:schemeClr val="tx1"/>
+          </a:fontRef>
+        </p:style>
+      </p:cxnSp>
+      <p:cxnSp>
+        <p:nvCxnSpPr>
+          <p:cNvPr id="50" name="Connector 49"/>
+          <p:cNvCxnSpPr/>
+          <p:nvPr/>
+        </p:nvCxnSpPr>
+        <p:spPr>
+          <a:xfrm>
+            <a:off x="10067544" y="2880360"/>
+            <a:ext cx="310896" cy="0"/>
+          </a:xfrm>
+          <a:prstGeom prst="line">
+            <a:avLst/>
+          </a:prstGeom>
+          <a:ln w="28575">
+            <a:solidFill>
+              <a:srgbClr val="F5EFE9"/>
+            </a:solidFill>
+            <a:tailEnd type="triangle" w="med" len="med"/>
+          </a:ln>
+        </p:spPr>
+        <p:style>
+          <a:lnRef idx="2">
+            <a:schemeClr val="accent1"/>
+          </a:lnRef>
+          <a:fillRef idx="0">
+            <a:schemeClr val="accent1"/>
+          </a:fillRef>
+          <a:effectRef idx="1">
+            <a:schemeClr val="accent1"/>
+          </a:effectRef>
+          <a:fontRef idx="minor">
+            <a:schemeClr val="tx1"/>
+          </a:fontRef>
+        </p:style>
+      </p:cxnSp>
+      <p:cxnSp>
+        <p:nvCxnSpPr>
+          <p:cNvPr id="51" name="Connector 50"/>
+          <p:cNvCxnSpPr/>
+          <p:nvPr/>
+        </p:nvCxnSpPr>
+        <p:spPr>
+          <a:xfrm>
+            <a:off x="12435840" y="3246120"/>
+            <a:ext cx="0" cy="137160"/>
+          </a:xfrm>
+          <a:prstGeom prst="line">
+            <a:avLst/>
+          </a:prstGeom>
+          <a:ln w="28575">
+            <a:solidFill>
+              <a:srgbClr val="F5EFE9"/>
+            </a:solidFill>
+            <a:tailEnd type="triangle" w="med" len="med"/>
+          </a:ln>
+        </p:spPr>
+        <p:style>
+          <a:lnRef idx="2">
+            <a:schemeClr val="accent1"/>
+          </a:lnRef>
+          <a:fillRef idx="0">
+            <a:schemeClr val="accent1"/>
+          </a:fillRef>
+          <a:effectRef idx="1">
+            <a:schemeClr val="accent1"/>
+          </a:effectRef>
+          <a:fontRef idx="minor">
+            <a:schemeClr val="tx1"/>
+          </a:fontRef>
+        </p:style>
+      </p:cxnSp>
+      <p:cxnSp>
+        <p:nvCxnSpPr>
+          <p:cNvPr id="52" name="Connector 51"/>
+          <p:cNvCxnSpPr/>
+          <p:nvPr/>
+        </p:nvCxnSpPr>
+        <p:spPr>
+          <a:xfrm>
+            <a:off x="12435840" y="4480560"/>
+            <a:ext cx="0" cy="137160"/>
+          </a:xfrm>
+          <a:prstGeom prst="line">
+            <a:avLst/>
+          </a:prstGeom>
+          <a:ln w="28575">
+            <a:solidFill>
+              <a:srgbClr val="F5EFE9"/>
+            </a:solidFill>
+            <a:tailEnd type="triangle" w="med" len="med"/>
+          </a:ln>
+        </p:spPr>
+        <p:style>
+          <a:lnRef idx="2">
+            <a:schemeClr val="accent1"/>
+          </a:lnRef>
+          <a:fillRef idx="0">
+            <a:schemeClr val="accent1"/>
+          </a:fillRef>
+          <a:effectRef idx="1">
+            <a:schemeClr val="accent1"/>
+          </a:effectRef>
+          <a:fontRef idx="minor">
+            <a:schemeClr val="tx1"/>
+          </a:fontRef>
+        </p:style>
+      </p:cxnSp>
+      <p:cxnSp>
+        <p:nvCxnSpPr>
+          <p:cNvPr id="53" name="Connector 52"/>
+          <p:cNvCxnSpPr/>
+          <p:nvPr/>
+        </p:nvCxnSpPr>
+        <p:spPr>
+          <a:xfrm>
+            <a:off x="12435840" y="5577840"/>
+            <a:ext cx="0" cy="137160"/>
+          </a:xfrm>
+          <a:prstGeom prst="line">
+            <a:avLst/>
+          </a:prstGeom>
+          <a:ln w="28575">
+            <a:solidFill>
+              <a:srgbClr val="F5EFE9"/>
+            </a:solidFill>
+            <a:tailEnd type="triangle" w="med" len="med"/>
+          </a:ln>
+        </p:spPr>
+        <p:style>
+          <a:lnRef idx="2">
+            <a:schemeClr val="accent1"/>
+          </a:lnRef>
+          <a:fillRef idx="0">
+            <a:schemeClr val="accent1"/>
+          </a:fillRef>
+          <a:effectRef idx="1">
+            <a:schemeClr val="accent1"/>
+          </a:effectRef>
+          <a:fontRef idx="minor">
+            <a:schemeClr val="tx1"/>
+          </a:fontRef>
+        </p:style>
+      </p:cxnSp>
+      <p:cxnSp>
+        <p:nvCxnSpPr>
+          <p:cNvPr id="54" name="Connector 53"/>
+          <p:cNvCxnSpPr/>
+          <p:nvPr/>
+        </p:nvCxnSpPr>
+        <p:spPr>
+          <a:xfrm>
+            <a:off x="12435840" y="6446520"/>
+            <a:ext cx="0" cy="137160"/>
+          </a:xfrm>
+          <a:prstGeom prst="line">
+            <a:avLst/>
+          </a:prstGeom>
+          <a:ln w="28575">
+            <a:solidFill>
+              <a:srgbClr val="F5EFE9"/>
+            </a:solidFill>
+            <a:tailEnd type="triangle" w="med" len="med"/>
+          </a:ln>
+        </p:spPr>
+        <p:style>
+          <a:lnRef idx="2">
+            <a:schemeClr val="accent1"/>
+          </a:lnRef>
+          <a:fillRef idx="0">
+            <a:schemeClr val="accent1"/>
+          </a:fillRef>
+          <a:effectRef idx="1">
+            <a:schemeClr val="accent1"/>
+          </a:effectRef>
+          <a:fontRef idx="minor">
+            <a:schemeClr val="tx1"/>
+          </a:fontRef>
+        </p:style>
+      </p:cxnSp>
+      <p:cxnSp>
+        <p:nvCxnSpPr>
+          <p:cNvPr id="55" name="Connector 54"/>
+          <p:cNvCxnSpPr/>
+          <p:nvPr/>
+        </p:nvCxnSpPr>
+        <p:spPr>
+          <a:xfrm>
+            <a:off x="14493240" y="7040880"/>
+            <a:ext cx="310896" cy="0"/>
+          </a:xfrm>
+          <a:prstGeom prst="line">
+            <a:avLst/>
+          </a:prstGeom>
+          <a:ln w="28575">
+            <a:solidFill>
+              <a:srgbClr val="F5EFE9"/>
+            </a:solidFill>
+          </a:ln>
+        </p:spPr>
+        <p:style>
+          <a:lnRef idx="2">
+            <a:schemeClr val="accent1"/>
+          </a:lnRef>
+          <a:fillRef idx="0">
+            <a:schemeClr val="accent1"/>
+          </a:fillRef>
+          <a:effectRef idx="1">
+            <a:schemeClr val="accent1"/>
+          </a:effectRef>
+          <a:fontRef idx="minor">
+            <a:schemeClr val="tx1"/>
+          </a:fontRef>
+        </p:style>
+      </p:cxnSp>
+      <p:cxnSp>
+        <p:nvCxnSpPr>
+          <p:cNvPr id="56" name="Connector 55"/>
+          <p:cNvCxnSpPr/>
+          <p:nvPr/>
+        </p:nvCxnSpPr>
+        <p:spPr>
+          <a:xfrm flipV="1">
+            <a:off x="14804136" y="2743200"/>
+            <a:ext cx="0" cy="4297680"/>
+          </a:xfrm>
+          <a:prstGeom prst="line">
+            <a:avLst/>
+          </a:prstGeom>
+          <a:ln w="28575">
+            <a:solidFill>
+              <a:srgbClr val="F5EFE9"/>
+            </a:solidFill>
+          </a:ln>
+        </p:spPr>
+        <p:style>
+          <a:lnRef idx="2">
+            <a:schemeClr val="accent1"/>
+          </a:lnRef>
+          <a:fillRef idx="0">
+            <a:schemeClr val="accent1"/>
+          </a:fillRef>
+          <a:effectRef idx="1">
+            <a:schemeClr val="accent1"/>
+          </a:effectRef>
+          <a:fontRef idx="minor">
+            <a:schemeClr val="tx1"/>
+          </a:fontRef>
+        </p:style>
+      </p:cxnSp>
+      <p:cxnSp>
+        <p:nvCxnSpPr>
+          <p:cNvPr id="57" name="Connector 56"/>
+          <p:cNvCxnSpPr/>
+          <p:nvPr/>
+        </p:nvCxnSpPr>
+        <p:spPr>
+          <a:xfrm>
+            <a:off x="14804136" y="2743200"/>
+            <a:ext cx="310896" cy="0"/>
+          </a:xfrm>
+          <a:prstGeom prst="line">
+            <a:avLst/>
+          </a:prstGeom>
+          <a:ln w="28575">
+            <a:solidFill>
+              <a:srgbClr val="F5EFE9"/>
+            </a:solidFill>
+            <a:tailEnd type="triangle" w="med" len="med"/>
+          </a:ln>
+        </p:spPr>
+        <p:style>
+          <a:lnRef idx="2">
+            <a:schemeClr val="accent1"/>
+          </a:lnRef>
+          <a:fillRef idx="0">
+            <a:schemeClr val="accent1"/>
+          </a:fillRef>
+          <a:effectRef idx="1">
+            <a:schemeClr val="accent1"/>
+          </a:effectRef>
+          <a:fontRef idx="minor">
+            <a:schemeClr val="tx1"/>
+          </a:fontRef>
+        </p:style>
+      </p:cxnSp>
+      <p:cxnSp>
+        <p:nvCxnSpPr>
+          <p:cNvPr id="58" name="Connector 57"/>
+          <p:cNvCxnSpPr/>
+          <p:nvPr/>
+        </p:nvCxnSpPr>
+        <p:spPr>
+          <a:xfrm>
+            <a:off x="17172432" y="2971800"/>
+            <a:ext cx="0" cy="137160"/>
+          </a:xfrm>
+          <a:prstGeom prst="line">
+            <a:avLst/>
+          </a:prstGeom>
+          <a:ln w="28575">
+            <a:solidFill>
+              <a:srgbClr val="F5EFE9"/>
+            </a:solidFill>
+            <a:tailEnd type="triangle" w="med" len="med"/>
+          </a:ln>
+        </p:spPr>
+        <p:style>
+          <a:lnRef idx="2">
+            <a:schemeClr val="accent1"/>
+          </a:lnRef>
+          <a:fillRef idx="0">
+            <a:schemeClr val="accent1"/>
+          </a:fillRef>
+          <a:effectRef idx="1">
+            <a:schemeClr val="accent1"/>
+          </a:effectRef>
+          <a:fontRef idx="minor">
+            <a:schemeClr val="tx1"/>
+          </a:fontRef>
+        </p:style>
+      </p:cxnSp>
+      <p:cxnSp>
+        <p:nvCxnSpPr>
+          <p:cNvPr id="59" name="Connector 58"/>
+          <p:cNvCxnSpPr/>
+          <p:nvPr/>
+        </p:nvCxnSpPr>
+        <p:spPr>
+          <a:xfrm>
+            <a:off x="17172432" y="3794760"/>
+            <a:ext cx="0" cy="137160"/>
+          </a:xfrm>
+          <a:prstGeom prst="line">
+            <a:avLst/>
+          </a:prstGeom>
+          <a:ln w="28575">
+            <a:solidFill>
+              <a:srgbClr val="F5EFE9"/>
+            </a:solidFill>
+            <a:tailEnd type="triangle" w="med" len="med"/>
+          </a:ln>
+        </p:spPr>
+        <p:style>
+          <a:lnRef idx="2">
+            <a:schemeClr val="accent1"/>
+          </a:lnRef>
+          <a:fillRef idx="0">
+            <a:schemeClr val="accent1"/>
+          </a:fillRef>
+          <a:effectRef idx="1">
+            <a:schemeClr val="accent1"/>
+          </a:effectRef>
+          <a:fontRef idx="minor">
+            <a:schemeClr val="tx1"/>
+          </a:fontRef>
+        </p:style>
+      </p:cxnSp>
+      <p:cxnSp>
+        <p:nvCxnSpPr>
+          <p:cNvPr id="60" name="Connector 59"/>
+          <p:cNvCxnSpPr/>
+          <p:nvPr/>
+        </p:nvCxnSpPr>
+        <p:spPr>
+          <a:xfrm>
+            <a:off x="17172432" y="4937760"/>
+            <a:ext cx="0" cy="137160"/>
+          </a:xfrm>
+          <a:prstGeom prst="line">
+            <a:avLst/>
+          </a:prstGeom>
+          <a:ln w="28575">
+            <a:solidFill>
+              <a:srgbClr val="F5EFE9"/>
+            </a:solidFill>
+            <a:tailEnd type="triangle" w="med" len="med"/>
+          </a:ln>
+        </p:spPr>
+        <p:style>
+          <a:lnRef idx="2">
+            <a:schemeClr val="accent1"/>
+          </a:lnRef>
+          <a:fillRef idx="0">
+            <a:schemeClr val="accent1"/>
+          </a:fillRef>
+          <a:effectRef idx="1">
+            <a:schemeClr val="accent1"/>
+          </a:effectRef>
+          <a:fontRef idx="minor">
+            <a:schemeClr val="tx1"/>
+          </a:fontRef>
+        </p:style>
+      </p:cxnSp>
+      <p:cxnSp>
+        <p:nvCxnSpPr>
+          <p:cNvPr id="61" name="Connector 60"/>
+          <p:cNvCxnSpPr/>
+          <p:nvPr/>
+        </p:nvCxnSpPr>
+        <p:spPr>
+          <a:xfrm>
+            <a:off x="17172432" y="5897880"/>
+            <a:ext cx="0" cy="137160"/>
+          </a:xfrm>
+          <a:prstGeom prst="line">
+            <a:avLst/>
+          </a:prstGeom>
+          <a:ln w="28575">
+            <a:solidFill>
+              <a:srgbClr val="F5EFE9"/>
+            </a:solidFill>
+            <a:tailEnd type="triangle" w="med" len="med"/>
+          </a:ln>
+        </p:spPr>
+        <p:style>
+          <a:lnRef idx="2">
+            <a:schemeClr val="accent1"/>
+          </a:lnRef>
+          <a:fillRef idx="0">
+            <a:schemeClr val="accent1"/>
+          </a:fillRef>
+          <a:effectRef idx="1">
+            <a:schemeClr val="accent1"/>
+          </a:effectRef>
+          <a:fontRef idx="minor">
+            <a:schemeClr val="tx1"/>
+          </a:fontRef>
+        </p:style>
+      </p:cxnSp>
+      <p:cxnSp>
+        <p:nvCxnSpPr>
+          <p:cNvPr id="62" name="Connector 61"/>
+          <p:cNvCxnSpPr/>
+          <p:nvPr/>
+        </p:nvCxnSpPr>
+        <p:spPr>
+          <a:xfrm>
+            <a:off x="17172432" y="6720840"/>
+            <a:ext cx="0" cy="137160"/>
+          </a:xfrm>
+          <a:prstGeom prst="line">
+            <a:avLst/>
+          </a:prstGeom>
+          <a:ln w="28575">
+            <a:solidFill>
+              <a:srgbClr val="F5EFE9"/>
+            </a:solidFill>
+            <a:tailEnd type="triangle" w="med" len="med"/>
+          </a:ln>
+        </p:spPr>
+        <p:style>
+          <a:lnRef idx="2">
+            <a:schemeClr val="accent1"/>
+          </a:lnRef>
+          <a:fillRef idx="0">
+            <a:schemeClr val="accent1"/>
+          </a:fillRef>
+          <a:effectRef idx="1">
+            <a:schemeClr val="accent1"/>
+          </a:effectRef>
+          <a:fontRef idx="minor">
+            <a:schemeClr val="tx1"/>
+          </a:fontRef>
+        </p:style>
+      </p:cxnSp>
+      <p:cxnSp>
+        <p:nvCxnSpPr>
+          <p:cNvPr id="63" name="Connector 62"/>
+          <p:cNvCxnSpPr/>
+          <p:nvPr/>
+        </p:nvCxnSpPr>
+        <p:spPr>
+          <a:xfrm flipH="1">
+            <a:off x="17007840" y="7635240"/>
+            <a:ext cx="164592" cy="301752"/>
+          </a:xfrm>
+          <a:prstGeom prst="line">
+            <a:avLst/>
+          </a:prstGeom>
+          <a:ln w="28575">
+            <a:solidFill>
+              <a:srgbClr val="F5EFE9"/>
+            </a:solidFill>
+          </a:ln>
+        </p:spPr>
+        <p:style>
+          <a:lnRef idx="2">
+            <a:schemeClr val="accent1"/>
+          </a:lnRef>
+          <a:fillRef idx="0">
+            <a:schemeClr val="accent1"/>
+          </a:fillRef>
+          <a:effectRef idx="1">
+            <a:schemeClr val="accent1"/>
+          </a:effectRef>
+          <a:fontRef idx="minor">
+            <a:schemeClr val="tx1"/>
+          </a:fontRef>
+        </p:style>
+      </p:cxnSp>
+      <p:cxnSp>
+        <p:nvCxnSpPr>
+          <p:cNvPr id="64" name="Connector 63"/>
+          <p:cNvCxnSpPr/>
+          <p:nvPr/>
+        </p:nvCxnSpPr>
+        <p:spPr>
+          <a:xfrm flipH="1">
+            <a:off x="16276320" y="7936992"/>
+            <a:ext cx="731520" cy="0"/>
+          </a:xfrm>
+          <a:prstGeom prst="line">
+            <a:avLst/>
+          </a:prstGeom>
+          <a:ln w="28575">
+            <a:solidFill>
+              <a:srgbClr val="F5EFE9"/>
+            </a:solidFill>
+          </a:ln>
+        </p:spPr>
+        <p:style>
+          <a:lnRef idx="2">
+            <a:schemeClr val="accent1"/>
+          </a:lnRef>
+          <a:fillRef idx="0">
+            <a:schemeClr val="accent1"/>
+          </a:fillRef>
+          <a:effectRef idx="1">
+            <a:schemeClr val="accent1"/>
+          </a:effectRef>
+          <a:fontRef idx="minor">
+            <a:schemeClr val="tx1"/>
+          </a:fontRef>
+        </p:style>
+      </p:cxnSp>
+      <p:cxnSp>
+        <p:nvCxnSpPr>
+          <p:cNvPr id="65" name="Connector 64"/>
+          <p:cNvCxnSpPr/>
+          <p:nvPr/>
+        </p:nvCxnSpPr>
+        <p:spPr>
+          <a:xfrm>
+            <a:off x="16276320" y="7936992"/>
+            <a:ext cx="0" cy="704088"/>
+          </a:xfrm>
+          <a:prstGeom prst="line">
+            <a:avLst/>
+          </a:prstGeom>
+          <a:ln w="28575">
+            <a:solidFill>
+              <a:srgbClr val="F5EFE9"/>
+            </a:solidFill>
+            <a:tailEnd type="triangle" w="med" len="med"/>
+          </a:ln>
+        </p:spPr>
+        <p:style>
+          <a:lnRef idx="2">
+            <a:schemeClr val="accent1"/>
+          </a:lnRef>
+          <a:fillRef idx="0">
+            <a:schemeClr val="accent1"/>
+          </a:fillRef>
+          <a:effectRef idx="1">
+            <a:schemeClr val="accent1"/>
+          </a:effectRef>
+          <a:fontRef idx="minor">
+            <a:schemeClr val="tx1"/>
+          </a:fontRef>
+        </p:style>
+      </p:cxnSp>
+      <p:sp>
+        <p:nvSpPr>
+          <p:cNvPr id="66" name="TextBox 65"/>
           <p:cNvSpPr txBox="1"/>
           <p:nvPr/>
         </p:nvSpPr>
         <p:spPr>
           <a:xfrm>
             <a:off x="740664" y="10012680"/>
-            <a:ext cx="18288000" cy="457200"/>
+            <a:ext cx="18653760" cy="457200"/>
           </a:xfrm>
           <a:prstGeom prst="rect">
             <a:avLst/>
@@ -9363,12 +10904,12 @@
               </a:spcAft>
             </a:pPr>
             <a:r>
-              <a:rPr sz="1400" b="0">
+              <a:rPr sz="1200" b="0">
                 <a:solidFill>
                   <a:srgbClr val="F5EFE9"/>
                 </a:solidFill>
               </a:rPr>
-              <a:t>Steps 1 to 5 build the package once; steps 6 to 9 repeat per client org; step 10 is every change after go-live.</a:t>
+              <a:t>Orange diamonds are gates: a failed gate stops the run and names the rollback. The Workstreams tree is never moved; the offering is a curated copy promoted org by org.</a:t>
             </a:r>
           </a:p>
         </p:txBody>
@@ -9424,7 +10965,7 @@
                   <a:srgbClr val="F5EFE9"/>
                 </a:solidFill>
               </a:rPr>
-              <a:t>Database Deployment, Step By Step</a:t>
+              <a:t>Database Deployment Flow</a:t>
             </a:r>
           </a:p>
         </p:txBody>
@@ -9533,12 +11074,210 @@
         </p:nvSpPr>
         <p:spPr>
           <a:xfrm>
-            <a:off x="740664" y="1828800"/>
-            <a:ext cx="9212580" cy="1435607"/>
+            <a:off x="12262104" y="1965960"/>
+            <a:ext cx="7132320" cy="1508760"/>
           </a:xfrm>
           <a:prstGeom prst="roundRect">
             <a:avLst>
-              <a:gd name="adj" fmla="val 8000"/>
+              <a:gd name="adj" fmla="val 4000"/>
+            </a:avLst>
+          </a:prstGeom>
+          <a:noFill/>
+          <a:ln w="19050">
+            <a:solidFill>
+              <a:srgbClr val="F5EFE9"/>
+            </a:solidFill>
+          </a:ln>
+          <a:effectLst/>
+        </p:spPr>
+        <p:style>
+          <a:lnRef idx="1">
+            <a:schemeClr val="accent1"/>
+          </a:lnRef>
+          <a:fillRef idx="3">
+            <a:schemeClr val="accent1"/>
+          </a:fillRef>
+          <a:effectRef idx="2">
+            <a:schemeClr val="accent1"/>
+          </a:effectRef>
+          <a:fontRef idx="minor">
+            <a:schemeClr val="lt1"/>
+          </a:fontRef>
+        </p:style>
+        <p:txBody>
+          <a:bodyPr rtlCol="0" anchor="ctr"/>
+          <a:lstStyle/>
+          <a:p>
+            <a:pPr algn="ctr"/>
+          </a:p>
+        </p:txBody>
+      </p:sp>
+      <p:sp>
+        <p:nvSpPr>
+          <p:cNvPr id="6" name="TextBox 5"/>
+          <p:cNvSpPr txBox="1"/>
+          <p:nvPr/>
+        </p:nvSpPr>
+        <p:spPr>
+          <a:xfrm>
+            <a:off x="12426696" y="2011679"/>
+            <a:ext cx="6803136" cy="411480"/>
+          </a:xfrm>
+          <a:prstGeom prst="rect">
+            <a:avLst/>
+          </a:prstGeom>
+          <a:noFill/>
+        </p:spPr>
+        <p:txBody>
+          <a:bodyPr wrap="square" anchor="t" lIns="0" rIns="0" tIns="54864" bIns="54864">
+            <a:spAutoFit/>
+          </a:bodyPr>
+          <a:lstStyle/>
+          <a:p>
+            <a:pPr algn="l">
+              <a:spcAft>
+                <a:spcPts val="600"/>
+              </a:spcAft>
+            </a:pPr>
+            <a:r>
+              <a:rPr sz="1400" b="1">
+                <a:solidFill>
+                  <a:srgbClr val="F5EFE9"/>
+                </a:solidFill>
+              </a:rPr>
+              <a:t>Submit 8 baselines as parallel scheduler jobs</a:t>
+            </a:r>
+          </a:p>
+          <a:p>
+            <a:pPr algn="l">
+              <a:spcAft>
+                <a:spcPts val="600"/>
+              </a:spcAft>
+            </a:pPr>
+            <a:r>
+              <a:rPr sz="1100" b="0">
+                <a:solidFill>
+                  <a:srgbClr val="F5EFE9"/>
+                </a:solidFill>
+              </a:rPr>
+              <a:t>unattended; they survive a dropped connection</a:t>
+            </a:r>
+          </a:p>
+        </p:txBody>
+      </p:sp>
+      <p:sp>
+        <p:nvSpPr>
+          <p:cNvPr id="7" name="Rounded Rectangle 6"/>
+          <p:cNvSpPr/>
+          <p:nvPr/>
+        </p:nvSpPr>
+        <p:spPr>
+          <a:xfrm>
+            <a:off x="740664" y="5760720"/>
+            <a:ext cx="18653760" cy="4114800"/>
+          </a:xfrm>
+          <a:prstGeom prst="roundRect">
+            <a:avLst>
+              <a:gd name="adj" fmla="val 4000"/>
+            </a:avLst>
+          </a:prstGeom>
+          <a:noFill/>
+          <a:ln w="19050">
+            <a:solidFill>
+              <a:srgbClr val="F5EFE9"/>
+            </a:solidFill>
+          </a:ln>
+          <a:effectLst/>
+        </p:spPr>
+        <p:style>
+          <a:lnRef idx="1">
+            <a:schemeClr val="accent1"/>
+          </a:lnRef>
+          <a:fillRef idx="3">
+            <a:schemeClr val="accent1"/>
+          </a:fillRef>
+          <a:effectRef idx="2">
+            <a:schemeClr val="accent1"/>
+          </a:effectRef>
+          <a:fontRef idx="minor">
+            <a:schemeClr val="lt1"/>
+          </a:fontRef>
+        </p:style>
+        <p:txBody>
+          <a:bodyPr rtlCol="0" anchor="ctr"/>
+          <a:lstStyle/>
+          <a:p>
+            <a:pPr algn="ctr"/>
+          </a:p>
+        </p:txBody>
+      </p:sp>
+      <p:sp>
+        <p:nvSpPr>
+          <p:cNvPr id="8" name="TextBox 7"/>
+          <p:cNvSpPr txBox="1"/>
+          <p:nvPr/>
+        </p:nvSpPr>
+        <p:spPr>
+          <a:xfrm>
+            <a:off x="905256" y="5806440"/>
+            <a:ext cx="18324576" cy="411480"/>
+          </a:xfrm>
+          <a:prstGeom prst="rect">
+            <a:avLst/>
+          </a:prstGeom>
+          <a:noFill/>
+        </p:spPr>
+        <p:txBody>
+          <a:bodyPr wrap="square" anchor="t" lIns="0" rIns="0" tIns="54864" bIns="54864">
+            <a:spAutoFit/>
+          </a:bodyPr>
+          <a:lstStyle/>
+          <a:p>
+            <a:pPr algn="l">
+              <a:spcAft>
+                <a:spcPts val="600"/>
+              </a:spcAft>
+            </a:pPr>
+            <a:r>
+              <a:rPr sz="1400" b="1">
+                <a:solidFill>
+                  <a:srgbClr val="F5EFE9"/>
+                </a:solidFill>
+              </a:rPr>
+              <a:t>What the domains read</a:t>
+            </a:r>
+          </a:p>
+          <a:p>
+            <a:pPr algn="l">
+              <a:spcAft>
+                <a:spcPts val="600"/>
+              </a:spcAft>
+            </a:pPr>
+            <a:r>
+              <a:rPr sz="1100" b="0">
+                <a:solidFill>
+                  <a:srgbClr val="F5EFE9"/>
+                </a:solidFill>
+              </a:rPr>
+              <a:t>created in steps 2 and 3, validated and gated before anything is scheduled; each stack feeds the domain chip beneath it</a:t>
+            </a:r>
+          </a:p>
+        </p:txBody>
+      </p:sp>
+      <p:sp>
+        <p:nvSpPr>
+          <p:cNvPr id="9" name="Rounded Rectangle 8"/>
+          <p:cNvSpPr/>
+          <p:nvPr/>
+        </p:nvSpPr>
+        <p:spPr>
+          <a:xfrm>
+            <a:off x="740664" y="2286000"/>
+            <a:ext cx="2286000" cy="914400"/>
+          </a:xfrm>
+          <a:prstGeom prst="roundRect">
+            <a:avLst>
+              <a:gd name="adj" fmla="val 10000"/>
             </a:avLst>
           </a:prstGeom>
           <a:solidFill>
@@ -9564,25 +11303,735 @@
           </a:fontRef>
         </p:style>
         <p:txBody>
-          <a:bodyPr rtlCol="0" anchor="ctr"/>
+          <a:bodyPr rtlCol="0" anchor="ctr" wrap="square" lIns="109728" rIns="109728" tIns="54864" bIns="54864"/>
           <a:lstStyle/>
           <a:p>
-            <a:pPr algn="ctr"/>
-          </a:p>
-        </p:txBody>
-      </p:sp>
-      <p:sp>
-        <p:nvSpPr>
-          <p:cNvPr id="6" name="Oval 5"/>
+            <a:pPr algn="l">
+              <a:spcAft>
+                <a:spcPts val="600"/>
+              </a:spcAft>
+            </a:pPr>
+            <a:r>
+              <a:rPr sz="1400" b="1">
+                <a:solidFill>
+                  <a:srgbClr val="0B3D7A"/>
+                </a:solidFill>
+              </a:rPr>
+              <a:t>Preflight</a:t>
+            </a:r>
+          </a:p>
+          <a:p>
+            <a:pPr algn="l">
+              <a:spcAft>
+                <a:spcPts val="600"/>
+              </a:spcAft>
+            </a:pPr>
+            <a:r>
+              <a:rPr sz="1100" b="0">
+                <a:solidFill>
+                  <a:srgbClr val="4C5D69"/>
+                </a:solidFill>
+              </a:rPr>
+              <a:t>the deploy user can read every source table and write the targets</a:t>
+            </a:r>
+          </a:p>
+        </p:txBody>
+      </p:sp>
+      <p:sp>
+        <p:nvSpPr>
+          <p:cNvPr id="10" name="Rounded Rectangle 9"/>
           <p:cNvSpPr/>
           <p:nvPr/>
         </p:nvSpPr>
         <p:spPr>
           <a:xfrm>
-            <a:off x="941832" y="2029968"/>
-            <a:ext cx="457200" cy="457200"/>
-          </a:xfrm>
-          <a:prstGeom prst="ellipse">
+            <a:off x="3300984" y="2286000"/>
+            <a:ext cx="2651760" cy="914400"/>
+          </a:xfrm>
+          <a:prstGeom prst="roundRect">
+            <a:avLst>
+              <a:gd name="adj" fmla="val 10000"/>
+            </a:avLst>
+          </a:prstGeom>
+          <a:solidFill>
+            <a:srgbClr val="F5EFE9"/>
+          </a:solidFill>
+          <a:ln>
+            <a:noFill/>
+          </a:ln>
+          <a:effectLst/>
+        </p:spPr>
+        <p:style>
+          <a:lnRef idx="1">
+            <a:schemeClr val="accent1"/>
+          </a:lnRef>
+          <a:fillRef idx="3">
+            <a:schemeClr val="accent1"/>
+          </a:fillRef>
+          <a:effectRef idx="2">
+            <a:schemeClr val="accent1"/>
+          </a:effectRef>
+          <a:fontRef idx="minor">
+            <a:schemeClr val="lt1"/>
+          </a:fontRef>
+        </p:style>
+        <p:txBody>
+          <a:bodyPr rtlCol="0" anchor="ctr" wrap="square" lIns="109728" rIns="109728" tIns="54864" bIns="54864"/>
+          <a:lstStyle/>
+          <a:p>
+            <a:pPr algn="l">
+              <a:spcAft>
+                <a:spcPts val="600"/>
+              </a:spcAft>
+            </a:pPr>
+            <a:r>
+              <a:rPr sz="1400" b="1">
+                <a:solidFill>
+                  <a:srgbClr val="0B3D7A"/>
+                </a:solidFill>
+              </a:rPr>
+              <a:t>Create the 7 snapshot tables</a:t>
+            </a:r>
+          </a:p>
+          <a:p>
+            <a:pPr algn="l">
+              <a:spcAft>
+                <a:spcPts val="600"/>
+              </a:spcAft>
+            </a:pPr>
+            <a:r>
+              <a:rPr sz="1100" b="0">
+                <a:solidFill>
+                  <a:srgbClr val="4C5D69"/>
+                </a:solidFill>
+              </a:rPr>
+              <a:t>empty, with their keys</a:t>
+            </a:r>
+          </a:p>
+        </p:txBody>
+      </p:sp>
+      <p:sp>
+        <p:nvSpPr>
+          <p:cNvPr id="11" name="Rounded Rectangle 10"/>
+          <p:cNvSpPr/>
+          <p:nvPr/>
+        </p:nvSpPr>
+        <p:spPr>
+          <a:xfrm>
+            <a:off x="6227064" y="2286000"/>
+            <a:ext cx="2834640" cy="914400"/>
+          </a:xfrm>
+          <a:prstGeom prst="roundRect">
+            <a:avLst>
+              <a:gd name="adj" fmla="val 10000"/>
+            </a:avLst>
+          </a:prstGeom>
+          <a:solidFill>
+            <a:srgbClr val="F5EFE9"/>
+          </a:solidFill>
+          <a:ln>
+            <a:noFill/>
+          </a:ln>
+          <a:effectLst/>
+        </p:spPr>
+        <p:style>
+          <a:lnRef idx="1">
+            <a:schemeClr val="accent1"/>
+          </a:lnRef>
+          <a:fillRef idx="3">
+            <a:schemeClr val="accent1"/>
+          </a:fillRef>
+          <a:effectRef idx="2">
+            <a:schemeClr val="accent1"/>
+          </a:effectRef>
+          <a:fontRef idx="minor">
+            <a:schemeClr val="lt1"/>
+          </a:fontRef>
+        </p:style>
+        <p:txBody>
+          <a:bodyPr rtlCol="0" anchor="ctr" wrap="square" lIns="109728" rIns="109728" tIns="54864" bIns="54864"/>
+          <a:lstStyle/>
+          <a:p>
+            <a:pPr algn="l">
+              <a:spcAft>
+                <a:spcPts val="600"/>
+              </a:spcAft>
+            </a:pPr>
+            <a:r>
+              <a:rPr sz="1400" b="1">
+                <a:solidFill>
+                  <a:srgbClr val="0B3D7A"/>
+                </a:solidFill>
+              </a:rPr>
+              <a:t>Create the domain-support objects</a:t>
+            </a:r>
+          </a:p>
+          <a:p>
+            <a:pPr algn="l">
+              <a:spcAft>
+                <a:spcPts val="600"/>
+              </a:spcAft>
+            </a:pPr>
+            <a:r>
+              <a:rPr sz="1100" b="0">
+                <a:solidFill>
+                  <a:srgbClr val="4C5D69"/>
+                </a:solidFill>
+              </a:rPr>
+              <a:t>SA snapshot table, lookup seed, 8 CMS views, grants, synonyms</a:t>
+            </a:r>
+          </a:p>
+        </p:txBody>
+      </p:sp>
+      <p:sp>
+        <p:nvSpPr>
+          <p:cNvPr id="12" name="Rounded Rectangle 11"/>
+          <p:cNvSpPr/>
+          <p:nvPr/>
+        </p:nvSpPr>
+        <p:spPr>
+          <a:xfrm>
+            <a:off x="9336024" y="2286000"/>
+            <a:ext cx="2651760" cy="914400"/>
+          </a:xfrm>
+          <a:prstGeom prst="roundRect">
+            <a:avLst>
+              <a:gd name="adj" fmla="val 10000"/>
+            </a:avLst>
+          </a:prstGeom>
+          <a:solidFill>
+            <a:srgbClr val="F5EFE9"/>
+          </a:solidFill>
+          <a:ln>
+            <a:noFill/>
+          </a:ln>
+          <a:effectLst/>
+        </p:spPr>
+        <p:style>
+          <a:lnRef idx="1">
+            <a:schemeClr val="accent1"/>
+          </a:lnRef>
+          <a:fillRef idx="3">
+            <a:schemeClr val="accent1"/>
+          </a:fillRef>
+          <a:effectRef idx="2">
+            <a:schemeClr val="accent1"/>
+          </a:effectRef>
+          <a:fontRef idx="minor">
+            <a:schemeClr val="lt1"/>
+          </a:fontRef>
+        </p:style>
+        <p:txBody>
+          <a:bodyPr rtlCol="0" anchor="ctr" wrap="square" lIns="109728" rIns="109728" tIns="54864" bIns="54864"/>
+          <a:lstStyle/>
+          <a:p>
+            <a:pPr algn="l">
+              <a:spcAft>
+                <a:spcPts val="600"/>
+              </a:spcAft>
+            </a:pPr>
+            <a:r>
+              <a:rPr sz="1400" b="1">
+                <a:solidFill>
+                  <a:srgbClr val="0B3D7A"/>
+                </a:solidFill>
+              </a:rPr>
+              <a:t>Deploy the procedures</a:t>
+            </a:r>
+          </a:p>
+          <a:p>
+            <a:pPr algn="l">
+              <a:spcAft>
+                <a:spcPts val="600"/>
+              </a:spcAft>
+            </a:pPr>
+            <a:r>
+              <a:rPr sz="1100" b="0">
+                <a:solidFill>
+                  <a:srgbClr val="4C5D69"/>
+                </a:solidFill>
+              </a:rPr>
+              <a:t>baseline (24 months, once) and operational per table; SA refresh</a:t>
+            </a:r>
+          </a:p>
+        </p:txBody>
+      </p:sp>
+      <p:sp>
+        <p:nvSpPr>
+          <p:cNvPr id="13" name="Rounded Rectangle 12"/>
+          <p:cNvSpPr/>
+          <p:nvPr/>
+        </p:nvSpPr>
+        <p:spPr>
+          <a:xfrm>
+            <a:off x="12454128" y="2542032"/>
+            <a:ext cx="1627632" cy="384048"/>
+          </a:xfrm>
+          <a:prstGeom prst="roundRect">
+            <a:avLst>
+              <a:gd name="adj" fmla="val 10000"/>
+            </a:avLst>
+          </a:prstGeom>
+          <a:solidFill>
+            <a:srgbClr val="F5EFE9"/>
+          </a:solidFill>
+          <a:ln>
+            <a:noFill/>
+          </a:ln>
+          <a:effectLst/>
+        </p:spPr>
+        <p:style>
+          <a:lnRef idx="1">
+            <a:schemeClr val="accent1"/>
+          </a:lnRef>
+          <a:fillRef idx="3">
+            <a:schemeClr val="accent1"/>
+          </a:fillRef>
+          <a:effectRef idx="2">
+            <a:schemeClr val="accent1"/>
+          </a:effectRef>
+          <a:fontRef idx="minor">
+            <a:schemeClr val="lt1"/>
+          </a:fontRef>
+        </p:style>
+        <p:txBody>
+          <a:bodyPr rtlCol="0" anchor="ctr" wrap="square" lIns="109728" rIns="109728" tIns="54864" bIns="54864"/>
+          <a:lstStyle/>
+          <a:p>
+            <a:pPr algn="ctr">
+              <a:spcAft>
+                <a:spcPts val="600"/>
+              </a:spcAft>
+            </a:pPr>
+            <a:r>
+              <a:rPr sz="1000" b="1">
+                <a:solidFill>
+                  <a:srgbClr val="0B3D7A"/>
+                </a:solidFill>
+              </a:rPr>
+              <a:t>FT</a:t>
+            </a:r>
+          </a:p>
+        </p:txBody>
+      </p:sp>
+      <p:sp>
+        <p:nvSpPr>
+          <p:cNvPr id="14" name="Rounded Rectangle 13"/>
+          <p:cNvSpPr/>
+          <p:nvPr/>
+        </p:nvSpPr>
+        <p:spPr>
+          <a:xfrm>
+            <a:off x="14209776" y="2542032"/>
+            <a:ext cx="1627632" cy="384048"/>
+          </a:xfrm>
+          <a:prstGeom prst="roundRect">
+            <a:avLst>
+              <a:gd name="adj" fmla="val 10000"/>
+            </a:avLst>
+          </a:prstGeom>
+          <a:solidFill>
+            <a:srgbClr val="F5EFE9"/>
+          </a:solidFill>
+          <a:ln>
+            <a:noFill/>
+          </a:ln>
+          <a:effectLst/>
+        </p:spPr>
+        <p:style>
+          <a:lnRef idx="1">
+            <a:schemeClr val="accent1"/>
+          </a:lnRef>
+          <a:fillRef idx="3">
+            <a:schemeClr val="accent1"/>
+          </a:fillRef>
+          <a:effectRef idx="2">
+            <a:schemeClr val="accent1"/>
+          </a:effectRef>
+          <a:fontRef idx="minor">
+            <a:schemeClr val="lt1"/>
+          </a:fontRef>
+        </p:style>
+        <p:txBody>
+          <a:bodyPr rtlCol="0" anchor="ctr" wrap="square" lIns="109728" rIns="109728" tIns="54864" bIns="54864"/>
+          <a:lstStyle/>
+          <a:p>
+            <a:pPr algn="ctr">
+              <a:spcAft>
+                <a:spcPts val="600"/>
+              </a:spcAft>
+            </a:pPr>
+            <a:r>
+              <a:rPr sz="1000" b="1">
+                <a:solidFill>
+                  <a:srgbClr val="0B3D7A"/>
+                </a:solidFill>
+              </a:rPr>
+              <a:t>Billed usage</a:t>
+            </a:r>
+          </a:p>
+        </p:txBody>
+      </p:sp>
+      <p:sp>
+        <p:nvSpPr>
+          <p:cNvPr id="15" name="Rounded Rectangle 14"/>
+          <p:cNvSpPr/>
+          <p:nvPr/>
+        </p:nvSpPr>
+        <p:spPr>
+          <a:xfrm>
+            <a:off x="15965424" y="2542032"/>
+            <a:ext cx="1627632" cy="384048"/>
+          </a:xfrm>
+          <a:prstGeom prst="roundRect">
+            <a:avLst>
+              <a:gd name="adj" fmla="val 10000"/>
+            </a:avLst>
+          </a:prstGeom>
+          <a:solidFill>
+            <a:srgbClr val="F5EFE9"/>
+          </a:solidFill>
+          <a:ln>
+            <a:noFill/>
+          </a:ln>
+          <a:effectLst/>
+        </p:spPr>
+        <p:style>
+          <a:lnRef idx="1">
+            <a:schemeClr val="accent1"/>
+          </a:lnRef>
+          <a:fillRef idx="3">
+            <a:schemeClr val="accent1"/>
+          </a:fillRef>
+          <a:effectRef idx="2">
+            <a:schemeClr val="accent1"/>
+          </a:effectRef>
+          <a:fontRef idx="minor">
+            <a:schemeClr val="lt1"/>
+          </a:fontRef>
+        </p:style>
+        <p:txBody>
+          <a:bodyPr rtlCol="0" anchor="ctr" wrap="square" lIns="109728" rIns="109728" tIns="54864" bIns="54864"/>
+          <a:lstStyle/>
+          <a:p>
+            <a:pPr algn="ctr">
+              <a:spcAft>
+                <a:spcPts val="600"/>
+              </a:spcAft>
+            </a:pPr>
+            <a:r>
+              <a:rPr sz="1000" b="1">
+                <a:solidFill>
+                  <a:srgbClr val="0B3D7A"/>
+                </a:solidFill>
+              </a:rPr>
+              <a:t>SQ usage</a:t>
+            </a:r>
+          </a:p>
+        </p:txBody>
+      </p:sp>
+      <p:sp>
+        <p:nvSpPr>
+          <p:cNvPr id="16" name="Rounded Rectangle 15"/>
+          <p:cNvSpPr/>
+          <p:nvPr/>
+        </p:nvSpPr>
+        <p:spPr>
+          <a:xfrm>
+            <a:off x="17721072" y="2542032"/>
+            <a:ext cx="1627632" cy="384048"/>
+          </a:xfrm>
+          <a:prstGeom prst="roundRect">
+            <a:avLst>
+              <a:gd name="adj" fmla="val 10000"/>
+            </a:avLst>
+          </a:prstGeom>
+          <a:solidFill>
+            <a:srgbClr val="F5EFE9"/>
+          </a:solidFill>
+          <a:ln>
+            <a:noFill/>
+          </a:ln>
+          <a:effectLst/>
+        </p:spPr>
+        <p:style>
+          <a:lnRef idx="1">
+            <a:schemeClr val="accent1"/>
+          </a:lnRef>
+          <a:fillRef idx="3">
+            <a:schemeClr val="accent1"/>
+          </a:fillRef>
+          <a:effectRef idx="2">
+            <a:schemeClr val="accent1"/>
+          </a:effectRef>
+          <a:fontRef idx="minor">
+            <a:schemeClr val="lt1"/>
+          </a:fontRef>
+        </p:style>
+        <p:txBody>
+          <a:bodyPr rtlCol="0" anchor="ctr" wrap="square" lIns="109728" rIns="109728" tIns="54864" bIns="54864"/>
+          <a:lstStyle/>
+          <a:p>
+            <a:pPr algn="ctr">
+              <a:spcAft>
+                <a:spcPts val="600"/>
+              </a:spcAft>
+            </a:pPr>
+            <a:r>
+              <a:rPr sz="1000" b="1">
+                <a:solidFill>
+                  <a:srgbClr val="0B3D7A"/>
+                </a:solidFill>
+              </a:rPr>
+              <a:t>GL distribution</a:t>
+            </a:r>
+          </a:p>
+        </p:txBody>
+      </p:sp>
+      <p:sp>
+        <p:nvSpPr>
+          <p:cNvPr id="17" name="Rounded Rectangle 16"/>
+          <p:cNvSpPr/>
+          <p:nvPr/>
+        </p:nvSpPr>
+        <p:spPr>
+          <a:xfrm>
+            <a:off x="12454128" y="3017520"/>
+            <a:ext cx="1627632" cy="384048"/>
+          </a:xfrm>
+          <a:prstGeom prst="roundRect">
+            <a:avLst>
+              <a:gd name="adj" fmla="val 10000"/>
+            </a:avLst>
+          </a:prstGeom>
+          <a:solidFill>
+            <a:srgbClr val="F5EFE9"/>
+          </a:solidFill>
+          <a:ln>
+            <a:noFill/>
+          </a:ln>
+          <a:effectLst/>
+        </p:spPr>
+        <p:style>
+          <a:lnRef idx="1">
+            <a:schemeClr val="accent1"/>
+          </a:lnRef>
+          <a:fillRef idx="3">
+            <a:schemeClr val="accent1"/>
+          </a:fillRef>
+          <a:effectRef idx="2">
+            <a:schemeClr val="accent1"/>
+          </a:effectRef>
+          <a:fontRef idx="minor">
+            <a:schemeClr val="lt1"/>
+          </a:fontRef>
+        </p:style>
+        <p:txBody>
+          <a:bodyPr rtlCol="0" anchor="ctr" wrap="square" lIns="109728" rIns="109728" tIns="54864" bIns="54864"/>
+          <a:lstStyle/>
+          <a:p>
+            <a:pPr algn="ctr">
+              <a:spcAft>
+                <a:spcPts val="600"/>
+              </a:spcAft>
+            </a:pPr>
+            <a:r>
+              <a:rPr sz="1000" b="1">
+                <a:solidFill>
+                  <a:srgbClr val="0B3D7A"/>
+                </a:solidFill>
+              </a:rPr>
+              <a:t>Measurement</a:t>
+            </a:r>
+          </a:p>
+        </p:txBody>
+      </p:sp>
+      <p:sp>
+        <p:nvSpPr>
+          <p:cNvPr id="18" name="Rounded Rectangle 17"/>
+          <p:cNvSpPr/>
+          <p:nvPr/>
+        </p:nvSpPr>
+        <p:spPr>
+          <a:xfrm>
+            <a:off x="14209776" y="3017520"/>
+            <a:ext cx="1627632" cy="384048"/>
+          </a:xfrm>
+          <a:prstGeom prst="roundRect">
+            <a:avLst>
+              <a:gd name="adj" fmla="val 10000"/>
+            </a:avLst>
+          </a:prstGeom>
+          <a:solidFill>
+            <a:srgbClr val="F5EFE9"/>
+          </a:solidFill>
+          <a:ln>
+            <a:noFill/>
+          </a:ln>
+          <a:effectLst/>
+        </p:spPr>
+        <p:style>
+          <a:lnRef idx="1">
+            <a:schemeClr val="accent1"/>
+          </a:lnRef>
+          <a:fillRef idx="3">
+            <a:schemeClr val="accent1"/>
+          </a:fillRef>
+          <a:effectRef idx="2">
+            <a:schemeClr val="accent1"/>
+          </a:effectRef>
+          <a:fontRef idx="minor">
+            <a:schemeClr val="lt1"/>
+          </a:fontRef>
+        </p:style>
+        <p:txBody>
+          <a:bodyPr rtlCol="0" anchor="ctr" wrap="square" lIns="109728" rIns="109728" tIns="54864" bIns="54864"/>
+          <a:lstStyle/>
+          <a:p>
+            <a:pPr algn="ctr">
+              <a:spcAft>
+                <a:spcPts val="600"/>
+              </a:spcAft>
+            </a:pPr>
+            <a:r>
+              <a:rPr sz="1000" b="1">
+                <a:solidFill>
+                  <a:srgbClr val="0B3D7A"/>
+                </a:solidFill>
+              </a:rPr>
+              <a:t>Usage</a:t>
+            </a:r>
+          </a:p>
+        </p:txBody>
+      </p:sp>
+      <p:sp>
+        <p:nvSpPr>
+          <p:cNvPr id="19" name="Rounded Rectangle 18"/>
+          <p:cNvSpPr/>
+          <p:nvPr/>
+        </p:nvSpPr>
+        <p:spPr>
+          <a:xfrm>
+            <a:off x="15965424" y="3017520"/>
+            <a:ext cx="1627632" cy="384048"/>
+          </a:xfrm>
+          <a:prstGeom prst="roundRect">
+            <a:avLst>
+              <a:gd name="adj" fmla="val 10000"/>
+            </a:avLst>
+          </a:prstGeom>
+          <a:solidFill>
+            <a:srgbClr val="F5EFE9"/>
+          </a:solidFill>
+          <a:ln>
+            <a:noFill/>
+          </a:ln>
+          <a:effectLst/>
+        </p:spPr>
+        <p:style>
+          <a:lnRef idx="1">
+            <a:schemeClr val="accent1"/>
+          </a:lnRef>
+          <a:fillRef idx="3">
+            <a:schemeClr val="accent1"/>
+          </a:fillRef>
+          <a:effectRef idx="2">
+            <a:schemeClr val="accent1"/>
+          </a:effectRef>
+          <a:fontRef idx="minor">
+            <a:schemeClr val="lt1"/>
+          </a:fontRef>
+        </p:style>
+        <p:txBody>
+          <a:bodyPr rtlCol="0" anchor="ctr" wrap="square" lIns="109728" rIns="109728" tIns="54864" bIns="54864"/>
+          <a:lstStyle/>
+          <a:p>
+            <a:pPr algn="ctr">
+              <a:spcAft>
+                <a:spcPts val="600"/>
+              </a:spcAft>
+            </a:pPr>
+            <a:r>
+              <a:rPr sz="1000" b="1">
+                <a:solidFill>
+                  <a:srgbClr val="0B3D7A"/>
+                </a:solidFill>
+              </a:rPr>
+              <a:t>Usage scalar detail</a:t>
+            </a:r>
+          </a:p>
+        </p:txBody>
+      </p:sp>
+      <p:sp>
+        <p:nvSpPr>
+          <p:cNvPr id="20" name="Rounded Rectangle 19"/>
+          <p:cNvSpPr/>
+          <p:nvPr/>
+        </p:nvSpPr>
+        <p:spPr>
+          <a:xfrm>
+            <a:off x="17721072" y="3017520"/>
+            <a:ext cx="1627632" cy="384048"/>
+          </a:xfrm>
+          <a:prstGeom prst="roundRect">
+            <a:avLst>
+              <a:gd name="adj" fmla="val 10000"/>
+            </a:avLst>
+          </a:prstGeom>
+          <a:solidFill>
+            <a:srgbClr val="F5EFE9"/>
+          </a:solidFill>
+          <a:ln>
+            <a:noFill/>
+          </a:ln>
+          <a:effectLst/>
+        </p:spPr>
+        <p:style>
+          <a:lnRef idx="1">
+            <a:schemeClr val="accent1"/>
+          </a:lnRef>
+          <a:fillRef idx="3">
+            <a:schemeClr val="accent1"/>
+          </a:fillRef>
+          <a:effectRef idx="2">
+            <a:schemeClr val="accent1"/>
+          </a:effectRef>
+          <a:fontRef idx="minor">
+            <a:schemeClr val="lt1"/>
+          </a:fontRef>
+        </p:style>
+        <p:txBody>
+          <a:bodyPr rtlCol="0" anchor="ctr" wrap="square" lIns="109728" rIns="109728" tIns="54864" bIns="54864"/>
+          <a:lstStyle/>
+          <a:p>
+            <a:pPr algn="ctr">
+              <a:spcAft>
+                <a:spcPts val="600"/>
+              </a:spcAft>
+            </a:pPr>
+            <a:r>
+              <a:rPr sz="1000" b="1">
+                <a:solidFill>
+                  <a:srgbClr val="0B3D7A"/>
+                </a:solidFill>
+              </a:rPr>
+              <a:t>SA snapshot refresh</a:t>
+            </a:r>
+          </a:p>
+        </p:txBody>
+      </p:sp>
+      <p:sp>
+        <p:nvSpPr>
+          <p:cNvPr id="21" name="Diamond 20"/>
+          <p:cNvSpPr/>
+          <p:nvPr/>
+        </p:nvSpPr>
+        <p:spPr>
+          <a:xfrm>
+            <a:off x="17099280" y="4023360"/>
+            <a:ext cx="2103120" cy="960120"/>
+          </a:xfrm>
+          <a:prstGeom prst="diamond">
             <a:avLst/>
           </a:prstGeom>
           <a:solidFill>
@@ -9608,7 +12057,7 @@
           </a:fontRef>
         </p:style>
         <p:txBody>
-          <a:bodyPr rtlCol="0" anchor="ctr" wrap="square" lIns="0" rIns="0" tIns="54864" bIns="54864"/>
+          <a:bodyPr rtlCol="0" anchor="ctr" wrap="square" lIns="18288" rIns="18288" tIns="54864" bIns="54864"/>
           <a:lstStyle/>
           <a:p>
             <a:pPr algn="ctr">
@@ -9617,83 +12066,86 @@
               </a:spcAft>
             </a:pPr>
             <a:r>
-              <a:rPr sz="1500" b="1">
+              <a:rPr sz="1000" b="1">
                 <a:solidFill>
                   <a:srgbClr val="0B3D7A"/>
                 </a:solidFill>
               </a:rPr>
-              <a:t>1</a:t>
-            </a:r>
-          </a:p>
-        </p:txBody>
-      </p:sp>
-      <p:sp>
-        <p:nvSpPr>
-          <p:cNvPr id="7" name="TextBox 6"/>
-          <p:cNvSpPr txBox="1"/>
+              <a:t>ready gate: every job SUCCEEDED?</a:t>
+            </a:r>
+          </a:p>
+        </p:txBody>
+      </p:sp>
+      <p:sp>
+        <p:nvSpPr>
+          <p:cNvPr id="22" name="Diamond 21"/>
+          <p:cNvSpPr/>
           <p:nvPr/>
         </p:nvSpPr>
         <p:spPr>
           <a:xfrm>
-            <a:off x="1517904" y="1920240"/>
-            <a:ext cx="8252459" cy="1252728"/>
-          </a:xfrm>
-          <a:prstGeom prst="rect">
+            <a:off x="14264640" y="4023360"/>
+            <a:ext cx="2377440" cy="960120"/>
+          </a:xfrm>
+          <a:prstGeom prst="diamond">
             <a:avLst/>
           </a:prstGeom>
-          <a:noFill/>
-        </p:spPr>
-        <p:txBody>
-          <a:bodyPr wrap="square" anchor="t" lIns="0" rIns="0" tIns="54864" bIns="54864">
-            <a:spAutoFit/>
-          </a:bodyPr>
+          <a:solidFill>
+            <a:srgbClr val="FFA418"/>
+          </a:solidFill>
+          <a:ln>
+            <a:noFill/>
+          </a:ln>
+          <a:effectLst/>
+        </p:spPr>
+        <p:style>
+          <a:lnRef idx="1">
+            <a:schemeClr val="accent1"/>
+          </a:lnRef>
+          <a:fillRef idx="3">
+            <a:schemeClr val="accent1"/>
+          </a:fillRef>
+          <a:effectRef idx="2">
+            <a:schemeClr val="accent1"/>
+          </a:effectRef>
+          <a:fontRef idx="minor">
+            <a:schemeClr val="lt1"/>
+          </a:fontRef>
+        </p:style>
+        <p:txBody>
+          <a:bodyPr rtlCol="0" anchor="ctr" wrap="square" lIns="18288" rIns="18288" tIns="54864" bIns="54864"/>
           <a:lstStyle/>
           <a:p>
-            <a:pPr algn="l">
+            <a:pPr algn="ctr">
               <a:spcAft>
                 <a:spcPts val="600"/>
               </a:spcAft>
             </a:pPr>
             <a:r>
-              <a:rPr sz="1900" b="1">
+              <a:rPr sz="1000" b="1">
                 <a:solidFill>
                   <a:srgbClr val="0B3D7A"/>
                 </a:solidFill>
               </a:rPr>
-              <a:t>Preflight</a:t>
-            </a:r>
-          </a:p>
-          <a:p>
-            <a:pPr algn="l">
-              <a:spcAft>
-                <a:spcPts val="600"/>
-              </a:spcAft>
-            </a:pPr>
-            <a:r>
-              <a:rPr sz="1500" b="0">
-                <a:solidFill>
-                  <a:srgbClr val="4C5D69"/>
-                </a:solidFill>
-              </a:rPr>
-              <a:t>Proves the deploy user can read every CISADM table the snapshots need and write the target objects. A limited-privilege variant exists for locked-down instances.</a:t>
-            </a:r>
-          </a:p>
-        </p:txBody>
-      </p:sp>
-      <p:sp>
-        <p:nvSpPr>
-          <p:cNvPr id="8" name="Rounded Rectangle 7"/>
+              <a:t>validate and install gates pass?</a:t>
+            </a:r>
+          </a:p>
+        </p:txBody>
+      </p:sp>
+      <p:sp>
+        <p:nvSpPr>
+          <p:cNvPr id="23" name="Rounded Rectangle 22"/>
           <p:cNvSpPr/>
           <p:nvPr/>
         </p:nvSpPr>
         <p:spPr>
           <a:xfrm>
-            <a:off x="740664" y="3493008"/>
-            <a:ext cx="9212580" cy="1435607"/>
+            <a:off x="11612880" y="4114800"/>
+            <a:ext cx="2194560" cy="777240"/>
           </a:xfrm>
           <a:prstGeom prst="roundRect">
             <a:avLst>
-              <a:gd name="adj" fmla="val 8000"/>
+              <a:gd name="adj" fmla="val 10000"/>
             </a:avLst>
           </a:prstGeom>
           <a:solidFill>
@@ -9719,25 +12171,125 @@
           </a:fontRef>
         </p:style>
         <p:txBody>
-          <a:bodyPr rtlCol="0" anchor="ctr"/>
+          <a:bodyPr rtlCol="0" anchor="ctr" wrap="square" lIns="109728" rIns="109728" tIns="54864" bIns="54864"/>
           <a:lstStyle/>
           <a:p>
-            <a:pPr algn="ctr"/>
-          </a:p>
-        </p:txBody>
-      </p:sp>
-      <p:sp>
-        <p:nvSpPr>
-          <p:cNvPr id="9" name="Oval 8"/>
+            <a:pPr algn="l">
+              <a:spcAft>
+                <a:spcPts val="600"/>
+              </a:spcAft>
+            </a:pPr>
+            <a:r>
+              <a:rPr sz="1400" b="1">
+                <a:solidFill>
+                  <a:srgbClr val="0B3D7A"/>
+                </a:solidFill>
+              </a:rPr>
+              <a:t>Post-load indexes</a:t>
+            </a:r>
+          </a:p>
+          <a:p>
+            <a:pPr algn="l">
+              <a:spcAft>
+                <a:spcPts val="600"/>
+              </a:spcAft>
+            </a:pPr>
+            <a:r>
+              <a:rPr sz="1100" b="0">
+                <a:solidFill>
+                  <a:srgbClr val="4C5D69"/>
+                </a:solidFill>
+              </a:rPr>
+              <a:t>keys and dates the domains filter on</a:t>
+            </a:r>
+          </a:p>
+        </p:txBody>
+      </p:sp>
+      <p:sp>
+        <p:nvSpPr>
+          <p:cNvPr id="24" name="Rounded Rectangle 23"/>
           <p:cNvSpPr/>
           <p:nvPr/>
         </p:nvSpPr>
         <p:spPr>
           <a:xfrm>
-            <a:off x="941832" y="3694176"/>
-            <a:ext cx="457200" cy="457200"/>
-          </a:xfrm>
-          <a:prstGeom prst="ellipse">
+            <a:off x="8412480" y="4069080"/>
+            <a:ext cx="2743200" cy="868680"/>
+          </a:xfrm>
+          <a:prstGeom prst="roundRect">
+            <a:avLst>
+              <a:gd name="adj" fmla="val 10000"/>
+            </a:avLst>
+          </a:prstGeom>
+          <a:solidFill>
+            <a:srgbClr val="F5EFE9"/>
+          </a:solidFill>
+          <a:ln>
+            <a:noFill/>
+          </a:ln>
+          <a:effectLst/>
+        </p:spPr>
+        <p:style>
+          <a:lnRef idx="1">
+            <a:schemeClr val="accent1"/>
+          </a:lnRef>
+          <a:fillRef idx="3">
+            <a:schemeClr val="accent1"/>
+          </a:fillRef>
+          <a:effectRef idx="2">
+            <a:schemeClr val="accent1"/>
+          </a:effectRef>
+          <a:fontRef idx="minor">
+            <a:schemeClr val="lt1"/>
+          </a:fontRef>
+        </p:style>
+        <p:txBody>
+          <a:bodyPr rtlCol="0" anchor="ctr" wrap="square" lIns="109728" rIns="109728" tIns="54864" bIns="54864"/>
+          <a:lstStyle/>
+          <a:p>
+            <a:pPr algn="l">
+              <a:spcAft>
+                <a:spcPts val="600"/>
+              </a:spcAft>
+            </a:pPr>
+            <a:r>
+              <a:rPr sz="1400" b="1">
+                <a:solidFill>
+                  <a:srgbClr val="0B3D7A"/>
+                </a:solidFill>
+              </a:rPr>
+              <a:t>Rolling procedures</a:t>
+            </a:r>
+          </a:p>
+          <a:p>
+            <a:pPr algn="l">
+              <a:spcAft>
+                <a:spcPts val="600"/>
+              </a:spcAft>
+            </a:pPr>
+            <a:r>
+              <a:rPr sz="1100" b="0">
+                <a:solidFill>
+                  <a:srgbClr val="4C5D69"/>
+                </a:solidFill>
+              </a:rPr>
+              <a:t>3 months rebuilt, 24 kept; one operational refresh run by hand</a:t>
+            </a:r>
+          </a:p>
+        </p:txBody>
+      </p:sp>
+      <p:sp>
+        <p:nvSpPr>
+          <p:cNvPr id="25" name="Diamond 24"/>
+          <p:cNvSpPr/>
+          <p:nvPr/>
+        </p:nvSpPr>
+        <p:spPr>
+          <a:xfrm>
+            <a:off x="5943600" y="4023360"/>
+            <a:ext cx="2011680" cy="960120"/>
+          </a:xfrm>
+          <a:prstGeom prst="diamond">
             <a:avLst/>
           </a:prstGeom>
           <a:solidFill>
@@ -9763,7 +12315,7 @@
           </a:fontRef>
         </p:style>
         <p:txBody>
-          <a:bodyPr rtlCol="0" anchor="ctr" wrap="square" lIns="0" rIns="0" tIns="54864" bIns="54864"/>
+          <a:bodyPr rtlCol="0" anchor="ctr" wrap="square" lIns="18288" rIns="18288" tIns="54864" bIns="54864"/>
           <a:lstStyle/>
           <a:p>
             <a:pPr algn="ctr">
@@ -9772,83 +12324,30 @@
               </a:spcAft>
             </a:pPr>
             <a:r>
-              <a:rPr sz="1500" b="1">
+              <a:rPr sz="1000" b="1">
                 <a:solidFill>
                   <a:srgbClr val="0B3D7A"/>
                 </a:solidFill>
               </a:rPr>
-              <a:t>2</a:t>
-            </a:r>
-          </a:p>
-        </p:txBody>
-      </p:sp>
-      <p:sp>
-        <p:nvSpPr>
-          <p:cNvPr id="10" name="TextBox 9"/>
-          <p:cNvSpPr txBox="1"/>
-          <p:nvPr/>
-        </p:nvSpPr>
-        <p:spPr>
-          <a:xfrm>
-            <a:off x="1517904" y="3584448"/>
-            <a:ext cx="8252459" cy="1252728"/>
-          </a:xfrm>
-          <a:prstGeom prst="rect">
-            <a:avLst/>
-          </a:prstGeom>
-          <a:noFill/>
-        </p:spPr>
-        <p:txBody>
-          <a:bodyPr wrap="square" anchor="t" lIns="0" rIns="0" tIns="54864" bIns="54864">
-            <a:spAutoFit/>
-          </a:bodyPr>
-          <a:lstStyle/>
-          <a:p>
-            <a:pPr algn="l">
-              <a:spcAft>
-                <a:spcPts val="600"/>
-              </a:spcAft>
-            </a:pPr>
-            <a:r>
-              <a:rPr sz="1900" b="1">
-                <a:solidFill>
-                  <a:srgbClr val="0B3D7A"/>
-                </a:solidFill>
-              </a:rPr>
-              <a:t>Create the seven rolling snapshot tables</a:t>
-            </a:r>
-          </a:p>
-          <a:p>
-            <a:pPr algn="l">
-              <a:spcAft>
-                <a:spcPts val="600"/>
-              </a:spcAft>
-            </a:pPr>
-            <a:r>
-              <a:rPr sz="1500" b="0">
-                <a:solidFill>
-                  <a:srgbClr val="4C5D69"/>
-                </a:solidFill>
-              </a:rPr>
-              <a:t>Financial transactions, billed usage, SQ usage, GL distribution, measurements, usage and usage scalar detail: created empty with their keys, nothing loaded yet.</a:t>
-            </a:r>
-          </a:p>
-        </p:txBody>
-      </p:sp>
-      <p:sp>
-        <p:nvSpPr>
-          <p:cNvPr id="11" name="Rounded Rectangle 10"/>
+              <a:t>validated again?</a:t>
+            </a:r>
+          </a:p>
+        </p:txBody>
+      </p:sp>
+      <p:sp>
+        <p:nvSpPr>
+          <p:cNvPr id="26" name="Rounded Rectangle 25"/>
           <p:cNvSpPr/>
           <p:nvPr/>
         </p:nvSpPr>
         <p:spPr>
           <a:xfrm>
-            <a:off x="740664" y="5157216"/>
-            <a:ext cx="9212580" cy="1435607"/>
+            <a:off x="3063240" y="4069080"/>
+            <a:ext cx="2468880" cy="868680"/>
           </a:xfrm>
           <a:prstGeom prst="roundRect">
             <a:avLst>
-              <a:gd name="adj" fmla="val 8000"/>
+              <a:gd name="adj" fmla="val 10000"/>
             </a:avLst>
           </a:prstGeom>
           <a:solidFill>
@@ -9874,89 +12373,7 @@
           </a:fontRef>
         </p:style>
         <p:txBody>
-          <a:bodyPr rtlCol="0" anchor="ctr"/>
-          <a:lstStyle/>
-          <a:p>
-            <a:pPr algn="ctr"/>
-          </a:p>
-        </p:txBody>
-      </p:sp>
-      <p:sp>
-        <p:nvSpPr>
-          <p:cNvPr id="12" name="Oval 11"/>
-          <p:cNvSpPr/>
-          <p:nvPr/>
-        </p:nvSpPr>
-        <p:spPr>
-          <a:xfrm>
-            <a:off x="941832" y="5358383"/>
-            <a:ext cx="457200" cy="457200"/>
-          </a:xfrm>
-          <a:prstGeom prst="ellipse">
-            <a:avLst/>
-          </a:prstGeom>
-          <a:solidFill>
-            <a:srgbClr val="FFA418"/>
-          </a:solidFill>
-          <a:ln>
-            <a:noFill/>
-          </a:ln>
-          <a:effectLst/>
-        </p:spPr>
-        <p:style>
-          <a:lnRef idx="1">
-            <a:schemeClr val="accent1"/>
-          </a:lnRef>
-          <a:fillRef idx="3">
-            <a:schemeClr val="accent1"/>
-          </a:fillRef>
-          <a:effectRef idx="2">
-            <a:schemeClr val="accent1"/>
-          </a:effectRef>
-          <a:fontRef idx="minor">
-            <a:schemeClr val="lt1"/>
-          </a:fontRef>
-        </p:style>
-        <p:txBody>
-          <a:bodyPr rtlCol="0" anchor="ctr" wrap="square" lIns="0" rIns="0" tIns="54864" bIns="54864"/>
-          <a:lstStyle/>
-          <a:p>
-            <a:pPr algn="ctr">
-              <a:spcAft>
-                <a:spcPts val="600"/>
-              </a:spcAft>
-            </a:pPr>
-            <a:r>
-              <a:rPr sz="1500" b="1">
-                <a:solidFill>
-                  <a:srgbClr val="0B3D7A"/>
-                </a:solidFill>
-              </a:rPr>
-              <a:t>3</a:t>
-            </a:r>
-          </a:p>
-        </p:txBody>
-      </p:sp>
-      <p:sp>
-        <p:nvSpPr>
-          <p:cNvPr id="13" name="TextBox 12"/>
-          <p:cNvSpPr txBox="1"/>
-          <p:nvPr/>
-        </p:nvSpPr>
-        <p:spPr>
-          <a:xfrm>
-            <a:off x="1517904" y="5248655"/>
-            <a:ext cx="8252459" cy="1252728"/>
-          </a:xfrm>
-          <a:prstGeom prst="rect">
-            <a:avLst/>
-          </a:prstGeom>
-          <a:noFill/>
-        </p:spPr>
-        <p:txBody>
-          <a:bodyPr wrap="square" anchor="t" lIns="0" rIns="0" tIns="54864" bIns="54864">
-            <a:spAutoFit/>
-          </a:bodyPr>
+          <a:bodyPr rtlCol="0" anchor="ctr" wrap="square" lIns="109728" rIns="109728" tIns="54864" bIns="54864"/>
           <a:lstStyle/>
           <a:p>
             <a:pPr algn="l">
@@ -9965,12 +12382,12 @@
               </a:spcAft>
             </a:pPr>
             <a:r>
-              <a:rPr sz="1900" b="1">
+              <a:rPr sz="1400" b="1">
                 <a:solidFill>
                   <a:srgbClr val="0B3D7A"/>
                 </a:solidFill>
               </a:rPr>
-              <a:t>Create the domain-support objects</a:t>
+              <a:t>Schedule</a:t>
             </a:r>
           </a:p>
           <a:p>
@@ -9980,30 +12397,30 @@
               </a:spcAft>
             </a:pPr>
             <a:r>
-              <a:rPr sz="1500" b="0">
+              <a:rPr sz="1100" b="0">
                 <a:solidFill>
                   <a:srgbClr val="4C5D69"/>
                 </a:solidFill>
               </a:rPr>
-              <a:t>The SA aged-balance snapshot table, its snapshot-type lookup seed, and eight CMS views for device, asset, crew, field activity and case, with grants and the read-schema synonyms repaired.</a:t>
-            </a:r>
-          </a:p>
-        </p:txBody>
-      </p:sp>
-      <p:sp>
-        <p:nvSpPr>
-          <p:cNvPr id="14" name="Rounded Rectangle 13"/>
+              <a:t>twice daily, 30-minute stagger, held on TEST until approved</a:t>
+            </a:r>
+          </a:p>
+        </p:txBody>
+      </p:sp>
+      <p:sp>
+        <p:nvSpPr>
+          <p:cNvPr id="27" name="Rounded Rectangle 26"/>
           <p:cNvSpPr/>
           <p:nvPr/>
         </p:nvSpPr>
         <p:spPr>
           <a:xfrm>
-            <a:off x="740664" y="6821423"/>
-            <a:ext cx="9212580" cy="1435607"/>
+            <a:off x="740664" y="4069080"/>
+            <a:ext cx="1920240" cy="868680"/>
           </a:xfrm>
           <a:prstGeom prst="roundRect">
             <a:avLst>
-              <a:gd name="adj" fmla="val 8000"/>
+              <a:gd name="adj" fmla="val 10000"/>
             </a:avLst>
           </a:prstGeom>
           <a:solidFill>
@@ -10029,89 +12446,7 @@
           </a:fontRef>
         </p:style>
         <p:txBody>
-          <a:bodyPr rtlCol="0" anchor="ctr"/>
-          <a:lstStyle/>
-          <a:p>
-            <a:pPr algn="ctr"/>
-          </a:p>
-        </p:txBody>
-      </p:sp>
-      <p:sp>
-        <p:nvSpPr>
-          <p:cNvPr id="15" name="Oval 14"/>
-          <p:cNvSpPr/>
-          <p:nvPr/>
-        </p:nvSpPr>
-        <p:spPr>
-          <a:xfrm>
-            <a:off x="941832" y="7022591"/>
-            <a:ext cx="457200" cy="457200"/>
-          </a:xfrm>
-          <a:prstGeom prst="ellipse">
-            <a:avLst/>
-          </a:prstGeom>
-          <a:solidFill>
-            <a:srgbClr val="FFA418"/>
-          </a:solidFill>
-          <a:ln>
-            <a:noFill/>
-          </a:ln>
-          <a:effectLst/>
-        </p:spPr>
-        <p:style>
-          <a:lnRef idx="1">
-            <a:schemeClr val="accent1"/>
-          </a:lnRef>
-          <a:fillRef idx="3">
-            <a:schemeClr val="accent1"/>
-          </a:fillRef>
-          <a:effectRef idx="2">
-            <a:schemeClr val="accent1"/>
-          </a:effectRef>
-          <a:fontRef idx="minor">
-            <a:schemeClr val="lt1"/>
-          </a:fontRef>
-        </p:style>
-        <p:txBody>
-          <a:bodyPr rtlCol="0" anchor="ctr" wrap="square" lIns="0" rIns="0" tIns="54864" bIns="54864"/>
-          <a:lstStyle/>
-          <a:p>
-            <a:pPr algn="ctr">
-              <a:spcAft>
-                <a:spcPts val="600"/>
-              </a:spcAft>
-            </a:pPr>
-            <a:r>
-              <a:rPr sz="1500" b="1">
-                <a:solidFill>
-                  <a:srgbClr val="0B3D7A"/>
-                </a:solidFill>
-              </a:rPr>
-              <a:t>4</a:t>
-            </a:r>
-          </a:p>
-        </p:txBody>
-      </p:sp>
-      <p:sp>
-        <p:nvSpPr>
-          <p:cNvPr id="16" name="TextBox 15"/>
-          <p:cNvSpPr txBox="1"/>
-          <p:nvPr/>
-        </p:nvSpPr>
-        <p:spPr>
-          <a:xfrm>
-            <a:off x="1517904" y="6912863"/>
-            <a:ext cx="8252459" cy="1252728"/>
-          </a:xfrm>
-          <a:prstGeom prst="rect">
-            <a:avLst/>
-          </a:prstGeom>
-          <a:noFill/>
-        </p:spPr>
-        <p:txBody>
-          <a:bodyPr wrap="square" anchor="t" lIns="0" rIns="0" tIns="54864" bIns="54864">
-            <a:spAutoFit/>
-          </a:bodyPr>
+          <a:bodyPr rtlCol="0" anchor="ctr" wrap="square" lIns="109728" rIns="109728" tIns="54864" bIns="54864"/>
           <a:lstStyle/>
           <a:p>
             <a:pPr algn="l">
@@ -10120,12 +12455,12 @@
               </a:spcAft>
             </a:pPr>
             <a:r>
-              <a:rPr sz="1900" b="1">
+              <a:rPr sz="1400" b="1">
                 <a:solidFill>
                   <a:srgbClr val="0B3D7A"/>
                 </a:solidFill>
               </a:rPr>
-              <a:t>Deploy the procedures</a:t>
+              <a:t>Capture runs, data quality</a:t>
             </a:r>
           </a:p>
           <a:p>
@@ -10135,31 +12470,295 @@
               </a:spcAft>
             </a:pPr>
             <a:r>
-              <a:rPr sz="1500" b="0">
+              <a:rPr sz="1100" b="0">
                 <a:solidFill>
                   <a:srgbClr val="4C5D69"/>
                 </a:solidFill>
               </a:rPr>
-              <a:t>One baseline procedure per snapshot (the retained 24 months, loaded once) and one operational procedure; the aged-balance refresh procedure for the SA snapshot.</a:t>
-            </a:r>
-          </a:p>
-        </p:txBody>
-      </p:sp>
-      <p:sp>
-        <p:nvSpPr>
-          <p:cNvPr id="17" name="Rounded Rectangle 16"/>
+              <a:t>per client, kept with the log</a:t>
+            </a:r>
+          </a:p>
+        </p:txBody>
+      </p:sp>
+      <p:sp>
+        <p:nvSpPr>
+          <p:cNvPr id="28" name="TextBox 27"/>
+          <p:cNvSpPr txBox="1"/>
+          <p:nvPr/>
+        </p:nvSpPr>
+        <p:spPr>
+          <a:xfrm>
+            <a:off x="868680" y="6327648"/>
+            <a:ext cx="2103120" cy="320040"/>
+          </a:xfrm>
+          <a:prstGeom prst="rect">
+            <a:avLst/>
+          </a:prstGeom>
+          <a:noFill/>
+        </p:spPr>
+        <p:txBody>
+          <a:bodyPr wrap="square" anchor="t" lIns="0" rIns="0" tIns="54864" bIns="54864">
+            <a:spAutoFit/>
+          </a:bodyPr>
+          <a:lstStyle/>
+          <a:p>
+            <a:pPr algn="l">
+              <a:spcAft>
+                <a:spcPts val="600"/>
+              </a:spcAft>
+            </a:pPr>
+            <a:r>
+              <a:rPr sz="1200" b="1">
+                <a:solidFill>
+                  <a:srgbClr val="F5EFE9"/>
+                </a:solidFill>
+              </a:rPr>
+              <a:t>Finance</a:t>
+            </a:r>
+          </a:p>
+        </p:txBody>
+      </p:sp>
+      <p:sp>
+        <p:nvSpPr>
+          <p:cNvPr id="29" name="TextBox 28"/>
+          <p:cNvSpPr txBox="1"/>
+          <p:nvPr/>
+        </p:nvSpPr>
+        <p:spPr>
+          <a:xfrm>
+            <a:off x="3108960" y="6327648"/>
+            <a:ext cx="2103120" cy="320040"/>
+          </a:xfrm>
+          <a:prstGeom prst="rect">
+            <a:avLst/>
+          </a:prstGeom>
+          <a:noFill/>
+        </p:spPr>
+        <p:txBody>
+          <a:bodyPr wrap="square" anchor="t" lIns="0" rIns="0" tIns="54864" bIns="54864">
+            <a:spAutoFit/>
+          </a:bodyPr>
+          <a:lstStyle/>
+          <a:p>
+            <a:pPr algn="l">
+              <a:spcAft>
+                <a:spcPts val="600"/>
+              </a:spcAft>
+            </a:pPr>
+            <a:r>
+              <a:rPr sz="1200" b="1">
+                <a:solidFill>
+                  <a:srgbClr val="F5EFE9"/>
+                </a:solidFill>
+              </a:rPr>
+              <a:t>Billing and Rates</a:t>
+            </a:r>
+          </a:p>
+        </p:txBody>
+      </p:sp>
+      <p:sp>
+        <p:nvSpPr>
+          <p:cNvPr id="30" name="TextBox 29"/>
+          <p:cNvSpPr txBox="1"/>
+          <p:nvPr/>
+        </p:nvSpPr>
+        <p:spPr>
+          <a:xfrm>
+            <a:off x="5349240" y="6327648"/>
+            <a:ext cx="2103120" cy="320040"/>
+          </a:xfrm>
+          <a:prstGeom prst="rect">
+            <a:avLst/>
+          </a:prstGeom>
+          <a:noFill/>
+        </p:spPr>
+        <p:txBody>
+          <a:bodyPr wrap="square" anchor="t" lIns="0" rIns="0" tIns="54864" bIns="54864">
+            <a:spAutoFit/>
+          </a:bodyPr>
+          <a:lstStyle/>
+          <a:p>
+            <a:pPr algn="l">
+              <a:spcAft>
+                <a:spcPts val="600"/>
+              </a:spcAft>
+            </a:pPr>
+            <a:r>
+              <a:rPr sz="1200" b="1">
+                <a:solidFill>
+                  <a:srgbClr val="F5EFE9"/>
+                </a:solidFill>
+              </a:rPr>
+              <a:t>Meter Operations</a:t>
+            </a:r>
+          </a:p>
+        </p:txBody>
+      </p:sp>
+      <p:sp>
+        <p:nvSpPr>
+          <p:cNvPr id="31" name="TextBox 30"/>
+          <p:cNvSpPr txBox="1"/>
+          <p:nvPr/>
+        </p:nvSpPr>
+        <p:spPr>
+          <a:xfrm>
+            <a:off x="7863840" y="6327648"/>
+            <a:ext cx="2377440" cy="320040"/>
+          </a:xfrm>
+          <a:prstGeom prst="rect">
+            <a:avLst/>
+          </a:prstGeom>
+          <a:noFill/>
+        </p:spPr>
+        <p:txBody>
+          <a:bodyPr wrap="square" anchor="t" lIns="0" rIns="0" tIns="54864" bIns="54864">
+            <a:spAutoFit/>
+          </a:bodyPr>
+          <a:lstStyle/>
+          <a:p>
+            <a:pPr algn="l">
+              <a:spcAft>
+                <a:spcPts val="600"/>
+              </a:spcAft>
+            </a:pPr>
+            <a:r>
+              <a:rPr sz="1200" b="1">
+                <a:solidFill>
+                  <a:srgbClr val="F5EFE9"/>
+                </a:solidFill>
+              </a:rPr>
+              <a:t>Debt Management</a:t>
+            </a:r>
+          </a:p>
+        </p:txBody>
+      </p:sp>
+      <p:sp>
+        <p:nvSpPr>
+          <p:cNvPr id="32" name="TextBox 31"/>
+          <p:cNvSpPr txBox="1"/>
+          <p:nvPr/>
+        </p:nvSpPr>
+        <p:spPr>
+          <a:xfrm>
+            <a:off x="10515600" y="6327648"/>
+            <a:ext cx="2971800" cy="320040"/>
+          </a:xfrm>
+          <a:prstGeom prst="rect">
+            <a:avLst/>
+          </a:prstGeom>
+          <a:noFill/>
+        </p:spPr>
+        <p:txBody>
+          <a:bodyPr wrap="square" anchor="t" lIns="0" rIns="0" tIns="54864" bIns="54864">
+            <a:spAutoFit/>
+          </a:bodyPr>
+          <a:lstStyle/>
+          <a:p>
+            <a:pPr algn="l">
+              <a:spcAft>
+                <a:spcPts val="600"/>
+              </a:spcAft>
+            </a:pPr>
+            <a:r>
+              <a:rPr sz="1200" b="1">
+                <a:solidFill>
+                  <a:srgbClr val="F5EFE9"/>
+                </a:solidFill>
+              </a:rPr>
+              <a:t>Meter Operations views</a:t>
+            </a:r>
+          </a:p>
+        </p:txBody>
+      </p:sp>
+      <p:sp>
+        <p:nvSpPr>
+          <p:cNvPr id="33" name="TextBox 32"/>
+          <p:cNvSpPr txBox="1"/>
+          <p:nvPr/>
+        </p:nvSpPr>
+        <p:spPr>
+          <a:xfrm>
+            <a:off x="13716000" y="6327648"/>
+            <a:ext cx="3063240" cy="320040"/>
+          </a:xfrm>
+          <a:prstGeom prst="rect">
+            <a:avLst/>
+          </a:prstGeom>
+          <a:noFill/>
+        </p:spPr>
+        <p:txBody>
+          <a:bodyPr wrap="square" anchor="t" lIns="0" rIns="0" tIns="54864" bIns="54864">
+            <a:spAutoFit/>
+          </a:bodyPr>
+          <a:lstStyle/>
+          <a:p>
+            <a:pPr algn="l">
+              <a:spcAft>
+                <a:spcPts val="600"/>
+              </a:spcAft>
+            </a:pPr>
+            <a:r>
+              <a:rPr sz="1200" b="1">
+                <a:solidFill>
+                  <a:srgbClr val="F5EFE9"/>
+                </a:solidFill>
+              </a:rPr>
+              <a:t>Field Operations views</a:t>
+            </a:r>
+          </a:p>
+        </p:txBody>
+      </p:sp>
+      <p:sp>
+        <p:nvSpPr>
+          <p:cNvPr id="34" name="TextBox 33"/>
+          <p:cNvSpPr txBox="1"/>
+          <p:nvPr/>
+        </p:nvSpPr>
+        <p:spPr>
+          <a:xfrm>
+            <a:off x="17007840" y="6327648"/>
+            <a:ext cx="2194560" cy="320040"/>
+          </a:xfrm>
+          <a:prstGeom prst="rect">
+            <a:avLst/>
+          </a:prstGeom>
+          <a:noFill/>
+        </p:spPr>
+        <p:txBody>
+          <a:bodyPr wrap="square" anchor="t" lIns="0" rIns="0" tIns="54864" bIns="54864">
+            <a:spAutoFit/>
+          </a:bodyPr>
+          <a:lstStyle/>
+          <a:p>
+            <a:pPr algn="l">
+              <a:spcAft>
+                <a:spcPts val="600"/>
+              </a:spcAft>
+            </a:pPr>
+            <a:r>
+              <a:rPr sz="1200" b="1">
+                <a:solidFill>
+                  <a:srgbClr val="F5EFE9"/>
+                </a:solidFill>
+              </a:rPr>
+              <a:t>Customer Operations views</a:t>
+            </a:r>
+          </a:p>
+        </p:txBody>
+      </p:sp>
+      <p:sp>
+        <p:nvSpPr>
+          <p:cNvPr id="35" name="Can 34"/>
           <p:cNvSpPr/>
           <p:nvPr/>
         </p:nvSpPr>
         <p:spPr>
           <a:xfrm>
-            <a:off x="740664" y="8485632"/>
-            <a:ext cx="9212580" cy="1435607"/>
-          </a:xfrm>
-          <a:prstGeom prst="roundRect">
-            <a:avLst>
-              <a:gd name="adj" fmla="val 8000"/>
-            </a:avLst>
+            <a:off x="868680" y="6675120"/>
+            <a:ext cx="2103120" cy="822960"/>
+          </a:xfrm>
+          <a:prstGeom prst="can">
+            <a:avLst/>
           </a:prstGeom>
           <a:solidFill>
             <a:srgbClr val="F5EFE9"/>
@@ -10184,51 +12783,7 @@
           </a:fontRef>
         </p:style>
         <p:txBody>
-          <a:bodyPr rtlCol="0" anchor="ctr"/>
-          <a:lstStyle/>
-          <a:p>
-            <a:pPr algn="ctr"/>
-          </a:p>
-        </p:txBody>
-      </p:sp>
-      <p:sp>
-        <p:nvSpPr>
-          <p:cNvPr id="18" name="Oval 17"/>
-          <p:cNvSpPr/>
-          <p:nvPr/>
-        </p:nvSpPr>
-        <p:spPr>
-          <a:xfrm>
-            <a:off x="941832" y="8686800"/>
-            <a:ext cx="457200" cy="457200"/>
-          </a:xfrm>
-          <a:prstGeom prst="ellipse">
-            <a:avLst/>
-          </a:prstGeom>
-          <a:solidFill>
-            <a:srgbClr val="FFA418"/>
-          </a:solidFill>
-          <a:ln>
-            <a:noFill/>
-          </a:ln>
-          <a:effectLst/>
-        </p:spPr>
-        <p:style>
-          <a:lnRef idx="1">
-            <a:schemeClr val="accent1"/>
-          </a:lnRef>
-          <a:fillRef idx="3">
-            <a:schemeClr val="accent1"/>
-          </a:fillRef>
-          <a:effectRef idx="2">
-            <a:schemeClr val="accent1"/>
-          </a:effectRef>
-          <a:fontRef idx="minor">
-            <a:schemeClr val="lt1"/>
-          </a:fontRef>
-        </p:style>
-        <p:txBody>
-          <a:bodyPr rtlCol="0" anchor="ctr" wrap="square" lIns="0" rIns="0" tIns="54864" bIns="54864"/>
+          <a:bodyPr rtlCol="0" anchor="ctr" wrap="square" lIns="45720" rIns="45720" tIns="54864" bIns="54864"/>
           <a:lstStyle/>
           <a:p>
             <a:pPr algn="ctr">
@@ -10237,84 +12792,44 @@
               </a:spcAft>
             </a:pPr>
             <a:r>
-              <a:rPr sz="1500" b="1">
+              <a:rPr sz="1100" b="1">
                 <a:solidFill>
                   <a:srgbClr val="0B3D7A"/>
                 </a:solidFill>
               </a:rPr>
-              <a:t>5</a:t>
-            </a:r>
-          </a:p>
-        </p:txBody>
-      </p:sp>
-      <p:sp>
-        <p:nvSpPr>
-          <p:cNvPr id="19" name="TextBox 18"/>
-          <p:cNvSpPr txBox="1"/>
-          <p:nvPr/>
-        </p:nvSpPr>
-        <p:spPr>
-          <a:xfrm>
-            <a:off x="1517904" y="8577072"/>
-            <a:ext cx="8252459" cy="1252728"/>
-          </a:xfrm>
-          <a:prstGeom prst="rect">
-            <a:avLst/>
-          </a:prstGeom>
-          <a:noFill/>
-        </p:spPr>
-        <p:txBody>
-          <a:bodyPr wrap="square" anchor="t" lIns="0" rIns="0" tIns="54864" bIns="54864">
-            <a:spAutoFit/>
-          </a:bodyPr>
-          <a:lstStyle/>
-          <a:p>
-            <a:pPr algn="l">
+              <a:t>FT_RPT_CURR</a:t>
+            </a:r>
+          </a:p>
+          <a:p>
+            <a:pPr algn="ctr">
               <a:spcAft>
                 <a:spcPts val="600"/>
               </a:spcAft>
             </a:pPr>
             <a:r>
-              <a:rPr sz="1900" b="1">
-                <a:solidFill>
-                  <a:srgbClr val="0B3D7A"/>
+              <a:rPr sz="950" b="0">
+                <a:solidFill>
+                  <a:srgbClr val="4C5D69"/>
                 </a:solidFill>
               </a:rPr>
-              <a:t>Submit the baselines</a:t>
-            </a:r>
-          </a:p>
-          <a:p>
-            <a:pPr algn="l">
-              <a:spcAft>
-                <a:spcPts val="600"/>
-              </a:spcAft>
-            </a:pPr>
-            <a:r>
-              <a:rPr sz="1500" b="0">
-                <a:solidFill>
-                  <a:srgbClr val="4C5D69"/>
-                </a:solidFill>
-              </a:rPr>
-              <a:t>All eight loads submitted at once as database scheduler jobs; they run unattended and survive a dropped connection. The SA snapshot refresh runs alongside from live financial transactions.</a:t>
-            </a:r>
-          </a:p>
-        </p:txBody>
-      </p:sp>
-      <p:sp>
-        <p:nvSpPr>
-          <p:cNvPr id="20" name="Rounded Rectangle 19"/>
+              <a:t>financial transactions</a:t>
+            </a:r>
+          </a:p>
+        </p:txBody>
+      </p:sp>
+      <p:sp>
+        <p:nvSpPr>
+          <p:cNvPr id="36" name="Can 35"/>
           <p:cNvSpPr/>
           <p:nvPr/>
         </p:nvSpPr>
         <p:spPr>
           <a:xfrm>
-            <a:off x="10181844" y="1828800"/>
-            <a:ext cx="9212580" cy="1435607"/>
-          </a:xfrm>
-          <a:prstGeom prst="roundRect">
-            <a:avLst>
-              <a:gd name="adj" fmla="val 8000"/>
-            </a:avLst>
+            <a:off x="868680" y="7635240"/>
+            <a:ext cx="2103120" cy="822960"/>
+          </a:xfrm>
+          <a:prstGeom prst="can">
+            <a:avLst/>
           </a:prstGeom>
           <a:solidFill>
             <a:srgbClr val="F5EFE9"/>
@@ -10339,51 +12854,7 @@
           </a:fontRef>
         </p:style>
         <p:txBody>
-          <a:bodyPr rtlCol="0" anchor="ctr"/>
-          <a:lstStyle/>
-          <a:p>
-            <a:pPr algn="ctr"/>
-          </a:p>
-        </p:txBody>
-      </p:sp>
-      <p:sp>
-        <p:nvSpPr>
-          <p:cNvPr id="21" name="Oval 20"/>
-          <p:cNvSpPr/>
-          <p:nvPr/>
-        </p:nvSpPr>
-        <p:spPr>
-          <a:xfrm>
-            <a:off x="10383012" y="2029968"/>
-            <a:ext cx="457200" cy="457200"/>
-          </a:xfrm>
-          <a:prstGeom prst="ellipse">
-            <a:avLst/>
-          </a:prstGeom>
-          <a:solidFill>
-            <a:srgbClr val="FFA418"/>
-          </a:solidFill>
-          <a:ln>
-            <a:noFill/>
-          </a:ln>
-          <a:effectLst/>
-        </p:spPr>
-        <p:style>
-          <a:lnRef idx="1">
-            <a:schemeClr val="accent1"/>
-          </a:lnRef>
-          <a:fillRef idx="3">
-            <a:schemeClr val="accent1"/>
-          </a:fillRef>
-          <a:effectRef idx="2">
-            <a:schemeClr val="accent1"/>
-          </a:effectRef>
-          <a:fontRef idx="minor">
-            <a:schemeClr val="lt1"/>
-          </a:fontRef>
-        </p:style>
-        <p:txBody>
-          <a:bodyPr rtlCol="0" anchor="ctr" wrap="square" lIns="0" rIns="0" tIns="54864" bIns="54864"/>
+          <a:bodyPr rtlCol="0" anchor="ctr" wrap="square" lIns="45720" rIns="45720" tIns="54864" bIns="54864"/>
           <a:lstStyle/>
           <a:p>
             <a:pPr algn="ctr">
@@ -10392,84 +12863,44 @@
               </a:spcAft>
             </a:pPr>
             <a:r>
-              <a:rPr sz="1500" b="1">
+              <a:rPr sz="950" b="1">
                 <a:solidFill>
                   <a:srgbClr val="0B3D7A"/>
                 </a:solidFill>
               </a:rPr>
-              <a:t>6</a:t>
-            </a:r>
-          </a:p>
-        </p:txBody>
-      </p:sp>
-      <p:sp>
-        <p:nvSpPr>
-          <p:cNvPr id="22" name="TextBox 21"/>
-          <p:cNvSpPr txBox="1"/>
-          <p:nvPr/>
-        </p:nvSpPr>
-        <p:spPr>
-          <a:xfrm>
-            <a:off x="10959084" y="1920240"/>
-            <a:ext cx="8252459" cy="1252728"/>
-          </a:xfrm>
-          <a:prstGeom prst="rect">
-            <a:avLst/>
-          </a:prstGeom>
-          <a:noFill/>
-        </p:spPr>
-        <p:txBody>
-          <a:bodyPr wrap="square" anchor="t" lIns="0" rIns="0" tIns="54864" bIns="54864">
-            <a:spAutoFit/>
-          </a:bodyPr>
-          <a:lstStyle/>
-          <a:p>
-            <a:pPr algn="l">
+              <a:t>FT_GL_DISTRIBUTION_RPT_CURR</a:t>
+            </a:r>
+          </a:p>
+          <a:p>
+            <a:pPr algn="ctr">
               <a:spcAft>
                 <a:spcPts val="600"/>
               </a:spcAft>
             </a:pPr>
             <a:r>
-              <a:rPr sz="1900" b="1">
-                <a:solidFill>
-                  <a:srgbClr val="0B3D7A"/>
+              <a:rPr sz="950" b="0">
+                <a:solidFill>
+                  <a:srgbClr val="4C5D69"/>
                 </a:solidFill>
               </a:rPr>
-              <a:t>Ready gate</a:t>
-            </a:r>
-          </a:p>
-          <a:p>
-            <a:pPr algn="l">
-              <a:spcAft>
-                <a:spcPts val="600"/>
-              </a:spcAft>
-            </a:pPr>
-            <a:r>
-              <a:rPr sz="1500" b="0">
-                <a:solidFill>
-                  <a:srgbClr val="4C5D69"/>
-                </a:solidFill>
-              </a:rPr>
-              <a:t>The scheduler's job table is polled up to eight hours until every job reports SUCCEEDED. A FAILED or missing job stops the rollout.</a:t>
-            </a:r>
-          </a:p>
-        </p:txBody>
-      </p:sp>
-      <p:sp>
-        <p:nvSpPr>
-          <p:cNvPr id="23" name="Rounded Rectangle 22"/>
+              <a:t>GL distribution</a:t>
+            </a:r>
+          </a:p>
+        </p:txBody>
+      </p:sp>
+      <p:sp>
+        <p:nvSpPr>
+          <p:cNvPr id="37" name="Can 36"/>
           <p:cNvSpPr/>
           <p:nvPr/>
         </p:nvSpPr>
         <p:spPr>
           <a:xfrm>
-            <a:off x="10181844" y="3493008"/>
-            <a:ext cx="9212580" cy="1435607"/>
-          </a:xfrm>
-          <a:prstGeom prst="roundRect">
-            <a:avLst>
-              <a:gd name="adj" fmla="val 8000"/>
-            </a:avLst>
+            <a:off x="3108960" y="6675120"/>
+            <a:ext cx="2103120" cy="822960"/>
+          </a:xfrm>
+          <a:prstGeom prst="can">
+            <a:avLst/>
           </a:prstGeom>
           <a:solidFill>
             <a:srgbClr val="F5EFE9"/>
@@ -10494,51 +12925,7 @@
           </a:fontRef>
         </p:style>
         <p:txBody>
-          <a:bodyPr rtlCol="0" anchor="ctr"/>
-          <a:lstStyle/>
-          <a:p>
-            <a:pPr algn="ctr"/>
-          </a:p>
-        </p:txBody>
-      </p:sp>
-      <p:sp>
-        <p:nvSpPr>
-          <p:cNvPr id="24" name="Oval 23"/>
-          <p:cNvSpPr/>
-          <p:nvPr/>
-        </p:nvSpPr>
-        <p:spPr>
-          <a:xfrm>
-            <a:off x="10383012" y="3694176"/>
-            <a:ext cx="457200" cy="457200"/>
-          </a:xfrm>
-          <a:prstGeom prst="ellipse">
-            <a:avLst/>
-          </a:prstGeom>
-          <a:solidFill>
-            <a:srgbClr val="FFA418"/>
-          </a:solidFill>
-          <a:ln>
-            <a:noFill/>
-          </a:ln>
-          <a:effectLst/>
-        </p:spPr>
-        <p:style>
-          <a:lnRef idx="1">
-            <a:schemeClr val="accent1"/>
-          </a:lnRef>
-          <a:fillRef idx="3">
-            <a:schemeClr val="accent1"/>
-          </a:fillRef>
-          <a:effectRef idx="2">
-            <a:schemeClr val="accent1"/>
-          </a:effectRef>
-          <a:fontRef idx="minor">
-            <a:schemeClr val="lt1"/>
-          </a:fontRef>
-        </p:style>
-        <p:txBody>
-          <a:bodyPr rtlCol="0" anchor="ctr" wrap="square" lIns="0" rIns="0" tIns="54864" bIns="54864"/>
+          <a:bodyPr rtlCol="0" anchor="ctr" wrap="square" lIns="45720" rIns="45720" tIns="54864" bIns="54864"/>
           <a:lstStyle/>
           <a:p>
             <a:pPr algn="ctr">
@@ -10547,84 +12934,44 @@
               </a:spcAft>
             </a:pPr>
             <a:r>
-              <a:rPr sz="1500" b="1">
+              <a:rPr sz="950" b="1">
                 <a:solidFill>
                   <a:srgbClr val="0B3D7A"/>
                 </a:solidFill>
               </a:rPr>
-              <a:t>7</a:t>
-            </a:r>
-          </a:p>
-        </p:txBody>
-      </p:sp>
-      <p:sp>
-        <p:nvSpPr>
-          <p:cNvPr id="25" name="TextBox 24"/>
-          <p:cNvSpPr txBox="1"/>
-          <p:nvPr/>
-        </p:nvSpPr>
-        <p:spPr>
-          <a:xfrm>
-            <a:off x="10959084" y="3584448"/>
-            <a:ext cx="8252459" cy="1252728"/>
-          </a:xfrm>
-          <a:prstGeom prst="rect">
-            <a:avLst/>
-          </a:prstGeom>
-          <a:noFill/>
-        </p:spPr>
-        <p:txBody>
-          <a:bodyPr wrap="square" anchor="t" lIns="0" rIns="0" tIns="54864" bIns="54864">
-            <a:spAutoFit/>
-          </a:bodyPr>
-          <a:lstStyle/>
-          <a:p>
-            <a:pPr algn="l">
+              <a:t>BSEG_BILLED_USAGE_RPT_CURR</a:t>
+            </a:r>
+          </a:p>
+          <a:p>
+            <a:pPr algn="ctr">
               <a:spcAft>
                 <a:spcPts val="600"/>
               </a:spcAft>
             </a:pPr>
             <a:r>
-              <a:rPr sz="1900" b="1">
-                <a:solidFill>
-                  <a:srgbClr val="0B3D7A"/>
+              <a:rPr sz="950" b="0">
+                <a:solidFill>
+                  <a:srgbClr val="4C5D69"/>
                 </a:solidFill>
               </a:rPr>
-              <a:t>Validate and gate</a:t>
-            </a:r>
-          </a:p>
-          <a:p>
-            <a:pPr algn="l">
-              <a:spcAft>
-                <a:spcPts val="600"/>
-              </a:spcAft>
-            </a:pPr>
-            <a:r>
-              <a:rPr sz="1500" b="0">
-                <a:solidFill>
-                  <a:srgbClr val="4C5D69"/>
-                </a:solidFill>
-              </a:rPr>
-              <a:t>Row counts, twelve monthly totals against the source, duplicate keys. The install gate fails on any empty table or duplicate key. Domain support: views valid, lookup seeded, aging buckets sum to the balance, FT parity.</a:t>
-            </a:r>
-          </a:p>
-        </p:txBody>
-      </p:sp>
-      <p:sp>
-        <p:nvSpPr>
-          <p:cNvPr id="26" name="Rounded Rectangle 25"/>
+              <a:t>billed usage per segment</a:t>
+            </a:r>
+          </a:p>
+        </p:txBody>
+      </p:sp>
+      <p:sp>
+        <p:nvSpPr>
+          <p:cNvPr id="38" name="Can 37"/>
           <p:cNvSpPr/>
           <p:nvPr/>
         </p:nvSpPr>
         <p:spPr>
           <a:xfrm>
-            <a:off x="10181844" y="5157216"/>
-            <a:ext cx="9212580" cy="1435607"/>
-          </a:xfrm>
-          <a:prstGeom prst="roundRect">
-            <a:avLst>
-              <a:gd name="adj" fmla="val 8000"/>
-            </a:avLst>
+            <a:off x="3108960" y="7635240"/>
+            <a:ext cx="2103120" cy="822960"/>
+          </a:xfrm>
+          <a:prstGeom prst="can">
+            <a:avLst/>
           </a:prstGeom>
           <a:solidFill>
             <a:srgbClr val="F5EFE9"/>
@@ -10649,51 +12996,7 @@
           </a:fontRef>
         </p:style>
         <p:txBody>
-          <a:bodyPr rtlCol="0" anchor="ctr"/>
-          <a:lstStyle/>
-          <a:p>
-            <a:pPr algn="ctr"/>
-          </a:p>
-        </p:txBody>
-      </p:sp>
-      <p:sp>
-        <p:nvSpPr>
-          <p:cNvPr id="27" name="Oval 26"/>
-          <p:cNvSpPr/>
-          <p:nvPr/>
-        </p:nvSpPr>
-        <p:spPr>
-          <a:xfrm>
-            <a:off x="10383012" y="5358383"/>
-            <a:ext cx="457200" cy="457200"/>
-          </a:xfrm>
-          <a:prstGeom prst="ellipse">
-            <a:avLst/>
-          </a:prstGeom>
-          <a:solidFill>
-            <a:srgbClr val="FFA418"/>
-          </a:solidFill>
-          <a:ln>
-            <a:noFill/>
-          </a:ln>
-          <a:effectLst/>
-        </p:spPr>
-        <p:style>
-          <a:lnRef idx="1">
-            <a:schemeClr val="accent1"/>
-          </a:lnRef>
-          <a:fillRef idx="3">
-            <a:schemeClr val="accent1"/>
-          </a:fillRef>
-          <a:effectRef idx="2">
-            <a:schemeClr val="accent1"/>
-          </a:effectRef>
-          <a:fontRef idx="minor">
-            <a:schemeClr val="lt1"/>
-          </a:fontRef>
-        </p:style>
-        <p:txBody>
-          <a:bodyPr rtlCol="0" anchor="ctr" wrap="square" lIns="0" rIns="0" tIns="54864" bIns="54864"/>
+          <a:bodyPr rtlCol="0" anchor="ctr" wrap="square" lIns="45720" rIns="45720" tIns="54864" bIns="54864"/>
           <a:lstStyle/>
           <a:p>
             <a:pPr algn="ctr">
@@ -10702,84 +13005,44 @@
               </a:spcAft>
             </a:pPr>
             <a:r>
-              <a:rPr sz="1500" b="1">
+              <a:rPr sz="950" b="1">
                 <a:solidFill>
                   <a:srgbClr val="0B3D7A"/>
                 </a:solidFill>
               </a:rPr>
-              <a:t>8</a:t>
-            </a:r>
-          </a:p>
-        </p:txBody>
-      </p:sp>
-      <p:sp>
-        <p:nvSpPr>
-          <p:cNvPr id="28" name="TextBox 27"/>
-          <p:cNvSpPr txBox="1"/>
-          <p:nvPr/>
-        </p:nvSpPr>
-        <p:spPr>
-          <a:xfrm>
-            <a:off x="10959084" y="5248655"/>
-            <a:ext cx="8252459" cy="1252728"/>
-          </a:xfrm>
-          <a:prstGeom prst="rect">
-            <a:avLst/>
-          </a:prstGeom>
-          <a:noFill/>
-        </p:spPr>
-        <p:txBody>
-          <a:bodyPr wrap="square" anchor="t" lIns="0" rIns="0" tIns="54864" bIns="54864">
-            <a:spAutoFit/>
-          </a:bodyPr>
-          <a:lstStyle/>
-          <a:p>
-            <a:pPr algn="l">
+              <a:t>BSEG_SQ_USAGE_RPT_CURR</a:t>
+            </a:r>
+          </a:p>
+          <a:p>
+            <a:pPr algn="ctr">
               <a:spcAft>
                 <a:spcPts val="600"/>
               </a:spcAft>
             </a:pPr>
             <a:r>
-              <a:rPr sz="1900" b="1">
-                <a:solidFill>
-                  <a:srgbClr val="0B3D7A"/>
+              <a:rPr sz="950" b="0">
+                <a:solidFill>
+                  <a:srgbClr val="4C5D69"/>
                 </a:solidFill>
               </a:rPr>
-              <a:t>Post-load indexes</a:t>
-            </a:r>
-          </a:p>
-          <a:p>
-            <a:pPr algn="l">
-              <a:spcAft>
-                <a:spcPts val="600"/>
-              </a:spcAft>
-            </a:pPr>
-            <a:r>
-              <a:rPr sz="1500" b="0">
-                <a:solidFill>
-                  <a:srgbClr val="4C5D69"/>
-                </a:solidFill>
-              </a:rPr>
-              <a:t>Indexes on the keys and dates the domains filter on, created after the load so the baseline is never slowed by them.</a:t>
-            </a:r>
-          </a:p>
-        </p:txBody>
-      </p:sp>
-      <p:sp>
-        <p:nvSpPr>
-          <p:cNvPr id="29" name="Rounded Rectangle 28"/>
+              <a:t>service quantities</a:t>
+            </a:r>
+          </a:p>
+        </p:txBody>
+      </p:sp>
+      <p:sp>
+        <p:nvSpPr>
+          <p:cNvPr id="39" name="Can 38"/>
           <p:cNvSpPr/>
           <p:nvPr/>
         </p:nvSpPr>
         <p:spPr>
           <a:xfrm>
-            <a:off x="10181844" y="6821423"/>
-            <a:ext cx="9212580" cy="1435607"/>
-          </a:xfrm>
-          <a:prstGeom prst="roundRect">
-            <a:avLst>
-              <a:gd name="adj" fmla="val 8000"/>
-            </a:avLst>
+            <a:off x="5349240" y="6675120"/>
+            <a:ext cx="2103120" cy="594360"/>
+          </a:xfrm>
+          <a:prstGeom prst="can">
+            <a:avLst/>
           </a:prstGeom>
           <a:solidFill>
             <a:srgbClr val="F5EFE9"/>
@@ -10804,51 +13067,7 @@
           </a:fontRef>
         </p:style>
         <p:txBody>
-          <a:bodyPr rtlCol="0" anchor="ctr"/>
-          <a:lstStyle/>
-          <a:p>
-            <a:pPr algn="ctr"/>
-          </a:p>
-        </p:txBody>
-      </p:sp>
-      <p:sp>
-        <p:nvSpPr>
-          <p:cNvPr id="30" name="Oval 29"/>
-          <p:cNvSpPr/>
-          <p:nvPr/>
-        </p:nvSpPr>
-        <p:spPr>
-          <a:xfrm>
-            <a:off x="10383012" y="7022591"/>
-            <a:ext cx="457200" cy="457200"/>
-          </a:xfrm>
-          <a:prstGeom prst="ellipse">
-            <a:avLst/>
-          </a:prstGeom>
-          <a:solidFill>
-            <a:srgbClr val="FFA418"/>
-          </a:solidFill>
-          <a:ln>
-            <a:noFill/>
-          </a:ln>
-          <a:effectLst/>
-        </p:spPr>
-        <p:style>
-          <a:lnRef idx="1">
-            <a:schemeClr val="accent1"/>
-          </a:lnRef>
-          <a:fillRef idx="3">
-            <a:schemeClr val="accent1"/>
-          </a:fillRef>
-          <a:effectRef idx="2">
-            <a:schemeClr val="accent1"/>
-          </a:effectRef>
-          <a:fontRef idx="minor">
-            <a:schemeClr val="lt1"/>
-          </a:fontRef>
-        </p:style>
-        <p:txBody>
-          <a:bodyPr rtlCol="0" anchor="ctr" wrap="square" lIns="0" rIns="0" tIns="54864" bIns="54864"/>
+          <a:bodyPr rtlCol="0" anchor="ctr" wrap="square" lIns="45720" rIns="45720" tIns="54864" bIns="54864"/>
           <a:lstStyle/>
           <a:p>
             <a:pPr algn="ctr">
@@ -10857,84 +13076,44 @@
               </a:spcAft>
             </a:pPr>
             <a:r>
-              <a:rPr sz="1500" b="1">
+              <a:rPr sz="950" b="1">
                 <a:solidFill>
                   <a:srgbClr val="0B3D7A"/>
                 </a:solidFill>
               </a:rPr>
-              <a:t>9</a:t>
-            </a:r>
-          </a:p>
-        </p:txBody>
-      </p:sp>
-      <p:sp>
-        <p:nvSpPr>
-          <p:cNvPr id="31" name="TextBox 30"/>
-          <p:cNvSpPr txBox="1"/>
-          <p:nvPr/>
-        </p:nvSpPr>
-        <p:spPr>
-          <a:xfrm>
-            <a:off x="10959084" y="6912863"/>
-            <a:ext cx="8252459" cy="1252728"/>
-          </a:xfrm>
-          <a:prstGeom prst="rect">
-            <a:avLst/>
-          </a:prstGeom>
-          <a:noFill/>
-        </p:spPr>
-        <p:txBody>
-          <a:bodyPr wrap="square" anchor="t" lIns="0" rIns="0" tIns="54864" bIns="54864">
-            <a:spAutoFit/>
-          </a:bodyPr>
-          <a:lstStyle/>
-          <a:p>
-            <a:pPr algn="l">
+              <a:t>D1_MSRMT_RPT_CURR</a:t>
+            </a:r>
+          </a:p>
+          <a:p>
+            <a:pPr algn="ctr">
               <a:spcAft>
                 <a:spcPts val="600"/>
               </a:spcAft>
             </a:pPr>
             <a:r>
-              <a:rPr sz="1900" b="1">
-                <a:solidFill>
-                  <a:srgbClr val="0B3D7A"/>
+              <a:rPr sz="950" b="0">
+                <a:solidFill>
+                  <a:srgbClr val="4C5D69"/>
                 </a:solidFill>
               </a:rPr>
-              <a:t>Rolling cutover</a:t>
-            </a:r>
-          </a:p>
-          <a:p>
-            <a:pPr algn="l">
-              <a:spcAft>
-                <a:spcPts val="600"/>
-              </a:spcAft>
-            </a:pPr>
-            <a:r>
-              <a:rPr sz="1500" b="0">
-                <a:solidFill>
-                  <a:srgbClr val="4C5D69"/>
-                </a:solidFill>
-              </a:rPr>
-              <a:t>Rolling procedures installed (3 months rebuilt, 24 kept; 6-month at CityCorp and Odessa), one operational refresh run by hand and validated again. Long refreshes run as background jobs, never in the session.</a:t>
-            </a:r>
-          </a:p>
-        </p:txBody>
-      </p:sp>
-      <p:sp>
-        <p:nvSpPr>
-          <p:cNvPr id="32" name="Rounded Rectangle 31"/>
+              <a:t>measurements</a:t>
+            </a:r>
+          </a:p>
+        </p:txBody>
+      </p:sp>
+      <p:sp>
+        <p:nvSpPr>
+          <p:cNvPr id="40" name="Can 39"/>
           <p:cNvSpPr/>
           <p:nvPr/>
         </p:nvSpPr>
         <p:spPr>
           <a:xfrm>
-            <a:off x="10181844" y="8485632"/>
-            <a:ext cx="9212580" cy="1435607"/>
-          </a:xfrm>
-          <a:prstGeom prst="roundRect">
-            <a:avLst>
-              <a:gd name="adj" fmla="val 8000"/>
-            </a:avLst>
+            <a:off x="5349240" y="7360920"/>
+            <a:ext cx="2103120" cy="594360"/>
+          </a:xfrm>
+          <a:prstGeom prst="can">
+            <a:avLst/>
           </a:prstGeom>
           <a:solidFill>
             <a:srgbClr val="F5EFE9"/>
@@ -10959,29 +13138,56 @@
           </a:fontRef>
         </p:style>
         <p:txBody>
-          <a:bodyPr rtlCol="0" anchor="ctr"/>
+          <a:bodyPr rtlCol="0" anchor="ctr" wrap="square" lIns="45720" rIns="45720" tIns="54864" bIns="54864"/>
           <a:lstStyle/>
           <a:p>
-            <a:pPr algn="ctr"/>
-          </a:p>
-        </p:txBody>
-      </p:sp>
-      <p:sp>
-        <p:nvSpPr>
-          <p:cNvPr id="33" name="Oval 32"/>
+            <a:pPr algn="ctr">
+              <a:spcAft>
+                <a:spcPts val="600"/>
+              </a:spcAft>
+            </a:pPr>
+            <a:r>
+              <a:rPr sz="950" b="1">
+                <a:solidFill>
+                  <a:srgbClr val="0B3D7A"/>
+                </a:solidFill>
+              </a:rPr>
+              <a:t>D1_USAGE_RPT_CURR</a:t>
+            </a:r>
+          </a:p>
+          <a:p>
+            <a:pPr algn="ctr">
+              <a:spcAft>
+                <a:spcPts val="600"/>
+              </a:spcAft>
+            </a:pPr>
+            <a:r>
+              <a:rPr sz="950" b="0">
+                <a:solidFill>
+                  <a:srgbClr val="4C5D69"/>
+                </a:solidFill>
+              </a:rPr>
+              <a:t>usage transactions</a:t>
+            </a:r>
+          </a:p>
+        </p:txBody>
+      </p:sp>
+      <p:sp>
+        <p:nvSpPr>
+          <p:cNvPr id="41" name="Can 40"/>
           <p:cNvSpPr/>
           <p:nvPr/>
         </p:nvSpPr>
         <p:spPr>
           <a:xfrm>
-            <a:off x="10383012" y="8686800"/>
-            <a:ext cx="457200" cy="457200"/>
-          </a:xfrm>
-          <a:prstGeom prst="ellipse">
+            <a:off x="5349240" y="8046720"/>
+            <a:ext cx="2103120" cy="594360"/>
+          </a:xfrm>
+          <a:prstGeom prst="can">
             <a:avLst/>
           </a:prstGeom>
           <a:solidFill>
-            <a:srgbClr val="FFA418"/>
+            <a:srgbClr val="F5EFE9"/>
           </a:solidFill>
           <a:ln>
             <a:noFill/>
@@ -11003,7 +13209,7 @@
           </a:fontRef>
         </p:style>
         <p:txBody>
-          <a:bodyPr rtlCol="0" anchor="ctr" wrap="square" lIns="0" rIns="0" tIns="54864" bIns="54864"/>
+          <a:bodyPr rtlCol="0" anchor="ctr" wrap="square" lIns="45720" rIns="45720" tIns="54864" bIns="54864"/>
           <a:lstStyle/>
           <a:p>
             <a:pPr algn="ctr">
@@ -11012,26 +13218,1708 @@
               </a:spcAft>
             </a:pPr>
             <a:r>
-              <a:rPr sz="1500" b="1">
+              <a:rPr sz="900" b="1">
                 <a:solidFill>
                   <a:srgbClr val="0B3D7A"/>
                 </a:solidFill>
               </a:rPr>
-              <a:t>10</a:t>
-            </a:r>
-          </a:p>
-        </p:txBody>
-      </p:sp>
-      <p:sp>
-        <p:nvSpPr>
-          <p:cNvPr id="34" name="TextBox 33"/>
+              <a:t>D1_USAGE_SCALAR_DTL_RPT_CURR</a:t>
+            </a:r>
+          </a:p>
+          <a:p>
+            <a:pPr algn="ctr">
+              <a:spcAft>
+                <a:spcPts val="600"/>
+              </a:spcAft>
+            </a:pPr>
+            <a:r>
+              <a:rPr sz="950" b="0">
+                <a:solidFill>
+                  <a:srgbClr val="4C5D69"/>
+                </a:solidFill>
+              </a:rPr>
+              <a:t>usage scalar detail</a:t>
+            </a:r>
+          </a:p>
+        </p:txBody>
+      </p:sp>
+      <p:sp>
+        <p:nvSpPr>
+          <p:cNvPr id="42" name="Rounded Rectangle 41"/>
+          <p:cNvSpPr/>
+          <p:nvPr/>
+        </p:nvSpPr>
+        <p:spPr>
+          <a:xfrm>
+            <a:off x="868680" y="9006840"/>
+            <a:ext cx="2103120" cy="548640"/>
+          </a:xfrm>
+          <a:prstGeom prst="roundRect">
+            <a:avLst>
+              <a:gd name="adj" fmla="val 35000"/>
+            </a:avLst>
+          </a:prstGeom>
+          <a:solidFill>
+            <a:srgbClr val="FFFFFF"/>
+          </a:solidFill>
+          <a:ln>
+            <a:noFill/>
+          </a:ln>
+          <a:effectLst/>
+        </p:spPr>
+        <p:style>
+          <a:lnRef idx="1">
+            <a:schemeClr val="accent1"/>
+          </a:lnRef>
+          <a:fillRef idx="3">
+            <a:schemeClr val="accent1"/>
+          </a:fillRef>
+          <a:effectRef idx="2">
+            <a:schemeClr val="accent1"/>
+          </a:effectRef>
+          <a:fontRef idx="minor">
+            <a:schemeClr val="lt1"/>
+          </a:fontRef>
+        </p:style>
+        <p:txBody>
+          <a:bodyPr rtlCol="0" anchor="ctr" wrap="square" lIns="73152" rIns="73152" tIns="54864" bIns="54864"/>
+          <a:lstStyle/>
+          <a:p>
+            <a:pPr algn="ctr">
+              <a:spcAft>
+                <a:spcPts val="600"/>
+              </a:spcAft>
+            </a:pPr>
+            <a:r>
+              <a:rPr sz="1100" b="1">
+                <a:solidFill>
+                  <a:srgbClr val="0B3D7A"/>
+                </a:solidFill>
+              </a:rPr>
+              <a:t>Finance domains</a:t>
+            </a:r>
+          </a:p>
+        </p:txBody>
+      </p:sp>
+      <p:sp>
+        <p:nvSpPr>
+          <p:cNvPr id="43" name="Rounded Rectangle 42"/>
+          <p:cNvSpPr/>
+          <p:nvPr/>
+        </p:nvSpPr>
+        <p:spPr>
+          <a:xfrm>
+            <a:off x="3108960" y="9006840"/>
+            <a:ext cx="2103120" cy="548640"/>
+          </a:xfrm>
+          <a:prstGeom prst="roundRect">
+            <a:avLst>
+              <a:gd name="adj" fmla="val 35000"/>
+            </a:avLst>
+          </a:prstGeom>
+          <a:solidFill>
+            <a:srgbClr val="FFFFFF"/>
+          </a:solidFill>
+          <a:ln>
+            <a:noFill/>
+          </a:ln>
+          <a:effectLst/>
+        </p:spPr>
+        <p:style>
+          <a:lnRef idx="1">
+            <a:schemeClr val="accent1"/>
+          </a:lnRef>
+          <a:fillRef idx="3">
+            <a:schemeClr val="accent1"/>
+          </a:fillRef>
+          <a:effectRef idx="2">
+            <a:schemeClr val="accent1"/>
+          </a:effectRef>
+          <a:fontRef idx="minor">
+            <a:schemeClr val="lt1"/>
+          </a:fontRef>
+        </p:style>
+        <p:txBody>
+          <a:bodyPr rtlCol="0" anchor="ctr" wrap="square" lIns="73152" rIns="73152" tIns="54864" bIns="54864"/>
+          <a:lstStyle/>
+          <a:p>
+            <a:pPr algn="ctr">
+              <a:spcAft>
+                <a:spcPts val="600"/>
+              </a:spcAft>
+            </a:pPr>
+            <a:r>
+              <a:rPr sz="1000" b="1">
+                <a:solidFill>
+                  <a:srgbClr val="0B3D7A"/>
+                </a:solidFill>
+              </a:rPr>
+              <a:t>Billing and Rates domains</a:t>
+            </a:r>
+          </a:p>
+        </p:txBody>
+      </p:sp>
+      <p:sp>
+        <p:nvSpPr>
+          <p:cNvPr id="44" name="Rounded Rectangle 43"/>
+          <p:cNvSpPr/>
+          <p:nvPr/>
+        </p:nvSpPr>
+        <p:spPr>
+          <a:xfrm>
+            <a:off x="5349240" y="9006840"/>
+            <a:ext cx="2103120" cy="548640"/>
+          </a:xfrm>
+          <a:prstGeom prst="roundRect">
+            <a:avLst>
+              <a:gd name="adj" fmla="val 35000"/>
+            </a:avLst>
+          </a:prstGeom>
+          <a:solidFill>
+            <a:srgbClr val="FFFFFF"/>
+          </a:solidFill>
+          <a:ln>
+            <a:noFill/>
+          </a:ln>
+          <a:effectLst/>
+        </p:spPr>
+        <p:style>
+          <a:lnRef idx="1">
+            <a:schemeClr val="accent1"/>
+          </a:lnRef>
+          <a:fillRef idx="3">
+            <a:schemeClr val="accent1"/>
+          </a:fillRef>
+          <a:effectRef idx="2">
+            <a:schemeClr val="accent1"/>
+          </a:effectRef>
+          <a:fontRef idx="minor">
+            <a:schemeClr val="lt1"/>
+          </a:fontRef>
+        </p:style>
+        <p:txBody>
+          <a:bodyPr rtlCol="0" anchor="ctr" wrap="square" lIns="73152" rIns="73152" tIns="54864" bIns="54864"/>
+          <a:lstStyle/>
+          <a:p>
+            <a:pPr algn="ctr">
+              <a:spcAft>
+                <a:spcPts val="600"/>
+              </a:spcAft>
+            </a:pPr>
+            <a:r>
+              <a:rPr sz="1000" b="1">
+                <a:solidFill>
+                  <a:srgbClr val="0B3D7A"/>
+                </a:solidFill>
+              </a:rPr>
+              <a:t>Usage and measurement domains</a:t>
+            </a:r>
+          </a:p>
+        </p:txBody>
+      </p:sp>
+      <p:sp>
+        <p:nvSpPr>
+          <p:cNvPr id="45" name="Can 44"/>
+          <p:cNvSpPr/>
+          <p:nvPr/>
+        </p:nvSpPr>
+        <p:spPr>
+          <a:xfrm>
+            <a:off x="7863840" y="6675120"/>
+            <a:ext cx="2377440" cy="868680"/>
+          </a:xfrm>
+          <a:prstGeom prst="can">
+            <a:avLst/>
+          </a:prstGeom>
+          <a:solidFill>
+            <a:srgbClr val="F5EFE9"/>
+          </a:solidFill>
+          <a:ln>
+            <a:noFill/>
+          </a:ln>
+          <a:effectLst/>
+        </p:spPr>
+        <p:style>
+          <a:lnRef idx="1">
+            <a:schemeClr val="accent1"/>
+          </a:lnRef>
+          <a:fillRef idx="3">
+            <a:schemeClr val="accent1"/>
+          </a:fillRef>
+          <a:effectRef idx="2">
+            <a:schemeClr val="accent1"/>
+          </a:effectRef>
+          <a:fontRef idx="minor">
+            <a:schemeClr val="lt1"/>
+          </a:fontRef>
+        </p:style>
+        <p:txBody>
+          <a:bodyPr rtlCol="0" anchor="ctr" wrap="square" lIns="45720" rIns="45720" tIns="54864" bIns="54864"/>
+          <a:lstStyle/>
+          <a:p>
+            <a:pPr algn="ctr">
+              <a:spcAft>
+                <a:spcPts val="600"/>
+              </a:spcAft>
+            </a:pPr>
+            <a:r>
+              <a:rPr sz="1000" b="1">
+                <a:solidFill>
+                  <a:srgbClr val="0B3D7A"/>
+                </a:solidFill>
+              </a:rPr>
+              <a:t>CMS_SA_SNAPSHOT</a:t>
+            </a:r>
+          </a:p>
+          <a:p>
+            <a:pPr algn="ctr">
+              <a:spcAft>
+                <a:spcPts val="600"/>
+              </a:spcAft>
+            </a:pPr>
+            <a:r>
+              <a:rPr sz="950" b="0">
+                <a:solidFill>
+                  <a:srgbClr val="4C5D69"/>
+                </a:solidFill>
+              </a:rPr>
+              <a:t>aged balance per SA, refreshed by procedure</a:t>
+            </a:r>
+          </a:p>
+        </p:txBody>
+      </p:sp>
+      <p:sp>
+        <p:nvSpPr>
+          <p:cNvPr id="46" name="Rounded Rectangle 45"/>
+          <p:cNvSpPr/>
+          <p:nvPr/>
+        </p:nvSpPr>
+        <p:spPr>
+          <a:xfrm>
+            <a:off x="7863840" y="7726679"/>
+            <a:ext cx="2377440" cy="640080"/>
+          </a:xfrm>
+          <a:prstGeom prst="roundRect">
+            <a:avLst>
+              <a:gd name="adj" fmla="val 10000"/>
+            </a:avLst>
+          </a:prstGeom>
+          <a:solidFill>
+            <a:srgbClr val="F5EFE9"/>
+          </a:solidFill>
+          <a:ln>
+            <a:noFill/>
+          </a:ln>
+          <a:effectLst/>
+        </p:spPr>
+        <p:style>
+          <a:lnRef idx="1">
+            <a:schemeClr val="accent1"/>
+          </a:lnRef>
+          <a:fillRef idx="3">
+            <a:schemeClr val="accent1"/>
+          </a:fillRef>
+          <a:effectRef idx="2">
+            <a:schemeClr val="accent1"/>
+          </a:effectRef>
+          <a:fontRef idx="minor">
+            <a:schemeClr val="lt1"/>
+          </a:fontRef>
+        </p:style>
+        <p:txBody>
+          <a:bodyPr rtlCol="0" anchor="ctr" wrap="square" lIns="109728" rIns="109728" tIns="54864" bIns="54864"/>
+          <a:lstStyle/>
+          <a:p>
+            <a:pPr algn="ctr">
+              <a:spcAft>
+                <a:spcPts val="600"/>
+              </a:spcAft>
+            </a:pPr>
+            <a:r>
+              <a:rPr sz="1000" b="1">
+                <a:solidFill>
+                  <a:srgbClr val="0B3D7A"/>
+                </a:solidFill>
+              </a:rPr>
+              <a:t>CM_SNAPSHOT_TYPE_FLG</a:t>
+            </a:r>
+          </a:p>
+          <a:p>
+            <a:pPr algn="ctr">
+              <a:spcAft>
+                <a:spcPts val="600"/>
+              </a:spcAft>
+            </a:pPr>
+            <a:r>
+              <a:rPr sz="950" b="0">
+                <a:solidFill>
+                  <a:srgbClr val="4C5D69"/>
+                </a:solidFill>
+              </a:rPr>
+              <a:t>lookup seed: LDAY, EMON, ARCH, LEMN</a:t>
+            </a:r>
+          </a:p>
+        </p:txBody>
+      </p:sp>
+      <p:sp>
+        <p:nvSpPr>
+          <p:cNvPr id="47" name="Rounded Rectangle 46"/>
+          <p:cNvSpPr/>
+          <p:nvPr/>
+        </p:nvSpPr>
+        <p:spPr>
+          <a:xfrm>
+            <a:off x="7863840" y="9006840"/>
+            <a:ext cx="2377440" cy="548640"/>
+          </a:xfrm>
+          <a:prstGeom prst="roundRect">
+            <a:avLst>
+              <a:gd name="adj" fmla="val 35000"/>
+            </a:avLst>
+          </a:prstGeom>
+          <a:solidFill>
+            <a:srgbClr val="FFFFFF"/>
+          </a:solidFill>
+          <a:ln>
+            <a:noFill/>
+          </a:ln>
+          <a:effectLst/>
+        </p:spPr>
+        <p:style>
+          <a:lnRef idx="1">
+            <a:schemeClr val="accent1"/>
+          </a:lnRef>
+          <a:fillRef idx="3">
+            <a:schemeClr val="accent1"/>
+          </a:fillRef>
+          <a:effectRef idx="2">
+            <a:schemeClr val="accent1"/>
+          </a:effectRef>
+          <a:fontRef idx="minor">
+            <a:schemeClr val="lt1"/>
+          </a:fontRef>
+        </p:style>
+        <p:txBody>
+          <a:bodyPr rtlCol="0" anchor="ctr" wrap="square" lIns="73152" rIns="73152" tIns="54864" bIns="54864"/>
+          <a:lstStyle/>
+          <a:p>
+            <a:pPr algn="ctr">
+              <a:spcAft>
+                <a:spcPts val="600"/>
+              </a:spcAft>
+            </a:pPr>
+            <a:r>
+              <a:rPr sz="1000" b="1">
+                <a:solidFill>
+                  <a:srgbClr val="0B3D7A"/>
+                </a:solidFill>
+              </a:rPr>
+              <a:t>SA Snapshot Aged Balance domain</a:t>
+            </a:r>
+          </a:p>
+        </p:txBody>
+      </p:sp>
+      <p:sp>
+        <p:nvSpPr>
+          <p:cNvPr id="48" name="Rounded Rectangle 47"/>
+          <p:cNvSpPr/>
+          <p:nvPr/>
+        </p:nvSpPr>
+        <p:spPr>
+          <a:xfrm>
+            <a:off x="10515600" y="6675120"/>
+            <a:ext cx="2971800" cy="457200"/>
+          </a:xfrm>
+          <a:prstGeom prst="roundRect">
+            <a:avLst>
+              <a:gd name="adj" fmla="val 10000"/>
+            </a:avLst>
+          </a:prstGeom>
+          <a:solidFill>
+            <a:srgbClr val="F5EFE9"/>
+          </a:solidFill>
+          <a:ln>
+            <a:noFill/>
+          </a:ln>
+          <a:effectLst/>
+        </p:spPr>
+        <p:style>
+          <a:lnRef idx="1">
+            <a:schemeClr val="accent1"/>
+          </a:lnRef>
+          <a:fillRef idx="3">
+            <a:schemeClr val="accent1"/>
+          </a:fillRef>
+          <a:effectRef idx="2">
+            <a:schemeClr val="accent1"/>
+          </a:effectRef>
+          <a:fontRef idx="minor">
+            <a:schemeClr val="lt1"/>
+          </a:fontRef>
+        </p:style>
+        <p:txBody>
+          <a:bodyPr rtlCol="0" anchor="ctr" wrap="square" lIns="109728" rIns="109728" tIns="54864" bIns="54864"/>
+          <a:lstStyle/>
+          <a:p>
+            <a:pPr algn="ctr">
+              <a:spcAft>
+                <a:spcPts val="600"/>
+              </a:spcAft>
+            </a:pPr>
+            <a:r>
+              <a:rPr sz="900" b="1">
+                <a:solidFill>
+                  <a:srgbClr val="0B3D7A"/>
+                </a:solidFill>
+              </a:rPr>
+              <a:t>CMS_D1_DVC_IDENTIFIER_VW</a:t>
+            </a:r>
+          </a:p>
+        </p:txBody>
+      </p:sp>
+      <p:sp>
+        <p:nvSpPr>
+          <p:cNvPr id="49" name="Rounded Rectangle 48"/>
+          <p:cNvSpPr/>
+          <p:nvPr/>
+        </p:nvSpPr>
+        <p:spPr>
+          <a:xfrm>
+            <a:off x="10515600" y="7223760"/>
+            <a:ext cx="2971800" cy="457200"/>
+          </a:xfrm>
+          <a:prstGeom prst="roundRect">
+            <a:avLst>
+              <a:gd name="adj" fmla="val 10000"/>
+            </a:avLst>
+          </a:prstGeom>
+          <a:solidFill>
+            <a:srgbClr val="F5EFE9"/>
+          </a:solidFill>
+          <a:ln>
+            <a:noFill/>
+          </a:ln>
+          <a:effectLst/>
+        </p:spPr>
+        <p:style>
+          <a:lnRef idx="1">
+            <a:schemeClr val="accent1"/>
+          </a:lnRef>
+          <a:fillRef idx="3">
+            <a:schemeClr val="accent1"/>
+          </a:fillRef>
+          <a:effectRef idx="2">
+            <a:schemeClr val="accent1"/>
+          </a:effectRef>
+          <a:fontRef idx="minor">
+            <a:schemeClr val="lt1"/>
+          </a:fontRef>
+        </p:style>
+        <p:txBody>
+          <a:bodyPr rtlCol="0" anchor="ctr" wrap="square" lIns="109728" rIns="109728" tIns="54864" bIns="54864"/>
+          <a:lstStyle/>
+          <a:p>
+            <a:pPr algn="ctr">
+              <a:spcAft>
+                <a:spcPts val="600"/>
+              </a:spcAft>
+            </a:pPr>
+            <a:r>
+              <a:rPr sz="900" b="1">
+                <a:solidFill>
+                  <a:srgbClr val="0B3D7A"/>
+                </a:solidFill>
+              </a:rPr>
+              <a:t>CMS_D1_DVC_BODA_VW</a:t>
+            </a:r>
+          </a:p>
+        </p:txBody>
+      </p:sp>
+      <p:sp>
+        <p:nvSpPr>
+          <p:cNvPr id="50" name="Rounded Rectangle 49"/>
+          <p:cNvSpPr/>
+          <p:nvPr/>
+        </p:nvSpPr>
+        <p:spPr>
+          <a:xfrm>
+            <a:off x="10515600" y="7772400"/>
+            <a:ext cx="2971800" cy="457200"/>
+          </a:xfrm>
+          <a:prstGeom prst="roundRect">
+            <a:avLst>
+              <a:gd name="adj" fmla="val 10000"/>
+            </a:avLst>
+          </a:prstGeom>
+          <a:solidFill>
+            <a:srgbClr val="F5EFE9"/>
+          </a:solidFill>
+          <a:ln>
+            <a:noFill/>
+          </a:ln>
+          <a:effectLst/>
+        </p:spPr>
+        <p:style>
+          <a:lnRef idx="1">
+            <a:schemeClr val="accent1"/>
+          </a:lnRef>
+          <a:fillRef idx="3">
+            <a:schemeClr val="accent1"/>
+          </a:fillRef>
+          <a:effectRef idx="2">
+            <a:schemeClr val="accent1"/>
+          </a:effectRef>
+          <a:fontRef idx="minor">
+            <a:schemeClr val="lt1"/>
+          </a:fontRef>
+        </p:style>
+        <p:txBody>
+          <a:bodyPr rtlCol="0" anchor="ctr" wrap="square" lIns="109728" rIns="109728" tIns="54864" bIns="54864"/>
+          <a:lstStyle/>
+          <a:p>
+            <a:pPr algn="ctr">
+              <a:spcAft>
+                <a:spcPts val="600"/>
+              </a:spcAft>
+            </a:pPr>
+            <a:r>
+              <a:rPr sz="900" b="1">
+                <a:solidFill>
+                  <a:srgbClr val="0B3D7A"/>
+                </a:solidFill>
+              </a:rPr>
+              <a:t>CMS_W1_ASSET_IDENTIFIER_VW</a:t>
+            </a:r>
+          </a:p>
+        </p:txBody>
+      </p:sp>
+      <p:sp>
+        <p:nvSpPr>
+          <p:cNvPr id="51" name="Rounded Rectangle 50"/>
+          <p:cNvSpPr/>
+          <p:nvPr/>
+        </p:nvSpPr>
+        <p:spPr>
+          <a:xfrm>
+            <a:off x="10515600" y="9006840"/>
+            <a:ext cx="1417320" cy="548640"/>
+          </a:xfrm>
+          <a:prstGeom prst="roundRect">
+            <a:avLst>
+              <a:gd name="adj" fmla="val 35000"/>
+            </a:avLst>
+          </a:prstGeom>
+          <a:solidFill>
+            <a:srgbClr val="FFFFFF"/>
+          </a:solidFill>
+          <a:ln>
+            <a:noFill/>
+          </a:ln>
+          <a:effectLst/>
+        </p:spPr>
+        <p:style>
+          <a:lnRef idx="1">
+            <a:schemeClr val="accent1"/>
+          </a:lnRef>
+          <a:fillRef idx="3">
+            <a:schemeClr val="accent1"/>
+          </a:fillRef>
+          <a:effectRef idx="2">
+            <a:schemeClr val="accent1"/>
+          </a:effectRef>
+          <a:fontRef idx="minor">
+            <a:schemeClr val="lt1"/>
+          </a:fontRef>
+        </p:style>
+        <p:txBody>
+          <a:bodyPr rtlCol="0" anchor="ctr" wrap="square" lIns="73152" rIns="73152" tIns="54864" bIns="54864"/>
+          <a:lstStyle/>
+          <a:p>
+            <a:pPr algn="ctr">
+              <a:spcAft>
+                <a:spcPts val="600"/>
+              </a:spcAft>
+            </a:pPr>
+            <a:r>
+              <a:rPr sz="1000" b="1">
+                <a:solidFill>
+                  <a:srgbClr val="0B3D7A"/>
+                </a:solidFill>
+              </a:rPr>
+              <a:t>Device domain</a:t>
+            </a:r>
+          </a:p>
+        </p:txBody>
+      </p:sp>
+      <p:sp>
+        <p:nvSpPr>
+          <p:cNvPr id="52" name="Rounded Rectangle 51"/>
+          <p:cNvSpPr/>
+          <p:nvPr/>
+        </p:nvSpPr>
+        <p:spPr>
+          <a:xfrm>
+            <a:off x="12070080" y="9006840"/>
+            <a:ext cx="1417320" cy="548640"/>
+          </a:xfrm>
+          <a:prstGeom prst="roundRect">
+            <a:avLst>
+              <a:gd name="adj" fmla="val 35000"/>
+            </a:avLst>
+          </a:prstGeom>
+          <a:solidFill>
+            <a:srgbClr val="FFFFFF"/>
+          </a:solidFill>
+          <a:ln>
+            <a:noFill/>
+          </a:ln>
+          <a:effectLst/>
+        </p:spPr>
+        <p:style>
+          <a:lnRef idx="1">
+            <a:schemeClr val="accent1"/>
+          </a:lnRef>
+          <a:fillRef idx="3">
+            <a:schemeClr val="accent1"/>
+          </a:fillRef>
+          <a:effectRef idx="2">
+            <a:schemeClr val="accent1"/>
+          </a:effectRef>
+          <a:fontRef idx="minor">
+            <a:schemeClr val="lt1"/>
+          </a:fontRef>
+        </p:style>
+        <p:txBody>
+          <a:bodyPr rtlCol="0" anchor="ctr" wrap="square" lIns="73152" rIns="73152" tIns="54864" bIns="54864"/>
+          <a:lstStyle/>
+          <a:p>
+            <a:pPr algn="ctr">
+              <a:spcAft>
+                <a:spcPts val="600"/>
+              </a:spcAft>
+            </a:pPr>
+            <a:r>
+              <a:rPr sz="1000" b="1">
+                <a:solidFill>
+                  <a:srgbClr val="0B3D7A"/>
+                </a:solidFill>
+              </a:rPr>
+              <a:t>Asset domain</a:t>
+            </a:r>
+          </a:p>
+        </p:txBody>
+      </p:sp>
+      <p:sp>
+        <p:nvSpPr>
+          <p:cNvPr id="53" name="Rounded Rectangle 52"/>
+          <p:cNvSpPr/>
+          <p:nvPr/>
+        </p:nvSpPr>
+        <p:spPr>
+          <a:xfrm>
+            <a:off x="13716000" y="6675120"/>
+            <a:ext cx="3063240" cy="457200"/>
+          </a:xfrm>
+          <a:prstGeom prst="roundRect">
+            <a:avLst>
+              <a:gd name="adj" fmla="val 10000"/>
+            </a:avLst>
+          </a:prstGeom>
+          <a:solidFill>
+            <a:srgbClr val="F5EFE9"/>
+          </a:solidFill>
+          <a:ln>
+            <a:noFill/>
+          </a:ln>
+          <a:effectLst/>
+        </p:spPr>
+        <p:style>
+          <a:lnRef idx="1">
+            <a:schemeClr val="accent1"/>
+          </a:lnRef>
+          <a:fillRef idx="3">
+            <a:schemeClr val="accent1"/>
+          </a:fillRef>
+          <a:effectRef idx="2">
+            <a:schemeClr val="accent1"/>
+          </a:effectRef>
+          <a:fontRef idx="minor">
+            <a:schemeClr val="lt1"/>
+          </a:fontRef>
+        </p:style>
+        <p:txBody>
+          <a:bodyPr rtlCol="0" anchor="ctr" wrap="square" lIns="109728" rIns="109728" tIns="54864" bIns="54864"/>
+          <a:lstStyle/>
+          <a:p>
+            <a:pPr algn="ctr">
+              <a:spcAft>
+                <a:spcPts val="600"/>
+              </a:spcAft>
+            </a:pPr>
+            <a:r>
+              <a:rPr sz="900" b="1">
+                <a:solidFill>
+                  <a:srgbClr val="0B3D7A"/>
+                </a:solidFill>
+              </a:rPr>
+              <a:t>CMS_C1_REPRESENTATIVE_BODA_VW</a:t>
+            </a:r>
+          </a:p>
+        </p:txBody>
+      </p:sp>
+      <p:sp>
+        <p:nvSpPr>
+          <p:cNvPr id="54" name="Rounded Rectangle 53"/>
+          <p:cNvSpPr/>
+          <p:nvPr/>
+        </p:nvSpPr>
+        <p:spPr>
+          <a:xfrm>
+            <a:off x="13716000" y="7223760"/>
+            <a:ext cx="3063240" cy="457200"/>
+          </a:xfrm>
+          <a:prstGeom prst="roundRect">
+            <a:avLst>
+              <a:gd name="adj" fmla="val 10000"/>
+            </a:avLst>
+          </a:prstGeom>
+          <a:solidFill>
+            <a:srgbClr val="F5EFE9"/>
+          </a:solidFill>
+          <a:ln>
+            <a:noFill/>
+          </a:ln>
+          <a:effectLst/>
+        </p:spPr>
+        <p:style>
+          <a:lnRef idx="1">
+            <a:schemeClr val="accent1"/>
+          </a:lnRef>
+          <a:fillRef idx="3">
+            <a:schemeClr val="accent1"/>
+          </a:fillRef>
+          <a:effectRef idx="2">
+            <a:schemeClr val="accent1"/>
+          </a:effectRef>
+          <a:fontRef idx="minor">
+            <a:schemeClr val="lt1"/>
+          </a:fontRef>
+        </p:style>
+        <p:txBody>
+          <a:bodyPr rtlCol="0" anchor="ctr" wrap="square" lIns="109728" rIns="109728" tIns="54864" bIns="54864"/>
+          <a:lstStyle/>
+          <a:p>
+            <a:pPr algn="ctr">
+              <a:spcAft>
+                <a:spcPts val="600"/>
+              </a:spcAft>
+            </a:pPr>
+            <a:r>
+              <a:rPr sz="900" b="1">
+                <a:solidFill>
+                  <a:srgbClr val="0B3D7A"/>
+                </a:solidFill>
+              </a:rPr>
+              <a:t>CMS_D1_ACTIVITY_CHAR_VW</a:t>
+            </a:r>
+          </a:p>
+        </p:txBody>
+      </p:sp>
+      <p:sp>
+        <p:nvSpPr>
+          <p:cNvPr id="55" name="Rounded Rectangle 54"/>
+          <p:cNvSpPr/>
+          <p:nvPr/>
+        </p:nvSpPr>
+        <p:spPr>
+          <a:xfrm>
+            <a:off x="13716000" y="7772400"/>
+            <a:ext cx="3063240" cy="457200"/>
+          </a:xfrm>
+          <a:prstGeom prst="roundRect">
+            <a:avLst>
+              <a:gd name="adj" fmla="val 10000"/>
+            </a:avLst>
+          </a:prstGeom>
+          <a:solidFill>
+            <a:srgbClr val="F5EFE9"/>
+          </a:solidFill>
+          <a:ln>
+            <a:noFill/>
+          </a:ln>
+          <a:effectLst/>
+        </p:spPr>
+        <p:style>
+          <a:lnRef idx="1">
+            <a:schemeClr val="accent1"/>
+          </a:lnRef>
+          <a:fillRef idx="3">
+            <a:schemeClr val="accent1"/>
+          </a:fillRef>
+          <a:effectRef idx="2">
+            <a:schemeClr val="accent1"/>
+          </a:effectRef>
+          <a:fontRef idx="minor">
+            <a:schemeClr val="lt1"/>
+          </a:fontRef>
+        </p:style>
+        <p:txBody>
+          <a:bodyPr rtlCol="0" anchor="ctr" wrap="square" lIns="109728" rIns="109728" tIns="54864" bIns="54864"/>
+          <a:lstStyle/>
+          <a:p>
+            <a:pPr algn="ctr">
+              <a:spcAft>
+                <a:spcPts val="600"/>
+              </a:spcAft>
+            </a:pPr>
+            <a:r>
+              <a:rPr sz="900" b="1">
+                <a:solidFill>
+                  <a:srgbClr val="0B3D7A"/>
+                </a:solidFill>
+              </a:rPr>
+              <a:t>CMS_D1_ACTIVITY_D1FA_BODA_VW</a:t>
+            </a:r>
+          </a:p>
+        </p:txBody>
+      </p:sp>
+      <p:sp>
+        <p:nvSpPr>
+          <p:cNvPr id="56" name="Rounded Rectangle 55"/>
+          <p:cNvSpPr/>
+          <p:nvPr/>
+        </p:nvSpPr>
+        <p:spPr>
+          <a:xfrm>
+            <a:off x="13716000" y="9006840"/>
+            <a:ext cx="1463040" cy="548640"/>
+          </a:xfrm>
+          <a:prstGeom prst="roundRect">
+            <a:avLst>
+              <a:gd name="adj" fmla="val 35000"/>
+            </a:avLst>
+          </a:prstGeom>
+          <a:solidFill>
+            <a:srgbClr val="FFFFFF"/>
+          </a:solidFill>
+          <a:ln>
+            <a:noFill/>
+          </a:ln>
+          <a:effectLst/>
+        </p:spPr>
+        <p:style>
+          <a:lnRef idx="1">
+            <a:schemeClr val="accent1"/>
+          </a:lnRef>
+          <a:fillRef idx="3">
+            <a:schemeClr val="accent1"/>
+          </a:fillRef>
+          <a:effectRef idx="2">
+            <a:schemeClr val="accent1"/>
+          </a:effectRef>
+          <a:fontRef idx="minor">
+            <a:schemeClr val="lt1"/>
+          </a:fontRef>
+        </p:style>
+        <p:txBody>
+          <a:bodyPr rtlCol="0" anchor="ctr" wrap="square" lIns="73152" rIns="73152" tIns="54864" bIns="54864"/>
+          <a:lstStyle/>
+          <a:p>
+            <a:pPr algn="ctr">
+              <a:spcAft>
+                <a:spcPts val="600"/>
+              </a:spcAft>
+            </a:pPr>
+            <a:r>
+              <a:rPr sz="1000" b="1">
+                <a:solidFill>
+                  <a:srgbClr val="0B3D7A"/>
+                </a:solidFill>
+              </a:rPr>
+              <a:t>Crew domain</a:t>
+            </a:r>
+          </a:p>
+        </p:txBody>
+      </p:sp>
+      <p:sp>
+        <p:nvSpPr>
+          <p:cNvPr id="57" name="Rounded Rectangle 56"/>
+          <p:cNvSpPr/>
+          <p:nvPr/>
+        </p:nvSpPr>
+        <p:spPr>
+          <a:xfrm>
+            <a:off x="15316200" y="9006840"/>
+            <a:ext cx="1463040" cy="548640"/>
+          </a:xfrm>
+          <a:prstGeom prst="roundRect">
+            <a:avLst>
+              <a:gd name="adj" fmla="val 35000"/>
+            </a:avLst>
+          </a:prstGeom>
+          <a:solidFill>
+            <a:srgbClr val="FFFFFF"/>
+          </a:solidFill>
+          <a:ln>
+            <a:noFill/>
+          </a:ln>
+          <a:effectLst/>
+        </p:spPr>
+        <p:style>
+          <a:lnRef idx="1">
+            <a:schemeClr val="accent1"/>
+          </a:lnRef>
+          <a:fillRef idx="3">
+            <a:schemeClr val="accent1"/>
+          </a:fillRef>
+          <a:effectRef idx="2">
+            <a:schemeClr val="accent1"/>
+          </a:effectRef>
+          <a:fontRef idx="minor">
+            <a:schemeClr val="lt1"/>
+          </a:fontRef>
+        </p:style>
+        <p:txBody>
+          <a:bodyPr rtlCol="0" anchor="ctr" wrap="square" lIns="73152" rIns="73152" tIns="54864" bIns="54864"/>
+          <a:lstStyle/>
+          <a:p>
+            <a:pPr algn="ctr">
+              <a:spcAft>
+                <a:spcPts val="600"/>
+              </a:spcAft>
+            </a:pPr>
+            <a:r>
+              <a:rPr sz="1000" b="1">
+                <a:solidFill>
+                  <a:srgbClr val="0B3D7A"/>
+                </a:solidFill>
+              </a:rPr>
+              <a:t>Field Activity domain</a:t>
+            </a:r>
+          </a:p>
+        </p:txBody>
+      </p:sp>
+      <p:sp>
+        <p:nvSpPr>
+          <p:cNvPr id="58" name="Rounded Rectangle 57"/>
+          <p:cNvSpPr/>
+          <p:nvPr/>
+        </p:nvSpPr>
+        <p:spPr>
+          <a:xfrm>
+            <a:off x="17007840" y="6675120"/>
+            <a:ext cx="2194560" cy="457200"/>
+          </a:xfrm>
+          <a:prstGeom prst="roundRect">
+            <a:avLst>
+              <a:gd name="adj" fmla="val 10000"/>
+            </a:avLst>
+          </a:prstGeom>
+          <a:solidFill>
+            <a:srgbClr val="F5EFE9"/>
+          </a:solidFill>
+          <a:ln>
+            <a:noFill/>
+          </a:ln>
+          <a:effectLst/>
+        </p:spPr>
+        <p:style>
+          <a:lnRef idx="1">
+            <a:schemeClr val="accent1"/>
+          </a:lnRef>
+          <a:fillRef idx="3">
+            <a:schemeClr val="accent1"/>
+          </a:fillRef>
+          <a:effectRef idx="2">
+            <a:schemeClr val="accent1"/>
+          </a:effectRef>
+          <a:fontRef idx="minor">
+            <a:schemeClr val="lt1"/>
+          </a:fontRef>
+        </p:style>
+        <p:txBody>
+          <a:bodyPr rtlCol="0" anchor="ctr" wrap="square" lIns="109728" rIns="109728" tIns="54864" bIns="54864"/>
+          <a:lstStyle/>
+          <a:p>
+            <a:pPr algn="ctr">
+              <a:spcAft>
+                <a:spcPts val="600"/>
+              </a:spcAft>
+            </a:pPr>
+            <a:r>
+              <a:rPr sz="900" b="1">
+                <a:solidFill>
+                  <a:srgbClr val="0B3D7A"/>
+                </a:solidFill>
+              </a:rPr>
+              <a:t>CMS_CI_CASE_VW</a:t>
+            </a:r>
+          </a:p>
+        </p:txBody>
+      </p:sp>
+      <p:sp>
+        <p:nvSpPr>
+          <p:cNvPr id="59" name="Rounded Rectangle 58"/>
+          <p:cNvSpPr/>
+          <p:nvPr/>
+        </p:nvSpPr>
+        <p:spPr>
+          <a:xfrm>
+            <a:off x="17007840" y="7223760"/>
+            <a:ext cx="2194560" cy="457200"/>
+          </a:xfrm>
+          <a:prstGeom prst="roundRect">
+            <a:avLst>
+              <a:gd name="adj" fmla="val 10000"/>
+            </a:avLst>
+          </a:prstGeom>
+          <a:solidFill>
+            <a:srgbClr val="F5EFE9"/>
+          </a:solidFill>
+          <a:ln>
+            <a:noFill/>
+          </a:ln>
+          <a:effectLst/>
+        </p:spPr>
+        <p:style>
+          <a:lnRef idx="1">
+            <a:schemeClr val="accent1"/>
+          </a:lnRef>
+          <a:fillRef idx="3">
+            <a:schemeClr val="accent1"/>
+          </a:fillRef>
+          <a:effectRef idx="2">
+            <a:schemeClr val="accent1"/>
+          </a:effectRef>
+          <a:fontRef idx="minor">
+            <a:schemeClr val="lt1"/>
+          </a:fontRef>
+        </p:style>
+        <p:txBody>
+          <a:bodyPr rtlCol="0" anchor="ctr" wrap="square" lIns="109728" rIns="109728" tIns="54864" bIns="54864"/>
+          <a:lstStyle/>
+          <a:p>
+            <a:pPr algn="ctr">
+              <a:spcAft>
+                <a:spcPts val="600"/>
+              </a:spcAft>
+            </a:pPr>
+            <a:r>
+              <a:rPr sz="900" b="1">
+                <a:solidFill>
+                  <a:srgbClr val="0B3D7A"/>
+                </a:solidFill>
+              </a:rPr>
+              <a:t>CMS_CI_CASE_LOG_VW</a:t>
+            </a:r>
+          </a:p>
+        </p:txBody>
+      </p:sp>
+      <p:sp>
+        <p:nvSpPr>
+          <p:cNvPr id="60" name="Rounded Rectangle 59"/>
+          <p:cNvSpPr/>
+          <p:nvPr/>
+        </p:nvSpPr>
+        <p:spPr>
+          <a:xfrm>
+            <a:off x="17007840" y="9006840"/>
+            <a:ext cx="2194560" cy="548640"/>
+          </a:xfrm>
+          <a:prstGeom prst="roundRect">
+            <a:avLst>
+              <a:gd name="adj" fmla="val 35000"/>
+            </a:avLst>
+          </a:prstGeom>
+          <a:solidFill>
+            <a:srgbClr val="FFFFFF"/>
+          </a:solidFill>
+          <a:ln>
+            <a:noFill/>
+          </a:ln>
+          <a:effectLst/>
+        </p:spPr>
+        <p:style>
+          <a:lnRef idx="1">
+            <a:schemeClr val="accent1"/>
+          </a:lnRef>
+          <a:fillRef idx="3">
+            <a:schemeClr val="accent1"/>
+          </a:fillRef>
+          <a:effectRef idx="2">
+            <a:schemeClr val="accent1"/>
+          </a:effectRef>
+          <a:fontRef idx="minor">
+            <a:schemeClr val="lt1"/>
+          </a:fontRef>
+        </p:style>
+        <p:txBody>
+          <a:bodyPr rtlCol="0" anchor="ctr" wrap="square" lIns="73152" rIns="73152" tIns="54864" bIns="54864"/>
+          <a:lstStyle/>
+          <a:p>
+            <a:pPr algn="ctr">
+              <a:spcAft>
+                <a:spcPts val="600"/>
+              </a:spcAft>
+            </a:pPr>
+            <a:r>
+              <a:rPr sz="1000" b="1">
+                <a:solidFill>
+                  <a:srgbClr val="0B3D7A"/>
+                </a:solidFill>
+              </a:rPr>
+              <a:t>Case domain</a:t>
+            </a:r>
+          </a:p>
+        </p:txBody>
+      </p:sp>
+      <p:cxnSp>
+        <p:nvCxnSpPr>
+          <p:cNvPr id="61" name="Connector 60"/>
+          <p:cNvCxnSpPr/>
+          <p:nvPr/>
+        </p:nvCxnSpPr>
+        <p:spPr>
+          <a:xfrm>
+            <a:off x="3026664" y="2743200"/>
+            <a:ext cx="274320" cy="0"/>
+          </a:xfrm>
+          <a:prstGeom prst="line">
+            <a:avLst/>
+          </a:prstGeom>
+          <a:ln w="28575">
+            <a:solidFill>
+              <a:srgbClr val="F5EFE9"/>
+            </a:solidFill>
+            <a:tailEnd type="triangle" w="med" len="med"/>
+          </a:ln>
+        </p:spPr>
+        <p:style>
+          <a:lnRef idx="2">
+            <a:schemeClr val="accent1"/>
+          </a:lnRef>
+          <a:fillRef idx="0">
+            <a:schemeClr val="accent1"/>
+          </a:fillRef>
+          <a:effectRef idx="1">
+            <a:schemeClr val="accent1"/>
+          </a:effectRef>
+          <a:fontRef idx="minor">
+            <a:schemeClr val="tx1"/>
+          </a:fontRef>
+        </p:style>
+      </p:cxnSp>
+      <p:cxnSp>
+        <p:nvCxnSpPr>
+          <p:cNvPr id="62" name="Connector 61"/>
+          <p:cNvCxnSpPr/>
+          <p:nvPr/>
+        </p:nvCxnSpPr>
+        <p:spPr>
+          <a:xfrm>
+            <a:off x="5952744" y="2743200"/>
+            <a:ext cx="274320" cy="0"/>
+          </a:xfrm>
+          <a:prstGeom prst="line">
+            <a:avLst/>
+          </a:prstGeom>
+          <a:ln w="28575">
+            <a:solidFill>
+              <a:srgbClr val="F5EFE9"/>
+            </a:solidFill>
+            <a:tailEnd type="triangle" w="med" len="med"/>
+          </a:ln>
+        </p:spPr>
+        <p:style>
+          <a:lnRef idx="2">
+            <a:schemeClr val="accent1"/>
+          </a:lnRef>
+          <a:fillRef idx="0">
+            <a:schemeClr val="accent1"/>
+          </a:fillRef>
+          <a:effectRef idx="1">
+            <a:schemeClr val="accent1"/>
+          </a:effectRef>
+          <a:fontRef idx="minor">
+            <a:schemeClr val="tx1"/>
+          </a:fontRef>
+        </p:style>
+      </p:cxnSp>
+      <p:cxnSp>
+        <p:nvCxnSpPr>
+          <p:cNvPr id="63" name="Connector 62"/>
+          <p:cNvCxnSpPr/>
+          <p:nvPr/>
+        </p:nvCxnSpPr>
+        <p:spPr>
+          <a:xfrm>
+            <a:off x="9061704" y="2743200"/>
+            <a:ext cx="274320" cy="0"/>
+          </a:xfrm>
+          <a:prstGeom prst="line">
+            <a:avLst/>
+          </a:prstGeom>
+          <a:ln w="28575">
+            <a:solidFill>
+              <a:srgbClr val="F5EFE9"/>
+            </a:solidFill>
+            <a:tailEnd type="triangle" w="med" len="med"/>
+          </a:ln>
+        </p:spPr>
+        <p:style>
+          <a:lnRef idx="2">
+            <a:schemeClr val="accent1"/>
+          </a:lnRef>
+          <a:fillRef idx="0">
+            <a:schemeClr val="accent1"/>
+          </a:fillRef>
+          <a:effectRef idx="1">
+            <a:schemeClr val="accent1"/>
+          </a:effectRef>
+          <a:fontRef idx="minor">
+            <a:schemeClr val="tx1"/>
+          </a:fontRef>
+        </p:style>
+      </p:cxnSp>
+      <p:cxnSp>
+        <p:nvCxnSpPr>
+          <p:cNvPr id="64" name="Connector 63"/>
+          <p:cNvCxnSpPr/>
+          <p:nvPr/>
+        </p:nvCxnSpPr>
+        <p:spPr>
+          <a:xfrm flipV="1">
+            <a:off x="11987784" y="2720339"/>
+            <a:ext cx="274320" cy="22861"/>
+          </a:xfrm>
+          <a:prstGeom prst="line">
+            <a:avLst/>
+          </a:prstGeom>
+          <a:ln w="28575">
+            <a:solidFill>
+              <a:srgbClr val="F5EFE9"/>
+            </a:solidFill>
+            <a:tailEnd type="triangle" w="med" len="med"/>
+          </a:ln>
+        </p:spPr>
+        <p:style>
+          <a:lnRef idx="2">
+            <a:schemeClr val="accent1"/>
+          </a:lnRef>
+          <a:fillRef idx="0">
+            <a:schemeClr val="accent1"/>
+          </a:fillRef>
+          <a:effectRef idx="1">
+            <a:schemeClr val="accent1"/>
+          </a:effectRef>
+          <a:fontRef idx="minor">
+            <a:schemeClr val="tx1"/>
+          </a:fontRef>
+        </p:style>
+      </p:cxnSp>
+      <p:cxnSp>
+        <p:nvCxnSpPr>
+          <p:cNvPr id="65" name="Connector 64"/>
+          <p:cNvCxnSpPr/>
+          <p:nvPr/>
+        </p:nvCxnSpPr>
+        <p:spPr>
+          <a:xfrm>
+            <a:off x="15828263" y="3474720"/>
+            <a:ext cx="2322577" cy="228600"/>
+          </a:xfrm>
+          <a:prstGeom prst="line">
+            <a:avLst/>
+          </a:prstGeom>
+          <a:ln w="28575">
+            <a:solidFill>
+              <a:srgbClr val="F5EFE9"/>
+            </a:solidFill>
+          </a:ln>
+        </p:spPr>
+        <p:style>
+          <a:lnRef idx="2">
+            <a:schemeClr val="accent1"/>
+          </a:lnRef>
+          <a:fillRef idx="0">
+            <a:schemeClr val="accent1"/>
+          </a:fillRef>
+          <a:effectRef idx="1">
+            <a:schemeClr val="accent1"/>
+          </a:effectRef>
+          <a:fontRef idx="minor">
+            <a:schemeClr val="tx1"/>
+          </a:fontRef>
+        </p:style>
+      </p:cxnSp>
+      <p:cxnSp>
+        <p:nvCxnSpPr>
+          <p:cNvPr id="66" name="Connector 65"/>
+          <p:cNvCxnSpPr/>
+          <p:nvPr/>
+        </p:nvCxnSpPr>
+        <p:spPr>
+          <a:xfrm flipH="1">
+            <a:off x="18150839" y="3703320"/>
+            <a:ext cx="1" cy="320040"/>
+          </a:xfrm>
+          <a:prstGeom prst="line">
+            <a:avLst/>
+          </a:prstGeom>
+          <a:ln w="28575">
+            <a:solidFill>
+              <a:srgbClr val="F5EFE9"/>
+            </a:solidFill>
+            <a:tailEnd type="triangle" w="med" len="med"/>
+          </a:ln>
+        </p:spPr>
+        <p:style>
+          <a:lnRef idx="2">
+            <a:schemeClr val="accent1"/>
+          </a:lnRef>
+          <a:fillRef idx="0">
+            <a:schemeClr val="accent1"/>
+          </a:fillRef>
+          <a:effectRef idx="1">
+            <a:schemeClr val="accent1"/>
+          </a:effectRef>
+          <a:fontRef idx="minor">
+            <a:schemeClr val="tx1"/>
+          </a:fontRef>
+        </p:style>
+      </p:cxnSp>
+      <p:cxnSp>
+        <p:nvCxnSpPr>
+          <p:cNvPr id="67" name="Connector 66"/>
+          <p:cNvCxnSpPr/>
+          <p:nvPr/>
+        </p:nvCxnSpPr>
+        <p:spPr>
+          <a:xfrm flipH="1">
+            <a:off x="16642080" y="4503420"/>
+            <a:ext cx="457200" cy="0"/>
+          </a:xfrm>
+          <a:prstGeom prst="line">
+            <a:avLst/>
+          </a:prstGeom>
+          <a:ln w="28575">
+            <a:solidFill>
+              <a:srgbClr val="F5EFE9"/>
+            </a:solidFill>
+            <a:tailEnd type="triangle" w="med" len="med"/>
+          </a:ln>
+        </p:spPr>
+        <p:style>
+          <a:lnRef idx="2">
+            <a:schemeClr val="accent1"/>
+          </a:lnRef>
+          <a:fillRef idx="0">
+            <a:schemeClr val="accent1"/>
+          </a:fillRef>
+          <a:effectRef idx="1">
+            <a:schemeClr val="accent1"/>
+          </a:effectRef>
+          <a:fontRef idx="minor">
+            <a:schemeClr val="tx1"/>
+          </a:fontRef>
+        </p:style>
+      </p:cxnSp>
+      <p:cxnSp>
+        <p:nvCxnSpPr>
+          <p:cNvPr id="68" name="Connector 67"/>
+          <p:cNvCxnSpPr/>
+          <p:nvPr/>
+        </p:nvCxnSpPr>
+        <p:spPr>
+          <a:xfrm flipH="1">
+            <a:off x="13807440" y="4503420"/>
+            <a:ext cx="457200" cy="0"/>
+          </a:xfrm>
+          <a:prstGeom prst="line">
+            <a:avLst/>
+          </a:prstGeom>
+          <a:ln w="28575">
+            <a:solidFill>
+              <a:srgbClr val="F5EFE9"/>
+            </a:solidFill>
+            <a:tailEnd type="triangle" w="med" len="med"/>
+          </a:ln>
+        </p:spPr>
+        <p:style>
+          <a:lnRef idx="2">
+            <a:schemeClr val="accent1"/>
+          </a:lnRef>
+          <a:fillRef idx="0">
+            <a:schemeClr val="accent1"/>
+          </a:fillRef>
+          <a:effectRef idx="1">
+            <a:schemeClr val="accent1"/>
+          </a:effectRef>
+          <a:fontRef idx="minor">
+            <a:schemeClr val="tx1"/>
+          </a:fontRef>
+        </p:style>
+      </p:cxnSp>
+      <p:cxnSp>
+        <p:nvCxnSpPr>
+          <p:cNvPr id="69" name="Connector 68"/>
+          <p:cNvCxnSpPr/>
+          <p:nvPr/>
+        </p:nvCxnSpPr>
+        <p:spPr>
+          <a:xfrm flipH="1">
+            <a:off x="11155680" y="4503420"/>
+            <a:ext cx="457200" cy="0"/>
+          </a:xfrm>
+          <a:prstGeom prst="line">
+            <a:avLst/>
+          </a:prstGeom>
+          <a:ln w="28575">
+            <a:solidFill>
+              <a:srgbClr val="F5EFE9"/>
+            </a:solidFill>
+            <a:tailEnd type="triangle" w="med" len="med"/>
+          </a:ln>
+        </p:spPr>
+        <p:style>
+          <a:lnRef idx="2">
+            <a:schemeClr val="accent1"/>
+          </a:lnRef>
+          <a:fillRef idx="0">
+            <a:schemeClr val="accent1"/>
+          </a:fillRef>
+          <a:effectRef idx="1">
+            <a:schemeClr val="accent1"/>
+          </a:effectRef>
+          <a:fontRef idx="minor">
+            <a:schemeClr val="tx1"/>
+          </a:fontRef>
+        </p:style>
+      </p:cxnSp>
+      <p:cxnSp>
+        <p:nvCxnSpPr>
+          <p:cNvPr id="70" name="Connector 69"/>
+          <p:cNvCxnSpPr/>
+          <p:nvPr/>
+        </p:nvCxnSpPr>
+        <p:spPr>
+          <a:xfrm flipH="1">
+            <a:off x="7955279" y="4503420"/>
+            <a:ext cx="457201" cy="0"/>
+          </a:xfrm>
+          <a:prstGeom prst="line">
+            <a:avLst/>
+          </a:prstGeom>
+          <a:ln w="28575">
+            <a:solidFill>
+              <a:srgbClr val="F5EFE9"/>
+            </a:solidFill>
+            <a:tailEnd type="triangle" w="med" len="med"/>
+          </a:ln>
+        </p:spPr>
+        <p:style>
+          <a:lnRef idx="2">
+            <a:schemeClr val="accent1"/>
+          </a:lnRef>
+          <a:fillRef idx="0">
+            <a:schemeClr val="accent1"/>
+          </a:fillRef>
+          <a:effectRef idx="1">
+            <a:schemeClr val="accent1"/>
+          </a:effectRef>
+          <a:fontRef idx="minor">
+            <a:schemeClr val="tx1"/>
+          </a:fontRef>
+        </p:style>
+      </p:cxnSp>
+      <p:cxnSp>
+        <p:nvCxnSpPr>
+          <p:cNvPr id="71" name="Connector 70"/>
+          <p:cNvCxnSpPr/>
+          <p:nvPr/>
+        </p:nvCxnSpPr>
+        <p:spPr>
+          <a:xfrm flipH="1">
+            <a:off x="5532120" y="4503420"/>
+            <a:ext cx="411480" cy="0"/>
+          </a:xfrm>
+          <a:prstGeom prst="line">
+            <a:avLst/>
+          </a:prstGeom>
+          <a:ln w="28575">
+            <a:solidFill>
+              <a:srgbClr val="F5EFE9"/>
+            </a:solidFill>
+            <a:tailEnd type="triangle" w="med" len="med"/>
+          </a:ln>
+        </p:spPr>
+        <p:style>
+          <a:lnRef idx="2">
+            <a:schemeClr val="accent1"/>
+          </a:lnRef>
+          <a:fillRef idx="0">
+            <a:schemeClr val="accent1"/>
+          </a:fillRef>
+          <a:effectRef idx="1">
+            <a:schemeClr val="accent1"/>
+          </a:effectRef>
+          <a:fontRef idx="minor">
+            <a:schemeClr val="tx1"/>
+          </a:fontRef>
+        </p:style>
+      </p:cxnSp>
+      <p:cxnSp>
+        <p:nvCxnSpPr>
+          <p:cNvPr id="72" name="Connector 71"/>
+          <p:cNvCxnSpPr/>
+          <p:nvPr/>
+        </p:nvCxnSpPr>
+        <p:spPr>
+          <a:xfrm flipH="1">
+            <a:off x="2660904" y="4503420"/>
+            <a:ext cx="402336" cy="0"/>
+          </a:xfrm>
+          <a:prstGeom prst="line">
+            <a:avLst/>
+          </a:prstGeom>
+          <a:ln w="28575">
+            <a:solidFill>
+              <a:srgbClr val="F5EFE9"/>
+            </a:solidFill>
+            <a:tailEnd type="triangle" w="med" len="med"/>
+          </a:ln>
+        </p:spPr>
+        <p:style>
+          <a:lnRef idx="2">
+            <a:schemeClr val="accent1"/>
+          </a:lnRef>
+          <a:fillRef idx="0">
+            <a:schemeClr val="accent1"/>
+          </a:fillRef>
+          <a:effectRef idx="1">
+            <a:schemeClr val="accent1"/>
+          </a:effectRef>
+          <a:fontRef idx="minor">
+            <a:schemeClr val="tx1"/>
+          </a:fontRef>
+        </p:style>
+      </p:cxnSp>
+      <p:cxnSp>
+        <p:nvCxnSpPr>
+          <p:cNvPr id="73" name="Connector 72"/>
+          <p:cNvCxnSpPr/>
+          <p:nvPr/>
+        </p:nvCxnSpPr>
+        <p:spPr>
+          <a:xfrm>
+            <a:off x="4297680" y="4937760"/>
+            <a:ext cx="0" cy="411480"/>
+          </a:xfrm>
+          <a:prstGeom prst="line">
+            <a:avLst/>
+          </a:prstGeom>
+          <a:ln w="28575">
+            <a:solidFill>
+              <a:srgbClr val="F5EFE9"/>
+            </a:solidFill>
+          </a:ln>
+        </p:spPr>
+        <p:style>
+          <a:lnRef idx="2">
+            <a:schemeClr val="accent1"/>
+          </a:lnRef>
+          <a:fillRef idx="0">
+            <a:schemeClr val="accent1"/>
+          </a:fillRef>
+          <a:effectRef idx="1">
+            <a:schemeClr val="accent1"/>
+          </a:effectRef>
+          <a:fontRef idx="minor">
+            <a:schemeClr val="tx1"/>
+          </a:fontRef>
+        </p:style>
+      </p:cxnSp>
+      <p:cxnSp>
+        <p:nvCxnSpPr>
+          <p:cNvPr id="74" name="Connector 73"/>
+          <p:cNvCxnSpPr/>
+          <p:nvPr/>
+        </p:nvCxnSpPr>
+        <p:spPr>
+          <a:xfrm>
+            <a:off x="4297680" y="5349240"/>
+            <a:ext cx="5486400" cy="0"/>
+          </a:xfrm>
+          <a:prstGeom prst="line">
+            <a:avLst/>
+          </a:prstGeom>
+          <a:ln w="28575">
+            <a:solidFill>
+              <a:srgbClr val="F5EFE9"/>
+            </a:solidFill>
+          </a:ln>
+        </p:spPr>
+        <p:style>
+          <a:lnRef idx="2">
+            <a:schemeClr val="accent1"/>
+          </a:lnRef>
+          <a:fillRef idx="0">
+            <a:schemeClr val="accent1"/>
+          </a:fillRef>
+          <a:effectRef idx="1">
+            <a:schemeClr val="accent1"/>
+          </a:effectRef>
+          <a:fontRef idx="minor">
+            <a:schemeClr val="tx1"/>
+          </a:fontRef>
+        </p:style>
+      </p:cxnSp>
+      <p:cxnSp>
+        <p:nvCxnSpPr>
+          <p:cNvPr id="75" name="Connector 74"/>
+          <p:cNvCxnSpPr/>
+          <p:nvPr/>
+        </p:nvCxnSpPr>
+        <p:spPr>
+          <a:xfrm flipV="1">
+            <a:off x="9784080" y="4937760"/>
+            <a:ext cx="0" cy="411480"/>
+          </a:xfrm>
+          <a:prstGeom prst="line">
+            <a:avLst/>
+          </a:prstGeom>
+          <a:ln w="28575">
+            <a:solidFill>
+              <a:srgbClr val="F5EFE9"/>
+            </a:solidFill>
+            <a:tailEnd type="triangle" w="med" len="med"/>
+          </a:ln>
+        </p:spPr>
+        <p:style>
+          <a:lnRef idx="2">
+            <a:schemeClr val="accent1"/>
+          </a:lnRef>
+          <a:fillRef idx="0">
+            <a:schemeClr val="accent1"/>
+          </a:fillRef>
+          <a:effectRef idx="1">
+            <a:schemeClr val="accent1"/>
+          </a:effectRef>
+          <a:fontRef idx="minor">
+            <a:schemeClr val="tx1"/>
+          </a:fontRef>
+        </p:style>
+      </p:cxnSp>
+      <p:sp>
+        <p:nvSpPr>
+          <p:cNvPr id="76" name="TextBox 75"/>
           <p:cNvSpPr txBox="1"/>
           <p:nvPr/>
         </p:nvSpPr>
         <p:spPr>
           <a:xfrm>
-            <a:off x="10959084" y="8577072"/>
-            <a:ext cx="8252459" cy="1252728"/>
+            <a:off x="4572000" y="5029200"/>
+            <a:ext cx="5486400" cy="365760"/>
           </a:xfrm>
           <a:prstGeom prst="rect">
             <a:avLst/>
@@ -11039,7 +14927,7 @@
           <a:noFill/>
         </p:spPr>
         <p:txBody>
-          <a:bodyPr wrap="square" anchor="t" lIns="0" rIns="0" tIns="54864" bIns="54864">
+          <a:bodyPr wrap="square" anchor="b" lIns="0" rIns="0" tIns="54864" bIns="54864">
             <a:spAutoFit/>
           </a:bodyPr>
           <a:lstStyle/>
@@ -11050,14 +14938,676 @@
               </a:spcAft>
             </a:pPr>
             <a:r>
-              <a:rPr sz="1900" b="1">
-                <a:solidFill>
-                  <a:srgbClr val="0B3D7A"/>
+              <a:rPr sz="1100" b="1">
+                <a:solidFill>
+                  <a:srgbClr val="F5EFE9"/>
                 </a:solidFill>
               </a:rPr>
-              <a:t>Schedule and monitor</a:t>
-            </a:r>
-          </a:p>
+              <a:t>every 12 hours: the newest 3 months rebuilt, older rows kept</a:t>
+            </a:r>
+          </a:p>
+        </p:txBody>
+      </p:sp>
+      <p:cxnSp>
+        <p:nvCxnSpPr>
+          <p:cNvPr id="77" name="Connector 76"/>
+          <p:cNvCxnSpPr/>
+          <p:nvPr/>
+        </p:nvCxnSpPr>
+        <p:spPr>
+          <a:xfrm>
+            <a:off x="1920239" y="8458200"/>
+            <a:ext cx="0" cy="548640"/>
+          </a:xfrm>
+          <a:prstGeom prst="line">
+            <a:avLst/>
+          </a:prstGeom>
+          <a:ln w="28575">
+            <a:solidFill>
+              <a:srgbClr val="F5EFE9"/>
+            </a:solidFill>
+            <a:tailEnd type="triangle" w="med" len="med"/>
+          </a:ln>
+        </p:spPr>
+        <p:style>
+          <a:lnRef idx="2">
+            <a:schemeClr val="accent1"/>
+          </a:lnRef>
+          <a:fillRef idx="0">
+            <a:schemeClr val="accent1"/>
+          </a:fillRef>
+          <a:effectRef idx="1">
+            <a:schemeClr val="accent1"/>
+          </a:effectRef>
+          <a:fontRef idx="minor">
+            <a:schemeClr val="tx1"/>
+          </a:fontRef>
+        </p:style>
+      </p:cxnSp>
+      <p:cxnSp>
+        <p:nvCxnSpPr>
+          <p:cNvPr id="78" name="Connector 77"/>
+          <p:cNvCxnSpPr/>
+          <p:nvPr/>
+        </p:nvCxnSpPr>
+        <p:spPr>
+          <a:xfrm>
+            <a:off x="4160520" y="8458200"/>
+            <a:ext cx="0" cy="548640"/>
+          </a:xfrm>
+          <a:prstGeom prst="line">
+            <a:avLst/>
+          </a:prstGeom>
+          <a:ln w="28575">
+            <a:solidFill>
+              <a:srgbClr val="F5EFE9"/>
+            </a:solidFill>
+            <a:tailEnd type="triangle" w="med" len="med"/>
+          </a:ln>
+        </p:spPr>
+        <p:style>
+          <a:lnRef idx="2">
+            <a:schemeClr val="accent1"/>
+          </a:lnRef>
+          <a:fillRef idx="0">
+            <a:schemeClr val="accent1"/>
+          </a:fillRef>
+          <a:effectRef idx="1">
+            <a:schemeClr val="accent1"/>
+          </a:effectRef>
+          <a:fontRef idx="minor">
+            <a:schemeClr val="tx1"/>
+          </a:fontRef>
+        </p:style>
+      </p:cxnSp>
+      <p:cxnSp>
+        <p:nvCxnSpPr>
+          <p:cNvPr id="79" name="Connector 78"/>
+          <p:cNvCxnSpPr/>
+          <p:nvPr/>
+        </p:nvCxnSpPr>
+        <p:spPr>
+          <a:xfrm>
+            <a:off x="6400800" y="8641080"/>
+            <a:ext cx="0" cy="365760"/>
+          </a:xfrm>
+          <a:prstGeom prst="line">
+            <a:avLst/>
+          </a:prstGeom>
+          <a:ln w="28575">
+            <a:solidFill>
+              <a:srgbClr val="F5EFE9"/>
+            </a:solidFill>
+            <a:tailEnd type="triangle" w="med" len="med"/>
+          </a:ln>
+        </p:spPr>
+        <p:style>
+          <a:lnRef idx="2">
+            <a:schemeClr val="accent1"/>
+          </a:lnRef>
+          <a:fillRef idx="0">
+            <a:schemeClr val="accent1"/>
+          </a:fillRef>
+          <a:effectRef idx="1">
+            <a:schemeClr val="accent1"/>
+          </a:effectRef>
+          <a:fontRef idx="minor">
+            <a:schemeClr val="tx1"/>
+          </a:fontRef>
+        </p:style>
+      </p:cxnSp>
+      <p:cxnSp>
+        <p:nvCxnSpPr>
+          <p:cNvPr id="80" name="Connector 79"/>
+          <p:cNvCxnSpPr/>
+          <p:nvPr/>
+        </p:nvCxnSpPr>
+        <p:spPr>
+          <a:xfrm>
+            <a:off x="9052560" y="8366759"/>
+            <a:ext cx="0" cy="640081"/>
+          </a:xfrm>
+          <a:prstGeom prst="line">
+            <a:avLst/>
+          </a:prstGeom>
+          <a:ln w="28575">
+            <a:solidFill>
+              <a:srgbClr val="F5EFE9"/>
+            </a:solidFill>
+            <a:tailEnd type="triangle" w="med" len="med"/>
+          </a:ln>
+        </p:spPr>
+        <p:style>
+          <a:lnRef idx="2">
+            <a:schemeClr val="accent1"/>
+          </a:lnRef>
+          <a:fillRef idx="0">
+            <a:schemeClr val="accent1"/>
+          </a:fillRef>
+          <a:effectRef idx="1">
+            <a:schemeClr val="accent1"/>
+          </a:effectRef>
+          <a:fontRef idx="minor">
+            <a:schemeClr val="tx1"/>
+          </a:fontRef>
+        </p:style>
+      </p:cxnSp>
+      <p:cxnSp>
+        <p:nvCxnSpPr>
+          <p:cNvPr id="81" name="Connector 80"/>
+          <p:cNvCxnSpPr/>
+          <p:nvPr/>
+        </p:nvCxnSpPr>
+        <p:spPr>
+          <a:xfrm flipH="1">
+            <a:off x="10332720" y="7452360"/>
+            <a:ext cx="182880" cy="0"/>
+          </a:xfrm>
+          <a:prstGeom prst="line">
+            <a:avLst/>
+          </a:prstGeom>
+          <a:ln w="28575">
+            <a:solidFill>
+              <a:srgbClr val="F5EFE9"/>
+            </a:solidFill>
+          </a:ln>
+        </p:spPr>
+        <p:style>
+          <a:lnRef idx="2">
+            <a:schemeClr val="accent1"/>
+          </a:lnRef>
+          <a:fillRef idx="0">
+            <a:schemeClr val="accent1"/>
+          </a:fillRef>
+          <a:effectRef idx="1">
+            <a:schemeClr val="accent1"/>
+          </a:effectRef>
+          <a:fontRef idx="minor">
+            <a:schemeClr val="tx1"/>
+          </a:fontRef>
+        </p:style>
+      </p:cxnSp>
+      <p:cxnSp>
+        <p:nvCxnSpPr>
+          <p:cNvPr id="82" name="Connector 81"/>
+          <p:cNvCxnSpPr/>
+          <p:nvPr/>
+        </p:nvCxnSpPr>
+        <p:spPr>
+          <a:xfrm>
+            <a:off x="10332720" y="7452360"/>
+            <a:ext cx="0" cy="1280160"/>
+          </a:xfrm>
+          <a:prstGeom prst="line">
+            <a:avLst/>
+          </a:prstGeom>
+          <a:ln w="28575">
+            <a:solidFill>
+              <a:srgbClr val="F5EFE9"/>
+            </a:solidFill>
+          </a:ln>
+        </p:spPr>
+        <p:style>
+          <a:lnRef idx="2">
+            <a:schemeClr val="accent1"/>
+          </a:lnRef>
+          <a:fillRef idx="0">
+            <a:schemeClr val="accent1"/>
+          </a:fillRef>
+          <a:effectRef idx="1">
+            <a:schemeClr val="accent1"/>
+          </a:effectRef>
+          <a:fontRef idx="minor">
+            <a:schemeClr val="tx1"/>
+          </a:fontRef>
+        </p:style>
+      </p:cxnSp>
+      <p:cxnSp>
+        <p:nvCxnSpPr>
+          <p:cNvPr id="83" name="Connector 82"/>
+          <p:cNvCxnSpPr/>
+          <p:nvPr/>
+        </p:nvCxnSpPr>
+        <p:spPr>
+          <a:xfrm>
+            <a:off x="10332720" y="8732520"/>
+            <a:ext cx="886968" cy="0"/>
+          </a:xfrm>
+          <a:prstGeom prst="line">
+            <a:avLst/>
+          </a:prstGeom>
+          <a:ln w="28575">
+            <a:solidFill>
+              <a:srgbClr val="F5EFE9"/>
+            </a:solidFill>
+          </a:ln>
+        </p:spPr>
+        <p:style>
+          <a:lnRef idx="2">
+            <a:schemeClr val="accent1"/>
+          </a:lnRef>
+          <a:fillRef idx="0">
+            <a:schemeClr val="accent1"/>
+          </a:fillRef>
+          <a:effectRef idx="1">
+            <a:schemeClr val="accent1"/>
+          </a:effectRef>
+          <a:fontRef idx="minor">
+            <a:schemeClr val="tx1"/>
+          </a:fontRef>
+        </p:style>
+      </p:cxnSp>
+      <p:cxnSp>
+        <p:nvCxnSpPr>
+          <p:cNvPr id="84" name="Connector 83"/>
+          <p:cNvCxnSpPr/>
+          <p:nvPr/>
+        </p:nvCxnSpPr>
+        <p:spPr>
+          <a:xfrm>
+            <a:off x="11219688" y="8732520"/>
+            <a:ext cx="4572" cy="274320"/>
+          </a:xfrm>
+          <a:prstGeom prst="line">
+            <a:avLst/>
+          </a:prstGeom>
+          <a:ln w="28575">
+            <a:solidFill>
+              <a:srgbClr val="F5EFE9"/>
+            </a:solidFill>
+            <a:tailEnd type="triangle" w="med" len="med"/>
+          </a:ln>
+        </p:spPr>
+        <p:style>
+          <a:lnRef idx="2">
+            <a:schemeClr val="accent1"/>
+          </a:lnRef>
+          <a:fillRef idx="0">
+            <a:schemeClr val="accent1"/>
+          </a:fillRef>
+          <a:effectRef idx="1">
+            <a:schemeClr val="accent1"/>
+          </a:effectRef>
+          <a:fontRef idx="minor">
+            <a:schemeClr val="tx1"/>
+          </a:fontRef>
+        </p:style>
+      </p:cxnSp>
+      <p:cxnSp>
+        <p:nvCxnSpPr>
+          <p:cNvPr id="85" name="Connector 84"/>
+          <p:cNvCxnSpPr/>
+          <p:nvPr/>
+        </p:nvCxnSpPr>
+        <p:spPr>
+          <a:xfrm flipH="1">
+            <a:off x="11996928" y="8229600"/>
+            <a:ext cx="4572" cy="502920"/>
+          </a:xfrm>
+          <a:prstGeom prst="line">
+            <a:avLst/>
+          </a:prstGeom>
+          <a:ln w="28575">
+            <a:solidFill>
+              <a:srgbClr val="F5EFE9"/>
+            </a:solidFill>
+          </a:ln>
+        </p:spPr>
+        <p:style>
+          <a:lnRef idx="2">
+            <a:schemeClr val="accent1"/>
+          </a:lnRef>
+          <a:fillRef idx="0">
+            <a:schemeClr val="accent1"/>
+          </a:fillRef>
+          <a:effectRef idx="1">
+            <a:schemeClr val="accent1"/>
+          </a:effectRef>
+          <a:fontRef idx="minor">
+            <a:schemeClr val="tx1"/>
+          </a:fontRef>
+        </p:style>
+      </p:cxnSp>
+      <p:cxnSp>
+        <p:nvCxnSpPr>
+          <p:cNvPr id="86" name="Connector 85"/>
+          <p:cNvCxnSpPr/>
+          <p:nvPr/>
+        </p:nvCxnSpPr>
+        <p:spPr>
+          <a:xfrm>
+            <a:off x="11996928" y="8732520"/>
+            <a:ext cx="777240" cy="0"/>
+          </a:xfrm>
+          <a:prstGeom prst="line">
+            <a:avLst/>
+          </a:prstGeom>
+          <a:ln w="28575">
+            <a:solidFill>
+              <a:srgbClr val="F5EFE9"/>
+            </a:solidFill>
+          </a:ln>
+        </p:spPr>
+        <p:style>
+          <a:lnRef idx="2">
+            <a:schemeClr val="accent1"/>
+          </a:lnRef>
+          <a:fillRef idx="0">
+            <a:schemeClr val="accent1"/>
+          </a:fillRef>
+          <a:effectRef idx="1">
+            <a:schemeClr val="accent1"/>
+          </a:effectRef>
+          <a:fontRef idx="minor">
+            <a:schemeClr val="tx1"/>
+          </a:fontRef>
+        </p:style>
+      </p:cxnSp>
+      <p:cxnSp>
+        <p:nvCxnSpPr>
+          <p:cNvPr id="87" name="Connector 86"/>
+          <p:cNvCxnSpPr/>
+          <p:nvPr/>
+        </p:nvCxnSpPr>
+        <p:spPr>
+          <a:xfrm>
+            <a:off x="12774168" y="8732520"/>
+            <a:ext cx="4572" cy="274320"/>
+          </a:xfrm>
+          <a:prstGeom prst="line">
+            <a:avLst/>
+          </a:prstGeom>
+          <a:ln w="28575">
+            <a:solidFill>
+              <a:srgbClr val="F5EFE9"/>
+            </a:solidFill>
+            <a:tailEnd type="triangle" w="med" len="med"/>
+          </a:ln>
+        </p:spPr>
+        <p:style>
+          <a:lnRef idx="2">
+            <a:schemeClr val="accent1"/>
+          </a:lnRef>
+          <a:fillRef idx="0">
+            <a:schemeClr val="accent1"/>
+          </a:fillRef>
+          <a:effectRef idx="1">
+            <a:schemeClr val="accent1"/>
+          </a:effectRef>
+          <a:fontRef idx="minor">
+            <a:schemeClr val="tx1"/>
+          </a:fontRef>
+        </p:style>
+      </p:cxnSp>
+      <p:cxnSp>
+        <p:nvCxnSpPr>
+          <p:cNvPr id="88" name="Connector 87"/>
+          <p:cNvCxnSpPr/>
+          <p:nvPr/>
+        </p:nvCxnSpPr>
+        <p:spPr>
+          <a:xfrm>
+            <a:off x="15247620" y="8229600"/>
+            <a:ext cx="0" cy="365760"/>
+          </a:xfrm>
+          <a:prstGeom prst="line">
+            <a:avLst/>
+          </a:prstGeom>
+          <a:ln w="28575">
+            <a:solidFill>
+              <a:srgbClr val="F5EFE9"/>
+            </a:solidFill>
+          </a:ln>
+        </p:spPr>
+        <p:style>
+          <a:lnRef idx="2">
+            <a:schemeClr val="accent1"/>
+          </a:lnRef>
+          <a:fillRef idx="0">
+            <a:schemeClr val="accent1"/>
+          </a:fillRef>
+          <a:effectRef idx="1">
+            <a:schemeClr val="accent1"/>
+          </a:effectRef>
+          <a:fontRef idx="minor">
+            <a:schemeClr val="tx1"/>
+          </a:fontRef>
+        </p:style>
+      </p:cxnSp>
+      <p:cxnSp>
+        <p:nvCxnSpPr>
+          <p:cNvPr id="89" name="Connector 88"/>
+          <p:cNvCxnSpPr/>
+          <p:nvPr/>
+        </p:nvCxnSpPr>
+        <p:spPr>
+          <a:xfrm flipH="1">
+            <a:off x="14447520" y="8595360"/>
+            <a:ext cx="800100" cy="0"/>
+          </a:xfrm>
+          <a:prstGeom prst="line">
+            <a:avLst/>
+          </a:prstGeom>
+          <a:ln w="28575">
+            <a:solidFill>
+              <a:srgbClr val="F5EFE9"/>
+            </a:solidFill>
+          </a:ln>
+        </p:spPr>
+        <p:style>
+          <a:lnRef idx="2">
+            <a:schemeClr val="accent1"/>
+          </a:lnRef>
+          <a:fillRef idx="0">
+            <a:schemeClr val="accent1"/>
+          </a:fillRef>
+          <a:effectRef idx="1">
+            <a:schemeClr val="accent1"/>
+          </a:effectRef>
+          <a:fontRef idx="minor">
+            <a:schemeClr val="tx1"/>
+          </a:fontRef>
+        </p:style>
+      </p:cxnSp>
+      <p:cxnSp>
+        <p:nvCxnSpPr>
+          <p:cNvPr id="90" name="Connector 89"/>
+          <p:cNvCxnSpPr/>
+          <p:nvPr/>
+        </p:nvCxnSpPr>
+        <p:spPr>
+          <a:xfrm>
+            <a:off x="14447520" y="8595360"/>
+            <a:ext cx="0" cy="411480"/>
+          </a:xfrm>
+          <a:prstGeom prst="line">
+            <a:avLst/>
+          </a:prstGeom>
+          <a:ln w="28575">
+            <a:solidFill>
+              <a:srgbClr val="F5EFE9"/>
+            </a:solidFill>
+            <a:tailEnd type="triangle" w="med" len="med"/>
+          </a:ln>
+        </p:spPr>
+        <p:style>
+          <a:lnRef idx="2">
+            <a:schemeClr val="accent1"/>
+          </a:lnRef>
+          <a:fillRef idx="0">
+            <a:schemeClr val="accent1"/>
+          </a:fillRef>
+          <a:effectRef idx="1">
+            <a:schemeClr val="accent1"/>
+          </a:effectRef>
+          <a:fontRef idx="minor">
+            <a:schemeClr val="tx1"/>
+          </a:fontRef>
+        </p:style>
+      </p:cxnSp>
+      <p:cxnSp>
+        <p:nvCxnSpPr>
+          <p:cNvPr id="91" name="Connector 90"/>
+          <p:cNvCxnSpPr/>
+          <p:nvPr/>
+        </p:nvCxnSpPr>
+        <p:spPr>
+          <a:xfrm>
+            <a:off x="15247620" y="8229600"/>
+            <a:ext cx="0" cy="365760"/>
+          </a:xfrm>
+          <a:prstGeom prst="line">
+            <a:avLst/>
+          </a:prstGeom>
+          <a:ln w="28575">
+            <a:solidFill>
+              <a:srgbClr val="F5EFE9"/>
+            </a:solidFill>
+          </a:ln>
+        </p:spPr>
+        <p:style>
+          <a:lnRef idx="2">
+            <a:schemeClr val="accent1"/>
+          </a:lnRef>
+          <a:fillRef idx="0">
+            <a:schemeClr val="accent1"/>
+          </a:fillRef>
+          <a:effectRef idx="1">
+            <a:schemeClr val="accent1"/>
+          </a:effectRef>
+          <a:fontRef idx="minor">
+            <a:schemeClr val="tx1"/>
+          </a:fontRef>
+        </p:style>
+      </p:cxnSp>
+      <p:cxnSp>
+        <p:nvCxnSpPr>
+          <p:cNvPr id="92" name="Connector 91"/>
+          <p:cNvCxnSpPr/>
+          <p:nvPr/>
+        </p:nvCxnSpPr>
+        <p:spPr>
+          <a:xfrm>
+            <a:off x="15247620" y="8595360"/>
+            <a:ext cx="800100" cy="0"/>
+          </a:xfrm>
+          <a:prstGeom prst="line">
+            <a:avLst/>
+          </a:prstGeom>
+          <a:ln w="28575">
+            <a:solidFill>
+              <a:srgbClr val="F5EFE9"/>
+            </a:solidFill>
+          </a:ln>
+        </p:spPr>
+        <p:style>
+          <a:lnRef idx="2">
+            <a:schemeClr val="accent1"/>
+          </a:lnRef>
+          <a:fillRef idx="0">
+            <a:schemeClr val="accent1"/>
+          </a:fillRef>
+          <a:effectRef idx="1">
+            <a:schemeClr val="accent1"/>
+          </a:effectRef>
+          <a:fontRef idx="minor">
+            <a:schemeClr val="tx1"/>
+          </a:fontRef>
+        </p:style>
+      </p:cxnSp>
+      <p:cxnSp>
+        <p:nvCxnSpPr>
+          <p:cNvPr id="93" name="Connector 92"/>
+          <p:cNvCxnSpPr/>
+          <p:nvPr/>
+        </p:nvCxnSpPr>
+        <p:spPr>
+          <a:xfrm>
+            <a:off x="16047720" y="8595360"/>
+            <a:ext cx="0" cy="411480"/>
+          </a:xfrm>
+          <a:prstGeom prst="line">
+            <a:avLst/>
+          </a:prstGeom>
+          <a:ln w="28575">
+            <a:solidFill>
+              <a:srgbClr val="F5EFE9"/>
+            </a:solidFill>
+            <a:tailEnd type="triangle" w="med" len="med"/>
+          </a:ln>
+        </p:spPr>
+        <p:style>
+          <a:lnRef idx="2">
+            <a:schemeClr val="accent1"/>
+          </a:lnRef>
+          <a:fillRef idx="0">
+            <a:schemeClr val="accent1"/>
+          </a:fillRef>
+          <a:effectRef idx="1">
+            <a:schemeClr val="accent1"/>
+          </a:effectRef>
+          <a:fontRef idx="minor">
+            <a:schemeClr val="tx1"/>
+          </a:fontRef>
+        </p:style>
+      </p:cxnSp>
+      <p:cxnSp>
+        <p:nvCxnSpPr>
+          <p:cNvPr id="94" name="Connector 93"/>
+          <p:cNvCxnSpPr/>
+          <p:nvPr/>
+        </p:nvCxnSpPr>
+        <p:spPr>
+          <a:xfrm>
+            <a:off x="18105120" y="7680960"/>
+            <a:ext cx="0" cy="1325880"/>
+          </a:xfrm>
+          <a:prstGeom prst="line">
+            <a:avLst/>
+          </a:prstGeom>
+          <a:ln w="28575">
+            <a:solidFill>
+              <a:srgbClr val="F5EFE9"/>
+            </a:solidFill>
+            <a:tailEnd type="triangle" w="med" len="med"/>
+          </a:ln>
+        </p:spPr>
+        <p:style>
+          <a:lnRef idx="2">
+            <a:schemeClr val="accent1"/>
+          </a:lnRef>
+          <a:fillRef idx="0">
+            <a:schemeClr val="accent1"/>
+          </a:fillRef>
+          <a:effectRef idx="1">
+            <a:schemeClr val="accent1"/>
+          </a:effectRef>
+          <a:fontRef idx="minor">
+            <a:schemeClr val="tx1"/>
+          </a:fontRef>
+        </p:style>
+      </p:cxnSp>
+      <p:sp>
+        <p:nvSpPr>
+          <p:cNvPr id="95" name="TextBox 94"/>
+          <p:cNvSpPr txBox="1"/>
+          <p:nvPr/>
+        </p:nvSpPr>
+        <p:spPr>
+          <a:xfrm>
+            <a:off x="740664" y="10012680"/>
+            <a:ext cx="18653760" cy="457200"/>
+          </a:xfrm>
+          <a:prstGeom prst="rect">
+            <a:avLst/>
+          </a:prstGeom>
+          <a:noFill/>
+        </p:spPr>
+        <p:txBody>
+          <a:bodyPr wrap="square" anchor="t" lIns="0" rIns="0" tIns="54864" bIns="54864">
+            <a:spAutoFit/>
+          </a:bodyPr>
+          <a:lstStyle/>
           <a:p>
             <a:pPr algn="l">
               <a:spcAft>
@@ -11065,50 +15615,12 @@
               </a:spcAft>
             </a:pPr>
             <a:r>
-              <a:rPr sz="1500" b="0">
-                <a:solidFill>
-                  <a:srgbClr val="4C5D69"/>
+              <a:rPr sz="1200" b="0">
+                <a:solidFill>
+                  <a:srgbClr val="F5EFE9"/>
                 </a:solidFill>
               </a:rPr>
-              <a:t>One scheduler job per table, twice daily with a 30-minute stagger, held on TEST until approved. Last-run capture and data-quality checks per client; validate again after the first scheduled run.</a:t>
-            </a:r>
-          </a:p>
-        </p:txBody>
-      </p:sp>
-      <p:sp>
-        <p:nvSpPr>
-          <p:cNvPr id="35" name="TextBox 34"/>
-          <p:cNvSpPr txBox="1"/>
-          <p:nvPr/>
-        </p:nvSpPr>
-        <p:spPr>
-          <a:xfrm>
-            <a:off x="740664" y="10012680"/>
-            <a:ext cx="18288000" cy="457200"/>
-          </a:xfrm>
-          <a:prstGeom prst="rect">
-            <a:avLst/>
-          </a:prstGeom>
-          <a:noFill/>
-        </p:spPr>
-        <p:txBody>
-          <a:bodyPr wrap="square" anchor="t" lIns="0" rIns="0" tIns="54864" bIns="54864">
-            <a:spAutoFit/>
-          </a:bodyPr>
-          <a:lstStyle/>
-          <a:p>
-            <a:pPr algn="l">
-              <a:spcAft>
-                <a:spcPts val="600"/>
-              </a:spcAft>
-            </a:pPr>
-            <a:r>
-              <a:rPr sz="1400" b="0">
-                <a:solidFill>
-                  <a:srgbClr val="F5EFE9"/>
-                </a:solidFill>
-              </a:rPr>
-              <a:t>Steps 1 to 8 are the baseline; 9 and 10 are the cutover to rolling refresh. The domain-support objects ride the same rollout so the live domains work the day the snapshots do.</a:t>
+              <a:t>Cylinders are the tables the domains read; the boxes under the three view columns are the CMS views; orange diamonds are gates that stop the rollout. The loop under the second row is the twice-daily rolling refresh.</a:t>
             </a:r>
           </a:p>
         </p:txBody>

--- a/jaspersoft/docs/deployment_deck/visuals/Standard_Offering_and_Database_Steps.pptx
+++ b/jaspersoft/docs/deployment_deck/visuals/Standard_Offering_and_Database_Steps.pptx
@@ -9798,7 +9798,7 @@
                   <a:srgbClr val="4C5D69"/>
                 </a:solidFill>
               </a:rPr>
-              <a:t>scheduled SQL reports in one place on every org, promoted by the same tool</a:t>
+              <a:t>scheduled SQL reports in one folder; on Origin_DEV today, promoted to client orgs by the same tool when approved</a:t>
             </a:r>
           </a:p>
         </p:txBody>
@@ -11551,7 +11551,7 @@
                   <a:srgbClr val="4C5D69"/>
                 </a:solidFill>
               </a:rPr>
-              <a:t>baseline (24 months, once) and operational per table; SA refresh</a:t>
+              <a:t>baseline (the retained 24 months, once) and operational per table; the SA aged-balance refresh</a:t>
             </a:r>
           </a:p>
         </p:txBody>
@@ -12402,7 +12402,7 @@
                   <a:srgbClr val="4C5D69"/>
                 </a:solidFill>
               </a:rPr>
-              <a:t>twice daily, 30-minute stagger, held on TEST until approved</a:t>
+              <a:t>twice daily from 10:00 and 16:00 UTC, 30-minute stagger; held on TEST until approved</a:t>
             </a:r>
           </a:p>
         </p:txBody>
@@ -12513,7 +12513,7 @@
                   <a:srgbClr val="F5EFE9"/>
                 </a:solidFill>
               </a:rPr>
-              <a:t>Finance</a:t>
+              <a:t>Finance tables</a:t>
             </a:r>
           </a:p>
         </p:txBody>
@@ -12551,7 +12551,7 @@
                   <a:srgbClr val="F5EFE9"/>
                 </a:solidFill>
               </a:rPr>
-              <a:t>Billing and Rates</a:t>
+              <a:t>Billing and Rates tables</a:t>
             </a:r>
           </a:p>
         </p:txBody>
@@ -12589,7 +12589,7 @@
                   <a:srgbClr val="F5EFE9"/>
                 </a:solidFill>
               </a:rPr>
-              <a:t>Meter Operations</a:t>
+              <a:t>Meter Operations tables</a:t>
             </a:r>
           </a:p>
         </p:txBody>
@@ -12627,7 +12627,7 @@
                   <a:srgbClr val="F5EFE9"/>
                 </a:solidFill>
               </a:rPr>
-              <a:t>Debt Management</a:t>
+              <a:t>Debt Management table + seed</a:t>
             </a:r>
           </a:p>
         </p:txBody>
@@ -12748,7 +12748,7 @@
       </p:sp>
       <p:sp>
         <p:nvSpPr>
-          <p:cNvPr id="35" name="Can 34"/>
+          <p:cNvPr id="35" name="Rounded Rectangle 34"/>
           <p:cNvSpPr/>
           <p:nvPr/>
         </p:nvSpPr>
@@ -12757,8 +12757,10 @@
             <a:off x="868680" y="6675120"/>
             <a:ext cx="2103120" cy="822960"/>
           </a:xfrm>
-          <a:prstGeom prst="can">
-            <a:avLst/>
+          <a:prstGeom prst="roundRect">
+            <a:avLst>
+              <a:gd name="adj" fmla="val 10000"/>
+            </a:avLst>
           </a:prstGeom>
           <a:solidFill>
             <a:srgbClr val="F5EFE9"/>
@@ -12819,7 +12821,7 @@
       </p:sp>
       <p:sp>
         <p:nvSpPr>
-          <p:cNvPr id="36" name="Can 35"/>
+          <p:cNvPr id="36" name="Rounded Rectangle 35"/>
           <p:cNvSpPr/>
           <p:nvPr/>
         </p:nvSpPr>
@@ -12828,8 +12830,10 @@
             <a:off x="868680" y="7635240"/>
             <a:ext cx="2103120" cy="822960"/>
           </a:xfrm>
-          <a:prstGeom prst="can">
-            <a:avLst/>
+          <a:prstGeom prst="roundRect">
+            <a:avLst>
+              <a:gd name="adj" fmla="val 10000"/>
+            </a:avLst>
           </a:prstGeom>
           <a:solidFill>
             <a:srgbClr val="F5EFE9"/>
@@ -12890,7 +12894,7 @@
       </p:sp>
       <p:sp>
         <p:nvSpPr>
-          <p:cNvPr id="37" name="Can 36"/>
+          <p:cNvPr id="37" name="Rounded Rectangle 36"/>
           <p:cNvSpPr/>
           <p:nvPr/>
         </p:nvSpPr>
@@ -12899,8 +12903,10 @@
             <a:off x="3108960" y="6675120"/>
             <a:ext cx="2103120" cy="822960"/>
           </a:xfrm>
-          <a:prstGeom prst="can">
-            <a:avLst/>
+          <a:prstGeom prst="roundRect">
+            <a:avLst>
+              <a:gd name="adj" fmla="val 10000"/>
+            </a:avLst>
           </a:prstGeom>
           <a:solidFill>
             <a:srgbClr val="F5EFE9"/>
@@ -12961,7 +12967,7 @@
       </p:sp>
       <p:sp>
         <p:nvSpPr>
-          <p:cNvPr id="38" name="Can 37"/>
+          <p:cNvPr id="38" name="Rounded Rectangle 37"/>
           <p:cNvSpPr/>
           <p:nvPr/>
         </p:nvSpPr>
@@ -12970,8 +12976,10 @@
             <a:off x="3108960" y="7635240"/>
             <a:ext cx="2103120" cy="822960"/>
           </a:xfrm>
-          <a:prstGeom prst="can">
-            <a:avLst/>
+          <a:prstGeom prst="roundRect">
+            <a:avLst>
+              <a:gd name="adj" fmla="val 10000"/>
+            </a:avLst>
           </a:prstGeom>
           <a:solidFill>
             <a:srgbClr val="F5EFE9"/>
@@ -13032,7 +13040,7 @@
       </p:sp>
       <p:sp>
         <p:nvSpPr>
-          <p:cNvPr id="39" name="Can 38"/>
+          <p:cNvPr id="39" name="Rounded Rectangle 38"/>
           <p:cNvSpPr/>
           <p:nvPr/>
         </p:nvSpPr>
@@ -13041,8 +13049,10 @@
             <a:off x="5349240" y="6675120"/>
             <a:ext cx="2103120" cy="594360"/>
           </a:xfrm>
-          <a:prstGeom prst="can">
-            <a:avLst/>
+          <a:prstGeom prst="roundRect">
+            <a:avLst>
+              <a:gd name="adj" fmla="val 10000"/>
+            </a:avLst>
           </a:prstGeom>
           <a:solidFill>
             <a:srgbClr val="F5EFE9"/>
@@ -13103,7 +13113,7 @@
       </p:sp>
       <p:sp>
         <p:nvSpPr>
-          <p:cNvPr id="40" name="Can 39"/>
+          <p:cNvPr id="40" name="Rounded Rectangle 39"/>
           <p:cNvSpPr/>
           <p:nvPr/>
         </p:nvSpPr>
@@ -13112,8 +13122,10 @@
             <a:off x="5349240" y="7360920"/>
             <a:ext cx="2103120" cy="594360"/>
           </a:xfrm>
-          <a:prstGeom prst="can">
-            <a:avLst/>
+          <a:prstGeom prst="roundRect">
+            <a:avLst>
+              <a:gd name="adj" fmla="val 10000"/>
+            </a:avLst>
           </a:prstGeom>
           <a:solidFill>
             <a:srgbClr val="F5EFE9"/>
@@ -13174,7 +13186,7 @@
       </p:sp>
       <p:sp>
         <p:nvSpPr>
-          <p:cNvPr id="41" name="Can 40"/>
+          <p:cNvPr id="41" name="Rounded Rectangle 40"/>
           <p:cNvSpPr/>
           <p:nvPr/>
         </p:nvSpPr>
@@ -13183,8 +13195,10 @@
             <a:off x="5349240" y="8046720"/>
             <a:ext cx="2103120" cy="594360"/>
           </a:xfrm>
-          <a:prstGeom prst="can">
-            <a:avLst/>
+          <a:prstGeom prst="roundRect">
+            <a:avLst>
+              <a:gd name="adj" fmla="val 10000"/>
+            </a:avLst>
           </a:prstGeom>
           <a:solidFill>
             <a:srgbClr val="F5EFE9"/>
@@ -13419,7 +13433,7 @@
       </p:sp>
       <p:sp>
         <p:nvSpPr>
-          <p:cNvPr id="45" name="Can 44"/>
+          <p:cNvPr id="45" name="Rounded Rectangle 44"/>
           <p:cNvSpPr/>
           <p:nvPr/>
         </p:nvSpPr>
@@ -13428,8 +13442,10 @@
             <a:off x="7863840" y="6675120"/>
             <a:ext cx="2377440" cy="868680"/>
           </a:xfrm>
-          <a:prstGeom prst="can">
-            <a:avLst/>
+          <a:prstGeom prst="roundRect">
+            <a:avLst>
+              <a:gd name="adj" fmla="val 10000"/>
+            </a:avLst>
           </a:prstGeom>
           <a:solidFill>
             <a:srgbClr val="F5EFE9"/>
@@ -14526,7 +14542,7 @@
         <p:spPr>
           <a:xfrm>
             <a:off x="15828263" y="3474720"/>
-            <a:ext cx="2322577" cy="228600"/>
+            <a:ext cx="0" cy="274319"/>
           </a:xfrm>
           <a:prstGeom prst="line">
             <a:avLst/>
@@ -14559,9 +14575,9 @@
           <p:nvPr/>
         </p:nvCxnSpPr>
         <p:spPr>
-          <a:xfrm flipH="1">
-            <a:off x="18150839" y="3703320"/>
-            <a:ext cx="1" cy="320040"/>
+          <a:xfrm>
+            <a:off x="15828263" y="3749039"/>
+            <a:ext cx="2322577" cy="0"/>
           </a:xfrm>
           <a:prstGeom prst="line">
             <a:avLst/>
@@ -14570,7 +14586,6 @@
             <a:solidFill>
               <a:srgbClr val="F5EFE9"/>
             </a:solidFill>
-            <a:tailEnd type="triangle" w="med" len="med"/>
           </a:ln>
         </p:spPr>
         <p:style>
@@ -14596,8 +14611,8 @@
         </p:nvCxnSpPr>
         <p:spPr>
           <a:xfrm flipH="1">
-            <a:off x="16642080" y="4503420"/>
-            <a:ext cx="457200" cy="0"/>
+            <a:off x="18150839" y="3749039"/>
+            <a:ext cx="1" cy="274321"/>
           </a:xfrm>
           <a:prstGeom prst="line">
             <a:avLst/>
@@ -14632,7 +14647,7 @@
         </p:nvCxnSpPr>
         <p:spPr>
           <a:xfrm flipH="1">
-            <a:off x="13807440" y="4503420"/>
+            <a:off x="16642080" y="4503420"/>
             <a:ext cx="457200" cy="0"/>
           </a:xfrm>
           <a:prstGeom prst="line">
@@ -14668,7 +14683,7 @@
         </p:nvCxnSpPr>
         <p:spPr>
           <a:xfrm flipH="1">
-            <a:off x="11155680" y="4503420"/>
+            <a:off x="13807440" y="4503420"/>
             <a:ext cx="457200" cy="0"/>
           </a:xfrm>
           <a:prstGeom prst="line">
@@ -14704,8 +14719,8 @@
         </p:nvCxnSpPr>
         <p:spPr>
           <a:xfrm flipH="1">
-            <a:off x="7955279" y="4503420"/>
-            <a:ext cx="457201" cy="0"/>
+            <a:off x="11155680" y="4503420"/>
+            <a:ext cx="457200" cy="0"/>
           </a:xfrm>
           <a:prstGeom prst="line">
             <a:avLst/>
@@ -14740,8 +14755,8 @@
         </p:nvCxnSpPr>
         <p:spPr>
           <a:xfrm flipH="1">
-            <a:off x="5532120" y="4503420"/>
-            <a:ext cx="411480" cy="0"/>
+            <a:off x="7955279" y="4503420"/>
+            <a:ext cx="457201" cy="0"/>
           </a:xfrm>
           <a:prstGeom prst="line">
             <a:avLst/>
@@ -14776,8 +14791,8 @@
         </p:nvCxnSpPr>
         <p:spPr>
           <a:xfrm flipH="1">
-            <a:off x="2660904" y="4503420"/>
-            <a:ext cx="402336" cy="0"/>
+            <a:off x="5532120" y="4503420"/>
+            <a:ext cx="411480" cy="0"/>
           </a:xfrm>
           <a:prstGeom prst="line">
             <a:avLst/>
@@ -14811,9 +14826,9 @@
           <p:nvPr/>
         </p:nvCxnSpPr>
         <p:spPr>
-          <a:xfrm>
-            <a:off x="4297680" y="4937760"/>
-            <a:ext cx="0" cy="411480"/>
+          <a:xfrm flipH="1">
+            <a:off x="2660904" y="4503420"/>
+            <a:ext cx="402336" cy="0"/>
           </a:xfrm>
           <a:prstGeom prst="line">
             <a:avLst/>
@@ -14822,6 +14837,7 @@
             <a:solidFill>
               <a:srgbClr val="F5EFE9"/>
             </a:solidFill>
+            <a:tailEnd type="triangle" w="med" len="med"/>
           </a:ln>
         </p:spPr>
         <p:style>
@@ -14847,8 +14863,8 @@
         </p:nvCxnSpPr>
         <p:spPr>
           <a:xfrm>
-            <a:off x="4297680" y="5349240"/>
-            <a:ext cx="5486400" cy="0"/>
+            <a:off x="4297680" y="4937760"/>
+            <a:ext cx="0" cy="411480"/>
           </a:xfrm>
           <a:prstGeom prst="line">
             <a:avLst/>
@@ -14881,9 +14897,9 @@
           <p:nvPr/>
         </p:nvCxnSpPr>
         <p:spPr>
-          <a:xfrm flipV="1">
-            <a:off x="9784080" y="4937760"/>
-            <a:ext cx="0" cy="411480"/>
+          <a:xfrm>
+            <a:off x="4297680" y="5349240"/>
+            <a:ext cx="5486400" cy="0"/>
           </a:xfrm>
           <a:prstGeom prst="line">
             <a:avLst/>
@@ -14892,81 +14908,6 @@
             <a:solidFill>
               <a:srgbClr val="F5EFE9"/>
             </a:solidFill>
-            <a:tailEnd type="triangle" w="med" len="med"/>
-          </a:ln>
-        </p:spPr>
-        <p:style>
-          <a:lnRef idx="2">
-            <a:schemeClr val="accent1"/>
-          </a:lnRef>
-          <a:fillRef idx="0">
-            <a:schemeClr val="accent1"/>
-          </a:fillRef>
-          <a:effectRef idx="1">
-            <a:schemeClr val="accent1"/>
-          </a:effectRef>
-          <a:fontRef idx="minor">
-            <a:schemeClr val="tx1"/>
-          </a:fontRef>
-        </p:style>
-      </p:cxnSp>
-      <p:sp>
-        <p:nvSpPr>
-          <p:cNvPr id="76" name="TextBox 75"/>
-          <p:cNvSpPr txBox="1"/>
-          <p:nvPr/>
-        </p:nvSpPr>
-        <p:spPr>
-          <a:xfrm>
-            <a:off x="4572000" y="5029200"/>
-            <a:ext cx="5486400" cy="365760"/>
-          </a:xfrm>
-          <a:prstGeom prst="rect">
-            <a:avLst/>
-          </a:prstGeom>
-          <a:noFill/>
-        </p:spPr>
-        <p:txBody>
-          <a:bodyPr wrap="square" anchor="b" lIns="0" rIns="0" tIns="54864" bIns="54864">
-            <a:spAutoFit/>
-          </a:bodyPr>
-          <a:lstStyle/>
-          <a:p>
-            <a:pPr algn="l">
-              <a:spcAft>
-                <a:spcPts val="600"/>
-              </a:spcAft>
-            </a:pPr>
-            <a:r>
-              <a:rPr sz="1100" b="1">
-                <a:solidFill>
-                  <a:srgbClr val="F5EFE9"/>
-                </a:solidFill>
-              </a:rPr>
-              <a:t>every 12 hours: the newest 3 months rebuilt, older rows kept</a:t>
-            </a:r>
-          </a:p>
-        </p:txBody>
-      </p:sp>
-      <p:cxnSp>
-        <p:nvCxnSpPr>
-          <p:cNvPr id="77" name="Connector 76"/>
-          <p:cNvCxnSpPr/>
-          <p:nvPr/>
-        </p:nvCxnSpPr>
-        <p:spPr>
-          <a:xfrm>
-            <a:off x="1920239" y="8458200"/>
-            <a:ext cx="0" cy="548640"/>
-          </a:xfrm>
-          <a:prstGeom prst="line">
-            <a:avLst/>
-          </a:prstGeom>
-          <a:ln w="28575">
-            <a:solidFill>
-              <a:srgbClr val="F5EFE9"/>
-            </a:solidFill>
-            <a:tailEnd type="triangle" w="med" len="med"/>
           </a:ln>
         </p:spPr>
         <p:style>
@@ -14986,13 +14927,87 @@
       </p:cxnSp>
       <p:cxnSp>
         <p:nvCxnSpPr>
+          <p:cNvPr id="76" name="Connector 75"/>
+          <p:cNvCxnSpPr/>
+          <p:nvPr/>
+        </p:nvCxnSpPr>
+        <p:spPr>
+          <a:xfrm flipV="1">
+            <a:off x="9784080" y="4937760"/>
+            <a:ext cx="0" cy="411480"/>
+          </a:xfrm>
+          <a:prstGeom prst="line">
+            <a:avLst/>
+          </a:prstGeom>
+          <a:ln w="28575">
+            <a:solidFill>
+              <a:srgbClr val="F5EFE9"/>
+            </a:solidFill>
+            <a:tailEnd type="triangle" w="med" len="med"/>
+          </a:ln>
+        </p:spPr>
+        <p:style>
+          <a:lnRef idx="2">
+            <a:schemeClr val="accent1"/>
+          </a:lnRef>
+          <a:fillRef idx="0">
+            <a:schemeClr val="accent1"/>
+          </a:fillRef>
+          <a:effectRef idx="1">
+            <a:schemeClr val="accent1"/>
+          </a:effectRef>
+          <a:fontRef idx="minor">
+            <a:schemeClr val="tx1"/>
+          </a:fontRef>
+        </p:style>
+      </p:cxnSp>
+      <p:sp>
+        <p:nvSpPr>
+          <p:cNvPr id="77" name="TextBox 76"/>
+          <p:cNvSpPr txBox="1"/>
+          <p:nvPr/>
+        </p:nvSpPr>
+        <p:spPr>
+          <a:xfrm>
+            <a:off x="4572000" y="5029200"/>
+            <a:ext cx="5486400" cy="365760"/>
+          </a:xfrm>
+          <a:prstGeom prst="rect">
+            <a:avLst/>
+          </a:prstGeom>
+          <a:noFill/>
+        </p:spPr>
+        <p:txBody>
+          <a:bodyPr wrap="square" anchor="b" lIns="0" rIns="0" tIns="54864" bIns="54864">
+            <a:spAutoFit/>
+          </a:bodyPr>
+          <a:lstStyle/>
+          <a:p>
+            <a:pPr algn="l">
+              <a:spcAft>
+                <a:spcPts val="600"/>
+              </a:spcAft>
+            </a:pPr>
+            <a:r>
+              <a:rPr sz="1100" b="1">
+                <a:solidFill>
+                  <a:srgbClr val="F5EFE9"/>
+                </a:solidFill>
+              </a:rPr>
+              <a:t>every 12 hours: the newest 3 months rebuilt, older rows kept</a:t>
+            </a:r>
+          </a:p>
+        </p:txBody>
+      </p:sp>
+      <p:cxnSp>
+        <p:nvCxnSpPr>
           <p:cNvPr id="78" name="Connector 77"/>
           <p:cNvCxnSpPr/>
           <p:nvPr/>
         </p:nvCxnSpPr>
         <p:spPr>
           <a:xfrm>
-            <a:off x="4160520" y="8458200"/>
+            <a:off x="1920239" y="8458200"/>
             <a:ext cx="0" cy="548640"/>
           </a:xfrm>
           <a:prstGeom prst="line">
@@ -15028,8 +15043,8 @@
         </p:nvCxnSpPr>
         <p:spPr>
           <a:xfrm>
-            <a:off x="6400800" y="8641080"/>
-            <a:ext cx="0" cy="365760"/>
+            <a:off x="4160520" y="8458200"/>
+            <a:ext cx="0" cy="548640"/>
           </a:xfrm>
           <a:prstGeom prst="line">
             <a:avLst/>
@@ -15064,8 +15079,8 @@
         </p:nvCxnSpPr>
         <p:spPr>
           <a:xfrm>
-            <a:off x="9052560" y="8366759"/>
-            <a:ext cx="0" cy="640081"/>
+            <a:off x="6400800" y="8641080"/>
+            <a:ext cx="0" cy="365760"/>
           </a:xfrm>
           <a:prstGeom prst="line">
             <a:avLst/>
@@ -15099,9 +15114,9 @@
           <p:nvPr/>
         </p:nvCxnSpPr>
         <p:spPr>
-          <a:xfrm flipH="1">
-            <a:off x="10332720" y="7452360"/>
-            <a:ext cx="182880" cy="0"/>
+          <a:xfrm>
+            <a:off x="9052560" y="8366759"/>
+            <a:ext cx="0" cy="640081"/>
           </a:xfrm>
           <a:prstGeom prst="line">
             <a:avLst/>
@@ -15110,6 +15125,7 @@
             <a:solidFill>
               <a:srgbClr val="F5EFE9"/>
             </a:solidFill>
+            <a:tailEnd type="triangle" w="med" len="med"/>
           </a:ln>
         </p:spPr>
         <p:style>
@@ -15134,9 +15150,9 @@
           <p:nvPr/>
         </p:nvCxnSpPr>
         <p:spPr>
-          <a:xfrm>
+          <a:xfrm flipH="1">
             <a:off x="10332720" y="7452360"/>
-            <a:ext cx="0" cy="1280160"/>
+            <a:ext cx="182880" cy="0"/>
           </a:xfrm>
           <a:prstGeom prst="line">
             <a:avLst/>
@@ -15170,8 +15186,8 @@
         </p:nvCxnSpPr>
         <p:spPr>
           <a:xfrm>
-            <a:off x="10332720" y="8732520"/>
-            <a:ext cx="886968" cy="0"/>
+            <a:off x="10332720" y="7452360"/>
+            <a:ext cx="0" cy="1280160"/>
           </a:xfrm>
           <a:prstGeom prst="line">
             <a:avLst/>
@@ -15205,8 +15221,8 @@
         </p:nvCxnSpPr>
         <p:spPr>
           <a:xfrm>
-            <a:off x="11219688" y="8732520"/>
-            <a:ext cx="4572" cy="274320"/>
+            <a:off x="10332720" y="8732520"/>
+            <a:ext cx="886968" cy="0"/>
           </a:xfrm>
           <a:prstGeom prst="line">
             <a:avLst/>
@@ -15215,7 +15231,6 @@
             <a:solidFill>
               <a:srgbClr val="F5EFE9"/>
             </a:solidFill>
-            <a:tailEnd type="triangle" w="med" len="med"/>
           </a:ln>
         </p:spPr>
         <p:style>
@@ -15240,9 +15255,9 @@
           <p:nvPr/>
         </p:nvCxnSpPr>
         <p:spPr>
-          <a:xfrm flipH="1">
-            <a:off x="11996928" y="8229600"/>
-            <a:ext cx="4572" cy="502920"/>
+          <a:xfrm>
+            <a:off x="11219688" y="8732520"/>
+            <a:ext cx="4572" cy="274320"/>
           </a:xfrm>
           <a:prstGeom prst="line">
             <a:avLst/>
@@ -15251,6 +15266,7 @@
             <a:solidFill>
               <a:srgbClr val="F5EFE9"/>
             </a:solidFill>
+            <a:tailEnd type="triangle" w="med" len="med"/>
           </a:ln>
         </p:spPr>
         <p:style>
@@ -15275,9 +15291,9 @@
           <p:nvPr/>
         </p:nvCxnSpPr>
         <p:spPr>
-          <a:xfrm>
-            <a:off x="11996928" y="8732520"/>
-            <a:ext cx="777240" cy="0"/>
+          <a:xfrm flipH="1">
+            <a:off x="11996928" y="8229600"/>
+            <a:ext cx="4572" cy="502920"/>
           </a:xfrm>
           <a:prstGeom prst="line">
             <a:avLst/>
@@ -15311,8 +15327,8 @@
         </p:nvCxnSpPr>
         <p:spPr>
           <a:xfrm>
-            <a:off x="12774168" y="8732520"/>
-            <a:ext cx="4572" cy="274320"/>
+            <a:off x="11996928" y="8732520"/>
+            <a:ext cx="777240" cy="0"/>
           </a:xfrm>
           <a:prstGeom prst="line">
             <a:avLst/>
@@ -15321,7 +15337,6 @@
             <a:solidFill>
               <a:srgbClr val="F5EFE9"/>
             </a:solidFill>
-            <a:tailEnd type="triangle" w="med" len="med"/>
           </a:ln>
         </p:spPr>
         <p:style>
@@ -15347,8 +15362,8 @@
         </p:nvCxnSpPr>
         <p:spPr>
           <a:xfrm>
-            <a:off x="15247620" y="8229600"/>
-            <a:ext cx="0" cy="365760"/>
+            <a:off x="12774168" y="8732520"/>
+            <a:ext cx="4572" cy="274320"/>
           </a:xfrm>
           <a:prstGeom prst="line">
             <a:avLst/>
@@ -15357,6 +15372,7 @@
             <a:solidFill>
               <a:srgbClr val="F5EFE9"/>
             </a:solidFill>
+            <a:tailEnd type="triangle" w="med" len="med"/>
           </a:ln>
         </p:spPr>
         <p:style>
@@ -15381,9 +15397,9 @@
           <p:nvPr/>
         </p:nvCxnSpPr>
         <p:spPr>
-          <a:xfrm flipH="1">
-            <a:off x="14447520" y="8595360"/>
-            <a:ext cx="800100" cy="0"/>
+          <a:xfrm>
+            <a:off x="15247620" y="8229600"/>
+            <a:ext cx="0" cy="365760"/>
           </a:xfrm>
           <a:prstGeom prst="line">
             <a:avLst/>
@@ -15416,9 +15432,9 @@
           <p:nvPr/>
         </p:nvCxnSpPr>
         <p:spPr>
-          <a:xfrm>
+          <a:xfrm flipH="1">
             <a:off x="14447520" y="8595360"/>
-            <a:ext cx="0" cy="411480"/>
+            <a:ext cx="800100" cy="0"/>
           </a:xfrm>
           <a:prstGeom prst="line">
             <a:avLst/>
@@ -15427,7 +15443,6 @@
             <a:solidFill>
               <a:srgbClr val="F5EFE9"/>
             </a:solidFill>
-            <a:tailEnd type="triangle" w="med" len="med"/>
           </a:ln>
         </p:spPr>
         <p:style>
@@ -15453,8 +15468,8 @@
         </p:nvCxnSpPr>
         <p:spPr>
           <a:xfrm>
-            <a:off x="15247620" y="8229600"/>
-            <a:ext cx="0" cy="365760"/>
+            <a:off x="14447520" y="8595360"/>
+            <a:ext cx="0" cy="411480"/>
           </a:xfrm>
           <a:prstGeom prst="line">
             <a:avLst/>
@@ -15463,6 +15478,7 @@
             <a:solidFill>
               <a:srgbClr val="F5EFE9"/>
             </a:solidFill>
+            <a:tailEnd type="triangle" w="med" len="med"/>
           </a:ln>
         </p:spPr>
         <p:style>
@@ -15488,8 +15504,8 @@
         </p:nvCxnSpPr>
         <p:spPr>
           <a:xfrm>
-            <a:off x="15247620" y="8595360"/>
-            <a:ext cx="800100" cy="0"/>
+            <a:off x="15247620" y="8229600"/>
+            <a:ext cx="0" cy="365760"/>
           </a:xfrm>
           <a:prstGeom prst="line">
             <a:avLst/>
@@ -15523,8 +15539,8 @@
         </p:nvCxnSpPr>
         <p:spPr>
           <a:xfrm>
-            <a:off x="16047720" y="8595360"/>
-            <a:ext cx="0" cy="411480"/>
+            <a:off x="15247620" y="8595360"/>
+            <a:ext cx="800100" cy="0"/>
           </a:xfrm>
           <a:prstGeom prst="line">
             <a:avLst/>
@@ -15533,7 +15549,6 @@
             <a:solidFill>
               <a:srgbClr val="F5EFE9"/>
             </a:solidFill>
-            <a:tailEnd type="triangle" w="med" len="med"/>
           </a:ln>
         </p:spPr>
         <p:style>
@@ -15559,8 +15574,8 @@
         </p:nvCxnSpPr>
         <p:spPr>
           <a:xfrm>
-            <a:off x="18105120" y="7680960"/>
-            <a:ext cx="0" cy="1325880"/>
+            <a:off x="16047720" y="8595360"/>
+            <a:ext cx="0" cy="411480"/>
           </a:xfrm>
           <a:prstGeom prst="line">
             <a:avLst/>
@@ -15587,9 +15602,45 @@
           </a:fontRef>
         </p:style>
       </p:cxnSp>
-      <p:sp>
-        <p:nvSpPr>
-          <p:cNvPr id="95" name="TextBox 94"/>
+      <p:cxnSp>
+        <p:nvCxnSpPr>
+          <p:cNvPr id="95" name="Connector 94"/>
+          <p:cNvCxnSpPr/>
+          <p:nvPr/>
+        </p:nvCxnSpPr>
+        <p:spPr>
+          <a:xfrm>
+            <a:off x="18105120" y="7680960"/>
+            <a:ext cx="0" cy="1325880"/>
+          </a:xfrm>
+          <a:prstGeom prst="line">
+            <a:avLst/>
+          </a:prstGeom>
+          <a:ln w="28575">
+            <a:solidFill>
+              <a:srgbClr val="F5EFE9"/>
+            </a:solidFill>
+            <a:tailEnd type="triangle" w="med" len="med"/>
+          </a:ln>
+        </p:spPr>
+        <p:style>
+          <a:lnRef idx="2">
+            <a:schemeClr val="accent1"/>
+          </a:lnRef>
+          <a:fillRef idx="0">
+            <a:schemeClr val="accent1"/>
+          </a:fillRef>
+          <a:effectRef idx="1">
+            <a:schemeClr val="accent1"/>
+          </a:effectRef>
+          <a:fontRef idx="minor">
+            <a:schemeClr val="tx1"/>
+          </a:fontRef>
+        </p:style>
+      </p:cxnSp>
+      <p:sp>
+        <p:nvSpPr>
+          <p:cNvPr id="96" name="TextBox 95"/>
           <p:cNvSpPr txBox="1"/>
           <p:nvPr/>
         </p:nvSpPr>
@@ -15620,7 +15671,7 @@
                   <a:srgbClr val="F5EFE9"/>
                 </a:solidFill>
               </a:rPr>
-              <a:t>Cylinders are the tables the domains read; the boxes under the three view columns are the CMS views; orange diamonds are gates that stop the rollout. The loop under the second row is the twice-daily rolling refresh.</a:t>
+              <a:t>Every box in the map is one database object the domains read: seven rolling snapshot tables, the SA aged-balance table with its lookup seed, and eight CMS views. Orange diamonds are gates that stop the rollout; the loop under the second row is the twice-daily rolling refresh (3 months rebuilt, 24 kept; 6 months at CityCorp and Odessa).</a:t>
             </a:r>
           </a:p>
         </p:txBody>

--- a/jaspersoft/docs/deployment_deck/visuals/Standard_Offering_and_Database_Steps.pptx
+++ b/jaspersoft/docs/deployment_deck/visuals/Standard_Offering_and_Database_Steps.pptx
@@ -7794,7 +7794,7 @@
         <p:spPr>
           <a:xfrm>
             <a:off x="740664" y="1828800"/>
-            <a:ext cx="4443984" cy="5989320"/>
+            <a:ext cx="4443984" cy="6446520"/>
           </a:xfrm>
           <a:prstGeom prst="roundRect">
             <a:avLst>
@@ -7893,7 +7893,7 @@
         <p:spPr>
           <a:xfrm>
             <a:off x="5477256" y="1828800"/>
-            <a:ext cx="4443984" cy="5989320"/>
+            <a:ext cx="4443984" cy="6446520"/>
           </a:xfrm>
           <a:prstGeom prst="roundRect">
             <a:avLst>
@@ -7992,7 +7992,7 @@
         <p:spPr>
           <a:xfrm>
             <a:off x="10213848" y="1828800"/>
-            <a:ext cx="4443984" cy="5989320"/>
+            <a:ext cx="4443984" cy="6446520"/>
           </a:xfrm>
           <a:prstGeom prst="roundRect">
             <a:avLst>
@@ -8091,7 +8091,7 @@
         <p:spPr>
           <a:xfrm>
             <a:off x="14950440" y="1828800"/>
-            <a:ext cx="4443984" cy="5989320"/>
+            <a:ext cx="4443984" cy="6446520"/>
           </a:xfrm>
           <a:prstGeom prst="roundRect">
             <a:avLst>
@@ -8189,8 +8189,8 @@
         </p:nvSpPr>
         <p:spPr>
           <a:xfrm>
-            <a:off x="740664" y="8092440"/>
-            <a:ext cx="18653760" cy="1783080"/>
+            <a:off x="740664" y="8549640"/>
+            <a:ext cx="18653760" cy="1691640"/>
           </a:xfrm>
           <a:prstGeom prst="roundRect">
             <a:avLst>
@@ -8235,7 +8235,7 @@
         </p:nvSpPr>
         <p:spPr>
           <a:xfrm>
-            <a:off x="905256" y="8138160"/>
+            <a:off x="905256" y="8595360"/>
             <a:ext cx="18324576" cy="411480"/>
           </a:xfrm>
           <a:prstGeom prst="rect">
@@ -8355,7 +8355,63 @@
       </p:sp>
       <p:sp>
         <p:nvSpPr>
-          <p:cNvPr id="16" name="Rounded Rectangle 15"/>
+          <p:cNvPr id="16" name="Oval 15"/>
+          <p:cNvSpPr/>
+          <p:nvPr/>
+        </p:nvSpPr>
+        <p:spPr>
+          <a:xfrm>
+            <a:off x="777240" y="2386584"/>
+            <a:ext cx="310896" cy="310896"/>
+          </a:xfrm>
+          <a:prstGeom prst="ellipse">
+            <a:avLst/>
+          </a:prstGeom>
+          <a:solidFill>
+            <a:srgbClr val="FFA418"/>
+          </a:solidFill>
+          <a:ln>
+            <a:noFill/>
+          </a:ln>
+          <a:effectLst/>
+        </p:spPr>
+        <p:style>
+          <a:lnRef idx="1">
+            <a:schemeClr val="accent1"/>
+          </a:lnRef>
+          <a:fillRef idx="3">
+            <a:schemeClr val="accent1"/>
+          </a:fillRef>
+          <a:effectRef idx="2">
+            <a:schemeClr val="accent1"/>
+          </a:effectRef>
+          <a:fontRef idx="minor">
+            <a:schemeClr val="lt1"/>
+          </a:fontRef>
+        </p:style>
+        <p:txBody>
+          <a:bodyPr rtlCol="0" anchor="ctr" wrap="square" lIns="0" rIns="0" tIns="54864" bIns="54864"/>
+          <a:lstStyle/>
+          <a:p>
+            <a:pPr algn="ctr">
+              <a:spcAft>
+                <a:spcPts val="600"/>
+              </a:spcAft>
+            </a:pPr>
+            <a:r>
+              <a:rPr sz="1000" b="1">
+                <a:solidFill>
+                  <a:srgbClr val="0B3D7A"/>
+                </a:solidFill>
+              </a:rPr>
+              <a:t>1</a:t>
+            </a:r>
+          </a:p>
+        </p:txBody>
+      </p:sp>
+      <p:sp>
+        <p:nvSpPr>
+          <p:cNvPr id="17" name="Rounded Rectangle 16"/>
           <p:cNvSpPr/>
           <p:nvPr/>
         </p:nvSpPr>
@@ -8428,7 +8484,63 @@
       </p:sp>
       <p:sp>
         <p:nvSpPr>
-          <p:cNvPr id="17" name="Rounded Rectangle 16"/>
+          <p:cNvPr id="18" name="Oval 17"/>
+          <p:cNvSpPr/>
+          <p:nvPr/>
+        </p:nvSpPr>
+        <p:spPr>
+          <a:xfrm>
+            <a:off x="777240" y="3438144"/>
+            <a:ext cx="310896" cy="310896"/>
+          </a:xfrm>
+          <a:prstGeom prst="ellipse">
+            <a:avLst/>
+          </a:prstGeom>
+          <a:solidFill>
+            <a:srgbClr val="FFA418"/>
+          </a:solidFill>
+          <a:ln>
+            <a:noFill/>
+          </a:ln>
+          <a:effectLst/>
+        </p:spPr>
+        <p:style>
+          <a:lnRef idx="1">
+            <a:schemeClr val="accent1"/>
+          </a:lnRef>
+          <a:fillRef idx="3">
+            <a:schemeClr val="accent1"/>
+          </a:fillRef>
+          <a:effectRef idx="2">
+            <a:schemeClr val="accent1"/>
+          </a:effectRef>
+          <a:fontRef idx="minor">
+            <a:schemeClr val="lt1"/>
+          </a:fontRef>
+        </p:style>
+        <p:txBody>
+          <a:bodyPr rtlCol="0" anchor="ctr" wrap="square" lIns="0" rIns="0" tIns="54864" bIns="54864"/>
+          <a:lstStyle/>
+          <a:p>
+            <a:pPr algn="ctr">
+              <a:spcAft>
+                <a:spcPts val="600"/>
+              </a:spcAft>
+            </a:pPr>
+            <a:r>
+              <a:rPr sz="1000" b="1">
+                <a:solidFill>
+                  <a:srgbClr val="0B3D7A"/>
+                </a:solidFill>
+              </a:rPr>
+              <a:t>2</a:t>
+            </a:r>
+          </a:p>
+        </p:txBody>
+      </p:sp>
+      <p:sp>
+        <p:nvSpPr>
+          <p:cNvPr id="19" name="Rounded Rectangle 18"/>
           <p:cNvSpPr/>
           <p:nvPr/>
         </p:nvSpPr>
@@ -8501,16 +8613,16 @@
       </p:sp>
       <p:sp>
         <p:nvSpPr>
-          <p:cNvPr id="18" name="Diamond 17"/>
+          <p:cNvPr id="20" name="Oval 19"/>
           <p:cNvSpPr/>
           <p:nvPr/>
         </p:nvSpPr>
         <p:spPr>
           <a:xfrm>
-            <a:off x="2185415" y="6126480"/>
-            <a:ext cx="1554480" cy="822960"/>
-          </a:xfrm>
-          <a:prstGeom prst="diamond">
+            <a:off x="777240" y="4306824"/>
+            <a:ext cx="310896" cy="310896"/>
+          </a:xfrm>
+          <a:prstGeom prst="ellipse">
             <a:avLst/>
           </a:prstGeom>
           <a:solidFill>
@@ -8536,7 +8648,7 @@
           </a:fontRef>
         </p:style>
         <p:txBody>
-          <a:bodyPr rtlCol="0" anchor="ctr" wrap="square" lIns="18288" rIns="18288" tIns="54864" bIns="54864"/>
+          <a:bodyPr rtlCol="0" anchor="ctr" wrap="square" lIns="0" rIns="0" tIns="54864" bIns="54864"/>
           <a:lstStyle/>
           <a:p>
             <a:pPr algn="ctr">
@@ -8545,6 +8657,62 @@
               </a:spcAft>
             </a:pPr>
             <a:r>
+              <a:rPr sz="1000" b="1">
+                <a:solidFill>
+                  <a:srgbClr val="0B3D7A"/>
+                </a:solidFill>
+              </a:rPr>
+              <a:t>3</a:t>
+            </a:r>
+          </a:p>
+        </p:txBody>
+      </p:sp>
+      <p:sp>
+        <p:nvSpPr>
+          <p:cNvPr id="21" name="Diamond 20"/>
+          <p:cNvSpPr/>
+          <p:nvPr/>
+        </p:nvSpPr>
+        <p:spPr>
+          <a:xfrm>
+            <a:off x="2185415" y="6080760"/>
+            <a:ext cx="1554480" cy="822960"/>
+          </a:xfrm>
+          <a:prstGeom prst="diamond">
+            <a:avLst/>
+          </a:prstGeom>
+          <a:solidFill>
+            <a:srgbClr val="FFA418"/>
+          </a:solidFill>
+          <a:ln>
+            <a:noFill/>
+          </a:ln>
+          <a:effectLst/>
+        </p:spPr>
+        <p:style>
+          <a:lnRef idx="1">
+            <a:schemeClr val="accent1"/>
+          </a:lnRef>
+          <a:fillRef idx="3">
+            <a:schemeClr val="accent1"/>
+          </a:fillRef>
+          <a:effectRef idx="2">
+            <a:schemeClr val="accent1"/>
+          </a:effectRef>
+          <a:fontRef idx="minor">
+            <a:schemeClr val="lt1"/>
+          </a:fontRef>
+        </p:style>
+        <p:txBody>
+          <a:bodyPr rtlCol="0" anchor="ctr" wrap="square" lIns="18288" rIns="18288" tIns="54864" bIns="54864"/>
+          <a:lstStyle/>
+          <a:p>
+            <a:pPr algn="ctr">
+              <a:spcAft>
+                <a:spcPts val="600"/>
+              </a:spcAft>
+            </a:pPr>
+            <a:r>
               <a:rPr sz="1100" b="1">
                 <a:solidFill>
                   <a:srgbClr val="0B3D7A"/>
@@ -8557,18 +8725,74 @@
       </p:sp>
       <p:sp>
         <p:nvSpPr>
-          <p:cNvPr id="19" name="Rounded Rectangle 18"/>
+          <p:cNvPr id="22" name="Oval 21"/>
           <p:cNvSpPr/>
           <p:nvPr/>
         </p:nvSpPr>
         <p:spPr>
           <a:xfrm>
-            <a:off x="5641848" y="2514600"/>
-            <a:ext cx="4114800" cy="777240"/>
+            <a:off x="2057399" y="5952744"/>
+            <a:ext cx="310896" cy="310896"/>
+          </a:xfrm>
+          <a:prstGeom prst="ellipse">
+            <a:avLst/>
+          </a:prstGeom>
+          <a:solidFill>
+            <a:srgbClr val="FFA418"/>
+          </a:solidFill>
+          <a:ln>
+            <a:noFill/>
+          </a:ln>
+          <a:effectLst/>
+        </p:spPr>
+        <p:style>
+          <a:lnRef idx="1">
+            <a:schemeClr val="accent1"/>
+          </a:lnRef>
+          <a:fillRef idx="3">
+            <a:schemeClr val="accent1"/>
+          </a:fillRef>
+          <a:effectRef idx="2">
+            <a:schemeClr val="accent1"/>
+          </a:effectRef>
+          <a:fontRef idx="minor">
+            <a:schemeClr val="lt1"/>
+          </a:fontRef>
+        </p:style>
+        <p:txBody>
+          <a:bodyPr rtlCol="0" anchor="ctr" wrap="square" lIns="0" rIns="0" tIns="54864" bIns="54864"/>
+          <a:lstStyle/>
+          <a:p>
+            <a:pPr algn="ctr">
+              <a:spcAft>
+                <a:spcPts val="600"/>
+              </a:spcAft>
+            </a:pPr>
+            <a:r>
+              <a:rPr sz="1000" b="1">
+                <a:solidFill>
+                  <a:srgbClr val="0B3D7A"/>
+                </a:solidFill>
+              </a:rPr>
+              <a:t>4</a:t>
+            </a:r>
+          </a:p>
+        </p:txBody>
+      </p:sp>
+      <p:sp>
+        <p:nvSpPr>
+          <p:cNvPr id="23" name="Rounded Rectangle 22"/>
+          <p:cNvSpPr/>
+          <p:nvPr/>
+        </p:nvSpPr>
+        <p:spPr>
+          <a:xfrm>
+            <a:off x="923544" y="6286500"/>
+            <a:ext cx="1051560" cy="411480"/>
           </a:xfrm>
           <a:prstGeom prst="roundRect">
             <a:avLst>
-              <a:gd name="adj" fmla="val 10000"/>
+              <a:gd name="adj" fmla="val 20000"/>
             </a:avLst>
           </a:prstGeom>
           <a:solidFill>
@@ -8594,6 +8818,64 @@
           </a:fontRef>
         </p:style>
         <p:txBody>
+          <a:bodyPr rtlCol="0" anchor="ctr" wrap="square" lIns="36576" rIns="36576" tIns="54864" bIns="54864"/>
+          <a:lstStyle/>
+          <a:p>
+            <a:pPr algn="ctr">
+              <a:spcAft>
+                <a:spcPts val="600"/>
+              </a:spcAft>
+            </a:pPr>
+            <a:r>
+              <a:rPr sz="900" b="1">
+                <a:solidFill>
+                  <a:srgbClr val="0B3D7A"/>
+                </a:solidFill>
+              </a:rPr>
+              <a:t>no: stop</a:t>
+            </a:r>
+          </a:p>
+        </p:txBody>
+      </p:sp>
+      <p:sp>
+        <p:nvSpPr>
+          <p:cNvPr id="24" name="Rounded Rectangle 23"/>
+          <p:cNvSpPr/>
+          <p:nvPr/>
+        </p:nvSpPr>
+        <p:spPr>
+          <a:xfrm>
+            <a:off x="5641848" y="2514600"/>
+            <a:ext cx="4114800" cy="777240"/>
+          </a:xfrm>
+          <a:prstGeom prst="roundRect">
+            <a:avLst>
+              <a:gd name="adj" fmla="val 10000"/>
+            </a:avLst>
+          </a:prstGeom>
+          <a:solidFill>
+            <a:srgbClr val="F5EFE9"/>
+          </a:solidFill>
+          <a:ln>
+            <a:noFill/>
+          </a:ln>
+          <a:effectLst/>
+        </p:spPr>
+        <p:style>
+          <a:lnRef idx="1">
+            <a:schemeClr val="accent1"/>
+          </a:lnRef>
+          <a:fillRef idx="3">
+            <a:schemeClr val="accent1"/>
+          </a:fillRef>
+          <a:effectRef idx="2">
+            <a:schemeClr val="accent1"/>
+          </a:effectRef>
+          <a:fontRef idx="minor">
+            <a:schemeClr val="lt1"/>
+          </a:fontRef>
+        </p:style>
+        <p:txBody>
           <a:bodyPr rtlCol="0" anchor="ctr" wrap="square" lIns="109728" rIns="109728" tIns="54864" bIns="54864"/>
           <a:lstStyle/>
           <a:p>
@@ -8630,7 +8912,63 @@
       </p:sp>
       <p:sp>
         <p:nvSpPr>
-          <p:cNvPr id="20" name="Rounded Rectangle 19"/>
+          <p:cNvPr id="25" name="Oval 24"/>
+          <p:cNvSpPr/>
+          <p:nvPr/>
+        </p:nvSpPr>
+        <p:spPr>
+          <a:xfrm>
+            <a:off x="5513832" y="2386584"/>
+            <a:ext cx="310896" cy="310896"/>
+          </a:xfrm>
+          <a:prstGeom prst="ellipse">
+            <a:avLst/>
+          </a:prstGeom>
+          <a:solidFill>
+            <a:srgbClr val="FFA418"/>
+          </a:solidFill>
+          <a:ln>
+            <a:noFill/>
+          </a:ln>
+          <a:effectLst/>
+        </p:spPr>
+        <p:style>
+          <a:lnRef idx="1">
+            <a:schemeClr val="accent1"/>
+          </a:lnRef>
+          <a:fillRef idx="3">
+            <a:schemeClr val="accent1"/>
+          </a:fillRef>
+          <a:effectRef idx="2">
+            <a:schemeClr val="accent1"/>
+          </a:effectRef>
+          <a:fontRef idx="minor">
+            <a:schemeClr val="lt1"/>
+          </a:fontRef>
+        </p:style>
+        <p:txBody>
+          <a:bodyPr rtlCol="0" anchor="ctr" wrap="square" lIns="0" rIns="0" tIns="54864" bIns="54864"/>
+          <a:lstStyle/>
+          <a:p>
+            <a:pPr algn="ctr">
+              <a:spcAft>
+                <a:spcPts val="600"/>
+              </a:spcAft>
+            </a:pPr>
+            <a:r>
+              <a:rPr sz="1000" b="1">
+                <a:solidFill>
+                  <a:srgbClr val="0B3D7A"/>
+                </a:solidFill>
+              </a:rPr>
+              <a:t>5</a:t>
+            </a:r>
+          </a:p>
+        </p:txBody>
+      </p:sp>
+      <p:sp>
+        <p:nvSpPr>
+          <p:cNvPr id="26" name="Rounded Rectangle 25"/>
           <p:cNvSpPr/>
           <p:nvPr/>
         </p:nvSpPr>
@@ -8703,7 +9041,63 @@
       </p:sp>
       <p:sp>
         <p:nvSpPr>
-          <p:cNvPr id="21" name="Rounded Rectangle 20"/>
+          <p:cNvPr id="27" name="Oval 26"/>
+          <p:cNvSpPr/>
+          <p:nvPr/>
+        </p:nvSpPr>
+        <p:spPr>
+          <a:xfrm>
+            <a:off x="5513832" y="3300984"/>
+            <a:ext cx="310896" cy="310896"/>
+          </a:xfrm>
+          <a:prstGeom prst="ellipse">
+            <a:avLst/>
+          </a:prstGeom>
+          <a:solidFill>
+            <a:srgbClr val="FFA418"/>
+          </a:solidFill>
+          <a:ln>
+            <a:noFill/>
+          </a:ln>
+          <a:effectLst/>
+        </p:spPr>
+        <p:style>
+          <a:lnRef idx="1">
+            <a:schemeClr val="accent1"/>
+          </a:lnRef>
+          <a:fillRef idx="3">
+            <a:schemeClr val="accent1"/>
+          </a:fillRef>
+          <a:effectRef idx="2">
+            <a:schemeClr val="accent1"/>
+          </a:effectRef>
+          <a:fontRef idx="minor">
+            <a:schemeClr val="lt1"/>
+          </a:fontRef>
+        </p:style>
+        <p:txBody>
+          <a:bodyPr rtlCol="0" anchor="ctr" wrap="square" lIns="0" rIns="0" tIns="54864" bIns="54864"/>
+          <a:lstStyle/>
+          <a:p>
+            <a:pPr algn="ctr">
+              <a:spcAft>
+                <a:spcPts val="600"/>
+              </a:spcAft>
+            </a:pPr>
+            <a:r>
+              <a:rPr sz="1000" b="1">
+                <a:solidFill>
+                  <a:srgbClr val="0B3D7A"/>
+                </a:solidFill>
+              </a:rPr>
+              <a:t>6</a:t>
+            </a:r>
+          </a:p>
+        </p:txBody>
+      </p:sp>
+      <p:sp>
+        <p:nvSpPr>
+          <p:cNvPr id="28" name="Rounded Rectangle 27"/>
           <p:cNvSpPr/>
           <p:nvPr/>
         </p:nvSpPr>
@@ -8776,16 +9170,16 @@
       </p:sp>
       <p:sp>
         <p:nvSpPr>
-          <p:cNvPr id="22" name="Diamond 21"/>
+          <p:cNvPr id="29" name="Oval 28"/>
           <p:cNvSpPr/>
           <p:nvPr/>
         </p:nvSpPr>
         <p:spPr>
           <a:xfrm>
-            <a:off x="6922008" y="5394960"/>
-            <a:ext cx="1554480" cy="822960"/>
-          </a:xfrm>
-          <a:prstGeom prst="diamond">
+            <a:off x="5513832" y="4215384"/>
+            <a:ext cx="310896" cy="310896"/>
+          </a:xfrm>
+          <a:prstGeom prst="ellipse">
             <a:avLst/>
           </a:prstGeom>
           <a:solidFill>
@@ -8811,7 +9205,7 @@
           </a:fontRef>
         </p:style>
         <p:txBody>
-          <a:bodyPr rtlCol="0" anchor="ctr" wrap="square" lIns="18288" rIns="18288" tIns="54864" bIns="54864"/>
+          <a:bodyPr rtlCol="0" anchor="ctr" wrap="square" lIns="0" rIns="0" tIns="54864" bIns="54864"/>
           <a:lstStyle/>
           <a:p>
             <a:pPr algn="ctr">
@@ -8820,6 +9214,62 @@
               </a:spcAft>
             </a:pPr>
             <a:r>
+              <a:rPr sz="1000" b="1">
+                <a:solidFill>
+                  <a:srgbClr val="0B3D7A"/>
+                </a:solidFill>
+              </a:rPr>
+              <a:t>7</a:t>
+            </a:r>
+          </a:p>
+        </p:txBody>
+      </p:sp>
+      <p:sp>
+        <p:nvSpPr>
+          <p:cNvPr id="30" name="Diamond 29"/>
+          <p:cNvSpPr/>
+          <p:nvPr/>
+        </p:nvSpPr>
+        <p:spPr>
+          <a:xfrm>
+            <a:off x="6922008" y="5394960"/>
+            <a:ext cx="1554480" cy="822960"/>
+          </a:xfrm>
+          <a:prstGeom prst="diamond">
+            <a:avLst/>
+          </a:prstGeom>
+          <a:solidFill>
+            <a:srgbClr val="FFA418"/>
+          </a:solidFill>
+          <a:ln>
+            <a:noFill/>
+          </a:ln>
+          <a:effectLst/>
+        </p:spPr>
+        <p:style>
+          <a:lnRef idx="1">
+            <a:schemeClr val="accent1"/>
+          </a:lnRef>
+          <a:fillRef idx="3">
+            <a:schemeClr val="accent1"/>
+          </a:fillRef>
+          <a:effectRef idx="2">
+            <a:schemeClr val="accent1"/>
+          </a:effectRef>
+          <a:fontRef idx="minor">
+            <a:schemeClr val="lt1"/>
+          </a:fontRef>
+        </p:style>
+        <p:txBody>
+          <a:bodyPr rtlCol="0" anchor="ctr" wrap="square" lIns="18288" rIns="18288" tIns="54864" bIns="54864"/>
+          <a:lstStyle/>
+          <a:p>
+            <a:pPr algn="ctr">
+              <a:spcAft>
+                <a:spcPts val="600"/>
+              </a:spcAft>
+            </a:pPr>
+            <a:r>
               <a:rPr sz="1100" b="1">
                 <a:solidFill>
                   <a:srgbClr val="0B3D7A"/>
@@ -8832,18 +9282,74 @@
       </p:sp>
       <p:sp>
         <p:nvSpPr>
-          <p:cNvPr id="23" name="Rounded Rectangle 22"/>
+          <p:cNvPr id="31" name="Oval 30"/>
           <p:cNvSpPr/>
           <p:nvPr/>
         </p:nvSpPr>
         <p:spPr>
           <a:xfrm>
-            <a:off x="5641848" y="6400800"/>
-            <a:ext cx="4114800" cy="777240"/>
+            <a:off x="6793992" y="5266944"/>
+            <a:ext cx="310896" cy="310896"/>
+          </a:xfrm>
+          <a:prstGeom prst="ellipse">
+            <a:avLst/>
+          </a:prstGeom>
+          <a:solidFill>
+            <a:srgbClr val="FFA418"/>
+          </a:solidFill>
+          <a:ln>
+            <a:noFill/>
+          </a:ln>
+          <a:effectLst/>
+        </p:spPr>
+        <p:style>
+          <a:lnRef idx="1">
+            <a:schemeClr val="accent1"/>
+          </a:lnRef>
+          <a:fillRef idx="3">
+            <a:schemeClr val="accent1"/>
+          </a:fillRef>
+          <a:effectRef idx="2">
+            <a:schemeClr val="accent1"/>
+          </a:effectRef>
+          <a:fontRef idx="minor">
+            <a:schemeClr val="lt1"/>
+          </a:fontRef>
+        </p:style>
+        <p:txBody>
+          <a:bodyPr rtlCol="0" anchor="ctr" wrap="square" lIns="0" rIns="0" tIns="54864" bIns="54864"/>
+          <a:lstStyle/>
+          <a:p>
+            <a:pPr algn="ctr">
+              <a:spcAft>
+                <a:spcPts val="600"/>
+              </a:spcAft>
+            </a:pPr>
+            <a:r>
+              <a:rPr sz="1000" b="1">
+                <a:solidFill>
+                  <a:srgbClr val="0B3D7A"/>
+                </a:solidFill>
+              </a:rPr>
+              <a:t>8</a:t>
+            </a:r>
+          </a:p>
+        </p:txBody>
+      </p:sp>
+      <p:sp>
+        <p:nvSpPr>
+          <p:cNvPr id="32" name="Rounded Rectangle 31"/>
+          <p:cNvSpPr/>
+          <p:nvPr/>
+        </p:nvSpPr>
+        <p:spPr>
+          <a:xfrm>
+            <a:off x="8549640" y="5600700"/>
+            <a:ext cx="1188720" cy="411480"/>
           </a:xfrm>
           <a:prstGeom prst="roundRect">
             <a:avLst>
-              <a:gd name="adj" fmla="val 10000"/>
+              <a:gd name="adj" fmla="val 20000"/>
             </a:avLst>
           </a:prstGeom>
           <a:solidFill>
@@ -8869,7 +9375,7 @@
           </a:fontRef>
         </p:style>
         <p:txBody>
-          <a:bodyPr rtlCol="0" anchor="ctr" wrap="square" lIns="109728" rIns="109728" tIns="54864" bIns="54864"/>
+          <a:bodyPr rtlCol="0" anchor="ctr" wrap="square" lIns="36576" rIns="36576" tIns="54864" bIns="54864"/>
           <a:lstStyle/>
           <a:p>
             <a:pPr algn="ctr">
@@ -8878,14 +9384,57 @@
               </a:spcAft>
             </a:pPr>
             <a:r>
-              <a:rPr sz="1400" b="1">
+              <a:rPr sz="900" b="1">
                 <a:solidFill>
                   <a:srgbClr val="0B3D7A"/>
                 </a:solidFill>
               </a:rPr>
-              <a:t>Proven offering</a:t>
-            </a:r>
-          </a:p>
+              <a:t>no: stop</a:t>
+            </a:r>
+          </a:p>
+        </p:txBody>
+      </p:sp>
+      <p:sp>
+        <p:nvSpPr>
+          <p:cNvPr id="33" name="Rounded Rectangle 32"/>
+          <p:cNvSpPr/>
+          <p:nvPr/>
+        </p:nvSpPr>
+        <p:spPr>
+          <a:xfrm>
+            <a:off x="5641848" y="6400800"/>
+            <a:ext cx="4114800" cy="777240"/>
+          </a:xfrm>
+          <a:prstGeom prst="roundRect">
+            <a:avLst>
+              <a:gd name="adj" fmla="val 10000"/>
+            </a:avLst>
+          </a:prstGeom>
+          <a:solidFill>
+            <a:srgbClr val="F5EFE9"/>
+          </a:solidFill>
+          <a:ln>
+            <a:noFill/>
+          </a:ln>
+          <a:effectLst/>
+        </p:spPr>
+        <p:style>
+          <a:lnRef idx="1">
+            <a:schemeClr val="accent1"/>
+          </a:lnRef>
+          <a:fillRef idx="3">
+            <a:schemeClr val="accent1"/>
+          </a:fillRef>
+          <a:effectRef idx="2">
+            <a:schemeClr val="accent1"/>
+          </a:effectRef>
+          <a:fontRef idx="minor">
+            <a:schemeClr val="lt1"/>
+          </a:fontRef>
+        </p:style>
+        <p:txBody>
+          <a:bodyPr rtlCol="0" anchor="ctr" wrap="square" lIns="109728" rIns="109728" tIns="54864" bIns="54864"/>
+          <a:lstStyle/>
           <a:p>
             <a:pPr algn="ctr">
               <a:spcAft>
@@ -8893,6 +9442,21 @@
               </a:spcAft>
             </a:pPr>
             <a:r>
+              <a:rPr sz="1400" b="1">
+                <a:solidFill>
+                  <a:srgbClr val="0B3D7A"/>
+                </a:solidFill>
+              </a:rPr>
+              <a:t>Proven offering</a:t>
+            </a:r>
+          </a:p>
+          <a:p>
+            <a:pPr algn="ctr">
+              <a:spcAft>
+                <a:spcPts val="600"/>
+              </a:spcAft>
+            </a:pPr>
+            <a:r>
               <a:rPr sz="1100" b="0">
                 <a:solidFill>
                   <a:srgbClr val="4C5D69"/>
@@ -8905,13 +9469,127 @@
       </p:sp>
       <p:sp>
         <p:nvSpPr>
-          <p:cNvPr id="24" name="Rounded Rectangle 23"/>
+          <p:cNvPr id="34" name="Oval 33"/>
           <p:cNvSpPr/>
           <p:nvPr/>
         </p:nvSpPr>
         <p:spPr>
           <a:xfrm>
+            <a:off x="5513832" y="6272784"/>
+            <a:ext cx="310896" cy="310896"/>
+          </a:xfrm>
+          <a:prstGeom prst="ellipse">
+            <a:avLst/>
+          </a:prstGeom>
+          <a:solidFill>
+            <a:srgbClr val="FFA418"/>
+          </a:solidFill>
+          <a:ln>
+            <a:noFill/>
+          </a:ln>
+          <a:effectLst/>
+        </p:spPr>
+        <p:style>
+          <a:lnRef idx="1">
+            <a:schemeClr val="accent1"/>
+          </a:lnRef>
+          <a:fillRef idx="3">
+            <a:schemeClr val="accent1"/>
+          </a:fillRef>
+          <a:effectRef idx="2">
+            <a:schemeClr val="accent1"/>
+          </a:effectRef>
+          <a:fontRef idx="minor">
+            <a:schemeClr val="lt1"/>
+          </a:fontRef>
+        </p:style>
+        <p:txBody>
+          <a:bodyPr rtlCol="0" anchor="ctr" wrap="square" lIns="0" rIns="0" tIns="54864" bIns="54864"/>
+          <a:lstStyle/>
+          <a:p>
+            <a:pPr algn="ctr">
+              <a:spcAft>
+                <a:spcPts val="600"/>
+              </a:spcAft>
+            </a:pPr>
+            <a:r>
+              <a:rPr sz="1000" b="1">
+                <a:solidFill>
+                  <a:srgbClr val="0B3D7A"/>
+                </a:solidFill>
+              </a:rPr>
+              <a:t>9</a:t>
+            </a:r>
+          </a:p>
+        </p:txBody>
+      </p:sp>
+      <p:sp>
+        <p:nvSpPr>
+          <p:cNvPr id="35" name="Rounded Rectangle 34"/>
+          <p:cNvSpPr/>
+          <p:nvPr/>
+        </p:nvSpPr>
+        <p:spPr>
+          <a:xfrm>
             <a:off x="10378440" y="2514600"/>
+            <a:ext cx="4114800" cy="457200"/>
+          </a:xfrm>
+          <a:prstGeom prst="roundRect">
+            <a:avLst>
+              <a:gd name="adj" fmla="val 50000"/>
+            </a:avLst>
+          </a:prstGeom>
+          <a:solidFill>
+            <a:srgbClr val="FFA418"/>
+          </a:solidFill>
+          <a:ln>
+            <a:noFill/>
+          </a:ln>
+          <a:effectLst/>
+        </p:spPr>
+        <p:style>
+          <a:lnRef idx="1">
+            <a:schemeClr val="accent1"/>
+          </a:lnRef>
+          <a:fillRef idx="3">
+            <a:schemeClr val="accent1"/>
+          </a:fillRef>
+          <a:effectRef idx="2">
+            <a:schemeClr val="accent1"/>
+          </a:effectRef>
+          <a:fontRef idx="minor">
+            <a:schemeClr val="lt1"/>
+          </a:fontRef>
+        </p:style>
+        <p:txBody>
+          <a:bodyPr rtlCol="0" anchor="ctr" wrap="square" lIns="73152" rIns="73152" tIns="54864" bIns="54864"/>
+          <a:lstStyle/>
+          <a:p>
+            <a:pPr algn="ctr">
+              <a:spcAft>
+                <a:spcPts val="600"/>
+              </a:spcAft>
+            </a:pPr>
+            <a:r>
+              <a:rPr sz="1100" b="1">
+                <a:solidFill>
+                  <a:srgbClr val="0B3D7A"/>
+                </a:solidFill>
+              </a:rPr>
+              <a:t>datasource: the client's own export, carried byte for byte</a:t>
+            </a:r>
+          </a:p>
+        </p:txBody>
+      </p:sp>
+      <p:sp>
+        <p:nvSpPr>
+          <p:cNvPr id="36" name="Rounded Rectangle 35"/>
+          <p:cNvSpPr/>
+          <p:nvPr/>
+        </p:nvSpPr>
+        <p:spPr>
+          <a:xfrm>
+            <a:off x="10378440" y="3108960"/>
             <a:ext cx="4114800" cy="731520"/>
           </a:xfrm>
           <a:prstGeom prst="roundRect">
@@ -8978,13 +9656,69 @@
       </p:sp>
       <p:sp>
         <p:nvSpPr>
-          <p:cNvPr id="25" name="Rounded Rectangle 24"/>
+          <p:cNvPr id="37" name="Oval 36"/>
           <p:cNvSpPr/>
           <p:nvPr/>
         </p:nvSpPr>
         <p:spPr>
           <a:xfrm>
-            <a:off x="10378440" y="3383280"/>
+            <a:off x="10250424" y="2980944"/>
+            <a:ext cx="310896" cy="310896"/>
+          </a:xfrm>
+          <a:prstGeom prst="ellipse">
+            <a:avLst/>
+          </a:prstGeom>
+          <a:solidFill>
+            <a:srgbClr val="FFA418"/>
+          </a:solidFill>
+          <a:ln>
+            <a:noFill/>
+          </a:ln>
+          <a:effectLst/>
+        </p:spPr>
+        <p:style>
+          <a:lnRef idx="1">
+            <a:schemeClr val="accent1"/>
+          </a:lnRef>
+          <a:fillRef idx="3">
+            <a:schemeClr val="accent1"/>
+          </a:fillRef>
+          <a:effectRef idx="2">
+            <a:schemeClr val="accent1"/>
+          </a:effectRef>
+          <a:fontRef idx="minor">
+            <a:schemeClr val="lt1"/>
+          </a:fontRef>
+        </p:style>
+        <p:txBody>
+          <a:bodyPr rtlCol="0" anchor="ctr" wrap="square" lIns="0" rIns="0" tIns="54864" bIns="54864"/>
+          <a:lstStyle/>
+          <a:p>
+            <a:pPr algn="ctr">
+              <a:spcAft>
+                <a:spcPts val="600"/>
+              </a:spcAft>
+            </a:pPr>
+            <a:r>
+              <a:rPr sz="1000" b="1">
+                <a:solidFill>
+                  <a:srgbClr val="0B3D7A"/>
+                </a:solidFill>
+              </a:rPr>
+              <a:t>10</a:t>
+            </a:r>
+          </a:p>
+        </p:txBody>
+      </p:sp>
+      <p:sp>
+        <p:nvSpPr>
+          <p:cNvPr id="38" name="Rounded Rectangle 37"/>
+          <p:cNvSpPr/>
+          <p:nvPr/>
+        </p:nvSpPr>
+        <p:spPr>
+          <a:xfrm>
+            <a:off x="10378440" y="3977639"/>
             <a:ext cx="4114800" cy="1097280"/>
           </a:xfrm>
           <a:prstGeom prst="roundRect">
@@ -9044,23 +9778,23 @@
                   <a:srgbClr val="4C5D69"/>
                 </a:solidFill>
               </a:rPr>
-              <a:t>the client's own datasource export carried byte for byte; org path, folder, alias and tenant root rewritten</a:t>
-            </a:r>
-          </a:p>
-        </p:txBody>
-      </p:sp>
-      <p:sp>
-        <p:nvSpPr>
-          <p:cNvPr id="26" name="Diamond 25"/>
+              <a:t>the client's datasource carried; org path, folder, alias and tenant root rewritten by tested replacements</a:t>
+            </a:r>
+          </a:p>
+        </p:txBody>
+      </p:sp>
+      <p:sp>
+        <p:nvSpPr>
+          <p:cNvPr id="39" name="Oval 38"/>
           <p:cNvSpPr/>
           <p:nvPr/>
         </p:nvSpPr>
         <p:spPr>
           <a:xfrm>
-            <a:off x="11247119" y="4617720"/>
-            <a:ext cx="2377440" cy="960120"/>
-          </a:xfrm>
-          <a:prstGeom prst="diamond">
+            <a:off x="10250424" y="3849624"/>
+            <a:ext cx="310896" cy="310896"/>
+          </a:xfrm>
+          <a:prstGeom prst="ellipse">
             <a:avLst/>
           </a:prstGeom>
           <a:solidFill>
@@ -9086,7 +9820,7 @@
           </a:fontRef>
         </p:style>
         <p:txBody>
-          <a:bodyPr rtlCol="0" anchor="ctr" wrap="square" lIns="18288" rIns="18288" tIns="54864" bIns="54864"/>
+          <a:bodyPr rtlCol="0" anchor="ctr" wrap="square" lIns="0" rIns="0" tIns="54864" bIns="54864"/>
           <a:lstStyle/>
           <a:p>
             <a:pPr algn="ctr">
@@ -9100,6 +9834,62 @@
                   <a:srgbClr val="0B3D7A"/>
                 </a:solidFill>
               </a:rPr>
+              <a:t>11</a:t>
+            </a:r>
+          </a:p>
+        </p:txBody>
+      </p:sp>
+      <p:sp>
+        <p:nvSpPr>
+          <p:cNvPr id="40" name="Diamond 39"/>
+          <p:cNvSpPr/>
+          <p:nvPr/>
+        </p:nvSpPr>
+        <p:spPr>
+          <a:xfrm>
+            <a:off x="11247119" y="5212080"/>
+            <a:ext cx="2377440" cy="960120"/>
+          </a:xfrm>
+          <a:prstGeom prst="diamond">
+            <a:avLst/>
+          </a:prstGeom>
+          <a:solidFill>
+            <a:srgbClr val="FFA418"/>
+          </a:solidFill>
+          <a:ln>
+            <a:noFill/>
+          </a:ln>
+          <a:effectLst/>
+        </p:spPr>
+        <p:style>
+          <a:lnRef idx="1">
+            <a:schemeClr val="accent1"/>
+          </a:lnRef>
+          <a:fillRef idx="3">
+            <a:schemeClr val="accent1"/>
+          </a:fillRef>
+          <a:effectRef idx="2">
+            <a:schemeClr val="accent1"/>
+          </a:effectRef>
+          <a:fontRef idx="minor">
+            <a:schemeClr val="lt1"/>
+          </a:fontRef>
+        </p:style>
+        <p:txBody>
+          <a:bodyPr rtlCol="0" anchor="ctr" wrap="square" lIns="18288" rIns="18288" tIns="54864" bIns="54864"/>
+          <a:lstStyle/>
+          <a:p>
+            <a:pPr algn="ctr">
+              <a:spcAft>
+                <a:spcPts val="600"/>
+              </a:spcAft>
+            </a:pPr>
+            <a:r>
+              <a:rPr sz="1000" b="1">
+                <a:solidFill>
+                  <a:srgbClr val="0B3D7A"/>
+                </a:solidFill>
+              </a:rPr>
               <a:t>verified? no source strings, references exist, fields resolve</a:t>
             </a:r>
           </a:p>
@@ -9107,18 +9897,74 @@
       </p:sp>
       <p:sp>
         <p:nvSpPr>
-          <p:cNvPr id="27" name="Rounded Rectangle 26"/>
+          <p:cNvPr id="41" name="Oval 40"/>
           <p:cNvSpPr/>
           <p:nvPr/>
         </p:nvSpPr>
         <p:spPr>
           <a:xfrm>
-            <a:off x="10378440" y="5715000"/>
-            <a:ext cx="4114800" cy="731520"/>
+            <a:off x="11119103" y="5084064"/>
+            <a:ext cx="310896" cy="310896"/>
+          </a:xfrm>
+          <a:prstGeom prst="ellipse">
+            <a:avLst/>
+          </a:prstGeom>
+          <a:solidFill>
+            <a:srgbClr val="FFA418"/>
+          </a:solidFill>
+          <a:ln>
+            <a:noFill/>
+          </a:ln>
+          <a:effectLst/>
+        </p:spPr>
+        <p:style>
+          <a:lnRef idx="1">
+            <a:schemeClr val="accent1"/>
+          </a:lnRef>
+          <a:fillRef idx="3">
+            <a:schemeClr val="accent1"/>
+          </a:fillRef>
+          <a:effectRef idx="2">
+            <a:schemeClr val="accent1"/>
+          </a:effectRef>
+          <a:fontRef idx="minor">
+            <a:schemeClr val="lt1"/>
+          </a:fontRef>
+        </p:style>
+        <p:txBody>
+          <a:bodyPr rtlCol="0" anchor="ctr" wrap="square" lIns="0" rIns="0" tIns="54864" bIns="54864"/>
+          <a:lstStyle/>
+          <a:p>
+            <a:pPr algn="ctr">
+              <a:spcAft>
+                <a:spcPts val="600"/>
+              </a:spcAft>
+            </a:pPr>
+            <a:r>
+              <a:rPr sz="1000" b="1">
+                <a:solidFill>
+                  <a:srgbClr val="0B3D7A"/>
+                </a:solidFill>
+              </a:rPr>
+              <a:t>12</a:t>
+            </a:r>
+          </a:p>
+        </p:txBody>
+      </p:sp>
+      <p:sp>
+        <p:nvSpPr>
+          <p:cNvPr id="42" name="Rounded Rectangle 41"/>
+          <p:cNvSpPr/>
+          <p:nvPr/>
+        </p:nvSpPr>
+        <p:spPr>
+          <a:xfrm>
+            <a:off x="13697711" y="5486400"/>
+            <a:ext cx="777240" cy="411480"/>
           </a:xfrm>
           <a:prstGeom prst="roundRect">
             <a:avLst>
-              <a:gd name="adj" fmla="val 10000"/>
+              <a:gd name="adj" fmla="val 20000"/>
             </a:avLst>
           </a:prstGeom>
           <a:solidFill>
@@ -9144,6 +9990,64 @@
           </a:fontRef>
         </p:style>
         <p:txBody>
+          <a:bodyPr rtlCol="0" anchor="ctr" wrap="square" lIns="36576" rIns="36576" tIns="54864" bIns="54864"/>
+          <a:lstStyle/>
+          <a:p>
+            <a:pPr algn="ctr">
+              <a:spcAft>
+                <a:spcPts val="600"/>
+              </a:spcAft>
+            </a:pPr>
+            <a:r>
+              <a:rPr sz="900" b="1">
+                <a:solidFill>
+                  <a:srgbClr val="0B3D7A"/>
+                </a:solidFill>
+              </a:rPr>
+              <a:t>no: stop</a:t>
+            </a:r>
+          </a:p>
+        </p:txBody>
+      </p:sp>
+      <p:sp>
+        <p:nvSpPr>
+          <p:cNvPr id="43" name="Rounded Rectangle 42"/>
+          <p:cNvSpPr/>
+          <p:nvPr/>
+        </p:nvSpPr>
+        <p:spPr>
+          <a:xfrm>
+            <a:off x="10378440" y="6309360"/>
+            <a:ext cx="4114800" cy="731520"/>
+          </a:xfrm>
+          <a:prstGeom prst="roundRect">
+            <a:avLst>
+              <a:gd name="adj" fmla="val 10000"/>
+            </a:avLst>
+          </a:prstGeom>
+          <a:solidFill>
+            <a:srgbClr val="F5EFE9"/>
+          </a:solidFill>
+          <a:ln>
+            <a:noFill/>
+          </a:ln>
+          <a:effectLst/>
+        </p:spPr>
+        <p:style>
+          <a:lnRef idx="1">
+            <a:schemeClr val="accent1"/>
+          </a:lnRef>
+          <a:fillRef idx="3">
+            <a:schemeClr val="accent1"/>
+          </a:fillRef>
+          <a:effectRef idx="2">
+            <a:schemeClr val="accent1"/>
+          </a:effectRef>
+          <a:fontRef idx="minor">
+            <a:schemeClr val="lt1"/>
+          </a:fontRef>
+        </p:style>
+        <p:txBody>
           <a:bodyPr rtlCol="0" anchor="ctr" wrap="square" lIns="109728" rIns="109728" tIns="54864" bIns="54864"/>
           <a:lstStyle/>
           <a:p>
@@ -9180,13 +10084,69 @@
       </p:sp>
       <p:sp>
         <p:nvSpPr>
-          <p:cNvPr id="28" name="Rounded Rectangle 27"/>
+          <p:cNvPr id="44" name="Oval 43"/>
           <p:cNvSpPr/>
           <p:nvPr/>
         </p:nvSpPr>
         <p:spPr>
           <a:xfrm>
-            <a:off x="10378440" y="6583680"/>
+            <a:off x="10250424" y="6181344"/>
+            <a:ext cx="310896" cy="310896"/>
+          </a:xfrm>
+          <a:prstGeom prst="ellipse">
+            <a:avLst/>
+          </a:prstGeom>
+          <a:solidFill>
+            <a:srgbClr val="FFA418"/>
+          </a:solidFill>
+          <a:ln>
+            <a:noFill/>
+          </a:ln>
+          <a:effectLst/>
+        </p:spPr>
+        <p:style>
+          <a:lnRef idx="1">
+            <a:schemeClr val="accent1"/>
+          </a:lnRef>
+          <a:fillRef idx="3">
+            <a:schemeClr val="accent1"/>
+          </a:fillRef>
+          <a:effectRef idx="2">
+            <a:schemeClr val="accent1"/>
+          </a:effectRef>
+          <a:fontRef idx="minor">
+            <a:schemeClr val="lt1"/>
+          </a:fontRef>
+        </p:style>
+        <p:txBody>
+          <a:bodyPr rtlCol="0" anchor="ctr" wrap="square" lIns="0" rIns="0" tIns="54864" bIns="54864"/>
+          <a:lstStyle/>
+          <a:p>
+            <a:pPr algn="ctr">
+              <a:spcAft>
+                <a:spcPts val="600"/>
+              </a:spcAft>
+            </a:pPr>
+            <a:r>
+              <a:rPr sz="1000" b="1">
+                <a:solidFill>
+                  <a:srgbClr val="0B3D7A"/>
+                </a:solidFill>
+              </a:rPr>
+              <a:t>13</a:t>
+            </a:r>
+          </a:p>
+        </p:txBody>
+      </p:sp>
+      <p:sp>
+        <p:nvSpPr>
+          <p:cNvPr id="45" name="Rounded Rectangle 44"/>
+          <p:cNvSpPr/>
+          <p:nvPr/>
+        </p:nvSpPr>
+        <p:spPr>
+          <a:xfrm>
+            <a:off x="10378440" y="7178040"/>
             <a:ext cx="4114800" cy="914400"/>
           </a:xfrm>
           <a:prstGeom prst="roundRect">
@@ -9253,19 +10213,17 @@
       </p:sp>
       <p:sp>
         <p:nvSpPr>
-          <p:cNvPr id="29" name="Rounded Rectangle 28"/>
+          <p:cNvPr id="46" name="Oval 45"/>
           <p:cNvSpPr/>
           <p:nvPr/>
         </p:nvSpPr>
         <p:spPr>
           <a:xfrm>
-            <a:off x="15115032" y="2514600"/>
-            <a:ext cx="4114800" cy="457200"/>
-          </a:xfrm>
-          <a:prstGeom prst="roundRect">
-            <a:avLst>
-              <a:gd name="adj" fmla="val 50000"/>
-            </a:avLst>
+            <a:off x="10250424" y="7050024"/>
+            <a:ext cx="310896" cy="310896"/>
+          </a:xfrm>
+          <a:prstGeom prst="ellipse">
+            <a:avLst/>
           </a:prstGeom>
           <a:solidFill>
             <a:srgbClr val="FFA418"/>
@@ -9290,7 +10248,7 @@
           </a:fontRef>
         </p:style>
         <p:txBody>
-          <a:bodyPr rtlCol="0" anchor="ctr" wrap="square" lIns="73152" rIns="73152" tIns="54864" bIns="54864"/>
+          <a:bodyPr rtlCol="0" anchor="ctr" wrap="square" lIns="0" rIns="0" tIns="54864" bIns="54864"/>
           <a:lstStyle/>
           <a:p>
             <a:pPr algn="ctr">
@@ -9299,6 +10257,64 @@
               </a:spcAft>
             </a:pPr>
             <a:r>
+              <a:rPr sz="1000" b="1">
+                <a:solidFill>
+                  <a:srgbClr val="0B3D7A"/>
+                </a:solidFill>
+              </a:rPr>
+              <a:t>14</a:t>
+            </a:r>
+          </a:p>
+        </p:txBody>
+      </p:sp>
+      <p:sp>
+        <p:nvSpPr>
+          <p:cNvPr id="47" name="Rounded Rectangle 46"/>
+          <p:cNvSpPr/>
+          <p:nvPr/>
+        </p:nvSpPr>
+        <p:spPr>
+          <a:xfrm>
+            <a:off x="15115032" y="2514600"/>
+            <a:ext cx="4114800" cy="457200"/>
+          </a:xfrm>
+          <a:prstGeom prst="roundRect">
+            <a:avLst>
+              <a:gd name="adj" fmla="val 50000"/>
+            </a:avLst>
+          </a:prstGeom>
+          <a:solidFill>
+            <a:srgbClr val="FFA418"/>
+          </a:solidFill>
+          <a:ln>
+            <a:noFill/>
+          </a:ln>
+          <a:effectLst/>
+        </p:spPr>
+        <p:style>
+          <a:lnRef idx="1">
+            <a:schemeClr val="accent1"/>
+          </a:lnRef>
+          <a:fillRef idx="3">
+            <a:schemeClr val="accent1"/>
+          </a:fillRef>
+          <a:effectRef idx="2">
+            <a:schemeClr val="accent1"/>
+          </a:effectRef>
+          <a:fontRef idx="minor">
+            <a:schemeClr val="lt1"/>
+          </a:fontRef>
+        </p:style>
+        <p:txBody>
+          <a:bodyPr rtlCol="0" anchor="ctr" wrap="square" lIns="73152" rIns="73152" tIns="54864" bIns="54864"/>
+          <a:lstStyle/>
+          <a:p>
+            <a:pPr algn="ctr">
+              <a:spcAft>
+                <a:spcPts val="600"/>
+              </a:spcAft>
+            </a:pPr>
+            <a:r>
               <a:rPr sz="1200" b="1">
                 <a:solidFill>
                   <a:srgbClr val="0B3D7A"/>
@@ -9311,7 +10327,7 @@
       </p:sp>
       <p:sp>
         <p:nvSpPr>
-          <p:cNvPr id="30" name="Rounded Rectangle 29"/>
+          <p:cNvPr id="48" name="Rounded Rectangle 47"/>
           <p:cNvSpPr/>
           <p:nvPr/>
         </p:nvSpPr>
@@ -9384,7 +10400,63 @@
       </p:sp>
       <p:sp>
         <p:nvSpPr>
-          <p:cNvPr id="31" name="Rounded Rectangle 30"/>
+          <p:cNvPr id="49" name="Oval 48"/>
+          <p:cNvSpPr/>
+          <p:nvPr/>
+        </p:nvSpPr>
+        <p:spPr>
+          <a:xfrm>
+            <a:off x="14987016" y="2980944"/>
+            <a:ext cx="310896" cy="310896"/>
+          </a:xfrm>
+          <a:prstGeom prst="ellipse">
+            <a:avLst/>
+          </a:prstGeom>
+          <a:solidFill>
+            <a:srgbClr val="FFA418"/>
+          </a:solidFill>
+          <a:ln>
+            <a:noFill/>
+          </a:ln>
+          <a:effectLst/>
+        </p:spPr>
+        <p:style>
+          <a:lnRef idx="1">
+            <a:schemeClr val="accent1"/>
+          </a:lnRef>
+          <a:fillRef idx="3">
+            <a:schemeClr val="accent1"/>
+          </a:fillRef>
+          <a:effectRef idx="2">
+            <a:schemeClr val="accent1"/>
+          </a:effectRef>
+          <a:fontRef idx="minor">
+            <a:schemeClr val="lt1"/>
+          </a:fontRef>
+        </p:style>
+        <p:txBody>
+          <a:bodyPr rtlCol="0" anchor="ctr" wrap="square" lIns="0" rIns="0" tIns="54864" bIns="54864"/>
+          <a:lstStyle/>
+          <a:p>
+            <a:pPr algn="ctr">
+              <a:spcAft>
+                <a:spcPts val="600"/>
+              </a:spcAft>
+            </a:pPr>
+            <a:r>
+              <a:rPr sz="1000" b="1">
+                <a:solidFill>
+                  <a:srgbClr val="0B3D7A"/>
+                </a:solidFill>
+              </a:rPr>
+              <a:t>15</a:t>
+            </a:r>
+          </a:p>
+        </p:txBody>
+      </p:sp>
+      <p:sp>
+        <p:nvSpPr>
+          <p:cNvPr id="50" name="Rounded Rectangle 49"/>
           <p:cNvSpPr/>
           <p:nvPr/>
         </p:nvSpPr>
@@ -9457,16 +10529,16 @@
       </p:sp>
       <p:sp>
         <p:nvSpPr>
-          <p:cNvPr id="32" name="Diamond 31"/>
+          <p:cNvPr id="51" name="Oval 50"/>
           <p:cNvSpPr/>
           <p:nvPr/>
         </p:nvSpPr>
         <p:spPr>
           <a:xfrm>
-            <a:off x="16395192" y="5074920"/>
-            <a:ext cx="1554480" cy="822960"/>
-          </a:xfrm>
-          <a:prstGeom prst="diamond">
+            <a:off x="14987016" y="3803904"/>
+            <a:ext cx="310896" cy="310896"/>
+          </a:xfrm>
+          <a:prstGeom prst="ellipse">
             <a:avLst/>
           </a:prstGeom>
           <a:solidFill>
@@ -9492,7 +10564,7 @@
           </a:fontRef>
         </p:style>
         <p:txBody>
-          <a:bodyPr rtlCol="0" anchor="ctr" wrap="square" lIns="18288" rIns="18288" tIns="54864" bIns="54864"/>
+          <a:bodyPr rtlCol="0" anchor="ctr" wrap="square" lIns="0" rIns="0" tIns="54864" bIns="54864"/>
           <a:lstStyle/>
           <a:p>
             <a:pPr algn="ctr">
@@ -9501,6 +10573,62 @@
               </a:spcAft>
             </a:pPr>
             <a:r>
+              <a:rPr sz="1000" b="1">
+                <a:solidFill>
+                  <a:srgbClr val="0B3D7A"/>
+                </a:solidFill>
+              </a:rPr>
+              <a:t>16</a:t>
+            </a:r>
+          </a:p>
+        </p:txBody>
+      </p:sp>
+      <p:sp>
+        <p:nvSpPr>
+          <p:cNvPr id="52" name="Diamond 51"/>
+          <p:cNvSpPr/>
+          <p:nvPr/>
+        </p:nvSpPr>
+        <p:spPr>
+          <a:xfrm>
+            <a:off x="16395192" y="5074920"/>
+            <a:ext cx="1554480" cy="822960"/>
+          </a:xfrm>
+          <a:prstGeom prst="diamond">
+            <a:avLst/>
+          </a:prstGeom>
+          <a:solidFill>
+            <a:srgbClr val="FFA418"/>
+          </a:solidFill>
+          <a:ln>
+            <a:noFill/>
+          </a:ln>
+          <a:effectLst/>
+        </p:spPr>
+        <p:style>
+          <a:lnRef idx="1">
+            <a:schemeClr val="accent1"/>
+          </a:lnRef>
+          <a:fillRef idx="3">
+            <a:schemeClr val="accent1"/>
+          </a:fillRef>
+          <a:effectRef idx="2">
+            <a:schemeClr val="accent1"/>
+          </a:effectRef>
+          <a:fontRef idx="minor">
+            <a:schemeClr val="lt1"/>
+          </a:fontRef>
+        </p:style>
+        <p:txBody>
+          <a:bodyPr rtlCol="0" anchor="ctr" wrap="square" lIns="18288" rIns="18288" tIns="54864" bIns="54864"/>
+          <a:lstStyle/>
+          <a:p>
+            <a:pPr algn="ctr">
+              <a:spcAft>
+                <a:spcPts val="600"/>
+              </a:spcAft>
+            </a:pPr>
+            <a:r>
               <a:rPr sz="1100" b="1">
                 <a:solidFill>
                   <a:srgbClr val="0B3D7A"/>
@@ -9513,18 +10641,74 @@
       </p:sp>
       <p:sp>
         <p:nvSpPr>
-          <p:cNvPr id="33" name="Rounded Rectangle 32"/>
+          <p:cNvPr id="53" name="Oval 52"/>
           <p:cNvSpPr/>
           <p:nvPr/>
         </p:nvSpPr>
         <p:spPr>
           <a:xfrm>
-            <a:off x="15115032" y="6035040"/>
-            <a:ext cx="4114800" cy="685800"/>
+            <a:off x="16267176" y="4946904"/>
+            <a:ext cx="310896" cy="310896"/>
+          </a:xfrm>
+          <a:prstGeom prst="ellipse">
+            <a:avLst/>
+          </a:prstGeom>
+          <a:solidFill>
+            <a:srgbClr val="FFA418"/>
+          </a:solidFill>
+          <a:ln>
+            <a:noFill/>
+          </a:ln>
+          <a:effectLst/>
+        </p:spPr>
+        <p:style>
+          <a:lnRef idx="1">
+            <a:schemeClr val="accent1"/>
+          </a:lnRef>
+          <a:fillRef idx="3">
+            <a:schemeClr val="accent1"/>
+          </a:fillRef>
+          <a:effectRef idx="2">
+            <a:schemeClr val="accent1"/>
+          </a:effectRef>
+          <a:fontRef idx="minor">
+            <a:schemeClr val="lt1"/>
+          </a:fontRef>
+        </p:style>
+        <p:txBody>
+          <a:bodyPr rtlCol="0" anchor="ctr" wrap="square" lIns="0" rIns="0" tIns="54864" bIns="54864"/>
+          <a:lstStyle/>
+          <a:p>
+            <a:pPr algn="ctr">
+              <a:spcAft>
+                <a:spcPts val="600"/>
+              </a:spcAft>
+            </a:pPr>
+            <a:r>
+              <a:rPr sz="1000" b="1">
+                <a:solidFill>
+                  <a:srgbClr val="0B3D7A"/>
+                </a:solidFill>
+              </a:rPr>
+              <a:t>17</a:t>
+            </a:r>
+          </a:p>
+        </p:txBody>
+      </p:sp>
+      <p:sp>
+        <p:nvSpPr>
+          <p:cNvPr id="54" name="Rounded Rectangle 53"/>
+          <p:cNvSpPr/>
+          <p:nvPr/>
+        </p:nvSpPr>
+        <p:spPr>
+          <a:xfrm>
+            <a:off x="18022824" y="5280660"/>
+            <a:ext cx="1188720" cy="411480"/>
           </a:xfrm>
           <a:prstGeom prst="roundRect">
             <a:avLst>
-              <a:gd name="adj" fmla="val 10000"/>
+              <a:gd name="adj" fmla="val 20000"/>
             </a:avLst>
           </a:prstGeom>
           <a:solidFill>
@@ -9550,6 +10734,64 @@
           </a:fontRef>
         </p:style>
         <p:txBody>
+          <a:bodyPr rtlCol="0" anchor="ctr" wrap="square" lIns="36576" rIns="36576" tIns="54864" bIns="54864"/>
+          <a:lstStyle/>
+          <a:p>
+            <a:pPr algn="ctr">
+              <a:spcAft>
+                <a:spcPts val="600"/>
+              </a:spcAft>
+            </a:pPr>
+            <a:r>
+              <a:rPr sz="900" b="1">
+                <a:solidFill>
+                  <a:srgbClr val="0B3D7A"/>
+                </a:solidFill>
+              </a:rPr>
+              <a:t>no: stop</a:t>
+            </a:r>
+          </a:p>
+        </p:txBody>
+      </p:sp>
+      <p:sp>
+        <p:nvSpPr>
+          <p:cNvPr id="55" name="Rounded Rectangle 54"/>
+          <p:cNvSpPr/>
+          <p:nvPr/>
+        </p:nvSpPr>
+        <p:spPr>
+          <a:xfrm>
+            <a:off x="15115032" y="6035040"/>
+            <a:ext cx="4114800" cy="685800"/>
+          </a:xfrm>
+          <a:prstGeom prst="roundRect">
+            <a:avLst>
+              <a:gd name="adj" fmla="val 10000"/>
+            </a:avLst>
+          </a:prstGeom>
+          <a:solidFill>
+            <a:srgbClr val="F5EFE9"/>
+          </a:solidFill>
+          <a:ln>
+            <a:noFill/>
+          </a:ln>
+          <a:effectLst/>
+        </p:spPr>
+        <p:style>
+          <a:lnRef idx="1">
+            <a:schemeClr val="accent1"/>
+          </a:lnRef>
+          <a:fillRef idx="3">
+            <a:schemeClr val="accent1"/>
+          </a:fillRef>
+          <a:effectRef idx="2">
+            <a:schemeClr val="accent1"/>
+          </a:effectRef>
+          <a:fontRef idx="minor">
+            <a:schemeClr val="lt1"/>
+          </a:fontRef>
+        </p:style>
+        <p:txBody>
           <a:bodyPr rtlCol="0" anchor="ctr" wrap="square" lIns="109728" rIns="109728" tIns="54864" bIns="54864"/>
           <a:lstStyle/>
           <a:p>
@@ -9586,7 +10828,63 @@
       </p:sp>
       <p:sp>
         <p:nvSpPr>
-          <p:cNvPr id="34" name="Rounded Rectangle 33"/>
+          <p:cNvPr id="56" name="Oval 55"/>
+          <p:cNvSpPr/>
+          <p:nvPr/>
+        </p:nvSpPr>
+        <p:spPr>
+          <a:xfrm>
+            <a:off x="14987016" y="5907024"/>
+            <a:ext cx="310896" cy="310896"/>
+          </a:xfrm>
+          <a:prstGeom prst="ellipse">
+            <a:avLst/>
+          </a:prstGeom>
+          <a:solidFill>
+            <a:srgbClr val="FFA418"/>
+          </a:solidFill>
+          <a:ln>
+            <a:noFill/>
+          </a:ln>
+          <a:effectLst/>
+        </p:spPr>
+        <p:style>
+          <a:lnRef idx="1">
+            <a:schemeClr val="accent1"/>
+          </a:lnRef>
+          <a:fillRef idx="3">
+            <a:schemeClr val="accent1"/>
+          </a:fillRef>
+          <a:effectRef idx="2">
+            <a:schemeClr val="accent1"/>
+          </a:effectRef>
+          <a:fontRef idx="minor">
+            <a:schemeClr val="lt1"/>
+          </a:fontRef>
+        </p:style>
+        <p:txBody>
+          <a:bodyPr rtlCol="0" anchor="ctr" wrap="square" lIns="0" rIns="0" tIns="54864" bIns="54864"/>
+          <a:lstStyle/>
+          <a:p>
+            <a:pPr algn="ctr">
+              <a:spcAft>
+                <a:spcPts val="600"/>
+              </a:spcAft>
+            </a:pPr>
+            <a:r>
+              <a:rPr sz="1000" b="1">
+                <a:solidFill>
+                  <a:srgbClr val="0B3D7A"/>
+                </a:solidFill>
+              </a:rPr>
+              <a:t>18</a:t>
+            </a:r>
+          </a:p>
+        </p:txBody>
+      </p:sp>
+      <p:sp>
+        <p:nvSpPr>
+          <p:cNvPr id="57" name="Rounded Rectangle 56"/>
           <p:cNvSpPr/>
           <p:nvPr/>
         </p:nvSpPr>
@@ -9659,14 +10957,70 @@
       </p:sp>
       <p:sp>
         <p:nvSpPr>
-          <p:cNvPr id="35" name="Rounded Rectangle 34"/>
+          <p:cNvPr id="58" name="Oval 57"/>
           <p:cNvSpPr/>
           <p:nvPr/>
         </p:nvSpPr>
         <p:spPr>
           <a:xfrm>
-            <a:off x="914400" y="8641080"/>
-            <a:ext cx="5852160" cy="1051560"/>
+            <a:off x="14987016" y="6729984"/>
+            <a:ext cx="310896" cy="310896"/>
+          </a:xfrm>
+          <a:prstGeom prst="ellipse">
+            <a:avLst/>
+          </a:prstGeom>
+          <a:solidFill>
+            <a:srgbClr val="FFA418"/>
+          </a:solidFill>
+          <a:ln>
+            <a:noFill/>
+          </a:ln>
+          <a:effectLst/>
+        </p:spPr>
+        <p:style>
+          <a:lnRef idx="1">
+            <a:schemeClr val="accent1"/>
+          </a:lnRef>
+          <a:fillRef idx="3">
+            <a:schemeClr val="accent1"/>
+          </a:fillRef>
+          <a:effectRef idx="2">
+            <a:schemeClr val="accent1"/>
+          </a:effectRef>
+          <a:fontRef idx="minor">
+            <a:schemeClr val="lt1"/>
+          </a:fontRef>
+        </p:style>
+        <p:txBody>
+          <a:bodyPr rtlCol="0" anchor="ctr" wrap="square" lIns="0" rIns="0" tIns="54864" bIns="54864"/>
+          <a:lstStyle/>
+          <a:p>
+            <a:pPr algn="ctr">
+              <a:spcAft>
+                <a:spcPts val="600"/>
+              </a:spcAft>
+            </a:pPr>
+            <a:r>
+              <a:rPr sz="1000" b="1">
+                <a:solidFill>
+                  <a:srgbClr val="0B3D7A"/>
+                </a:solidFill>
+              </a:rPr>
+              <a:t>19</a:t>
+            </a:r>
+          </a:p>
+        </p:txBody>
+      </p:sp>
+      <p:sp>
+        <p:nvSpPr>
+          <p:cNvPr id="59" name="Rounded Rectangle 58"/>
+          <p:cNvSpPr/>
+          <p:nvPr/>
+        </p:nvSpPr>
+        <p:spPr>
+          <a:xfrm>
+            <a:off x="914400" y="9098280"/>
+            <a:ext cx="5852160" cy="960120"/>
           </a:xfrm>
           <a:prstGeom prst="roundRect">
             <a:avLst>
@@ -9732,14 +11086,14 @@
       </p:sp>
       <p:sp>
         <p:nvSpPr>
-          <p:cNvPr id="36" name="Rounded Rectangle 35"/>
+          <p:cNvPr id="60" name="Rounded Rectangle 59"/>
           <p:cNvSpPr/>
           <p:nvPr/>
         </p:nvSpPr>
         <p:spPr>
           <a:xfrm>
-            <a:off x="7132320" y="8641080"/>
-            <a:ext cx="5852160" cy="1051560"/>
+            <a:off x="7132320" y="9098280"/>
+            <a:ext cx="5852160" cy="960120"/>
           </a:xfrm>
           <a:prstGeom prst="roundRect">
             <a:avLst>
@@ -9805,14 +11159,14 @@
       </p:sp>
       <p:sp>
         <p:nvSpPr>
-          <p:cNvPr id="37" name="Rounded Rectangle 36"/>
+          <p:cNvPr id="61" name="Rounded Rectangle 60"/>
           <p:cNvSpPr/>
           <p:nvPr/>
         </p:nvSpPr>
         <p:spPr>
           <a:xfrm>
-            <a:off x="13350240" y="8641080"/>
-            <a:ext cx="5852160" cy="1051560"/>
+            <a:off x="13350240" y="9098280"/>
+            <a:ext cx="5852160" cy="960120"/>
           </a:xfrm>
           <a:prstGeom prst="roundRect">
             <a:avLst>
@@ -9876,9 +11230,47 @@
           </a:p>
         </p:txBody>
       </p:sp>
+      <p:sp>
+        <p:nvSpPr>
+          <p:cNvPr id="62" name="TextBox 61"/>
+          <p:cNvSpPr txBox="1"/>
+          <p:nvPr/>
+        </p:nvSpPr>
+        <p:spPr>
+          <a:xfrm>
+            <a:off x="12527280" y="1325880"/>
+            <a:ext cx="6675120" cy="320040"/>
+          </a:xfrm>
+          <a:prstGeom prst="rect">
+            <a:avLst/>
+          </a:prstGeom>
+          <a:noFill/>
+        </p:spPr>
+        <p:txBody>
+          <a:bodyPr wrap="square" anchor="t" lIns="0" rIns="0" tIns="54864" bIns="54864">
+            <a:spAutoFit/>
+          </a:bodyPr>
+          <a:lstStyle/>
+          <a:p>
+            <a:pPr algn="l">
+              <a:spcAft>
+                <a:spcPts val="600"/>
+              </a:spcAft>
+            </a:pPr>
+            <a:r>
+              <a:rPr sz="1200" b="1">
+                <a:solidFill>
+                  <a:srgbClr val="F5EFE9"/>
+                </a:solidFill>
+              </a:rPr>
+              <a:t>every later change re-enters at the client test org and repeats steps 10 to 19</a:t>
+            </a:r>
+          </a:p>
+        </p:txBody>
+      </p:sp>
       <p:cxnSp>
         <p:nvCxnSpPr>
-          <p:cNvPr id="38" name="Connector 37"/>
+          <p:cNvPr id="63" name="Connector 62"/>
           <p:cNvCxnSpPr/>
           <p:nvPr/>
         </p:nvCxnSpPr>
@@ -9895,899 +11287,6 @@
               <a:srgbClr val="F5EFE9"/>
             </a:solidFill>
             <a:tailEnd type="triangle" w="med" len="med"/>
-          </a:ln>
-        </p:spPr>
-        <p:style>
-          <a:lnRef idx="2">
-            <a:schemeClr val="accent1"/>
-          </a:lnRef>
-          <a:fillRef idx="0">
-            <a:schemeClr val="accent1"/>
-          </a:fillRef>
-          <a:effectRef idx="1">
-            <a:schemeClr val="accent1"/>
-          </a:effectRef>
-          <a:fontRef idx="minor">
-            <a:schemeClr val="tx1"/>
-          </a:fontRef>
-        </p:style>
-      </p:cxnSp>
-      <p:cxnSp>
-        <p:nvCxnSpPr>
-          <p:cNvPr id="39" name="Connector 38"/>
-          <p:cNvCxnSpPr/>
-          <p:nvPr/>
-        </p:nvCxnSpPr>
-        <p:spPr>
-          <a:xfrm>
-            <a:off x="2962656" y="4297680"/>
-            <a:ext cx="0" cy="137160"/>
-          </a:xfrm>
-          <a:prstGeom prst="line">
-            <a:avLst/>
-          </a:prstGeom>
-          <a:ln w="28575">
-            <a:solidFill>
-              <a:srgbClr val="F5EFE9"/>
-            </a:solidFill>
-            <a:tailEnd type="triangle" w="med" len="med"/>
-          </a:ln>
-        </p:spPr>
-        <p:style>
-          <a:lnRef idx="2">
-            <a:schemeClr val="accent1"/>
-          </a:lnRef>
-          <a:fillRef idx="0">
-            <a:schemeClr val="accent1"/>
-          </a:fillRef>
-          <a:effectRef idx="1">
-            <a:schemeClr val="accent1"/>
-          </a:effectRef>
-          <a:fontRef idx="minor">
-            <a:schemeClr val="tx1"/>
-          </a:fontRef>
-        </p:style>
-      </p:cxnSp>
-      <p:cxnSp>
-        <p:nvCxnSpPr>
-          <p:cNvPr id="40" name="Connector 39"/>
-          <p:cNvCxnSpPr/>
-          <p:nvPr/>
-        </p:nvCxnSpPr>
-        <p:spPr>
-          <a:xfrm>
-            <a:off x="2962656" y="5852159"/>
-            <a:ext cx="0" cy="274321"/>
-          </a:xfrm>
-          <a:prstGeom prst="line">
-            <a:avLst/>
-          </a:prstGeom>
-          <a:ln w="28575">
-            <a:solidFill>
-              <a:srgbClr val="F5EFE9"/>
-            </a:solidFill>
-            <a:tailEnd type="triangle" w="med" len="med"/>
-          </a:ln>
-        </p:spPr>
-        <p:style>
-          <a:lnRef idx="2">
-            <a:schemeClr val="accent1"/>
-          </a:lnRef>
-          <a:fillRef idx="0">
-            <a:schemeClr val="accent1"/>
-          </a:fillRef>
-          <a:effectRef idx="1">
-            <a:schemeClr val="accent1"/>
-          </a:effectRef>
-          <a:fontRef idx="minor">
-            <a:schemeClr val="tx1"/>
-          </a:fontRef>
-        </p:style>
-      </p:cxnSp>
-      <p:cxnSp>
-        <p:nvCxnSpPr>
-          <p:cNvPr id="41" name="Connector 40"/>
-          <p:cNvCxnSpPr/>
-          <p:nvPr/>
-        </p:nvCxnSpPr>
-        <p:spPr>
-          <a:xfrm>
-            <a:off x="3739896" y="6537960"/>
-            <a:ext cx="1591056" cy="0"/>
-          </a:xfrm>
-          <a:prstGeom prst="line">
-            <a:avLst/>
-          </a:prstGeom>
-          <a:ln w="28575">
-            <a:solidFill>
-              <a:srgbClr val="F5EFE9"/>
-            </a:solidFill>
-          </a:ln>
-        </p:spPr>
-        <p:style>
-          <a:lnRef idx="2">
-            <a:schemeClr val="accent1"/>
-          </a:lnRef>
-          <a:fillRef idx="0">
-            <a:schemeClr val="accent1"/>
-          </a:fillRef>
-          <a:effectRef idx="1">
-            <a:schemeClr val="accent1"/>
-          </a:effectRef>
-          <a:fontRef idx="minor">
-            <a:schemeClr val="tx1"/>
-          </a:fontRef>
-        </p:style>
-      </p:cxnSp>
-      <p:cxnSp>
-        <p:nvCxnSpPr>
-          <p:cNvPr id="42" name="Connector 41"/>
-          <p:cNvCxnSpPr/>
-          <p:nvPr/>
-        </p:nvCxnSpPr>
-        <p:spPr>
-          <a:xfrm flipV="1">
-            <a:off x="5330952" y="2898648"/>
-            <a:ext cx="0" cy="3639312"/>
-          </a:xfrm>
-          <a:prstGeom prst="line">
-            <a:avLst/>
-          </a:prstGeom>
-          <a:ln w="28575">
-            <a:solidFill>
-              <a:srgbClr val="F5EFE9"/>
-            </a:solidFill>
-          </a:ln>
-        </p:spPr>
-        <p:style>
-          <a:lnRef idx="2">
-            <a:schemeClr val="accent1"/>
-          </a:lnRef>
-          <a:fillRef idx="0">
-            <a:schemeClr val="accent1"/>
-          </a:fillRef>
-          <a:effectRef idx="1">
-            <a:schemeClr val="accent1"/>
-          </a:effectRef>
-          <a:fontRef idx="minor">
-            <a:schemeClr val="tx1"/>
-          </a:fontRef>
-        </p:style>
-      </p:cxnSp>
-      <p:cxnSp>
-        <p:nvCxnSpPr>
-          <p:cNvPr id="43" name="Connector 42"/>
-          <p:cNvCxnSpPr/>
-          <p:nvPr/>
-        </p:nvCxnSpPr>
-        <p:spPr>
-          <a:xfrm>
-            <a:off x="5330952" y="2898648"/>
-            <a:ext cx="310896" cy="4572"/>
-          </a:xfrm>
-          <a:prstGeom prst="line">
-            <a:avLst/>
-          </a:prstGeom>
-          <a:ln w="28575">
-            <a:solidFill>
-              <a:srgbClr val="F5EFE9"/>
-            </a:solidFill>
-            <a:tailEnd type="triangle" w="med" len="med"/>
-          </a:ln>
-        </p:spPr>
-        <p:style>
-          <a:lnRef idx="2">
-            <a:schemeClr val="accent1"/>
-          </a:lnRef>
-          <a:fillRef idx="0">
-            <a:schemeClr val="accent1"/>
-          </a:fillRef>
-          <a:effectRef idx="1">
-            <a:schemeClr val="accent1"/>
-          </a:effectRef>
-          <a:fontRef idx="minor">
-            <a:schemeClr val="tx1"/>
-          </a:fontRef>
-        </p:style>
-      </p:cxnSp>
-      <p:cxnSp>
-        <p:nvCxnSpPr>
-          <p:cNvPr id="44" name="Connector 43"/>
-          <p:cNvCxnSpPr/>
-          <p:nvPr/>
-        </p:nvCxnSpPr>
-        <p:spPr>
-          <a:xfrm>
-            <a:off x="7699248" y="3291840"/>
-            <a:ext cx="0" cy="137160"/>
-          </a:xfrm>
-          <a:prstGeom prst="line">
-            <a:avLst/>
-          </a:prstGeom>
-          <a:ln w="28575">
-            <a:solidFill>
-              <a:srgbClr val="F5EFE9"/>
-            </a:solidFill>
-            <a:tailEnd type="triangle" w="med" len="med"/>
-          </a:ln>
-        </p:spPr>
-        <p:style>
-          <a:lnRef idx="2">
-            <a:schemeClr val="accent1"/>
-          </a:lnRef>
-          <a:fillRef idx="0">
-            <a:schemeClr val="accent1"/>
-          </a:fillRef>
-          <a:effectRef idx="1">
-            <a:schemeClr val="accent1"/>
-          </a:effectRef>
-          <a:fontRef idx="minor">
-            <a:schemeClr val="tx1"/>
-          </a:fontRef>
-        </p:style>
-      </p:cxnSp>
-      <p:cxnSp>
-        <p:nvCxnSpPr>
-          <p:cNvPr id="45" name="Connector 44"/>
-          <p:cNvCxnSpPr/>
-          <p:nvPr/>
-        </p:nvCxnSpPr>
-        <p:spPr>
-          <a:xfrm>
-            <a:off x="7699248" y="4206240"/>
-            <a:ext cx="0" cy="137160"/>
-          </a:xfrm>
-          <a:prstGeom prst="line">
-            <a:avLst/>
-          </a:prstGeom>
-          <a:ln w="28575">
-            <a:solidFill>
-              <a:srgbClr val="F5EFE9"/>
-            </a:solidFill>
-            <a:tailEnd type="triangle" w="med" len="med"/>
-          </a:ln>
-        </p:spPr>
-        <p:style>
-          <a:lnRef idx="2">
-            <a:schemeClr val="accent1"/>
-          </a:lnRef>
-          <a:fillRef idx="0">
-            <a:schemeClr val="accent1"/>
-          </a:fillRef>
-          <a:effectRef idx="1">
-            <a:schemeClr val="accent1"/>
-          </a:effectRef>
-          <a:fontRef idx="minor">
-            <a:schemeClr val="tx1"/>
-          </a:fontRef>
-        </p:style>
-      </p:cxnSp>
-      <p:cxnSp>
-        <p:nvCxnSpPr>
-          <p:cNvPr id="46" name="Connector 45"/>
-          <p:cNvCxnSpPr/>
-          <p:nvPr/>
-        </p:nvCxnSpPr>
-        <p:spPr>
-          <a:xfrm>
-            <a:off x="7699248" y="5212080"/>
-            <a:ext cx="0" cy="182880"/>
-          </a:xfrm>
-          <a:prstGeom prst="line">
-            <a:avLst/>
-          </a:prstGeom>
-          <a:ln w="28575">
-            <a:solidFill>
-              <a:srgbClr val="F5EFE9"/>
-            </a:solidFill>
-            <a:tailEnd type="triangle" w="med" len="med"/>
-          </a:ln>
-        </p:spPr>
-        <p:style>
-          <a:lnRef idx="2">
-            <a:schemeClr val="accent1"/>
-          </a:lnRef>
-          <a:fillRef idx="0">
-            <a:schemeClr val="accent1"/>
-          </a:fillRef>
-          <a:effectRef idx="1">
-            <a:schemeClr val="accent1"/>
-          </a:effectRef>
-          <a:fontRef idx="minor">
-            <a:schemeClr val="tx1"/>
-          </a:fontRef>
-        </p:style>
-      </p:cxnSp>
-      <p:cxnSp>
-        <p:nvCxnSpPr>
-          <p:cNvPr id="47" name="Connector 46"/>
-          <p:cNvCxnSpPr/>
-          <p:nvPr/>
-        </p:nvCxnSpPr>
-        <p:spPr>
-          <a:xfrm>
-            <a:off x="7699248" y="6217920"/>
-            <a:ext cx="0" cy="182880"/>
-          </a:xfrm>
-          <a:prstGeom prst="line">
-            <a:avLst/>
-          </a:prstGeom>
-          <a:ln w="28575">
-            <a:solidFill>
-              <a:srgbClr val="F5EFE9"/>
-            </a:solidFill>
-            <a:tailEnd type="triangle" w="med" len="med"/>
-          </a:ln>
-        </p:spPr>
-        <p:style>
-          <a:lnRef idx="2">
-            <a:schemeClr val="accent1"/>
-          </a:lnRef>
-          <a:fillRef idx="0">
-            <a:schemeClr val="accent1"/>
-          </a:fillRef>
-          <a:effectRef idx="1">
-            <a:schemeClr val="accent1"/>
-          </a:effectRef>
-          <a:fontRef idx="minor">
-            <a:schemeClr val="tx1"/>
-          </a:fontRef>
-        </p:style>
-      </p:cxnSp>
-      <p:cxnSp>
-        <p:nvCxnSpPr>
-          <p:cNvPr id="48" name="Connector 47"/>
-          <p:cNvCxnSpPr/>
-          <p:nvPr/>
-        </p:nvCxnSpPr>
-        <p:spPr>
-          <a:xfrm flipV="1">
-            <a:off x="9756648" y="6784848"/>
-            <a:ext cx="310896" cy="4572"/>
-          </a:xfrm>
-          <a:prstGeom prst="line">
-            <a:avLst/>
-          </a:prstGeom>
-          <a:ln w="28575">
-            <a:solidFill>
-              <a:srgbClr val="F5EFE9"/>
-            </a:solidFill>
-          </a:ln>
-        </p:spPr>
-        <p:style>
-          <a:lnRef idx="2">
-            <a:schemeClr val="accent1"/>
-          </a:lnRef>
-          <a:fillRef idx="0">
-            <a:schemeClr val="accent1"/>
-          </a:fillRef>
-          <a:effectRef idx="1">
-            <a:schemeClr val="accent1"/>
-          </a:effectRef>
-          <a:fontRef idx="minor">
-            <a:schemeClr val="tx1"/>
-          </a:fontRef>
-        </p:style>
-      </p:cxnSp>
-      <p:cxnSp>
-        <p:nvCxnSpPr>
-          <p:cNvPr id="49" name="Connector 48"/>
-          <p:cNvCxnSpPr/>
-          <p:nvPr/>
-        </p:nvCxnSpPr>
-        <p:spPr>
-          <a:xfrm flipV="1">
-            <a:off x="10067544" y="2880360"/>
-            <a:ext cx="0" cy="3904488"/>
-          </a:xfrm>
-          <a:prstGeom prst="line">
-            <a:avLst/>
-          </a:prstGeom>
-          <a:ln w="28575">
-            <a:solidFill>
-              <a:srgbClr val="F5EFE9"/>
-            </a:solidFill>
-          </a:ln>
-        </p:spPr>
-        <p:style>
-          <a:lnRef idx="2">
-            <a:schemeClr val="accent1"/>
-          </a:lnRef>
-          <a:fillRef idx="0">
-            <a:schemeClr val="accent1"/>
-          </a:fillRef>
-          <a:effectRef idx="1">
-            <a:schemeClr val="accent1"/>
-          </a:effectRef>
-          <a:fontRef idx="minor">
-            <a:schemeClr val="tx1"/>
-          </a:fontRef>
-        </p:style>
-      </p:cxnSp>
-      <p:cxnSp>
-        <p:nvCxnSpPr>
-          <p:cNvPr id="50" name="Connector 49"/>
-          <p:cNvCxnSpPr/>
-          <p:nvPr/>
-        </p:nvCxnSpPr>
-        <p:spPr>
-          <a:xfrm>
-            <a:off x="10067544" y="2880360"/>
-            <a:ext cx="310896" cy="0"/>
-          </a:xfrm>
-          <a:prstGeom prst="line">
-            <a:avLst/>
-          </a:prstGeom>
-          <a:ln w="28575">
-            <a:solidFill>
-              <a:srgbClr val="F5EFE9"/>
-            </a:solidFill>
-            <a:tailEnd type="triangle" w="med" len="med"/>
-          </a:ln>
-        </p:spPr>
-        <p:style>
-          <a:lnRef idx="2">
-            <a:schemeClr val="accent1"/>
-          </a:lnRef>
-          <a:fillRef idx="0">
-            <a:schemeClr val="accent1"/>
-          </a:fillRef>
-          <a:effectRef idx="1">
-            <a:schemeClr val="accent1"/>
-          </a:effectRef>
-          <a:fontRef idx="minor">
-            <a:schemeClr val="tx1"/>
-          </a:fontRef>
-        </p:style>
-      </p:cxnSp>
-      <p:cxnSp>
-        <p:nvCxnSpPr>
-          <p:cNvPr id="51" name="Connector 50"/>
-          <p:cNvCxnSpPr/>
-          <p:nvPr/>
-        </p:nvCxnSpPr>
-        <p:spPr>
-          <a:xfrm>
-            <a:off x="12435840" y="3246120"/>
-            <a:ext cx="0" cy="137160"/>
-          </a:xfrm>
-          <a:prstGeom prst="line">
-            <a:avLst/>
-          </a:prstGeom>
-          <a:ln w="28575">
-            <a:solidFill>
-              <a:srgbClr val="F5EFE9"/>
-            </a:solidFill>
-            <a:tailEnd type="triangle" w="med" len="med"/>
-          </a:ln>
-        </p:spPr>
-        <p:style>
-          <a:lnRef idx="2">
-            <a:schemeClr val="accent1"/>
-          </a:lnRef>
-          <a:fillRef idx="0">
-            <a:schemeClr val="accent1"/>
-          </a:fillRef>
-          <a:effectRef idx="1">
-            <a:schemeClr val="accent1"/>
-          </a:effectRef>
-          <a:fontRef idx="minor">
-            <a:schemeClr val="tx1"/>
-          </a:fontRef>
-        </p:style>
-      </p:cxnSp>
-      <p:cxnSp>
-        <p:nvCxnSpPr>
-          <p:cNvPr id="52" name="Connector 51"/>
-          <p:cNvCxnSpPr/>
-          <p:nvPr/>
-        </p:nvCxnSpPr>
-        <p:spPr>
-          <a:xfrm>
-            <a:off x="12435840" y="4480560"/>
-            <a:ext cx="0" cy="137160"/>
-          </a:xfrm>
-          <a:prstGeom prst="line">
-            <a:avLst/>
-          </a:prstGeom>
-          <a:ln w="28575">
-            <a:solidFill>
-              <a:srgbClr val="F5EFE9"/>
-            </a:solidFill>
-            <a:tailEnd type="triangle" w="med" len="med"/>
-          </a:ln>
-        </p:spPr>
-        <p:style>
-          <a:lnRef idx="2">
-            <a:schemeClr val="accent1"/>
-          </a:lnRef>
-          <a:fillRef idx="0">
-            <a:schemeClr val="accent1"/>
-          </a:fillRef>
-          <a:effectRef idx="1">
-            <a:schemeClr val="accent1"/>
-          </a:effectRef>
-          <a:fontRef idx="minor">
-            <a:schemeClr val="tx1"/>
-          </a:fontRef>
-        </p:style>
-      </p:cxnSp>
-      <p:cxnSp>
-        <p:nvCxnSpPr>
-          <p:cNvPr id="53" name="Connector 52"/>
-          <p:cNvCxnSpPr/>
-          <p:nvPr/>
-        </p:nvCxnSpPr>
-        <p:spPr>
-          <a:xfrm>
-            <a:off x="12435840" y="5577840"/>
-            <a:ext cx="0" cy="137160"/>
-          </a:xfrm>
-          <a:prstGeom prst="line">
-            <a:avLst/>
-          </a:prstGeom>
-          <a:ln w="28575">
-            <a:solidFill>
-              <a:srgbClr val="F5EFE9"/>
-            </a:solidFill>
-            <a:tailEnd type="triangle" w="med" len="med"/>
-          </a:ln>
-        </p:spPr>
-        <p:style>
-          <a:lnRef idx="2">
-            <a:schemeClr val="accent1"/>
-          </a:lnRef>
-          <a:fillRef idx="0">
-            <a:schemeClr val="accent1"/>
-          </a:fillRef>
-          <a:effectRef idx="1">
-            <a:schemeClr val="accent1"/>
-          </a:effectRef>
-          <a:fontRef idx="minor">
-            <a:schemeClr val="tx1"/>
-          </a:fontRef>
-        </p:style>
-      </p:cxnSp>
-      <p:cxnSp>
-        <p:nvCxnSpPr>
-          <p:cNvPr id="54" name="Connector 53"/>
-          <p:cNvCxnSpPr/>
-          <p:nvPr/>
-        </p:nvCxnSpPr>
-        <p:spPr>
-          <a:xfrm>
-            <a:off x="12435840" y="6446520"/>
-            <a:ext cx="0" cy="137160"/>
-          </a:xfrm>
-          <a:prstGeom prst="line">
-            <a:avLst/>
-          </a:prstGeom>
-          <a:ln w="28575">
-            <a:solidFill>
-              <a:srgbClr val="F5EFE9"/>
-            </a:solidFill>
-            <a:tailEnd type="triangle" w="med" len="med"/>
-          </a:ln>
-        </p:spPr>
-        <p:style>
-          <a:lnRef idx="2">
-            <a:schemeClr val="accent1"/>
-          </a:lnRef>
-          <a:fillRef idx="0">
-            <a:schemeClr val="accent1"/>
-          </a:fillRef>
-          <a:effectRef idx="1">
-            <a:schemeClr val="accent1"/>
-          </a:effectRef>
-          <a:fontRef idx="minor">
-            <a:schemeClr val="tx1"/>
-          </a:fontRef>
-        </p:style>
-      </p:cxnSp>
-      <p:cxnSp>
-        <p:nvCxnSpPr>
-          <p:cNvPr id="55" name="Connector 54"/>
-          <p:cNvCxnSpPr/>
-          <p:nvPr/>
-        </p:nvCxnSpPr>
-        <p:spPr>
-          <a:xfrm>
-            <a:off x="14493240" y="7040880"/>
-            <a:ext cx="310896" cy="0"/>
-          </a:xfrm>
-          <a:prstGeom prst="line">
-            <a:avLst/>
-          </a:prstGeom>
-          <a:ln w="28575">
-            <a:solidFill>
-              <a:srgbClr val="F5EFE9"/>
-            </a:solidFill>
-          </a:ln>
-        </p:spPr>
-        <p:style>
-          <a:lnRef idx="2">
-            <a:schemeClr val="accent1"/>
-          </a:lnRef>
-          <a:fillRef idx="0">
-            <a:schemeClr val="accent1"/>
-          </a:fillRef>
-          <a:effectRef idx="1">
-            <a:schemeClr val="accent1"/>
-          </a:effectRef>
-          <a:fontRef idx="minor">
-            <a:schemeClr val="tx1"/>
-          </a:fontRef>
-        </p:style>
-      </p:cxnSp>
-      <p:cxnSp>
-        <p:nvCxnSpPr>
-          <p:cNvPr id="56" name="Connector 55"/>
-          <p:cNvCxnSpPr/>
-          <p:nvPr/>
-        </p:nvCxnSpPr>
-        <p:spPr>
-          <a:xfrm flipV="1">
-            <a:off x="14804136" y="2743200"/>
-            <a:ext cx="0" cy="4297680"/>
-          </a:xfrm>
-          <a:prstGeom prst="line">
-            <a:avLst/>
-          </a:prstGeom>
-          <a:ln w="28575">
-            <a:solidFill>
-              <a:srgbClr val="F5EFE9"/>
-            </a:solidFill>
-          </a:ln>
-        </p:spPr>
-        <p:style>
-          <a:lnRef idx="2">
-            <a:schemeClr val="accent1"/>
-          </a:lnRef>
-          <a:fillRef idx="0">
-            <a:schemeClr val="accent1"/>
-          </a:fillRef>
-          <a:effectRef idx="1">
-            <a:schemeClr val="accent1"/>
-          </a:effectRef>
-          <a:fontRef idx="minor">
-            <a:schemeClr val="tx1"/>
-          </a:fontRef>
-        </p:style>
-      </p:cxnSp>
-      <p:cxnSp>
-        <p:nvCxnSpPr>
-          <p:cNvPr id="57" name="Connector 56"/>
-          <p:cNvCxnSpPr/>
-          <p:nvPr/>
-        </p:nvCxnSpPr>
-        <p:spPr>
-          <a:xfrm>
-            <a:off x="14804136" y="2743200"/>
-            <a:ext cx="310896" cy="0"/>
-          </a:xfrm>
-          <a:prstGeom prst="line">
-            <a:avLst/>
-          </a:prstGeom>
-          <a:ln w="28575">
-            <a:solidFill>
-              <a:srgbClr val="F5EFE9"/>
-            </a:solidFill>
-            <a:tailEnd type="triangle" w="med" len="med"/>
-          </a:ln>
-        </p:spPr>
-        <p:style>
-          <a:lnRef idx="2">
-            <a:schemeClr val="accent1"/>
-          </a:lnRef>
-          <a:fillRef idx="0">
-            <a:schemeClr val="accent1"/>
-          </a:fillRef>
-          <a:effectRef idx="1">
-            <a:schemeClr val="accent1"/>
-          </a:effectRef>
-          <a:fontRef idx="minor">
-            <a:schemeClr val="tx1"/>
-          </a:fontRef>
-        </p:style>
-      </p:cxnSp>
-      <p:cxnSp>
-        <p:nvCxnSpPr>
-          <p:cNvPr id="58" name="Connector 57"/>
-          <p:cNvCxnSpPr/>
-          <p:nvPr/>
-        </p:nvCxnSpPr>
-        <p:spPr>
-          <a:xfrm>
-            <a:off x="17172432" y="2971800"/>
-            <a:ext cx="0" cy="137160"/>
-          </a:xfrm>
-          <a:prstGeom prst="line">
-            <a:avLst/>
-          </a:prstGeom>
-          <a:ln w="28575">
-            <a:solidFill>
-              <a:srgbClr val="F5EFE9"/>
-            </a:solidFill>
-            <a:tailEnd type="triangle" w="med" len="med"/>
-          </a:ln>
-        </p:spPr>
-        <p:style>
-          <a:lnRef idx="2">
-            <a:schemeClr val="accent1"/>
-          </a:lnRef>
-          <a:fillRef idx="0">
-            <a:schemeClr val="accent1"/>
-          </a:fillRef>
-          <a:effectRef idx="1">
-            <a:schemeClr val="accent1"/>
-          </a:effectRef>
-          <a:fontRef idx="minor">
-            <a:schemeClr val="tx1"/>
-          </a:fontRef>
-        </p:style>
-      </p:cxnSp>
-      <p:cxnSp>
-        <p:nvCxnSpPr>
-          <p:cNvPr id="59" name="Connector 58"/>
-          <p:cNvCxnSpPr/>
-          <p:nvPr/>
-        </p:nvCxnSpPr>
-        <p:spPr>
-          <a:xfrm>
-            <a:off x="17172432" y="3794760"/>
-            <a:ext cx="0" cy="137160"/>
-          </a:xfrm>
-          <a:prstGeom prst="line">
-            <a:avLst/>
-          </a:prstGeom>
-          <a:ln w="28575">
-            <a:solidFill>
-              <a:srgbClr val="F5EFE9"/>
-            </a:solidFill>
-            <a:tailEnd type="triangle" w="med" len="med"/>
-          </a:ln>
-        </p:spPr>
-        <p:style>
-          <a:lnRef idx="2">
-            <a:schemeClr val="accent1"/>
-          </a:lnRef>
-          <a:fillRef idx="0">
-            <a:schemeClr val="accent1"/>
-          </a:fillRef>
-          <a:effectRef idx="1">
-            <a:schemeClr val="accent1"/>
-          </a:effectRef>
-          <a:fontRef idx="minor">
-            <a:schemeClr val="tx1"/>
-          </a:fontRef>
-        </p:style>
-      </p:cxnSp>
-      <p:cxnSp>
-        <p:nvCxnSpPr>
-          <p:cNvPr id="60" name="Connector 59"/>
-          <p:cNvCxnSpPr/>
-          <p:nvPr/>
-        </p:nvCxnSpPr>
-        <p:spPr>
-          <a:xfrm>
-            <a:off x="17172432" y="4937760"/>
-            <a:ext cx="0" cy="137160"/>
-          </a:xfrm>
-          <a:prstGeom prst="line">
-            <a:avLst/>
-          </a:prstGeom>
-          <a:ln w="28575">
-            <a:solidFill>
-              <a:srgbClr val="F5EFE9"/>
-            </a:solidFill>
-            <a:tailEnd type="triangle" w="med" len="med"/>
-          </a:ln>
-        </p:spPr>
-        <p:style>
-          <a:lnRef idx="2">
-            <a:schemeClr val="accent1"/>
-          </a:lnRef>
-          <a:fillRef idx="0">
-            <a:schemeClr val="accent1"/>
-          </a:fillRef>
-          <a:effectRef idx="1">
-            <a:schemeClr val="accent1"/>
-          </a:effectRef>
-          <a:fontRef idx="minor">
-            <a:schemeClr val="tx1"/>
-          </a:fontRef>
-        </p:style>
-      </p:cxnSp>
-      <p:cxnSp>
-        <p:nvCxnSpPr>
-          <p:cNvPr id="61" name="Connector 60"/>
-          <p:cNvCxnSpPr/>
-          <p:nvPr/>
-        </p:nvCxnSpPr>
-        <p:spPr>
-          <a:xfrm>
-            <a:off x="17172432" y="5897880"/>
-            <a:ext cx="0" cy="137160"/>
-          </a:xfrm>
-          <a:prstGeom prst="line">
-            <a:avLst/>
-          </a:prstGeom>
-          <a:ln w="28575">
-            <a:solidFill>
-              <a:srgbClr val="F5EFE9"/>
-            </a:solidFill>
-            <a:tailEnd type="triangle" w="med" len="med"/>
-          </a:ln>
-        </p:spPr>
-        <p:style>
-          <a:lnRef idx="2">
-            <a:schemeClr val="accent1"/>
-          </a:lnRef>
-          <a:fillRef idx="0">
-            <a:schemeClr val="accent1"/>
-          </a:fillRef>
-          <a:effectRef idx="1">
-            <a:schemeClr val="accent1"/>
-          </a:effectRef>
-          <a:fontRef idx="minor">
-            <a:schemeClr val="tx1"/>
-          </a:fontRef>
-        </p:style>
-      </p:cxnSp>
-      <p:cxnSp>
-        <p:nvCxnSpPr>
-          <p:cNvPr id="62" name="Connector 61"/>
-          <p:cNvCxnSpPr/>
-          <p:nvPr/>
-        </p:nvCxnSpPr>
-        <p:spPr>
-          <a:xfrm>
-            <a:off x="17172432" y="6720840"/>
-            <a:ext cx="0" cy="137160"/>
-          </a:xfrm>
-          <a:prstGeom prst="line">
-            <a:avLst/>
-          </a:prstGeom>
-          <a:ln w="28575">
-            <a:solidFill>
-              <a:srgbClr val="F5EFE9"/>
-            </a:solidFill>
-            <a:tailEnd type="triangle" w="med" len="med"/>
-          </a:ln>
-        </p:spPr>
-        <p:style>
-          <a:lnRef idx="2">
-            <a:schemeClr val="accent1"/>
-          </a:lnRef>
-          <a:fillRef idx="0">
-            <a:schemeClr val="accent1"/>
-          </a:fillRef>
-          <a:effectRef idx="1">
-            <a:schemeClr val="accent1"/>
-          </a:effectRef>
-          <a:fontRef idx="minor">
-            <a:schemeClr val="tx1"/>
-          </a:fontRef>
-        </p:style>
-      </p:cxnSp>
-      <p:cxnSp>
-        <p:nvCxnSpPr>
-          <p:cNvPr id="63" name="Connector 62"/>
-          <p:cNvCxnSpPr/>
-          <p:nvPr/>
-        </p:nvCxnSpPr>
-        <p:spPr>
-          <a:xfrm flipH="1">
-            <a:off x="17007840" y="7635240"/>
-            <a:ext cx="164592" cy="301752"/>
-          </a:xfrm>
-          <a:prstGeom prst="line">
-            <a:avLst/>
-          </a:prstGeom>
-          <a:ln w="28575">
-            <a:solidFill>
-              <a:srgbClr val="F5EFE9"/>
-            </a:solidFill>
           </a:ln>
         </p:spPr>
         <p:style>
@@ -10812,9 +11311,9 @@
           <p:nvPr/>
         </p:nvCxnSpPr>
         <p:spPr>
-          <a:xfrm flipH="1">
-            <a:off x="16276320" y="7936992"/>
-            <a:ext cx="731520" cy="0"/>
+          <a:xfrm>
+            <a:off x="2962656" y="4297680"/>
+            <a:ext cx="0" cy="137160"/>
           </a:xfrm>
           <a:prstGeom prst="line">
             <a:avLst/>
@@ -10823,6 +11322,7 @@
             <a:solidFill>
               <a:srgbClr val="F5EFE9"/>
             </a:solidFill>
+            <a:tailEnd type="triangle" w="med" len="med"/>
           </a:ln>
         </p:spPr>
         <p:style>
@@ -10848,8 +11348,8 @@
         </p:nvCxnSpPr>
         <p:spPr>
           <a:xfrm>
-            <a:off x="16276320" y="7936992"/>
-            <a:ext cx="0" cy="704088"/>
+            <a:off x="2962656" y="5852159"/>
+            <a:ext cx="0" cy="228601"/>
           </a:xfrm>
           <a:prstGeom prst="line">
             <a:avLst/>
@@ -10876,16 +11376,52 @@
           </a:fontRef>
         </p:style>
       </p:cxnSp>
-      <p:sp>
-        <p:nvSpPr>
-          <p:cNvPr id="66" name="TextBox 65"/>
+      <p:cxnSp>
+        <p:nvCxnSpPr>
+          <p:cNvPr id="66" name="Connector 65"/>
+          <p:cNvCxnSpPr/>
+          <p:nvPr/>
+        </p:nvCxnSpPr>
+        <p:spPr>
+          <a:xfrm flipH="1">
+            <a:off x="1975104" y="6492240"/>
+            <a:ext cx="210311" cy="0"/>
+          </a:xfrm>
+          <a:prstGeom prst="line">
+            <a:avLst/>
+          </a:prstGeom>
+          <a:ln w="28575">
+            <a:solidFill>
+              <a:srgbClr val="F5EFE9"/>
+            </a:solidFill>
+            <a:tailEnd type="triangle" w="med" len="med"/>
+          </a:ln>
+        </p:spPr>
+        <p:style>
+          <a:lnRef idx="2">
+            <a:schemeClr val="accent1"/>
+          </a:lnRef>
+          <a:fillRef idx="0">
+            <a:schemeClr val="accent1"/>
+          </a:fillRef>
+          <a:effectRef idx="1">
+            <a:schemeClr val="accent1"/>
+          </a:effectRef>
+          <a:fontRef idx="minor">
+            <a:schemeClr val="tx1"/>
+          </a:fontRef>
+        </p:style>
+      </p:cxnSp>
+      <p:sp>
+        <p:nvSpPr>
+          <p:cNvPr id="67" name="TextBox 66"/>
           <p:cNvSpPr txBox="1"/>
           <p:nvPr/>
         </p:nvSpPr>
         <p:spPr>
           <a:xfrm>
-            <a:off x="740664" y="10012680"/>
-            <a:ext cx="18653760" cy="457200"/>
+            <a:off x="2171700" y="6108192"/>
+            <a:ext cx="2926080" cy="365760"/>
           </a:xfrm>
           <a:prstGeom prst="rect">
             <a:avLst/>
@@ -10893,7 +11429,7 @@
           <a:noFill/>
         </p:spPr>
         <p:txBody>
-          <a:bodyPr wrap="square" anchor="t" lIns="0" rIns="0" tIns="54864" bIns="54864">
+          <a:bodyPr wrap="square" anchor="b" lIns="0" rIns="0" tIns="54864" bIns="54864">
             <a:spAutoFit/>
           </a:bodyPr>
           <a:lstStyle/>
@@ -10904,12 +11440,1341 @@
               </a:spcAft>
             </a:pPr>
             <a:r>
+              <a:rPr sz="1100" b="1">
+                <a:solidFill>
+                  <a:srgbClr val="F5EFE9"/>
+                </a:solidFill>
+              </a:rPr>
+              <a:t>no</a:t>
+            </a:r>
+          </a:p>
+        </p:txBody>
+      </p:sp>
+      <p:cxnSp>
+        <p:nvCxnSpPr>
+          <p:cNvPr id="68" name="Connector 67"/>
+          <p:cNvCxnSpPr/>
+          <p:nvPr/>
+        </p:nvCxnSpPr>
+        <p:spPr>
+          <a:xfrm>
+            <a:off x="3739896" y="6492240"/>
+            <a:ext cx="1591056" cy="0"/>
+          </a:xfrm>
+          <a:prstGeom prst="line">
+            <a:avLst/>
+          </a:prstGeom>
+          <a:ln w="28575">
+            <a:solidFill>
+              <a:srgbClr val="F5EFE9"/>
+            </a:solidFill>
+          </a:ln>
+        </p:spPr>
+        <p:style>
+          <a:lnRef idx="2">
+            <a:schemeClr val="accent1"/>
+          </a:lnRef>
+          <a:fillRef idx="0">
+            <a:schemeClr val="accent1"/>
+          </a:fillRef>
+          <a:effectRef idx="1">
+            <a:schemeClr val="accent1"/>
+          </a:effectRef>
+          <a:fontRef idx="minor">
+            <a:schemeClr val="tx1"/>
+          </a:fontRef>
+        </p:style>
+      </p:cxnSp>
+      <p:cxnSp>
+        <p:nvCxnSpPr>
+          <p:cNvPr id="69" name="Connector 68"/>
+          <p:cNvCxnSpPr/>
+          <p:nvPr/>
+        </p:nvCxnSpPr>
+        <p:spPr>
+          <a:xfrm flipV="1">
+            <a:off x="5330952" y="2903220"/>
+            <a:ext cx="0" cy="3589020"/>
+          </a:xfrm>
+          <a:prstGeom prst="line">
+            <a:avLst/>
+          </a:prstGeom>
+          <a:ln w="28575">
+            <a:solidFill>
+              <a:srgbClr val="F5EFE9"/>
+            </a:solidFill>
+          </a:ln>
+        </p:spPr>
+        <p:style>
+          <a:lnRef idx="2">
+            <a:schemeClr val="accent1"/>
+          </a:lnRef>
+          <a:fillRef idx="0">
+            <a:schemeClr val="accent1"/>
+          </a:fillRef>
+          <a:effectRef idx="1">
+            <a:schemeClr val="accent1"/>
+          </a:effectRef>
+          <a:fontRef idx="minor">
+            <a:schemeClr val="tx1"/>
+          </a:fontRef>
+        </p:style>
+      </p:cxnSp>
+      <p:cxnSp>
+        <p:nvCxnSpPr>
+          <p:cNvPr id="70" name="Connector 69"/>
+          <p:cNvCxnSpPr/>
+          <p:nvPr/>
+        </p:nvCxnSpPr>
+        <p:spPr>
+          <a:xfrm>
+            <a:off x="5330952" y="2903220"/>
+            <a:ext cx="310896" cy="0"/>
+          </a:xfrm>
+          <a:prstGeom prst="line">
+            <a:avLst/>
+          </a:prstGeom>
+          <a:ln w="28575">
+            <a:solidFill>
+              <a:srgbClr val="F5EFE9"/>
+            </a:solidFill>
+            <a:tailEnd type="triangle" w="med" len="med"/>
+          </a:ln>
+        </p:spPr>
+        <p:style>
+          <a:lnRef idx="2">
+            <a:schemeClr val="accent1"/>
+          </a:lnRef>
+          <a:fillRef idx="0">
+            <a:schemeClr val="accent1"/>
+          </a:fillRef>
+          <a:effectRef idx="1">
+            <a:schemeClr val="accent1"/>
+          </a:effectRef>
+          <a:fontRef idx="minor">
+            <a:schemeClr val="tx1"/>
+          </a:fontRef>
+        </p:style>
+      </p:cxnSp>
+      <p:cxnSp>
+        <p:nvCxnSpPr>
+          <p:cNvPr id="71" name="Connector 70"/>
+          <p:cNvCxnSpPr/>
+          <p:nvPr/>
+        </p:nvCxnSpPr>
+        <p:spPr>
+          <a:xfrm>
+            <a:off x="7699248" y="3291840"/>
+            <a:ext cx="0" cy="137160"/>
+          </a:xfrm>
+          <a:prstGeom prst="line">
+            <a:avLst/>
+          </a:prstGeom>
+          <a:ln w="28575">
+            <a:solidFill>
+              <a:srgbClr val="F5EFE9"/>
+            </a:solidFill>
+            <a:tailEnd type="triangle" w="med" len="med"/>
+          </a:ln>
+        </p:spPr>
+        <p:style>
+          <a:lnRef idx="2">
+            <a:schemeClr val="accent1"/>
+          </a:lnRef>
+          <a:fillRef idx="0">
+            <a:schemeClr val="accent1"/>
+          </a:fillRef>
+          <a:effectRef idx="1">
+            <a:schemeClr val="accent1"/>
+          </a:effectRef>
+          <a:fontRef idx="minor">
+            <a:schemeClr val="tx1"/>
+          </a:fontRef>
+        </p:style>
+      </p:cxnSp>
+      <p:cxnSp>
+        <p:nvCxnSpPr>
+          <p:cNvPr id="72" name="Connector 71"/>
+          <p:cNvCxnSpPr/>
+          <p:nvPr/>
+        </p:nvCxnSpPr>
+        <p:spPr>
+          <a:xfrm>
+            <a:off x="7699248" y="4206240"/>
+            <a:ext cx="0" cy="137160"/>
+          </a:xfrm>
+          <a:prstGeom prst="line">
+            <a:avLst/>
+          </a:prstGeom>
+          <a:ln w="28575">
+            <a:solidFill>
+              <a:srgbClr val="F5EFE9"/>
+            </a:solidFill>
+            <a:tailEnd type="triangle" w="med" len="med"/>
+          </a:ln>
+        </p:spPr>
+        <p:style>
+          <a:lnRef idx="2">
+            <a:schemeClr val="accent1"/>
+          </a:lnRef>
+          <a:fillRef idx="0">
+            <a:schemeClr val="accent1"/>
+          </a:fillRef>
+          <a:effectRef idx="1">
+            <a:schemeClr val="accent1"/>
+          </a:effectRef>
+          <a:fontRef idx="minor">
+            <a:schemeClr val="tx1"/>
+          </a:fontRef>
+        </p:style>
+      </p:cxnSp>
+      <p:cxnSp>
+        <p:nvCxnSpPr>
+          <p:cNvPr id="73" name="Connector 72"/>
+          <p:cNvCxnSpPr/>
+          <p:nvPr/>
+        </p:nvCxnSpPr>
+        <p:spPr>
+          <a:xfrm>
+            <a:off x="7699248" y="5212080"/>
+            <a:ext cx="0" cy="182880"/>
+          </a:xfrm>
+          <a:prstGeom prst="line">
+            <a:avLst/>
+          </a:prstGeom>
+          <a:ln w="28575">
+            <a:solidFill>
+              <a:srgbClr val="F5EFE9"/>
+            </a:solidFill>
+            <a:tailEnd type="triangle" w="med" len="med"/>
+          </a:ln>
+        </p:spPr>
+        <p:style>
+          <a:lnRef idx="2">
+            <a:schemeClr val="accent1"/>
+          </a:lnRef>
+          <a:fillRef idx="0">
+            <a:schemeClr val="accent1"/>
+          </a:fillRef>
+          <a:effectRef idx="1">
+            <a:schemeClr val="accent1"/>
+          </a:effectRef>
+          <a:fontRef idx="minor">
+            <a:schemeClr val="tx1"/>
+          </a:fontRef>
+        </p:style>
+      </p:cxnSp>
+      <p:cxnSp>
+        <p:nvCxnSpPr>
+          <p:cNvPr id="74" name="Connector 73"/>
+          <p:cNvCxnSpPr/>
+          <p:nvPr/>
+        </p:nvCxnSpPr>
+        <p:spPr>
+          <a:xfrm>
+            <a:off x="8476488" y="5806440"/>
+            <a:ext cx="73152" cy="0"/>
+          </a:xfrm>
+          <a:prstGeom prst="line">
+            <a:avLst/>
+          </a:prstGeom>
+          <a:ln w="28575">
+            <a:solidFill>
+              <a:srgbClr val="F5EFE9"/>
+            </a:solidFill>
+            <a:tailEnd type="triangle" w="med" len="med"/>
+          </a:ln>
+        </p:spPr>
+        <p:style>
+          <a:lnRef idx="2">
+            <a:schemeClr val="accent1"/>
+          </a:lnRef>
+          <a:fillRef idx="0">
+            <a:schemeClr val="accent1"/>
+          </a:fillRef>
+          <a:effectRef idx="1">
+            <a:schemeClr val="accent1"/>
+          </a:effectRef>
+          <a:fontRef idx="minor">
+            <a:schemeClr val="tx1"/>
+          </a:fontRef>
+        </p:style>
+      </p:cxnSp>
+      <p:sp>
+        <p:nvSpPr>
+          <p:cNvPr id="75" name="TextBox 74"/>
+          <p:cNvSpPr txBox="1"/>
+          <p:nvPr/>
+        </p:nvSpPr>
+        <p:spPr>
+          <a:xfrm>
+            <a:off x="8604503" y="5422392"/>
+            <a:ext cx="2926080" cy="365760"/>
+          </a:xfrm>
+          <a:prstGeom prst="rect">
+            <a:avLst/>
+          </a:prstGeom>
+          <a:noFill/>
+        </p:spPr>
+        <p:txBody>
+          <a:bodyPr wrap="square" anchor="b" lIns="0" rIns="0" tIns="54864" bIns="54864">
+            <a:spAutoFit/>
+          </a:bodyPr>
+          <a:lstStyle/>
+          <a:p>
+            <a:pPr algn="l">
+              <a:spcAft>
+                <a:spcPts val="600"/>
+              </a:spcAft>
+            </a:pPr>
+            <a:r>
+              <a:rPr sz="1100" b="1">
+                <a:solidFill>
+                  <a:srgbClr val="F5EFE9"/>
+                </a:solidFill>
+              </a:rPr>
+              <a:t>no</a:t>
+            </a:r>
+          </a:p>
+        </p:txBody>
+      </p:sp>
+      <p:cxnSp>
+        <p:nvCxnSpPr>
+          <p:cNvPr id="76" name="Connector 75"/>
+          <p:cNvCxnSpPr/>
+          <p:nvPr/>
+        </p:nvCxnSpPr>
+        <p:spPr>
+          <a:xfrm>
+            <a:off x="7699248" y="6217920"/>
+            <a:ext cx="0" cy="182880"/>
+          </a:xfrm>
+          <a:prstGeom prst="line">
+            <a:avLst/>
+          </a:prstGeom>
+          <a:ln w="28575">
+            <a:solidFill>
+              <a:srgbClr val="F5EFE9"/>
+            </a:solidFill>
+            <a:tailEnd type="triangle" w="med" len="med"/>
+          </a:ln>
+        </p:spPr>
+        <p:style>
+          <a:lnRef idx="2">
+            <a:schemeClr val="accent1"/>
+          </a:lnRef>
+          <a:fillRef idx="0">
+            <a:schemeClr val="accent1"/>
+          </a:fillRef>
+          <a:effectRef idx="1">
+            <a:schemeClr val="accent1"/>
+          </a:effectRef>
+          <a:fontRef idx="minor">
+            <a:schemeClr val="tx1"/>
+          </a:fontRef>
+        </p:style>
+      </p:cxnSp>
+      <p:cxnSp>
+        <p:nvCxnSpPr>
+          <p:cNvPr id="77" name="Connector 76"/>
+          <p:cNvCxnSpPr/>
+          <p:nvPr/>
+        </p:nvCxnSpPr>
+        <p:spPr>
+          <a:xfrm>
+            <a:off x="9756648" y="6789420"/>
+            <a:ext cx="310896" cy="0"/>
+          </a:xfrm>
+          <a:prstGeom prst="line">
+            <a:avLst/>
+          </a:prstGeom>
+          <a:ln w="28575">
+            <a:solidFill>
+              <a:srgbClr val="F5EFE9"/>
+            </a:solidFill>
+          </a:ln>
+        </p:spPr>
+        <p:style>
+          <a:lnRef idx="2">
+            <a:schemeClr val="accent1"/>
+          </a:lnRef>
+          <a:fillRef idx="0">
+            <a:schemeClr val="accent1"/>
+          </a:fillRef>
+          <a:effectRef idx="1">
+            <a:schemeClr val="accent1"/>
+          </a:effectRef>
+          <a:fontRef idx="minor">
+            <a:schemeClr val="tx1"/>
+          </a:fontRef>
+        </p:style>
+      </p:cxnSp>
+      <p:cxnSp>
+        <p:nvCxnSpPr>
+          <p:cNvPr id="78" name="Connector 77"/>
+          <p:cNvCxnSpPr/>
+          <p:nvPr/>
+        </p:nvCxnSpPr>
+        <p:spPr>
+          <a:xfrm flipV="1">
+            <a:off x="10067544" y="3474720"/>
+            <a:ext cx="0" cy="3314700"/>
+          </a:xfrm>
+          <a:prstGeom prst="line">
+            <a:avLst/>
+          </a:prstGeom>
+          <a:ln w="28575">
+            <a:solidFill>
+              <a:srgbClr val="F5EFE9"/>
+            </a:solidFill>
+          </a:ln>
+        </p:spPr>
+        <p:style>
+          <a:lnRef idx="2">
+            <a:schemeClr val="accent1"/>
+          </a:lnRef>
+          <a:fillRef idx="0">
+            <a:schemeClr val="accent1"/>
+          </a:fillRef>
+          <a:effectRef idx="1">
+            <a:schemeClr val="accent1"/>
+          </a:effectRef>
+          <a:fontRef idx="minor">
+            <a:schemeClr val="tx1"/>
+          </a:fontRef>
+        </p:style>
+      </p:cxnSp>
+      <p:cxnSp>
+        <p:nvCxnSpPr>
+          <p:cNvPr id="79" name="Connector 78"/>
+          <p:cNvCxnSpPr/>
+          <p:nvPr/>
+        </p:nvCxnSpPr>
+        <p:spPr>
+          <a:xfrm>
+            <a:off x="10067544" y="3474720"/>
+            <a:ext cx="310896" cy="0"/>
+          </a:xfrm>
+          <a:prstGeom prst="line">
+            <a:avLst/>
+          </a:prstGeom>
+          <a:ln w="28575">
+            <a:solidFill>
+              <a:srgbClr val="F5EFE9"/>
+            </a:solidFill>
+            <a:tailEnd type="triangle" w="med" len="med"/>
+          </a:ln>
+        </p:spPr>
+        <p:style>
+          <a:lnRef idx="2">
+            <a:schemeClr val="accent1"/>
+          </a:lnRef>
+          <a:fillRef idx="0">
+            <a:schemeClr val="accent1"/>
+          </a:fillRef>
+          <a:effectRef idx="1">
+            <a:schemeClr val="accent1"/>
+          </a:effectRef>
+          <a:fontRef idx="minor">
+            <a:schemeClr val="tx1"/>
+          </a:fontRef>
+        </p:style>
+      </p:cxnSp>
+      <p:cxnSp>
+        <p:nvCxnSpPr>
+          <p:cNvPr id="80" name="Connector 79"/>
+          <p:cNvCxnSpPr/>
+          <p:nvPr/>
+        </p:nvCxnSpPr>
+        <p:spPr>
+          <a:xfrm>
+            <a:off x="12435840" y="2971800"/>
+            <a:ext cx="0" cy="137160"/>
+          </a:xfrm>
+          <a:prstGeom prst="line">
+            <a:avLst/>
+          </a:prstGeom>
+          <a:ln w="28575">
+            <a:solidFill>
+              <a:srgbClr val="F5EFE9"/>
+            </a:solidFill>
+            <a:tailEnd type="triangle" w="med" len="med"/>
+          </a:ln>
+        </p:spPr>
+        <p:style>
+          <a:lnRef idx="2">
+            <a:schemeClr val="accent1"/>
+          </a:lnRef>
+          <a:fillRef idx="0">
+            <a:schemeClr val="accent1"/>
+          </a:fillRef>
+          <a:effectRef idx="1">
+            <a:schemeClr val="accent1"/>
+          </a:effectRef>
+          <a:fontRef idx="minor">
+            <a:schemeClr val="tx1"/>
+          </a:fontRef>
+        </p:style>
+      </p:cxnSp>
+      <p:cxnSp>
+        <p:nvCxnSpPr>
+          <p:cNvPr id="81" name="Connector 80"/>
+          <p:cNvCxnSpPr/>
+          <p:nvPr/>
+        </p:nvCxnSpPr>
+        <p:spPr>
+          <a:xfrm>
+            <a:off x="12435840" y="3840480"/>
+            <a:ext cx="0" cy="137159"/>
+          </a:xfrm>
+          <a:prstGeom prst="line">
+            <a:avLst/>
+          </a:prstGeom>
+          <a:ln w="28575">
+            <a:solidFill>
+              <a:srgbClr val="F5EFE9"/>
+            </a:solidFill>
+            <a:tailEnd type="triangle" w="med" len="med"/>
+          </a:ln>
+        </p:spPr>
+        <p:style>
+          <a:lnRef idx="2">
+            <a:schemeClr val="accent1"/>
+          </a:lnRef>
+          <a:fillRef idx="0">
+            <a:schemeClr val="accent1"/>
+          </a:fillRef>
+          <a:effectRef idx="1">
+            <a:schemeClr val="accent1"/>
+          </a:effectRef>
+          <a:fontRef idx="minor">
+            <a:schemeClr val="tx1"/>
+          </a:fontRef>
+        </p:style>
+      </p:cxnSp>
+      <p:cxnSp>
+        <p:nvCxnSpPr>
+          <p:cNvPr id="82" name="Connector 81"/>
+          <p:cNvCxnSpPr/>
+          <p:nvPr/>
+        </p:nvCxnSpPr>
+        <p:spPr>
+          <a:xfrm>
+            <a:off x="12435840" y="5074920"/>
+            <a:ext cx="0" cy="137160"/>
+          </a:xfrm>
+          <a:prstGeom prst="line">
+            <a:avLst/>
+          </a:prstGeom>
+          <a:ln w="28575">
+            <a:solidFill>
+              <a:srgbClr val="F5EFE9"/>
+            </a:solidFill>
+            <a:tailEnd type="triangle" w="med" len="med"/>
+          </a:ln>
+        </p:spPr>
+        <p:style>
+          <a:lnRef idx="2">
+            <a:schemeClr val="accent1"/>
+          </a:lnRef>
+          <a:fillRef idx="0">
+            <a:schemeClr val="accent1"/>
+          </a:fillRef>
+          <a:effectRef idx="1">
+            <a:schemeClr val="accent1"/>
+          </a:effectRef>
+          <a:fontRef idx="minor">
+            <a:schemeClr val="tx1"/>
+          </a:fontRef>
+        </p:style>
+      </p:cxnSp>
+      <p:cxnSp>
+        <p:nvCxnSpPr>
+          <p:cNvPr id="83" name="Connector 82"/>
+          <p:cNvCxnSpPr/>
+          <p:nvPr/>
+        </p:nvCxnSpPr>
+        <p:spPr>
+          <a:xfrm>
+            <a:off x="13624559" y="5692140"/>
+            <a:ext cx="73152" cy="0"/>
+          </a:xfrm>
+          <a:prstGeom prst="line">
+            <a:avLst/>
+          </a:prstGeom>
+          <a:ln w="28575">
+            <a:solidFill>
+              <a:srgbClr val="F5EFE9"/>
+            </a:solidFill>
+            <a:tailEnd type="triangle" w="med" len="med"/>
+          </a:ln>
+        </p:spPr>
+        <p:style>
+          <a:lnRef idx="2">
+            <a:schemeClr val="accent1"/>
+          </a:lnRef>
+          <a:fillRef idx="0">
+            <a:schemeClr val="accent1"/>
+          </a:fillRef>
+          <a:effectRef idx="1">
+            <a:schemeClr val="accent1"/>
+          </a:effectRef>
+          <a:fontRef idx="minor">
+            <a:schemeClr val="tx1"/>
+          </a:fontRef>
+        </p:style>
+      </p:cxnSp>
+      <p:sp>
+        <p:nvSpPr>
+          <p:cNvPr id="84" name="TextBox 83"/>
+          <p:cNvSpPr txBox="1"/>
+          <p:nvPr/>
+        </p:nvSpPr>
+        <p:spPr>
+          <a:xfrm>
+            <a:off x="13752575" y="5308092"/>
+            <a:ext cx="2926080" cy="365760"/>
+          </a:xfrm>
+          <a:prstGeom prst="rect">
+            <a:avLst/>
+          </a:prstGeom>
+          <a:noFill/>
+        </p:spPr>
+        <p:txBody>
+          <a:bodyPr wrap="square" anchor="b" lIns="0" rIns="0" tIns="54864" bIns="54864">
+            <a:spAutoFit/>
+          </a:bodyPr>
+          <a:lstStyle/>
+          <a:p>
+            <a:pPr algn="l">
+              <a:spcAft>
+                <a:spcPts val="600"/>
+              </a:spcAft>
+            </a:pPr>
+            <a:r>
+              <a:rPr sz="1100" b="1">
+                <a:solidFill>
+                  <a:srgbClr val="F5EFE9"/>
+                </a:solidFill>
+              </a:rPr>
+              <a:t>no</a:t>
+            </a:r>
+          </a:p>
+        </p:txBody>
+      </p:sp>
+      <p:cxnSp>
+        <p:nvCxnSpPr>
+          <p:cNvPr id="85" name="Connector 84"/>
+          <p:cNvCxnSpPr/>
+          <p:nvPr/>
+        </p:nvCxnSpPr>
+        <p:spPr>
+          <a:xfrm>
+            <a:off x="12435840" y="6172200"/>
+            <a:ext cx="0" cy="137160"/>
+          </a:xfrm>
+          <a:prstGeom prst="line">
+            <a:avLst/>
+          </a:prstGeom>
+          <a:ln w="28575">
+            <a:solidFill>
+              <a:srgbClr val="F5EFE9"/>
+            </a:solidFill>
+            <a:tailEnd type="triangle" w="med" len="med"/>
+          </a:ln>
+        </p:spPr>
+        <p:style>
+          <a:lnRef idx="2">
+            <a:schemeClr val="accent1"/>
+          </a:lnRef>
+          <a:fillRef idx="0">
+            <a:schemeClr val="accent1"/>
+          </a:fillRef>
+          <a:effectRef idx="1">
+            <a:schemeClr val="accent1"/>
+          </a:effectRef>
+          <a:fontRef idx="minor">
+            <a:schemeClr val="tx1"/>
+          </a:fontRef>
+        </p:style>
+      </p:cxnSp>
+      <p:cxnSp>
+        <p:nvCxnSpPr>
+          <p:cNvPr id="86" name="Connector 85"/>
+          <p:cNvCxnSpPr/>
+          <p:nvPr/>
+        </p:nvCxnSpPr>
+        <p:spPr>
+          <a:xfrm>
+            <a:off x="12435840" y="7040880"/>
+            <a:ext cx="0" cy="137160"/>
+          </a:xfrm>
+          <a:prstGeom prst="line">
+            <a:avLst/>
+          </a:prstGeom>
+          <a:ln w="28575">
+            <a:solidFill>
+              <a:srgbClr val="F5EFE9"/>
+            </a:solidFill>
+            <a:tailEnd type="triangle" w="med" len="med"/>
+          </a:ln>
+        </p:spPr>
+        <p:style>
+          <a:lnRef idx="2">
+            <a:schemeClr val="accent1"/>
+          </a:lnRef>
+          <a:fillRef idx="0">
+            <a:schemeClr val="accent1"/>
+          </a:fillRef>
+          <a:effectRef idx="1">
+            <a:schemeClr val="accent1"/>
+          </a:effectRef>
+          <a:fontRef idx="minor">
+            <a:schemeClr val="tx1"/>
+          </a:fontRef>
+        </p:style>
+      </p:cxnSp>
+      <p:cxnSp>
+        <p:nvCxnSpPr>
+          <p:cNvPr id="87" name="Connector 86"/>
+          <p:cNvCxnSpPr/>
+          <p:nvPr/>
+        </p:nvCxnSpPr>
+        <p:spPr>
+          <a:xfrm>
+            <a:off x="14493240" y="7635240"/>
+            <a:ext cx="310896" cy="0"/>
+          </a:xfrm>
+          <a:prstGeom prst="line">
+            <a:avLst/>
+          </a:prstGeom>
+          <a:ln w="28575">
+            <a:solidFill>
+              <a:srgbClr val="F5EFE9"/>
+            </a:solidFill>
+          </a:ln>
+        </p:spPr>
+        <p:style>
+          <a:lnRef idx="2">
+            <a:schemeClr val="accent1"/>
+          </a:lnRef>
+          <a:fillRef idx="0">
+            <a:schemeClr val="accent1"/>
+          </a:fillRef>
+          <a:effectRef idx="1">
+            <a:schemeClr val="accent1"/>
+          </a:effectRef>
+          <a:fontRef idx="minor">
+            <a:schemeClr val="tx1"/>
+          </a:fontRef>
+        </p:style>
+      </p:cxnSp>
+      <p:cxnSp>
+        <p:nvCxnSpPr>
+          <p:cNvPr id="88" name="Connector 87"/>
+          <p:cNvCxnSpPr/>
+          <p:nvPr/>
+        </p:nvCxnSpPr>
+        <p:spPr>
+          <a:xfrm flipV="1">
+            <a:off x="14804136" y="2743200"/>
+            <a:ext cx="0" cy="4892040"/>
+          </a:xfrm>
+          <a:prstGeom prst="line">
+            <a:avLst/>
+          </a:prstGeom>
+          <a:ln w="28575">
+            <a:solidFill>
+              <a:srgbClr val="F5EFE9"/>
+            </a:solidFill>
+          </a:ln>
+        </p:spPr>
+        <p:style>
+          <a:lnRef idx="2">
+            <a:schemeClr val="accent1"/>
+          </a:lnRef>
+          <a:fillRef idx="0">
+            <a:schemeClr val="accent1"/>
+          </a:fillRef>
+          <a:effectRef idx="1">
+            <a:schemeClr val="accent1"/>
+          </a:effectRef>
+          <a:fontRef idx="minor">
+            <a:schemeClr val="tx1"/>
+          </a:fontRef>
+        </p:style>
+      </p:cxnSp>
+      <p:cxnSp>
+        <p:nvCxnSpPr>
+          <p:cNvPr id="89" name="Connector 88"/>
+          <p:cNvCxnSpPr/>
+          <p:nvPr/>
+        </p:nvCxnSpPr>
+        <p:spPr>
+          <a:xfrm>
+            <a:off x="14804136" y="2743200"/>
+            <a:ext cx="310896" cy="0"/>
+          </a:xfrm>
+          <a:prstGeom prst="line">
+            <a:avLst/>
+          </a:prstGeom>
+          <a:ln w="28575">
+            <a:solidFill>
+              <a:srgbClr val="F5EFE9"/>
+            </a:solidFill>
+            <a:tailEnd type="triangle" w="med" len="med"/>
+          </a:ln>
+        </p:spPr>
+        <p:style>
+          <a:lnRef idx="2">
+            <a:schemeClr val="accent1"/>
+          </a:lnRef>
+          <a:fillRef idx="0">
+            <a:schemeClr val="accent1"/>
+          </a:fillRef>
+          <a:effectRef idx="1">
+            <a:schemeClr val="accent1"/>
+          </a:effectRef>
+          <a:fontRef idx="minor">
+            <a:schemeClr val="tx1"/>
+          </a:fontRef>
+        </p:style>
+      </p:cxnSp>
+      <p:cxnSp>
+        <p:nvCxnSpPr>
+          <p:cNvPr id="90" name="Connector 89"/>
+          <p:cNvCxnSpPr/>
+          <p:nvPr/>
+        </p:nvCxnSpPr>
+        <p:spPr>
+          <a:xfrm>
+            <a:off x="17172432" y="2971800"/>
+            <a:ext cx="0" cy="137160"/>
+          </a:xfrm>
+          <a:prstGeom prst="line">
+            <a:avLst/>
+          </a:prstGeom>
+          <a:ln w="28575">
+            <a:solidFill>
+              <a:srgbClr val="F5EFE9"/>
+            </a:solidFill>
+            <a:tailEnd type="triangle" w="med" len="med"/>
+          </a:ln>
+        </p:spPr>
+        <p:style>
+          <a:lnRef idx="2">
+            <a:schemeClr val="accent1"/>
+          </a:lnRef>
+          <a:fillRef idx="0">
+            <a:schemeClr val="accent1"/>
+          </a:fillRef>
+          <a:effectRef idx="1">
+            <a:schemeClr val="accent1"/>
+          </a:effectRef>
+          <a:fontRef idx="minor">
+            <a:schemeClr val="tx1"/>
+          </a:fontRef>
+        </p:style>
+      </p:cxnSp>
+      <p:cxnSp>
+        <p:nvCxnSpPr>
+          <p:cNvPr id="91" name="Connector 90"/>
+          <p:cNvCxnSpPr/>
+          <p:nvPr/>
+        </p:nvCxnSpPr>
+        <p:spPr>
+          <a:xfrm>
+            <a:off x="17172432" y="3794760"/>
+            <a:ext cx="0" cy="137160"/>
+          </a:xfrm>
+          <a:prstGeom prst="line">
+            <a:avLst/>
+          </a:prstGeom>
+          <a:ln w="28575">
+            <a:solidFill>
+              <a:srgbClr val="F5EFE9"/>
+            </a:solidFill>
+            <a:tailEnd type="triangle" w="med" len="med"/>
+          </a:ln>
+        </p:spPr>
+        <p:style>
+          <a:lnRef idx="2">
+            <a:schemeClr val="accent1"/>
+          </a:lnRef>
+          <a:fillRef idx="0">
+            <a:schemeClr val="accent1"/>
+          </a:fillRef>
+          <a:effectRef idx="1">
+            <a:schemeClr val="accent1"/>
+          </a:effectRef>
+          <a:fontRef idx="minor">
+            <a:schemeClr val="tx1"/>
+          </a:fontRef>
+        </p:style>
+      </p:cxnSp>
+      <p:cxnSp>
+        <p:nvCxnSpPr>
+          <p:cNvPr id="92" name="Connector 91"/>
+          <p:cNvCxnSpPr/>
+          <p:nvPr/>
+        </p:nvCxnSpPr>
+        <p:spPr>
+          <a:xfrm>
+            <a:off x="17172432" y="4937760"/>
+            <a:ext cx="0" cy="137160"/>
+          </a:xfrm>
+          <a:prstGeom prst="line">
+            <a:avLst/>
+          </a:prstGeom>
+          <a:ln w="28575">
+            <a:solidFill>
+              <a:srgbClr val="F5EFE9"/>
+            </a:solidFill>
+            <a:tailEnd type="triangle" w="med" len="med"/>
+          </a:ln>
+        </p:spPr>
+        <p:style>
+          <a:lnRef idx="2">
+            <a:schemeClr val="accent1"/>
+          </a:lnRef>
+          <a:fillRef idx="0">
+            <a:schemeClr val="accent1"/>
+          </a:fillRef>
+          <a:effectRef idx="1">
+            <a:schemeClr val="accent1"/>
+          </a:effectRef>
+          <a:fontRef idx="minor">
+            <a:schemeClr val="tx1"/>
+          </a:fontRef>
+        </p:style>
+      </p:cxnSp>
+      <p:cxnSp>
+        <p:nvCxnSpPr>
+          <p:cNvPr id="93" name="Connector 92"/>
+          <p:cNvCxnSpPr/>
+          <p:nvPr/>
+        </p:nvCxnSpPr>
+        <p:spPr>
+          <a:xfrm>
+            <a:off x="17949672" y="5486400"/>
+            <a:ext cx="73152" cy="0"/>
+          </a:xfrm>
+          <a:prstGeom prst="line">
+            <a:avLst/>
+          </a:prstGeom>
+          <a:ln w="28575">
+            <a:solidFill>
+              <a:srgbClr val="F5EFE9"/>
+            </a:solidFill>
+            <a:tailEnd type="triangle" w="med" len="med"/>
+          </a:ln>
+        </p:spPr>
+        <p:style>
+          <a:lnRef idx="2">
+            <a:schemeClr val="accent1"/>
+          </a:lnRef>
+          <a:fillRef idx="0">
+            <a:schemeClr val="accent1"/>
+          </a:fillRef>
+          <a:effectRef idx="1">
+            <a:schemeClr val="accent1"/>
+          </a:effectRef>
+          <a:fontRef idx="minor">
+            <a:schemeClr val="tx1"/>
+          </a:fontRef>
+        </p:style>
+      </p:cxnSp>
+      <p:sp>
+        <p:nvSpPr>
+          <p:cNvPr id="94" name="TextBox 93"/>
+          <p:cNvSpPr txBox="1"/>
+          <p:nvPr/>
+        </p:nvSpPr>
+        <p:spPr>
+          <a:xfrm>
+            <a:off x="18077688" y="5102352"/>
+            <a:ext cx="2926080" cy="365760"/>
+          </a:xfrm>
+          <a:prstGeom prst="rect">
+            <a:avLst/>
+          </a:prstGeom>
+          <a:noFill/>
+        </p:spPr>
+        <p:txBody>
+          <a:bodyPr wrap="square" anchor="b" lIns="0" rIns="0" tIns="54864" bIns="54864">
+            <a:spAutoFit/>
+          </a:bodyPr>
+          <a:lstStyle/>
+          <a:p>
+            <a:pPr algn="l">
+              <a:spcAft>
+                <a:spcPts val="600"/>
+              </a:spcAft>
+            </a:pPr>
+            <a:r>
+              <a:rPr sz="1100" b="1">
+                <a:solidFill>
+                  <a:srgbClr val="F5EFE9"/>
+                </a:solidFill>
+              </a:rPr>
+              <a:t>no</a:t>
+            </a:r>
+          </a:p>
+        </p:txBody>
+      </p:sp>
+      <p:cxnSp>
+        <p:nvCxnSpPr>
+          <p:cNvPr id="95" name="Connector 94"/>
+          <p:cNvCxnSpPr/>
+          <p:nvPr/>
+        </p:nvCxnSpPr>
+        <p:spPr>
+          <a:xfrm>
+            <a:off x="17172432" y="5897880"/>
+            <a:ext cx="0" cy="137160"/>
+          </a:xfrm>
+          <a:prstGeom prst="line">
+            <a:avLst/>
+          </a:prstGeom>
+          <a:ln w="28575">
+            <a:solidFill>
+              <a:srgbClr val="F5EFE9"/>
+            </a:solidFill>
+            <a:tailEnd type="triangle" w="med" len="med"/>
+          </a:ln>
+        </p:spPr>
+        <p:style>
+          <a:lnRef idx="2">
+            <a:schemeClr val="accent1"/>
+          </a:lnRef>
+          <a:fillRef idx="0">
+            <a:schemeClr val="accent1"/>
+          </a:fillRef>
+          <a:effectRef idx="1">
+            <a:schemeClr val="accent1"/>
+          </a:effectRef>
+          <a:fontRef idx="minor">
+            <a:schemeClr val="tx1"/>
+          </a:fontRef>
+        </p:style>
+      </p:cxnSp>
+      <p:cxnSp>
+        <p:nvCxnSpPr>
+          <p:cNvPr id="96" name="Connector 95"/>
+          <p:cNvCxnSpPr/>
+          <p:nvPr/>
+        </p:nvCxnSpPr>
+        <p:spPr>
+          <a:xfrm>
+            <a:off x="17172432" y="6720840"/>
+            <a:ext cx="0" cy="137160"/>
+          </a:xfrm>
+          <a:prstGeom prst="line">
+            <a:avLst/>
+          </a:prstGeom>
+          <a:ln w="28575">
+            <a:solidFill>
+              <a:srgbClr val="F5EFE9"/>
+            </a:solidFill>
+            <a:tailEnd type="triangle" w="med" len="med"/>
+          </a:ln>
+        </p:spPr>
+        <p:style>
+          <a:lnRef idx="2">
+            <a:schemeClr val="accent1"/>
+          </a:lnRef>
+          <a:fillRef idx="0">
+            <a:schemeClr val="accent1"/>
+          </a:fillRef>
+          <a:effectRef idx="1">
+            <a:schemeClr val="accent1"/>
+          </a:effectRef>
+          <a:fontRef idx="minor">
+            <a:schemeClr val="tx1"/>
+          </a:fontRef>
+        </p:style>
+      </p:cxnSp>
+      <p:cxnSp>
+        <p:nvCxnSpPr>
+          <p:cNvPr id="97" name="Connector 96"/>
+          <p:cNvCxnSpPr/>
+          <p:nvPr/>
+        </p:nvCxnSpPr>
+        <p:spPr>
+          <a:xfrm>
+            <a:off x="17172432" y="7635240"/>
+            <a:ext cx="0" cy="777240"/>
+          </a:xfrm>
+          <a:prstGeom prst="line">
+            <a:avLst/>
+          </a:prstGeom>
+          <a:ln w="28575">
+            <a:solidFill>
+              <a:srgbClr val="F5EFE9"/>
+            </a:solidFill>
+          </a:ln>
+        </p:spPr>
+        <p:style>
+          <a:lnRef idx="2">
+            <a:schemeClr val="accent1"/>
+          </a:lnRef>
+          <a:fillRef idx="0">
+            <a:schemeClr val="accent1"/>
+          </a:fillRef>
+          <a:effectRef idx="1">
+            <a:schemeClr val="accent1"/>
+          </a:effectRef>
+          <a:fontRef idx="minor">
+            <a:schemeClr val="tx1"/>
+          </a:fontRef>
+        </p:style>
+      </p:cxnSp>
+      <p:cxnSp>
+        <p:nvCxnSpPr>
+          <p:cNvPr id="98" name="Connector 97"/>
+          <p:cNvCxnSpPr/>
+          <p:nvPr/>
+        </p:nvCxnSpPr>
+        <p:spPr>
+          <a:xfrm flipH="1">
+            <a:off x="16276320" y="8412480"/>
+            <a:ext cx="896112" cy="0"/>
+          </a:xfrm>
+          <a:prstGeom prst="line">
+            <a:avLst/>
+          </a:prstGeom>
+          <a:ln w="28575">
+            <a:solidFill>
+              <a:srgbClr val="F5EFE9"/>
+            </a:solidFill>
+          </a:ln>
+        </p:spPr>
+        <p:style>
+          <a:lnRef idx="2">
+            <a:schemeClr val="accent1"/>
+          </a:lnRef>
+          <a:fillRef idx="0">
+            <a:schemeClr val="accent1"/>
+          </a:fillRef>
+          <a:effectRef idx="1">
+            <a:schemeClr val="accent1"/>
+          </a:effectRef>
+          <a:fontRef idx="minor">
+            <a:schemeClr val="tx1"/>
+          </a:fontRef>
+        </p:style>
+      </p:cxnSp>
+      <p:cxnSp>
+        <p:nvCxnSpPr>
+          <p:cNvPr id="99" name="Connector 98"/>
+          <p:cNvCxnSpPr/>
+          <p:nvPr/>
+        </p:nvCxnSpPr>
+        <p:spPr>
+          <a:xfrm>
+            <a:off x="16276320" y="8412480"/>
+            <a:ext cx="0" cy="685800"/>
+          </a:xfrm>
+          <a:prstGeom prst="line">
+            <a:avLst/>
+          </a:prstGeom>
+          <a:ln w="28575">
+            <a:solidFill>
+              <a:srgbClr val="F5EFE9"/>
+            </a:solidFill>
+            <a:tailEnd type="triangle" w="med" len="med"/>
+          </a:ln>
+        </p:spPr>
+        <p:style>
+          <a:lnRef idx="2">
+            <a:schemeClr val="accent1"/>
+          </a:lnRef>
+          <a:fillRef idx="0">
+            <a:schemeClr val="accent1"/>
+          </a:fillRef>
+          <a:effectRef idx="1">
+            <a:schemeClr val="accent1"/>
+          </a:effectRef>
+          <a:fontRef idx="minor">
+            <a:schemeClr val="tx1"/>
+          </a:fontRef>
+        </p:style>
+      </p:cxnSp>
+      <p:cxnSp>
+        <p:nvCxnSpPr>
+          <p:cNvPr id="100" name="Connector 99"/>
+          <p:cNvCxnSpPr/>
+          <p:nvPr/>
+        </p:nvCxnSpPr>
+        <p:spPr>
+          <a:xfrm>
+            <a:off x="19202400" y="9578340"/>
+            <a:ext cx="457200" cy="0"/>
+          </a:xfrm>
+          <a:prstGeom prst="line">
+            <a:avLst/>
+          </a:prstGeom>
+          <a:ln w="28575">
+            <a:solidFill>
+              <a:srgbClr val="F5EFE9"/>
+            </a:solidFill>
+          </a:ln>
+        </p:spPr>
+        <p:style>
+          <a:lnRef idx="2">
+            <a:schemeClr val="accent1"/>
+          </a:lnRef>
+          <a:fillRef idx="0">
+            <a:schemeClr val="accent1"/>
+          </a:fillRef>
+          <a:effectRef idx="1">
+            <a:schemeClr val="accent1"/>
+          </a:effectRef>
+          <a:fontRef idx="minor">
+            <a:schemeClr val="tx1"/>
+          </a:fontRef>
+        </p:style>
+      </p:cxnSp>
+      <p:cxnSp>
+        <p:nvCxnSpPr>
+          <p:cNvPr id="101" name="Connector 100"/>
+          <p:cNvCxnSpPr/>
+          <p:nvPr/>
+        </p:nvCxnSpPr>
+        <p:spPr>
+          <a:xfrm flipV="1">
+            <a:off x="19659600" y="1691640"/>
+            <a:ext cx="0" cy="7886700"/>
+          </a:xfrm>
+          <a:prstGeom prst="line">
+            <a:avLst/>
+          </a:prstGeom>
+          <a:ln w="28575">
+            <a:solidFill>
+              <a:srgbClr val="F5EFE9"/>
+            </a:solidFill>
+          </a:ln>
+        </p:spPr>
+        <p:style>
+          <a:lnRef idx="2">
+            <a:schemeClr val="accent1"/>
+          </a:lnRef>
+          <a:fillRef idx="0">
+            <a:schemeClr val="accent1"/>
+          </a:fillRef>
+          <a:effectRef idx="1">
+            <a:schemeClr val="accent1"/>
+          </a:effectRef>
+          <a:fontRef idx="minor">
+            <a:schemeClr val="tx1"/>
+          </a:fontRef>
+        </p:style>
+      </p:cxnSp>
+      <p:cxnSp>
+        <p:nvCxnSpPr>
+          <p:cNvPr id="102" name="Connector 101"/>
+          <p:cNvCxnSpPr/>
+          <p:nvPr/>
+        </p:nvCxnSpPr>
+        <p:spPr>
+          <a:xfrm flipH="1">
+            <a:off x="12435840" y="1691640"/>
+            <a:ext cx="7223760" cy="0"/>
+          </a:xfrm>
+          <a:prstGeom prst="line">
+            <a:avLst/>
+          </a:prstGeom>
+          <a:ln w="28575">
+            <a:solidFill>
+              <a:srgbClr val="F5EFE9"/>
+            </a:solidFill>
+          </a:ln>
+        </p:spPr>
+        <p:style>
+          <a:lnRef idx="2">
+            <a:schemeClr val="accent1"/>
+          </a:lnRef>
+          <a:fillRef idx="0">
+            <a:schemeClr val="accent1"/>
+          </a:fillRef>
+          <a:effectRef idx="1">
+            <a:schemeClr val="accent1"/>
+          </a:effectRef>
+          <a:fontRef idx="minor">
+            <a:schemeClr val="tx1"/>
+          </a:fontRef>
+        </p:style>
+      </p:cxnSp>
+      <p:cxnSp>
+        <p:nvCxnSpPr>
+          <p:cNvPr id="103" name="Connector 102"/>
+          <p:cNvCxnSpPr/>
+          <p:nvPr/>
+        </p:nvCxnSpPr>
+        <p:spPr>
+          <a:xfrm>
+            <a:off x="12435840" y="1691640"/>
+            <a:ext cx="0" cy="822960"/>
+          </a:xfrm>
+          <a:prstGeom prst="line">
+            <a:avLst/>
+          </a:prstGeom>
+          <a:ln w="28575">
+            <a:solidFill>
+              <a:srgbClr val="F5EFE9"/>
+            </a:solidFill>
+            <a:tailEnd type="triangle" w="med" len="med"/>
+          </a:ln>
+        </p:spPr>
+        <p:style>
+          <a:lnRef idx="2">
+            <a:schemeClr val="accent1"/>
+          </a:lnRef>
+          <a:fillRef idx="0">
+            <a:schemeClr val="accent1"/>
+          </a:fillRef>
+          <a:effectRef idx="1">
+            <a:schemeClr val="accent1"/>
+          </a:effectRef>
+          <a:fontRef idx="minor">
+            <a:schemeClr val="tx1"/>
+          </a:fontRef>
+        </p:style>
+      </p:cxnSp>
+      <p:sp>
+        <p:nvSpPr>
+          <p:cNvPr id="104" name="TextBox 103"/>
+          <p:cNvSpPr txBox="1"/>
+          <p:nvPr/>
+        </p:nvSpPr>
+        <p:spPr>
+          <a:xfrm>
+            <a:off x="740664" y="10332720"/>
+            <a:ext cx="18653760" cy="457200"/>
+          </a:xfrm>
+          <a:prstGeom prst="rect">
+            <a:avLst/>
+          </a:prstGeom>
+          <a:noFill/>
+        </p:spPr>
+        <p:txBody>
+          <a:bodyPr wrap="square" anchor="t" lIns="0" rIns="0" tIns="54864" bIns="54864">
+            <a:spAutoFit/>
+          </a:bodyPr>
+          <a:lstStyle/>
+          <a:p>
+            <a:pPr algn="l">
+              <a:spcAft>
+                <a:spcPts val="600"/>
+              </a:spcAft>
+            </a:pPr>
+            <a:r>
               <a:rPr sz="1200" b="0">
                 <a:solidFill>
                   <a:srgbClr val="F5EFE9"/>
                 </a:solidFill>
               </a:rPr>
-              <a:t>Orange diamonds are gates: a failed gate stops the run and names the rollback. The Workstreams tree is never moved; the offering is a curated copy promoted org by org.</a:t>
+              <a:t>Orange diamonds are gates: a 'no' stops the run and names the rollback. Numbers are the order of one full promotion. The Workstreams tree is never moved; the offering is a curated copy promoted org by org.</a:t>
             </a:r>
           </a:p>
         </p:txBody>
@@ -11145,7 +13010,7 @@
                   <a:srgbClr val="F5EFE9"/>
                 </a:solidFill>
               </a:rPr>
-              <a:t>Submit 8 baselines as parallel scheduler jobs</a:t>
+              <a:t>5. Submit 8 baselines as parallel scheduler jobs</a:t>
             </a:r>
           </a:p>
           <a:p>
@@ -11259,7 +13124,7 @@
                   <a:srgbClr val="F5EFE9"/>
                 </a:solidFill>
               </a:rPr>
-              <a:t>created in steps 2 and 3, validated and gated before anything is scheduled; each stack feeds the domain chip beneath it</a:t>
+              <a:t>created in steps 2 and 3, validated at step 7 before anything is scheduled; each outlined stack feeds the domain chip beneath it</a:t>
             </a:r>
           </a:p>
         </p:txBody>
@@ -11267,6 +13132,594 @@
       <p:sp>
         <p:nvSpPr>
           <p:cNvPr id="9" name="Rounded Rectangle 8"/>
+          <p:cNvSpPr/>
+          <p:nvPr/>
+        </p:nvSpPr>
+        <p:spPr>
+          <a:xfrm>
+            <a:off x="868680" y="6355080"/>
+            <a:ext cx="2103120" cy="2377440"/>
+          </a:xfrm>
+          <a:prstGeom prst="roundRect">
+            <a:avLst>
+              <a:gd name="adj" fmla="val 4000"/>
+            </a:avLst>
+          </a:prstGeom>
+          <a:noFill/>
+          <a:ln w="19050">
+            <a:solidFill>
+              <a:srgbClr val="F5EFE9"/>
+            </a:solidFill>
+          </a:ln>
+          <a:effectLst/>
+        </p:spPr>
+        <p:style>
+          <a:lnRef idx="1">
+            <a:schemeClr val="accent1"/>
+          </a:lnRef>
+          <a:fillRef idx="3">
+            <a:schemeClr val="accent1"/>
+          </a:fillRef>
+          <a:effectRef idx="2">
+            <a:schemeClr val="accent1"/>
+          </a:effectRef>
+          <a:fontRef idx="minor">
+            <a:schemeClr val="lt1"/>
+          </a:fontRef>
+        </p:style>
+        <p:txBody>
+          <a:bodyPr rtlCol="0" anchor="ctr"/>
+          <a:lstStyle/>
+          <a:p>
+            <a:pPr algn="ctr"/>
+          </a:p>
+        </p:txBody>
+      </p:sp>
+      <p:sp>
+        <p:nvSpPr>
+          <p:cNvPr id="10" name="TextBox 9"/>
+          <p:cNvSpPr txBox="1"/>
+          <p:nvPr/>
+        </p:nvSpPr>
+        <p:spPr>
+          <a:xfrm>
+            <a:off x="1033271" y="6400800"/>
+            <a:ext cx="1773936" cy="411480"/>
+          </a:xfrm>
+          <a:prstGeom prst="rect">
+            <a:avLst/>
+          </a:prstGeom>
+          <a:noFill/>
+        </p:spPr>
+        <p:txBody>
+          <a:bodyPr wrap="square" anchor="t" lIns="0" rIns="0" tIns="54864" bIns="54864">
+            <a:spAutoFit/>
+          </a:bodyPr>
+          <a:lstStyle/>
+          <a:p>
+            <a:pPr algn="l">
+              <a:spcAft>
+                <a:spcPts val="600"/>
+              </a:spcAft>
+            </a:pPr>
+            <a:r>
+              <a:rPr sz="1400" b="1">
+                <a:solidFill>
+                  <a:srgbClr val="F5EFE9"/>
+                </a:solidFill>
+              </a:rPr>
+              <a:t>Finance tables</a:t>
+            </a:r>
+          </a:p>
+        </p:txBody>
+      </p:sp>
+      <p:sp>
+        <p:nvSpPr>
+          <p:cNvPr id="11" name="Rounded Rectangle 10"/>
+          <p:cNvSpPr/>
+          <p:nvPr/>
+        </p:nvSpPr>
+        <p:spPr>
+          <a:xfrm>
+            <a:off x="3108960" y="6355080"/>
+            <a:ext cx="2103120" cy="2377440"/>
+          </a:xfrm>
+          <a:prstGeom prst="roundRect">
+            <a:avLst>
+              <a:gd name="adj" fmla="val 4000"/>
+            </a:avLst>
+          </a:prstGeom>
+          <a:noFill/>
+          <a:ln w="19050">
+            <a:solidFill>
+              <a:srgbClr val="F5EFE9"/>
+            </a:solidFill>
+          </a:ln>
+          <a:effectLst/>
+        </p:spPr>
+        <p:style>
+          <a:lnRef idx="1">
+            <a:schemeClr val="accent1"/>
+          </a:lnRef>
+          <a:fillRef idx="3">
+            <a:schemeClr val="accent1"/>
+          </a:fillRef>
+          <a:effectRef idx="2">
+            <a:schemeClr val="accent1"/>
+          </a:effectRef>
+          <a:fontRef idx="minor">
+            <a:schemeClr val="lt1"/>
+          </a:fontRef>
+        </p:style>
+        <p:txBody>
+          <a:bodyPr rtlCol="0" anchor="ctr"/>
+          <a:lstStyle/>
+          <a:p>
+            <a:pPr algn="ctr"/>
+          </a:p>
+        </p:txBody>
+      </p:sp>
+      <p:sp>
+        <p:nvSpPr>
+          <p:cNvPr id="12" name="TextBox 11"/>
+          <p:cNvSpPr txBox="1"/>
+          <p:nvPr/>
+        </p:nvSpPr>
+        <p:spPr>
+          <a:xfrm>
+            <a:off x="3273552" y="6400800"/>
+            <a:ext cx="1773936" cy="411480"/>
+          </a:xfrm>
+          <a:prstGeom prst="rect">
+            <a:avLst/>
+          </a:prstGeom>
+          <a:noFill/>
+        </p:spPr>
+        <p:txBody>
+          <a:bodyPr wrap="square" anchor="t" lIns="0" rIns="0" tIns="54864" bIns="54864">
+            <a:spAutoFit/>
+          </a:bodyPr>
+          <a:lstStyle/>
+          <a:p>
+            <a:pPr algn="l">
+              <a:spcAft>
+                <a:spcPts val="600"/>
+              </a:spcAft>
+            </a:pPr>
+            <a:r>
+              <a:rPr sz="1400" b="1">
+                <a:solidFill>
+                  <a:srgbClr val="F5EFE9"/>
+                </a:solidFill>
+              </a:rPr>
+              <a:t>Billing tables</a:t>
+            </a:r>
+          </a:p>
+        </p:txBody>
+      </p:sp>
+      <p:sp>
+        <p:nvSpPr>
+          <p:cNvPr id="13" name="Rounded Rectangle 12"/>
+          <p:cNvSpPr/>
+          <p:nvPr/>
+        </p:nvSpPr>
+        <p:spPr>
+          <a:xfrm>
+            <a:off x="5349240" y="6355080"/>
+            <a:ext cx="2103120" cy="2377440"/>
+          </a:xfrm>
+          <a:prstGeom prst="roundRect">
+            <a:avLst>
+              <a:gd name="adj" fmla="val 4000"/>
+            </a:avLst>
+          </a:prstGeom>
+          <a:noFill/>
+          <a:ln w="19050">
+            <a:solidFill>
+              <a:srgbClr val="F5EFE9"/>
+            </a:solidFill>
+          </a:ln>
+          <a:effectLst/>
+        </p:spPr>
+        <p:style>
+          <a:lnRef idx="1">
+            <a:schemeClr val="accent1"/>
+          </a:lnRef>
+          <a:fillRef idx="3">
+            <a:schemeClr val="accent1"/>
+          </a:fillRef>
+          <a:effectRef idx="2">
+            <a:schemeClr val="accent1"/>
+          </a:effectRef>
+          <a:fontRef idx="minor">
+            <a:schemeClr val="lt1"/>
+          </a:fontRef>
+        </p:style>
+        <p:txBody>
+          <a:bodyPr rtlCol="0" anchor="ctr"/>
+          <a:lstStyle/>
+          <a:p>
+            <a:pPr algn="ctr"/>
+          </a:p>
+        </p:txBody>
+      </p:sp>
+      <p:sp>
+        <p:nvSpPr>
+          <p:cNvPr id="14" name="TextBox 13"/>
+          <p:cNvSpPr txBox="1"/>
+          <p:nvPr/>
+        </p:nvSpPr>
+        <p:spPr>
+          <a:xfrm>
+            <a:off x="5513831" y="6400800"/>
+            <a:ext cx="1773936" cy="411480"/>
+          </a:xfrm>
+          <a:prstGeom prst="rect">
+            <a:avLst/>
+          </a:prstGeom>
+          <a:noFill/>
+        </p:spPr>
+        <p:txBody>
+          <a:bodyPr wrap="square" anchor="t" lIns="0" rIns="0" tIns="54864" bIns="54864">
+            <a:spAutoFit/>
+          </a:bodyPr>
+          <a:lstStyle/>
+          <a:p>
+            <a:pPr algn="l">
+              <a:spcAft>
+                <a:spcPts val="600"/>
+              </a:spcAft>
+            </a:pPr>
+            <a:r>
+              <a:rPr sz="1400" b="1">
+                <a:solidFill>
+                  <a:srgbClr val="F5EFE9"/>
+                </a:solidFill>
+              </a:rPr>
+              <a:t>Meter Ops tables</a:t>
+            </a:r>
+          </a:p>
+        </p:txBody>
+      </p:sp>
+      <p:sp>
+        <p:nvSpPr>
+          <p:cNvPr id="15" name="Rounded Rectangle 14"/>
+          <p:cNvSpPr/>
+          <p:nvPr/>
+        </p:nvSpPr>
+        <p:spPr>
+          <a:xfrm>
+            <a:off x="7863840" y="6355080"/>
+            <a:ext cx="2377440" cy="2377440"/>
+          </a:xfrm>
+          <a:prstGeom prst="roundRect">
+            <a:avLst>
+              <a:gd name="adj" fmla="val 4000"/>
+            </a:avLst>
+          </a:prstGeom>
+          <a:noFill/>
+          <a:ln w="19050">
+            <a:solidFill>
+              <a:srgbClr val="F5EFE9"/>
+            </a:solidFill>
+          </a:ln>
+          <a:effectLst/>
+        </p:spPr>
+        <p:style>
+          <a:lnRef idx="1">
+            <a:schemeClr val="accent1"/>
+          </a:lnRef>
+          <a:fillRef idx="3">
+            <a:schemeClr val="accent1"/>
+          </a:fillRef>
+          <a:effectRef idx="2">
+            <a:schemeClr val="accent1"/>
+          </a:effectRef>
+          <a:fontRef idx="minor">
+            <a:schemeClr val="lt1"/>
+          </a:fontRef>
+        </p:style>
+        <p:txBody>
+          <a:bodyPr rtlCol="0" anchor="ctr"/>
+          <a:lstStyle/>
+          <a:p>
+            <a:pPr algn="ctr"/>
+          </a:p>
+        </p:txBody>
+      </p:sp>
+      <p:sp>
+        <p:nvSpPr>
+          <p:cNvPr id="16" name="TextBox 15"/>
+          <p:cNvSpPr txBox="1"/>
+          <p:nvPr/>
+        </p:nvSpPr>
+        <p:spPr>
+          <a:xfrm>
+            <a:off x="8028431" y="6400800"/>
+            <a:ext cx="2048256" cy="411480"/>
+          </a:xfrm>
+          <a:prstGeom prst="rect">
+            <a:avLst/>
+          </a:prstGeom>
+          <a:noFill/>
+        </p:spPr>
+        <p:txBody>
+          <a:bodyPr wrap="square" anchor="t" lIns="0" rIns="0" tIns="54864" bIns="54864">
+            <a:spAutoFit/>
+          </a:bodyPr>
+          <a:lstStyle/>
+          <a:p>
+            <a:pPr algn="l">
+              <a:spcAft>
+                <a:spcPts val="600"/>
+              </a:spcAft>
+            </a:pPr>
+            <a:r>
+              <a:rPr sz="1400" b="1">
+                <a:solidFill>
+                  <a:srgbClr val="F5EFE9"/>
+                </a:solidFill>
+              </a:rPr>
+              <a:t>Debt Mgmt objects</a:t>
+            </a:r>
+          </a:p>
+        </p:txBody>
+      </p:sp>
+      <p:sp>
+        <p:nvSpPr>
+          <p:cNvPr id="17" name="Rounded Rectangle 16"/>
+          <p:cNvSpPr/>
+          <p:nvPr/>
+        </p:nvSpPr>
+        <p:spPr>
+          <a:xfrm>
+            <a:off x="10515600" y="6355080"/>
+            <a:ext cx="2971800" cy="2377440"/>
+          </a:xfrm>
+          <a:prstGeom prst="roundRect">
+            <a:avLst>
+              <a:gd name="adj" fmla="val 4000"/>
+            </a:avLst>
+          </a:prstGeom>
+          <a:noFill/>
+          <a:ln w="19050">
+            <a:solidFill>
+              <a:srgbClr val="F5EFE9"/>
+            </a:solidFill>
+          </a:ln>
+          <a:effectLst/>
+        </p:spPr>
+        <p:style>
+          <a:lnRef idx="1">
+            <a:schemeClr val="accent1"/>
+          </a:lnRef>
+          <a:fillRef idx="3">
+            <a:schemeClr val="accent1"/>
+          </a:fillRef>
+          <a:effectRef idx="2">
+            <a:schemeClr val="accent1"/>
+          </a:effectRef>
+          <a:fontRef idx="minor">
+            <a:schemeClr val="lt1"/>
+          </a:fontRef>
+        </p:style>
+        <p:txBody>
+          <a:bodyPr rtlCol="0" anchor="ctr"/>
+          <a:lstStyle/>
+          <a:p>
+            <a:pPr algn="ctr"/>
+          </a:p>
+        </p:txBody>
+      </p:sp>
+      <p:sp>
+        <p:nvSpPr>
+          <p:cNvPr id="18" name="TextBox 17"/>
+          <p:cNvSpPr txBox="1"/>
+          <p:nvPr/>
+        </p:nvSpPr>
+        <p:spPr>
+          <a:xfrm>
+            <a:off x="10680192" y="6400800"/>
+            <a:ext cx="2642616" cy="411480"/>
+          </a:xfrm>
+          <a:prstGeom prst="rect">
+            <a:avLst/>
+          </a:prstGeom>
+          <a:noFill/>
+        </p:spPr>
+        <p:txBody>
+          <a:bodyPr wrap="square" anchor="t" lIns="0" rIns="0" tIns="54864" bIns="54864">
+            <a:spAutoFit/>
+          </a:bodyPr>
+          <a:lstStyle/>
+          <a:p>
+            <a:pPr algn="l">
+              <a:spcAft>
+                <a:spcPts val="600"/>
+              </a:spcAft>
+            </a:pPr>
+            <a:r>
+              <a:rPr sz="1400" b="1">
+                <a:solidFill>
+                  <a:srgbClr val="F5EFE9"/>
+                </a:solidFill>
+              </a:rPr>
+              <a:t>Meter Ops views</a:t>
+            </a:r>
+          </a:p>
+        </p:txBody>
+      </p:sp>
+      <p:sp>
+        <p:nvSpPr>
+          <p:cNvPr id="19" name="Rounded Rectangle 18"/>
+          <p:cNvSpPr/>
+          <p:nvPr/>
+        </p:nvSpPr>
+        <p:spPr>
+          <a:xfrm>
+            <a:off x="13716000" y="6355080"/>
+            <a:ext cx="3063240" cy="2377440"/>
+          </a:xfrm>
+          <a:prstGeom prst="roundRect">
+            <a:avLst>
+              <a:gd name="adj" fmla="val 4000"/>
+            </a:avLst>
+          </a:prstGeom>
+          <a:noFill/>
+          <a:ln w="19050">
+            <a:solidFill>
+              <a:srgbClr val="F5EFE9"/>
+            </a:solidFill>
+          </a:ln>
+          <a:effectLst/>
+        </p:spPr>
+        <p:style>
+          <a:lnRef idx="1">
+            <a:schemeClr val="accent1"/>
+          </a:lnRef>
+          <a:fillRef idx="3">
+            <a:schemeClr val="accent1"/>
+          </a:fillRef>
+          <a:effectRef idx="2">
+            <a:schemeClr val="accent1"/>
+          </a:effectRef>
+          <a:fontRef idx="minor">
+            <a:schemeClr val="lt1"/>
+          </a:fontRef>
+        </p:style>
+        <p:txBody>
+          <a:bodyPr rtlCol="0" anchor="ctr"/>
+          <a:lstStyle/>
+          <a:p>
+            <a:pPr algn="ctr"/>
+          </a:p>
+        </p:txBody>
+      </p:sp>
+      <p:sp>
+        <p:nvSpPr>
+          <p:cNvPr id="20" name="TextBox 19"/>
+          <p:cNvSpPr txBox="1"/>
+          <p:nvPr/>
+        </p:nvSpPr>
+        <p:spPr>
+          <a:xfrm>
+            <a:off x="13880592" y="6400800"/>
+            <a:ext cx="2734056" cy="411480"/>
+          </a:xfrm>
+          <a:prstGeom prst="rect">
+            <a:avLst/>
+          </a:prstGeom>
+          <a:noFill/>
+        </p:spPr>
+        <p:txBody>
+          <a:bodyPr wrap="square" anchor="t" lIns="0" rIns="0" tIns="54864" bIns="54864">
+            <a:spAutoFit/>
+          </a:bodyPr>
+          <a:lstStyle/>
+          <a:p>
+            <a:pPr algn="l">
+              <a:spcAft>
+                <a:spcPts val="600"/>
+              </a:spcAft>
+            </a:pPr>
+            <a:r>
+              <a:rPr sz="1400" b="1">
+                <a:solidFill>
+                  <a:srgbClr val="F5EFE9"/>
+                </a:solidFill>
+              </a:rPr>
+              <a:t>Field Ops views</a:t>
+            </a:r>
+          </a:p>
+        </p:txBody>
+      </p:sp>
+      <p:sp>
+        <p:nvSpPr>
+          <p:cNvPr id="21" name="Rounded Rectangle 20"/>
+          <p:cNvSpPr/>
+          <p:nvPr/>
+        </p:nvSpPr>
+        <p:spPr>
+          <a:xfrm>
+            <a:off x="17007840" y="6355080"/>
+            <a:ext cx="2194560" cy="2377440"/>
+          </a:xfrm>
+          <a:prstGeom prst="roundRect">
+            <a:avLst>
+              <a:gd name="adj" fmla="val 4000"/>
+            </a:avLst>
+          </a:prstGeom>
+          <a:noFill/>
+          <a:ln w="19050">
+            <a:solidFill>
+              <a:srgbClr val="F5EFE9"/>
+            </a:solidFill>
+          </a:ln>
+          <a:effectLst/>
+        </p:spPr>
+        <p:style>
+          <a:lnRef idx="1">
+            <a:schemeClr val="accent1"/>
+          </a:lnRef>
+          <a:fillRef idx="3">
+            <a:schemeClr val="accent1"/>
+          </a:fillRef>
+          <a:effectRef idx="2">
+            <a:schemeClr val="accent1"/>
+          </a:effectRef>
+          <a:fontRef idx="minor">
+            <a:schemeClr val="lt1"/>
+          </a:fontRef>
+        </p:style>
+        <p:txBody>
+          <a:bodyPr rtlCol="0" anchor="ctr"/>
+          <a:lstStyle/>
+          <a:p>
+            <a:pPr algn="ctr"/>
+          </a:p>
+        </p:txBody>
+      </p:sp>
+      <p:sp>
+        <p:nvSpPr>
+          <p:cNvPr id="22" name="TextBox 21"/>
+          <p:cNvSpPr txBox="1"/>
+          <p:nvPr/>
+        </p:nvSpPr>
+        <p:spPr>
+          <a:xfrm>
+            <a:off x="17172432" y="6400800"/>
+            <a:ext cx="1865376" cy="411480"/>
+          </a:xfrm>
+          <a:prstGeom prst="rect">
+            <a:avLst/>
+          </a:prstGeom>
+          <a:noFill/>
+        </p:spPr>
+        <p:txBody>
+          <a:bodyPr wrap="square" anchor="t" lIns="0" rIns="0" tIns="54864" bIns="54864">
+            <a:spAutoFit/>
+          </a:bodyPr>
+          <a:lstStyle/>
+          <a:p>
+            <a:pPr algn="l">
+              <a:spcAft>
+                <a:spcPts val="600"/>
+              </a:spcAft>
+            </a:pPr>
+            <a:r>
+              <a:rPr sz="1400" b="1">
+                <a:solidFill>
+                  <a:srgbClr val="F5EFE9"/>
+                </a:solidFill>
+              </a:rPr>
+              <a:t>Customer Ops views</a:t>
+            </a:r>
+          </a:p>
+        </p:txBody>
+      </p:sp>
+      <p:sp>
+        <p:nvSpPr>
+          <p:cNvPr id="23" name="Rounded Rectangle 22"/>
           <p:cNvSpPr/>
           <p:nvPr/>
         </p:nvSpPr>
@@ -11339,7 +13792,63 @@
       </p:sp>
       <p:sp>
         <p:nvSpPr>
-          <p:cNvPr id="10" name="Rounded Rectangle 9"/>
+          <p:cNvPr id="24" name="Oval 23"/>
+          <p:cNvSpPr/>
+          <p:nvPr/>
+        </p:nvSpPr>
+        <p:spPr>
+          <a:xfrm>
+            <a:off x="612648" y="2157984"/>
+            <a:ext cx="310896" cy="310896"/>
+          </a:xfrm>
+          <a:prstGeom prst="ellipse">
+            <a:avLst/>
+          </a:prstGeom>
+          <a:solidFill>
+            <a:srgbClr val="FFA418"/>
+          </a:solidFill>
+          <a:ln>
+            <a:noFill/>
+          </a:ln>
+          <a:effectLst/>
+        </p:spPr>
+        <p:style>
+          <a:lnRef idx="1">
+            <a:schemeClr val="accent1"/>
+          </a:lnRef>
+          <a:fillRef idx="3">
+            <a:schemeClr val="accent1"/>
+          </a:fillRef>
+          <a:effectRef idx="2">
+            <a:schemeClr val="accent1"/>
+          </a:effectRef>
+          <a:fontRef idx="minor">
+            <a:schemeClr val="lt1"/>
+          </a:fontRef>
+        </p:style>
+        <p:txBody>
+          <a:bodyPr rtlCol="0" anchor="ctr" wrap="square" lIns="0" rIns="0" tIns="54864" bIns="54864"/>
+          <a:lstStyle/>
+          <a:p>
+            <a:pPr algn="ctr">
+              <a:spcAft>
+                <a:spcPts val="600"/>
+              </a:spcAft>
+            </a:pPr>
+            <a:r>
+              <a:rPr sz="1000" b="1">
+                <a:solidFill>
+                  <a:srgbClr val="0B3D7A"/>
+                </a:solidFill>
+              </a:rPr>
+              <a:t>1</a:t>
+            </a:r>
+          </a:p>
+        </p:txBody>
+      </p:sp>
+      <p:sp>
+        <p:nvSpPr>
+          <p:cNvPr id="25" name="Rounded Rectangle 24"/>
           <p:cNvSpPr/>
           <p:nvPr/>
         </p:nvSpPr>
@@ -11412,7 +13921,63 @@
       </p:sp>
       <p:sp>
         <p:nvSpPr>
-          <p:cNvPr id="11" name="Rounded Rectangle 10"/>
+          <p:cNvPr id="26" name="Oval 25"/>
+          <p:cNvSpPr/>
+          <p:nvPr/>
+        </p:nvSpPr>
+        <p:spPr>
+          <a:xfrm>
+            <a:off x="3172968" y="2157984"/>
+            <a:ext cx="310896" cy="310896"/>
+          </a:xfrm>
+          <a:prstGeom prst="ellipse">
+            <a:avLst/>
+          </a:prstGeom>
+          <a:solidFill>
+            <a:srgbClr val="FFA418"/>
+          </a:solidFill>
+          <a:ln>
+            <a:noFill/>
+          </a:ln>
+          <a:effectLst/>
+        </p:spPr>
+        <p:style>
+          <a:lnRef idx="1">
+            <a:schemeClr val="accent1"/>
+          </a:lnRef>
+          <a:fillRef idx="3">
+            <a:schemeClr val="accent1"/>
+          </a:fillRef>
+          <a:effectRef idx="2">
+            <a:schemeClr val="accent1"/>
+          </a:effectRef>
+          <a:fontRef idx="minor">
+            <a:schemeClr val="lt1"/>
+          </a:fontRef>
+        </p:style>
+        <p:txBody>
+          <a:bodyPr rtlCol="0" anchor="ctr" wrap="square" lIns="0" rIns="0" tIns="54864" bIns="54864"/>
+          <a:lstStyle/>
+          <a:p>
+            <a:pPr algn="ctr">
+              <a:spcAft>
+                <a:spcPts val="600"/>
+              </a:spcAft>
+            </a:pPr>
+            <a:r>
+              <a:rPr sz="1000" b="1">
+                <a:solidFill>
+                  <a:srgbClr val="0B3D7A"/>
+                </a:solidFill>
+              </a:rPr>
+              <a:t>2</a:t>
+            </a:r>
+          </a:p>
+        </p:txBody>
+      </p:sp>
+      <p:sp>
+        <p:nvSpPr>
+          <p:cNvPr id="27" name="Rounded Rectangle 26"/>
           <p:cNvSpPr/>
           <p:nvPr/>
         </p:nvSpPr>
@@ -11485,7 +14050,63 @@
       </p:sp>
       <p:sp>
         <p:nvSpPr>
-          <p:cNvPr id="12" name="Rounded Rectangle 11"/>
+          <p:cNvPr id="28" name="Oval 27"/>
+          <p:cNvSpPr/>
+          <p:nvPr/>
+        </p:nvSpPr>
+        <p:spPr>
+          <a:xfrm>
+            <a:off x="6099048" y="2157984"/>
+            <a:ext cx="310896" cy="310896"/>
+          </a:xfrm>
+          <a:prstGeom prst="ellipse">
+            <a:avLst/>
+          </a:prstGeom>
+          <a:solidFill>
+            <a:srgbClr val="FFA418"/>
+          </a:solidFill>
+          <a:ln>
+            <a:noFill/>
+          </a:ln>
+          <a:effectLst/>
+        </p:spPr>
+        <p:style>
+          <a:lnRef idx="1">
+            <a:schemeClr val="accent1"/>
+          </a:lnRef>
+          <a:fillRef idx="3">
+            <a:schemeClr val="accent1"/>
+          </a:fillRef>
+          <a:effectRef idx="2">
+            <a:schemeClr val="accent1"/>
+          </a:effectRef>
+          <a:fontRef idx="minor">
+            <a:schemeClr val="lt1"/>
+          </a:fontRef>
+        </p:style>
+        <p:txBody>
+          <a:bodyPr rtlCol="0" anchor="ctr" wrap="square" lIns="0" rIns="0" tIns="54864" bIns="54864"/>
+          <a:lstStyle/>
+          <a:p>
+            <a:pPr algn="ctr">
+              <a:spcAft>
+                <a:spcPts val="600"/>
+              </a:spcAft>
+            </a:pPr>
+            <a:r>
+              <a:rPr sz="1000" b="1">
+                <a:solidFill>
+                  <a:srgbClr val="0B3D7A"/>
+                </a:solidFill>
+              </a:rPr>
+              <a:t>3</a:t>
+            </a:r>
+          </a:p>
+        </p:txBody>
+      </p:sp>
+      <p:sp>
+        <p:nvSpPr>
+          <p:cNvPr id="29" name="Rounded Rectangle 28"/>
           <p:cNvSpPr/>
           <p:nvPr/>
         </p:nvSpPr>
@@ -11558,7 +14179,63 @@
       </p:sp>
       <p:sp>
         <p:nvSpPr>
-          <p:cNvPr id="13" name="Rounded Rectangle 12"/>
+          <p:cNvPr id="30" name="Oval 29"/>
+          <p:cNvSpPr/>
+          <p:nvPr/>
+        </p:nvSpPr>
+        <p:spPr>
+          <a:xfrm>
+            <a:off x="9208008" y="2157984"/>
+            <a:ext cx="310896" cy="310896"/>
+          </a:xfrm>
+          <a:prstGeom prst="ellipse">
+            <a:avLst/>
+          </a:prstGeom>
+          <a:solidFill>
+            <a:srgbClr val="FFA418"/>
+          </a:solidFill>
+          <a:ln>
+            <a:noFill/>
+          </a:ln>
+          <a:effectLst/>
+        </p:spPr>
+        <p:style>
+          <a:lnRef idx="1">
+            <a:schemeClr val="accent1"/>
+          </a:lnRef>
+          <a:fillRef idx="3">
+            <a:schemeClr val="accent1"/>
+          </a:fillRef>
+          <a:effectRef idx="2">
+            <a:schemeClr val="accent1"/>
+          </a:effectRef>
+          <a:fontRef idx="minor">
+            <a:schemeClr val="lt1"/>
+          </a:fontRef>
+        </p:style>
+        <p:txBody>
+          <a:bodyPr rtlCol="0" anchor="ctr" wrap="square" lIns="0" rIns="0" tIns="54864" bIns="54864"/>
+          <a:lstStyle/>
+          <a:p>
+            <a:pPr algn="ctr">
+              <a:spcAft>
+                <a:spcPts val="600"/>
+              </a:spcAft>
+            </a:pPr>
+            <a:r>
+              <a:rPr sz="1000" b="1">
+                <a:solidFill>
+                  <a:srgbClr val="0B3D7A"/>
+                </a:solidFill>
+              </a:rPr>
+              <a:t>4</a:t>
+            </a:r>
+          </a:p>
+        </p:txBody>
+      </p:sp>
+      <p:sp>
+        <p:nvSpPr>
+          <p:cNvPr id="31" name="Rounded Rectangle 30"/>
           <p:cNvSpPr/>
           <p:nvPr/>
         </p:nvSpPr>
@@ -11616,7 +14293,7 @@
       </p:sp>
       <p:sp>
         <p:nvSpPr>
-          <p:cNvPr id="14" name="Rounded Rectangle 13"/>
+          <p:cNvPr id="32" name="Rounded Rectangle 31"/>
           <p:cNvSpPr/>
           <p:nvPr/>
         </p:nvSpPr>
@@ -11674,7 +14351,7 @@
       </p:sp>
       <p:sp>
         <p:nvSpPr>
-          <p:cNvPr id="15" name="Rounded Rectangle 14"/>
+          <p:cNvPr id="33" name="Rounded Rectangle 32"/>
           <p:cNvSpPr/>
           <p:nvPr/>
         </p:nvSpPr>
@@ -11732,7 +14409,7 @@
       </p:sp>
       <p:sp>
         <p:nvSpPr>
-          <p:cNvPr id="16" name="Rounded Rectangle 15"/>
+          <p:cNvPr id="34" name="Rounded Rectangle 33"/>
           <p:cNvSpPr/>
           <p:nvPr/>
         </p:nvSpPr>
@@ -11790,7 +14467,7 @@
       </p:sp>
       <p:sp>
         <p:nvSpPr>
-          <p:cNvPr id="17" name="Rounded Rectangle 16"/>
+          <p:cNvPr id="35" name="Rounded Rectangle 34"/>
           <p:cNvSpPr/>
           <p:nvPr/>
         </p:nvSpPr>
@@ -11848,7 +14525,7 @@
       </p:sp>
       <p:sp>
         <p:nvSpPr>
-          <p:cNvPr id="18" name="Rounded Rectangle 17"/>
+          <p:cNvPr id="36" name="Rounded Rectangle 35"/>
           <p:cNvSpPr/>
           <p:nvPr/>
         </p:nvSpPr>
@@ -11906,7 +14583,7 @@
       </p:sp>
       <p:sp>
         <p:nvSpPr>
-          <p:cNvPr id="19" name="Rounded Rectangle 18"/>
+          <p:cNvPr id="37" name="Rounded Rectangle 36"/>
           <p:cNvSpPr/>
           <p:nvPr/>
         </p:nvSpPr>
@@ -11964,7 +14641,7 @@
       </p:sp>
       <p:sp>
         <p:nvSpPr>
-          <p:cNvPr id="20" name="Rounded Rectangle 19"/>
+          <p:cNvPr id="38" name="Rounded Rectangle 37"/>
           <p:cNvSpPr/>
           <p:nvPr/>
         </p:nvSpPr>
@@ -12022,7 +14699,7 @@
       </p:sp>
       <p:sp>
         <p:nvSpPr>
-          <p:cNvPr id="21" name="Diamond 20"/>
+          <p:cNvPr id="39" name="Diamond 38"/>
           <p:cNvSpPr/>
           <p:nvPr/>
         </p:nvSpPr>
@@ -12078,16 +14755,16 @@
       </p:sp>
       <p:sp>
         <p:nvSpPr>
-          <p:cNvPr id="22" name="Diamond 21"/>
+          <p:cNvPr id="40" name="Oval 39"/>
           <p:cNvSpPr/>
           <p:nvPr/>
         </p:nvSpPr>
         <p:spPr>
           <a:xfrm>
-            <a:off x="14264640" y="4023360"/>
-            <a:ext cx="2377440" cy="960120"/>
-          </a:xfrm>
-          <a:prstGeom prst="diamond">
+            <a:off x="16971264" y="3895344"/>
+            <a:ext cx="310896" cy="310896"/>
+          </a:xfrm>
+          <a:prstGeom prst="ellipse">
             <a:avLst/>
           </a:prstGeom>
           <a:solidFill>
@@ -12113,7 +14790,7 @@
           </a:fontRef>
         </p:style>
         <p:txBody>
-          <a:bodyPr rtlCol="0" anchor="ctr" wrap="square" lIns="18288" rIns="18288" tIns="54864" bIns="54864"/>
+          <a:bodyPr rtlCol="0" anchor="ctr" wrap="square" lIns="0" rIns="0" tIns="54864" bIns="54864"/>
           <a:lstStyle/>
           <a:p>
             <a:pPr algn="ctr">
@@ -12127,25 +14804,25 @@
                   <a:srgbClr val="0B3D7A"/>
                 </a:solidFill>
               </a:rPr>
-              <a:t>validate and install gates pass?</a:t>
-            </a:r>
-          </a:p>
-        </p:txBody>
-      </p:sp>
-      <p:sp>
-        <p:nvSpPr>
-          <p:cNvPr id="23" name="Rounded Rectangle 22"/>
+              <a:t>6</a:t>
+            </a:r>
+          </a:p>
+        </p:txBody>
+      </p:sp>
+      <p:sp>
+        <p:nvSpPr>
+          <p:cNvPr id="41" name="Rounded Rectangle 40"/>
           <p:cNvSpPr/>
           <p:nvPr/>
         </p:nvSpPr>
         <p:spPr>
           <a:xfrm>
-            <a:off x="11612880" y="4114800"/>
-            <a:ext cx="2194560" cy="777240"/>
+            <a:off x="17282160" y="5120640"/>
+            <a:ext cx="1737360" cy="411480"/>
           </a:xfrm>
           <a:prstGeom prst="roundRect">
             <a:avLst>
-              <a:gd name="adj" fmla="val 10000"/>
+              <a:gd name="adj" fmla="val 20000"/>
             </a:avLst>
           </a:prstGeom>
           <a:solidFill>
@@ -12171,6 +14848,234 @@
           </a:fontRef>
         </p:style>
         <p:txBody>
+          <a:bodyPr rtlCol="0" anchor="ctr" wrap="square" lIns="36576" rIns="36576" tIns="54864" bIns="54864"/>
+          <a:lstStyle/>
+          <a:p>
+            <a:pPr algn="ctr">
+              <a:spcAft>
+                <a:spcPts val="600"/>
+              </a:spcAft>
+            </a:pPr>
+            <a:r>
+              <a:rPr sz="900" b="1">
+                <a:solidFill>
+                  <a:srgbClr val="0B3D7A"/>
+                </a:solidFill>
+              </a:rPr>
+              <a:t>no: stop, fix, re-run</a:t>
+            </a:r>
+          </a:p>
+        </p:txBody>
+      </p:sp>
+      <p:sp>
+        <p:nvSpPr>
+          <p:cNvPr id="42" name="Diamond 41"/>
+          <p:cNvSpPr/>
+          <p:nvPr/>
+        </p:nvSpPr>
+        <p:spPr>
+          <a:xfrm>
+            <a:off x="14264640" y="4023360"/>
+            <a:ext cx="2377440" cy="960120"/>
+          </a:xfrm>
+          <a:prstGeom prst="diamond">
+            <a:avLst/>
+          </a:prstGeom>
+          <a:solidFill>
+            <a:srgbClr val="FFA418"/>
+          </a:solidFill>
+          <a:ln>
+            <a:noFill/>
+          </a:ln>
+          <a:effectLst/>
+        </p:spPr>
+        <p:style>
+          <a:lnRef idx="1">
+            <a:schemeClr val="accent1"/>
+          </a:lnRef>
+          <a:fillRef idx="3">
+            <a:schemeClr val="accent1"/>
+          </a:fillRef>
+          <a:effectRef idx="2">
+            <a:schemeClr val="accent1"/>
+          </a:effectRef>
+          <a:fontRef idx="minor">
+            <a:schemeClr val="lt1"/>
+          </a:fontRef>
+        </p:style>
+        <p:txBody>
+          <a:bodyPr rtlCol="0" anchor="ctr" wrap="square" lIns="18288" rIns="18288" tIns="54864" bIns="54864"/>
+          <a:lstStyle/>
+          <a:p>
+            <a:pPr algn="ctr">
+              <a:spcAft>
+                <a:spcPts val="600"/>
+              </a:spcAft>
+            </a:pPr>
+            <a:r>
+              <a:rPr sz="1000" b="1">
+                <a:solidFill>
+                  <a:srgbClr val="0B3D7A"/>
+                </a:solidFill>
+              </a:rPr>
+              <a:t>validate and install gates pass?</a:t>
+            </a:r>
+          </a:p>
+        </p:txBody>
+      </p:sp>
+      <p:sp>
+        <p:nvSpPr>
+          <p:cNvPr id="43" name="Oval 42"/>
+          <p:cNvSpPr/>
+          <p:nvPr/>
+        </p:nvSpPr>
+        <p:spPr>
+          <a:xfrm>
+            <a:off x="14136624" y="3895344"/>
+            <a:ext cx="310896" cy="310896"/>
+          </a:xfrm>
+          <a:prstGeom prst="ellipse">
+            <a:avLst/>
+          </a:prstGeom>
+          <a:solidFill>
+            <a:srgbClr val="FFA418"/>
+          </a:solidFill>
+          <a:ln>
+            <a:noFill/>
+          </a:ln>
+          <a:effectLst/>
+        </p:spPr>
+        <p:style>
+          <a:lnRef idx="1">
+            <a:schemeClr val="accent1"/>
+          </a:lnRef>
+          <a:fillRef idx="3">
+            <a:schemeClr val="accent1"/>
+          </a:fillRef>
+          <a:effectRef idx="2">
+            <a:schemeClr val="accent1"/>
+          </a:effectRef>
+          <a:fontRef idx="minor">
+            <a:schemeClr val="lt1"/>
+          </a:fontRef>
+        </p:style>
+        <p:txBody>
+          <a:bodyPr rtlCol="0" anchor="ctr" wrap="square" lIns="0" rIns="0" tIns="54864" bIns="54864"/>
+          <a:lstStyle/>
+          <a:p>
+            <a:pPr algn="ctr">
+              <a:spcAft>
+                <a:spcPts val="600"/>
+              </a:spcAft>
+            </a:pPr>
+            <a:r>
+              <a:rPr sz="1000" b="1">
+                <a:solidFill>
+                  <a:srgbClr val="0B3D7A"/>
+                </a:solidFill>
+              </a:rPr>
+              <a:t>7</a:t>
+            </a:r>
+          </a:p>
+        </p:txBody>
+      </p:sp>
+      <p:sp>
+        <p:nvSpPr>
+          <p:cNvPr id="44" name="Rounded Rectangle 43"/>
+          <p:cNvSpPr/>
+          <p:nvPr/>
+        </p:nvSpPr>
+        <p:spPr>
+          <a:xfrm>
+            <a:off x="14493240" y="5120640"/>
+            <a:ext cx="1920240" cy="411480"/>
+          </a:xfrm>
+          <a:prstGeom prst="roundRect">
+            <a:avLst>
+              <a:gd name="adj" fmla="val 20000"/>
+            </a:avLst>
+          </a:prstGeom>
+          <a:solidFill>
+            <a:srgbClr val="F5EFE9"/>
+          </a:solidFill>
+          <a:ln>
+            <a:noFill/>
+          </a:ln>
+          <a:effectLst/>
+        </p:spPr>
+        <p:style>
+          <a:lnRef idx="1">
+            <a:schemeClr val="accent1"/>
+          </a:lnRef>
+          <a:fillRef idx="3">
+            <a:schemeClr val="accent1"/>
+          </a:fillRef>
+          <a:effectRef idx="2">
+            <a:schemeClr val="accent1"/>
+          </a:effectRef>
+          <a:fontRef idx="minor">
+            <a:schemeClr val="lt1"/>
+          </a:fontRef>
+        </p:style>
+        <p:txBody>
+          <a:bodyPr rtlCol="0" anchor="ctr" wrap="square" lIns="36576" rIns="36576" tIns="54864" bIns="54864"/>
+          <a:lstStyle/>
+          <a:p>
+            <a:pPr algn="ctr">
+              <a:spcAft>
+                <a:spcPts val="600"/>
+              </a:spcAft>
+            </a:pPr>
+            <a:r>
+              <a:rPr sz="900" b="1">
+                <a:solidFill>
+                  <a:srgbClr val="0B3D7A"/>
+                </a:solidFill>
+              </a:rPr>
+              <a:t>no: stop, fix, re-run</a:t>
+            </a:r>
+          </a:p>
+        </p:txBody>
+      </p:sp>
+      <p:sp>
+        <p:nvSpPr>
+          <p:cNvPr id="45" name="Rounded Rectangle 44"/>
+          <p:cNvSpPr/>
+          <p:nvPr/>
+        </p:nvSpPr>
+        <p:spPr>
+          <a:xfrm>
+            <a:off x="11612880" y="4114800"/>
+            <a:ext cx="2194560" cy="777240"/>
+          </a:xfrm>
+          <a:prstGeom prst="roundRect">
+            <a:avLst>
+              <a:gd name="adj" fmla="val 10000"/>
+            </a:avLst>
+          </a:prstGeom>
+          <a:solidFill>
+            <a:srgbClr val="F5EFE9"/>
+          </a:solidFill>
+          <a:ln>
+            <a:noFill/>
+          </a:ln>
+          <a:effectLst/>
+        </p:spPr>
+        <p:style>
+          <a:lnRef idx="1">
+            <a:schemeClr val="accent1"/>
+          </a:lnRef>
+          <a:fillRef idx="3">
+            <a:schemeClr val="accent1"/>
+          </a:fillRef>
+          <a:effectRef idx="2">
+            <a:schemeClr val="accent1"/>
+          </a:effectRef>
+          <a:fontRef idx="minor">
+            <a:schemeClr val="lt1"/>
+          </a:fontRef>
+        </p:style>
+        <p:txBody>
           <a:bodyPr rtlCol="0" anchor="ctr" wrap="square" lIns="109728" rIns="109728" tIns="54864" bIns="54864"/>
           <a:lstStyle/>
           <a:p>
@@ -12207,7 +15112,63 @@
       </p:sp>
       <p:sp>
         <p:nvSpPr>
-          <p:cNvPr id="24" name="Rounded Rectangle 23"/>
+          <p:cNvPr id="46" name="Oval 45"/>
+          <p:cNvSpPr/>
+          <p:nvPr/>
+        </p:nvSpPr>
+        <p:spPr>
+          <a:xfrm>
+            <a:off x="11484863" y="3986784"/>
+            <a:ext cx="310896" cy="310896"/>
+          </a:xfrm>
+          <a:prstGeom prst="ellipse">
+            <a:avLst/>
+          </a:prstGeom>
+          <a:solidFill>
+            <a:srgbClr val="FFA418"/>
+          </a:solidFill>
+          <a:ln>
+            <a:noFill/>
+          </a:ln>
+          <a:effectLst/>
+        </p:spPr>
+        <p:style>
+          <a:lnRef idx="1">
+            <a:schemeClr val="accent1"/>
+          </a:lnRef>
+          <a:fillRef idx="3">
+            <a:schemeClr val="accent1"/>
+          </a:fillRef>
+          <a:effectRef idx="2">
+            <a:schemeClr val="accent1"/>
+          </a:effectRef>
+          <a:fontRef idx="minor">
+            <a:schemeClr val="lt1"/>
+          </a:fontRef>
+        </p:style>
+        <p:txBody>
+          <a:bodyPr rtlCol="0" anchor="ctr" wrap="square" lIns="0" rIns="0" tIns="54864" bIns="54864"/>
+          <a:lstStyle/>
+          <a:p>
+            <a:pPr algn="ctr">
+              <a:spcAft>
+                <a:spcPts val="600"/>
+              </a:spcAft>
+            </a:pPr>
+            <a:r>
+              <a:rPr sz="1000" b="1">
+                <a:solidFill>
+                  <a:srgbClr val="0B3D7A"/>
+                </a:solidFill>
+              </a:rPr>
+              <a:t>8</a:t>
+            </a:r>
+          </a:p>
+        </p:txBody>
+      </p:sp>
+      <p:sp>
+        <p:nvSpPr>
+          <p:cNvPr id="47" name="Rounded Rectangle 46"/>
           <p:cNvSpPr/>
           <p:nvPr/>
         </p:nvSpPr>
@@ -12280,16 +15241,16 @@
       </p:sp>
       <p:sp>
         <p:nvSpPr>
-          <p:cNvPr id="25" name="Diamond 24"/>
+          <p:cNvPr id="48" name="Oval 47"/>
           <p:cNvSpPr/>
           <p:nvPr/>
         </p:nvSpPr>
         <p:spPr>
           <a:xfrm>
-            <a:off x="5943600" y="4023360"/>
-            <a:ext cx="2011680" cy="960120"/>
-          </a:xfrm>
-          <a:prstGeom prst="diamond">
+            <a:off x="8284463" y="3941064"/>
+            <a:ext cx="310896" cy="310896"/>
+          </a:xfrm>
+          <a:prstGeom prst="ellipse">
             <a:avLst/>
           </a:prstGeom>
           <a:solidFill>
@@ -12315,7 +15276,7 @@
           </a:fontRef>
         </p:style>
         <p:txBody>
-          <a:bodyPr rtlCol="0" anchor="ctr" wrap="square" lIns="18288" rIns="18288" tIns="54864" bIns="54864"/>
+          <a:bodyPr rtlCol="0" anchor="ctr" wrap="square" lIns="0" rIns="0" tIns="54864" bIns="54864"/>
           <a:lstStyle/>
           <a:p>
             <a:pPr algn="ctr">
@@ -12329,6 +15290,62 @@
                   <a:srgbClr val="0B3D7A"/>
                 </a:solidFill>
               </a:rPr>
+              <a:t>9</a:t>
+            </a:r>
+          </a:p>
+        </p:txBody>
+      </p:sp>
+      <p:sp>
+        <p:nvSpPr>
+          <p:cNvPr id="49" name="Diamond 48"/>
+          <p:cNvSpPr/>
+          <p:nvPr/>
+        </p:nvSpPr>
+        <p:spPr>
+          <a:xfrm>
+            <a:off x="5943600" y="4023360"/>
+            <a:ext cx="2011680" cy="960120"/>
+          </a:xfrm>
+          <a:prstGeom prst="diamond">
+            <a:avLst/>
+          </a:prstGeom>
+          <a:solidFill>
+            <a:srgbClr val="FFA418"/>
+          </a:solidFill>
+          <a:ln>
+            <a:noFill/>
+          </a:ln>
+          <a:effectLst/>
+        </p:spPr>
+        <p:style>
+          <a:lnRef idx="1">
+            <a:schemeClr val="accent1"/>
+          </a:lnRef>
+          <a:fillRef idx="3">
+            <a:schemeClr val="accent1"/>
+          </a:fillRef>
+          <a:effectRef idx="2">
+            <a:schemeClr val="accent1"/>
+          </a:effectRef>
+          <a:fontRef idx="minor">
+            <a:schemeClr val="lt1"/>
+          </a:fontRef>
+        </p:style>
+        <p:txBody>
+          <a:bodyPr rtlCol="0" anchor="ctr" wrap="square" lIns="18288" rIns="18288" tIns="54864" bIns="54864"/>
+          <a:lstStyle/>
+          <a:p>
+            <a:pPr algn="ctr">
+              <a:spcAft>
+                <a:spcPts val="600"/>
+              </a:spcAft>
+            </a:pPr>
+            <a:r>
+              <a:rPr sz="1000" b="1">
+                <a:solidFill>
+                  <a:srgbClr val="0B3D7A"/>
+                </a:solidFill>
+              </a:rPr>
               <a:t>validated again?</a:t>
             </a:r>
           </a:p>
@@ -12336,18 +15353,74 @@
       </p:sp>
       <p:sp>
         <p:nvSpPr>
-          <p:cNvPr id="26" name="Rounded Rectangle 25"/>
+          <p:cNvPr id="50" name="Oval 49"/>
           <p:cNvSpPr/>
           <p:nvPr/>
         </p:nvSpPr>
         <p:spPr>
           <a:xfrm>
-            <a:off x="3063240" y="4069080"/>
-            <a:ext cx="2468880" cy="868680"/>
+            <a:off x="5815584" y="3895344"/>
+            <a:ext cx="310896" cy="310896"/>
+          </a:xfrm>
+          <a:prstGeom prst="ellipse">
+            <a:avLst/>
+          </a:prstGeom>
+          <a:solidFill>
+            <a:srgbClr val="FFA418"/>
+          </a:solidFill>
+          <a:ln>
+            <a:noFill/>
+          </a:ln>
+          <a:effectLst/>
+        </p:spPr>
+        <p:style>
+          <a:lnRef idx="1">
+            <a:schemeClr val="accent1"/>
+          </a:lnRef>
+          <a:fillRef idx="3">
+            <a:schemeClr val="accent1"/>
+          </a:fillRef>
+          <a:effectRef idx="2">
+            <a:schemeClr val="accent1"/>
+          </a:effectRef>
+          <a:fontRef idx="minor">
+            <a:schemeClr val="lt1"/>
+          </a:fontRef>
+        </p:style>
+        <p:txBody>
+          <a:bodyPr rtlCol="0" anchor="ctr" wrap="square" lIns="0" rIns="0" tIns="54864" bIns="54864"/>
+          <a:lstStyle/>
+          <a:p>
+            <a:pPr algn="ctr">
+              <a:spcAft>
+                <a:spcPts val="600"/>
+              </a:spcAft>
+            </a:pPr>
+            <a:r>
+              <a:rPr sz="1000" b="1">
+                <a:solidFill>
+                  <a:srgbClr val="0B3D7A"/>
+                </a:solidFill>
+              </a:rPr>
+              <a:t>10</a:t>
+            </a:r>
+          </a:p>
+        </p:txBody>
+      </p:sp>
+      <p:sp>
+        <p:nvSpPr>
+          <p:cNvPr id="51" name="Rounded Rectangle 50"/>
+          <p:cNvSpPr/>
+          <p:nvPr/>
+        </p:nvSpPr>
+        <p:spPr>
+          <a:xfrm>
+            <a:off x="6035040" y="3429000"/>
+            <a:ext cx="1828800" cy="411480"/>
           </a:xfrm>
           <a:prstGeom prst="roundRect">
             <a:avLst>
-              <a:gd name="adj" fmla="val 10000"/>
+              <a:gd name="adj" fmla="val 20000"/>
             </a:avLst>
           </a:prstGeom>
           <a:solidFill>
@@ -12373,6 +15446,64 @@
           </a:fontRef>
         </p:style>
         <p:txBody>
+          <a:bodyPr rtlCol="0" anchor="ctr" wrap="square" lIns="36576" rIns="36576" tIns="54864" bIns="54864"/>
+          <a:lstStyle/>
+          <a:p>
+            <a:pPr algn="ctr">
+              <a:spcAft>
+                <a:spcPts val="600"/>
+              </a:spcAft>
+            </a:pPr>
+            <a:r>
+              <a:rPr sz="900" b="1">
+                <a:solidFill>
+                  <a:srgbClr val="0B3D7A"/>
+                </a:solidFill>
+              </a:rPr>
+              <a:t>no: stop, fix, re-run</a:t>
+            </a:r>
+          </a:p>
+        </p:txBody>
+      </p:sp>
+      <p:sp>
+        <p:nvSpPr>
+          <p:cNvPr id="52" name="Rounded Rectangle 51"/>
+          <p:cNvSpPr/>
+          <p:nvPr/>
+        </p:nvSpPr>
+        <p:spPr>
+          <a:xfrm>
+            <a:off x="3063240" y="4069080"/>
+            <a:ext cx="2468880" cy="868680"/>
+          </a:xfrm>
+          <a:prstGeom prst="roundRect">
+            <a:avLst>
+              <a:gd name="adj" fmla="val 10000"/>
+            </a:avLst>
+          </a:prstGeom>
+          <a:solidFill>
+            <a:srgbClr val="F5EFE9"/>
+          </a:solidFill>
+          <a:ln>
+            <a:noFill/>
+          </a:ln>
+          <a:effectLst/>
+        </p:spPr>
+        <p:style>
+          <a:lnRef idx="1">
+            <a:schemeClr val="accent1"/>
+          </a:lnRef>
+          <a:fillRef idx="3">
+            <a:schemeClr val="accent1"/>
+          </a:fillRef>
+          <a:effectRef idx="2">
+            <a:schemeClr val="accent1"/>
+          </a:effectRef>
+          <a:fontRef idx="minor">
+            <a:schemeClr val="lt1"/>
+          </a:fontRef>
+        </p:style>
+        <p:txBody>
           <a:bodyPr rtlCol="0" anchor="ctr" wrap="square" lIns="109728" rIns="109728" tIns="54864" bIns="54864"/>
           <a:lstStyle/>
           <a:p>
@@ -12409,7 +15540,63 @@
       </p:sp>
       <p:sp>
         <p:nvSpPr>
-          <p:cNvPr id="27" name="Rounded Rectangle 26"/>
+          <p:cNvPr id="53" name="Oval 52"/>
+          <p:cNvSpPr/>
+          <p:nvPr/>
+        </p:nvSpPr>
+        <p:spPr>
+          <a:xfrm>
+            <a:off x="2935224" y="3941064"/>
+            <a:ext cx="310896" cy="310896"/>
+          </a:xfrm>
+          <a:prstGeom prst="ellipse">
+            <a:avLst/>
+          </a:prstGeom>
+          <a:solidFill>
+            <a:srgbClr val="FFA418"/>
+          </a:solidFill>
+          <a:ln>
+            <a:noFill/>
+          </a:ln>
+          <a:effectLst/>
+        </p:spPr>
+        <p:style>
+          <a:lnRef idx="1">
+            <a:schemeClr val="accent1"/>
+          </a:lnRef>
+          <a:fillRef idx="3">
+            <a:schemeClr val="accent1"/>
+          </a:fillRef>
+          <a:effectRef idx="2">
+            <a:schemeClr val="accent1"/>
+          </a:effectRef>
+          <a:fontRef idx="minor">
+            <a:schemeClr val="lt1"/>
+          </a:fontRef>
+        </p:style>
+        <p:txBody>
+          <a:bodyPr rtlCol="0" anchor="ctr" wrap="square" lIns="0" rIns="0" tIns="54864" bIns="54864"/>
+          <a:lstStyle/>
+          <a:p>
+            <a:pPr algn="ctr">
+              <a:spcAft>
+                <a:spcPts val="600"/>
+              </a:spcAft>
+            </a:pPr>
+            <a:r>
+              <a:rPr sz="1000" b="1">
+                <a:solidFill>
+                  <a:srgbClr val="0B3D7A"/>
+                </a:solidFill>
+              </a:rPr>
+              <a:t>11</a:t>
+            </a:r>
+          </a:p>
+        </p:txBody>
+      </p:sp>
+      <p:sp>
+        <p:nvSpPr>
+          <p:cNvPr id="54" name="Rounded Rectangle 53"/>
           <p:cNvSpPr/>
           <p:nvPr/>
         </p:nvSpPr>
@@ -12482,14 +15669,70 @@
       </p:sp>
       <p:sp>
         <p:nvSpPr>
-          <p:cNvPr id="28" name="TextBox 27"/>
+          <p:cNvPr id="55" name="Oval 54"/>
+          <p:cNvSpPr/>
+          <p:nvPr/>
+        </p:nvSpPr>
+        <p:spPr>
+          <a:xfrm>
+            <a:off x="612648" y="3941064"/>
+            <a:ext cx="310896" cy="310896"/>
+          </a:xfrm>
+          <a:prstGeom prst="ellipse">
+            <a:avLst/>
+          </a:prstGeom>
+          <a:solidFill>
+            <a:srgbClr val="FFA418"/>
+          </a:solidFill>
+          <a:ln>
+            <a:noFill/>
+          </a:ln>
+          <a:effectLst/>
+        </p:spPr>
+        <p:style>
+          <a:lnRef idx="1">
+            <a:schemeClr val="accent1"/>
+          </a:lnRef>
+          <a:fillRef idx="3">
+            <a:schemeClr val="accent1"/>
+          </a:fillRef>
+          <a:effectRef idx="2">
+            <a:schemeClr val="accent1"/>
+          </a:effectRef>
+          <a:fontRef idx="minor">
+            <a:schemeClr val="lt1"/>
+          </a:fontRef>
+        </p:style>
+        <p:txBody>
+          <a:bodyPr rtlCol="0" anchor="ctr" wrap="square" lIns="0" rIns="0" tIns="54864" bIns="54864"/>
+          <a:lstStyle/>
+          <a:p>
+            <a:pPr algn="ctr">
+              <a:spcAft>
+                <a:spcPts val="600"/>
+              </a:spcAft>
+            </a:pPr>
+            <a:r>
+              <a:rPr sz="1000" b="1">
+                <a:solidFill>
+                  <a:srgbClr val="0B3D7A"/>
+                </a:solidFill>
+              </a:rPr>
+              <a:t>12</a:t>
+            </a:r>
+          </a:p>
+        </p:txBody>
+      </p:sp>
+      <p:sp>
+        <p:nvSpPr>
+          <p:cNvPr id="56" name="TextBox 55"/>
           <p:cNvSpPr txBox="1"/>
           <p:nvPr/>
         </p:nvSpPr>
         <p:spPr>
           <a:xfrm>
-            <a:off x="868680" y="6327648"/>
-            <a:ext cx="2103120" cy="320040"/>
+            <a:off x="740664" y="5001768"/>
+            <a:ext cx="3474720" cy="548640"/>
           </a:xfrm>
           <a:prstGeom prst="rect">
             <a:avLst/>
@@ -12513,32 +15756,9 @@
                   <a:srgbClr val="F5EFE9"/>
                 </a:solidFill>
               </a:rPr>
-              <a:t>Finance tables</a:t>
-            </a:r>
-          </a:p>
-        </p:txBody>
-      </p:sp>
-      <p:sp>
-        <p:nvSpPr>
-          <p:cNvPr id="29" name="TextBox 28"/>
-          <p:cNvSpPr txBox="1"/>
-          <p:nvPr/>
-        </p:nvSpPr>
-        <p:spPr>
-          <a:xfrm>
-            <a:off x="3108960" y="6327648"/>
-            <a:ext cx="2103120" cy="320040"/>
-          </a:xfrm>
-          <a:prstGeom prst="rect">
-            <a:avLst/>
-          </a:prstGeom>
-          <a:noFill/>
-        </p:spPr>
-        <p:txBody>
-          <a:bodyPr wrap="square" anchor="t" lIns="0" rIns="0" tIns="54864" bIns="54864">
-            <a:spAutoFit/>
-          </a:bodyPr>
-          <a:lstStyle/>
+              <a:t>runs at (UTC), one job every 30 minutes</a:t>
+            </a:r>
+          </a:p>
           <a:p>
             <a:pPr algn="l">
               <a:spcAft>
@@ -12546,216 +15766,26 @@
               </a:spcAft>
             </a:pPr>
             <a:r>
-              <a:rPr sz="1200" b="1">
+              <a:rPr sz="1100" b="0">
                 <a:solidFill>
                   <a:srgbClr val="F5EFE9"/>
                 </a:solidFill>
               </a:rPr>
-              <a:t>Billing and Rates tables</a:t>
-            </a:r>
-          </a:p>
-        </p:txBody>
-      </p:sp>
-      <p:sp>
-        <p:nvSpPr>
-          <p:cNvPr id="30" name="TextBox 29"/>
-          <p:cNvSpPr txBox="1"/>
-          <p:nvPr/>
-        </p:nvSpPr>
-        <p:spPr>
-          <a:xfrm>
-            <a:off x="5349240" y="6327648"/>
-            <a:ext cx="2103120" cy="320040"/>
-          </a:xfrm>
-          <a:prstGeom prst="rect">
-            <a:avLst/>
-          </a:prstGeom>
-          <a:noFill/>
-        </p:spPr>
-        <p:txBody>
-          <a:bodyPr wrap="square" anchor="t" lIns="0" rIns="0" tIns="54864" bIns="54864">
-            <a:spAutoFit/>
-          </a:bodyPr>
-          <a:lstStyle/>
-          <a:p>
-            <a:pPr algn="l">
-              <a:spcAft>
-                <a:spcPts val="600"/>
-              </a:spcAft>
-            </a:pPr>
-            <a:r>
-              <a:rPr sz="1200" b="1">
-                <a:solidFill>
-                  <a:srgbClr val="F5EFE9"/>
-                </a:solidFill>
-              </a:rPr>
-              <a:t>Meter Operations tables</a:t>
-            </a:r>
-          </a:p>
-        </p:txBody>
-      </p:sp>
-      <p:sp>
-        <p:nvSpPr>
-          <p:cNvPr id="31" name="TextBox 30"/>
-          <p:cNvSpPr txBox="1"/>
-          <p:nvPr/>
-        </p:nvSpPr>
-        <p:spPr>
-          <a:xfrm>
-            <a:off x="7863840" y="6327648"/>
-            <a:ext cx="2377440" cy="320040"/>
-          </a:xfrm>
-          <a:prstGeom prst="rect">
-            <a:avLst/>
-          </a:prstGeom>
-          <a:noFill/>
-        </p:spPr>
-        <p:txBody>
-          <a:bodyPr wrap="square" anchor="t" lIns="0" rIns="0" tIns="54864" bIns="54864">
-            <a:spAutoFit/>
-          </a:bodyPr>
-          <a:lstStyle/>
-          <a:p>
-            <a:pPr algn="l">
-              <a:spcAft>
-                <a:spcPts val="600"/>
-              </a:spcAft>
-            </a:pPr>
-            <a:r>
-              <a:rPr sz="1200" b="1">
-                <a:solidFill>
-                  <a:srgbClr val="F5EFE9"/>
-                </a:solidFill>
-              </a:rPr>
-              <a:t>Debt Management table + seed</a:t>
-            </a:r>
-          </a:p>
-        </p:txBody>
-      </p:sp>
-      <p:sp>
-        <p:nvSpPr>
-          <p:cNvPr id="32" name="TextBox 31"/>
-          <p:cNvSpPr txBox="1"/>
-          <p:nvPr/>
-        </p:nvSpPr>
-        <p:spPr>
-          <a:xfrm>
-            <a:off x="10515600" y="6327648"/>
-            <a:ext cx="2971800" cy="320040"/>
-          </a:xfrm>
-          <a:prstGeom prst="rect">
-            <a:avLst/>
-          </a:prstGeom>
-          <a:noFill/>
-        </p:spPr>
-        <p:txBody>
-          <a:bodyPr wrap="square" anchor="t" lIns="0" rIns="0" tIns="54864" bIns="54864">
-            <a:spAutoFit/>
-          </a:bodyPr>
-          <a:lstStyle/>
-          <a:p>
-            <a:pPr algn="l">
-              <a:spcAft>
-                <a:spcPts val="600"/>
-              </a:spcAft>
-            </a:pPr>
-            <a:r>
-              <a:rPr sz="1200" b="1">
-                <a:solidFill>
-                  <a:srgbClr val="F5EFE9"/>
-                </a:solidFill>
-              </a:rPr>
-              <a:t>Meter Operations views</a:t>
-            </a:r>
-          </a:p>
-        </p:txBody>
-      </p:sp>
-      <p:sp>
-        <p:nvSpPr>
-          <p:cNvPr id="33" name="TextBox 32"/>
-          <p:cNvSpPr txBox="1"/>
-          <p:nvPr/>
-        </p:nvSpPr>
-        <p:spPr>
-          <a:xfrm>
-            <a:off x="13716000" y="6327648"/>
-            <a:ext cx="3063240" cy="320040"/>
-          </a:xfrm>
-          <a:prstGeom prst="rect">
-            <a:avLst/>
-          </a:prstGeom>
-          <a:noFill/>
-        </p:spPr>
-        <p:txBody>
-          <a:bodyPr wrap="square" anchor="t" lIns="0" rIns="0" tIns="54864" bIns="54864">
-            <a:spAutoFit/>
-          </a:bodyPr>
-          <a:lstStyle/>
-          <a:p>
-            <a:pPr algn="l">
-              <a:spcAft>
-                <a:spcPts val="600"/>
-              </a:spcAft>
-            </a:pPr>
-            <a:r>
-              <a:rPr sz="1200" b="1">
-                <a:solidFill>
-                  <a:srgbClr val="F5EFE9"/>
-                </a:solidFill>
-              </a:rPr>
-              <a:t>Field Operations views</a:t>
-            </a:r>
-          </a:p>
-        </p:txBody>
-      </p:sp>
-      <p:sp>
-        <p:nvSpPr>
-          <p:cNvPr id="34" name="TextBox 33"/>
-          <p:cNvSpPr txBox="1"/>
-          <p:nvPr/>
-        </p:nvSpPr>
-        <p:spPr>
-          <a:xfrm>
-            <a:off x="17007840" y="6327648"/>
-            <a:ext cx="2194560" cy="320040"/>
-          </a:xfrm>
-          <a:prstGeom prst="rect">
-            <a:avLst/>
-          </a:prstGeom>
-          <a:noFill/>
-        </p:spPr>
-        <p:txBody>
-          <a:bodyPr wrap="square" anchor="t" lIns="0" rIns="0" tIns="54864" bIns="54864">
-            <a:spAutoFit/>
-          </a:bodyPr>
-          <a:lstStyle/>
-          <a:p>
-            <a:pPr algn="l">
-              <a:spcAft>
-                <a:spcPts val="600"/>
-              </a:spcAft>
-            </a:pPr>
-            <a:r>
-              <a:rPr sz="1200" b="1">
-                <a:solidFill>
-                  <a:srgbClr val="F5EFE9"/>
-                </a:solidFill>
-              </a:rPr>
-              <a:t>Customer Operations views</a:t>
-            </a:r>
-          </a:p>
-        </p:txBody>
-      </p:sp>
-      <p:sp>
-        <p:nvSpPr>
-          <p:cNvPr id="35" name="Rounded Rectangle 34"/>
+              <a:t>10:00 to 13:30, then again 16:00 to 19:30</a:t>
+            </a:r>
+          </a:p>
+        </p:txBody>
+      </p:sp>
+      <p:sp>
+        <p:nvSpPr>
+          <p:cNvPr id="57" name="Rounded Rectangle 56"/>
           <p:cNvSpPr/>
           <p:nvPr/>
         </p:nvSpPr>
         <p:spPr>
           <a:xfrm>
-            <a:off x="868680" y="6675120"/>
-            <a:ext cx="2103120" cy="822960"/>
+            <a:off x="960120" y="6766560"/>
+            <a:ext cx="1920240" cy="777240"/>
           </a:xfrm>
           <a:prstGeom prst="roundRect">
             <a:avLst>
@@ -12821,14 +15851,14 @@
       </p:sp>
       <p:sp>
         <p:nvSpPr>
-          <p:cNvPr id="36" name="Rounded Rectangle 35"/>
+          <p:cNvPr id="58" name="Rounded Rectangle 57"/>
           <p:cNvSpPr/>
           <p:nvPr/>
         </p:nvSpPr>
         <p:spPr>
           <a:xfrm>
-            <a:off x="868680" y="7635240"/>
-            <a:ext cx="2103120" cy="822960"/>
+            <a:off x="960120" y="7680960"/>
+            <a:ext cx="1920240" cy="777240"/>
           </a:xfrm>
           <a:prstGeom prst="roundRect">
             <a:avLst>
@@ -12867,7 +15897,7 @@
               </a:spcAft>
             </a:pPr>
             <a:r>
-              <a:rPr sz="950" b="1">
+              <a:rPr sz="900" b="1">
                 <a:solidFill>
                   <a:srgbClr val="0B3D7A"/>
                 </a:solidFill>
@@ -12894,14 +15924,14 @@
       </p:sp>
       <p:sp>
         <p:nvSpPr>
-          <p:cNvPr id="37" name="Rounded Rectangle 36"/>
+          <p:cNvPr id="59" name="Rounded Rectangle 58"/>
           <p:cNvSpPr/>
           <p:nvPr/>
         </p:nvSpPr>
         <p:spPr>
           <a:xfrm>
-            <a:off x="3108960" y="6675120"/>
-            <a:ext cx="2103120" cy="822960"/>
+            <a:off x="3200400" y="6766560"/>
+            <a:ext cx="1920240" cy="777240"/>
           </a:xfrm>
           <a:prstGeom prst="roundRect">
             <a:avLst>
@@ -12940,7 +15970,7 @@
               </a:spcAft>
             </a:pPr>
             <a:r>
-              <a:rPr sz="950" b="1">
+              <a:rPr sz="900" b="1">
                 <a:solidFill>
                   <a:srgbClr val="0B3D7A"/>
                 </a:solidFill>
@@ -12967,14 +15997,14 @@
       </p:sp>
       <p:sp>
         <p:nvSpPr>
-          <p:cNvPr id="38" name="Rounded Rectangle 37"/>
+          <p:cNvPr id="60" name="Rounded Rectangle 59"/>
           <p:cNvSpPr/>
           <p:nvPr/>
         </p:nvSpPr>
         <p:spPr>
           <a:xfrm>
-            <a:off x="3108960" y="7635240"/>
-            <a:ext cx="2103120" cy="822960"/>
+            <a:off x="3200400" y="7680960"/>
+            <a:ext cx="1920240" cy="777240"/>
           </a:xfrm>
           <a:prstGeom prst="roundRect">
             <a:avLst>
@@ -13013,7 +16043,7 @@
               </a:spcAft>
             </a:pPr>
             <a:r>
-              <a:rPr sz="950" b="1">
+              <a:rPr sz="900" b="1">
                 <a:solidFill>
                   <a:srgbClr val="0B3D7A"/>
                 </a:solidFill>
@@ -13040,14 +16070,14 @@
       </p:sp>
       <p:sp>
         <p:nvSpPr>
-          <p:cNvPr id="39" name="Rounded Rectangle 38"/>
+          <p:cNvPr id="61" name="Rounded Rectangle 60"/>
           <p:cNvSpPr/>
           <p:nvPr/>
         </p:nvSpPr>
         <p:spPr>
           <a:xfrm>
-            <a:off x="5349240" y="6675120"/>
-            <a:ext cx="2103120" cy="594360"/>
+            <a:off x="5440680" y="6766560"/>
+            <a:ext cx="1920240" cy="566928"/>
           </a:xfrm>
           <a:prstGeom prst="roundRect">
             <a:avLst>
@@ -13086,7 +16116,7 @@
               </a:spcAft>
             </a:pPr>
             <a:r>
-              <a:rPr sz="950" b="1">
+              <a:rPr sz="900" b="1">
                 <a:solidFill>
                   <a:srgbClr val="0B3D7A"/>
                 </a:solidFill>
@@ -13113,14 +16143,14 @@
       </p:sp>
       <p:sp>
         <p:nvSpPr>
-          <p:cNvPr id="40" name="Rounded Rectangle 39"/>
+          <p:cNvPr id="62" name="Rounded Rectangle 61"/>
           <p:cNvSpPr/>
           <p:nvPr/>
         </p:nvSpPr>
         <p:spPr>
           <a:xfrm>
-            <a:off x="5349240" y="7360920"/>
-            <a:ext cx="2103120" cy="594360"/>
+            <a:off x="5440680" y="7424927"/>
+            <a:ext cx="1920240" cy="566928"/>
           </a:xfrm>
           <a:prstGeom prst="roundRect">
             <a:avLst>
@@ -13159,7 +16189,7 @@
               </a:spcAft>
             </a:pPr>
             <a:r>
-              <a:rPr sz="950" b="1">
+              <a:rPr sz="900" b="1">
                 <a:solidFill>
                   <a:srgbClr val="0B3D7A"/>
                 </a:solidFill>
@@ -13186,14 +16216,14 @@
       </p:sp>
       <p:sp>
         <p:nvSpPr>
-          <p:cNvPr id="41" name="Rounded Rectangle 40"/>
+          <p:cNvPr id="63" name="Rounded Rectangle 62"/>
           <p:cNvSpPr/>
           <p:nvPr/>
         </p:nvSpPr>
         <p:spPr>
           <a:xfrm>
-            <a:off x="5349240" y="8046720"/>
-            <a:ext cx="2103120" cy="594360"/>
+            <a:off x="5440680" y="8083296"/>
+            <a:ext cx="1920240" cy="566928"/>
           </a:xfrm>
           <a:prstGeom prst="roundRect">
             <a:avLst>
@@ -13232,7 +16262,7 @@
               </a:spcAft>
             </a:pPr>
             <a:r>
-              <a:rPr sz="900" b="1">
+              <a:rPr sz="850" b="1">
                 <a:solidFill>
                   <a:srgbClr val="0B3D7A"/>
                 </a:solidFill>
@@ -13259,7 +16289,7 @@
       </p:sp>
       <p:sp>
         <p:nvSpPr>
-          <p:cNvPr id="42" name="Rounded Rectangle 41"/>
+          <p:cNvPr id="64" name="Rounded Rectangle 63"/>
           <p:cNvSpPr/>
           <p:nvPr/>
         </p:nvSpPr>
@@ -13317,7 +16347,7 @@
       </p:sp>
       <p:sp>
         <p:nvSpPr>
-          <p:cNvPr id="43" name="Rounded Rectangle 42"/>
+          <p:cNvPr id="65" name="Rounded Rectangle 64"/>
           <p:cNvSpPr/>
           <p:nvPr/>
         </p:nvSpPr>
@@ -13375,7 +16405,7 @@
       </p:sp>
       <p:sp>
         <p:nvSpPr>
-          <p:cNvPr id="44" name="Rounded Rectangle 43"/>
+          <p:cNvPr id="66" name="Rounded Rectangle 65"/>
           <p:cNvSpPr/>
           <p:nvPr/>
         </p:nvSpPr>
@@ -13433,14 +16463,14 @@
       </p:sp>
       <p:sp>
         <p:nvSpPr>
-          <p:cNvPr id="45" name="Rounded Rectangle 44"/>
+          <p:cNvPr id="67" name="Rounded Rectangle 66"/>
           <p:cNvSpPr/>
           <p:nvPr/>
         </p:nvSpPr>
         <p:spPr>
           <a:xfrm>
-            <a:off x="7863840" y="6675120"/>
-            <a:ext cx="2377440" cy="868680"/>
+            <a:off x="7955279" y="6766560"/>
+            <a:ext cx="2194560" cy="822960"/>
           </a:xfrm>
           <a:prstGeom prst="roundRect">
             <a:avLst>
@@ -13506,14 +16536,14 @@
       </p:sp>
       <p:sp>
         <p:nvSpPr>
-          <p:cNvPr id="46" name="Rounded Rectangle 45"/>
+          <p:cNvPr id="68" name="Rounded Rectangle 67"/>
           <p:cNvSpPr/>
           <p:nvPr/>
         </p:nvSpPr>
         <p:spPr>
           <a:xfrm>
-            <a:off x="7863840" y="7726679"/>
-            <a:ext cx="2377440" cy="640080"/>
+            <a:off x="7955279" y="7726679"/>
+            <a:ext cx="2194560" cy="640080"/>
           </a:xfrm>
           <a:prstGeom prst="roundRect">
             <a:avLst>
@@ -13579,7 +16609,7 @@
       </p:sp>
       <p:sp>
         <p:nvSpPr>
-          <p:cNvPr id="47" name="Rounded Rectangle 46"/>
+          <p:cNvPr id="69" name="Rounded Rectangle 68"/>
           <p:cNvSpPr/>
           <p:nvPr/>
         </p:nvSpPr>
@@ -13637,14 +16667,14 @@
       </p:sp>
       <p:sp>
         <p:nvSpPr>
-          <p:cNvPr id="48" name="Rounded Rectangle 47"/>
+          <p:cNvPr id="70" name="Rounded Rectangle 69"/>
           <p:cNvSpPr/>
           <p:nvPr/>
         </p:nvSpPr>
         <p:spPr>
           <a:xfrm>
-            <a:off x="10515600" y="6675120"/>
-            <a:ext cx="2971800" cy="457200"/>
+            <a:off x="10607040" y="6766560"/>
+            <a:ext cx="2788920" cy="457200"/>
           </a:xfrm>
           <a:prstGeom prst="roundRect">
             <a:avLst>
@@ -13695,14 +16725,14 @@
       </p:sp>
       <p:sp>
         <p:nvSpPr>
-          <p:cNvPr id="49" name="Rounded Rectangle 48"/>
+          <p:cNvPr id="71" name="Rounded Rectangle 70"/>
           <p:cNvSpPr/>
           <p:nvPr/>
         </p:nvSpPr>
         <p:spPr>
           <a:xfrm>
-            <a:off x="10515600" y="7223760"/>
-            <a:ext cx="2971800" cy="457200"/>
+            <a:off x="10607040" y="7315200"/>
+            <a:ext cx="2788920" cy="457200"/>
           </a:xfrm>
           <a:prstGeom prst="roundRect">
             <a:avLst>
@@ -13753,14 +16783,14 @@
       </p:sp>
       <p:sp>
         <p:nvSpPr>
-          <p:cNvPr id="50" name="Rounded Rectangle 49"/>
+          <p:cNvPr id="72" name="Rounded Rectangle 71"/>
           <p:cNvSpPr/>
           <p:nvPr/>
         </p:nvSpPr>
         <p:spPr>
           <a:xfrm>
-            <a:off x="10515600" y="7772400"/>
-            <a:ext cx="2971800" cy="457200"/>
+            <a:off x="10607040" y="7863840"/>
+            <a:ext cx="2788920" cy="457200"/>
           </a:xfrm>
           <a:prstGeom prst="roundRect">
             <a:avLst>
@@ -13811,7 +16841,7 @@
       </p:sp>
       <p:sp>
         <p:nvSpPr>
-          <p:cNvPr id="51" name="Rounded Rectangle 50"/>
+          <p:cNvPr id="73" name="Rounded Rectangle 72"/>
           <p:cNvSpPr/>
           <p:nvPr/>
         </p:nvSpPr>
@@ -13869,7 +16899,7 @@
       </p:sp>
       <p:sp>
         <p:nvSpPr>
-          <p:cNvPr id="52" name="Rounded Rectangle 51"/>
+          <p:cNvPr id="74" name="Rounded Rectangle 73"/>
           <p:cNvSpPr/>
           <p:nvPr/>
         </p:nvSpPr>
@@ -13927,14 +16957,14 @@
       </p:sp>
       <p:sp>
         <p:nvSpPr>
-          <p:cNvPr id="53" name="Rounded Rectangle 52"/>
+          <p:cNvPr id="75" name="Rounded Rectangle 74"/>
           <p:cNvSpPr/>
           <p:nvPr/>
         </p:nvSpPr>
         <p:spPr>
           <a:xfrm>
-            <a:off x="13716000" y="6675120"/>
-            <a:ext cx="3063240" cy="457200"/>
+            <a:off x="13807440" y="6766560"/>
+            <a:ext cx="2880360" cy="457200"/>
           </a:xfrm>
           <a:prstGeom prst="roundRect">
             <a:avLst>
@@ -13985,14 +17015,14 @@
       </p:sp>
       <p:sp>
         <p:nvSpPr>
-          <p:cNvPr id="54" name="Rounded Rectangle 53"/>
+          <p:cNvPr id="76" name="Rounded Rectangle 75"/>
           <p:cNvSpPr/>
           <p:nvPr/>
         </p:nvSpPr>
         <p:spPr>
           <a:xfrm>
-            <a:off x="13716000" y="7223760"/>
-            <a:ext cx="3063240" cy="457200"/>
+            <a:off x="13807440" y="7315200"/>
+            <a:ext cx="2880360" cy="457200"/>
           </a:xfrm>
           <a:prstGeom prst="roundRect">
             <a:avLst>
@@ -14043,14 +17073,14 @@
       </p:sp>
       <p:sp>
         <p:nvSpPr>
-          <p:cNvPr id="55" name="Rounded Rectangle 54"/>
+          <p:cNvPr id="77" name="Rounded Rectangle 76"/>
           <p:cNvSpPr/>
           <p:nvPr/>
         </p:nvSpPr>
         <p:spPr>
           <a:xfrm>
-            <a:off x="13716000" y="7772400"/>
-            <a:ext cx="3063240" cy="457200"/>
+            <a:off x="13807440" y="7863840"/>
+            <a:ext cx="2880360" cy="457200"/>
           </a:xfrm>
           <a:prstGeom prst="roundRect">
             <a:avLst>
@@ -14101,7 +17131,7 @@
       </p:sp>
       <p:sp>
         <p:nvSpPr>
-          <p:cNvPr id="56" name="Rounded Rectangle 55"/>
+          <p:cNvPr id="78" name="Rounded Rectangle 77"/>
           <p:cNvSpPr/>
           <p:nvPr/>
         </p:nvSpPr>
@@ -14159,7 +17189,7 @@
       </p:sp>
       <p:sp>
         <p:nvSpPr>
-          <p:cNvPr id="57" name="Rounded Rectangle 56"/>
+          <p:cNvPr id="79" name="Rounded Rectangle 78"/>
           <p:cNvSpPr/>
           <p:nvPr/>
         </p:nvSpPr>
@@ -14217,14 +17247,14 @@
       </p:sp>
       <p:sp>
         <p:nvSpPr>
-          <p:cNvPr id="58" name="Rounded Rectangle 57"/>
+          <p:cNvPr id="80" name="Rounded Rectangle 79"/>
           <p:cNvSpPr/>
           <p:nvPr/>
         </p:nvSpPr>
         <p:spPr>
           <a:xfrm>
-            <a:off x="17007840" y="6675120"/>
-            <a:ext cx="2194560" cy="457200"/>
+            <a:off x="17099280" y="6766560"/>
+            <a:ext cx="2011680" cy="457200"/>
           </a:xfrm>
           <a:prstGeom prst="roundRect">
             <a:avLst>
@@ -14275,14 +17305,14 @@
       </p:sp>
       <p:sp>
         <p:nvSpPr>
-          <p:cNvPr id="59" name="Rounded Rectangle 58"/>
+          <p:cNvPr id="81" name="Rounded Rectangle 80"/>
           <p:cNvSpPr/>
           <p:nvPr/>
         </p:nvSpPr>
         <p:spPr>
           <a:xfrm>
-            <a:off x="17007840" y="7223760"/>
-            <a:ext cx="2194560" cy="457200"/>
+            <a:off x="17099280" y="7315200"/>
+            <a:ext cx="2011680" cy="457200"/>
           </a:xfrm>
           <a:prstGeom prst="roundRect">
             <a:avLst>
@@ -14333,7 +17363,7 @@
       </p:sp>
       <p:sp>
         <p:nvSpPr>
-          <p:cNvPr id="60" name="Rounded Rectangle 59"/>
+          <p:cNvPr id="82" name="Rounded Rectangle 81"/>
           <p:cNvSpPr/>
           <p:nvPr/>
         </p:nvSpPr>
@@ -14391,7 +17421,7 @@
       </p:sp>
       <p:cxnSp>
         <p:nvCxnSpPr>
-          <p:cNvPr id="61" name="Connector 60"/>
+          <p:cNvPr id="83" name="Connector 82"/>
           <p:cNvCxnSpPr/>
           <p:nvPr/>
         </p:nvCxnSpPr>
@@ -14408,794 +17438,6 @@
               <a:srgbClr val="F5EFE9"/>
             </a:solidFill>
             <a:tailEnd type="triangle" w="med" len="med"/>
-          </a:ln>
-        </p:spPr>
-        <p:style>
-          <a:lnRef idx="2">
-            <a:schemeClr val="accent1"/>
-          </a:lnRef>
-          <a:fillRef idx="0">
-            <a:schemeClr val="accent1"/>
-          </a:fillRef>
-          <a:effectRef idx="1">
-            <a:schemeClr val="accent1"/>
-          </a:effectRef>
-          <a:fontRef idx="minor">
-            <a:schemeClr val="tx1"/>
-          </a:fontRef>
-        </p:style>
-      </p:cxnSp>
-      <p:cxnSp>
-        <p:nvCxnSpPr>
-          <p:cNvPr id="62" name="Connector 61"/>
-          <p:cNvCxnSpPr/>
-          <p:nvPr/>
-        </p:nvCxnSpPr>
-        <p:spPr>
-          <a:xfrm>
-            <a:off x="5952744" y="2743200"/>
-            <a:ext cx="274320" cy="0"/>
-          </a:xfrm>
-          <a:prstGeom prst="line">
-            <a:avLst/>
-          </a:prstGeom>
-          <a:ln w="28575">
-            <a:solidFill>
-              <a:srgbClr val="F5EFE9"/>
-            </a:solidFill>
-            <a:tailEnd type="triangle" w="med" len="med"/>
-          </a:ln>
-        </p:spPr>
-        <p:style>
-          <a:lnRef idx="2">
-            <a:schemeClr val="accent1"/>
-          </a:lnRef>
-          <a:fillRef idx="0">
-            <a:schemeClr val="accent1"/>
-          </a:fillRef>
-          <a:effectRef idx="1">
-            <a:schemeClr val="accent1"/>
-          </a:effectRef>
-          <a:fontRef idx="minor">
-            <a:schemeClr val="tx1"/>
-          </a:fontRef>
-        </p:style>
-      </p:cxnSp>
-      <p:cxnSp>
-        <p:nvCxnSpPr>
-          <p:cNvPr id="63" name="Connector 62"/>
-          <p:cNvCxnSpPr/>
-          <p:nvPr/>
-        </p:nvCxnSpPr>
-        <p:spPr>
-          <a:xfrm>
-            <a:off x="9061704" y="2743200"/>
-            <a:ext cx="274320" cy="0"/>
-          </a:xfrm>
-          <a:prstGeom prst="line">
-            <a:avLst/>
-          </a:prstGeom>
-          <a:ln w="28575">
-            <a:solidFill>
-              <a:srgbClr val="F5EFE9"/>
-            </a:solidFill>
-            <a:tailEnd type="triangle" w="med" len="med"/>
-          </a:ln>
-        </p:spPr>
-        <p:style>
-          <a:lnRef idx="2">
-            <a:schemeClr val="accent1"/>
-          </a:lnRef>
-          <a:fillRef idx="0">
-            <a:schemeClr val="accent1"/>
-          </a:fillRef>
-          <a:effectRef idx="1">
-            <a:schemeClr val="accent1"/>
-          </a:effectRef>
-          <a:fontRef idx="minor">
-            <a:schemeClr val="tx1"/>
-          </a:fontRef>
-        </p:style>
-      </p:cxnSp>
-      <p:cxnSp>
-        <p:nvCxnSpPr>
-          <p:cNvPr id="64" name="Connector 63"/>
-          <p:cNvCxnSpPr/>
-          <p:nvPr/>
-        </p:nvCxnSpPr>
-        <p:spPr>
-          <a:xfrm flipV="1">
-            <a:off x="11987784" y="2720339"/>
-            <a:ext cx="274320" cy="22861"/>
-          </a:xfrm>
-          <a:prstGeom prst="line">
-            <a:avLst/>
-          </a:prstGeom>
-          <a:ln w="28575">
-            <a:solidFill>
-              <a:srgbClr val="F5EFE9"/>
-            </a:solidFill>
-            <a:tailEnd type="triangle" w="med" len="med"/>
-          </a:ln>
-        </p:spPr>
-        <p:style>
-          <a:lnRef idx="2">
-            <a:schemeClr val="accent1"/>
-          </a:lnRef>
-          <a:fillRef idx="0">
-            <a:schemeClr val="accent1"/>
-          </a:fillRef>
-          <a:effectRef idx="1">
-            <a:schemeClr val="accent1"/>
-          </a:effectRef>
-          <a:fontRef idx="minor">
-            <a:schemeClr val="tx1"/>
-          </a:fontRef>
-        </p:style>
-      </p:cxnSp>
-      <p:cxnSp>
-        <p:nvCxnSpPr>
-          <p:cNvPr id="65" name="Connector 64"/>
-          <p:cNvCxnSpPr/>
-          <p:nvPr/>
-        </p:nvCxnSpPr>
-        <p:spPr>
-          <a:xfrm>
-            <a:off x="15828263" y="3474720"/>
-            <a:ext cx="0" cy="274319"/>
-          </a:xfrm>
-          <a:prstGeom prst="line">
-            <a:avLst/>
-          </a:prstGeom>
-          <a:ln w="28575">
-            <a:solidFill>
-              <a:srgbClr val="F5EFE9"/>
-            </a:solidFill>
-          </a:ln>
-        </p:spPr>
-        <p:style>
-          <a:lnRef idx="2">
-            <a:schemeClr val="accent1"/>
-          </a:lnRef>
-          <a:fillRef idx="0">
-            <a:schemeClr val="accent1"/>
-          </a:fillRef>
-          <a:effectRef idx="1">
-            <a:schemeClr val="accent1"/>
-          </a:effectRef>
-          <a:fontRef idx="minor">
-            <a:schemeClr val="tx1"/>
-          </a:fontRef>
-        </p:style>
-      </p:cxnSp>
-      <p:cxnSp>
-        <p:nvCxnSpPr>
-          <p:cNvPr id="66" name="Connector 65"/>
-          <p:cNvCxnSpPr/>
-          <p:nvPr/>
-        </p:nvCxnSpPr>
-        <p:spPr>
-          <a:xfrm>
-            <a:off x="15828263" y="3749039"/>
-            <a:ext cx="2322577" cy="0"/>
-          </a:xfrm>
-          <a:prstGeom prst="line">
-            <a:avLst/>
-          </a:prstGeom>
-          <a:ln w="28575">
-            <a:solidFill>
-              <a:srgbClr val="F5EFE9"/>
-            </a:solidFill>
-          </a:ln>
-        </p:spPr>
-        <p:style>
-          <a:lnRef idx="2">
-            <a:schemeClr val="accent1"/>
-          </a:lnRef>
-          <a:fillRef idx="0">
-            <a:schemeClr val="accent1"/>
-          </a:fillRef>
-          <a:effectRef idx="1">
-            <a:schemeClr val="accent1"/>
-          </a:effectRef>
-          <a:fontRef idx="minor">
-            <a:schemeClr val="tx1"/>
-          </a:fontRef>
-        </p:style>
-      </p:cxnSp>
-      <p:cxnSp>
-        <p:nvCxnSpPr>
-          <p:cNvPr id="67" name="Connector 66"/>
-          <p:cNvCxnSpPr/>
-          <p:nvPr/>
-        </p:nvCxnSpPr>
-        <p:spPr>
-          <a:xfrm flipH="1">
-            <a:off x="18150839" y="3749039"/>
-            <a:ext cx="1" cy="274321"/>
-          </a:xfrm>
-          <a:prstGeom prst="line">
-            <a:avLst/>
-          </a:prstGeom>
-          <a:ln w="28575">
-            <a:solidFill>
-              <a:srgbClr val="F5EFE9"/>
-            </a:solidFill>
-            <a:tailEnd type="triangle" w="med" len="med"/>
-          </a:ln>
-        </p:spPr>
-        <p:style>
-          <a:lnRef idx="2">
-            <a:schemeClr val="accent1"/>
-          </a:lnRef>
-          <a:fillRef idx="0">
-            <a:schemeClr val="accent1"/>
-          </a:fillRef>
-          <a:effectRef idx="1">
-            <a:schemeClr val="accent1"/>
-          </a:effectRef>
-          <a:fontRef idx="minor">
-            <a:schemeClr val="tx1"/>
-          </a:fontRef>
-        </p:style>
-      </p:cxnSp>
-      <p:cxnSp>
-        <p:nvCxnSpPr>
-          <p:cNvPr id="68" name="Connector 67"/>
-          <p:cNvCxnSpPr/>
-          <p:nvPr/>
-        </p:nvCxnSpPr>
-        <p:spPr>
-          <a:xfrm flipH="1">
-            <a:off x="16642080" y="4503420"/>
-            <a:ext cx="457200" cy="0"/>
-          </a:xfrm>
-          <a:prstGeom prst="line">
-            <a:avLst/>
-          </a:prstGeom>
-          <a:ln w="28575">
-            <a:solidFill>
-              <a:srgbClr val="F5EFE9"/>
-            </a:solidFill>
-            <a:tailEnd type="triangle" w="med" len="med"/>
-          </a:ln>
-        </p:spPr>
-        <p:style>
-          <a:lnRef idx="2">
-            <a:schemeClr val="accent1"/>
-          </a:lnRef>
-          <a:fillRef idx="0">
-            <a:schemeClr val="accent1"/>
-          </a:fillRef>
-          <a:effectRef idx="1">
-            <a:schemeClr val="accent1"/>
-          </a:effectRef>
-          <a:fontRef idx="minor">
-            <a:schemeClr val="tx1"/>
-          </a:fontRef>
-        </p:style>
-      </p:cxnSp>
-      <p:cxnSp>
-        <p:nvCxnSpPr>
-          <p:cNvPr id="69" name="Connector 68"/>
-          <p:cNvCxnSpPr/>
-          <p:nvPr/>
-        </p:nvCxnSpPr>
-        <p:spPr>
-          <a:xfrm flipH="1">
-            <a:off x="13807440" y="4503420"/>
-            <a:ext cx="457200" cy="0"/>
-          </a:xfrm>
-          <a:prstGeom prst="line">
-            <a:avLst/>
-          </a:prstGeom>
-          <a:ln w="28575">
-            <a:solidFill>
-              <a:srgbClr val="F5EFE9"/>
-            </a:solidFill>
-            <a:tailEnd type="triangle" w="med" len="med"/>
-          </a:ln>
-        </p:spPr>
-        <p:style>
-          <a:lnRef idx="2">
-            <a:schemeClr val="accent1"/>
-          </a:lnRef>
-          <a:fillRef idx="0">
-            <a:schemeClr val="accent1"/>
-          </a:fillRef>
-          <a:effectRef idx="1">
-            <a:schemeClr val="accent1"/>
-          </a:effectRef>
-          <a:fontRef idx="minor">
-            <a:schemeClr val="tx1"/>
-          </a:fontRef>
-        </p:style>
-      </p:cxnSp>
-      <p:cxnSp>
-        <p:nvCxnSpPr>
-          <p:cNvPr id="70" name="Connector 69"/>
-          <p:cNvCxnSpPr/>
-          <p:nvPr/>
-        </p:nvCxnSpPr>
-        <p:spPr>
-          <a:xfrm flipH="1">
-            <a:off x="11155680" y="4503420"/>
-            <a:ext cx="457200" cy="0"/>
-          </a:xfrm>
-          <a:prstGeom prst="line">
-            <a:avLst/>
-          </a:prstGeom>
-          <a:ln w="28575">
-            <a:solidFill>
-              <a:srgbClr val="F5EFE9"/>
-            </a:solidFill>
-            <a:tailEnd type="triangle" w="med" len="med"/>
-          </a:ln>
-        </p:spPr>
-        <p:style>
-          <a:lnRef idx="2">
-            <a:schemeClr val="accent1"/>
-          </a:lnRef>
-          <a:fillRef idx="0">
-            <a:schemeClr val="accent1"/>
-          </a:fillRef>
-          <a:effectRef idx="1">
-            <a:schemeClr val="accent1"/>
-          </a:effectRef>
-          <a:fontRef idx="minor">
-            <a:schemeClr val="tx1"/>
-          </a:fontRef>
-        </p:style>
-      </p:cxnSp>
-      <p:cxnSp>
-        <p:nvCxnSpPr>
-          <p:cNvPr id="71" name="Connector 70"/>
-          <p:cNvCxnSpPr/>
-          <p:nvPr/>
-        </p:nvCxnSpPr>
-        <p:spPr>
-          <a:xfrm flipH="1">
-            <a:off x="7955279" y="4503420"/>
-            <a:ext cx="457201" cy="0"/>
-          </a:xfrm>
-          <a:prstGeom prst="line">
-            <a:avLst/>
-          </a:prstGeom>
-          <a:ln w="28575">
-            <a:solidFill>
-              <a:srgbClr val="F5EFE9"/>
-            </a:solidFill>
-            <a:tailEnd type="triangle" w="med" len="med"/>
-          </a:ln>
-        </p:spPr>
-        <p:style>
-          <a:lnRef idx="2">
-            <a:schemeClr val="accent1"/>
-          </a:lnRef>
-          <a:fillRef idx="0">
-            <a:schemeClr val="accent1"/>
-          </a:fillRef>
-          <a:effectRef idx="1">
-            <a:schemeClr val="accent1"/>
-          </a:effectRef>
-          <a:fontRef idx="minor">
-            <a:schemeClr val="tx1"/>
-          </a:fontRef>
-        </p:style>
-      </p:cxnSp>
-      <p:cxnSp>
-        <p:nvCxnSpPr>
-          <p:cNvPr id="72" name="Connector 71"/>
-          <p:cNvCxnSpPr/>
-          <p:nvPr/>
-        </p:nvCxnSpPr>
-        <p:spPr>
-          <a:xfrm flipH="1">
-            <a:off x="5532120" y="4503420"/>
-            <a:ext cx="411480" cy="0"/>
-          </a:xfrm>
-          <a:prstGeom prst="line">
-            <a:avLst/>
-          </a:prstGeom>
-          <a:ln w="28575">
-            <a:solidFill>
-              <a:srgbClr val="F5EFE9"/>
-            </a:solidFill>
-            <a:tailEnd type="triangle" w="med" len="med"/>
-          </a:ln>
-        </p:spPr>
-        <p:style>
-          <a:lnRef idx="2">
-            <a:schemeClr val="accent1"/>
-          </a:lnRef>
-          <a:fillRef idx="0">
-            <a:schemeClr val="accent1"/>
-          </a:fillRef>
-          <a:effectRef idx="1">
-            <a:schemeClr val="accent1"/>
-          </a:effectRef>
-          <a:fontRef idx="minor">
-            <a:schemeClr val="tx1"/>
-          </a:fontRef>
-        </p:style>
-      </p:cxnSp>
-      <p:cxnSp>
-        <p:nvCxnSpPr>
-          <p:cNvPr id="73" name="Connector 72"/>
-          <p:cNvCxnSpPr/>
-          <p:nvPr/>
-        </p:nvCxnSpPr>
-        <p:spPr>
-          <a:xfrm flipH="1">
-            <a:off x="2660904" y="4503420"/>
-            <a:ext cx="402336" cy="0"/>
-          </a:xfrm>
-          <a:prstGeom prst="line">
-            <a:avLst/>
-          </a:prstGeom>
-          <a:ln w="28575">
-            <a:solidFill>
-              <a:srgbClr val="F5EFE9"/>
-            </a:solidFill>
-            <a:tailEnd type="triangle" w="med" len="med"/>
-          </a:ln>
-        </p:spPr>
-        <p:style>
-          <a:lnRef idx="2">
-            <a:schemeClr val="accent1"/>
-          </a:lnRef>
-          <a:fillRef idx="0">
-            <a:schemeClr val="accent1"/>
-          </a:fillRef>
-          <a:effectRef idx="1">
-            <a:schemeClr val="accent1"/>
-          </a:effectRef>
-          <a:fontRef idx="minor">
-            <a:schemeClr val="tx1"/>
-          </a:fontRef>
-        </p:style>
-      </p:cxnSp>
-      <p:cxnSp>
-        <p:nvCxnSpPr>
-          <p:cNvPr id="74" name="Connector 73"/>
-          <p:cNvCxnSpPr/>
-          <p:nvPr/>
-        </p:nvCxnSpPr>
-        <p:spPr>
-          <a:xfrm>
-            <a:off x="4297680" y="4937760"/>
-            <a:ext cx="0" cy="411480"/>
-          </a:xfrm>
-          <a:prstGeom prst="line">
-            <a:avLst/>
-          </a:prstGeom>
-          <a:ln w="28575">
-            <a:solidFill>
-              <a:srgbClr val="F5EFE9"/>
-            </a:solidFill>
-          </a:ln>
-        </p:spPr>
-        <p:style>
-          <a:lnRef idx="2">
-            <a:schemeClr val="accent1"/>
-          </a:lnRef>
-          <a:fillRef idx="0">
-            <a:schemeClr val="accent1"/>
-          </a:fillRef>
-          <a:effectRef idx="1">
-            <a:schemeClr val="accent1"/>
-          </a:effectRef>
-          <a:fontRef idx="minor">
-            <a:schemeClr val="tx1"/>
-          </a:fontRef>
-        </p:style>
-      </p:cxnSp>
-      <p:cxnSp>
-        <p:nvCxnSpPr>
-          <p:cNvPr id="75" name="Connector 74"/>
-          <p:cNvCxnSpPr/>
-          <p:nvPr/>
-        </p:nvCxnSpPr>
-        <p:spPr>
-          <a:xfrm>
-            <a:off x="4297680" y="5349240"/>
-            <a:ext cx="5486400" cy="0"/>
-          </a:xfrm>
-          <a:prstGeom prst="line">
-            <a:avLst/>
-          </a:prstGeom>
-          <a:ln w="28575">
-            <a:solidFill>
-              <a:srgbClr val="F5EFE9"/>
-            </a:solidFill>
-          </a:ln>
-        </p:spPr>
-        <p:style>
-          <a:lnRef idx="2">
-            <a:schemeClr val="accent1"/>
-          </a:lnRef>
-          <a:fillRef idx="0">
-            <a:schemeClr val="accent1"/>
-          </a:fillRef>
-          <a:effectRef idx="1">
-            <a:schemeClr val="accent1"/>
-          </a:effectRef>
-          <a:fontRef idx="minor">
-            <a:schemeClr val="tx1"/>
-          </a:fontRef>
-        </p:style>
-      </p:cxnSp>
-      <p:cxnSp>
-        <p:nvCxnSpPr>
-          <p:cNvPr id="76" name="Connector 75"/>
-          <p:cNvCxnSpPr/>
-          <p:nvPr/>
-        </p:nvCxnSpPr>
-        <p:spPr>
-          <a:xfrm flipV="1">
-            <a:off x="9784080" y="4937760"/>
-            <a:ext cx="0" cy="411480"/>
-          </a:xfrm>
-          <a:prstGeom prst="line">
-            <a:avLst/>
-          </a:prstGeom>
-          <a:ln w="28575">
-            <a:solidFill>
-              <a:srgbClr val="F5EFE9"/>
-            </a:solidFill>
-            <a:tailEnd type="triangle" w="med" len="med"/>
-          </a:ln>
-        </p:spPr>
-        <p:style>
-          <a:lnRef idx="2">
-            <a:schemeClr val="accent1"/>
-          </a:lnRef>
-          <a:fillRef idx="0">
-            <a:schemeClr val="accent1"/>
-          </a:fillRef>
-          <a:effectRef idx="1">
-            <a:schemeClr val="accent1"/>
-          </a:effectRef>
-          <a:fontRef idx="minor">
-            <a:schemeClr val="tx1"/>
-          </a:fontRef>
-        </p:style>
-      </p:cxnSp>
-      <p:sp>
-        <p:nvSpPr>
-          <p:cNvPr id="77" name="TextBox 76"/>
-          <p:cNvSpPr txBox="1"/>
-          <p:nvPr/>
-        </p:nvSpPr>
-        <p:spPr>
-          <a:xfrm>
-            <a:off x="4572000" y="5029200"/>
-            <a:ext cx="5486400" cy="365760"/>
-          </a:xfrm>
-          <a:prstGeom prst="rect">
-            <a:avLst/>
-          </a:prstGeom>
-          <a:noFill/>
-        </p:spPr>
-        <p:txBody>
-          <a:bodyPr wrap="square" anchor="b" lIns="0" rIns="0" tIns="54864" bIns="54864">
-            <a:spAutoFit/>
-          </a:bodyPr>
-          <a:lstStyle/>
-          <a:p>
-            <a:pPr algn="l">
-              <a:spcAft>
-                <a:spcPts val="600"/>
-              </a:spcAft>
-            </a:pPr>
-            <a:r>
-              <a:rPr sz="1100" b="1">
-                <a:solidFill>
-                  <a:srgbClr val="F5EFE9"/>
-                </a:solidFill>
-              </a:rPr>
-              <a:t>every 12 hours: the newest 3 months rebuilt, older rows kept</a:t>
-            </a:r>
-          </a:p>
-        </p:txBody>
-      </p:sp>
-      <p:cxnSp>
-        <p:nvCxnSpPr>
-          <p:cNvPr id="78" name="Connector 77"/>
-          <p:cNvCxnSpPr/>
-          <p:nvPr/>
-        </p:nvCxnSpPr>
-        <p:spPr>
-          <a:xfrm>
-            <a:off x="1920239" y="8458200"/>
-            <a:ext cx="0" cy="548640"/>
-          </a:xfrm>
-          <a:prstGeom prst="line">
-            <a:avLst/>
-          </a:prstGeom>
-          <a:ln w="28575">
-            <a:solidFill>
-              <a:srgbClr val="F5EFE9"/>
-            </a:solidFill>
-            <a:tailEnd type="triangle" w="med" len="med"/>
-          </a:ln>
-        </p:spPr>
-        <p:style>
-          <a:lnRef idx="2">
-            <a:schemeClr val="accent1"/>
-          </a:lnRef>
-          <a:fillRef idx="0">
-            <a:schemeClr val="accent1"/>
-          </a:fillRef>
-          <a:effectRef idx="1">
-            <a:schemeClr val="accent1"/>
-          </a:effectRef>
-          <a:fontRef idx="minor">
-            <a:schemeClr val="tx1"/>
-          </a:fontRef>
-        </p:style>
-      </p:cxnSp>
-      <p:cxnSp>
-        <p:nvCxnSpPr>
-          <p:cNvPr id="79" name="Connector 78"/>
-          <p:cNvCxnSpPr/>
-          <p:nvPr/>
-        </p:nvCxnSpPr>
-        <p:spPr>
-          <a:xfrm>
-            <a:off x="4160520" y="8458200"/>
-            <a:ext cx="0" cy="548640"/>
-          </a:xfrm>
-          <a:prstGeom prst="line">
-            <a:avLst/>
-          </a:prstGeom>
-          <a:ln w="28575">
-            <a:solidFill>
-              <a:srgbClr val="F5EFE9"/>
-            </a:solidFill>
-            <a:tailEnd type="triangle" w="med" len="med"/>
-          </a:ln>
-        </p:spPr>
-        <p:style>
-          <a:lnRef idx="2">
-            <a:schemeClr val="accent1"/>
-          </a:lnRef>
-          <a:fillRef idx="0">
-            <a:schemeClr val="accent1"/>
-          </a:fillRef>
-          <a:effectRef idx="1">
-            <a:schemeClr val="accent1"/>
-          </a:effectRef>
-          <a:fontRef idx="minor">
-            <a:schemeClr val="tx1"/>
-          </a:fontRef>
-        </p:style>
-      </p:cxnSp>
-      <p:cxnSp>
-        <p:nvCxnSpPr>
-          <p:cNvPr id="80" name="Connector 79"/>
-          <p:cNvCxnSpPr/>
-          <p:nvPr/>
-        </p:nvCxnSpPr>
-        <p:spPr>
-          <a:xfrm>
-            <a:off x="6400800" y="8641080"/>
-            <a:ext cx="0" cy="365760"/>
-          </a:xfrm>
-          <a:prstGeom prst="line">
-            <a:avLst/>
-          </a:prstGeom>
-          <a:ln w="28575">
-            <a:solidFill>
-              <a:srgbClr val="F5EFE9"/>
-            </a:solidFill>
-            <a:tailEnd type="triangle" w="med" len="med"/>
-          </a:ln>
-        </p:spPr>
-        <p:style>
-          <a:lnRef idx="2">
-            <a:schemeClr val="accent1"/>
-          </a:lnRef>
-          <a:fillRef idx="0">
-            <a:schemeClr val="accent1"/>
-          </a:fillRef>
-          <a:effectRef idx="1">
-            <a:schemeClr val="accent1"/>
-          </a:effectRef>
-          <a:fontRef idx="minor">
-            <a:schemeClr val="tx1"/>
-          </a:fontRef>
-        </p:style>
-      </p:cxnSp>
-      <p:cxnSp>
-        <p:nvCxnSpPr>
-          <p:cNvPr id="81" name="Connector 80"/>
-          <p:cNvCxnSpPr/>
-          <p:nvPr/>
-        </p:nvCxnSpPr>
-        <p:spPr>
-          <a:xfrm>
-            <a:off x="9052560" y="8366759"/>
-            <a:ext cx="0" cy="640081"/>
-          </a:xfrm>
-          <a:prstGeom prst="line">
-            <a:avLst/>
-          </a:prstGeom>
-          <a:ln w="28575">
-            <a:solidFill>
-              <a:srgbClr val="F5EFE9"/>
-            </a:solidFill>
-            <a:tailEnd type="triangle" w="med" len="med"/>
-          </a:ln>
-        </p:spPr>
-        <p:style>
-          <a:lnRef idx="2">
-            <a:schemeClr val="accent1"/>
-          </a:lnRef>
-          <a:fillRef idx="0">
-            <a:schemeClr val="accent1"/>
-          </a:fillRef>
-          <a:effectRef idx="1">
-            <a:schemeClr val="accent1"/>
-          </a:effectRef>
-          <a:fontRef idx="minor">
-            <a:schemeClr val="tx1"/>
-          </a:fontRef>
-        </p:style>
-      </p:cxnSp>
-      <p:cxnSp>
-        <p:nvCxnSpPr>
-          <p:cNvPr id="82" name="Connector 81"/>
-          <p:cNvCxnSpPr/>
-          <p:nvPr/>
-        </p:nvCxnSpPr>
-        <p:spPr>
-          <a:xfrm flipH="1">
-            <a:off x="10332720" y="7452360"/>
-            <a:ext cx="182880" cy="0"/>
-          </a:xfrm>
-          <a:prstGeom prst="line">
-            <a:avLst/>
-          </a:prstGeom>
-          <a:ln w="28575">
-            <a:solidFill>
-              <a:srgbClr val="F5EFE9"/>
-            </a:solidFill>
-          </a:ln>
-        </p:spPr>
-        <p:style>
-          <a:lnRef idx="2">
-            <a:schemeClr val="accent1"/>
-          </a:lnRef>
-          <a:fillRef idx="0">
-            <a:schemeClr val="accent1"/>
-          </a:fillRef>
-          <a:effectRef idx="1">
-            <a:schemeClr val="accent1"/>
-          </a:effectRef>
-          <a:fontRef idx="minor">
-            <a:schemeClr val="tx1"/>
-          </a:fontRef>
-        </p:style>
-      </p:cxnSp>
-      <p:cxnSp>
-        <p:nvCxnSpPr>
-          <p:cNvPr id="83" name="Connector 82"/>
-          <p:cNvCxnSpPr/>
-          <p:nvPr/>
-        </p:nvCxnSpPr>
-        <p:spPr>
-          <a:xfrm>
-            <a:off x="10332720" y="7452360"/>
-            <a:ext cx="0" cy="1280160"/>
-          </a:xfrm>
-          <a:prstGeom prst="line">
-            <a:avLst/>
-          </a:prstGeom>
-          <a:ln w="28575">
-            <a:solidFill>
-              <a:srgbClr val="F5EFE9"/>
-            </a:solidFill>
           </a:ln>
         </p:spPr>
         <p:style>
@@ -15221,8 +17463,8 @@
         </p:nvCxnSpPr>
         <p:spPr>
           <a:xfrm>
-            <a:off x="10332720" y="8732520"/>
-            <a:ext cx="886968" cy="0"/>
+            <a:off x="5952744" y="2743200"/>
+            <a:ext cx="274320" cy="0"/>
           </a:xfrm>
           <a:prstGeom prst="line">
             <a:avLst/>
@@ -15231,6 +17473,7 @@
             <a:solidFill>
               <a:srgbClr val="F5EFE9"/>
             </a:solidFill>
+            <a:tailEnd type="triangle" w="med" len="med"/>
           </a:ln>
         </p:spPr>
         <p:style>
@@ -15256,8 +17499,8 @@
         </p:nvCxnSpPr>
         <p:spPr>
           <a:xfrm>
-            <a:off x="11219688" y="8732520"/>
-            <a:ext cx="4572" cy="274320"/>
+            <a:off x="9061704" y="2743200"/>
+            <a:ext cx="274320" cy="0"/>
           </a:xfrm>
           <a:prstGeom prst="line">
             <a:avLst/>
@@ -15291,9 +17534,9 @@
           <p:nvPr/>
         </p:nvCxnSpPr>
         <p:spPr>
-          <a:xfrm flipH="1">
-            <a:off x="11996928" y="8229600"/>
-            <a:ext cx="4572" cy="502920"/>
+          <a:xfrm flipV="1">
+            <a:off x="11987784" y="2720339"/>
+            <a:ext cx="274320" cy="22861"/>
           </a:xfrm>
           <a:prstGeom prst="line">
             <a:avLst/>
@@ -15302,6 +17545,7 @@
             <a:solidFill>
               <a:srgbClr val="F5EFE9"/>
             </a:solidFill>
+            <a:tailEnd type="triangle" w="med" len="med"/>
           </a:ln>
         </p:spPr>
         <p:style>
@@ -15327,8 +17571,8 @@
         </p:nvCxnSpPr>
         <p:spPr>
           <a:xfrm>
-            <a:off x="11996928" y="8732520"/>
-            <a:ext cx="777240" cy="0"/>
+            <a:off x="15828263" y="3474720"/>
+            <a:ext cx="0" cy="274319"/>
           </a:xfrm>
           <a:prstGeom prst="line">
             <a:avLst/>
@@ -15362,8 +17606,8 @@
         </p:nvCxnSpPr>
         <p:spPr>
           <a:xfrm>
-            <a:off x="12774168" y="8732520"/>
-            <a:ext cx="4572" cy="274320"/>
+            <a:off x="15828263" y="3749039"/>
+            <a:ext cx="2322577" cy="0"/>
           </a:xfrm>
           <a:prstGeom prst="line">
             <a:avLst/>
@@ -15372,7 +17616,6 @@
             <a:solidFill>
               <a:srgbClr val="F5EFE9"/>
             </a:solidFill>
-            <a:tailEnd type="triangle" w="med" len="med"/>
           </a:ln>
         </p:spPr>
         <p:style>
@@ -15397,9 +17640,9 @@
           <p:nvPr/>
         </p:nvCxnSpPr>
         <p:spPr>
-          <a:xfrm>
-            <a:off x="15247620" y="8229600"/>
-            <a:ext cx="0" cy="365760"/>
+          <a:xfrm flipH="1">
+            <a:off x="18150839" y="3749039"/>
+            <a:ext cx="1" cy="274321"/>
           </a:xfrm>
           <a:prstGeom prst="line">
             <a:avLst/>
@@ -15408,6 +17651,7 @@
             <a:solidFill>
               <a:srgbClr val="F5EFE9"/>
             </a:solidFill>
+            <a:tailEnd type="triangle" w="med" len="med"/>
           </a:ln>
         </p:spPr>
         <p:style>
@@ -15432,9 +17676,9 @@
           <p:nvPr/>
         </p:nvCxnSpPr>
         <p:spPr>
-          <a:xfrm flipH="1">
-            <a:off x="14447520" y="8595360"/>
-            <a:ext cx="800100" cy="0"/>
+          <a:xfrm>
+            <a:off x="18150839" y="4983480"/>
+            <a:ext cx="0" cy="137160"/>
           </a:xfrm>
           <a:prstGeom prst="line">
             <a:avLst/>
@@ -15443,6 +17687,7 @@
             <a:solidFill>
               <a:srgbClr val="F5EFE9"/>
             </a:solidFill>
+            <a:tailEnd type="triangle" w="med" len="med"/>
           </a:ln>
         </p:spPr>
         <p:style>
@@ -15460,16 +17705,54 @@
           </a:fontRef>
         </p:style>
       </p:cxnSp>
+      <p:sp>
+        <p:nvSpPr>
+          <p:cNvPr id="91" name="TextBox 90"/>
+          <p:cNvSpPr txBox="1"/>
+          <p:nvPr/>
+        </p:nvSpPr>
+        <p:spPr>
+          <a:xfrm>
+            <a:off x="18242280" y="4668012"/>
+            <a:ext cx="2926080" cy="365760"/>
+          </a:xfrm>
+          <a:prstGeom prst="rect">
+            <a:avLst/>
+          </a:prstGeom>
+          <a:noFill/>
+        </p:spPr>
+        <p:txBody>
+          <a:bodyPr wrap="square" anchor="b" lIns="0" rIns="0" tIns="54864" bIns="54864">
+            <a:spAutoFit/>
+          </a:bodyPr>
+          <a:lstStyle/>
+          <a:p>
+            <a:pPr algn="l">
+              <a:spcAft>
+                <a:spcPts val="600"/>
+              </a:spcAft>
+            </a:pPr>
+            <a:r>
+              <a:rPr sz="1100" b="1">
+                <a:solidFill>
+                  <a:srgbClr val="F5EFE9"/>
+                </a:solidFill>
+              </a:rPr>
+              <a:t>no</a:t>
+            </a:r>
+          </a:p>
+        </p:txBody>
+      </p:sp>
       <p:cxnSp>
         <p:nvCxnSpPr>
-          <p:cNvPr id="91" name="Connector 90"/>
+          <p:cNvPr id="92" name="Connector 91"/>
           <p:cNvCxnSpPr/>
           <p:nvPr/>
         </p:nvCxnSpPr>
         <p:spPr>
-          <a:xfrm>
-            <a:off x="14447520" y="8595360"/>
-            <a:ext cx="0" cy="411480"/>
+          <a:xfrm flipH="1">
+            <a:off x="16642080" y="4503420"/>
+            <a:ext cx="457200" cy="0"/>
           </a:xfrm>
           <a:prstGeom prst="line">
             <a:avLst/>
@@ -15479,41 +17762,6 @@
               <a:srgbClr val="F5EFE9"/>
             </a:solidFill>
             <a:tailEnd type="triangle" w="med" len="med"/>
-          </a:ln>
-        </p:spPr>
-        <p:style>
-          <a:lnRef idx="2">
-            <a:schemeClr val="accent1"/>
-          </a:lnRef>
-          <a:fillRef idx="0">
-            <a:schemeClr val="accent1"/>
-          </a:fillRef>
-          <a:effectRef idx="1">
-            <a:schemeClr val="accent1"/>
-          </a:effectRef>
-          <a:fontRef idx="minor">
-            <a:schemeClr val="tx1"/>
-          </a:fontRef>
-        </p:style>
-      </p:cxnSp>
-      <p:cxnSp>
-        <p:nvCxnSpPr>
-          <p:cNvPr id="92" name="Connector 91"/>
-          <p:cNvCxnSpPr/>
-          <p:nvPr/>
-        </p:nvCxnSpPr>
-        <p:spPr>
-          <a:xfrm>
-            <a:off x="15247620" y="8229600"/>
-            <a:ext cx="0" cy="365760"/>
-          </a:xfrm>
-          <a:prstGeom prst="line">
-            <a:avLst/>
-          </a:prstGeom>
-          <a:ln w="28575">
-            <a:solidFill>
-              <a:srgbClr val="F5EFE9"/>
-            </a:solidFill>
           </a:ln>
         </p:spPr>
         <p:style>
@@ -15539,8 +17787,8 @@
         </p:nvCxnSpPr>
         <p:spPr>
           <a:xfrm>
-            <a:off x="15247620" y="8595360"/>
-            <a:ext cx="800100" cy="0"/>
+            <a:off x="15453359" y="4983480"/>
+            <a:ext cx="0" cy="137160"/>
           </a:xfrm>
           <a:prstGeom prst="line">
             <a:avLst/>
@@ -15549,6 +17797,81 @@
             <a:solidFill>
               <a:srgbClr val="F5EFE9"/>
             </a:solidFill>
+            <a:tailEnd type="triangle" w="med" len="med"/>
+          </a:ln>
+        </p:spPr>
+        <p:style>
+          <a:lnRef idx="2">
+            <a:schemeClr val="accent1"/>
+          </a:lnRef>
+          <a:fillRef idx="0">
+            <a:schemeClr val="accent1"/>
+          </a:fillRef>
+          <a:effectRef idx="1">
+            <a:schemeClr val="accent1"/>
+          </a:effectRef>
+          <a:fontRef idx="minor">
+            <a:schemeClr val="tx1"/>
+          </a:fontRef>
+        </p:style>
+      </p:cxnSp>
+      <p:sp>
+        <p:nvSpPr>
+          <p:cNvPr id="94" name="TextBox 93"/>
+          <p:cNvSpPr txBox="1"/>
+          <p:nvPr/>
+        </p:nvSpPr>
+        <p:spPr>
+          <a:xfrm>
+            <a:off x="15544800" y="4668012"/>
+            <a:ext cx="2926080" cy="365760"/>
+          </a:xfrm>
+          <a:prstGeom prst="rect">
+            <a:avLst/>
+          </a:prstGeom>
+          <a:noFill/>
+        </p:spPr>
+        <p:txBody>
+          <a:bodyPr wrap="square" anchor="b" lIns="0" rIns="0" tIns="54864" bIns="54864">
+            <a:spAutoFit/>
+          </a:bodyPr>
+          <a:lstStyle/>
+          <a:p>
+            <a:pPr algn="l">
+              <a:spcAft>
+                <a:spcPts val="600"/>
+              </a:spcAft>
+            </a:pPr>
+            <a:r>
+              <a:rPr sz="1100" b="1">
+                <a:solidFill>
+                  <a:srgbClr val="F5EFE9"/>
+                </a:solidFill>
+              </a:rPr>
+              <a:t>no</a:t>
+            </a:r>
+          </a:p>
+        </p:txBody>
+      </p:sp>
+      <p:cxnSp>
+        <p:nvCxnSpPr>
+          <p:cNvPr id="95" name="Connector 94"/>
+          <p:cNvCxnSpPr/>
+          <p:nvPr/>
+        </p:nvCxnSpPr>
+        <p:spPr>
+          <a:xfrm flipH="1">
+            <a:off x="13807440" y="4503420"/>
+            <a:ext cx="457200" cy="0"/>
+          </a:xfrm>
+          <a:prstGeom prst="line">
+            <a:avLst/>
+          </a:prstGeom>
+          <a:ln w="28575">
+            <a:solidFill>
+              <a:srgbClr val="F5EFE9"/>
+            </a:solidFill>
+            <a:tailEnd type="triangle" w="med" len="med"/>
           </a:ln>
         </p:spPr>
         <p:style>
@@ -15568,14 +17891,14 @@
       </p:cxnSp>
       <p:cxnSp>
         <p:nvCxnSpPr>
-          <p:cNvPr id="94" name="Connector 93"/>
+          <p:cNvPr id="96" name="Connector 95"/>
           <p:cNvCxnSpPr/>
           <p:nvPr/>
         </p:nvCxnSpPr>
         <p:spPr>
-          <a:xfrm>
-            <a:off x="16047720" y="8595360"/>
-            <a:ext cx="0" cy="411480"/>
+          <a:xfrm flipH="1">
+            <a:off x="11155680" y="4503420"/>
+            <a:ext cx="457200" cy="0"/>
           </a:xfrm>
           <a:prstGeom prst="line">
             <a:avLst/>
@@ -15604,14 +17927,14 @@
       </p:cxnSp>
       <p:cxnSp>
         <p:nvCxnSpPr>
-          <p:cNvPr id="95" name="Connector 94"/>
+          <p:cNvPr id="97" name="Connector 96"/>
           <p:cNvCxnSpPr/>
           <p:nvPr/>
         </p:nvCxnSpPr>
         <p:spPr>
-          <a:xfrm>
-            <a:off x="18105120" y="7680960"/>
-            <a:ext cx="0" cy="1325880"/>
+          <a:xfrm flipH="1">
+            <a:off x="7955279" y="4503420"/>
+            <a:ext cx="457201" cy="0"/>
           </a:xfrm>
           <a:prstGeom prst="line">
             <a:avLst/>
@@ -15638,16 +17961,52 @@
           </a:fontRef>
         </p:style>
       </p:cxnSp>
-      <p:sp>
-        <p:nvSpPr>
-          <p:cNvPr id="96" name="TextBox 95"/>
+      <p:cxnSp>
+        <p:nvCxnSpPr>
+          <p:cNvPr id="98" name="Connector 97"/>
+          <p:cNvCxnSpPr/>
+          <p:nvPr/>
+        </p:nvCxnSpPr>
+        <p:spPr>
+          <a:xfrm flipV="1">
+            <a:off x="6949440" y="3840480"/>
+            <a:ext cx="0" cy="182880"/>
+          </a:xfrm>
+          <a:prstGeom prst="line">
+            <a:avLst/>
+          </a:prstGeom>
+          <a:ln w="28575">
+            <a:solidFill>
+              <a:srgbClr val="F5EFE9"/>
+            </a:solidFill>
+            <a:tailEnd type="triangle" w="med" len="med"/>
+          </a:ln>
+        </p:spPr>
+        <p:style>
+          <a:lnRef idx="2">
+            <a:schemeClr val="accent1"/>
+          </a:lnRef>
+          <a:fillRef idx="0">
+            <a:schemeClr val="accent1"/>
+          </a:fillRef>
+          <a:effectRef idx="1">
+            <a:schemeClr val="accent1"/>
+          </a:effectRef>
+          <a:fontRef idx="minor">
+            <a:schemeClr val="tx1"/>
+          </a:fontRef>
+        </p:style>
+      </p:cxnSp>
+      <p:sp>
+        <p:nvSpPr>
+          <p:cNvPr id="99" name="TextBox 98"/>
           <p:cNvSpPr txBox="1"/>
           <p:nvPr/>
         </p:nvSpPr>
         <p:spPr>
           <a:xfrm>
-            <a:off x="740664" y="10012680"/>
-            <a:ext cx="18653760" cy="457200"/>
+            <a:off x="7040879" y="3547872"/>
+            <a:ext cx="2926080" cy="365760"/>
           </a:xfrm>
           <a:prstGeom prst="rect">
             <a:avLst/>
@@ -15655,7 +18014,7 @@
           <a:noFill/>
         </p:spPr>
         <p:txBody>
-          <a:bodyPr wrap="square" anchor="t" lIns="0" rIns="0" tIns="54864" bIns="54864">
+          <a:bodyPr wrap="square" anchor="b" lIns="0" rIns="0" tIns="54864" bIns="54864">
             <a:spAutoFit/>
           </a:bodyPr>
           <a:lstStyle/>
@@ -15666,12 +18025,870 @@
               </a:spcAft>
             </a:pPr>
             <a:r>
+              <a:rPr sz="1100" b="1">
+                <a:solidFill>
+                  <a:srgbClr val="F5EFE9"/>
+                </a:solidFill>
+              </a:rPr>
+              <a:t>no</a:t>
+            </a:r>
+          </a:p>
+        </p:txBody>
+      </p:sp>
+      <p:cxnSp>
+        <p:nvCxnSpPr>
+          <p:cNvPr id="100" name="Connector 99"/>
+          <p:cNvCxnSpPr/>
+          <p:nvPr/>
+        </p:nvCxnSpPr>
+        <p:spPr>
+          <a:xfrm flipH="1">
+            <a:off x="5532120" y="4503420"/>
+            <a:ext cx="411480" cy="0"/>
+          </a:xfrm>
+          <a:prstGeom prst="line">
+            <a:avLst/>
+          </a:prstGeom>
+          <a:ln w="28575">
+            <a:solidFill>
+              <a:srgbClr val="F5EFE9"/>
+            </a:solidFill>
+            <a:tailEnd type="triangle" w="med" len="med"/>
+          </a:ln>
+        </p:spPr>
+        <p:style>
+          <a:lnRef idx="2">
+            <a:schemeClr val="accent1"/>
+          </a:lnRef>
+          <a:fillRef idx="0">
+            <a:schemeClr val="accent1"/>
+          </a:fillRef>
+          <a:effectRef idx="1">
+            <a:schemeClr val="accent1"/>
+          </a:effectRef>
+          <a:fontRef idx="minor">
+            <a:schemeClr val="tx1"/>
+          </a:fontRef>
+        </p:style>
+      </p:cxnSp>
+      <p:cxnSp>
+        <p:nvCxnSpPr>
+          <p:cNvPr id="101" name="Connector 100"/>
+          <p:cNvCxnSpPr/>
+          <p:nvPr/>
+        </p:nvCxnSpPr>
+        <p:spPr>
+          <a:xfrm flipH="1">
+            <a:off x="2660904" y="4503420"/>
+            <a:ext cx="402336" cy="0"/>
+          </a:xfrm>
+          <a:prstGeom prst="line">
+            <a:avLst/>
+          </a:prstGeom>
+          <a:ln w="28575">
+            <a:solidFill>
+              <a:srgbClr val="F5EFE9"/>
+            </a:solidFill>
+            <a:tailEnd type="triangle" w="med" len="med"/>
+          </a:ln>
+        </p:spPr>
+        <p:style>
+          <a:lnRef idx="2">
+            <a:schemeClr val="accent1"/>
+          </a:lnRef>
+          <a:fillRef idx="0">
+            <a:schemeClr val="accent1"/>
+          </a:fillRef>
+          <a:effectRef idx="1">
+            <a:schemeClr val="accent1"/>
+          </a:effectRef>
+          <a:fontRef idx="minor">
+            <a:schemeClr val="tx1"/>
+          </a:fontRef>
+        </p:style>
+      </p:cxnSp>
+      <p:cxnSp>
+        <p:nvCxnSpPr>
+          <p:cNvPr id="102" name="Connector 101"/>
+          <p:cNvCxnSpPr/>
+          <p:nvPr/>
+        </p:nvCxnSpPr>
+        <p:spPr>
+          <a:xfrm>
+            <a:off x="4297680" y="4937760"/>
+            <a:ext cx="0" cy="411480"/>
+          </a:xfrm>
+          <a:prstGeom prst="line">
+            <a:avLst/>
+          </a:prstGeom>
+          <a:ln w="28575">
+            <a:solidFill>
+              <a:srgbClr val="F5EFE9"/>
+            </a:solidFill>
+          </a:ln>
+        </p:spPr>
+        <p:style>
+          <a:lnRef idx="2">
+            <a:schemeClr val="accent1"/>
+          </a:lnRef>
+          <a:fillRef idx="0">
+            <a:schemeClr val="accent1"/>
+          </a:fillRef>
+          <a:effectRef idx="1">
+            <a:schemeClr val="accent1"/>
+          </a:effectRef>
+          <a:fontRef idx="minor">
+            <a:schemeClr val="tx1"/>
+          </a:fontRef>
+        </p:style>
+      </p:cxnSp>
+      <p:cxnSp>
+        <p:nvCxnSpPr>
+          <p:cNvPr id="103" name="Connector 102"/>
+          <p:cNvCxnSpPr/>
+          <p:nvPr/>
+        </p:nvCxnSpPr>
+        <p:spPr>
+          <a:xfrm>
+            <a:off x="4297680" y="5349240"/>
+            <a:ext cx="5486400" cy="0"/>
+          </a:xfrm>
+          <a:prstGeom prst="line">
+            <a:avLst/>
+          </a:prstGeom>
+          <a:ln w="28575">
+            <a:solidFill>
+              <a:srgbClr val="F5EFE9"/>
+            </a:solidFill>
+          </a:ln>
+        </p:spPr>
+        <p:style>
+          <a:lnRef idx="2">
+            <a:schemeClr val="accent1"/>
+          </a:lnRef>
+          <a:fillRef idx="0">
+            <a:schemeClr val="accent1"/>
+          </a:fillRef>
+          <a:effectRef idx="1">
+            <a:schemeClr val="accent1"/>
+          </a:effectRef>
+          <a:fontRef idx="minor">
+            <a:schemeClr val="tx1"/>
+          </a:fontRef>
+        </p:style>
+      </p:cxnSp>
+      <p:cxnSp>
+        <p:nvCxnSpPr>
+          <p:cNvPr id="104" name="Connector 103"/>
+          <p:cNvCxnSpPr/>
+          <p:nvPr/>
+        </p:nvCxnSpPr>
+        <p:spPr>
+          <a:xfrm flipV="1">
+            <a:off x="9784080" y="4937760"/>
+            <a:ext cx="0" cy="411480"/>
+          </a:xfrm>
+          <a:prstGeom prst="line">
+            <a:avLst/>
+          </a:prstGeom>
+          <a:ln w="28575">
+            <a:solidFill>
+              <a:srgbClr val="F5EFE9"/>
+            </a:solidFill>
+            <a:tailEnd type="triangle" w="med" len="med"/>
+          </a:ln>
+        </p:spPr>
+        <p:style>
+          <a:lnRef idx="2">
+            <a:schemeClr val="accent1"/>
+          </a:lnRef>
+          <a:fillRef idx="0">
+            <a:schemeClr val="accent1"/>
+          </a:fillRef>
+          <a:effectRef idx="1">
+            <a:schemeClr val="accent1"/>
+          </a:effectRef>
+          <a:fontRef idx="minor">
+            <a:schemeClr val="tx1"/>
+          </a:fontRef>
+        </p:style>
+      </p:cxnSp>
+      <p:sp>
+        <p:nvSpPr>
+          <p:cNvPr id="105" name="TextBox 104"/>
+          <p:cNvSpPr txBox="1"/>
+          <p:nvPr/>
+        </p:nvSpPr>
+        <p:spPr>
+          <a:xfrm>
+            <a:off x="4572000" y="5029200"/>
+            <a:ext cx="5486400" cy="365760"/>
+          </a:xfrm>
+          <a:prstGeom prst="rect">
+            <a:avLst/>
+          </a:prstGeom>
+          <a:noFill/>
+        </p:spPr>
+        <p:txBody>
+          <a:bodyPr wrap="square" anchor="b" lIns="0" rIns="0" tIns="54864" bIns="54864">
+            <a:spAutoFit/>
+          </a:bodyPr>
+          <a:lstStyle/>
+          <a:p>
+            <a:pPr algn="l">
+              <a:spcAft>
+                <a:spcPts val="600"/>
+              </a:spcAft>
+            </a:pPr>
+            <a:r>
+              <a:rPr sz="1100" b="1">
+                <a:solidFill>
+                  <a:srgbClr val="F5EFE9"/>
+                </a:solidFill>
+              </a:rPr>
+              <a:t>every 12 hours: the newest 3 months rebuilt, older rows kept</a:t>
+            </a:r>
+          </a:p>
+        </p:txBody>
+      </p:sp>
+      <p:cxnSp>
+        <p:nvCxnSpPr>
+          <p:cNvPr id="106" name="Connector 105"/>
+          <p:cNvCxnSpPr/>
+          <p:nvPr/>
+        </p:nvCxnSpPr>
+        <p:spPr>
+          <a:xfrm>
+            <a:off x="1920239" y="8732520"/>
+            <a:ext cx="0" cy="274320"/>
+          </a:xfrm>
+          <a:prstGeom prst="line">
+            <a:avLst/>
+          </a:prstGeom>
+          <a:ln w="28575">
+            <a:solidFill>
+              <a:srgbClr val="F5EFE9"/>
+            </a:solidFill>
+            <a:tailEnd type="triangle" w="med" len="med"/>
+          </a:ln>
+        </p:spPr>
+        <p:style>
+          <a:lnRef idx="2">
+            <a:schemeClr val="accent1"/>
+          </a:lnRef>
+          <a:fillRef idx="0">
+            <a:schemeClr val="accent1"/>
+          </a:fillRef>
+          <a:effectRef idx="1">
+            <a:schemeClr val="accent1"/>
+          </a:effectRef>
+          <a:fontRef idx="minor">
+            <a:schemeClr val="tx1"/>
+          </a:fontRef>
+        </p:style>
+      </p:cxnSp>
+      <p:cxnSp>
+        <p:nvCxnSpPr>
+          <p:cNvPr id="107" name="Connector 106"/>
+          <p:cNvCxnSpPr/>
+          <p:nvPr/>
+        </p:nvCxnSpPr>
+        <p:spPr>
+          <a:xfrm>
+            <a:off x="4160520" y="8732520"/>
+            <a:ext cx="0" cy="274320"/>
+          </a:xfrm>
+          <a:prstGeom prst="line">
+            <a:avLst/>
+          </a:prstGeom>
+          <a:ln w="28575">
+            <a:solidFill>
+              <a:srgbClr val="F5EFE9"/>
+            </a:solidFill>
+            <a:tailEnd type="triangle" w="med" len="med"/>
+          </a:ln>
+        </p:spPr>
+        <p:style>
+          <a:lnRef idx="2">
+            <a:schemeClr val="accent1"/>
+          </a:lnRef>
+          <a:fillRef idx="0">
+            <a:schemeClr val="accent1"/>
+          </a:fillRef>
+          <a:effectRef idx="1">
+            <a:schemeClr val="accent1"/>
+          </a:effectRef>
+          <a:fontRef idx="minor">
+            <a:schemeClr val="tx1"/>
+          </a:fontRef>
+        </p:style>
+      </p:cxnSp>
+      <p:cxnSp>
+        <p:nvCxnSpPr>
+          <p:cNvPr id="108" name="Connector 107"/>
+          <p:cNvCxnSpPr/>
+          <p:nvPr/>
+        </p:nvCxnSpPr>
+        <p:spPr>
+          <a:xfrm>
+            <a:off x="6400800" y="8732520"/>
+            <a:ext cx="0" cy="274320"/>
+          </a:xfrm>
+          <a:prstGeom prst="line">
+            <a:avLst/>
+          </a:prstGeom>
+          <a:ln w="28575">
+            <a:solidFill>
+              <a:srgbClr val="F5EFE9"/>
+            </a:solidFill>
+            <a:tailEnd type="triangle" w="med" len="med"/>
+          </a:ln>
+        </p:spPr>
+        <p:style>
+          <a:lnRef idx="2">
+            <a:schemeClr val="accent1"/>
+          </a:lnRef>
+          <a:fillRef idx="0">
+            <a:schemeClr val="accent1"/>
+          </a:fillRef>
+          <a:effectRef idx="1">
+            <a:schemeClr val="accent1"/>
+          </a:effectRef>
+          <a:fontRef idx="minor">
+            <a:schemeClr val="tx1"/>
+          </a:fontRef>
+        </p:style>
+      </p:cxnSp>
+      <p:cxnSp>
+        <p:nvCxnSpPr>
+          <p:cNvPr id="109" name="Connector 108"/>
+          <p:cNvCxnSpPr/>
+          <p:nvPr/>
+        </p:nvCxnSpPr>
+        <p:spPr>
+          <a:xfrm>
+            <a:off x="9052560" y="8732520"/>
+            <a:ext cx="0" cy="274320"/>
+          </a:xfrm>
+          <a:prstGeom prst="line">
+            <a:avLst/>
+          </a:prstGeom>
+          <a:ln w="28575">
+            <a:solidFill>
+              <a:srgbClr val="F5EFE9"/>
+            </a:solidFill>
+            <a:tailEnd type="triangle" w="med" len="med"/>
+          </a:ln>
+        </p:spPr>
+        <p:style>
+          <a:lnRef idx="2">
+            <a:schemeClr val="accent1"/>
+          </a:lnRef>
+          <a:fillRef idx="0">
+            <a:schemeClr val="accent1"/>
+          </a:fillRef>
+          <a:effectRef idx="1">
+            <a:schemeClr val="accent1"/>
+          </a:effectRef>
+          <a:fontRef idx="minor">
+            <a:schemeClr val="tx1"/>
+          </a:fontRef>
+        </p:style>
+      </p:cxnSp>
+      <p:cxnSp>
+        <p:nvCxnSpPr>
+          <p:cNvPr id="110" name="Connector 109"/>
+          <p:cNvCxnSpPr/>
+          <p:nvPr/>
+        </p:nvCxnSpPr>
+        <p:spPr>
+          <a:xfrm>
+            <a:off x="12001500" y="8732520"/>
+            <a:ext cx="0" cy="137160"/>
+          </a:xfrm>
+          <a:prstGeom prst="line">
+            <a:avLst/>
+          </a:prstGeom>
+          <a:ln w="28575">
+            <a:solidFill>
+              <a:srgbClr val="F5EFE9"/>
+            </a:solidFill>
+          </a:ln>
+        </p:spPr>
+        <p:style>
+          <a:lnRef idx="2">
+            <a:schemeClr val="accent1"/>
+          </a:lnRef>
+          <a:fillRef idx="0">
+            <a:schemeClr val="accent1"/>
+          </a:fillRef>
+          <a:effectRef idx="1">
+            <a:schemeClr val="accent1"/>
+          </a:effectRef>
+          <a:fontRef idx="minor">
+            <a:schemeClr val="tx1"/>
+          </a:fontRef>
+        </p:style>
+      </p:cxnSp>
+      <p:cxnSp>
+        <p:nvCxnSpPr>
+          <p:cNvPr id="111" name="Connector 110"/>
+          <p:cNvCxnSpPr/>
+          <p:nvPr/>
+        </p:nvCxnSpPr>
+        <p:spPr>
+          <a:xfrm flipH="1">
+            <a:off x="11219688" y="8869680"/>
+            <a:ext cx="781812" cy="0"/>
+          </a:xfrm>
+          <a:prstGeom prst="line">
+            <a:avLst/>
+          </a:prstGeom>
+          <a:ln w="28575">
+            <a:solidFill>
+              <a:srgbClr val="F5EFE9"/>
+            </a:solidFill>
+          </a:ln>
+        </p:spPr>
+        <p:style>
+          <a:lnRef idx="2">
+            <a:schemeClr val="accent1"/>
+          </a:lnRef>
+          <a:fillRef idx="0">
+            <a:schemeClr val="accent1"/>
+          </a:fillRef>
+          <a:effectRef idx="1">
+            <a:schemeClr val="accent1"/>
+          </a:effectRef>
+          <a:fontRef idx="minor">
+            <a:schemeClr val="tx1"/>
+          </a:fontRef>
+        </p:style>
+      </p:cxnSp>
+      <p:cxnSp>
+        <p:nvCxnSpPr>
+          <p:cNvPr id="112" name="Connector 111"/>
+          <p:cNvCxnSpPr/>
+          <p:nvPr/>
+        </p:nvCxnSpPr>
+        <p:spPr>
+          <a:xfrm>
+            <a:off x="11219688" y="8869680"/>
+            <a:ext cx="4572" cy="137160"/>
+          </a:xfrm>
+          <a:prstGeom prst="line">
+            <a:avLst/>
+          </a:prstGeom>
+          <a:ln w="28575">
+            <a:solidFill>
+              <a:srgbClr val="F5EFE9"/>
+            </a:solidFill>
+            <a:tailEnd type="triangle" w="med" len="med"/>
+          </a:ln>
+        </p:spPr>
+        <p:style>
+          <a:lnRef idx="2">
+            <a:schemeClr val="accent1"/>
+          </a:lnRef>
+          <a:fillRef idx="0">
+            <a:schemeClr val="accent1"/>
+          </a:fillRef>
+          <a:effectRef idx="1">
+            <a:schemeClr val="accent1"/>
+          </a:effectRef>
+          <a:fontRef idx="minor">
+            <a:schemeClr val="tx1"/>
+          </a:fontRef>
+        </p:style>
+      </p:cxnSp>
+      <p:cxnSp>
+        <p:nvCxnSpPr>
+          <p:cNvPr id="113" name="Connector 112"/>
+          <p:cNvCxnSpPr/>
+          <p:nvPr/>
+        </p:nvCxnSpPr>
+        <p:spPr>
+          <a:xfrm>
+            <a:off x="12001500" y="8732520"/>
+            <a:ext cx="0" cy="137160"/>
+          </a:xfrm>
+          <a:prstGeom prst="line">
+            <a:avLst/>
+          </a:prstGeom>
+          <a:ln w="28575">
+            <a:solidFill>
+              <a:srgbClr val="F5EFE9"/>
+            </a:solidFill>
+          </a:ln>
+        </p:spPr>
+        <p:style>
+          <a:lnRef idx="2">
+            <a:schemeClr val="accent1"/>
+          </a:lnRef>
+          <a:fillRef idx="0">
+            <a:schemeClr val="accent1"/>
+          </a:fillRef>
+          <a:effectRef idx="1">
+            <a:schemeClr val="accent1"/>
+          </a:effectRef>
+          <a:fontRef idx="minor">
+            <a:schemeClr val="tx1"/>
+          </a:fontRef>
+        </p:style>
+      </p:cxnSp>
+      <p:cxnSp>
+        <p:nvCxnSpPr>
+          <p:cNvPr id="114" name="Connector 113"/>
+          <p:cNvCxnSpPr/>
+          <p:nvPr/>
+        </p:nvCxnSpPr>
+        <p:spPr>
+          <a:xfrm>
+            <a:off x="12001500" y="8869680"/>
+            <a:ext cx="772668" cy="0"/>
+          </a:xfrm>
+          <a:prstGeom prst="line">
+            <a:avLst/>
+          </a:prstGeom>
+          <a:ln w="28575">
+            <a:solidFill>
+              <a:srgbClr val="F5EFE9"/>
+            </a:solidFill>
+          </a:ln>
+        </p:spPr>
+        <p:style>
+          <a:lnRef idx="2">
+            <a:schemeClr val="accent1"/>
+          </a:lnRef>
+          <a:fillRef idx="0">
+            <a:schemeClr val="accent1"/>
+          </a:fillRef>
+          <a:effectRef idx="1">
+            <a:schemeClr val="accent1"/>
+          </a:effectRef>
+          <a:fontRef idx="minor">
+            <a:schemeClr val="tx1"/>
+          </a:fontRef>
+        </p:style>
+      </p:cxnSp>
+      <p:cxnSp>
+        <p:nvCxnSpPr>
+          <p:cNvPr id="115" name="Connector 114"/>
+          <p:cNvCxnSpPr/>
+          <p:nvPr/>
+        </p:nvCxnSpPr>
+        <p:spPr>
+          <a:xfrm>
+            <a:off x="12774168" y="8869680"/>
+            <a:ext cx="4572" cy="137160"/>
+          </a:xfrm>
+          <a:prstGeom prst="line">
+            <a:avLst/>
+          </a:prstGeom>
+          <a:ln w="28575">
+            <a:solidFill>
+              <a:srgbClr val="F5EFE9"/>
+            </a:solidFill>
+            <a:tailEnd type="triangle" w="med" len="med"/>
+          </a:ln>
+        </p:spPr>
+        <p:style>
+          <a:lnRef idx="2">
+            <a:schemeClr val="accent1"/>
+          </a:lnRef>
+          <a:fillRef idx="0">
+            <a:schemeClr val="accent1"/>
+          </a:fillRef>
+          <a:effectRef idx="1">
+            <a:schemeClr val="accent1"/>
+          </a:effectRef>
+          <a:fontRef idx="minor">
+            <a:schemeClr val="tx1"/>
+          </a:fontRef>
+        </p:style>
+      </p:cxnSp>
+      <p:cxnSp>
+        <p:nvCxnSpPr>
+          <p:cNvPr id="116" name="Connector 115"/>
+          <p:cNvCxnSpPr/>
+          <p:nvPr/>
+        </p:nvCxnSpPr>
+        <p:spPr>
+          <a:xfrm>
+            <a:off x="15247620" y="8732520"/>
+            <a:ext cx="0" cy="137160"/>
+          </a:xfrm>
+          <a:prstGeom prst="line">
+            <a:avLst/>
+          </a:prstGeom>
+          <a:ln w="28575">
+            <a:solidFill>
+              <a:srgbClr val="F5EFE9"/>
+            </a:solidFill>
+          </a:ln>
+        </p:spPr>
+        <p:style>
+          <a:lnRef idx="2">
+            <a:schemeClr val="accent1"/>
+          </a:lnRef>
+          <a:fillRef idx="0">
+            <a:schemeClr val="accent1"/>
+          </a:fillRef>
+          <a:effectRef idx="1">
+            <a:schemeClr val="accent1"/>
+          </a:effectRef>
+          <a:fontRef idx="minor">
+            <a:schemeClr val="tx1"/>
+          </a:fontRef>
+        </p:style>
+      </p:cxnSp>
+      <p:cxnSp>
+        <p:nvCxnSpPr>
+          <p:cNvPr id="117" name="Connector 116"/>
+          <p:cNvCxnSpPr/>
+          <p:nvPr/>
+        </p:nvCxnSpPr>
+        <p:spPr>
+          <a:xfrm flipH="1">
+            <a:off x="14447520" y="8869680"/>
+            <a:ext cx="800100" cy="0"/>
+          </a:xfrm>
+          <a:prstGeom prst="line">
+            <a:avLst/>
+          </a:prstGeom>
+          <a:ln w="28575">
+            <a:solidFill>
+              <a:srgbClr val="F5EFE9"/>
+            </a:solidFill>
+          </a:ln>
+        </p:spPr>
+        <p:style>
+          <a:lnRef idx="2">
+            <a:schemeClr val="accent1"/>
+          </a:lnRef>
+          <a:fillRef idx="0">
+            <a:schemeClr val="accent1"/>
+          </a:fillRef>
+          <a:effectRef idx="1">
+            <a:schemeClr val="accent1"/>
+          </a:effectRef>
+          <a:fontRef idx="minor">
+            <a:schemeClr val="tx1"/>
+          </a:fontRef>
+        </p:style>
+      </p:cxnSp>
+      <p:cxnSp>
+        <p:nvCxnSpPr>
+          <p:cNvPr id="118" name="Connector 117"/>
+          <p:cNvCxnSpPr/>
+          <p:nvPr/>
+        </p:nvCxnSpPr>
+        <p:spPr>
+          <a:xfrm>
+            <a:off x="14447520" y="8869680"/>
+            <a:ext cx="0" cy="137160"/>
+          </a:xfrm>
+          <a:prstGeom prst="line">
+            <a:avLst/>
+          </a:prstGeom>
+          <a:ln w="28575">
+            <a:solidFill>
+              <a:srgbClr val="F5EFE9"/>
+            </a:solidFill>
+            <a:tailEnd type="triangle" w="med" len="med"/>
+          </a:ln>
+        </p:spPr>
+        <p:style>
+          <a:lnRef idx="2">
+            <a:schemeClr val="accent1"/>
+          </a:lnRef>
+          <a:fillRef idx="0">
+            <a:schemeClr val="accent1"/>
+          </a:fillRef>
+          <a:effectRef idx="1">
+            <a:schemeClr val="accent1"/>
+          </a:effectRef>
+          <a:fontRef idx="minor">
+            <a:schemeClr val="tx1"/>
+          </a:fontRef>
+        </p:style>
+      </p:cxnSp>
+      <p:cxnSp>
+        <p:nvCxnSpPr>
+          <p:cNvPr id="119" name="Connector 118"/>
+          <p:cNvCxnSpPr/>
+          <p:nvPr/>
+        </p:nvCxnSpPr>
+        <p:spPr>
+          <a:xfrm>
+            <a:off x="15247620" y="8732520"/>
+            <a:ext cx="0" cy="137160"/>
+          </a:xfrm>
+          <a:prstGeom prst="line">
+            <a:avLst/>
+          </a:prstGeom>
+          <a:ln w="28575">
+            <a:solidFill>
+              <a:srgbClr val="F5EFE9"/>
+            </a:solidFill>
+          </a:ln>
+        </p:spPr>
+        <p:style>
+          <a:lnRef idx="2">
+            <a:schemeClr val="accent1"/>
+          </a:lnRef>
+          <a:fillRef idx="0">
+            <a:schemeClr val="accent1"/>
+          </a:fillRef>
+          <a:effectRef idx="1">
+            <a:schemeClr val="accent1"/>
+          </a:effectRef>
+          <a:fontRef idx="minor">
+            <a:schemeClr val="tx1"/>
+          </a:fontRef>
+        </p:style>
+      </p:cxnSp>
+      <p:cxnSp>
+        <p:nvCxnSpPr>
+          <p:cNvPr id="120" name="Connector 119"/>
+          <p:cNvCxnSpPr/>
+          <p:nvPr/>
+        </p:nvCxnSpPr>
+        <p:spPr>
+          <a:xfrm>
+            <a:off x="15247620" y="8869680"/>
+            <a:ext cx="800100" cy="0"/>
+          </a:xfrm>
+          <a:prstGeom prst="line">
+            <a:avLst/>
+          </a:prstGeom>
+          <a:ln w="28575">
+            <a:solidFill>
+              <a:srgbClr val="F5EFE9"/>
+            </a:solidFill>
+          </a:ln>
+        </p:spPr>
+        <p:style>
+          <a:lnRef idx="2">
+            <a:schemeClr val="accent1"/>
+          </a:lnRef>
+          <a:fillRef idx="0">
+            <a:schemeClr val="accent1"/>
+          </a:fillRef>
+          <a:effectRef idx="1">
+            <a:schemeClr val="accent1"/>
+          </a:effectRef>
+          <a:fontRef idx="minor">
+            <a:schemeClr val="tx1"/>
+          </a:fontRef>
+        </p:style>
+      </p:cxnSp>
+      <p:cxnSp>
+        <p:nvCxnSpPr>
+          <p:cNvPr id="121" name="Connector 120"/>
+          <p:cNvCxnSpPr/>
+          <p:nvPr/>
+        </p:nvCxnSpPr>
+        <p:spPr>
+          <a:xfrm>
+            <a:off x="16047720" y="8869680"/>
+            <a:ext cx="0" cy="137160"/>
+          </a:xfrm>
+          <a:prstGeom prst="line">
+            <a:avLst/>
+          </a:prstGeom>
+          <a:ln w="28575">
+            <a:solidFill>
+              <a:srgbClr val="F5EFE9"/>
+            </a:solidFill>
+            <a:tailEnd type="triangle" w="med" len="med"/>
+          </a:ln>
+        </p:spPr>
+        <p:style>
+          <a:lnRef idx="2">
+            <a:schemeClr val="accent1"/>
+          </a:lnRef>
+          <a:fillRef idx="0">
+            <a:schemeClr val="accent1"/>
+          </a:fillRef>
+          <a:effectRef idx="1">
+            <a:schemeClr val="accent1"/>
+          </a:effectRef>
+          <a:fontRef idx="minor">
+            <a:schemeClr val="tx1"/>
+          </a:fontRef>
+        </p:style>
+      </p:cxnSp>
+      <p:cxnSp>
+        <p:nvCxnSpPr>
+          <p:cNvPr id="122" name="Connector 121"/>
+          <p:cNvCxnSpPr/>
+          <p:nvPr/>
+        </p:nvCxnSpPr>
+        <p:spPr>
+          <a:xfrm>
+            <a:off x="18105120" y="8732520"/>
+            <a:ext cx="0" cy="274320"/>
+          </a:xfrm>
+          <a:prstGeom prst="line">
+            <a:avLst/>
+          </a:prstGeom>
+          <a:ln w="28575">
+            <a:solidFill>
+              <a:srgbClr val="F5EFE9"/>
+            </a:solidFill>
+            <a:tailEnd type="triangle" w="med" len="med"/>
+          </a:ln>
+        </p:spPr>
+        <p:style>
+          <a:lnRef idx="2">
+            <a:schemeClr val="accent1"/>
+          </a:lnRef>
+          <a:fillRef idx="0">
+            <a:schemeClr val="accent1"/>
+          </a:fillRef>
+          <a:effectRef idx="1">
+            <a:schemeClr val="accent1"/>
+          </a:effectRef>
+          <a:fontRef idx="minor">
+            <a:schemeClr val="tx1"/>
+          </a:fontRef>
+        </p:style>
+      </p:cxnSp>
+      <p:sp>
+        <p:nvSpPr>
+          <p:cNvPr id="123" name="TextBox 122"/>
+          <p:cNvSpPr txBox="1"/>
+          <p:nvPr/>
+        </p:nvSpPr>
+        <p:spPr>
+          <a:xfrm>
+            <a:off x="740664" y="10012680"/>
+            <a:ext cx="18653760" cy="457200"/>
+          </a:xfrm>
+          <a:prstGeom prst="rect">
+            <a:avLst/>
+          </a:prstGeom>
+          <a:noFill/>
+        </p:spPr>
+        <p:txBody>
+          <a:bodyPr wrap="square" anchor="t" lIns="0" rIns="0" tIns="54864" bIns="54864">
+            <a:spAutoFit/>
+          </a:bodyPr>
+          <a:lstStyle/>
+          <a:p>
+            <a:pPr algn="l">
+              <a:spcAft>
+                <a:spcPts val="600"/>
+              </a:spcAft>
+            </a:pPr>
+            <a:r>
               <a:rPr sz="1200" b="0">
                 <a:solidFill>
                   <a:srgbClr val="F5EFE9"/>
                 </a:solidFill>
               </a:rPr>
-              <a:t>Every box in the map is one database object the domains read: seven rolling snapshot tables, the SA aged-balance table with its lookup seed, and eight CMS views. Orange diamonds are gates that stop the rollout; the loop under the second row is the twice-daily rolling refresh (3 months rebuilt, 24 kept; 6 months at CityCorp and Odessa).</a:t>
+              <a:t>Every box in the map is one database object the domains read: seven rolling snapshot tables, the SA aged-balance table with its lookup seed, and eight CMS views. Numbers are the order of one rollout; orange diamonds are gates and a 'no' stops it there. The loop under the second row is the twice-daily rolling refresh (3 months rebuilt, 24 kept; 6 months at CityCorp and Odessa).</a:t>
             </a:r>
           </a:p>
         </p:txBody>

--- a/jaspersoft/docs/deployment_deck/visuals/Standard_Offering_and_Database_Steps.pptx
+++ b/jaspersoft/docs/deployment_deck/visuals/Standard_Offering_and_Database_Steps.pptx
@@ -8675,8 +8675,8 @@
         </p:nvSpPr>
         <p:spPr>
           <a:xfrm>
-            <a:off x="2185415" y="6080760"/>
-            <a:ext cx="1554480" cy="822960"/>
+            <a:off x="2276856" y="6080760"/>
+            <a:ext cx="1371600" cy="822960"/>
           </a:xfrm>
           <a:prstGeom prst="diamond">
             <a:avLst/>
@@ -8731,7 +8731,7 @@
         </p:nvSpPr>
         <p:spPr>
           <a:xfrm>
-            <a:off x="2057399" y="5952744"/>
+            <a:off x="2148840" y="5952744"/>
             <a:ext cx="310896" cy="310896"/>
           </a:xfrm>
           <a:prstGeom prst="ellipse">
@@ -8788,7 +8788,7 @@
         <p:spPr>
           <a:xfrm>
             <a:off x="923544" y="6286500"/>
-            <a:ext cx="1051560" cy="411480"/>
+            <a:ext cx="896112" cy="411480"/>
           </a:xfrm>
           <a:prstGeom prst="roundRect">
             <a:avLst>
@@ -8832,7 +8832,7 @@
                   <a:srgbClr val="0B3D7A"/>
                 </a:solidFill>
               </a:rPr>
-              <a:t>no: stop</a:t>
+              <a:t>stop</a:t>
             </a:r>
           </a:p>
         </p:txBody>
@@ -9232,8 +9232,8 @@
         </p:nvSpPr>
         <p:spPr>
           <a:xfrm>
-            <a:off x="6922008" y="5394960"/>
-            <a:ext cx="1554480" cy="822960"/>
+            <a:off x="7013448" y="5394960"/>
+            <a:ext cx="1371600" cy="822960"/>
           </a:xfrm>
           <a:prstGeom prst="diamond">
             <a:avLst/>
@@ -9288,7 +9288,7 @@
         </p:nvSpPr>
         <p:spPr>
           <a:xfrm>
-            <a:off x="6793992" y="5266944"/>
+            <a:off x="6885432" y="5266944"/>
             <a:ext cx="310896" cy="310896"/>
           </a:xfrm>
           <a:prstGeom prst="ellipse">
@@ -9344,8 +9344,8 @@
         </p:nvSpPr>
         <p:spPr>
           <a:xfrm>
-            <a:off x="8549640" y="5600700"/>
-            <a:ext cx="1188720" cy="411480"/>
+            <a:off x="8842248" y="5600700"/>
+            <a:ext cx="896112" cy="411480"/>
           </a:xfrm>
           <a:prstGeom prst="roundRect">
             <a:avLst>
@@ -9389,7 +9389,7 @@
                   <a:srgbClr val="0B3D7A"/>
                 </a:solidFill>
               </a:rPr>
-              <a:t>no: stop</a:t>
+              <a:t>stop</a:t>
             </a:r>
           </a:p>
         </p:txBody>
@@ -9847,8 +9847,8 @@
         </p:nvSpPr>
         <p:spPr>
           <a:xfrm>
-            <a:off x="11247119" y="5212080"/>
-            <a:ext cx="2377440" cy="960120"/>
+            <a:off x="11750040" y="5212080"/>
+            <a:ext cx="1371600" cy="822960"/>
           </a:xfrm>
           <a:prstGeom prst="diamond">
             <a:avLst/>
@@ -9885,12 +9885,12 @@
               </a:spcAft>
             </a:pPr>
             <a:r>
-              <a:rPr sz="1000" b="1">
+              <a:rPr sz="1100" b="1">
                 <a:solidFill>
                   <a:srgbClr val="0B3D7A"/>
                 </a:solidFill>
               </a:rPr>
-              <a:t>verified? no source strings, references exist, fields resolve</a:t>
+              <a:t>package verified?</a:t>
             </a:r>
           </a:p>
         </p:txBody>
@@ -9903,7 +9903,7 @@
         </p:nvSpPr>
         <p:spPr>
           <a:xfrm>
-            <a:off x="11119103" y="5084064"/>
+            <a:off x="11622024" y="5084064"/>
             <a:ext cx="310896" cy="310896"/>
           </a:xfrm>
           <a:prstGeom prst="ellipse">
@@ -9959,8 +9959,8 @@
         </p:nvSpPr>
         <p:spPr>
           <a:xfrm>
-            <a:off x="13697711" y="5486400"/>
-            <a:ext cx="777240" cy="411480"/>
+            <a:off x="13578840" y="5417820"/>
+            <a:ext cx="896112" cy="411480"/>
           </a:xfrm>
           <a:prstGeom prst="roundRect">
             <a:avLst>
@@ -10004,7 +10004,7 @@
                   <a:srgbClr val="0B3D7A"/>
                 </a:solidFill>
               </a:rPr>
-              <a:t>no: stop</a:t>
+              <a:t>stop</a:t>
             </a:r>
           </a:p>
         </p:txBody>
@@ -10017,7 +10017,7 @@
         </p:nvSpPr>
         <p:spPr>
           <a:xfrm>
-            <a:off x="10378440" y="6309360"/>
+            <a:off x="10378440" y="6217920"/>
             <a:ext cx="4114800" cy="731520"/>
           </a:xfrm>
           <a:prstGeom prst="roundRect">
@@ -10090,7 +10090,7 @@
         </p:nvSpPr>
         <p:spPr>
           <a:xfrm>
-            <a:off x="10250424" y="6181344"/>
+            <a:off x="10250424" y="6089904"/>
             <a:ext cx="310896" cy="310896"/>
           </a:xfrm>
           <a:prstGeom prst="ellipse">
@@ -10146,7 +10146,7 @@
         </p:nvSpPr>
         <p:spPr>
           <a:xfrm>
-            <a:off x="10378440" y="7178040"/>
+            <a:off x="10378440" y="7086600"/>
             <a:ext cx="4114800" cy="914400"/>
           </a:xfrm>
           <a:prstGeom prst="roundRect">
@@ -10219,7 +10219,7 @@
         </p:nvSpPr>
         <p:spPr>
           <a:xfrm>
-            <a:off x="10250424" y="7050024"/>
+            <a:off x="10250424" y="6958584"/>
             <a:ext cx="310896" cy="310896"/>
           </a:xfrm>
           <a:prstGeom prst="ellipse">
@@ -10591,8 +10591,8 @@
         </p:nvSpPr>
         <p:spPr>
           <a:xfrm>
-            <a:off x="16395192" y="5074920"/>
-            <a:ext cx="1554480" cy="822960"/>
+            <a:off x="16486632" y="5074920"/>
+            <a:ext cx="1371600" cy="822960"/>
           </a:xfrm>
           <a:prstGeom prst="diamond">
             <a:avLst/>
@@ -10647,7 +10647,7 @@
         </p:nvSpPr>
         <p:spPr>
           <a:xfrm>
-            <a:off x="16267176" y="4946904"/>
+            <a:off x="16358616" y="4946904"/>
             <a:ext cx="310896" cy="310896"/>
           </a:xfrm>
           <a:prstGeom prst="ellipse">
@@ -10703,8 +10703,8 @@
         </p:nvSpPr>
         <p:spPr>
           <a:xfrm>
-            <a:off x="18022824" y="5280660"/>
-            <a:ext cx="1188720" cy="411480"/>
+            <a:off x="18315432" y="5280660"/>
+            <a:ext cx="896112" cy="411480"/>
           </a:xfrm>
           <a:prstGeom prst="roundRect">
             <a:avLst>
@@ -10748,7 +10748,7 @@
                   <a:srgbClr val="0B3D7A"/>
                 </a:solidFill>
               </a:rPr>
-              <a:t>no: stop</a:t>
+              <a:t>stop</a:t>
             </a:r>
           </a:p>
         </p:txBody>
@@ -11384,8 +11384,8 @@
         </p:nvCxnSpPr>
         <p:spPr>
           <a:xfrm flipH="1">
-            <a:off x="1975104" y="6492240"/>
-            <a:ext cx="210311" cy="0"/>
+            <a:off x="1819656" y="6492240"/>
+            <a:ext cx="457200" cy="0"/>
           </a:xfrm>
           <a:prstGeom prst="line">
             <a:avLst/>
@@ -11420,8 +11420,8 @@
         </p:nvSpPr>
         <p:spPr>
           <a:xfrm>
-            <a:off x="2171700" y="6108192"/>
-            <a:ext cx="2926080" cy="365760"/>
+            <a:off x="1499616" y="6181344"/>
+            <a:ext cx="1097280" cy="274320"/>
           </a:xfrm>
           <a:prstGeom prst="rect">
             <a:avLst/>
@@ -11434,7 +11434,7 @@
           </a:bodyPr>
           <a:lstStyle/>
           <a:p>
-            <a:pPr algn="l">
+            <a:pPr algn="ctr">
               <a:spcAft>
                 <a:spcPts val="600"/>
               </a:spcAft>
@@ -11458,8 +11458,8 @@
         </p:nvCxnSpPr>
         <p:spPr>
           <a:xfrm>
-            <a:off x="3739896" y="6492240"/>
-            <a:ext cx="1591056" cy="0"/>
+            <a:off x="3648456" y="6492240"/>
+            <a:ext cx="1682496" cy="0"/>
           </a:xfrm>
           <a:prstGeom prst="line">
             <a:avLst/>
@@ -11556,42 +11556,44 @@
           </a:fontRef>
         </p:style>
       </p:cxnSp>
-      <p:cxnSp>
-        <p:nvCxnSpPr>
-          <p:cNvPr id="71" name="Connector 70"/>
-          <p:cNvCxnSpPr/>
-          <p:nvPr/>
-        </p:nvCxnSpPr>
-        <p:spPr>
-          <a:xfrm>
-            <a:off x="7699248" y="3291840"/>
-            <a:ext cx="0" cy="137160"/>
-          </a:xfrm>
-          <a:prstGeom prst="line">
-            <a:avLst/>
-          </a:prstGeom>
-          <a:ln w="28575">
-            <a:solidFill>
-              <a:srgbClr val="F5EFE9"/>
-            </a:solidFill>
-            <a:tailEnd type="triangle" w="med" len="med"/>
-          </a:ln>
-        </p:spPr>
-        <p:style>
-          <a:lnRef idx="2">
-            <a:schemeClr val="accent1"/>
-          </a:lnRef>
-          <a:fillRef idx="0">
-            <a:schemeClr val="accent1"/>
-          </a:fillRef>
-          <a:effectRef idx="1">
-            <a:schemeClr val="accent1"/>
-          </a:effectRef>
-          <a:fontRef idx="minor">
-            <a:schemeClr val="tx1"/>
-          </a:fontRef>
-        </p:style>
-      </p:cxnSp>
+      <p:sp>
+        <p:nvSpPr>
+          <p:cNvPr id="71" name="TextBox 70"/>
+          <p:cNvSpPr txBox="1"/>
+          <p:nvPr/>
+        </p:nvSpPr>
+        <p:spPr>
+          <a:xfrm>
+            <a:off x="4023360" y="6144768"/>
+            <a:ext cx="914400" cy="365760"/>
+          </a:xfrm>
+          <a:prstGeom prst="rect">
+            <a:avLst/>
+          </a:prstGeom>
+          <a:noFill/>
+        </p:spPr>
+        <p:txBody>
+          <a:bodyPr wrap="square" anchor="b" lIns="0" rIns="0" tIns="54864" bIns="54864">
+            <a:spAutoFit/>
+          </a:bodyPr>
+          <a:lstStyle/>
+          <a:p>
+            <a:pPr algn="l">
+              <a:spcAft>
+                <a:spcPts val="600"/>
+              </a:spcAft>
+            </a:pPr>
+            <a:r>
+              <a:rPr sz="1100" b="1">
+                <a:solidFill>
+                  <a:srgbClr val="F5EFE9"/>
+                </a:solidFill>
+              </a:rPr>
+              <a:t>yes</a:t>
+            </a:r>
+          </a:p>
+        </p:txBody>
+      </p:sp>
       <p:cxnSp>
         <p:nvCxnSpPr>
           <p:cNvPr id="72" name="Connector 71"/>
@@ -11600,7 +11602,7 @@
         </p:nvCxnSpPr>
         <p:spPr>
           <a:xfrm>
-            <a:off x="7699248" y="4206240"/>
+            <a:off x="7699248" y="3291840"/>
             <a:ext cx="0" cy="137160"/>
           </a:xfrm>
           <a:prstGeom prst="line">
@@ -11636,8 +11638,8 @@
         </p:nvCxnSpPr>
         <p:spPr>
           <a:xfrm>
-            <a:off x="7699248" y="5212080"/>
-            <a:ext cx="0" cy="182880"/>
+            <a:off x="7699248" y="4206240"/>
+            <a:ext cx="0" cy="137160"/>
           </a:xfrm>
           <a:prstGeom prst="line">
             <a:avLst/>
@@ -11672,81 +11674,7 @@
         </p:nvCxnSpPr>
         <p:spPr>
           <a:xfrm>
-            <a:off x="8476488" y="5806440"/>
-            <a:ext cx="73152" cy="0"/>
-          </a:xfrm>
-          <a:prstGeom prst="line">
-            <a:avLst/>
-          </a:prstGeom>
-          <a:ln w="28575">
-            <a:solidFill>
-              <a:srgbClr val="F5EFE9"/>
-            </a:solidFill>
-            <a:tailEnd type="triangle" w="med" len="med"/>
-          </a:ln>
-        </p:spPr>
-        <p:style>
-          <a:lnRef idx="2">
-            <a:schemeClr val="accent1"/>
-          </a:lnRef>
-          <a:fillRef idx="0">
-            <a:schemeClr val="accent1"/>
-          </a:fillRef>
-          <a:effectRef idx="1">
-            <a:schemeClr val="accent1"/>
-          </a:effectRef>
-          <a:fontRef idx="minor">
-            <a:schemeClr val="tx1"/>
-          </a:fontRef>
-        </p:style>
-      </p:cxnSp>
-      <p:sp>
-        <p:nvSpPr>
-          <p:cNvPr id="75" name="TextBox 74"/>
-          <p:cNvSpPr txBox="1"/>
-          <p:nvPr/>
-        </p:nvSpPr>
-        <p:spPr>
-          <a:xfrm>
-            <a:off x="8604503" y="5422392"/>
-            <a:ext cx="2926080" cy="365760"/>
-          </a:xfrm>
-          <a:prstGeom prst="rect">
-            <a:avLst/>
-          </a:prstGeom>
-          <a:noFill/>
-        </p:spPr>
-        <p:txBody>
-          <a:bodyPr wrap="square" anchor="b" lIns="0" rIns="0" tIns="54864" bIns="54864">
-            <a:spAutoFit/>
-          </a:bodyPr>
-          <a:lstStyle/>
-          <a:p>
-            <a:pPr algn="l">
-              <a:spcAft>
-                <a:spcPts val="600"/>
-              </a:spcAft>
-            </a:pPr>
-            <a:r>
-              <a:rPr sz="1100" b="1">
-                <a:solidFill>
-                  <a:srgbClr val="F5EFE9"/>
-                </a:solidFill>
-              </a:rPr>
-              <a:t>no</a:t>
-            </a:r>
-          </a:p>
-        </p:txBody>
-      </p:sp>
-      <p:cxnSp>
-        <p:nvCxnSpPr>
-          <p:cNvPr id="76" name="Connector 75"/>
-          <p:cNvCxnSpPr/>
-          <p:nvPr/>
-        </p:nvCxnSpPr>
-        <p:spPr>
-          <a:xfrm>
-            <a:off x="7699248" y="6217920"/>
+            <a:off x="7699248" y="5212080"/>
             <a:ext cx="0" cy="182880"/>
           </a:xfrm>
           <a:prstGeom prst="line">
@@ -11776,14 +11704,14 @@
       </p:cxnSp>
       <p:cxnSp>
         <p:nvCxnSpPr>
-          <p:cNvPr id="77" name="Connector 76"/>
+          <p:cNvPr id="75" name="Connector 74"/>
           <p:cNvCxnSpPr/>
           <p:nvPr/>
         </p:nvCxnSpPr>
         <p:spPr>
           <a:xfrm>
-            <a:off x="9756648" y="6789420"/>
-            <a:ext cx="310896" cy="0"/>
+            <a:off x="8385048" y="5806440"/>
+            <a:ext cx="457200" cy="0"/>
           </a:xfrm>
           <a:prstGeom prst="line">
             <a:avLst/>
@@ -11792,6 +11720,7 @@
             <a:solidFill>
               <a:srgbClr val="F5EFE9"/>
             </a:solidFill>
+            <a:tailEnd type="triangle" w="med" len="med"/>
           </a:ln>
         </p:spPr>
         <p:style>
@@ -11809,16 +11738,54 @@
           </a:fontRef>
         </p:style>
       </p:cxnSp>
+      <p:sp>
+        <p:nvSpPr>
+          <p:cNvPr id="76" name="TextBox 75"/>
+          <p:cNvSpPr txBox="1"/>
+          <p:nvPr/>
+        </p:nvSpPr>
+        <p:spPr>
+          <a:xfrm>
+            <a:off x="8065008" y="5495544"/>
+            <a:ext cx="1097280" cy="274320"/>
+          </a:xfrm>
+          <a:prstGeom prst="rect">
+            <a:avLst/>
+          </a:prstGeom>
+          <a:noFill/>
+        </p:spPr>
+        <p:txBody>
+          <a:bodyPr wrap="square" anchor="b" lIns="0" rIns="0" tIns="54864" bIns="54864">
+            <a:spAutoFit/>
+          </a:bodyPr>
+          <a:lstStyle/>
+          <a:p>
+            <a:pPr algn="ctr">
+              <a:spcAft>
+                <a:spcPts val="600"/>
+              </a:spcAft>
+            </a:pPr>
+            <a:r>
+              <a:rPr sz="1100" b="1">
+                <a:solidFill>
+                  <a:srgbClr val="F5EFE9"/>
+                </a:solidFill>
+              </a:rPr>
+              <a:t>no</a:t>
+            </a:r>
+          </a:p>
+        </p:txBody>
+      </p:sp>
       <p:cxnSp>
         <p:nvCxnSpPr>
-          <p:cNvPr id="78" name="Connector 77"/>
+          <p:cNvPr id="77" name="Connector 76"/>
           <p:cNvCxnSpPr/>
           <p:nvPr/>
         </p:nvCxnSpPr>
         <p:spPr>
-          <a:xfrm flipV="1">
-            <a:off x="10067544" y="3474720"/>
-            <a:ext cx="0" cy="3314700"/>
+          <a:xfrm>
+            <a:off x="7699248" y="6217920"/>
+            <a:ext cx="0" cy="182880"/>
           </a:xfrm>
           <a:prstGeom prst="line">
             <a:avLst/>
@@ -11827,6 +11794,7 @@
             <a:solidFill>
               <a:srgbClr val="F5EFE9"/>
             </a:solidFill>
+            <a:tailEnd type="triangle" w="med" len="med"/>
           </a:ln>
         </p:spPr>
         <p:style>
@@ -11844,6 +11812,44 @@
           </a:fontRef>
         </p:style>
       </p:cxnSp>
+      <p:sp>
+        <p:nvSpPr>
+          <p:cNvPr id="78" name="TextBox 77"/>
+          <p:cNvSpPr txBox="1"/>
+          <p:nvPr/>
+        </p:nvSpPr>
+        <p:spPr>
+          <a:xfrm>
+            <a:off x="7763256" y="6172200"/>
+            <a:ext cx="1097280" cy="274320"/>
+          </a:xfrm>
+          <a:prstGeom prst="rect">
+            <a:avLst/>
+          </a:prstGeom>
+          <a:noFill/>
+        </p:spPr>
+        <p:txBody>
+          <a:bodyPr wrap="square" anchor="ctr" lIns="0" rIns="0" tIns="54864" bIns="54864">
+            <a:spAutoFit/>
+          </a:bodyPr>
+          <a:lstStyle/>
+          <a:p>
+            <a:pPr algn="l">
+              <a:spcAft>
+                <a:spcPts val="600"/>
+              </a:spcAft>
+            </a:pPr>
+            <a:r>
+              <a:rPr sz="1100" b="1">
+                <a:solidFill>
+                  <a:srgbClr val="F5EFE9"/>
+                </a:solidFill>
+              </a:rPr>
+              <a:t>yes</a:t>
+            </a:r>
+          </a:p>
+        </p:txBody>
+      </p:sp>
       <p:cxnSp>
         <p:nvCxnSpPr>
           <p:cNvPr id="79" name="Connector 78"/>
@@ -11852,7 +11858,7 @@
         </p:nvCxnSpPr>
         <p:spPr>
           <a:xfrm>
-            <a:off x="10067544" y="3474720"/>
+            <a:off x="9756648" y="6789420"/>
             <a:ext cx="310896" cy="0"/>
           </a:xfrm>
           <a:prstGeom prst="line">
@@ -11862,7 +11868,6 @@
             <a:solidFill>
               <a:srgbClr val="F5EFE9"/>
             </a:solidFill>
-            <a:tailEnd type="triangle" w="med" len="med"/>
           </a:ln>
         </p:spPr>
         <p:style>
@@ -11887,9 +11892,9 @@
           <p:nvPr/>
         </p:nvCxnSpPr>
         <p:spPr>
-          <a:xfrm>
-            <a:off x="12435840" y="2971800"/>
-            <a:ext cx="0" cy="137160"/>
+          <a:xfrm flipV="1">
+            <a:off x="10067544" y="3474720"/>
+            <a:ext cx="0" cy="3314700"/>
           </a:xfrm>
           <a:prstGeom prst="line">
             <a:avLst/>
@@ -11898,7 +11903,6 @@
             <a:solidFill>
               <a:srgbClr val="F5EFE9"/>
             </a:solidFill>
-            <a:tailEnd type="triangle" w="med" len="med"/>
           </a:ln>
         </p:spPr>
         <p:style>
@@ -11924,8 +11928,8 @@
         </p:nvCxnSpPr>
         <p:spPr>
           <a:xfrm>
-            <a:off x="12435840" y="3840480"/>
-            <a:ext cx="0" cy="137159"/>
+            <a:off x="10067544" y="3474720"/>
+            <a:ext cx="310896" cy="0"/>
           </a:xfrm>
           <a:prstGeom prst="line">
             <a:avLst/>
@@ -11960,7 +11964,7 @@
         </p:nvCxnSpPr>
         <p:spPr>
           <a:xfrm>
-            <a:off x="12435840" y="5074920"/>
+            <a:off x="12435840" y="2971800"/>
             <a:ext cx="0" cy="137160"/>
           </a:xfrm>
           <a:prstGeom prst="line">
@@ -11996,82 +12000,8 @@
         </p:nvCxnSpPr>
         <p:spPr>
           <a:xfrm>
-            <a:off x="13624559" y="5692140"/>
-            <a:ext cx="73152" cy="0"/>
-          </a:xfrm>
-          <a:prstGeom prst="line">
-            <a:avLst/>
-          </a:prstGeom>
-          <a:ln w="28575">
-            <a:solidFill>
-              <a:srgbClr val="F5EFE9"/>
-            </a:solidFill>
-            <a:tailEnd type="triangle" w="med" len="med"/>
-          </a:ln>
-        </p:spPr>
-        <p:style>
-          <a:lnRef idx="2">
-            <a:schemeClr val="accent1"/>
-          </a:lnRef>
-          <a:fillRef idx="0">
-            <a:schemeClr val="accent1"/>
-          </a:fillRef>
-          <a:effectRef idx="1">
-            <a:schemeClr val="accent1"/>
-          </a:effectRef>
-          <a:fontRef idx="minor">
-            <a:schemeClr val="tx1"/>
-          </a:fontRef>
-        </p:style>
-      </p:cxnSp>
-      <p:sp>
-        <p:nvSpPr>
-          <p:cNvPr id="84" name="TextBox 83"/>
-          <p:cNvSpPr txBox="1"/>
-          <p:nvPr/>
-        </p:nvSpPr>
-        <p:spPr>
-          <a:xfrm>
-            <a:off x="13752575" y="5308092"/>
-            <a:ext cx="2926080" cy="365760"/>
-          </a:xfrm>
-          <a:prstGeom prst="rect">
-            <a:avLst/>
-          </a:prstGeom>
-          <a:noFill/>
-        </p:spPr>
-        <p:txBody>
-          <a:bodyPr wrap="square" anchor="b" lIns="0" rIns="0" tIns="54864" bIns="54864">
-            <a:spAutoFit/>
-          </a:bodyPr>
-          <a:lstStyle/>
-          <a:p>
-            <a:pPr algn="l">
-              <a:spcAft>
-                <a:spcPts val="600"/>
-              </a:spcAft>
-            </a:pPr>
-            <a:r>
-              <a:rPr sz="1100" b="1">
-                <a:solidFill>
-                  <a:srgbClr val="F5EFE9"/>
-                </a:solidFill>
-              </a:rPr>
-              <a:t>no</a:t>
-            </a:r>
-          </a:p>
-        </p:txBody>
-      </p:sp>
-      <p:cxnSp>
-        <p:nvCxnSpPr>
-          <p:cNvPr id="85" name="Connector 84"/>
-          <p:cNvCxnSpPr/>
-          <p:nvPr/>
-        </p:nvCxnSpPr>
-        <p:spPr>
-          <a:xfrm>
-            <a:off x="12435840" y="6172200"/>
-            <a:ext cx="0" cy="137160"/>
+            <a:off x="12435840" y="3840480"/>
+            <a:ext cx="0" cy="137159"/>
           </a:xfrm>
           <a:prstGeom prst="line">
             <a:avLst/>
@@ -12100,13 +12030,13 @@
       </p:cxnSp>
       <p:cxnSp>
         <p:nvCxnSpPr>
-          <p:cNvPr id="86" name="Connector 85"/>
+          <p:cNvPr id="84" name="Connector 83"/>
           <p:cNvCxnSpPr/>
           <p:nvPr/>
         </p:nvCxnSpPr>
         <p:spPr>
           <a:xfrm>
-            <a:off x="12435840" y="7040880"/>
+            <a:off x="12435840" y="5074920"/>
             <a:ext cx="0" cy="137160"/>
           </a:xfrm>
           <a:prstGeom prst="line">
@@ -12136,14 +12066,14 @@
       </p:cxnSp>
       <p:cxnSp>
         <p:nvCxnSpPr>
-          <p:cNvPr id="87" name="Connector 86"/>
+          <p:cNvPr id="85" name="Connector 84"/>
           <p:cNvCxnSpPr/>
           <p:nvPr/>
         </p:nvCxnSpPr>
         <p:spPr>
-          <a:xfrm>
-            <a:off x="14493240" y="7635240"/>
-            <a:ext cx="310896" cy="0"/>
+          <a:xfrm flipV="1">
+            <a:off x="13121640" y="5623559"/>
+            <a:ext cx="457200" cy="1"/>
           </a:xfrm>
           <a:prstGeom prst="line">
             <a:avLst/>
@@ -12152,6 +12082,7 @@
             <a:solidFill>
               <a:srgbClr val="F5EFE9"/>
             </a:solidFill>
+            <a:tailEnd type="triangle" w="med" len="med"/>
           </a:ln>
         </p:spPr>
         <p:style>
@@ -12169,16 +12100,54 @@
           </a:fontRef>
         </p:style>
       </p:cxnSp>
+      <p:sp>
+        <p:nvSpPr>
+          <p:cNvPr id="86" name="TextBox 85"/>
+          <p:cNvSpPr txBox="1"/>
+          <p:nvPr/>
+        </p:nvSpPr>
+        <p:spPr>
+          <a:xfrm>
+            <a:off x="12801600" y="5312664"/>
+            <a:ext cx="1097280" cy="274320"/>
+          </a:xfrm>
+          <a:prstGeom prst="rect">
+            <a:avLst/>
+          </a:prstGeom>
+          <a:noFill/>
+        </p:spPr>
+        <p:txBody>
+          <a:bodyPr wrap="square" anchor="b" lIns="0" rIns="0" tIns="54864" bIns="54864">
+            <a:spAutoFit/>
+          </a:bodyPr>
+          <a:lstStyle/>
+          <a:p>
+            <a:pPr algn="ctr">
+              <a:spcAft>
+                <a:spcPts val="600"/>
+              </a:spcAft>
+            </a:pPr>
+            <a:r>
+              <a:rPr sz="1100" b="1">
+                <a:solidFill>
+                  <a:srgbClr val="F5EFE9"/>
+                </a:solidFill>
+              </a:rPr>
+              <a:t>no</a:t>
+            </a:r>
+          </a:p>
+        </p:txBody>
+      </p:sp>
       <p:cxnSp>
         <p:nvCxnSpPr>
-          <p:cNvPr id="88" name="Connector 87"/>
+          <p:cNvPr id="87" name="Connector 86"/>
           <p:cNvCxnSpPr/>
           <p:nvPr/>
         </p:nvCxnSpPr>
         <p:spPr>
-          <a:xfrm flipV="1">
-            <a:off x="14804136" y="2743200"/>
-            <a:ext cx="0" cy="4892040"/>
+          <a:xfrm>
+            <a:off x="12435840" y="6035040"/>
+            <a:ext cx="0" cy="182880"/>
           </a:xfrm>
           <a:prstGeom prst="line">
             <a:avLst/>
@@ -12187,6 +12156,7 @@
             <a:solidFill>
               <a:srgbClr val="F5EFE9"/>
             </a:solidFill>
+            <a:tailEnd type="triangle" w="med" len="med"/>
           </a:ln>
         </p:spPr>
         <p:style>
@@ -12204,6 +12174,44 @@
           </a:fontRef>
         </p:style>
       </p:cxnSp>
+      <p:sp>
+        <p:nvSpPr>
+          <p:cNvPr id="88" name="TextBox 87"/>
+          <p:cNvSpPr txBox="1"/>
+          <p:nvPr/>
+        </p:nvSpPr>
+        <p:spPr>
+          <a:xfrm>
+            <a:off x="12499848" y="5989320"/>
+            <a:ext cx="1097280" cy="274320"/>
+          </a:xfrm>
+          <a:prstGeom prst="rect">
+            <a:avLst/>
+          </a:prstGeom>
+          <a:noFill/>
+        </p:spPr>
+        <p:txBody>
+          <a:bodyPr wrap="square" anchor="ctr" lIns="0" rIns="0" tIns="54864" bIns="54864">
+            <a:spAutoFit/>
+          </a:bodyPr>
+          <a:lstStyle/>
+          <a:p>
+            <a:pPr algn="l">
+              <a:spcAft>
+                <a:spcPts val="600"/>
+              </a:spcAft>
+            </a:pPr>
+            <a:r>
+              <a:rPr sz="1100" b="1">
+                <a:solidFill>
+                  <a:srgbClr val="F5EFE9"/>
+                </a:solidFill>
+              </a:rPr>
+              <a:t>yes</a:t>
+            </a:r>
+          </a:p>
+        </p:txBody>
+      </p:sp>
       <p:cxnSp>
         <p:nvCxnSpPr>
           <p:cNvPr id="89" name="Connector 88"/>
@@ -12212,8 +12220,8 @@
         </p:nvCxnSpPr>
         <p:spPr>
           <a:xfrm>
-            <a:off x="14804136" y="2743200"/>
-            <a:ext cx="310896" cy="0"/>
+            <a:off x="12435840" y="6949440"/>
+            <a:ext cx="0" cy="137160"/>
           </a:xfrm>
           <a:prstGeom prst="line">
             <a:avLst/>
@@ -12248,8 +12256,8 @@
         </p:nvCxnSpPr>
         <p:spPr>
           <a:xfrm>
-            <a:off x="17172432" y="2971800"/>
-            <a:ext cx="0" cy="137160"/>
+            <a:off x="14493240" y="7543800"/>
+            <a:ext cx="310896" cy="0"/>
           </a:xfrm>
           <a:prstGeom prst="line">
             <a:avLst/>
@@ -12258,7 +12266,6 @@
             <a:solidFill>
               <a:srgbClr val="F5EFE9"/>
             </a:solidFill>
-            <a:tailEnd type="triangle" w="med" len="med"/>
           </a:ln>
         </p:spPr>
         <p:style>
@@ -12283,9 +12290,9 @@
           <p:nvPr/>
         </p:nvCxnSpPr>
         <p:spPr>
-          <a:xfrm>
-            <a:off x="17172432" y="3794760"/>
-            <a:ext cx="0" cy="137160"/>
+          <a:xfrm flipV="1">
+            <a:off x="14804136" y="2743200"/>
+            <a:ext cx="0" cy="4800600"/>
           </a:xfrm>
           <a:prstGeom prst="line">
             <a:avLst/>
@@ -12294,7 +12301,6 @@
             <a:solidFill>
               <a:srgbClr val="F5EFE9"/>
             </a:solidFill>
-            <a:tailEnd type="triangle" w="med" len="med"/>
           </a:ln>
         </p:spPr>
         <p:style>
@@ -12320,8 +12326,8 @@
         </p:nvCxnSpPr>
         <p:spPr>
           <a:xfrm>
-            <a:off x="17172432" y="4937760"/>
-            <a:ext cx="0" cy="137160"/>
+            <a:off x="14804136" y="2743200"/>
+            <a:ext cx="310896" cy="0"/>
           </a:xfrm>
           <a:prstGeom prst="line">
             <a:avLst/>
@@ -12356,8 +12362,8 @@
         </p:nvCxnSpPr>
         <p:spPr>
           <a:xfrm>
-            <a:off x="17949672" y="5486400"/>
-            <a:ext cx="73152" cy="0"/>
+            <a:off x="17172432" y="2971800"/>
+            <a:ext cx="0" cy="137160"/>
           </a:xfrm>
           <a:prstGeom prst="line">
             <a:avLst/>
@@ -12384,44 +12390,42 @@
           </a:fontRef>
         </p:style>
       </p:cxnSp>
-      <p:sp>
-        <p:nvSpPr>
-          <p:cNvPr id="94" name="TextBox 93"/>
-          <p:cNvSpPr txBox="1"/>
-          <p:nvPr/>
-        </p:nvSpPr>
-        <p:spPr>
-          <a:xfrm>
-            <a:off x="18077688" y="5102352"/>
-            <a:ext cx="2926080" cy="365760"/>
-          </a:xfrm>
-          <a:prstGeom prst="rect">
-            <a:avLst/>
-          </a:prstGeom>
-          <a:noFill/>
-        </p:spPr>
-        <p:txBody>
-          <a:bodyPr wrap="square" anchor="b" lIns="0" rIns="0" tIns="54864" bIns="54864">
-            <a:spAutoFit/>
-          </a:bodyPr>
-          <a:lstStyle/>
-          <a:p>
-            <a:pPr algn="l">
-              <a:spcAft>
-                <a:spcPts val="600"/>
-              </a:spcAft>
-            </a:pPr>
-            <a:r>
-              <a:rPr sz="1100" b="1">
-                <a:solidFill>
-                  <a:srgbClr val="F5EFE9"/>
-                </a:solidFill>
-              </a:rPr>
-              <a:t>no</a:t>
-            </a:r>
-          </a:p>
-        </p:txBody>
-      </p:sp>
+      <p:cxnSp>
+        <p:nvCxnSpPr>
+          <p:cNvPr id="94" name="Connector 93"/>
+          <p:cNvCxnSpPr/>
+          <p:nvPr/>
+        </p:nvCxnSpPr>
+        <p:spPr>
+          <a:xfrm>
+            <a:off x="17172432" y="3794760"/>
+            <a:ext cx="0" cy="137160"/>
+          </a:xfrm>
+          <a:prstGeom prst="line">
+            <a:avLst/>
+          </a:prstGeom>
+          <a:ln w="28575">
+            <a:solidFill>
+              <a:srgbClr val="F5EFE9"/>
+            </a:solidFill>
+            <a:tailEnd type="triangle" w="med" len="med"/>
+          </a:ln>
+        </p:spPr>
+        <p:style>
+          <a:lnRef idx="2">
+            <a:schemeClr val="accent1"/>
+          </a:lnRef>
+          <a:fillRef idx="0">
+            <a:schemeClr val="accent1"/>
+          </a:fillRef>
+          <a:effectRef idx="1">
+            <a:schemeClr val="accent1"/>
+          </a:effectRef>
+          <a:fontRef idx="minor">
+            <a:schemeClr val="tx1"/>
+          </a:fontRef>
+        </p:style>
+      </p:cxnSp>
       <p:cxnSp>
         <p:nvCxnSpPr>
           <p:cNvPr id="95" name="Connector 94"/>
@@ -12430,7 +12434,7 @@
         </p:nvCxnSpPr>
         <p:spPr>
           <a:xfrm>
-            <a:off x="17172432" y="5897880"/>
+            <a:off x="17172432" y="4937760"/>
             <a:ext cx="0" cy="137160"/>
           </a:xfrm>
           <a:prstGeom prst="line">
@@ -12466,8 +12470,8 @@
         </p:nvCxnSpPr>
         <p:spPr>
           <a:xfrm>
-            <a:off x="17172432" y="6720840"/>
-            <a:ext cx="0" cy="137160"/>
+            <a:off x="17858232" y="5486400"/>
+            <a:ext cx="457200" cy="0"/>
           </a:xfrm>
           <a:prstGeom prst="line">
             <a:avLst/>
@@ -12494,16 +12498,54 @@
           </a:fontRef>
         </p:style>
       </p:cxnSp>
+      <p:sp>
+        <p:nvSpPr>
+          <p:cNvPr id="97" name="TextBox 96"/>
+          <p:cNvSpPr txBox="1"/>
+          <p:nvPr/>
+        </p:nvSpPr>
+        <p:spPr>
+          <a:xfrm>
+            <a:off x="17538192" y="5175504"/>
+            <a:ext cx="1097280" cy="274320"/>
+          </a:xfrm>
+          <a:prstGeom prst="rect">
+            <a:avLst/>
+          </a:prstGeom>
+          <a:noFill/>
+        </p:spPr>
+        <p:txBody>
+          <a:bodyPr wrap="square" anchor="b" lIns="0" rIns="0" tIns="54864" bIns="54864">
+            <a:spAutoFit/>
+          </a:bodyPr>
+          <a:lstStyle/>
+          <a:p>
+            <a:pPr algn="ctr">
+              <a:spcAft>
+                <a:spcPts val="600"/>
+              </a:spcAft>
+            </a:pPr>
+            <a:r>
+              <a:rPr sz="1100" b="1">
+                <a:solidFill>
+                  <a:srgbClr val="F5EFE9"/>
+                </a:solidFill>
+              </a:rPr>
+              <a:t>no</a:t>
+            </a:r>
+          </a:p>
+        </p:txBody>
+      </p:sp>
       <p:cxnSp>
         <p:nvCxnSpPr>
-          <p:cNvPr id="97" name="Connector 96"/>
+          <p:cNvPr id="98" name="Connector 97"/>
           <p:cNvCxnSpPr/>
           <p:nvPr/>
         </p:nvCxnSpPr>
         <p:spPr>
           <a:xfrm>
-            <a:off x="17172432" y="7635240"/>
-            <a:ext cx="0" cy="777240"/>
+            <a:off x="17172432" y="5897880"/>
+            <a:ext cx="0" cy="137160"/>
           </a:xfrm>
           <a:prstGeom prst="line">
             <a:avLst/>
@@ -12512,6 +12554,7 @@
             <a:solidFill>
               <a:srgbClr val="F5EFE9"/>
             </a:solidFill>
+            <a:tailEnd type="triangle" w="med" len="med"/>
           </a:ln>
         </p:spPr>
         <p:style>
@@ -12529,51 +12572,54 @@
           </a:fontRef>
         </p:style>
       </p:cxnSp>
+      <p:sp>
+        <p:nvSpPr>
+          <p:cNvPr id="99" name="TextBox 98"/>
+          <p:cNvSpPr txBox="1"/>
+          <p:nvPr/>
+        </p:nvSpPr>
+        <p:spPr>
+          <a:xfrm>
+            <a:off x="17236440" y="5829300"/>
+            <a:ext cx="1097280" cy="274320"/>
+          </a:xfrm>
+          <a:prstGeom prst="rect">
+            <a:avLst/>
+          </a:prstGeom>
+          <a:noFill/>
+        </p:spPr>
+        <p:txBody>
+          <a:bodyPr wrap="square" anchor="ctr" lIns="0" rIns="0" tIns="54864" bIns="54864">
+            <a:spAutoFit/>
+          </a:bodyPr>
+          <a:lstStyle/>
+          <a:p>
+            <a:pPr algn="l">
+              <a:spcAft>
+                <a:spcPts val="600"/>
+              </a:spcAft>
+            </a:pPr>
+            <a:r>
+              <a:rPr sz="1100" b="1">
+                <a:solidFill>
+                  <a:srgbClr val="F5EFE9"/>
+                </a:solidFill>
+              </a:rPr>
+              <a:t>yes</a:t>
+            </a:r>
+          </a:p>
+        </p:txBody>
+      </p:sp>
       <p:cxnSp>
         <p:nvCxnSpPr>
-          <p:cNvPr id="98" name="Connector 97"/>
+          <p:cNvPr id="100" name="Connector 99"/>
           <p:cNvCxnSpPr/>
           <p:nvPr/>
         </p:nvCxnSpPr>
         <p:spPr>
-          <a:xfrm flipH="1">
-            <a:off x="16276320" y="8412480"/>
-            <a:ext cx="896112" cy="0"/>
-          </a:xfrm>
-          <a:prstGeom prst="line">
-            <a:avLst/>
-          </a:prstGeom>
-          <a:ln w="28575">
-            <a:solidFill>
-              <a:srgbClr val="F5EFE9"/>
-            </a:solidFill>
-          </a:ln>
-        </p:spPr>
-        <p:style>
-          <a:lnRef idx="2">
-            <a:schemeClr val="accent1"/>
-          </a:lnRef>
-          <a:fillRef idx="0">
-            <a:schemeClr val="accent1"/>
-          </a:fillRef>
-          <a:effectRef idx="1">
-            <a:schemeClr val="accent1"/>
-          </a:effectRef>
-          <a:fontRef idx="minor">
-            <a:schemeClr val="tx1"/>
-          </a:fontRef>
-        </p:style>
-      </p:cxnSp>
-      <p:cxnSp>
-        <p:nvCxnSpPr>
-          <p:cNvPr id="99" name="Connector 98"/>
-          <p:cNvCxnSpPr/>
-          <p:nvPr/>
-        </p:nvCxnSpPr>
-        <p:spPr>
-          <a:xfrm>
-            <a:off x="16276320" y="8412480"/>
-            <a:ext cx="0" cy="685800"/>
+          <a:xfrm>
+            <a:off x="17172432" y="6720840"/>
+            <a:ext cx="0" cy="137160"/>
           </a:xfrm>
           <a:prstGeom prst="line">
             <a:avLst/>
@@ -12583,41 +12629,6 @@
               <a:srgbClr val="F5EFE9"/>
             </a:solidFill>
             <a:tailEnd type="triangle" w="med" len="med"/>
-          </a:ln>
-        </p:spPr>
-        <p:style>
-          <a:lnRef idx="2">
-            <a:schemeClr val="accent1"/>
-          </a:lnRef>
-          <a:fillRef idx="0">
-            <a:schemeClr val="accent1"/>
-          </a:fillRef>
-          <a:effectRef idx="1">
-            <a:schemeClr val="accent1"/>
-          </a:effectRef>
-          <a:fontRef idx="minor">
-            <a:schemeClr val="tx1"/>
-          </a:fontRef>
-        </p:style>
-      </p:cxnSp>
-      <p:cxnSp>
-        <p:nvCxnSpPr>
-          <p:cNvPr id="100" name="Connector 99"/>
-          <p:cNvCxnSpPr/>
-          <p:nvPr/>
-        </p:nvCxnSpPr>
-        <p:spPr>
-          <a:xfrm>
-            <a:off x="19202400" y="9578340"/>
-            <a:ext cx="457200" cy="0"/>
-          </a:xfrm>
-          <a:prstGeom prst="line">
-            <a:avLst/>
-          </a:prstGeom>
-          <a:ln w="28575">
-            <a:solidFill>
-              <a:srgbClr val="F5EFE9"/>
-            </a:solidFill>
           </a:ln>
         </p:spPr>
         <p:style>
@@ -12642,9 +12653,9 @@
           <p:nvPr/>
         </p:nvCxnSpPr>
         <p:spPr>
-          <a:xfrm flipV="1">
-            <a:off x="19659600" y="1691640"/>
-            <a:ext cx="0" cy="7886700"/>
+          <a:xfrm>
+            <a:off x="17172432" y="7635240"/>
+            <a:ext cx="0" cy="777240"/>
           </a:xfrm>
           <a:prstGeom prst="line">
             <a:avLst/>
@@ -12678,8 +12689,8 @@
         </p:nvCxnSpPr>
         <p:spPr>
           <a:xfrm flipH="1">
-            <a:off x="12435840" y="1691640"/>
-            <a:ext cx="7223760" cy="0"/>
+            <a:off x="16276320" y="8412480"/>
+            <a:ext cx="896112" cy="0"/>
           </a:xfrm>
           <a:prstGeom prst="line">
             <a:avLst/>
@@ -12713,8 +12724,8 @@
         </p:nvCxnSpPr>
         <p:spPr>
           <a:xfrm>
-            <a:off x="12435840" y="1691640"/>
-            <a:ext cx="0" cy="822960"/>
+            <a:off x="16276320" y="8412480"/>
+            <a:ext cx="0" cy="685800"/>
           </a:xfrm>
           <a:prstGeom prst="line">
             <a:avLst/>
@@ -12741,9 +12752,150 @@
           </a:fontRef>
         </p:style>
       </p:cxnSp>
-      <p:sp>
-        <p:nvSpPr>
-          <p:cNvPr id="104" name="TextBox 103"/>
+      <p:cxnSp>
+        <p:nvCxnSpPr>
+          <p:cNvPr id="104" name="Connector 103"/>
+          <p:cNvCxnSpPr/>
+          <p:nvPr/>
+        </p:nvCxnSpPr>
+        <p:spPr>
+          <a:xfrm>
+            <a:off x="19202400" y="9578340"/>
+            <a:ext cx="457200" cy="0"/>
+          </a:xfrm>
+          <a:prstGeom prst="line">
+            <a:avLst/>
+          </a:prstGeom>
+          <a:ln w="28575">
+            <a:solidFill>
+              <a:srgbClr val="F5EFE9"/>
+            </a:solidFill>
+          </a:ln>
+        </p:spPr>
+        <p:style>
+          <a:lnRef idx="2">
+            <a:schemeClr val="accent1"/>
+          </a:lnRef>
+          <a:fillRef idx="0">
+            <a:schemeClr val="accent1"/>
+          </a:fillRef>
+          <a:effectRef idx="1">
+            <a:schemeClr val="accent1"/>
+          </a:effectRef>
+          <a:fontRef idx="minor">
+            <a:schemeClr val="tx1"/>
+          </a:fontRef>
+        </p:style>
+      </p:cxnSp>
+      <p:cxnSp>
+        <p:nvCxnSpPr>
+          <p:cNvPr id="105" name="Connector 104"/>
+          <p:cNvCxnSpPr/>
+          <p:nvPr/>
+        </p:nvCxnSpPr>
+        <p:spPr>
+          <a:xfrm flipV="1">
+            <a:off x="19659600" y="1691640"/>
+            <a:ext cx="0" cy="7886700"/>
+          </a:xfrm>
+          <a:prstGeom prst="line">
+            <a:avLst/>
+          </a:prstGeom>
+          <a:ln w="28575">
+            <a:solidFill>
+              <a:srgbClr val="F5EFE9"/>
+            </a:solidFill>
+          </a:ln>
+        </p:spPr>
+        <p:style>
+          <a:lnRef idx="2">
+            <a:schemeClr val="accent1"/>
+          </a:lnRef>
+          <a:fillRef idx="0">
+            <a:schemeClr val="accent1"/>
+          </a:fillRef>
+          <a:effectRef idx="1">
+            <a:schemeClr val="accent1"/>
+          </a:effectRef>
+          <a:fontRef idx="minor">
+            <a:schemeClr val="tx1"/>
+          </a:fontRef>
+        </p:style>
+      </p:cxnSp>
+      <p:cxnSp>
+        <p:nvCxnSpPr>
+          <p:cNvPr id="106" name="Connector 105"/>
+          <p:cNvCxnSpPr/>
+          <p:nvPr/>
+        </p:nvCxnSpPr>
+        <p:spPr>
+          <a:xfrm flipH="1">
+            <a:off x="12435840" y="1691640"/>
+            <a:ext cx="7223760" cy="0"/>
+          </a:xfrm>
+          <a:prstGeom prst="line">
+            <a:avLst/>
+          </a:prstGeom>
+          <a:ln w="28575">
+            <a:solidFill>
+              <a:srgbClr val="F5EFE9"/>
+            </a:solidFill>
+          </a:ln>
+        </p:spPr>
+        <p:style>
+          <a:lnRef idx="2">
+            <a:schemeClr val="accent1"/>
+          </a:lnRef>
+          <a:fillRef idx="0">
+            <a:schemeClr val="accent1"/>
+          </a:fillRef>
+          <a:effectRef idx="1">
+            <a:schemeClr val="accent1"/>
+          </a:effectRef>
+          <a:fontRef idx="minor">
+            <a:schemeClr val="tx1"/>
+          </a:fontRef>
+        </p:style>
+      </p:cxnSp>
+      <p:cxnSp>
+        <p:nvCxnSpPr>
+          <p:cNvPr id="107" name="Connector 106"/>
+          <p:cNvCxnSpPr/>
+          <p:nvPr/>
+        </p:nvCxnSpPr>
+        <p:spPr>
+          <a:xfrm>
+            <a:off x="12435840" y="1691640"/>
+            <a:ext cx="0" cy="822960"/>
+          </a:xfrm>
+          <a:prstGeom prst="line">
+            <a:avLst/>
+          </a:prstGeom>
+          <a:ln w="28575">
+            <a:solidFill>
+              <a:srgbClr val="F5EFE9"/>
+            </a:solidFill>
+            <a:tailEnd type="triangle" w="med" len="med"/>
+          </a:ln>
+        </p:spPr>
+        <p:style>
+          <a:lnRef idx="2">
+            <a:schemeClr val="accent1"/>
+          </a:lnRef>
+          <a:fillRef idx="0">
+            <a:schemeClr val="accent1"/>
+          </a:fillRef>
+          <a:effectRef idx="1">
+            <a:schemeClr val="accent1"/>
+          </a:effectRef>
+          <a:fontRef idx="minor">
+            <a:schemeClr val="tx1"/>
+          </a:fontRef>
+        </p:style>
+      </p:cxnSp>
+      <p:sp>
+        <p:nvSpPr>
+          <p:cNvPr id="108" name="TextBox 107"/>
           <p:cNvSpPr txBox="1"/>
           <p:nvPr/>
         </p:nvSpPr>
@@ -12774,7 +12926,7 @@
                   <a:srgbClr val="F5EFE9"/>
                 </a:solidFill>
               </a:rPr>
-              <a:t>Orange diamonds are gates: a 'no' stops the run and names the rollback. Numbers are the order of one full promotion. The Workstreams tree is never moved; the offering is a curated copy promoted org by org.</a:t>
+              <a:t>Orange diamonds are gates: yes continues, no stops the run and names the rollback. Numbers are the order of one full promotion. The Workstreams tree is never moved; the offering is a curated copy promoted org by org.</a:t>
             </a:r>
           </a:p>
         </p:txBody>
@@ -14705,8 +14857,8 @@
         </p:nvSpPr>
         <p:spPr>
           <a:xfrm>
-            <a:off x="17099280" y="4023360"/>
-            <a:ext cx="2103120" cy="960120"/>
+            <a:off x="17099280" y="4069080"/>
+            <a:ext cx="2103120" cy="868680"/>
           </a:xfrm>
           <a:prstGeom prst="diamond">
             <a:avLst/>
@@ -14761,7 +14913,7 @@
         </p:nvSpPr>
         <p:spPr>
           <a:xfrm>
-            <a:off x="16971264" y="3895344"/>
+            <a:off x="16971264" y="3941064"/>
             <a:ext cx="310896" cy="310896"/>
           </a:xfrm>
           <a:prstGeom prst="ellipse">
@@ -14817,8 +14969,8 @@
         </p:nvSpPr>
         <p:spPr>
           <a:xfrm>
-            <a:off x="17282160" y="5120640"/>
-            <a:ext cx="1737360" cy="411480"/>
+            <a:off x="17282160" y="5257800"/>
+            <a:ext cx="1737360" cy="384048"/>
           </a:xfrm>
           <a:prstGeom prst="roundRect">
             <a:avLst>
@@ -14862,7 +15014,7 @@
                   <a:srgbClr val="0B3D7A"/>
                 </a:solidFill>
               </a:rPr>
-              <a:t>no: stop, fix, re-run</a:t>
+              <a:t>stop, fix, re-run</a:t>
             </a:r>
           </a:p>
         </p:txBody>
@@ -14875,8 +15027,8 @@
         </p:nvSpPr>
         <p:spPr>
           <a:xfrm>
-            <a:off x="14264640" y="4023360"/>
-            <a:ext cx="2377440" cy="960120"/>
+            <a:off x="14264640" y="4069080"/>
+            <a:ext cx="2377440" cy="868680"/>
           </a:xfrm>
           <a:prstGeom prst="diamond">
             <a:avLst/>
@@ -14931,7 +15083,7 @@
         </p:nvSpPr>
         <p:spPr>
           <a:xfrm>
-            <a:off x="14136624" y="3895344"/>
+            <a:off x="14136624" y="3941064"/>
             <a:ext cx="310896" cy="310896"/>
           </a:xfrm>
           <a:prstGeom prst="ellipse">
@@ -14987,8 +15139,8 @@
         </p:nvSpPr>
         <p:spPr>
           <a:xfrm>
-            <a:off x="14493240" y="5120640"/>
-            <a:ext cx="1920240" cy="411480"/>
+            <a:off x="14493240" y="5257800"/>
+            <a:ext cx="1920240" cy="384048"/>
           </a:xfrm>
           <a:prstGeom prst="roundRect">
             <a:avLst>
@@ -15032,7 +15184,7 @@
                   <a:srgbClr val="0B3D7A"/>
                 </a:solidFill>
               </a:rPr>
-              <a:t>no: stop, fix, re-run</a:t>
+              <a:t>stop, fix, re-run</a:t>
             </a:r>
           </a:p>
         </p:txBody>
@@ -15045,8 +15197,8 @@
         </p:nvSpPr>
         <p:spPr>
           <a:xfrm>
-            <a:off x="11612880" y="4114800"/>
-            <a:ext cx="2194560" cy="777240"/>
+            <a:off x="11612880" y="4069080"/>
+            <a:ext cx="2194560" cy="868680"/>
           </a:xfrm>
           <a:prstGeom prst="roundRect">
             <a:avLst>
@@ -15118,7 +15270,7 @@
         </p:nvSpPr>
         <p:spPr>
           <a:xfrm>
-            <a:off x="11484863" y="3986784"/>
+            <a:off x="11484863" y="3941064"/>
             <a:ext cx="310896" cy="310896"/>
           </a:xfrm>
           <a:prstGeom prst="ellipse">
@@ -15303,8 +15455,8 @@
         </p:nvSpPr>
         <p:spPr>
           <a:xfrm>
-            <a:off x="5943600" y="4023360"/>
-            <a:ext cx="2011680" cy="960120"/>
+            <a:off x="5943600" y="4069080"/>
+            <a:ext cx="2011680" cy="868680"/>
           </a:xfrm>
           <a:prstGeom prst="diamond">
             <a:avLst/>
@@ -15359,7 +15511,7 @@
         </p:nvSpPr>
         <p:spPr>
           <a:xfrm>
-            <a:off x="5815584" y="3895344"/>
+            <a:off x="5815584" y="3941064"/>
             <a:ext cx="310896" cy="310896"/>
           </a:xfrm>
           <a:prstGeom prst="ellipse">
@@ -15415,8 +15567,8 @@
         </p:nvSpPr>
         <p:spPr>
           <a:xfrm>
-            <a:off x="6035040" y="3429000"/>
-            <a:ext cx="1828800" cy="411480"/>
+            <a:off x="6035040" y="3337560"/>
+            <a:ext cx="1828800" cy="384048"/>
           </a:xfrm>
           <a:prstGeom prst="roundRect">
             <a:avLst>
@@ -15460,7 +15612,7 @@
                   <a:srgbClr val="0B3D7A"/>
                 </a:solidFill>
               </a:rPr>
-              <a:t>no: stop, fix, re-run</a:t>
+              <a:t>stop, fix, re-run</a:t>
             </a:r>
           </a:p>
         </p:txBody>
@@ -17642,7 +17794,7 @@
         <p:spPr>
           <a:xfrm flipH="1">
             <a:off x="18150839" y="3749039"/>
-            <a:ext cx="1" cy="274321"/>
+            <a:ext cx="1" cy="320041"/>
           </a:xfrm>
           <a:prstGeom prst="line">
             <a:avLst/>
@@ -17677,8 +17829,8 @@
         </p:nvCxnSpPr>
         <p:spPr>
           <a:xfrm>
-            <a:off x="18150839" y="4983480"/>
-            <a:ext cx="0" cy="137160"/>
+            <a:off x="18150839" y="4937760"/>
+            <a:ext cx="0" cy="320040"/>
           </a:xfrm>
           <a:prstGeom prst="line">
             <a:avLst/>
@@ -17713,8 +17865,8 @@
         </p:nvSpPr>
         <p:spPr>
           <a:xfrm>
-            <a:off x="18242280" y="4668012"/>
-            <a:ext cx="2926080" cy="365760"/>
+            <a:off x="18214848" y="4960620"/>
+            <a:ext cx="1097280" cy="274320"/>
           </a:xfrm>
           <a:prstGeom prst="rect">
             <a:avLst/>
@@ -17722,7 +17874,7 @@
           <a:noFill/>
         </p:spPr>
         <p:txBody>
-          <a:bodyPr wrap="square" anchor="b" lIns="0" rIns="0" tIns="54864" bIns="54864">
+          <a:bodyPr wrap="square" anchor="ctr" lIns="0" rIns="0" tIns="54864" bIns="54864">
             <a:spAutoFit/>
           </a:bodyPr>
           <a:lstStyle/>
@@ -17752,6 +17904,228 @@
         <p:spPr>
           <a:xfrm flipH="1">
             <a:off x="16642080" y="4503420"/>
+            <a:ext cx="457200" cy="0"/>
+          </a:xfrm>
+          <a:prstGeom prst="line">
+            <a:avLst/>
+          </a:prstGeom>
+          <a:ln w="28575">
+            <a:solidFill>
+              <a:srgbClr val="F5EFE9"/>
+            </a:solidFill>
+            <a:tailEnd type="triangle" w="med" len="med"/>
+          </a:ln>
+        </p:spPr>
+        <p:style>
+          <a:lnRef idx="2">
+            <a:schemeClr val="accent1"/>
+          </a:lnRef>
+          <a:fillRef idx="0">
+            <a:schemeClr val="accent1"/>
+          </a:fillRef>
+          <a:effectRef idx="1">
+            <a:schemeClr val="accent1"/>
+          </a:effectRef>
+          <a:fontRef idx="minor">
+            <a:schemeClr val="tx1"/>
+          </a:fontRef>
+        </p:style>
+      </p:cxnSp>
+      <p:sp>
+        <p:nvSpPr>
+          <p:cNvPr id="93" name="TextBox 92"/>
+          <p:cNvSpPr txBox="1"/>
+          <p:nvPr/>
+        </p:nvSpPr>
+        <p:spPr>
+          <a:xfrm>
+            <a:off x="16322039" y="4192524"/>
+            <a:ext cx="1097280" cy="274320"/>
+          </a:xfrm>
+          <a:prstGeom prst="rect">
+            <a:avLst/>
+          </a:prstGeom>
+          <a:noFill/>
+        </p:spPr>
+        <p:txBody>
+          <a:bodyPr wrap="square" anchor="b" lIns="0" rIns="0" tIns="54864" bIns="54864">
+            <a:spAutoFit/>
+          </a:bodyPr>
+          <a:lstStyle/>
+          <a:p>
+            <a:pPr algn="ctr">
+              <a:spcAft>
+                <a:spcPts val="600"/>
+              </a:spcAft>
+            </a:pPr>
+            <a:r>
+              <a:rPr sz="1100" b="1">
+                <a:solidFill>
+                  <a:srgbClr val="F5EFE9"/>
+                </a:solidFill>
+              </a:rPr>
+              <a:t>yes</a:t>
+            </a:r>
+          </a:p>
+        </p:txBody>
+      </p:sp>
+      <p:cxnSp>
+        <p:nvCxnSpPr>
+          <p:cNvPr id="94" name="Connector 93"/>
+          <p:cNvCxnSpPr/>
+          <p:nvPr/>
+        </p:nvCxnSpPr>
+        <p:spPr>
+          <a:xfrm>
+            <a:off x="15453359" y="4937760"/>
+            <a:ext cx="0" cy="320040"/>
+          </a:xfrm>
+          <a:prstGeom prst="line">
+            <a:avLst/>
+          </a:prstGeom>
+          <a:ln w="28575">
+            <a:solidFill>
+              <a:srgbClr val="F5EFE9"/>
+            </a:solidFill>
+            <a:tailEnd type="triangle" w="med" len="med"/>
+          </a:ln>
+        </p:spPr>
+        <p:style>
+          <a:lnRef idx="2">
+            <a:schemeClr val="accent1"/>
+          </a:lnRef>
+          <a:fillRef idx="0">
+            <a:schemeClr val="accent1"/>
+          </a:fillRef>
+          <a:effectRef idx="1">
+            <a:schemeClr val="accent1"/>
+          </a:effectRef>
+          <a:fontRef idx="minor">
+            <a:schemeClr val="tx1"/>
+          </a:fontRef>
+        </p:style>
+      </p:cxnSp>
+      <p:sp>
+        <p:nvSpPr>
+          <p:cNvPr id="95" name="TextBox 94"/>
+          <p:cNvSpPr txBox="1"/>
+          <p:nvPr/>
+        </p:nvSpPr>
+        <p:spPr>
+          <a:xfrm>
+            <a:off x="15517367" y="4960620"/>
+            <a:ext cx="1097280" cy="274320"/>
+          </a:xfrm>
+          <a:prstGeom prst="rect">
+            <a:avLst/>
+          </a:prstGeom>
+          <a:noFill/>
+        </p:spPr>
+        <p:txBody>
+          <a:bodyPr wrap="square" anchor="ctr" lIns="0" rIns="0" tIns="54864" bIns="54864">
+            <a:spAutoFit/>
+          </a:bodyPr>
+          <a:lstStyle/>
+          <a:p>
+            <a:pPr algn="l">
+              <a:spcAft>
+                <a:spcPts val="600"/>
+              </a:spcAft>
+            </a:pPr>
+            <a:r>
+              <a:rPr sz="1100" b="1">
+                <a:solidFill>
+                  <a:srgbClr val="F5EFE9"/>
+                </a:solidFill>
+              </a:rPr>
+              <a:t>no</a:t>
+            </a:r>
+          </a:p>
+        </p:txBody>
+      </p:sp>
+      <p:cxnSp>
+        <p:nvCxnSpPr>
+          <p:cNvPr id="96" name="Connector 95"/>
+          <p:cNvCxnSpPr/>
+          <p:nvPr/>
+        </p:nvCxnSpPr>
+        <p:spPr>
+          <a:xfrm flipH="1">
+            <a:off x="13807440" y="4503420"/>
+            <a:ext cx="457200" cy="0"/>
+          </a:xfrm>
+          <a:prstGeom prst="line">
+            <a:avLst/>
+          </a:prstGeom>
+          <a:ln w="28575">
+            <a:solidFill>
+              <a:srgbClr val="F5EFE9"/>
+            </a:solidFill>
+            <a:tailEnd type="triangle" w="med" len="med"/>
+          </a:ln>
+        </p:spPr>
+        <p:style>
+          <a:lnRef idx="2">
+            <a:schemeClr val="accent1"/>
+          </a:lnRef>
+          <a:fillRef idx="0">
+            <a:schemeClr val="accent1"/>
+          </a:fillRef>
+          <a:effectRef idx="1">
+            <a:schemeClr val="accent1"/>
+          </a:effectRef>
+          <a:fontRef idx="minor">
+            <a:schemeClr val="tx1"/>
+          </a:fontRef>
+        </p:style>
+      </p:cxnSp>
+      <p:sp>
+        <p:nvSpPr>
+          <p:cNvPr id="97" name="TextBox 96"/>
+          <p:cNvSpPr txBox="1"/>
+          <p:nvPr/>
+        </p:nvSpPr>
+        <p:spPr>
+          <a:xfrm>
+            <a:off x="13487400" y="4192524"/>
+            <a:ext cx="1097280" cy="274320"/>
+          </a:xfrm>
+          <a:prstGeom prst="rect">
+            <a:avLst/>
+          </a:prstGeom>
+          <a:noFill/>
+        </p:spPr>
+        <p:txBody>
+          <a:bodyPr wrap="square" anchor="b" lIns="0" rIns="0" tIns="54864" bIns="54864">
+            <a:spAutoFit/>
+          </a:bodyPr>
+          <a:lstStyle/>
+          <a:p>
+            <a:pPr algn="ctr">
+              <a:spcAft>
+                <a:spcPts val="600"/>
+              </a:spcAft>
+            </a:pPr>
+            <a:r>
+              <a:rPr sz="1100" b="1">
+                <a:solidFill>
+                  <a:srgbClr val="F5EFE9"/>
+                </a:solidFill>
+              </a:rPr>
+              <a:t>yes</a:t>
+            </a:r>
+          </a:p>
+        </p:txBody>
+      </p:sp>
+      <p:cxnSp>
+        <p:nvCxnSpPr>
+          <p:cNvPr id="98" name="Connector 97"/>
+          <p:cNvCxnSpPr/>
+          <p:nvPr/>
+        </p:nvCxnSpPr>
+        <p:spPr>
+          <a:xfrm flipH="1">
+            <a:off x="11155680" y="4503420"/>
             <a:ext cx="457200" cy="0"/>
           </a:xfrm>
           <a:prstGeom prst="line">
@@ -17781,88 +18155,14 @@
       </p:cxnSp>
       <p:cxnSp>
         <p:nvCxnSpPr>
-          <p:cNvPr id="93" name="Connector 92"/>
+          <p:cNvPr id="99" name="Connector 98"/>
           <p:cNvCxnSpPr/>
           <p:nvPr/>
         </p:nvCxnSpPr>
         <p:spPr>
-          <a:xfrm>
-            <a:off x="15453359" y="4983480"/>
-            <a:ext cx="0" cy="137160"/>
-          </a:xfrm>
-          <a:prstGeom prst="line">
-            <a:avLst/>
-          </a:prstGeom>
-          <a:ln w="28575">
-            <a:solidFill>
-              <a:srgbClr val="F5EFE9"/>
-            </a:solidFill>
-            <a:tailEnd type="triangle" w="med" len="med"/>
-          </a:ln>
-        </p:spPr>
-        <p:style>
-          <a:lnRef idx="2">
-            <a:schemeClr val="accent1"/>
-          </a:lnRef>
-          <a:fillRef idx="0">
-            <a:schemeClr val="accent1"/>
-          </a:fillRef>
-          <a:effectRef idx="1">
-            <a:schemeClr val="accent1"/>
-          </a:effectRef>
-          <a:fontRef idx="minor">
-            <a:schemeClr val="tx1"/>
-          </a:fontRef>
-        </p:style>
-      </p:cxnSp>
-      <p:sp>
-        <p:nvSpPr>
-          <p:cNvPr id="94" name="TextBox 93"/>
-          <p:cNvSpPr txBox="1"/>
-          <p:nvPr/>
-        </p:nvSpPr>
-        <p:spPr>
-          <a:xfrm>
-            <a:off x="15544800" y="4668012"/>
-            <a:ext cx="2926080" cy="365760"/>
-          </a:xfrm>
-          <a:prstGeom prst="rect">
-            <a:avLst/>
-          </a:prstGeom>
-          <a:noFill/>
-        </p:spPr>
-        <p:txBody>
-          <a:bodyPr wrap="square" anchor="b" lIns="0" rIns="0" tIns="54864" bIns="54864">
-            <a:spAutoFit/>
-          </a:bodyPr>
-          <a:lstStyle/>
-          <a:p>
-            <a:pPr algn="l">
-              <a:spcAft>
-                <a:spcPts val="600"/>
-              </a:spcAft>
-            </a:pPr>
-            <a:r>
-              <a:rPr sz="1100" b="1">
-                <a:solidFill>
-                  <a:srgbClr val="F5EFE9"/>
-                </a:solidFill>
-              </a:rPr>
-              <a:t>no</a:t>
-            </a:r>
-          </a:p>
-        </p:txBody>
-      </p:sp>
-      <p:cxnSp>
-        <p:nvCxnSpPr>
-          <p:cNvPr id="95" name="Connector 94"/>
-          <p:cNvCxnSpPr/>
-          <p:nvPr/>
-        </p:nvCxnSpPr>
-        <p:spPr>
           <a:xfrm flipH="1">
-            <a:off x="13807440" y="4503420"/>
-            <a:ext cx="457200" cy="0"/>
+            <a:off x="7955279" y="4503420"/>
+            <a:ext cx="457201" cy="0"/>
           </a:xfrm>
           <a:prstGeom prst="line">
             <a:avLst/>
@@ -17891,14 +18191,162 @@
       </p:cxnSp>
       <p:cxnSp>
         <p:nvCxnSpPr>
-          <p:cNvPr id="96" name="Connector 95"/>
+          <p:cNvPr id="100" name="Connector 99"/>
           <p:cNvCxnSpPr/>
           <p:nvPr/>
         </p:nvCxnSpPr>
         <p:spPr>
+          <a:xfrm flipV="1">
+            <a:off x="6949440" y="3721608"/>
+            <a:ext cx="0" cy="347472"/>
+          </a:xfrm>
+          <a:prstGeom prst="line">
+            <a:avLst/>
+          </a:prstGeom>
+          <a:ln w="28575">
+            <a:solidFill>
+              <a:srgbClr val="F5EFE9"/>
+            </a:solidFill>
+            <a:tailEnd type="triangle" w="med" len="med"/>
+          </a:ln>
+        </p:spPr>
+        <p:style>
+          <a:lnRef idx="2">
+            <a:schemeClr val="accent1"/>
+          </a:lnRef>
+          <a:fillRef idx="0">
+            <a:schemeClr val="accent1"/>
+          </a:fillRef>
+          <a:effectRef idx="1">
+            <a:schemeClr val="accent1"/>
+          </a:effectRef>
+          <a:fontRef idx="minor">
+            <a:schemeClr val="tx1"/>
+          </a:fontRef>
+        </p:style>
+      </p:cxnSp>
+      <p:sp>
+        <p:nvSpPr>
+          <p:cNvPr id="101" name="TextBox 100"/>
+          <p:cNvSpPr txBox="1"/>
+          <p:nvPr/>
+        </p:nvSpPr>
+        <p:spPr>
+          <a:xfrm>
+            <a:off x="7013448" y="3758183"/>
+            <a:ext cx="1097280" cy="274320"/>
+          </a:xfrm>
+          <a:prstGeom prst="rect">
+            <a:avLst/>
+          </a:prstGeom>
+          <a:noFill/>
+        </p:spPr>
+        <p:txBody>
+          <a:bodyPr wrap="square" anchor="ctr" lIns="0" rIns="0" tIns="54864" bIns="54864">
+            <a:spAutoFit/>
+          </a:bodyPr>
+          <a:lstStyle/>
+          <a:p>
+            <a:pPr algn="l">
+              <a:spcAft>
+                <a:spcPts val="600"/>
+              </a:spcAft>
+            </a:pPr>
+            <a:r>
+              <a:rPr sz="1100" b="1">
+                <a:solidFill>
+                  <a:srgbClr val="F5EFE9"/>
+                </a:solidFill>
+              </a:rPr>
+              <a:t>no</a:t>
+            </a:r>
+          </a:p>
+        </p:txBody>
+      </p:sp>
+      <p:cxnSp>
+        <p:nvCxnSpPr>
+          <p:cNvPr id="102" name="Connector 101"/>
+          <p:cNvCxnSpPr/>
+          <p:nvPr/>
+        </p:nvCxnSpPr>
+        <p:spPr>
           <a:xfrm flipH="1">
-            <a:off x="11155680" y="4503420"/>
-            <a:ext cx="457200" cy="0"/>
+            <a:off x="5532120" y="4503420"/>
+            <a:ext cx="411480" cy="0"/>
+          </a:xfrm>
+          <a:prstGeom prst="line">
+            <a:avLst/>
+          </a:prstGeom>
+          <a:ln w="28575">
+            <a:solidFill>
+              <a:srgbClr val="F5EFE9"/>
+            </a:solidFill>
+            <a:tailEnd type="triangle" w="med" len="med"/>
+          </a:ln>
+        </p:spPr>
+        <p:style>
+          <a:lnRef idx="2">
+            <a:schemeClr val="accent1"/>
+          </a:lnRef>
+          <a:fillRef idx="0">
+            <a:schemeClr val="accent1"/>
+          </a:fillRef>
+          <a:effectRef idx="1">
+            <a:schemeClr val="accent1"/>
+          </a:effectRef>
+          <a:fontRef idx="minor">
+            <a:schemeClr val="tx1"/>
+          </a:fontRef>
+        </p:style>
+      </p:cxnSp>
+      <p:sp>
+        <p:nvSpPr>
+          <p:cNvPr id="103" name="TextBox 102"/>
+          <p:cNvSpPr txBox="1"/>
+          <p:nvPr/>
+        </p:nvSpPr>
+        <p:spPr>
+          <a:xfrm>
+            <a:off x="5189220" y="4192524"/>
+            <a:ext cx="1097280" cy="274320"/>
+          </a:xfrm>
+          <a:prstGeom prst="rect">
+            <a:avLst/>
+          </a:prstGeom>
+          <a:noFill/>
+        </p:spPr>
+        <p:txBody>
+          <a:bodyPr wrap="square" anchor="b" lIns="0" rIns="0" tIns="54864" bIns="54864">
+            <a:spAutoFit/>
+          </a:bodyPr>
+          <a:lstStyle/>
+          <a:p>
+            <a:pPr algn="ctr">
+              <a:spcAft>
+                <a:spcPts val="600"/>
+              </a:spcAft>
+            </a:pPr>
+            <a:r>
+              <a:rPr sz="1100" b="1">
+                <a:solidFill>
+                  <a:srgbClr val="F5EFE9"/>
+                </a:solidFill>
+              </a:rPr>
+              <a:t>yes</a:t>
+            </a:r>
+          </a:p>
+        </p:txBody>
+      </p:sp>
+      <p:cxnSp>
+        <p:nvCxnSpPr>
+          <p:cNvPr id="104" name="Connector 103"/>
+          <p:cNvCxnSpPr/>
+          <p:nvPr/>
+        </p:nvCxnSpPr>
+        <p:spPr>
+          <a:xfrm flipH="1">
+            <a:off x="2660904" y="4503420"/>
+            <a:ext cx="402336" cy="0"/>
           </a:xfrm>
           <a:prstGeom prst="line">
             <a:avLst/>
@@ -17927,14 +18375,14 @@
       </p:cxnSp>
       <p:cxnSp>
         <p:nvCxnSpPr>
-          <p:cNvPr id="97" name="Connector 96"/>
+          <p:cNvPr id="105" name="Connector 104"/>
           <p:cNvCxnSpPr/>
           <p:nvPr/>
         </p:nvCxnSpPr>
         <p:spPr>
-          <a:xfrm flipH="1">
-            <a:off x="7955279" y="4503420"/>
-            <a:ext cx="457201" cy="0"/>
+          <a:xfrm>
+            <a:off x="4297680" y="4937760"/>
+            <a:ext cx="0" cy="411480"/>
           </a:xfrm>
           <a:prstGeom prst="line">
             <a:avLst/>
@@ -17943,7 +18391,6 @@
             <a:solidFill>
               <a:srgbClr val="F5EFE9"/>
             </a:solidFill>
-            <a:tailEnd type="triangle" w="med" len="med"/>
           </a:ln>
         </p:spPr>
         <p:style>
@@ -17963,14 +18410,14 @@
       </p:cxnSp>
       <p:cxnSp>
         <p:nvCxnSpPr>
-          <p:cNvPr id="98" name="Connector 97"/>
+          <p:cNvPr id="106" name="Connector 105"/>
           <p:cNvCxnSpPr/>
           <p:nvPr/>
         </p:nvCxnSpPr>
         <p:spPr>
-          <a:xfrm flipV="1">
-            <a:off x="6949440" y="3840480"/>
-            <a:ext cx="0" cy="182880"/>
+          <a:xfrm>
+            <a:off x="4297680" y="5349240"/>
+            <a:ext cx="5486400" cy="0"/>
           </a:xfrm>
           <a:prstGeom prst="line">
             <a:avLst/>
@@ -17979,297 +18426,6 @@
             <a:solidFill>
               <a:srgbClr val="F5EFE9"/>
             </a:solidFill>
-            <a:tailEnd type="triangle" w="med" len="med"/>
-          </a:ln>
-        </p:spPr>
-        <p:style>
-          <a:lnRef idx="2">
-            <a:schemeClr val="accent1"/>
-          </a:lnRef>
-          <a:fillRef idx="0">
-            <a:schemeClr val="accent1"/>
-          </a:fillRef>
-          <a:effectRef idx="1">
-            <a:schemeClr val="accent1"/>
-          </a:effectRef>
-          <a:fontRef idx="minor">
-            <a:schemeClr val="tx1"/>
-          </a:fontRef>
-        </p:style>
-      </p:cxnSp>
-      <p:sp>
-        <p:nvSpPr>
-          <p:cNvPr id="99" name="TextBox 98"/>
-          <p:cNvSpPr txBox="1"/>
-          <p:nvPr/>
-        </p:nvSpPr>
-        <p:spPr>
-          <a:xfrm>
-            <a:off x="7040879" y="3547872"/>
-            <a:ext cx="2926080" cy="365760"/>
-          </a:xfrm>
-          <a:prstGeom prst="rect">
-            <a:avLst/>
-          </a:prstGeom>
-          <a:noFill/>
-        </p:spPr>
-        <p:txBody>
-          <a:bodyPr wrap="square" anchor="b" lIns="0" rIns="0" tIns="54864" bIns="54864">
-            <a:spAutoFit/>
-          </a:bodyPr>
-          <a:lstStyle/>
-          <a:p>
-            <a:pPr algn="l">
-              <a:spcAft>
-                <a:spcPts val="600"/>
-              </a:spcAft>
-            </a:pPr>
-            <a:r>
-              <a:rPr sz="1100" b="1">
-                <a:solidFill>
-                  <a:srgbClr val="F5EFE9"/>
-                </a:solidFill>
-              </a:rPr>
-              <a:t>no</a:t>
-            </a:r>
-          </a:p>
-        </p:txBody>
-      </p:sp>
-      <p:cxnSp>
-        <p:nvCxnSpPr>
-          <p:cNvPr id="100" name="Connector 99"/>
-          <p:cNvCxnSpPr/>
-          <p:nvPr/>
-        </p:nvCxnSpPr>
-        <p:spPr>
-          <a:xfrm flipH="1">
-            <a:off x="5532120" y="4503420"/>
-            <a:ext cx="411480" cy="0"/>
-          </a:xfrm>
-          <a:prstGeom prst="line">
-            <a:avLst/>
-          </a:prstGeom>
-          <a:ln w="28575">
-            <a:solidFill>
-              <a:srgbClr val="F5EFE9"/>
-            </a:solidFill>
-            <a:tailEnd type="triangle" w="med" len="med"/>
-          </a:ln>
-        </p:spPr>
-        <p:style>
-          <a:lnRef idx="2">
-            <a:schemeClr val="accent1"/>
-          </a:lnRef>
-          <a:fillRef idx="0">
-            <a:schemeClr val="accent1"/>
-          </a:fillRef>
-          <a:effectRef idx="1">
-            <a:schemeClr val="accent1"/>
-          </a:effectRef>
-          <a:fontRef idx="minor">
-            <a:schemeClr val="tx1"/>
-          </a:fontRef>
-        </p:style>
-      </p:cxnSp>
-      <p:cxnSp>
-        <p:nvCxnSpPr>
-          <p:cNvPr id="101" name="Connector 100"/>
-          <p:cNvCxnSpPr/>
-          <p:nvPr/>
-        </p:nvCxnSpPr>
-        <p:spPr>
-          <a:xfrm flipH="1">
-            <a:off x="2660904" y="4503420"/>
-            <a:ext cx="402336" cy="0"/>
-          </a:xfrm>
-          <a:prstGeom prst="line">
-            <a:avLst/>
-          </a:prstGeom>
-          <a:ln w="28575">
-            <a:solidFill>
-              <a:srgbClr val="F5EFE9"/>
-            </a:solidFill>
-            <a:tailEnd type="triangle" w="med" len="med"/>
-          </a:ln>
-        </p:spPr>
-        <p:style>
-          <a:lnRef idx="2">
-            <a:schemeClr val="accent1"/>
-          </a:lnRef>
-          <a:fillRef idx="0">
-            <a:schemeClr val="accent1"/>
-          </a:fillRef>
-          <a:effectRef idx="1">
-            <a:schemeClr val="accent1"/>
-          </a:effectRef>
-          <a:fontRef idx="minor">
-            <a:schemeClr val="tx1"/>
-          </a:fontRef>
-        </p:style>
-      </p:cxnSp>
-      <p:cxnSp>
-        <p:nvCxnSpPr>
-          <p:cNvPr id="102" name="Connector 101"/>
-          <p:cNvCxnSpPr/>
-          <p:nvPr/>
-        </p:nvCxnSpPr>
-        <p:spPr>
-          <a:xfrm>
-            <a:off x="4297680" y="4937760"/>
-            <a:ext cx="0" cy="411480"/>
-          </a:xfrm>
-          <a:prstGeom prst="line">
-            <a:avLst/>
-          </a:prstGeom>
-          <a:ln w="28575">
-            <a:solidFill>
-              <a:srgbClr val="F5EFE9"/>
-            </a:solidFill>
-          </a:ln>
-        </p:spPr>
-        <p:style>
-          <a:lnRef idx="2">
-            <a:schemeClr val="accent1"/>
-          </a:lnRef>
-          <a:fillRef idx="0">
-            <a:schemeClr val="accent1"/>
-          </a:fillRef>
-          <a:effectRef idx="1">
-            <a:schemeClr val="accent1"/>
-          </a:effectRef>
-          <a:fontRef idx="minor">
-            <a:schemeClr val="tx1"/>
-          </a:fontRef>
-        </p:style>
-      </p:cxnSp>
-      <p:cxnSp>
-        <p:nvCxnSpPr>
-          <p:cNvPr id="103" name="Connector 102"/>
-          <p:cNvCxnSpPr/>
-          <p:nvPr/>
-        </p:nvCxnSpPr>
-        <p:spPr>
-          <a:xfrm>
-            <a:off x="4297680" y="5349240"/>
-            <a:ext cx="5486400" cy="0"/>
-          </a:xfrm>
-          <a:prstGeom prst="line">
-            <a:avLst/>
-          </a:prstGeom>
-          <a:ln w="28575">
-            <a:solidFill>
-              <a:srgbClr val="F5EFE9"/>
-            </a:solidFill>
-          </a:ln>
-        </p:spPr>
-        <p:style>
-          <a:lnRef idx="2">
-            <a:schemeClr val="accent1"/>
-          </a:lnRef>
-          <a:fillRef idx="0">
-            <a:schemeClr val="accent1"/>
-          </a:fillRef>
-          <a:effectRef idx="1">
-            <a:schemeClr val="accent1"/>
-          </a:effectRef>
-          <a:fontRef idx="minor">
-            <a:schemeClr val="tx1"/>
-          </a:fontRef>
-        </p:style>
-      </p:cxnSp>
-      <p:cxnSp>
-        <p:nvCxnSpPr>
-          <p:cNvPr id="104" name="Connector 103"/>
-          <p:cNvCxnSpPr/>
-          <p:nvPr/>
-        </p:nvCxnSpPr>
-        <p:spPr>
-          <a:xfrm flipV="1">
-            <a:off x="9784080" y="4937760"/>
-            <a:ext cx="0" cy="411480"/>
-          </a:xfrm>
-          <a:prstGeom prst="line">
-            <a:avLst/>
-          </a:prstGeom>
-          <a:ln w="28575">
-            <a:solidFill>
-              <a:srgbClr val="F5EFE9"/>
-            </a:solidFill>
-            <a:tailEnd type="triangle" w="med" len="med"/>
-          </a:ln>
-        </p:spPr>
-        <p:style>
-          <a:lnRef idx="2">
-            <a:schemeClr val="accent1"/>
-          </a:lnRef>
-          <a:fillRef idx="0">
-            <a:schemeClr val="accent1"/>
-          </a:fillRef>
-          <a:effectRef idx="1">
-            <a:schemeClr val="accent1"/>
-          </a:effectRef>
-          <a:fontRef idx="minor">
-            <a:schemeClr val="tx1"/>
-          </a:fontRef>
-        </p:style>
-      </p:cxnSp>
-      <p:sp>
-        <p:nvSpPr>
-          <p:cNvPr id="105" name="TextBox 104"/>
-          <p:cNvSpPr txBox="1"/>
-          <p:nvPr/>
-        </p:nvSpPr>
-        <p:spPr>
-          <a:xfrm>
-            <a:off x="4572000" y="5029200"/>
-            <a:ext cx="5486400" cy="365760"/>
-          </a:xfrm>
-          <a:prstGeom prst="rect">
-            <a:avLst/>
-          </a:prstGeom>
-          <a:noFill/>
-        </p:spPr>
-        <p:txBody>
-          <a:bodyPr wrap="square" anchor="b" lIns="0" rIns="0" tIns="54864" bIns="54864">
-            <a:spAutoFit/>
-          </a:bodyPr>
-          <a:lstStyle/>
-          <a:p>
-            <a:pPr algn="l">
-              <a:spcAft>
-                <a:spcPts val="600"/>
-              </a:spcAft>
-            </a:pPr>
-            <a:r>
-              <a:rPr sz="1100" b="1">
-                <a:solidFill>
-                  <a:srgbClr val="F5EFE9"/>
-                </a:solidFill>
-              </a:rPr>
-              <a:t>every 12 hours: the newest 3 months rebuilt, older rows kept</a:t>
-            </a:r>
-          </a:p>
-        </p:txBody>
-      </p:sp>
-      <p:cxnSp>
-        <p:nvCxnSpPr>
-          <p:cNvPr id="106" name="Connector 105"/>
-          <p:cNvCxnSpPr/>
-          <p:nvPr/>
-        </p:nvCxnSpPr>
-        <p:spPr>
-          <a:xfrm>
-            <a:off x="1920239" y="8732520"/>
-            <a:ext cx="0" cy="274320"/>
-          </a:xfrm>
-          <a:prstGeom prst="line">
-            <a:avLst/>
-          </a:prstGeom>
-          <a:ln w="28575">
-            <a:solidFill>
-              <a:srgbClr val="F5EFE9"/>
-            </a:solidFill>
-            <a:tailEnd type="triangle" w="med" len="med"/>
           </a:ln>
         </p:spPr>
         <p:style>
@@ -18294,9 +18450,9 @@
           <p:nvPr/>
         </p:nvCxnSpPr>
         <p:spPr>
-          <a:xfrm>
-            <a:off x="4160520" y="8732520"/>
-            <a:ext cx="0" cy="274320"/>
+          <a:xfrm flipV="1">
+            <a:off x="9784080" y="4937760"/>
+            <a:ext cx="0" cy="411480"/>
           </a:xfrm>
           <a:prstGeom prst="line">
             <a:avLst/>
@@ -18323,42 +18479,44 @@
           </a:fontRef>
         </p:style>
       </p:cxnSp>
-      <p:cxnSp>
-        <p:nvCxnSpPr>
-          <p:cNvPr id="108" name="Connector 107"/>
-          <p:cNvCxnSpPr/>
-          <p:nvPr/>
-        </p:nvCxnSpPr>
-        <p:spPr>
-          <a:xfrm>
-            <a:off x="6400800" y="8732520"/>
-            <a:ext cx="0" cy="274320"/>
-          </a:xfrm>
-          <a:prstGeom prst="line">
-            <a:avLst/>
-          </a:prstGeom>
-          <a:ln w="28575">
-            <a:solidFill>
-              <a:srgbClr val="F5EFE9"/>
-            </a:solidFill>
-            <a:tailEnd type="triangle" w="med" len="med"/>
-          </a:ln>
-        </p:spPr>
-        <p:style>
-          <a:lnRef idx="2">
-            <a:schemeClr val="accent1"/>
-          </a:lnRef>
-          <a:fillRef idx="0">
-            <a:schemeClr val="accent1"/>
-          </a:fillRef>
-          <a:effectRef idx="1">
-            <a:schemeClr val="accent1"/>
-          </a:effectRef>
-          <a:fontRef idx="minor">
-            <a:schemeClr val="tx1"/>
-          </a:fontRef>
-        </p:style>
-      </p:cxnSp>
+      <p:sp>
+        <p:nvSpPr>
+          <p:cNvPr id="108" name="TextBox 107"/>
+          <p:cNvSpPr txBox="1"/>
+          <p:nvPr/>
+        </p:nvSpPr>
+        <p:spPr>
+          <a:xfrm>
+            <a:off x="4572000" y="5029200"/>
+            <a:ext cx="5486400" cy="365760"/>
+          </a:xfrm>
+          <a:prstGeom prst="rect">
+            <a:avLst/>
+          </a:prstGeom>
+          <a:noFill/>
+        </p:spPr>
+        <p:txBody>
+          <a:bodyPr wrap="square" anchor="b" lIns="0" rIns="0" tIns="54864" bIns="54864">
+            <a:spAutoFit/>
+          </a:bodyPr>
+          <a:lstStyle/>
+          <a:p>
+            <a:pPr algn="l">
+              <a:spcAft>
+                <a:spcPts val="600"/>
+              </a:spcAft>
+            </a:pPr>
+            <a:r>
+              <a:rPr sz="1100" b="1">
+                <a:solidFill>
+                  <a:srgbClr val="F5EFE9"/>
+                </a:solidFill>
+              </a:rPr>
+              <a:t>every 12 hours: the newest 3 months rebuilt, older rows kept</a:t>
+            </a:r>
+          </a:p>
+        </p:txBody>
+      </p:sp>
       <p:cxnSp>
         <p:nvCxnSpPr>
           <p:cNvPr id="109" name="Connector 108"/>
@@ -18367,7 +18525,7 @@
         </p:nvCxnSpPr>
         <p:spPr>
           <a:xfrm>
-            <a:off x="9052560" y="8732520"/>
+            <a:off x="1920239" y="8732520"/>
             <a:ext cx="0" cy="274320"/>
           </a:xfrm>
           <a:prstGeom prst="line">
@@ -18403,8 +18561,8 @@
         </p:nvCxnSpPr>
         <p:spPr>
           <a:xfrm>
-            <a:off x="12001500" y="8732520"/>
-            <a:ext cx="0" cy="137160"/>
+            <a:off x="4160520" y="8732520"/>
+            <a:ext cx="0" cy="274320"/>
           </a:xfrm>
           <a:prstGeom prst="line">
             <a:avLst/>
@@ -18413,6 +18571,7 @@
             <a:solidFill>
               <a:srgbClr val="F5EFE9"/>
             </a:solidFill>
+            <a:tailEnd type="triangle" w="med" len="med"/>
           </a:ln>
         </p:spPr>
         <p:style>
@@ -18437,9 +18596,9 @@
           <p:nvPr/>
         </p:nvCxnSpPr>
         <p:spPr>
-          <a:xfrm flipH="1">
-            <a:off x="11219688" y="8869680"/>
-            <a:ext cx="781812" cy="0"/>
+          <a:xfrm>
+            <a:off x="6400800" y="8732520"/>
+            <a:ext cx="0" cy="274320"/>
           </a:xfrm>
           <a:prstGeom prst="line">
             <a:avLst/>
@@ -18448,6 +18607,7 @@
             <a:solidFill>
               <a:srgbClr val="F5EFE9"/>
             </a:solidFill>
+            <a:tailEnd type="triangle" w="med" len="med"/>
           </a:ln>
         </p:spPr>
         <p:style>
@@ -18473,8 +18633,8 @@
         </p:nvCxnSpPr>
         <p:spPr>
           <a:xfrm>
-            <a:off x="11219688" y="8869680"/>
-            <a:ext cx="4572" cy="137160"/>
+            <a:off x="9052560" y="8732520"/>
+            <a:ext cx="0" cy="274320"/>
           </a:xfrm>
           <a:prstGeom prst="line">
             <a:avLst/>
@@ -18543,9 +18703,9 @@
           <p:nvPr/>
         </p:nvCxnSpPr>
         <p:spPr>
-          <a:xfrm>
-            <a:off x="12001500" y="8869680"/>
-            <a:ext cx="772668" cy="0"/>
+          <a:xfrm flipH="1">
+            <a:off x="11219688" y="8869680"/>
+            <a:ext cx="781812" cy="0"/>
           </a:xfrm>
           <a:prstGeom prst="line">
             <a:avLst/>
@@ -18579,7 +18739,7 @@
         </p:nvCxnSpPr>
         <p:spPr>
           <a:xfrm>
-            <a:off x="12774168" y="8869680"/>
+            <a:off x="11219688" y="8869680"/>
             <a:ext cx="4572" cy="137160"/>
           </a:xfrm>
           <a:prstGeom prst="line">
@@ -18615,7 +18775,7 @@
         </p:nvCxnSpPr>
         <p:spPr>
           <a:xfrm>
-            <a:off x="15247620" y="8732520"/>
+            <a:off x="12001500" y="8732520"/>
             <a:ext cx="0" cy="137160"/>
           </a:xfrm>
           <a:prstGeom prst="line">
@@ -18649,9 +18809,9 @@
           <p:nvPr/>
         </p:nvCxnSpPr>
         <p:spPr>
-          <a:xfrm flipH="1">
-            <a:off x="14447520" y="8869680"/>
-            <a:ext cx="800100" cy="0"/>
+          <a:xfrm>
+            <a:off x="12001500" y="8869680"/>
+            <a:ext cx="772668" cy="0"/>
           </a:xfrm>
           <a:prstGeom prst="line">
             <a:avLst/>
@@ -18685,8 +18845,8 @@
         </p:nvCxnSpPr>
         <p:spPr>
           <a:xfrm>
-            <a:off x="14447520" y="8869680"/>
-            <a:ext cx="0" cy="137160"/>
+            <a:off x="12774168" y="8869680"/>
+            <a:ext cx="4572" cy="137160"/>
           </a:xfrm>
           <a:prstGeom prst="line">
             <a:avLst/>
@@ -18755,8 +18915,8 @@
           <p:nvPr/>
         </p:nvCxnSpPr>
         <p:spPr>
-          <a:xfrm>
-            <a:off x="15247620" y="8869680"/>
+          <a:xfrm flipH="1">
+            <a:off x="14447520" y="8869680"/>
             <a:ext cx="800100" cy="0"/>
           </a:xfrm>
           <a:prstGeom prst="line">
@@ -18791,7 +18951,7 @@
         </p:nvCxnSpPr>
         <p:spPr>
           <a:xfrm>
-            <a:off x="16047720" y="8869680"/>
+            <a:off x="14447520" y="8869680"/>
             <a:ext cx="0" cy="137160"/>
           </a:xfrm>
           <a:prstGeom prst="line">
@@ -18827,8 +18987,8 @@
         </p:nvCxnSpPr>
         <p:spPr>
           <a:xfrm>
-            <a:off x="18105120" y="8732520"/>
-            <a:ext cx="0" cy="274320"/>
+            <a:off x="15247620" y="8732520"/>
+            <a:ext cx="0" cy="137160"/>
           </a:xfrm>
           <a:prstGeom prst="line">
             <a:avLst/>
@@ -18837,7 +18997,6 @@
             <a:solidFill>
               <a:srgbClr val="F5EFE9"/>
             </a:solidFill>
-            <a:tailEnd type="triangle" w="med" len="med"/>
           </a:ln>
         </p:spPr>
         <p:style>
@@ -18855,9 +19014,116 @@
           </a:fontRef>
         </p:style>
       </p:cxnSp>
-      <p:sp>
-        <p:nvSpPr>
-          <p:cNvPr id="123" name="TextBox 122"/>
+      <p:cxnSp>
+        <p:nvCxnSpPr>
+          <p:cNvPr id="123" name="Connector 122"/>
+          <p:cNvCxnSpPr/>
+          <p:nvPr/>
+        </p:nvCxnSpPr>
+        <p:spPr>
+          <a:xfrm>
+            <a:off x="15247620" y="8869680"/>
+            <a:ext cx="800100" cy="0"/>
+          </a:xfrm>
+          <a:prstGeom prst="line">
+            <a:avLst/>
+          </a:prstGeom>
+          <a:ln w="28575">
+            <a:solidFill>
+              <a:srgbClr val="F5EFE9"/>
+            </a:solidFill>
+          </a:ln>
+        </p:spPr>
+        <p:style>
+          <a:lnRef idx="2">
+            <a:schemeClr val="accent1"/>
+          </a:lnRef>
+          <a:fillRef idx="0">
+            <a:schemeClr val="accent1"/>
+          </a:fillRef>
+          <a:effectRef idx="1">
+            <a:schemeClr val="accent1"/>
+          </a:effectRef>
+          <a:fontRef idx="minor">
+            <a:schemeClr val="tx1"/>
+          </a:fontRef>
+        </p:style>
+      </p:cxnSp>
+      <p:cxnSp>
+        <p:nvCxnSpPr>
+          <p:cNvPr id="124" name="Connector 123"/>
+          <p:cNvCxnSpPr/>
+          <p:nvPr/>
+        </p:nvCxnSpPr>
+        <p:spPr>
+          <a:xfrm>
+            <a:off x="16047720" y="8869680"/>
+            <a:ext cx="0" cy="137160"/>
+          </a:xfrm>
+          <a:prstGeom prst="line">
+            <a:avLst/>
+          </a:prstGeom>
+          <a:ln w="28575">
+            <a:solidFill>
+              <a:srgbClr val="F5EFE9"/>
+            </a:solidFill>
+            <a:tailEnd type="triangle" w="med" len="med"/>
+          </a:ln>
+        </p:spPr>
+        <p:style>
+          <a:lnRef idx="2">
+            <a:schemeClr val="accent1"/>
+          </a:lnRef>
+          <a:fillRef idx="0">
+            <a:schemeClr val="accent1"/>
+          </a:fillRef>
+          <a:effectRef idx="1">
+            <a:schemeClr val="accent1"/>
+          </a:effectRef>
+          <a:fontRef idx="minor">
+            <a:schemeClr val="tx1"/>
+          </a:fontRef>
+        </p:style>
+      </p:cxnSp>
+      <p:cxnSp>
+        <p:nvCxnSpPr>
+          <p:cNvPr id="125" name="Connector 124"/>
+          <p:cNvCxnSpPr/>
+          <p:nvPr/>
+        </p:nvCxnSpPr>
+        <p:spPr>
+          <a:xfrm>
+            <a:off x="18105120" y="8732520"/>
+            <a:ext cx="0" cy="274320"/>
+          </a:xfrm>
+          <a:prstGeom prst="line">
+            <a:avLst/>
+          </a:prstGeom>
+          <a:ln w="28575">
+            <a:solidFill>
+              <a:srgbClr val="F5EFE9"/>
+            </a:solidFill>
+            <a:tailEnd type="triangle" w="med" len="med"/>
+          </a:ln>
+        </p:spPr>
+        <p:style>
+          <a:lnRef idx="2">
+            <a:schemeClr val="accent1"/>
+          </a:lnRef>
+          <a:fillRef idx="0">
+            <a:schemeClr val="accent1"/>
+          </a:fillRef>
+          <a:effectRef idx="1">
+            <a:schemeClr val="accent1"/>
+          </a:effectRef>
+          <a:fontRef idx="minor">
+            <a:schemeClr val="tx1"/>
+          </a:fontRef>
+        </p:style>
+      </p:cxnSp>
+      <p:sp>
+        <p:nvSpPr>
+          <p:cNvPr id="126" name="TextBox 125"/>
           <p:cNvSpPr txBox="1"/>
           <p:nvPr/>
         </p:nvSpPr>
@@ -18888,7 +19154,7 @@
                   <a:srgbClr val="F5EFE9"/>
                 </a:solidFill>
               </a:rPr>
-              <a:t>Every box in the map is one database object the domains read: seven rolling snapshot tables, the SA aged-balance table with its lookup seed, and eight CMS views. Numbers are the order of one rollout; orange diamonds are gates and a 'no' stops it there. The loop under the second row is the twice-daily rolling refresh (3 months rebuilt, 24 kept; 6 months at CityCorp and Odessa).</a:t>
+              <a:t>Every box in the map is one database object the domains read: seven rolling snapshot tables, the SA aged-balance table with its lookup seed, and eight CMS views. Numbers are the order of one rollout; orange diamonds are gates: yes continues, no stops the rollout there. The loop under the second row is the twice-daily rolling refresh (3 months rebuilt, 24 kept; 6 months at CityCorp and Odessa).</a:t>
             </a:r>
           </a:p>
         </p:txBody>

--- a/jaspersoft/docs/deployment_deck/visuals/Standard_Offering_and_Database_Steps.pptx
+++ b/jaspersoft/docs/deployment_deck/visuals/Standard_Offering_and_Database_Steps.pptx
@@ -13290,7 +13290,7 @@
         <p:spPr>
           <a:xfrm>
             <a:off x="868680" y="6355080"/>
-            <a:ext cx="2103120" cy="2377440"/>
+            <a:ext cx="2606040" cy="2377440"/>
           </a:xfrm>
           <a:prstGeom prst="roundRect">
             <a:avLst>
@@ -13336,7 +13336,7 @@
         <p:spPr>
           <a:xfrm>
             <a:off x="1033271" y="6400800"/>
-            <a:ext cx="1773936" cy="411480"/>
+            <a:ext cx="2276856" cy="411480"/>
           </a:xfrm>
           <a:prstGeom prst="rect">
             <a:avLst/>
@@ -13373,8 +13373,8 @@
         </p:nvSpPr>
         <p:spPr>
           <a:xfrm>
-            <a:off x="3108960" y="6355080"/>
-            <a:ext cx="2103120" cy="2377440"/>
+            <a:off x="3584448" y="6355080"/>
+            <a:ext cx="2606040" cy="2377440"/>
           </a:xfrm>
           <a:prstGeom prst="roundRect">
             <a:avLst>
@@ -13419,8 +13419,8 @@
         </p:nvSpPr>
         <p:spPr>
           <a:xfrm>
-            <a:off x="3273552" y="6400800"/>
-            <a:ext cx="1773936" cy="411480"/>
+            <a:off x="3749039" y="6400800"/>
+            <a:ext cx="2276856" cy="411480"/>
           </a:xfrm>
           <a:prstGeom prst="rect">
             <a:avLst/>
@@ -13457,8 +13457,8 @@
         </p:nvSpPr>
         <p:spPr>
           <a:xfrm>
-            <a:off x="5349240" y="6355080"/>
-            <a:ext cx="2103120" cy="2377440"/>
+            <a:off x="6300216" y="6355080"/>
+            <a:ext cx="2606040" cy="2377440"/>
           </a:xfrm>
           <a:prstGeom prst="roundRect">
             <a:avLst>
@@ -13503,8 +13503,8 @@
         </p:nvSpPr>
         <p:spPr>
           <a:xfrm>
-            <a:off x="5513831" y="6400800"/>
-            <a:ext cx="1773936" cy="411480"/>
+            <a:off x="6464807" y="6400800"/>
+            <a:ext cx="2276856" cy="411480"/>
           </a:xfrm>
           <a:prstGeom prst="rect">
             <a:avLst/>
@@ -13541,7 +13541,7 @@
         </p:nvSpPr>
         <p:spPr>
           <a:xfrm>
-            <a:off x="7863840" y="6355080"/>
+            <a:off x="9015984" y="6355080"/>
             <a:ext cx="2377440" cy="2377440"/>
           </a:xfrm>
           <a:prstGeom prst="roundRect">
@@ -13587,7 +13587,7 @@
         </p:nvSpPr>
         <p:spPr>
           <a:xfrm>
-            <a:off x="8028431" y="6400800"/>
+            <a:off x="9180576" y="6400800"/>
             <a:ext cx="2048256" cy="411480"/>
           </a:xfrm>
           <a:prstGeom prst="rect">
@@ -13625,8 +13625,8 @@
         </p:nvSpPr>
         <p:spPr>
           <a:xfrm>
-            <a:off x="10515600" y="6355080"/>
-            <a:ext cx="2971800" cy="2377440"/>
+            <a:off x="11503152" y="6355080"/>
+            <a:ext cx="2651760" cy="2377440"/>
           </a:xfrm>
           <a:prstGeom prst="roundRect">
             <a:avLst>
@@ -13671,8 +13671,8 @@
         </p:nvSpPr>
         <p:spPr>
           <a:xfrm>
-            <a:off x="10680192" y="6400800"/>
-            <a:ext cx="2642616" cy="411480"/>
+            <a:off x="11667744" y="6400800"/>
+            <a:ext cx="2322576" cy="411480"/>
           </a:xfrm>
           <a:prstGeom prst="rect">
             <a:avLst/>
@@ -13709,8 +13709,8 @@
         </p:nvSpPr>
         <p:spPr>
           <a:xfrm>
-            <a:off x="13716000" y="6355080"/>
-            <a:ext cx="3063240" cy="2377440"/>
+            <a:off x="14264640" y="6355080"/>
+            <a:ext cx="2697480" cy="2377440"/>
           </a:xfrm>
           <a:prstGeom prst="roundRect">
             <a:avLst>
@@ -13755,8 +13755,8 @@
         </p:nvSpPr>
         <p:spPr>
           <a:xfrm>
-            <a:off x="13880592" y="6400800"/>
-            <a:ext cx="2734056" cy="411480"/>
+            <a:off x="14429232" y="6400800"/>
+            <a:ext cx="2368296" cy="411480"/>
           </a:xfrm>
           <a:prstGeom prst="rect">
             <a:avLst/>
@@ -13793,8 +13793,8 @@
         </p:nvSpPr>
         <p:spPr>
           <a:xfrm>
-            <a:off x="17007840" y="6355080"/>
-            <a:ext cx="2194560" cy="2377440"/>
+            <a:off x="17071848" y="6355080"/>
+            <a:ext cx="2148840" cy="2377440"/>
           </a:xfrm>
           <a:prstGeom prst="roundRect">
             <a:avLst>
@@ -13839,8 +13839,8 @@
         </p:nvSpPr>
         <p:spPr>
           <a:xfrm>
-            <a:off x="17172432" y="6400800"/>
-            <a:ext cx="1865376" cy="411480"/>
+            <a:off x="17236440" y="6400800"/>
+            <a:ext cx="1819656" cy="411480"/>
           </a:xfrm>
           <a:prstGeom prst="rect">
             <a:avLst/>
@@ -15937,7 +15937,7 @@
         <p:spPr>
           <a:xfrm>
             <a:off x="960120" y="6766560"/>
-            <a:ext cx="1920240" cy="777240"/>
+            <a:ext cx="2423160" cy="777240"/>
           </a:xfrm>
           <a:prstGeom prst="roundRect">
             <a:avLst>
@@ -15976,7 +15976,7 @@
               </a:spcAft>
             </a:pPr>
             <a:r>
-              <a:rPr sz="1100" b="1">
+              <a:rPr sz="900" b="1">
                 <a:solidFill>
                   <a:srgbClr val="0B3D7A"/>
                 </a:solidFill>
@@ -16010,7 +16010,7 @@
         <p:spPr>
           <a:xfrm>
             <a:off x="960120" y="7680960"/>
-            <a:ext cx="1920240" cy="777240"/>
+            <a:ext cx="2423160" cy="777240"/>
           </a:xfrm>
           <a:prstGeom prst="roundRect">
             <a:avLst>
@@ -16082,8 +16082,8 @@
         </p:nvSpPr>
         <p:spPr>
           <a:xfrm>
-            <a:off x="3200400" y="6766560"/>
-            <a:ext cx="1920240" cy="777240"/>
+            <a:off x="3675887" y="6766560"/>
+            <a:ext cx="2423160" cy="777240"/>
           </a:xfrm>
           <a:prstGeom prst="roundRect">
             <a:avLst>
@@ -16155,8 +16155,8 @@
         </p:nvSpPr>
         <p:spPr>
           <a:xfrm>
-            <a:off x="3200400" y="7680960"/>
-            <a:ext cx="1920240" cy="777240"/>
+            <a:off x="3675887" y="7680960"/>
+            <a:ext cx="2423160" cy="777240"/>
           </a:xfrm>
           <a:prstGeom prst="roundRect">
             <a:avLst>
@@ -16228,8 +16228,8 @@
         </p:nvSpPr>
         <p:spPr>
           <a:xfrm>
-            <a:off x="5440680" y="6766560"/>
-            <a:ext cx="1920240" cy="566928"/>
+            <a:off x="6391656" y="6766560"/>
+            <a:ext cx="2423160" cy="566928"/>
           </a:xfrm>
           <a:prstGeom prst="roundRect">
             <a:avLst>
@@ -16301,8 +16301,8 @@
         </p:nvSpPr>
         <p:spPr>
           <a:xfrm>
-            <a:off x="5440680" y="7424927"/>
-            <a:ext cx="1920240" cy="566928"/>
+            <a:off x="6391656" y="7424927"/>
+            <a:ext cx="2423160" cy="566928"/>
           </a:xfrm>
           <a:prstGeom prst="roundRect">
             <a:avLst>
@@ -16374,8 +16374,8 @@
         </p:nvSpPr>
         <p:spPr>
           <a:xfrm>
-            <a:off x="5440680" y="8083296"/>
-            <a:ext cx="1920240" cy="566928"/>
+            <a:off x="6391656" y="8083296"/>
+            <a:ext cx="2423160" cy="566928"/>
           </a:xfrm>
           <a:prstGeom prst="roundRect">
             <a:avLst>
@@ -16414,7 +16414,7 @@
               </a:spcAft>
             </a:pPr>
             <a:r>
-              <a:rPr sz="850" b="1">
+              <a:rPr sz="900" b="1">
                 <a:solidFill>
                   <a:srgbClr val="0B3D7A"/>
                 </a:solidFill>
@@ -16448,7 +16448,7 @@
         <p:spPr>
           <a:xfrm>
             <a:off x="868680" y="9006840"/>
-            <a:ext cx="2103120" cy="548640"/>
+            <a:ext cx="2606040" cy="548640"/>
           </a:xfrm>
           <a:prstGeom prst="roundRect">
             <a:avLst>
@@ -16505,8 +16505,8 @@
         </p:nvSpPr>
         <p:spPr>
           <a:xfrm>
-            <a:off x="3108960" y="9006840"/>
-            <a:ext cx="2103120" cy="548640"/>
+            <a:off x="3584448" y="9006840"/>
+            <a:ext cx="2606040" cy="548640"/>
           </a:xfrm>
           <a:prstGeom prst="roundRect">
             <a:avLst>
@@ -16563,8 +16563,8 @@
         </p:nvSpPr>
         <p:spPr>
           <a:xfrm>
-            <a:off x="5349240" y="9006840"/>
-            <a:ext cx="2103120" cy="548640"/>
+            <a:off x="6300216" y="9006840"/>
+            <a:ext cx="2606040" cy="548640"/>
           </a:xfrm>
           <a:prstGeom prst="roundRect">
             <a:avLst>
@@ -16621,7 +16621,7 @@
         </p:nvSpPr>
         <p:spPr>
           <a:xfrm>
-            <a:off x="7955279" y="6766560"/>
+            <a:off x="9107424" y="6766560"/>
             <a:ext cx="2194560" cy="822960"/>
           </a:xfrm>
           <a:prstGeom prst="roundRect">
@@ -16694,7 +16694,7 @@
         </p:nvSpPr>
         <p:spPr>
           <a:xfrm>
-            <a:off x="7955279" y="7726679"/>
+            <a:off x="9107424" y="7726679"/>
             <a:ext cx="2194560" cy="640080"/>
           </a:xfrm>
           <a:prstGeom prst="roundRect">
@@ -16767,7 +16767,7 @@
         </p:nvSpPr>
         <p:spPr>
           <a:xfrm>
-            <a:off x="7863840" y="9006840"/>
+            <a:off x="9015984" y="9006840"/>
             <a:ext cx="2377440" cy="548640"/>
           </a:xfrm>
           <a:prstGeom prst="roundRect">
@@ -16825,8 +16825,8 @@
         </p:nvSpPr>
         <p:spPr>
           <a:xfrm>
-            <a:off x="10607040" y="6766560"/>
-            <a:ext cx="2788920" cy="457200"/>
+            <a:off x="11594592" y="6766560"/>
+            <a:ext cx="2468880" cy="457200"/>
           </a:xfrm>
           <a:prstGeom prst="roundRect">
             <a:avLst>
@@ -16883,8 +16883,8 @@
         </p:nvSpPr>
         <p:spPr>
           <a:xfrm>
-            <a:off x="10607040" y="7315200"/>
-            <a:ext cx="2788920" cy="457200"/>
+            <a:off x="11594592" y="7315200"/>
+            <a:ext cx="2468880" cy="457200"/>
           </a:xfrm>
           <a:prstGeom prst="roundRect">
             <a:avLst>
@@ -16941,8 +16941,8 @@
         </p:nvSpPr>
         <p:spPr>
           <a:xfrm>
-            <a:off x="10607040" y="7863840"/>
-            <a:ext cx="2788920" cy="457200"/>
+            <a:off x="11594592" y="7863840"/>
+            <a:ext cx="2468880" cy="457200"/>
           </a:xfrm>
           <a:prstGeom prst="roundRect">
             <a:avLst>
@@ -16999,8 +16999,8 @@
         </p:nvSpPr>
         <p:spPr>
           <a:xfrm>
-            <a:off x="10515600" y="9006840"/>
-            <a:ext cx="1417320" cy="548640"/>
+            <a:off x="11503152" y="9006840"/>
+            <a:ext cx="1280160" cy="548640"/>
           </a:xfrm>
           <a:prstGeom prst="roundRect">
             <a:avLst>
@@ -17057,8 +17057,8 @@
         </p:nvSpPr>
         <p:spPr>
           <a:xfrm>
-            <a:off x="12070080" y="9006840"/>
-            <a:ext cx="1417320" cy="548640"/>
+            <a:off x="12874752" y="9006840"/>
+            <a:ext cx="1280160" cy="548640"/>
           </a:xfrm>
           <a:prstGeom prst="roundRect">
             <a:avLst>
@@ -17115,8 +17115,8 @@
         </p:nvSpPr>
         <p:spPr>
           <a:xfrm>
-            <a:off x="13807440" y="6766560"/>
-            <a:ext cx="2880360" cy="457200"/>
+            <a:off x="14356080" y="6766560"/>
+            <a:ext cx="2514600" cy="457200"/>
           </a:xfrm>
           <a:prstGeom prst="roundRect">
             <a:avLst>
@@ -17173,8 +17173,8 @@
         </p:nvSpPr>
         <p:spPr>
           <a:xfrm>
-            <a:off x="13807440" y="7315200"/>
-            <a:ext cx="2880360" cy="457200"/>
+            <a:off x="14356080" y="7315200"/>
+            <a:ext cx="2514600" cy="457200"/>
           </a:xfrm>
           <a:prstGeom prst="roundRect">
             <a:avLst>
@@ -17231,8 +17231,8 @@
         </p:nvSpPr>
         <p:spPr>
           <a:xfrm>
-            <a:off x="13807440" y="7863840"/>
-            <a:ext cx="2880360" cy="457200"/>
+            <a:off x="14356080" y="7863840"/>
+            <a:ext cx="2514600" cy="457200"/>
           </a:xfrm>
           <a:prstGeom prst="roundRect">
             <a:avLst>
@@ -17289,8 +17289,8 @@
         </p:nvSpPr>
         <p:spPr>
           <a:xfrm>
-            <a:off x="13716000" y="9006840"/>
-            <a:ext cx="1463040" cy="548640"/>
+            <a:off x="14264640" y="9006840"/>
+            <a:ext cx="1298448" cy="548640"/>
           </a:xfrm>
           <a:prstGeom prst="roundRect">
             <a:avLst>
@@ -17347,8 +17347,8 @@
         </p:nvSpPr>
         <p:spPr>
           <a:xfrm>
-            <a:off x="15316200" y="9006840"/>
-            <a:ext cx="1463040" cy="548640"/>
+            <a:off x="15663672" y="9006840"/>
+            <a:ext cx="1298448" cy="548640"/>
           </a:xfrm>
           <a:prstGeom prst="roundRect">
             <a:avLst>
@@ -17405,8 +17405,8 @@
         </p:nvSpPr>
         <p:spPr>
           <a:xfrm>
-            <a:off x="17099280" y="6766560"/>
-            <a:ext cx="2011680" cy="457200"/>
+            <a:off x="17163288" y="6766560"/>
+            <a:ext cx="1965960" cy="457200"/>
           </a:xfrm>
           <a:prstGeom prst="roundRect">
             <a:avLst>
@@ -17463,8 +17463,8 @@
         </p:nvSpPr>
         <p:spPr>
           <a:xfrm>
-            <a:off x="17099280" y="7315200"/>
-            <a:ext cx="2011680" cy="457200"/>
+            <a:off x="17163288" y="7315200"/>
+            <a:ext cx="1965960" cy="457200"/>
           </a:xfrm>
           <a:prstGeom prst="roundRect">
             <a:avLst>
@@ -17521,8 +17521,8 @@
         </p:nvSpPr>
         <p:spPr>
           <a:xfrm>
-            <a:off x="17007840" y="9006840"/>
-            <a:ext cx="2194560" cy="548640"/>
+            <a:off x="17071848" y="9006840"/>
+            <a:ext cx="2148840" cy="548640"/>
           </a:xfrm>
           <a:prstGeom prst="roundRect">
             <a:avLst>
@@ -18525,7 +18525,7 @@
         </p:nvCxnSpPr>
         <p:spPr>
           <a:xfrm>
-            <a:off x="1920239" y="8732520"/>
+            <a:off x="2171700" y="8732520"/>
             <a:ext cx="0" cy="274320"/>
           </a:xfrm>
           <a:prstGeom prst="line">
@@ -18561,7 +18561,7 @@
         </p:nvCxnSpPr>
         <p:spPr>
           <a:xfrm>
-            <a:off x="4160520" y="8732520"/>
+            <a:off x="4887468" y="8732520"/>
             <a:ext cx="0" cy="274320"/>
           </a:xfrm>
           <a:prstGeom prst="line">
@@ -18597,7 +18597,7 @@
         </p:nvCxnSpPr>
         <p:spPr>
           <a:xfrm>
-            <a:off x="6400800" y="8732520"/>
+            <a:off x="7603236" y="8732520"/>
             <a:ext cx="0" cy="274320"/>
           </a:xfrm>
           <a:prstGeom prst="line">
@@ -18633,7 +18633,7 @@
         </p:nvCxnSpPr>
         <p:spPr>
           <a:xfrm>
-            <a:off x="9052560" y="8732520"/>
+            <a:off x="10204704" y="8732520"/>
             <a:ext cx="0" cy="274320"/>
           </a:xfrm>
           <a:prstGeom prst="line">
@@ -18669,7 +18669,7 @@
         </p:nvCxnSpPr>
         <p:spPr>
           <a:xfrm>
-            <a:off x="12001500" y="8732520"/>
+            <a:off x="12829032" y="8732520"/>
             <a:ext cx="0" cy="137160"/>
           </a:xfrm>
           <a:prstGeom prst="line">
@@ -18704,8 +18704,8 @@
         </p:nvCxnSpPr>
         <p:spPr>
           <a:xfrm flipH="1">
-            <a:off x="11219688" y="8869680"/>
-            <a:ext cx="781812" cy="0"/>
+            <a:off x="12143232" y="8869680"/>
+            <a:ext cx="685800" cy="0"/>
           </a:xfrm>
           <a:prstGeom prst="line">
             <a:avLst/>
@@ -18739,8 +18739,8 @@
         </p:nvCxnSpPr>
         <p:spPr>
           <a:xfrm>
-            <a:off x="11219688" y="8869680"/>
-            <a:ext cx="4572" cy="137160"/>
+            <a:off x="12143232" y="8869680"/>
+            <a:ext cx="0" cy="137160"/>
           </a:xfrm>
           <a:prstGeom prst="line">
             <a:avLst/>
@@ -18775,7 +18775,7 @@
         </p:nvCxnSpPr>
         <p:spPr>
           <a:xfrm>
-            <a:off x="12001500" y="8732520"/>
+            <a:off x="12829032" y="8732520"/>
             <a:ext cx="0" cy="137160"/>
           </a:xfrm>
           <a:prstGeom prst="line">
@@ -18810,8 +18810,8 @@
         </p:nvCxnSpPr>
         <p:spPr>
           <a:xfrm>
-            <a:off x="12001500" y="8869680"/>
-            <a:ext cx="772668" cy="0"/>
+            <a:off x="12829032" y="8869680"/>
+            <a:ext cx="685800" cy="0"/>
           </a:xfrm>
           <a:prstGeom prst="line">
             <a:avLst/>
@@ -18845,8 +18845,8 @@
         </p:nvCxnSpPr>
         <p:spPr>
           <a:xfrm>
-            <a:off x="12774168" y="8869680"/>
-            <a:ext cx="4572" cy="137160"/>
+            <a:off x="13514832" y="8869680"/>
+            <a:ext cx="0" cy="137160"/>
           </a:xfrm>
           <a:prstGeom prst="line">
             <a:avLst/>
@@ -18881,7 +18881,7 @@
         </p:nvCxnSpPr>
         <p:spPr>
           <a:xfrm>
-            <a:off x="15247620" y="8732520"/>
+            <a:off x="15613380" y="8732520"/>
             <a:ext cx="0" cy="137160"/>
           </a:xfrm>
           <a:prstGeom prst="line">
@@ -18916,8 +18916,8 @@
         </p:nvCxnSpPr>
         <p:spPr>
           <a:xfrm flipH="1">
-            <a:off x="14447520" y="8869680"/>
-            <a:ext cx="800100" cy="0"/>
+            <a:off x="14913863" y="8869680"/>
+            <a:ext cx="699517" cy="0"/>
           </a:xfrm>
           <a:prstGeom prst="line">
             <a:avLst/>
@@ -18951,7 +18951,7 @@
         </p:nvCxnSpPr>
         <p:spPr>
           <a:xfrm>
-            <a:off x="14447520" y="8869680"/>
+            <a:off x="14913863" y="8869680"/>
             <a:ext cx="0" cy="137160"/>
           </a:xfrm>
           <a:prstGeom prst="line">
@@ -18987,7 +18987,7 @@
         </p:nvCxnSpPr>
         <p:spPr>
           <a:xfrm>
-            <a:off x="15247620" y="8732520"/>
+            <a:off x="15613380" y="8732520"/>
             <a:ext cx="0" cy="137160"/>
           </a:xfrm>
           <a:prstGeom prst="line">
@@ -19022,8 +19022,8 @@
         </p:nvCxnSpPr>
         <p:spPr>
           <a:xfrm>
-            <a:off x="15247620" y="8869680"/>
-            <a:ext cx="800100" cy="0"/>
+            <a:off x="15613380" y="8869680"/>
+            <a:ext cx="699516" cy="0"/>
           </a:xfrm>
           <a:prstGeom prst="line">
             <a:avLst/>
@@ -19057,7 +19057,7 @@
         </p:nvCxnSpPr>
         <p:spPr>
           <a:xfrm>
-            <a:off x="16047720" y="8869680"/>
+            <a:off x="16312896" y="8869680"/>
             <a:ext cx="0" cy="137160"/>
           </a:xfrm>
           <a:prstGeom prst="line">
@@ -19093,7 +19093,7 @@
         </p:nvCxnSpPr>
         <p:spPr>
           <a:xfrm>
-            <a:off x="18105120" y="8732520"/>
+            <a:off x="18146268" y="8732520"/>
             <a:ext cx="0" cy="274320"/>
           </a:xfrm>
           <a:prstGeom prst="line">

--- a/jaspersoft/docs/deployment_deck/visuals/Standard_Offering_and_Database_Steps.pptx
+++ b/jaspersoft/docs/deployment_deck/visuals/Standard_Offering_and_Database_Steps.pptx
@@ -7576,6 +7576,50 @@
       <p:grpSpPr/>
       <p:sp>
         <p:nvSpPr>
+          <p:cNvPr id="3" name="Rectangle 2"/>
+          <p:cNvSpPr/>
+          <p:nvPr/>
+        </p:nvSpPr>
+        <p:spPr>
+          <a:xfrm>
+            <a:off x="0" y="0"/>
+            <a:ext cx="20116800" cy="11315700"/>
+          </a:xfrm>
+          <a:prstGeom prst="rect">
+            <a:avLst/>
+          </a:prstGeom>
+          <a:solidFill>
+            <a:srgbClr val="0B1723"/>
+          </a:solidFill>
+          <a:ln>
+            <a:noFill/>
+          </a:ln>
+          <a:effectLst/>
+        </p:spPr>
+        <p:style>
+          <a:lnRef idx="1">
+            <a:schemeClr val="accent1"/>
+          </a:lnRef>
+          <a:fillRef idx="3">
+            <a:schemeClr val="accent1"/>
+          </a:fillRef>
+          <a:effectRef idx="2">
+            <a:schemeClr val="accent1"/>
+          </a:effectRef>
+          <a:fontRef idx="minor">
+            <a:schemeClr val="lt1"/>
+          </a:fontRef>
+        </p:style>
+        <p:txBody>
+          <a:bodyPr rtlCol="0" anchor="ctr"/>
+          <a:lstStyle/>
+          <a:p>
+            <a:pPr algn="ctr"/>
+          </a:p>
+        </p:txBody>
+      </p:sp>
+      <p:sp>
+        <p:nvSpPr>
           <p:cNvPr id="2" name="Title 1"/>
           <p:cNvSpPr>
             <a:spLocks noGrp="1"/>
@@ -7590,6 +7634,11 @@
           <a:lstStyle/>
           <a:p>
             <a:r>
+              <a:rPr>
+                <a:solidFill>
+                  <a:srgbClr val="E6ECF2"/>
+                </a:solidFill>
+              </a:rPr>
               <a:t>Standard Offering Release 26</a:t>
             </a:r>
           </a:p>
@@ -7597,7 +7646,7 @@
       </p:sp>
       <p:sp>
         <p:nvSpPr>
-          <p:cNvPr id="3" name="TextBox 2"/>
+          <p:cNvPr id="4" name="TextBox 3"/>
           <p:cNvSpPr txBox="1"/>
           <p:nvPr/>
         </p:nvSpPr>
@@ -7625,7 +7674,7 @@
             <a:r>
               <a:rPr sz="2400" b="0">
                 <a:solidFill>
-                  <a:srgbClr val="F5EFE9"/>
+                  <a:srgbClr val="E6ECF2"/>
                 </a:solidFill>
               </a:rPr>
               <a:t>Two step-by-step visuals: the Standard Offering inside Jaspersoft Server, and the database deployment of the snapshots and the objects the domains depend on  |  September 2026</a:t>
@@ -7653,7 +7702,51 @@
       <p:grpSpPr/>
       <p:sp>
         <p:nvSpPr>
-          <p:cNvPr id="2" name="TextBox 1"/>
+          <p:cNvPr id="2" name="Rectangle 1"/>
+          <p:cNvSpPr/>
+          <p:nvPr/>
+        </p:nvSpPr>
+        <p:spPr>
+          <a:xfrm>
+            <a:off x="0" y="0"/>
+            <a:ext cx="20116800" cy="11315700"/>
+          </a:xfrm>
+          <a:prstGeom prst="rect">
+            <a:avLst/>
+          </a:prstGeom>
+          <a:solidFill>
+            <a:srgbClr val="0B1723"/>
+          </a:solidFill>
+          <a:ln>
+            <a:noFill/>
+          </a:ln>
+          <a:effectLst/>
+        </p:spPr>
+        <p:style>
+          <a:lnRef idx="1">
+            <a:schemeClr val="accent1"/>
+          </a:lnRef>
+          <a:fillRef idx="3">
+            <a:schemeClr val="accent1"/>
+          </a:fillRef>
+          <a:effectRef idx="2">
+            <a:schemeClr val="accent1"/>
+          </a:effectRef>
+          <a:fontRef idx="minor">
+            <a:schemeClr val="lt1"/>
+          </a:fontRef>
+        </p:style>
+        <p:txBody>
+          <a:bodyPr rtlCol="0" anchor="ctr"/>
+          <a:lstStyle/>
+          <a:p>
+            <a:pPr algn="ctr"/>
+          </a:p>
+        </p:txBody>
+      </p:sp>
+      <p:sp>
+        <p:nvSpPr>
+          <p:cNvPr id="3" name="TextBox 2"/>
           <p:cNvSpPr txBox="1"/>
           <p:nvPr/>
         </p:nvSpPr>
@@ -7681,7 +7774,7 @@
             <a:r>
               <a:rPr sz="6000" b="0">
                 <a:solidFill>
-                  <a:srgbClr val="F5EFE9"/>
+                  <a:srgbClr val="E6ECF2"/>
                 </a:solidFill>
               </a:rPr>
               <a:t>Standard Offering Deployment Flow</a:t>
@@ -7691,7 +7784,7 @@
       </p:sp>
       <p:sp>
         <p:nvSpPr>
-          <p:cNvPr id="3" name="Rounded Rectangle 2"/>
+          <p:cNvPr id="4" name="Rounded Rectangle 3"/>
           <p:cNvSpPr/>
           <p:nvPr/>
         </p:nvSpPr>
@@ -7706,7 +7799,7 @@
             </a:avLst>
           </a:prstGeom>
           <a:solidFill>
-            <a:srgbClr val="FFA418"/>
+            <a:srgbClr val="006FAC"/>
           </a:solidFill>
           <a:ln>
             <a:noFill/>
@@ -7739,7 +7832,7 @@
             <a:r>
               <a:rPr sz="1600" b="1">
                 <a:solidFill>
-                  <a:srgbClr val="0B3D7A"/>
+                  <a:srgbClr val="FFFFFF"/>
                 </a:solidFill>
               </a:rPr>
               <a:t>V1</a:t>
@@ -7749,7 +7842,7 @@
       </p:sp>
       <p:sp>
         <p:nvSpPr>
-          <p:cNvPr id="4" name="TextBox 3"/>
+          <p:cNvPr id="5" name="TextBox 4"/>
           <p:cNvSpPr txBox="1"/>
           <p:nvPr/>
         </p:nvSpPr>
@@ -7777,7 +7870,7 @@
             <a:r>
               <a:rPr sz="1050" b="1">
                 <a:solidFill>
-                  <a:srgbClr val="F5EFE9"/>
+                  <a:srgbClr val="E6ECF2"/>
                 </a:solidFill>
               </a:rPr>
               <a:t>@2026, Origin Utility, Inc / Proprietary &amp; Confidential / Internal Use Only</a:t>
@@ -7787,7 +7880,7 @@
       </p:sp>
       <p:sp>
         <p:nvSpPr>
-          <p:cNvPr id="5" name="Rounded Rectangle 4"/>
+          <p:cNvPr id="6" name="Rounded Rectangle 5"/>
           <p:cNvSpPr/>
           <p:nvPr/>
         </p:nvSpPr>
@@ -7804,7 +7897,7 @@
           <a:noFill/>
           <a:ln w="19050">
             <a:solidFill>
-              <a:srgbClr val="F5EFE9"/>
+              <a:srgbClr val="8ACAD4"/>
             </a:solidFill>
           </a:ln>
           <a:effectLst/>
@@ -7833,7 +7926,7 @@
       </p:sp>
       <p:sp>
         <p:nvSpPr>
-          <p:cNvPr id="6" name="TextBox 5"/>
+          <p:cNvPr id="7" name="TextBox 6"/>
           <p:cNvSpPr txBox="1"/>
           <p:nvPr/>
         </p:nvSpPr>
@@ -7861,7 +7954,7 @@
             <a:r>
               <a:rPr sz="1400" b="1">
                 <a:solidFill>
-                  <a:srgbClr val="F5EFE9"/>
+                  <a:srgbClr val="E6ECF2"/>
                 </a:solidFill>
               </a:rPr>
               <a:t>Origin_DEV</a:t>
@@ -7876,7 +7969,7 @@
             <a:r>
               <a:rPr sz="1100" b="0">
                 <a:solidFill>
-                  <a:srgbClr val="F5EFE9"/>
+                  <a:srgbClr val="E6ECF2"/>
                 </a:solidFill>
               </a:rPr>
               <a:t>authoring, the internal server</a:t>
@@ -7886,7 +7979,7 @@
       </p:sp>
       <p:sp>
         <p:nvSpPr>
-          <p:cNvPr id="7" name="Rounded Rectangle 6"/>
+          <p:cNvPr id="8" name="Rounded Rectangle 7"/>
           <p:cNvSpPr/>
           <p:nvPr/>
         </p:nvSpPr>
@@ -7903,7 +7996,7 @@
           <a:noFill/>
           <a:ln w="19050">
             <a:solidFill>
-              <a:srgbClr val="F5EFE9"/>
+              <a:srgbClr val="8ACAD4"/>
             </a:solidFill>
           </a:ln>
           <a:effectLst/>
@@ -7932,7 +8025,7 @@
       </p:sp>
       <p:sp>
         <p:nvSpPr>
-          <p:cNvPr id="8" name="TextBox 7"/>
+          <p:cNvPr id="9" name="TextBox 8"/>
           <p:cNvSpPr txBox="1"/>
           <p:nvPr/>
         </p:nvSpPr>
@@ -7960,7 +8053,7 @@
             <a:r>
               <a:rPr sz="1400" b="1">
                 <a:solidFill>
-                  <a:srgbClr val="F5EFE9"/>
+                  <a:srgbClr val="E6ECF2"/>
                 </a:solidFill>
               </a:rPr>
               <a:t>Origin_TEST</a:t>
@@ -7975,7 +8068,7 @@
             <a:r>
               <a:rPr sz="1100" b="0">
                 <a:solidFill>
-                  <a:srgbClr val="F5EFE9"/>
+                  <a:srgbClr val="E6ECF2"/>
                 </a:solidFill>
               </a:rPr>
               <a:t>proving, before any client</a:t>
@@ -7985,7 +8078,7 @@
       </p:sp>
       <p:sp>
         <p:nvSpPr>
-          <p:cNvPr id="9" name="Rounded Rectangle 8"/>
+          <p:cNvPr id="10" name="Rounded Rectangle 9"/>
           <p:cNvSpPr/>
           <p:nvPr/>
         </p:nvSpPr>
@@ -8002,7 +8095,7 @@
           <a:noFill/>
           <a:ln w="19050">
             <a:solidFill>
-              <a:srgbClr val="F5EFE9"/>
+              <a:srgbClr val="8ACAD4"/>
             </a:solidFill>
           </a:ln>
           <a:effectLst/>
@@ -8031,7 +8124,7 @@
       </p:sp>
       <p:sp>
         <p:nvSpPr>
-          <p:cNvPr id="10" name="TextBox 9"/>
+          <p:cNvPr id="11" name="TextBox 10"/>
           <p:cNvSpPr txBox="1"/>
           <p:nvPr/>
         </p:nvSpPr>
@@ -8059,7 +8152,7 @@
             <a:r>
               <a:rPr sz="1400" b="1">
                 <a:solidFill>
-                  <a:srgbClr val="F5EFE9"/>
+                  <a:srgbClr val="E6ECF2"/>
                 </a:solidFill>
               </a:rPr>
               <a:t>Client test org</a:t>
@@ -8074,7 +8167,7 @@
             <a:r>
               <a:rPr sz="1100" b="0">
                 <a:solidFill>
-                  <a:srgbClr val="F5EFE9"/>
+                  <a:srgbClr val="E6ECF2"/>
                 </a:solidFill>
               </a:rPr>
               <a:t>the client's own data</a:t>
@@ -8084,7 +8177,7 @@
       </p:sp>
       <p:sp>
         <p:nvSpPr>
-          <p:cNvPr id="11" name="Rounded Rectangle 10"/>
+          <p:cNvPr id="12" name="Rounded Rectangle 11"/>
           <p:cNvSpPr/>
           <p:nvPr/>
         </p:nvSpPr>
@@ -8101,7 +8194,7 @@
           <a:noFill/>
           <a:ln w="19050">
             <a:solidFill>
-              <a:srgbClr val="F5EFE9"/>
+              <a:srgbClr val="8ACAD4"/>
             </a:solidFill>
           </a:ln>
           <a:effectLst/>
@@ -8130,7 +8223,7 @@
       </p:sp>
       <p:sp>
         <p:nvSpPr>
-          <p:cNvPr id="12" name="TextBox 11"/>
+          <p:cNvPr id="13" name="TextBox 12"/>
           <p:cNvSpPr txBox="1"/>
           <p:nvPr/>
         </p:nvSpPr>
@@ -8158,7 +8251,7 @@
             <a:r>
               <a:rPr sz="1400" b="1">
                 <a:solidFill>
-                  <a:srgbClr val="F5EFE9"/>
+                  <a:srgbClr val="E6ECF2"/>
                 </a:solidFill>
               </a:rPr>
               <a:t>Client prod org</a:t>
@@ -8173,7 +8266,7 @@
             <a:r>
               <a:rPr sz="1100" b="0">
                 <a:solidFill>
-                  <a:srgbClr val="F5EFE9"/>
+                  <a:srgbClr val="E6ECF2"/>
                 </a:solidFill>
               </a:rPr>
               <a:t>read-only until the prod flag is given</a:t>
@@ -8183,7 +8276,7 @@
       </p:sp>
       <p:sp>
         <p:nvSpPr>
-          <p:cNvPr id="13" name="Rounded Rectangle 12"/>
+          <p:cNvPr id="14" name="Rounded Rectangle 13"/>
           <p:cNvSpPr/>
           <p:nvPr/>
         </p:nvSpPr>
@@ -8200,7 +8293,7 @@
           <a:noFill/>
           <a:ln w="19050">
             <a:solidFill>
-              <a:srgbClr val="F5EFE9"/>
+              <a:srgbClr val="8ACAD4"/>
             </a:solidFill>
           </a:ln>
           <a:effectLst/>
@@ -8229,7 +8322,7 @@
       </p:sp>
       <p:sp>
         <p:nvSpPr>
-          <p:cNvPr id="14" name="TextBox 13"/>
+          <p:cNvPr id="15" name="TextBox 14"/>
           <p:cNvSpPr txBox="1"/>
           <p:nvPr/>
         </p:nvSpPr>
@@ -8257,7 +8350,7 @@
             <a:r>
               <a:rPr sz="1400" b="1">
                 <a:solidFill>
-                  <a:srgbClr val="F5EFE9"/>
+                  <a:srgbClr val="E6ECF2"/>
                 </a:solidFill>
               </a:rPr>
               <a:t>After go-live</a:t>
@@ -8272,7 +8365,7 @@
             <a:r>
               <a:rPr sz="1100" b="0">
                 <a:solidFill>
-                  <a:srgbClr val="F5EFE9"/>
+                  <a:srgbClr val="E6ECF2"/>
                 </a:solidFill>
               </a:rPr>
               <a:t>every change is a tool run with the same proofs, never a hand edit</a:t>
@@ -8282,7 +8375,7 @@
       </p:sp>
       <p:sp>
         <p:nvSpPr>
-          <p:cNvPr id="15" name="Rounded Rectangle 14"/>
+          <p:cNvPr id="16" name="Rounded Rectangle 15"/>
           <p:cNvSpPr/>
           <p:nvPr/>
         </p:nvSpPr>
@@ -8297,7 +8390,7 @@
             </a:avLst>
           </a:prstGeom>
           <a:solidFill>
-            <a:srgbClr val="F5EFE9"/>
+            <a:srgbClr val="F2F5F8"/>
           </a:solidFill>
           <a:ln>
             <a:noFill/>
@@ -8330,7 +8423,7 @@
             <a:r>
               <a:rPr sz="1400" b="1">
                 <a:solidFill>
-                  <a:srgbClr val="0B3D7A"/>
+                  <a:srgbClr val="004B86"/>
                 </a:solidFill>
               </a:rPr>
               <a:t>Workstreams tree</a:t>
@@ -8345,7 +8438,7 @@
             <a:r>
               <a:rPr sz="1100" b="0">
                 <a:solidFill>
-                  <a:srgbClr val="4C5D69"/>
+                  <a:srgbClr val="56636E"/>
                 </a:solidFill>
               </a:rPr>
               <a:t>domains, Ad Hoc views, reports and dashboards: the only content edited by hand</a:t>
@@ -8355,7 +8448,7 @@
       </p:sp>
       <p:sp>
         <p:nvSpPr>
-          <p:cNvPr id="16" name="Oval 15"/>
+          <p:cNvPr id="17" name="Oval 16"/>
           <p:cNvSpPr/>
           <p:nvPr/>
         </p:nvSpPr>
@@ -8368,7 +8461,7 @@
             <a:avLst/>
           </a:prstGeom>
           <a:solidFill>
-            <a:srgbClr val="FFA418"/>
+            <a:srgbClr val="006FAC"/>
           </a:solidFill>
           <a:ln>
             <a:noFill/>
@@ -8401,7 +8494,7 @@
             <a:r>
               <a:rPr sz="1000" b="1">
                 <a:solidFill>
-                  <a:srgbClr val="0B3D7A"/>
+                  <a:srgbClr val="FFFFFF"/>
                 </a:solidFill>
               </a:rPr>
               <a:t>1</a:t>
@@ -8411,7 +8504,7 @@
       </p:sp>
       <p:sp>
         <p:nvSpPr>
-          <p:cNvPr id="17" name="Rounded Rectangle 16"/>
+          <p:cNvPr id="18" name="Rounded Rectangle 17"/>
           <p:cNvSpPr/>
           <p:nvPr/>
         </p:nvSpPr>
@@ -8426,7 +8519,7 @@
             </a:avLst>
           </a:prstGeom>
           <a:solidFill>
-            <a:srgbClr val="F5EFE9"/>
+            <a:srgbClr val="F2F5F8"/>
           </a:solidFill>
           <a:ln>
             <a:noFill/>
@@ -8459,7 +8552,7 @@
             <a:r>
               <a:rPr sz="1400" b="1">
                 <a:solidFill>
-                  <a:srgbClr val="0B3D7A"/>
+                  <a:srgbClr val="004B86"/>
                 </a:solidFill>
               </a:rPr>
               <a:t>Export the org</a:t>
@@ -8474,7 +8567,7 @@
             <a:r>
               <a:rPr sz="1100" b="0">
                 <a:solidFill>
-                  <a:srgbClr val="4C5D69"/>
+                  <a:srgbClr val="56636E"/>
                 </a:solidFill>
               </a:rPr>
               <a:t>one API export task, polled, downloaded</a:t>
@@ -8484,7 +8577,7 @@
       </p:sp>
       <p:sp>
         <p:nvSpPr>
-          <p:cNvPr id="18" name="Oval 17"/>
+          <p:cNvPr id="19" name="Oval 18"/>
           <p:cNvSpPr/>
           <p:nvPr/>
         </p:nvSpPr>
@@ -8497,7 +8590,7 @@
             <a:avLst/>
           </a:prstGeom>
           <a:solidFill>
-            <a:srgbClr val="FFA418"/>
+            <a:srgbClr val="006FAC"/>
           </a:solidFill>
           <a:ln>
             <a:noFill/>
@@ -8530,7 +8623,7 @@
             <a:r>
               <a:rPr sz="1000" b="1">
                 <a:solidFill>
-                  <a:srgbClr val="0B3D7A"/>
+                  <a:srgbClr val="FFFFFF"/>
                 </a:solidFill>
               </a:rPr>
               <a:t>2</a:t>
@@ -8540,7 +8633,7 @@
       </p:sp>
       <p:sp>
         <p:nvSpPr>
-          <p:cNvPr id="19" name="Rounded Rectangle 18"/>
+          <p:cNvPr id="20" name="Rounded Rectangle 19"/>
           <p:cNvSpPr/>
           <p:nvPr/>
         </p:nvSpPr>
@@ -8555,7 +8648,7 @@
             </a:avLst>
           </a:prstGeom>
           <a:solidFill>
-            <a:srgbClr val="F5EFE9"/>
+            <a:srgbClr val="F2F5F8"/>
           </a:solidFill>
           <a:ln>
             <a:noFill/>
@@ -8588,7 +8681,7 @@
             <a:r>
               <a:rPr sz="1400" b="1">
                 <a:solidFill>
-                  <a:srgbClr val="0B3D7A"/>
+                  <a:srgbClr val="004B86"/>
                 </a:solidFill>
               </a:rPr>
               <a:t>Build the package</a:t>
@@ -8603,7 +8696,7 @@
             <a:r>
               <a:rPr sz="1100" b="0">
                 <a:solidFill>
-                  <a:srgbClr val="4C5D69"/>
+                  <a:srgbClr val="56636E"/>
                 </a:solidFill>
               </a:rPr>
               <a:t>inventory and classify the export; keep the offering list; one copy of each domain in one home; carry the datasource; rewrite every path; strip print wrappers; narrow the import index</a:t>
@@ -8613,7 +8706,7 @@
       </p:sp>
       <p:sp>
         <p:nvSpPr>
-          <p:cNvPr id="20" name="Oval 19"/>
+          <p:cNvPr id="21" name="Oval 20"/>
           <p:cNvSpPr/>
           <p:nvPr/>
         </p:nvSpPr>
@@ -8626,7 +8719,7 @@
             <a:avLst/>
           </a:prstGeom>
           <a:solidFill>
-            <a:srgbClr val="FFA418"/>
+            <a:srgbClr val="006FAC"/>
           </a:solidFill>
           <a:ln>
             <a:noFill/>
@@ -8659,7 +8752,7 @@
             <a:r>
               <a:rPr sz="1000" b="1">
                 <a:solidFill>
-                  <a:srgbClr val="0B3D7A"/>
+                  <a:srgbClr val="FFFFFF"/>
                 </a:solidFill>
               </a:rPr>
               <a:t>3</a:t>
@@ -8669,7 +8762,7 @@
       </p:sp>
       <p:sp>
         <p:nvSpPr>
-          <p:cNvPr id="21" name="Diamond 20"/>
+          <p:cNvPr id="22" name="Diamond 21"/>
           <p:cNvSpPr/>
           <p:nvPr/>
         </p:nvSpPr>
@@ -8682,7 +8775,7 @@
             <a:avLst/>
           </a:prstGeom>
           <a:solidFill>
-            <a:srgbClr val="FFA418"/>
+            <a:srgbClr val="006FAC"/>
           </a:solidFill>
           <a:ln>
             <a:noFill/>
@@ -8715,7 +8808,7 @@
             <a:r>
               <a:rPr sz="1100" b="1">
                 <a:solidFill>
-                  <a:srgbClr val="0B3D7A"/>
+                  <a:srgbClr val="FFFFFF"/>
                 </a:solidFill>
               </a:rPr>
               <a:t>package verifies?</a:t>
@@ -8725,7 +8818,7 @@
       </p:sp>
       <p:sp>
         <p:nvSpPr>
-          <p:cNvPr id="22" name="Oval 21"/>
+          <p:cNvPr id="23" name="Oval 22"/>
           <p:cNvSpPr/>
           <p:nvPr/>
         </p:nvSpPr>
@@ -8738,7 +8831,7 @@
             <a:avLst/>
           </a:prstGeom>
           <a:solidFill>
-            <a:srgbClr val="FFA418"/>
+            <a:srgbClr val="006FAC"/>
           </a:solidFill>
           <a:ln>
             <a:noFill/>
@@ -8771,7 +8864,7 @@
             <a:r>
               <a:rPr sz="1000" b="1">
                 <a:solidFill>
-                  <a:srgbClr val="0B3D7A"/>
+                  <a:srgbClr val="FFFFFF"/>
                 </a:solidFill>
               </a:rPr>
               <a:t>4</a:t>
@@ -8781,7 +8874,7 @@
       </p:sp>
       <p:sp>
         <p:nvSpPr>
-          <p:cNvPr id="23" name="Rounded Rectangle 22"/>
+          <p:cNvPr id="24" name="Rounded Rectangle 23"/>
           <p:cNvSpPr/>
           <p:nvPr/>
         </p:nvSpPr>
@@ -8796,7 +8889,7 @@
             </a:avLst>
           </a:prstGeom>
           <a:solidFill>
-            <a:srgbClr val="F5EFE9"/>
+            <a:srgbClr val="F2F5F8"/>
           </a:solidFill>
           <a:ln>
             <a:noFill/>
@@ -8829,7 +8922,7 @@
             <a:r>
               <a:rPr sz="900" b="1">
                 <a:solidFill>
-                  <a:srgbClr val="0B3D7A"/>
+                  <a:srgbClr val="004B86"/>
                 </a:solidFill>
               </a:rPr>
               <a:t>stop</a:t>
@@ -8839,7 +8932,7 @@
       </p:sp>
       <p:sp>
         <p:nvSpPr>
-          <p:cNvPr id="24" name="Rounded Rectangle 23"/>
+          <p:cNvPr id="25" name="Rounded Rectangle 24"/>
           <p:cNvSpPr/>
           <p:nvPr/>
         </p:nvSpPr>
@@ -8854,7 +8947,7 @@
             </a:avLst>
           </a:prstGeom>
           <a:solidFill>
-            <a:srgbClr val="F5EFE9"/>
+            <a:srgbClr val="F2F5F8"/>
           </a:solidFill>
           <a:ln>
             <a:noFill/>
@@ -8887,7 +8980,7 @@
             <a:r>
               <a:rPr sz="1400" b="1">
                 <a:solidFill>
-                  <a:srgbClr val="0B3D7A"/>
+                  <a:srgbClr val="004B86"/>
                 </a:solidFill>
               </a:rPr>
               <a:t>Import, update in place</a:t>
@@ -8902,7 +8995,7 @@
             <a:r>
               <a:rPr sz="1100" b="0">
                 <a:solidFill>
-                  <a:srgbClr val="4C5D69"/>
+                  <a:srgbClr val="56636E"/>
                 </a:solidFill>
               </a:rPr>
               <a:t>polled; an importer warning counts as a failure</a:t>
@@ -8912,7 +9005,7 @@
       </p:sp>
       <p:sp>
         <p:nvSpPr>
-          <p:cNvPr id="25" name="Oval 24"/>
+          <p:cNvPr id="26" name="Oval 25"/>
           <p:cNvSpPr/>
           <p:nvPr/>
         </p:nvSpPr>
@@ -8925,7 +9018,7 @@
             <a:avLst/>
           </a:prstGeom>
           <a:solidFill>
-            <a:srgbClr val="FFA418"/>
+            <a:srgbClr val="006FAC"/>
           </a:solidFill>
           <a:ln>
             <a:noFill/>
@@ -8958,7 +9051,7 @@
             <a:r>
               <a:rPr sz="1000" b="1">
                 <a:solidFill>
-                  <a:srgbClr val="0B3D7A"/>
+                  <a:srgbClr val="FFFFFF"/>
                 </a:solidFill>
               </a:rPr>
               <a:t>5</a:t>
@@ -8968,7 +9061,7 @@
       </p:sp>
       <p:sp>
         <p:nvSpPr>
-          <p:cNvPr id="26" name="Rounded Rectangle 25"/>
+          <p:cNvPr id="27" name="Rounded Rectangle 26"/>
           <p:cNvSpPr/>
           <p:nvPr/>
         </p:nvSpPr>
@@ -8983,7 +9076,7 @@
             </a:avLst>
           </a:prstGeom>
           <a:solidFill>
-            <a:srgbClr val="F5EFE9"/>
+            <a:srgbClr val="F2F5F8"/>
           </a:solidFill>
           <a:ln>
             <a:noFill/>
@@ -9016,7 +9109,7 @@
             <a:r>
               <a:rPr sz="1400" b="1">
                 <a:solidFill>
-                  <a:srgbClr val="0B3D7A"/>
+                  <a:srgbClr val="004B86"/>
                 </a:solidFill>
               </a:rPr>
               <a:t>Re-export and compare</a:t>
@@ -9031,7 +9124,7 @@
             <a:r>
               <a:rPr sz="1100" b="0">
                 <a:solidFill>
-                  <a:srgbClr val="4C5D69"/>
+                  <a:srgbClr val="56636E"/>
                 </a:solidFill>
               </a:rPr>
               <a:t>byte-equal inside the scope, importer stamps ignored</a:t>
@@ -9041,7 +9134,7 @@
       </p:sp>
       <p:sp>
         <p:nvSpPr>
-          <p:cNvPr id="27" name="Oval 26"/>
+          <p:cNvPr id="28" name="Oval 27"/>
           <p:cNvSpPr/>
           <p:nvPr/>
         </p:nvSpPr>
@@ -9054,7 +9147,7 @@
             <a:avLst/>
           </a:prstGeom>
           <a:solidFill>
-            <a:srgbClr val="FFA418"/>
+            <a:srgbClr val="006FAC"/>
           </a:solidFill>
           <a:ln>
             <a:noFill/>
@@ -9087,7 +9180,7 @@
             <a:r>
               <a:rPr sz="1000" b="1">
                 <a:solidFill>
-                  <a:srgbClr val="0B3D7A"/>
+                  <a:srgbClr val="FFFFFF"/>
                 </a:solidFill>
               </a:rPr>
               <a:t>6</a:t>
@@ -9097,7 +9190,7 @@
       </p:sp>
       <p:sp>
         <p:nvSpPr>
-          <p:cNvPr id="28" name="Rounded Rectangle 27"/>
+          <p:cNvPr id="29" name="Rounded Rectangle 28"/>
           <p:cNvSpPr/>
           <p:nvPr/>
         </p:nvSpPr>
@@ -9112,7 +9205,7 @@
             </a:avLst>
           </a:prstGeom>
           <a:solidFill>
-            <a:srgbClr val="F5EFE9"/>
+            <a:srgbClr val="F2F5F8"/>
           </a:solidFill>
           <a:ln>
             <a:noFill/>
@@ -9145,7 +9238,7 @@
             <a:r>
               <a:rPr sz="1400" b="1">
                 <a:solidFill>
-                  <a:srgbClr val="0B3D7A"/>
+                  <a:srgbClr val="004B86"/>
                 </a:solidFill>
               </a:rPr>
               <a:t>Execute everything</a:t>
@@ -9160,7 +9253,7 @@
             <a:r>
               <a:rPr sz="1100" b="0">
                 <a:solidFill>
-                  <a:srgbClr val="4C5D69"/>
+                  <a:srgbClr val="56636E"/>
                 </a:solidFill>
               </a:rPr>
               <a:t>views by query, reports as PDF, domains by metadata and probe</a:t>
@@ -9170,7 +9263,7 @@
       </p:sp>
       <p:sp>
         <p:nvSpPr>
-          <p:cNvPr id="29" name="Oval 28"/>
+          <p:cNvPr id="30" name="Oval 29"/>
           <p:cNvSpPr/>
           <p:nvPr/>
         </p:nvSpPr>
@@ -9183,7 +9276,7 @@
             <a:avLst/>
           </a:prstGeom>
           <a:solidFill>
-            <a:srgbClr val="FFA418"/>
+            <a:srgbClr val="006FAC"/>
           </a:solidFill>
           <a:ln>
             <a:noFill/>
@@ -9216,7 +9309,7 @@
             <a:r>
               <a:rPr sz="1000" b="1">
                 <a:solidFill>
-                  <a:srgbClr val="0B3D7A"/>
+                  <a:srgbClr val="FFFFFF"/>
                 </a:solidFill>
               </a:rPr>
               <a:t>7</a:t>
@@ -9226,7 +9319,7 @@
       </p:sp>
       <p:sp>
         <p:nvSpPr>
-          <p:cNvPr id="30" name="Diamond 29"/>
+          <p:cNvPr id="31" name="Diamond 30"/>
           <p:cNvSpPr/>
           <p:nvPr/>
         </p:nvSpPr>
@@ -9239,7 +9332,7 @@
             <a:avLst/>
           </a:prstGeom>
           <a:solidFill>
-            <a:srgbClr val="FFA418"/>
+            <a:srgbClr val="006FAC"/>
           </a:solidFill>
           <a:ln>
             <a:noFill/>
@@ -9272,7 +9365,7 @@
             <a:r>
               <a:rPr sz="1100" b="1">
                 <a:solidFill>
-                  <a:srgbClr val="0B3D7A"/>
+                  <a:srgbClr val="FFFFFF"/>
                 </a:solidFill>
               </a:rPr>
               <a:t>seven proofs pass?</a:t>
@@ -9282,7 +9375,7 @@
       </p:sp>
       <p:sp>
         <p:nvSpPr>
-          <p:cNvPr id="31" name="Oval 30"/>
+          <p:cNvPr id="32" name="Oval 31"/>
           <p:cNvSpPr/>
           <p:nvPr/>
         </p:nvSpPr>
@@ -9295,7 +9388,7 @@
             <a:avLst/>
           </a:prstGeom>
           <a:solidFill>
-            <a:srgbClr val="FFA418"/>
+            <a:srgbClr val="006FAC"/>
           </a:solidFill>
           <a:ln>
             <a:noFill/>
@@ -9328,7 +9421,7 @@
             <a:r>
               <a:rPr sz="1000" b="1">
                 <a:solidFill>
-                  <a:srgbClr val="0B3D7A"/>
+                  <a:srgbClr val="FFFFFF"/>
                 </a:solidFill>
               </a:rPr>
               <a:t>8</a:t>
@@ -9338,7 +9431,7 @@
       </p:sp>
       <p:sp>
         <p:nvSpPr>
-          <p:cNvPr id="32" name="Rounded Rectangle 31"/>
+          <p:cNvPr id="33" name="Rounded Rectangle 32"/>
           <p:cNvSpPr/>
           <p:nvPr/>
         </p:nvSpPr>
@@ -9353,7 +9446,7 @@
             </a:avLst>
           </a:prstGeom>
           <a:solidFill>
-            <a:srgbClr val="F5EFE9"/>
+            <a:srgbClr val="F2F5F8"/>
           </a:solidFill>
           <a:ln>
             <a:noFill/>
@@ -9386,7 +9479,7 @@
             <a:r>
               <a:rPr sz="900" b="1">
                 <a:solidFill>
-                  <a:srgbClr val="0B3D7A"/>
+                  <a:srgbClr val="004B86"/>
                 </a:solidFill>
               </a:rPr>
               <a:t>stop</a:t>
@@ -9396,7 +9489,7 @@
       </p:sp>
       <p:sp>
         <p:nvSpPr>
-          <p:cNvPr id="33" name="Rounded Rectangle 32"/>
+          <p:cNvPr id="34" name="Rounded Rectangle 33"/>
           <p:cNvSpPr/>
           <p:nvPr/>
         </p:nvSpPr>
@@ -9411,7 +9504,7 @@
             </a:avLst>
           </a:prstGeom>
           <a:solidFill>
-            <a:srgbClr val="F5EFE9"/>
+            <a:srgbClr val="F2F5F8"/>
           </a:solidFill>
           <a:ln>
             <a:noFill/>
@@ -9444,7 +9537,7 @@
             <a:r>
               <a:rPr sz="1400" b="1">
                 <a:solidFill>
-                  <a:srgbClr val="0B3D7A"/>
+                  <a:srgbClr val="004B86"/>
                 </a:solidFill>
               </a:rPr>
               <a:t>Proven offering</a:t>
@@ -9459,7 +9552,7 @@
             <a:r>
               <a:rPr sz="1100" b="0">
                 <a:solidFill>
-                  <a:srgbClr val="4C5D69"/>
+                  <a:srgbClr val="56636E"/>
                 </a:solidFill>
               </a:rPr>
               <a:t>the package every client promotion starts from</a:t>
@@ -9469,7 +9562,7 @@
       </p:sp>
       <p:sp>
         <p:nvSpPr>
-          <p:cNvPr id="34" name="Oval 33"/>
+          <p:cNvPr id="35" name="Oval 34"/>
           <p:cNvSpPr/>
           <p:nvPr/>
         </p:nvSpPr>
@@ -9482,7 +9575,7 @@
             <a:avLst/>
           </a:prstGeom>
           <a:solidFill>
-            <a:srgbClr val="FFA418"/>
+            <a:srgbClr val="006FAC"/>
           </a:solidFill>
           <a:ln>
             <a:noFill/>
@@ -9515,7 +9608,7 @@
             <a:r>
               <a:rPr sz="1000" b="1">
                 <a:solidFill>
-                  <a:srgbClr val="0B3D7A"/>
+                  <a:srgbClr val="FFFFFF"/>
                 </a:solidFill>
               </a:rPr>
               <a:t>9</a:t>
@@ -9525,7 +9618,7 @@
       </p:sp>
       <p:sp>
         <p:nvSpPr>
-          <p:cNvPr id="35" name="Rounded Rectangle 34"/>
+          <p:cNvPr id="36" name="Rounded Rectangle 35"/>
           <p:cNvSpPr/>
           <p:nvPr/>
         </p:nvSpPr>
@@ -9540,7 +9633,7 @@
             </a:avLst>
           </a:prstGeom>
           <a:solidFill>
-            <a:srgbClr val="FFA418"/>
+            <a:srgbClr val="006FAC"/>
           </a:solidFill>
           <a:ln>
             <a:noFill/>
@@ -9573,7 +9666,7 @@
             <a:r>
               <a:rPr sz="1100" b="1">
                 <a:solidFill>
-                  <a:srgbClr val="0B3D7A"/>
+                  <a:srgbClr val="FFFFFF"/>
                 </a:solidFill>
               </a:rPr>
               <a:t>datasource: the client's own export, carried byte for byte</a:t>
@@ -9583,7 +9676,7 @@
       </p:sp>
       <p:sp>
         <p:nvSpPr>
-          <p:cNvPr id="36" name="Rounded Rectangle 35"/>
+          <p:cNvPr id="37" name="Rounded Rectangle 36"/>
           <p:cNvSpPr/>
           <p:nvPr/>
         </p:nvSpPr>
@@ -9598,7 +9691,7 @@
             </a:avLst>
           </a:prstGeom>
           <a:solidFill>
-            <a:srgbClr val="F5EFE9"/>
+            <a:srgbClr val="F2F5F8"/>
           </a:solidFill>
           <a:ln>
             <a:noFill/>
@@ -9631,7 +9724,7 @@
             <a:r>
               <a:rPr sz="1400" b="1">
                 <a:solidFill>
-                  <a:srgbClr val="0B3D7A"/>
+                  <a:srgbClr val="004B86"/>
                 </a:solidFill>
               </a:rPr>
               <a:t>Inventory snapshot</a:t>
@@ -9646,7 +9739,7 @@
             <a:r>
               <a:rPr sz="1100" b="0">
                 <a:solidFill>
-                  <a:srgbClr val="4C5D69"/>
+                  <a:srgbClr val="56636E"/>
                 </a:solidFill>
               </a:rPr>
               <a:t>every resource on the org before anything changes</a:t>
@@ -9656,7 +9749,7 @@
       </p:sp>
       <p:sp>
         <p:nvSpPr>
-          <p:cNvPr id="37" name="Oval 36"/>
+          <p:cNvPr id="38" name="Oval 37"/>
           <p:cNvSpPr/>
           <p:nvPr/>
         </p:nvSpPr>
@@ -9669,7 +9762,7 @@
             <a:avLst/>
           </a:prstGeom>
           <a:solidFill>
-            <a:srgbClr val="FFA418"/>
+            <a:srgbClr val="006FAC"/>
           </a:solidFill>
           <a:ln>
             <a:noFill/>
@@ -9702,7 +9795,7 @@
             <a:r>
               <a:rPr sz="1000" b="1">
                 <a:solidFill>
-                  <a:srgbClr val="0B3D7A"/>
+                  <a:srgbClr val="FFFFFF"/>
                 </a:solidFill>
               </a:rPr>
               <a:t>10</a:t>
@@ -9712,7 +9805,7 @@
       </p:sp>
       <p:sp>
         <p:nvSpPr>
-          <p:cNvPr id="38" name="Rounded Rectangle 37"/>
+          <p:cNvPr id="39" name="Rounded Rectangle 38"/>
           <p:cNvSpPr/>
           <p:nvPr/>
         </p:nvSpPr>
@@ -9727,7 +9820,7 @@
             </a:avLst>
           </a:prstGeom>
           <a:solidFill>
-            <a:srgbClr val="F5EFE9"/>
+            <a:srgbClr val="F2F5F8"/>
           </a:solidFill>
           <a:ln>
             <a:noFill/>
@@ -9760,7 +9853,7 @@
             <a:r>
               <a:rPr sz="1400" b="1">
                 <a:solidFill>
-                  <a:srgbClr val="0B3D7A"/>
+                  <a:srgbClr val="004B86"/>
                 </a:solidFill>
               </a:rPr>
               <a:t>Rebuild for the client</a:t>
@@ -9775,7 +9868,7 @@
             <a:r>
               <a:rPr sz="1100" b="0">
                 <a:solidFill>
-                  <a:srgbClr val="4C5D69"/>
+                  <a:srgbClr val="56636E"/>
                 </a:solidFill>
               </a:rPr>
               <a:t>the client's datasource carried; org path, folder, alias and tenant root rewritten by tested replacements</a:t>
@@ -9785,7 +9878,7 @@
       </p:sp>
       <p:sp>
         <p:nvSpPr>
-          <p:cNvPr id="39" name="Oval 38"/>
+          <p:cNvPr id="40" name="Oval 39"/>
           <p:cNvSpPr/>
           <p:nvPr/>
         </p:nvSpPr>
@@ -9798,7 +9891,7 @@
             <a:avLst/>
           </a:prstGeom>
           <a:solidFill>
-            <a:srgbClr val="FFA418"/>
+            <a:srgbClr val="006FAC"/>
           </a:solidFill>
           <a:ln>
             <a:noFill/>
@@ -9831,7 +9924,7 @@
             <a:r>
               <a:rPr sz="1000" b="1">
                 <a:solidFill>
-                  <a:srgbClr val="0B3D7A"/>
+                  <a:srgbClr val="FFFFFF"/>
                 </a:solidFill>
               </a:rPr>
               <a:t>11</a:t>
@@ -9841,7 +9934,7 @@
       </p:sp>
       <p:sp>
         <p:nvSpPr>
-          <p:cNvPr id="40" name="Diamond 39"/>
+          <p:cNvPr id="41" name="Diamond 40"/>
           <p:cNvSpPr/>
           <p:nvPr/>
         </p:nvSpPr>
@@ -9854,7 +9947,7 @@
             <a:avLst/>
           </a:prstGeom>
           <a:solidFill>
-            <a:srgbClr val="FFA418"/>
+            <a:srgbClr val="006FAC"/>
           </a:solidFill>
           <a:ln>
             <a:noFill/>
@@ -9887,7 +9980,7 @@
             <a:r>
               <a:rPr sz="1100" b="1">
                 <a:solidFill>
-                  <a:srgbClr val="0B3D7A"/>
+                  <a:srgbClr val="FFFFFF"/>
                 </a:solidFill>
               </a:rPr>
               <a:t>package verified?</a:t>
@@ -9897,7 +9990,7 @@
       </p:sp>
       <p:sp>
         <p:nvSpPr>
-          <p:cNvPr id="41" name="Oval 40"/>
+          <p:cNvPr id="42" name="Oval 41"/>
           <p:cNvSpPr/>
           <p:nvPr/>
         </p:nvSpPr>
@@ -9910,7 +10003,7 @@
             <a:avLst/>
           </a:prstGeom>
           <a:solidFill>
-            <a:srgbClr val="FFA418"/>
+            <a:srgbClr val="006FAC"/>
           </a:solidFill>
           <a:ln>
             <a:noFill/>
@@ -9943,7 +10036,7 @@
             <a:r>
               <a:rPr sz="1000" b="1">
                 <a:solidFill>
-                  <a:srgbClr val="0B3D7A"/>
+                  <a:srgbClr val="FFFFFF"/>
                 </a:solidFill>
               </a:rPr>
               <a:t>12</a:t>
@@ -9953,7 +10046,7 @@
       </p:sp>
       <p:sp>
         <p:nvSpPr>
-          <p:cNvPr id="42" name="Rounded Rectangle 41"/>
+          <p:cNvPr id="43" name="Rounded Rectangle 42"/>
           <p:cNvSpPr/>
           <p:nvPr/>
         </p:nvSpPr>
@@ -9968,7 +10061,7 @@
             </a:avLst>
           </a:prstGeom>
           <a:solidFill>
-            <a:srgbClr val="F5EFE9"/>
+            <a:srgbClr val="F2F5F8"/>
           </a:solidFill>
           <a:ln>
             <a:noFill/>
@@ -10001,7 +10094,7 @@
             <a:r>
               <a:rPr sz="900" b="1">
                 <a:solidFill>
-                  <a:srgbClr val="0B3D7A"/>
+                  <a:srgbClr val="004B86"/>
                 </a:solidFill>
               </a:rPr>
               <a:t>stop</a:t>
@@ -10011,7 +10104,7 @@
       </p:sp>
       <p:sp>
         <p:nvSpPr>
-          <p:cNvPr id="43" name="Rounded Rectangle 42"/>
+          <p:cNvPr id="44" name="Rounded Rectangle 43"/>
           <p:cNvSpPr/>
           <p:nvPr/>
         </p:nvSpPr>
@@ -10026,7 +10119,7 @@
             </a:avLst>
           </a:prstGeom>
           <a:solidFill>
-            <a:srgbClr val="F5EFE9"/>
+            <a:srgbClr val="F2F5F8"/>
           </a:solidFill>
           <a:ln>
             <a:noFill/>
@@ -10059,7 +10152,7 @@
             <a:r>
               <a:rPr sz="1400" b="1">
                 <a:solidFill>
-                  <a:srgbClr val="0B3D7A"/>
+                  <a:srgbClr val="004B86"/>
                 </a:solidFill>
               </a:rPr>
               <a:t>Import, compare, execute</a:t>
@@ -10074,7 +10167,7 @@
             <a:r>
               <a:rPr sz="1100" b="0">
                 <a:solidFill>
-                  <a:srgbClr val="4C5D69"/>
+                  <a:srgbClr val="56636E"/>
                 </a:solidFill>
               </a:rPr>
               <a:t>the same three proofs as Origin_TEST</a:t>
@@ -10084,7 +10177,7 @@
       </p:sp>
       <p:sp>
         <p:nvSpPr>
-          <p:cNvPr id="44" name="Oval 43"/>
+          <p:cNvPr id="45" name="Oval 44"/>
           <p:cNvSpPr/>
           <p:nvPr/>
         </p:nvSpPr>
@@ -10097,7 +10190,7 @@
             <a:avLst/>
           </a:prstGeom>
           <a:solidFill>
-            <a:srgbClr val="FFA418"/>
+            <a:srgbClr val="006FAC"/>
           </a:solidFill>
           <a:ln>
             <a:noFill/>
@@ -10130,7 +10223,7 @@
             <a:r>
               <a:rPr sz="1000" b="1">
                 <a:solidFill>
-                  <a:srgbClr val="0B3D7A"/>
+                  <a:srgbClr val="FFFFFF"/>
                 </a:solidFill>
               </a:rPr>
               <a:t>13</a:t>
@@ -10140,7 +10233,7 @@
       </p:sp>
       <p:sp>
         <p:nvSpPr>
-          <p:cNvPr id="45" name="Rounded Rectangle 44"/>
+          <p:cNvPr id="46" name="Rounded Rectangle 45"/>
           <p:cNvSpPr/>
           <p:nvPr/>
         </p:nvSpPr>
@@ -10155,7 +10248,7 @@
             </a:avLst>
           </a:prstGeom>
           <a:solidFill>
-            <a:srgbClr val="F5EFE9"/>
+            <a:srgbClr val="F2F5F8"/>
           </a:solidFill>
           <a:ln>
             <a:noFill/>
@@ -10188,7 +10281,7 @@
             <a:r>
               <a:rPr sz="1400" b="1">
                 <a:solidFill>
-                  <a:srgbClr val="0B3D7A"/>
+                  <a:srgbClr val="004B86"/>
                 </a:solidFill>
               </a:rPr>
               <a:t>Sweep and sign off</a:t>
@@ -10203,7 +10296,7 @@
             <a:r>
               <a:rPr sz="1100" b="0">
                 <a:solidFill>
-                  <a:srgbClr val="4C5D69"/>
+                  <a:srgbClr val="56636E"/>
                 </a:solidFill>
               </a:rPr>
               <a:t>PASS, EMPTY, SLOW or FAIL per resource with timing; one document per org</a:t>
@@ -10213,7 +10306,7 @@
       </p:sp>
       <p:sp>
         <p:nvSpPr>
-          <p:cNvPr id="46" name="Oval 45"/>
+          <p:cNvPr id="47" name="Oval 46"/>
           <p:cNvSpPr/>
           <p:nvPr/>
         </p:nvSpPr>
@@ -10226,7 +10319,7 @@
             <a:avLst/>
           </a:prstGeom>
           <a:solidFill>
-            <a:srgbClr val="FFA418"/>
+            <a:srgbClr val="006FAC"/>
           </a:solidFill>
           <a:ln>
             <a:noFill/>
@@ -10259,7 +10352,7 @@
             <a:r>
               <a:rPr sz="1000" b="1">
                 <a:solidFill>
-                  <a:srgbClr val="0B3D7A"/>
+                  <a:srgbClr val="FFFFFF"/>
                 </a:solidFill>
               </a:rPr>
               <a:t>14</a:t>
@@ -10269,7 +10362,7 @@
       </p:sp>
       <p:sp>
         <p:nvSpPr>
-          <p:cNvPr id="47" name="Rounded Rectangle 46"/>
+          <p:cNvPr id="48" name="Rounded Rectangle 47"/>
           <p:cNvSpPr/>
           <p:nvPr/>
         </p:nvSpPr>
@@ -10284,7 +10377,7 @@
             </a:avLst>
           </a:prstGeom>
           <a:solidFill>
-            <a:srgbClr val="FFA418"/>
+            <a:srgbClr val="006FAC"/>
           </a:solidFill>
           <a:ln>
             <a:noFill/>
@@ -10317,7 +10410,7 @@
             <a:r>
               <a:rPr sz="1200" b="1">
                 <a:solidFill>
-                  <a:srgbClr val="0B3D7A"/>
+                  <a:srgbClr val="FFFFFF"/>
                 </a:solidFill>
               </a:rPr>
               <a:t>explicit prod flag required</a:t>
@@ -10327,7 +10420,7 @@
       </p:sp>
       <p:sp>
         <p:nvSpPr>
-          <p:cNvPr id="48" name="Rounded Rectangle 47"/>
+          <p:cNvPr id="49" name="Rounded Rectangle 48"/>
           <p:cNvSpPr/>
           <p:nvPr/>
         </p:nvSpPr>
@@ -10342,7 +10435,7 @@
             </a:avLst>
           </a:prstGeom>
           <a:solidFill>
-            <a:srgbClr val="F5EFE9"/>
+            <a:srgbClr val="F2F5F8"/>
           </a:solidFill>
           <a:ln>
             <a:noFill/>
@@ -10375,7 +10468,7 @@
             <a:r>
               <a:rPr sz="1400" b="1">
                 <a:solidFill>
-                  <a:srgbClr val="0B3D7A"/>
+                  <a:srgbClr val="004B86"/>
                 </a:solidFill>
               </a:rPr>
               <a:t>Inventory snapshot</a:t>
@@ -10390,7 +10483,7 @@
             <a:r>
               <a:rPr sz="1100" b="0">
                 <a:solidFill>
-                  <a:srgbClr val="4C5D69"/>
+                  <a:srgbClr val="56636E"/>
                 </a:solidFill>
               </a:rPr>
               <a:t>the rollback baseline</a:t>
@@ -10400,7 +10493,7 @@
       </p:sp>
       <p:sp>
         <p:nvSpPr>
-          <p:cNvPr id="49" name="Oval 48"/>
+          <p:cNvPr id="50" name="Oval 49"/>
           <p:cNvSpPr/>
           <p:nvPr/>
         </p:nvSpPr>
@@ -10413,7 +10506,7 @@
             <a:avLst/>
           </a:prstGeom>
           <a:solidFill>
-            <a:srgbClr val="FFA418"/>
+            <a:srgbClr val="006FAC"/>
           </a:solidFill>
           <a:ln>
             <a:noFill/>
@@ -10446,7 +10539,7 @@
             <a:r>
               <a:rPr sz="1000" b="1">
                 <a:solidFill>
-                  <a:srgbClr val="0B3D7A"/>
+                  <a:srgbClr val="FFFFFF"/>
                 </a:solidFill>
               </a:rPr>
               <a:t>15</a:t>
@@ -10456,7 +10549,7 @@
       </p:sp>
       <p:sp>
         <p:nvSpPr>
-          <p:cNvPr id="50" name="Rounded Rectangle 49"/>
+          <p:cNvPr id="51" name="Rounded Rectangle 50"/>
           <p:cNvSpPr/>
           <p:nvPr/>
         </p:nvSpPr>
@@ -10471,7 +10564,7 @@
             </a:avLst>
           </a:prstGeom>
           <a:solidFill>
-            <a:srgbClr val="F5EFE9"/>
+            <a:srgbClr val="F2F5F8"/>
           </a:solidFill>
           <a:ln>
             <a:noFill/>
@@ -10504,7 +10597,7 @@
             <a:r>
               <a:rPr sz="1400" b="1">
                 <a:solidFill>
-                  <a:srgbClr val="0B3D7A"/>
+                  <a:srgbClr val="004B86"/>
                 </a:solidFill>
               </a:rPr>
               <a:t>Same promotion, same proofs</a:t>
@@ -10519,7 +10612,7 @@
             <a:r>
               <a:rPr sz="1100" b="0">
                 <a:solidFill>
-                  <a:srgbClr val="4C5D69"/>
+                  <a:srgbClr val="56636E"/>
                 </a:solidFill>
               </a:rPr>
               <a:t>target datasource carried; rewritten; verified; imported; compared; executed</a:t>
@@ -10529,7 +10622,7 @@
       </p:sp>
       <p:sp>
         <p:nvSpPr>
-          <p:cNvPr id="51" name="Oval 50"/>
+          <p:cNvPr id="52" name="Oval 51"/>
           <p:cNvSpPr/>
           <p:nvPr/>
         </p:nvSpPr>
@@ -10542,7 +10635,7 @@
             <a:avLst/>
           </a:prstGeom>
           <a:solidFill>
-            <a:srgbClr val="FFA418"/>
+            <a:srgbClr val="006FAC"/>
           </a:solidFill>
           <a:ln>
             <a:noFill/>
@@ -10575,7 +10668,7 @@
             <a:r>
               <a:rPr sz="1000" b="1">
                 <a:solidFill>
-                  <a:srgbClr val="0B3D7A"/>
+                  <a:srgbClr val="FFFFFF"/>
                 </a:solidFill>
               </a:rPr>
               <a:t>16</a:t>
@@ -10585,7 +10678,7 @@
       </p:sp>
       <p:sp>
         <p:nvSpPr>
-          <p:cNvPr id="52" name="Diamond 51"/>
+          <p:cNvPr id="53" name="Diamond 52"/>
           <p:cNvSpPr/>
           <p:nvPr/>
         </p:nvSpPr>
@@ -10598,7 +10691,7 @@
             <a:avLst/>
           </a:prstGeom>
           <a:solidFill>
-            <a:srgbClr val="FFA418"/>
+            <a:srgbClr val="006FAC"/>
           </a:solidFill>
           <a:ln>
             <a:noFill/>
@@ -10631,7 +10724,7 @@
             <a:r>
               <a:rPr sz="1100" b="1">
                 <a:solidFill>
-                  <a:srgbClr val="0B3D7A"/>
+                  <a:srgbClr val="FFFFFF"/>
                 </a:solidFill>
               </a:rPr>
               <a:t>seven proofs pass?</a:t>
@@ -10641,7 +10734,7 @@
       </p:sp>
       <p:sp>
         <p:nvSpPr>
-          <p:cNvPr id="53" name="Oval 52"/>
+          <p:cNvPr id="54" name="Oval 53"/>
           <p:cNvSpPr/>
           <p:nvPr/>
         </p:nvSpPr>
@@ -10654,7 +10747,7 @@
             <a:avLst/>
           </a:prstGeom>
           <a:solidFill>
-            <a:srgbClr val="FFA418"/>
+            <a:srgbClr val="006FAC"/>
           </a:solidFill>
           <a:ln>
             <a:noFill/>
@@ -10687,7 +10780,7 @@
             <a:r>
               <a:rPr sz="1000" b="1">
                 <a:solidFill>
-                  <a:srgbClr val="0B3D7A"/>
+                  <a:srgbClr val="FFFFFF"/>
                 </a:solidFill>
               </a:rPr>
               <a:t>17</a:t>
@@ -10697,7 +10790,7 @@
       </p:sp>
       <p:sp>
         <p:nvSpPr>
-          <p:cNvPr id="54" name="Rounded Rectangle 53"/>
+          <p:cNvPr id="55" name="Rounded Rectangle 54"/>
           <p:cNvSpPr/>
           <p:nvPr/>
         </p:nvSpPr>
@@ -10712,7 +10805,7 @@
             </a:avLst>
           </a:prstGeom>
           <a:solidFill>
-            <a:srgbClr val="F5EFE9"/>
+            <a:srgbClr val="F2F5F8"/>
           </a:solidFill>
           <a:ln>
             <a:noFill/>
@@ -10745,7 +10838,7 @@
             <a:r>
               <a:rPr sz="900" b="1">
                 <a:solidFill>
-                  <a:srgbClr val="0B3D7A"/>
+                  <a:srgbClr val="004B86"/>
                 </a:solidFill>
               </a:rPr>
               <a:t>stop</a:t>
@@ -10755,7 +10848,7 @@
       </p:sp>
       <p:sp>
         <p:nvSpPr>
-          <p:cNvPr id="55" name="Rounded Rectangle 54"/>
+          <p:cNvPr id="56" name="Rounded Rectangle 55"/>
           <p:cNvSpPr/>
           <p:nvPr/>
         </p:nvSpPr>
@@ -10770,7 +10863,7 @@
             </a:avLst>
           </a:prstGeom>
           <a:solidFill>
-            <a:srgbClr val="F5EFE9"/>
+            <a:srgbClr val="F2F5F8"/>
           </a:solidFill>
           <a:ln>
             <a:noFill/>
@@ -10803,7 +10896,7 @@
             <a:r>
               <a:rPr sz="1400" b="1">
                 <a:solidFill>
-                  <a:srgbClr val="0B3D7A"/>
+                  <a:srgbClr val="004B86"/>
                 </a:solidFill>
               </a:rPr>
               <a:t>Sweep and sign off</a:t>
@@ -10818,7 +10911,7 @@
             <a:r>
               <a:rPr sz="1100" b="0">
                 <a:solidFill>
-                  <a:srgbClr val="4C5D69"/>
+                  <a:srgbClr val="56636E"/>
                 </a:solidFill>
               </a:rPr>
               <a:t>on the client's prod numbers</a:t>
@@ -10828,7 +10921,7 @@
       </p:sp>
       <p:sp>
         <p:nvSpPr>
-          <p:cNvPr id="56" name="Oval 55"/>
+          <p:cNvPr id="57" name="Oval 56"/>
           <p:cNvSpPr/>
           <p:nvPr/>
         </p:nvSpPr>
@@ -10841,7 +10934,7 @@
             <a:avLst/>
           </a:prstGeom>
           <a:solidFill>
-            <a:srgbClr val="FFA418"/>
+            <a:srgbClr val="006FAC"/>
           </a:solidFill>
           <a:ln>
             <a:noFill/>
@@ -10874,7 +10967,7 @@
             <a:r>
               <a:rPr sz="1000" b="1">
                 <a:solidFill>
-                  <a:srgbClr val="0B3D7A"/>
+                  <a:srgbClr val="FFFFFF"/>
                 </a:solidFill>
               </a:rPr>
               <a:t>18</a:t>
@@ -10884,7 +10977,7 @@
       </p:sp>
       <p:sp>
         <p:nvSpPr>
-          <p:cNvPr id="57" name="Rounded Rectangle 56"/>
+          <p:cNvPr id="58" name="Rounded Rectangle 57"/>
           <p:cNvSpPr/>
           <p:nvPr/>
         </p:nvSpPr>
@@ -10899,7 +10992,7 @@
             </a:avLst>
           </a:prstGeom>
           <a:solidFill>
-            <a:srgbClr val="F5EFE9"/>
+            <a:srgbClr val="F2F5F8"/>
           </a:solidFill>
           <a:ln>
             <a:noFill/>
@@ -10932,7 +11025,7 @@
             <a:r>
               <a:rPr sz="1400" b="1">
                 <a:solidFill>
-                  <a:srgbClr val="0B3D7A"/>
+                  <a:srgbClr val="004B86"/>
                 </a:solidFill>
               </a:rPr>
               <a:t>Diff after = rollback record</a:t>
@@ -10947,7 +11040,7 @@
             <a:r>
               <a:rPr sz="1100" b="0">
                 <a:solidFill>
-                  <a:srgbClr val="4C5D69"/>
+                  <a:srgbClr val="56636E"/>
                 </a:solidFill>
               </a:rPr>
               <a:t>inventory before against after: nothing else moved</a:t>
@@ -10957,7 +11050,7 @@
       </p:sp>
       <p:sp>
         <p:nvSpPr>
-          <p:cNvPr id="58" name="Oval 57"/>
+          <p:cNvPr id="59" name="Oval 58"/>
           <p:cNvSpPr/>
           <p:nvPr/>
         </p:nvSpPr>
@@ -10970,7 +11063,7 @@
             <a:avLst/>
           </a:prstGeom>
           <a:solidFill>
-            <a:srgbClr val="FFA418"/>
+            <a:srgbClr val="006FAC"/>
           </a:solidFill>
           <a:ln>
             <a:noFill/>
@@ -11003,7 +11096,7 @@
             <a:r>
               <a:rPr sz="1000" b="1">
                 <a:solidFill>
-                  <a:srgbClr val="0B3D7A"/>
+                  <a:srgbClr val="FFFFFF"/>
                 </a:solidFill>
               </a:rPr>
               <a:t>19</a:t>
@@ -11013,7 +11106,7 @@
       </p:sp>
       <p:sp>
         <p:nvSpPr>
-          <p:cNvPr id="59" name="Rounded Rectangle 58"/>
+          <p:cNvPr id="60" name="Rounded Rectangle 59"/>
           <p:cNvSpPr/>
           <p:nvPr/>
         </p:nvSpPr>
@@ -11028,7 +11121,7 @@
             </a:avLst>
           </a:prstGeom>
           <a:solidFill>
-            <a:srgbClr val="F5EFE9"/>
+            <a:srgbClr val="F2F5F8"/>
           </a:solidFill>
           <a:ln>
             <a:noFill/>
@@ -11061,7 +11154,7 @@
             <a:r>
               <a:rPr sz="1400" b="1">
                 <a:solidFill>
-                  <a:srgbClr val="0B3D7A"/>
+                  <a:srgbClr val="004B86"/>
                 </a:solidFill>
               </a:rPr>
               <a:t>Additive-only domain patch</a:t>
@@ -11076,7 +11169,7 @@
             <a:r>
               <a:rPr sz="1100" b="0">
                 <a:solidFill>
-                  <a:srgbClr val="4C5D69"/>
+                  <a:srgbClr val="56636E"/>
                 </a:solidFill>
               </a:rPr>
               <a:t>the additions guard refuses any change to what is there; seven proofs per org; one-command restore</a:t>
@@ -11086,7 +11179,7 @@
       </p:sp>
       <p:sp>
         <p:nvSpPr>
-          <p:cNvPr id="60" name="Rounded Rectangle 59"/>
+          <p:cNvPr id="61" name="Rounded Rectangle 60"/>
           <p:cNvSpPr/>
           <p:nvPr/>
         </p:nvSpPr>
@@ -11101,7 +11194,7 @@
             </a:avLst>
           </a:prstGeom>
           <a:solidFill>
-            <a:srgbClr val="F5EFE9"/>
+            <a:srgbClr val="F2F5F8"/>
           </a:solidFill>
           <a:ln>
             <a:noFill/>
@@ -11134,7 +11227,7 @@
             <a:r>
               <a:rPr sz="1400" b="1">
                 <a:solidFill>
-                  <a:srgbClr val="0B3D7A"/>
+                  <a:srgbClr val="004B86"/>
                 </a:solidFill>
               </a:rPr>
               <a:t>Standardized Reports folder</a:t>
@@ -11149,7 +11242,7 @@
             <a:r>
               <a:rPr sz="1100" b="0">
                 <a:solidFill>
-                  <a:srgbClr val="4C5D69"/>
+                  <a:srgbClr val="56636E"/>
                 </a:solidFill>
               </a:rPr>
               <a:t>scheduled SQL reports in one folder; on Origin_DEV today, promoted to client orgs by the same tool when approved</a:t>
@@ -11159,7 +11252,7 @@
       </p:sp>
       <p:sp>
         <p:nvSpPr>
-          <p:cNvPr id="61" name="Rounded Rectangle 60"/>
+          <p:cNvPr id="62" name="Rounded Rectangle 61"/>
           <p:cNvSpPr/>
           <p:nvPr/>
         </p:nvSpPr>
@@ -11174,7 +11267,7 @@
             </a:avLst>
           </a:prstGeom>
           <a:solidFill>
-            <a:srgbClr val="F5EFE9"/>
+            <a:srgbClr val="F2F5F8"/>
           </a:solidFill>
           <a:ln>
             <a:noFill/>
@@ -11207,7 +11300,7 @@
             <a:r>
               <a:rPr sz="1400" b="1">
                 <a:solidFill>
-                  <a:srgbClr val="0B3D7A"/>
+                  <a:srgbClr val="004B86"/>
                 </a:solidFill>
               </a:rPr>
               <a:t>Sweep after every change</a:t>
@@ -11222,7 +11315,7 @@
             <a:r>
               <a:rPr sz="1100" b="0">
                 <a:solidFill>
-                  <a:srgbClr val="4C5D69"/>
+                  <a:srgbClr val="56636E"/>
                 </a:solidFill>
               </a:rPr>
               <a:t>the sign-off is regenerated; the first red row is the alert</a:t>
@@ -11232,7 +11325,7 @@
       </p:sp>
       <p:sp>
         <p:nvSpPr>
-          <p:cNvPr id="62" name="TextBox 61"/>
+          <p:cNvPr id="63" name="TextBox 62"/>
           <p:cNvSpPr txBox="1"/>
           <p:nvPr/>
         </p:nvSpPr>
@@ -11260,7 +11353,7 @@
             <a:r>
               <a:rPr sz="1200" b="1">
                 <a:solidFill>
-                  <a:srgbClr val="F5EFE9"/>
+                  <a:srgbClr val="E6ECF2"/>
                 </a:solidFill>
               </a:rPr>
               <a:t>every later change re-enters at the client test org and repeats steps 10 to 19</a:t>
@@ -11268,42 +11361,6 @@
           </a:p>
         </p:txBody>
       </p:sp>
-      <p:cxnSp>
-        <p:nvCxnSpPr>
-          <p:cNvPr id="63" name="Connector 62"/>
-          <p:cNvCxnSpPr/>
-          <p:nvPr/>
-        </p:nvCxnSpPr>
-        <p:spPr>
-          <a:xfrm>
-            <a:off x="2962656" y="3429000"/>
-            <a:ext cx="0" cy="137160"/>
-          </a:xfrm>
-          <a:prstGeom prst="line">
-            <a:avLst/>
-          </a:prstGeom>
-          <a:ln w="28575">
-            <a:solidFill>
-              <a:srgbClr val="F5EFE9"/>
-            </a:solidFill>
-            <a:tailEnd type="triangle" w="med" len="med"/>
-          </a:ln>
-        </p:spPr>
-        <p:style>
-          <a:lnRef idx="2">
-            <a:schemeClr val="accent1"/>
-          </a:lnRef>
-          <a:fillRef idx="0">
-            <a:schemeClr val="accent1"/>
-          </a:fillRef>
-          <a:effectRef idx="1">
-            <a:schemeClr val="accent1"/>
-          </a:effectRef>
-          <a:fontRef idx="minor">
-            <a:schemeClr val="tx1"/>
-          </a:fontRef>
-        </p:style>
-      </p:cxnSp>
       <p:cxnSp>
         <p:nvCxnSpPr>
           <p:cNvPr id="64" name="Connector 63"/>
@@ -11312,7 +11369,7 @@
         </p:nvCxnSpPr>
         <p:spPr>
           <a:xfrm>
-            <a:off x="2962656" y="4297680"/>
+            <a:off x="2962656" y="3429000"/>
             <a:ext cx="0" cy="137160"/>
           </a:xfrm>
           <a:prstGeom prst="line">
@@ -11320,7 +11377,7 @@
           </a:prstGeom>
           <a:ln w="28575">
             <a:solidFill>
-              <a:srgbClr val="F5EFE9"/>
+              <a:srgbClr val="E6ECF2"/>
             </a:solidFill>
             <a:tailEnd type="triangle" w="med" len="med"/>
           </a:ln>
@@ -11348,15 +11405,15 @@
         </p:nvCxnSpPr>
         <p:spPr>
           <a:xfrm>
-            <a:off x="2962656" y="5852159"/>
-            <a:ext cx="0" cy="228601"/>
+            <a:off x="2962656" y="4297680"/>
+            <a:ext cx="0" cy="137160"/>
           </a:xfrm>
           <a:prstGeom prst="line">
             <a:avLst/>
           </a:prstGeom>
           <a:ln w="28575">
             <a:solidFill>
-              <a:srgbClr val="F5EFE9"/>
+              <a:srgbClr val="E6ECF2"/>
             </a:solidFill>
             <a:tailEnd type="triangle" w="med" len="med"/>
           </a:ln>
@@ -11383,91 +11440,18 @@
           <p:nvPr/>
         </p:nvCxnSpPr>
         <p:spPr>
-          <a:xfrm flipH="1">
-            <a:off x="1819656" y="6492240"/>
-            <a:ext cx="457200" cy="0"/>
+          <a:xfrm>
+            <a:off x="2962656" y="5852159"/>
+            <a:ext cx="0" cy="228601"/>
           </a:xfrm>
           <a:prstGeom prst="line">
             <a:avLst/>
           </a:prstGeom>
           <a:ln w="28575">
             <a:solidFill>
-              <a:srgbClr val="F5EFE9"/>
+              <a:srgbClr val="E6ECF2"/>
             </a:solidFill>
             <a:tailEnd type="triangle" w="med" len="med"/>
-          </a:ln>
-        </p:spPr>
-        <p:style>
-          <a:lnRef idx="2">
-            <a:schemeClr val="accent1"/>
-          </a:lnRef>
-          <a:fillRef idx="0">
-            <a:schemeClr val="accent1"/>
-          </a:fillRef>
-          <a:effectRef idx="1">
-            <a:schemeClr val="accent1"/>
-          </a:effectRef>
-          <a:fontRef idx="minor">
-            <a:schemeClr val="tx1"/>
-          </a:fontRef>
-        </p:style>
-      </p:cxnSp>
-      <p:sp>
-        <p:nvSpPr>
-          <p:cNvPr id="67" name="TextBox 66"/>
-          <p:cNvSpPr txBox="1"/>
-          <p:nvPr/>
-        </p:nvSpPr>
-        <p:spPr>
-          <a:xfrm>
-            <a:off x="1499616" y="6181344"/>
-            <a:ext cx="1097280" cy="274320"/>
-          </a:xfrm>
-          <a:prstGeom prst="rect">
-            <a:avLst/>
-          </a:prstGeom>
-          <a:noFill/>
-        </p:spPr>
-        <p:txBody>
-          <a:bodyPr wrap="square" anchor="b" lIns="0" rIns="0" tIns="54864" bIns="54864">
-            <a:spAutoFit/>
-          </a:bodyPr>
-          <a:lstStyle/>
-          <a:p>
-            <a:pPr algn="ctr">
-              <a:spcAft>
-                <a:spcPts val="600"/>
-              </a:spcAft>
-            </a:pPr>
-            <a:r>
-              <a:rPr sz="1100" b="1">
-                <a:solidFill>
-                  <a:srgbClr val="F5EFE9"/>
-                </a:solidFill>
-              </a:rPr>
-              <a:t>no</a:t>
-            </a:r>
-          </a:p>
-        </p:txBody>
-      </p:sp>
-      <p:cxnSp>
-        <p:nvCxnSpPr>
-          <p:cNvPr id="68" name="Connector 67"/>
-          <p:cNvCxnSpPr/>
-          <p:nvPr/>
-        </p:nvCxnSpPr>
-        <p:spPr>
-          <a:xfrm>
-            <a:off x="3648456" y="6492240"/>
-            <a:ext cx="1682496" cy="0"/>
-          </a:xfrm>
-          <a:prstGeom prst="line">
-            <a:avLst/>
-          </a:prstGeom>
-          <a:ln w="28575">
-            <a:solidFill>
-              <a:srgbClr val="F5EFE9"/>
-            </a:solidFill>
           </a:ln>
         </p:spPr>
         <p:style>
@@ -11487,21 +11471,95 @@
       </p:cxnSp>
       <p:cxnSp>
         <p:nvCxnSpPr>
+          <p:cNvPr id="67" name="Connector 66"/>
+          <p:cNvCxnSpPr/>
+          <p:nvPr/>
+        </p:nvCxnSpPr>
+        <p:spPr>
+          <a:xfrm flipH="1">
+            <a:off x="1819656" y="6492240"/>
+            <a:ext cx="457200" cy="0"/>
+          </a:xfrm>
+          <a:prstGeom prst="line">
+            <a:avLst/>
+          </a:prstGeom>
+          <a:ln w="28575">
+            <a:solidFill>
+              <a:srgbClr val="E6ECF2"/>
+            </a:solidFill>
+            <a:tailEnd type="triangle" w="med" len="med"/>
+          </a:ln>
+        </p:spPr>
+        <p:style>
+          <a:lnRef idx="2">
+            <a:schemeClr val="accent1"/>
+          </a:lnRef>
+          <a:fillRef idx="0">
+            <a:schemeClr val="accent1"/>
+          </a:fillRef>
+          <a:effectRef idx="1">
+            <a:schemeClr val="accent1"/>
+          </a:effectRef>
+          <a:fontRef idx="minor">
+            <a:schemeClr val="tx1"/>
+          </a:fontRef>
+        </p:style>
+      </p:cxnSp>
+      <p:sp>
+        <p:nvSpPr>
+          <p:cNvPr id="68" name="TextBox 67"/>
+          <p:cNvSpPr txBox="1"/>
+          <p:nvPr/>
+        </p:nvSpPr>
+        <p:spPr>
+          <a:xfrm>
+            <a:off x="1499616" y="6181344"/>
+            <a:ext cx="1097280" cy="274320"/>
+          </a:xfrm>
+          <a:prstGeom prst="rect">
+            <a:avLst/>
+          </a:prstGeom>
+          <a:noFill/>
+        </p:spPr>
+        <p:txBody>
+          <a:bodyPr wrap="square" anchor="b" lIns="0" rIns="0" tIns="54864" bIns="54864">
+            <a:spAutoFit/>
+          </a:bodyPr>
+          <a:lstStyle/>
+          <a:p>
+            <a:pPr algn="ctr">
+              <a:spcAft>
+                <a:spcPts val="600"/>
+              </a:spcAft>
+            </a:pPr>
+            <a:r>
+              <a:rPr sz="1100" b="1">
+                <a:solidFill>
+                  <a:srgbClr val="E6ECF2"/>
+                </a:solidFill>
+              </a:rPr>
+              <a:t>no</a:t>
+            </a:r>
+          </a:p>
+        </p:txBody>
+      </p:sp>
+      <p:cxnSp>
+        <p:nvCxnSpPr>
           <p:cNvPr id="69" name="Connector 68"/>
           <p:cNvCxnSpPr/>
           <p:nvPr/>
         </p:nvCxnSpPr>
         <p:spPr>
-          <a:xfrm flipV="1">
-            <a:off x="5330952" y="2903220"/>
-            <a:ext cx="0" cy="3589020"/>
+          <a:xfrm>
+            <a:off x="3648456" y="6492240"/>
+            <a:ext cx="1682496" cy="0"/>
           </a:xfrm>
           <a:prstGeom prst="line">
             <a:avLst/>
           </a:prstGeom>
           <a:ln w="28575">
             <a:solidFill>
-              <a:srgbClr val="F5EFE9"/>
+              <a:srgbClr val="E6ECF2"/>
             </a:solidFill>
           </a:ln>
         </p:spPr>
@@ -11527,92 +11585,17 @@
           <p:nvPr/>
         </p:nvCxnSpPr>
         <p:spPr>
-          <a:xfrm>
+          <a:xfrm flipV="1">
             <a:off x="5330952" y="2903220"/>
-            <a:ext cx="310896" cy="0"/>
+            <a:ext cx="0" cy="3589020"/>
           </a:xfrm>
           <a:prstGeom prst="line">
             <a:avLst/>
           </a:prstGeom>
           <a:ln w="28575">
             <a:solidFill>
-              <a:srgbClr val="F5EFE9"/>
+              <a:srgbClr val="E6ECF2"/>
             </a:solidFill>
-            <a:tailEnd type="triangle" w="med" len="med"/>
-          </a:ln>
-        </p:spPr>
-        <p:style>
-          <a:lnRef idx="2">
-            <a:schemeClr val="accent1"/>
-          </a:lnRef>
-          <a:fillRef idx="0">
-            <a:schemeClr val="accent1"/>
-          </a:fillRef>
-          <a:effectRef idx="1">
-            <a:schemeClr val="accent1"/>
-          </a:effectRef>
-          <a:fontRef idx="minor">
-            <a:schemeClr val="tx1"/>
-          </a:fontRef>
-        </p:style>
-      </p:cxnSp>
-      <p:sp>
-        <p:nvSpPr>
-          <p:cNvPr id="71" name="TextBox 70"/>
-          <p:cNvSpPr txBox="1"/>
-          <p:nvPr/>
-        </p:nvSpPr>
-        <p:spPr>
-          <a:xfrm>
-            <a:off x="4023360" y="6144768"/>
-            <a:ext cx="914400" cy="365760"/>
-          </a:xfrm>
-          <a:prstGeom prst="rect">
-            <a:avLst/>
-          </a:prstGeom>
-          <a:noFill/>
-        </p:spPr>
-        <p:txBody>
-          <a:bodyPr wrap="square" anchor="b" lIns="0" rIns="0" tIns="54864" bIns="54864">
-            <a:spAutoFit/>
-          </a:bodyPr>
-          <a:lstStyle/>
-          <a:p>
-            <a:pPr algn="l">
-              <a:spcAft>
-                <a:spcPts val="600"/>
-              </a:spcAft>
-            </a:pPr>
-            <a:r>
-              <a:rPr sz="1100" b="1">
-                <a:solidFill>
-                  <a:srgbClr val="F5EFE9"/>
-                </a:solidFill>
-              </a:rPr>
-              <a:t>yes</a:t>
-            </a:r>
-          </a:p>
-        </p:txBody>
-      </p:sp>
-      <p:cxnSp>
-        <p:nvCxnSpPr>
-          <p:cNvPr id="72" name="Connector 71"/>
-          <p:cNvCxnSpPr/>
-          <p:nvPr/>
-        </p:nvCxnSpPr>
-        <p:spPr>
-          <a:xfrm>
-            <a:off x="7699248" y="3291840"/>
-            <a:ext cx="0" cy="137160"/>
-          </a:xfrm>
-          <a:prstGeom prst="line">
-            <a:avLst/>
-          </a:prstGeom>
-          <a:ln w="28575">
-            <a:solidFill>
-              <a:srgbClr val="F5EFE9"/>
-            </a:solidFill>
-            <a:tailEnd type="triangle" w="med" len="med"/>
           </a:ln>
         </p:spPr>
         <p:style>
@@ -11632,13 +11615,87 @@
       </p:cxnSp>
       <p:cxnSp>
         <p:nvCxnSpPr>
+          <p:cNvPr id="71" name="Connector 70"/>
+          <p:cNvCxnSpPr/>
+          <p:nvPr/>
+        </p:nvCxnSpPr>
+        <p:spPr>
+          <a:xfrm>
+            <a:off x="5330952" y="2903220"/>
+            <a:ext cx="310896" cy="0"/>
+          </a:xfrm>
+          <a:prstGeom prst="line">
+            <a:avLst/>
+          </a:prstGeom>
+          <a:ln w="28575">
+            <a:solidFill>
+              <a:srgbClr val="E6ECF2"/>
+            </a:solidFill>
+            <a:tailEnd type="triangle" w="med" len="med"/>
+          </a:ln>
+        </p:spPr>
+        <p:style>
+          <a:lnRef idx="2">
+            <a:schemeClr val="accent1"/>
+          </a:lnRef>
+          <a:fillRef idx="0">
+            <a:schemeClr val="accent1"/>
+          </a:fillRef>
+          <a:effectRef idx="1">
+            <a:schemeClr val="accent1"/>
+          </a:effectRef>
+          <a:fontRef idx="minor">
+            <a:schemeClr val="tx1"/>
+          </a:fontRef>
+        </p:style>
+      </p:cxnSp>
+      <p:sp>
+        <p:nvSpPr>
+          <p:cNvPr id="72" name="TextBox 71"/>
+          <p:cNvSpPr txBox="1"/>
+          <p:nvPr/>
+        </p:nvSpPr>
+        <p:spPr>
+          <a:xfrm>
+            <a:off x="4023360" y="6144768"/>
+            <a:ext cx="914400" cy="365760"/>
+          </a:xfrm>
+          <a:prstGeom prst="rect">
+            <a:avLst/>
+          </a:prstGeom>
+          <a:noFill/>
+        </p:spPr>
+        <p:txBody>
+          <a:bodyPr wrap="square" anchor="b" lIns="0" rIns="0" tIns="54864" bIns="54864">
+            <a:spAutoFit/>
+          </a:bodyPr>
+          <a:lstStyle/>
+          <a:p>
+            <a:pPr algn="l">
+              <a:spcAft>
+                <a:spcPts val="600"/>
+              </a:spcAft>
+            </a:pPr>
+            <a:r>
+              <a:rPr sz="1100" b="1">
+                <a:solidFill>
+                  <a:srgbClr val="E6ECF2"/>
+                </a:solidFill>
+              </a:rPr>
+              <a:t>yes</a:t>
+            </a:r>
+          </a:p>
+        </p:txBody>
+      </p:sp>
+      <p:cxnSp>
+        <p:nvCxnSpPr>
           <p:cNvPr id="73" name="Connector 72"/>
           <p:cNvCxnSpPr/>
           <p:nvPr/>
         </p:nvCxnSpPr>
         <p:spPr>
           <a:xfrm>
-            <a:off x="7699248" y="4206240"/>
+            <a:off x="7699248" y="3291840"/>
             <a:ext cx="0" cy="137160"/>
           </a:xfrm>
           <a:prstGeom prst="line">
@@ -11646,7 +11703,7 @@
           </a:prstGeom>
           <a:ln w="28575">
             <a:solidFill>
-              <a:srgbClr val="F5EFE9"/>
+              <a:srgbClr val="E6ECF2"/>
             </a:solidFill>
             <a:tailEnd type="triangle" w="med" len="med"/>
           </a:ln>
@@ -11674,15 +11731,15 @@
         </p:nvCxnSpPr>
         <p:spPr>
           <a:xfrm>
-            <a:off x="7699248" y="5212080"/>
-            <a:ext cx="0" cy="182880"/>
+            <a:off x="7699248" y="4206240"/>
+            <a:ext cx="0" cy="137160"/>
           </a:xfrm>
           <a:prstGeom prst="line">
             <a:avLst/>
           </a:prstGeom>
           <a:ln w="28575">
             <a:solidFill>
-              <a:srgbClr val="F5EFE9"/>
+              <a:srgbClr val="E6ECF2"/>
             </a:solidFill>
             <a:tailEnd type="triangle" w="med" len="med"/>
           </a:ln>
@@ -11710,164 +11767,17 @@
         </p:nvCxnSpPr>
         <p:spPr>
           <a:xfrm>
-            <a:off x="8385048" y="5806440"/>
-            <a:ext cx="457200" cy="0"/>
+            <a:off x="7699248" y="5212080"/>
+            <a:ext cx="0" cy="182880"/>
           </a:xfrm>
           <a:prstGeom prst="line">
             <a:avLst/>
           </a:prstGeom>
           <a:ln w="28575">
             <a:solidFill>
-              <a:srgbClr val="F5EFE9"/>
+              <a:srgbClr val="E6ECF2"/>
             </a:solidFill>
             <a:tailEnd type="triangle" w="med" len="med"/>
-          </a:ln>
-        </p:spPr>
-        <p:style>
-          <a:lnRef idx="2">
-            <a:schemeClr val="accent1"/>
-          </a:lnRef>
-          <a:fillRef idx="0">
-            <a:schemeClr val="accent1"/>
-          </a:fillRef>
-          <a:effectRef idx="1">
-            <a:schemeClr val="accent1"/>
-          </a:effectRef>
-          <a:fontRef idx="minor">
-            <a:schemeClr val="tx1"/>
-          </a:fontRef>
-        </p:style>
-      </p:cxnSp>
-      <p:sp>
-        <p:nvSpPr>
-          <p:cNvPr id="76" name="TextBox 75"/>
-          <p:cNvSpPr txBox="1"/>
-          <p:nvPr/>
-        </p:nvSpPr>
-        <p:spPr>
-          <a:xfrm>
-            <a:off x="8065008" y="5495544"/>
-            <a:ext cx="1097280" cy="274320"/>
-          </a:xfrm>
-          <a:prstGeom prst="rect">
-            <a:avLst/>
-          </a:prstGeom>
-          <a:noFill/>
-        </p:spPr>
-        <p:txBody>
-          <a:bodyPr wrap="square" anchor="b" lIns="0" rIns="0" tIns="54864" bIns="54864">
-            <a:spAutoFit/>
-          </a:bodyPr>
-          <a:lstStyle/>
-          <a:p>
-            <a:pPr algn="ctr">
-              <a:spcAft>
-                <a:spcPts val="600"/>
-              </a:spcAft>
-            </a:pPr>
-            <a:r>
-              <a:rPr sz="1100" b="1">
-                <a:solidFill>
-                  <a:srgbClr val="F5EFE9"/>
-                </a:solidFill>
-              </a:rPr>
-              <a:t>no</a:t>
-            </a:r>
-          </a:p>
-        </p:txBody>
-      </p:sp>
-      <p:cxnSp>
-        <p:nvCxnSpPr>
-          <p:cNvPr id="77" name="Connector 76"/>
-          <p:cNvCxnSpPr/>
-          <p:nvPr/>
-        </p:nvCxnSpPr>
-        <p:spPr>
-          <a:xfrm>
-            <a:off x="7699248" y="6217920"/>
-            <a:ext cx="0" cy="182880"/>
-          </a:xfrm>
-          <a:prstGeom prst="line">
-            <a:avLst/>
-          </a:prstGeom>
-          <a:ln w="28575">
-            <a:solidFill>
-              <a:srgbClr val="F5EFE9"/>
-            </a:solidFill>
-            <a:tailEnd type="triangle" w="med" len="med"/>
-          </a:ln>
-        </p:spPr>
-        <p:style>
-          <a:lnRef idx="2">
-            <a:schemeClr val="accent1"/>
-          </a:lnRef>
-          <a:fillRef idx="0">
-            <a:schemeClr val="accent1"/>
-          </a:fillRef>
-          <a:effectRef idx="1">
-            <a:schemeClr val="accent1"/>
-          </a:effectRef>
-          <a:fontRef idx="minor">
-            <a:schemeClr val="tx1"/>
-          </a:fontRef>
-        </p:style>
-      </p:cxnSp>
-      <p:sp>
-        <p:nvSpPr>
-          <p:cNvPr id="78" name="TextBox 77"/>
-          <p:cNvSpPr txBox="1"/>
-          <p:nvPr/>
-        </p:nvSpPr>
-        <p:spPr>
-          <a:xfrm>
-            <a:off x="7763256" y="6172200"/>
-            <a:ext cx="1097280" cy="274320"/>
-          </a:xfrm>
-          <a:prstGeom prst="rect">
-            <a:avLst/>
-          </a:prstGeom>
-          <a:noFill/>
-        </p:spPr>
-        <p:txBody>
-          <a:bodyPr wrap="square" anchor="ctr" lIns="0" rIns="0" tIns="54864" bIns="54864">
-            <a:spAutoFit/>
-          </a:bodyPr>
-          <a:lstStyle/>
-          <a:p>
-            <a:pPr algn="l">
-              <a:spcAft>
-                <a:spcPts val="600"/>
-              </a:spcAft>
-            </a:pPr>
-            <a:r>
-              <a:rPr sz="1100" b="1">
-                <a:solidFill>
-                  <a:srgbClr val="F5EFE9"/>
-                </a:solidFill>
-              </a:rPr>
-              <a:t>yes</a:t>
-            </a:r>
-          </a:p>
-        </p:txBody>
-      </p:sp>
-      <p:cxnSp>
-        <p:nvCxnSpPr>
-          <p:cNvPr id="79" name="Connector 78"/>
-          <p:cNvCxnSpPr/>
-          <p:nvPr/>
-        </p:nvCxnSpPr>
-        <p:spPr>
-          <a:xfrm>
-            <a:off x="9756648" y="6789420"/>
-            <a:ext cx="310896" cy="0"/>
-          </a:xfrm>
-          <a:prstGeom prst="line">
-            <a:avLst/>
-          </a:prstGeom>
-          <a:ln w="28575">
-            <a:solidFill>
-              <a:srgbClr val="F5EFE9"/>
-            </a:solidFill>
           </a:ln>
         </p:spPr>
         <p:style>
@@ -11887,21 +11797,169 @@
       </p:cxnSp>
       <p:cxnSp>
         <p:nvCxnSpPr>
+          <p:cNvPr id="76" name="Connector 75"/>
+          <p:cNvCxnSpPr/>
+          <p:nvPr/>
+        </p:nvCxnSpPr>
+        <p:spPr>
+          <a:xfrm>
+            <a:off x="8385048" y="5806440"/>
+            <a:ext cx="457200" cy="0"/>
+          </a:xfrm>
+          <a:prstGeom prst="line">
+            <a:avLst/>
+          </a:prstGeom>
+          <a:ln w="28575">
+            <a:solidFill>
+              <a:srgbClr val="E6ECF2"/>
+            </a:solidFill>
+            <a:tailEnd type="triangle" w="med" len="med"/>
+          </a:ln>
+        </p:spPr>
+        <p:style>
+          <a:lnRef idx="2">
+            <a:schemeClr val="accent1"/>
+          </a:lnRef>
+          <a:fillRef idx="0">
+            <a:schemeClr val="accent1"/>
+          </a:fillRef>
+          <a:effectRef idx="1">
+            <a:schemeClr val="accent1"/>
+          </a:effectRef>
+          <a:fontRef idx="minor">
+            <a:schemeClr val="tx1"/>
+          </a:fontRef>
+        </p:style>
+      </p:cxnSp>
+      <p:sp>
+        <p:nvSpPr>
+          <p:cNvPr id="77" name="TextBox 76"/>
+          <p:cNvSpPr txBox="1"/>
+          <p:nvPr/>
+        </p:nvSpPr>
+        <p:spPr>
+          <a:xfrm>
+            <a:off x="8065008" y="5495544"/>
+            <a:ext cx="1097280" cy="274320"/>
+          </a:xfrm>
+          <a:prstGeom prst="rect">
+            <a:avLst/>
+          </a:prstGeom>
+          <a:noFill/>
+        </p:spPr>
+        <p:txBody>
+          <a:bodyPr wrap="square" anchor="b" lIns="0" rIns="0" tIns="54864" bIns="54864">
+            <a:spAutoFit/>
+          </a:bodyPr>
+          <a:lstStyle/>
+          <a:p>
+            <a:pPr algn="ctr">
+              <a:spcAft>
+                <a:spcPts val="600"/>
+              </a:spcAft>
+            </a:pPr>
+            <a:r>
+              <a:rPr sz="1100" b="1">
+                <a:solidFill>
+                  <a:srgbClr val="E6ECF2"/>
+                </a:solidFill>
+              </a:rPr>
+              <a:t>no</a:t>
+            </a:r>
+          </a:p>
+        </p:txBody>
+      </p:sp>
+      <p:cxnSp>
+        <p:nvCxnSpPr>
+          <p:cNvPr id="78" name="Connector 77"/>
+          <p:cNvCxnSpPr/>
+          <p:nvPr/>
+        </p:nvCxnSpPr>
+        <p:spPr>
+          <a:xfrm>
+            <a:off x="7699248" y="6217920"/>
+            <a:ext cx="0" cy="182880"/>
+          </a:xfrm>
+          <a:prstGeom prst="line">
+            <a:avLst/>
+          </a:prstGeom>
+          <a:ln w="28575">
+            <a:solidFill>
+              <a:srgbClr val="E6ECF2"/>
+            </a:solidFill>
+            <a:tailEnd type="triangle" w="med" len="med"/>
+          </a:ln>
+        </p:spPr>
+        <p:style>
+          <a:lnRef idx="2">
+            <a:schemeClr val="accent1"/>
+          </a:lnRef>
+          <a:fillRef idx="0">
+            <a:schemeClr val="accent1"/>
+          </a:fillRef>
+          <a:effectRef idx="1">
+            <a:schemeClr val="accent1"/>
+          </a:effectRef>
+          <a:fontRef idx="minor">
+            <a:schemeClr val="tx1"/>
+          </a:fontRef>
+        </p:style>
+      </p:cxnSp>
+      <p:sp>
+        <p:nvSpPr>
+          <p:cNvPr id="79" name="TextBox 78"/>
+          <p:cNvSpPr txBox="1"/>
+          <p:nvPr/>
+        </p:nvSpPr>
+        <p:spPr>
+          <a:xfrm>
+            <a:off x="7763256" y="6172200"/>
+            <a:ext cx="1097280" cy="274320"/>
+          </a:xfrm>
+          <a:prstGeom prst="rect">
+            <a:avLst/>
+          </a:prstGeom>
+          <a:noFill/>
+        </p:spPr>
+        <p:txBody>
+          <a:bodyPr wrap="square" anchor="ctr" lIns="0" rIns="0" tIns="54864" bIns="54864">
+            <a:spAutoFit/>
+          </a:bodyPr>
+          <a:lstStyle/>
+          <a:p>
+            <a:pPr algn="l">
+              <a:spcAft>
+                <a:spcPts val="600"/>
+              </a:spcAft>
+            </a:pPr>
+            <a:r>
+              <a:rPr sz="1100" b="1">
+                <a:solidFill>
+                  <a:srgbClr val="E6ECF2"/>
+                </a:solidFill>
+              </a:rPr>
+              <a:t>yes</a:t>
+            </a:r>
+          </a:p>
+        </p:txBody>
+      </p:sp>
+      <p:cxnSp>
+        <p:nvCxnSpPr>
           <p:cNvPr id="80" name="Connector 79"/>
           <p:cNvCxnSpPr/>
           <p:nvPr/>
         </p:nvCxnSpPr>
         <p:spPr>
-          <a:xfrm flipV="1">
-            <a:off x="10067544" y="3474720"/>
-            <a:ext cx="0" cy="3314700"/>
+          <a:xfrm>
+            <a:off x="9756648" y="6789420"/>
+            <a:ext cx="310896" cy="0"/>
           </a:xfrm>
           <a:prstGeom prst="line">
             <a:avLst/>
           </a:prstGeom>
           <a:ln w="28575">
             <a:solidFill>
-              <a:srgbClr val="F5EFE9"/>
+              <a:srgbClr val="E6ECF2"/>
             </a:solidFill>
           </a:ln>
         </p:spPr>
@@ -11927,18 +11985,17 @@
           <p:nvPr/>
         </p:nvCxnSpPr>
         <p:spPr>
-          <a:xfrm>
+          <a:xfrm flipV="1">
             <a:off x="10067544" y="3474720"/>
-            <a:ext cx="310896" cy="0"/>
+            <a:ext cx="0" cy="3314700"/>
           </a:xfrm>
           <a:prstGeom prst="line">
             <a:avLst/>
           </a:prstGeom>
           <a:ln w="28575">
             <a:solidFill>
-              <a:srgbClr val="F5EFE9"/>
+              <a:srgbClr val="E6ECF2"/>
             </a:solidFill>
-            <a:tailEnd type="triangle" w="med" len="med"/>
           </a:ln>
         </p:spPr>
         <p:style>
@@ -11964,15 +12021,15 @@
         </p:nvCxnSpPr>
         <p:spPr>
           <a:xfrm>
-            <a:off x="12435840" y="2971800"/>
-            <a:ext cx="0" cy="137160"/>
+            <a:off x="10067544" y="3474720"/>
+            <a:ext cx="310896" cy="0"/>
           </a:xfrm>
           <a:prstGeom prst="line">
             <a:avLst/>
           </a:prstGeom>
           <a:ln w="28575">
             <a:solidFill>
-              <a:srgbClr val="F5EFE9"/>
+              <a:srgbClr val="E6ECF2"/>
             </a:solidFill>
             <a:tailEnd type="triangle" w="med" len="med"/>
           </a:ln>
@@ -12000,15 +12057,15 @@
         </p:nvCxnSpPr>
         <p:spPr>
           <a:xfrm>
-            <a:off x="12435840" y="3840480"/>
-            <a:ext cx="0" cy="137159"/>
+            <a:off x="12435840" y="2971800"/>
+            <a:ext cx="0" cy="137160"/>
           </a:xfrm>
           <a:prstGeom prst="line">
             <a:avLst/>
           </a:prstGeom>
           <a:ln w="28575">
             <a:solidFill>
-              <a:srgbClr val="F5EFE9"/>
+              <a:srgbClr val="E6ECF2"/>
             </a:solidFill>
             <a:tailEnd type="triangle" w="med" len="med"/>
           </a:ln>
@@ -12036,15 +12093,15 @@
         </p:nvCxnSpPr>
         <p:spPr>
           <a:xfrm>
-            <a:off x="12435840" y="5074920"/>
-            <a:ext cx="0" cy="137160"/>
+            <a:off x="12435840" y="3840480"/>
+            <a:ext cx="0" cy="137159"/>
           </a:xfrm>
           <a:prstGeom prst="line">
             <a:avLst/>
           </a:prstGeom>
           <a:ln w="28575">
             <a:solidFill>
-              <a:srgbClr val="F5EFE9"/>
+              <a:srgbClr val="E6ECF2"/>
             </a:solidFill>
             <a:tailEnd type="triangle" w="med" len="med"/>
           </a:ln>
@@ -12071,164 +12128,16 @@
           <p:nvPr/>
         </p:nvCxnSpPr>
         <p:spPr>
-          <a:xfrm flipV="1">
-            <a:off x="13121640" y="5623559"/>
-            <a:ext cx="457200" cy="1"/>
+          <a:xfrm>
+            <a:off x="12435840" y="5074920"/>
+            <a:ext cx="0" cy="137160"/>
           </a:xfrm>
           <a:prstGeom prst="line">
             <a:avLst/>
           </a:prstGeom>
           <a:ln w="28575">
             <a:solidFill>
-              <a:srgbClr val="F5EFE9"/>
-            </a:solidFill>
-            <a:tailEnd type="triangle" w="med" len="med"/>
-          </a:ln>
-        </p:spPr>
-        <p:style>
-          <a:lnRef idx="2">
-            <a:schemeClr val="accent1"/>
-          </a:lnRef>
-          <a:fillRef idx="0">
-            <a:schemeClr val="accent1"/>
-          </a:fillRef>
-          <a:effectRef idx="1">
-            <a:schemeClr val="accent1"/>
-          </a:effectRef>
-          <a:fontRef idx="minor">
-            <a:schemeClr val="tx1"/>
-          </a:fontRef>
-        </p:style>
-      </p:cxnSp>
-      <p:sp>
-        <p:nvSpPr>
-          <p:cNvPr id="86" name="TextBox 85"/>
-          <p:cNvSpPr txBox="1"/>
-          <p:nvPr/>
-        </p:nvSpPr>
-        <p:spPr>
-          <a:xfrm>
-            <a:off x="12801600" y="5312664"/>
-            <a:ext cx="1097280" cy="274320"/>
-          </a:xfrm>
-          <a:prstGeom prst="rect">
-            <a:avLst/>
-          </a:prstGeom>
-          <a:noFill/>
-        </p:spPr>
-        <p:txBody>
-          <a:bodyPr wrap="square" anchor="b" lIns="0" rIns="0" tIns="54864" bIns="54864">
-            <a:spAutoFit/>
-          </a:bodyPr>
-          <a:lstStyle/>
-          <a:p>
-            <a:pPr algn="ctr">
-              <a:spcAft>
-                <a:spcPts val="600"/>
-              </a:spcAft>
-            </a:pPr>
-            <a:r>
-              <a:rPr sz="1100" b="1">
-                <a:solidFill>
-                  <a:srgbClr val="F5EFE9"/>
-                </a:solidFill>
-              </a:rPr>
-              <a:t>no</a:t>
-            </a:r>
-          </a:p>
-        </p:txBody>
-      </p:sp>
-      <p:cxnSp>
-        <p:nvCxnSpPr>
-          <p:cNvPr id="87" name="Connector 86"/>
-          <p:cNvCxnSpPr/>
-          <p:nvPr/>
-        </p:nvCxnSpPr>
-        <p:spPr>
-          <a:xfrm>
-            <a:off x="12435840" y="6035040"/>
-            <a:ext cx="0" cy="182880"/>
-          </a:xfrm>
-          <a:prstGeom prst="line">
-            <a:avLst/>
-          </a:prstGeom>
-          <a:ln w="28575">
-            <a:solidFill>
-              <a:srgbClr val="F5EFE9"/>
-            </a:solidFill>
-            <a:tailEnd type="triangle" w="med" len="med"/>
-          </a:ln>
-        </p:spPr>
-        <p:style>
-          <a:lnRef idx="2">
-            <a:schemeClr val="accent1"/>
-          </a:lnRef>
-          <a:fillRef idx="0">
-            <a:schemeClr val="accent1"/>
-          </a:fillRef>
-          <a:effectRef idx="1">
-            <a:schemeClr val="accent1"/>
-          </a:effectRef>
-          <a:fontRef idx="minor">
-            <a:schemeClr val="tx1"/>
-          </a:fontRef>
-        </p:style>
-      </p:cxnSp>
-      <p:sp>
-        <p:nvSpPr>
-          <p:cNvPr id="88" name="TextBox 87"/>
-          <p:cNvSpPr txBox="1"/>
-          <p:nvPr/>
-        </p:nvSpPr>
-        <p:spPr>
-          <a:xfrm>
-            <a:off x="12499848" y="5989320"/>
-            <a:ext cx="1097280" cy="274320"/>
-          </a:xfrm>
-          <a:prstGeom prst="rect">
-            <a:avLst/>
-          </a:prstGeom>
-          <a:noFill/>
-        </p:spPr>
-        <p:txBody>
-          <a:bodyPr wrap="square" anchor="ctr" lIns="0" rIns="0" tIns="54864" bIns="54864">
-            <a:spAutoFit/>
-          </a:bodyPr>
-          <a:lstStyle/>
-          <a:p>
-            <a:pPr algn="l">
-              <a:spcAft>
-                <a:spcPts val="600"/>
-              </a:spcAft>
-            </a:pPr>
-            <a:r>
-              <a:rPr sz="1100" b="1">
-                <a:solidFill>
-                  <a:srgbClr val="F5EFE9"/>
-                </a:solidFill>
-              </a:rPr>
-              <a:t>yes</a:t>
-            </a:r>
-          </a:p>
-        </p:txBody>
-      </p:sp>
-      <p:cxnSp>
-        <p:nvCxnSpPr>
-          <p:cNvPr id="89" name="Connector 88"/>
-          <p:cNvCxnSpPr/>
-          <p:nvPr/>
-        </p:nvCxnSpPr>
-        <p:spPr>
-          <a:xfrm>
-            <a:off x="12435840" y="6949440"/>
-            <a:ext cx="0" cy="137160"/>
-          </a:xfrm>
-          <a:prstGeom prst="line">
-            <a:avLst/>
-          </a:prstGeom>
-          <a:ln w="28575">
-            <a:solidFill>
-              <a:srgbClr val="F5EFE9"/>
+              <a:srgbClr val="E6ECF2"/>
             </a:solidFill>
             <a:tailEnd type="triangle" w="med" len="med"/>
           </a:ln>
@@ -12250,22 +12159,171 @@
       </p:cxnSp>
       <p:cxnSp>
         <p:nvCxnSpPr>
+          <p:cNvPr id="86" name="Connector 85"/>
+          <p:cNvCxnSpPr/>
+          <p:nvPr/>
+        </p:nvCxnSpPr>
+        <p:spPr>
+          <a:xfrm flipV="1">
+            <a:off x="13121640" y="5623559"/>
+            <a:ext cx="457200" cy="1"/>
+          </a:xfrm>
+          <a:prstGeom prst="line">
+            <a:avLst/>
+          </a:prstGeom>
+          <a:ln w="28575">
+            <a:solidFill>
+              <a:srgbClr val="E6ECF2"/>
+            </a:solidFill>
+            <a:tailEnd type="triangle" w="med" len="med"/>
+          </a:ln>
+        </p:spPr>
+        <p:style>
+          <a:lnRef idx="2">
+            <a:schemeClr val="accent1"/>
+          </a:lnRef>
+          <a:fillRef idx="0">
+            <a:schemeClr val="accent1"/>
+          </a:fillRef>
+          <a:effectRef idx="1">
+            <a:schemeClr val="accent1"/>
+          </a:effectRef>
+          <a:fontRef idx="minor">
+            <a:schemeClr val="tx1"/>
+          </a:fontRef>
+        </p:style>
+      </p:cxnSp>
+      <p:sp>
+        <p:nvSpPr>
+          <p:cNvPr id="87" name="TextBox 86"/>
+          <p:cNvSpPr txBox="1"/>
+          <p:nvPr/>
+        </p:nvSpPr>
+        <p:spPr>
+          <a:xfrm>
+            <a:off x="12801600" y="5312664"/>
+            <a:ext cx="1097280" cy="274320"/>
+          </a:xfrm>
+          <a:prstGeom prst="rect">
+            <a:avLst/>
+          </a:prstGeom>
+          <a:noFill/>
+        </p:spPr>
+        <p:txBody>
+          <a:bodyPr wrap="square" anchor="b" lIns="0" rIns="0" tIns="54864" bIns="54864">
+            <a:spAutoFit/>
+          </a:bodyPr>
+          <a:lstStyle/>
+          <a:p>
+            <a:pPr algn="ctr">
+              <a:spcAft>
+                <a:spcPts val="600"/>
+              </a:spcAft>
+            </a:pPr>
+            <a:r>
+              <a:rPr sz="1100" b="1">
+                <a:solidFill>
+                  <a:srgbClr val="E6ECF2"/>
+                </a:solidFill>
+              </a:rPr>
+              <a:t>no</a:t>
+            </a:r>
+          </a:p>
+        </p:txBody>
+      </p:sp>
+      <p:cxnSp>
+        <p:nvCxnSpPr>
+          <p:cNvPr id="88" name="Connector 87"/>
+          <p:cNvCxnSpPr/>
+          <p:nvPr/>
+        </p:nvCxnSpPr>
+        <p:spPr>
+          <a:xfrm>
+            <a:off x="12435840" y="6035040"/>
+            <a:ext cx="0" cy="182880"/>
+          </a:xfrm>
+          <a:prstGeom prst="line">
+            <a:avLst/>
+          </a:prstGeom>
+          <a:ln w="28575">
+            <a:solidFill>
+              <a:srgbClr val="E6ECF2"/>
+            </a:solidFill>
+            <a:tailEnd type="triangle" w="med" len="med"/>
+          </a:ln>
+        </p:spPr>
+        <p:style>
+          <a:lnRef idx="2">
+            <a:schemeClr val="accent1"/>
+          </a:lnRef>
+          <a:fillRef idx="0">
+            <a:schemeClr val="accent1"/>
+          </a:fillRef>
+          <a:effectRef idx="1">
+            <a:schemeClr val="accent1"/>
+          </a:effectRef>
+          <a:fontRef idx="minor">
+            <a:schemeClr val="tx1"/>
+          </a:fontRef>
+        </p:style>
+      </p:cxnSp>
+      <p:sp>
+        <p:nvSpPr>
+          <p:cNvPr id="89" name="TextBox 88"/>
+          <p:cNvSpPr txBox="1"/>
+          <p:nvPr/>
+        </p:nvSpPr>
+        <p:spPr>
+          <a:xfrm>
+            <a:off x="12499848" y="5989320"/>
+            <a:ext cx="1097280" cy="274320"/>
+          </a:xfrm>
+          <a:prstGeom prst="rect">
+            <a:avLst/>
+          </a:prstGeom>
+          <a:noFill/>
+        </p:spPr>
+        <p:txBody>
+          <a:bodyPr wrap="square" anchor="ctr" lIns="0" rIns="0" tIns="54864" bIns="54864">
+            <a:spAutoFit/>
+          </a:bodyPr>
+          <a:lstStyle/>
+          <a:p>
+            <a:pPr algn="l">
+              <a:spcAft>
+                <a:spcPts val="600"/>
+              </a:spcAft>
+            </a:pPr>
+            <a:r>
+              <a:rPr sz="1100" b="1">
+                <a:solidFill>
+                  <a:srgbClr val="E6ECF2"/>
+                </a:solidFill>
+              </a:rPr>
+              <a:t>yes</a:t>
+            </a:r>
+          </a:p>
+        </p:txBody>
+      </p:sp>
+      <p:cxnSp>
+        <p:nvCxnSpPr>
           <p:cNvPr id="90" name="Connector 89"/>
           <p:cNvCxnSpPr/>
           <p:nvPr/>
         </p:nvCxnSpPr>
         <p:spPr>
           <a:xfrm>
-            <a:off x="14493240" y="7543800"/>
-            <a:ext cx="310896" cy="0"/>
+            <a:off x="12435840" y="6949440"/>
+            <a:ext cx="0" cy="137160"/>
           </a:xfrm>
           <a:prstGeom prst="line">
             <a:avLst/>
           </a:prstGeom>
           <a:ln w="28575">
             <a:solidFill>
-              <a:srgbClr val="F5EFE9"/>
+              <a:srgbClr val="E6ECF2"/>
             </a:solidFill>
+            <a:tailEnd type="triangle" w="med" len="med"/>
           </a:ln>
         </p:spPr>
         <p:style>
@@ -12290,16 +12348,16 @@
           <p:nvPr/>
         </p:nvCxnSpPr>
         <p:spPr>
-          <a:xfrm flipV="1">
-            <a:off x="14804136" y="2743200"/>
-            <a:ext cx="0" cy="4800600"/>
+          <a:xfrm>
+            <a:off x="14493240" y="7543800"/>
+            <a:ext cx="310896" cy="0"/>
           </a:xfrm>
           <a:prstGeom prst="line">
             <a:avLst/>
           </a:prstGeom>
           <a:ln w="28575">
             <a:solidFill>
-              <a:srgbClr val="F5EFE9"/>
+              <a:srgbClr val="E6ECF2"/>
             </a:solidFill>
           </a:ln>
         </p:spPr>
@@ -12325,18 +12383,17 @@
           <p:nvPr/>
         </p:nvCxnSpPr>
         <p:spPr>
-          <a:xfrm>
+          <a:xfrm flipV="1">
             <a:off x="14804136" y="2743200"/>
-            <a:ext cx="310896" cy="0"/>
+            <a:ext cx="0" cy="4800600"/>
           </a:xfrm>
           <a:prstGeom prst="line">
             <a:avLst/>
           </a:prstGeom>
           <a:ln w="28575">
             <a:solidFill>
-              <a:srgbClr val="F5EFE9"/>
+              <a:srgbClr val="E6ECF2"/>
             </a:solidFill>
-            <a:tailEnd type="triangle" w="med" len="med"/>
           </a:ln>
         </p:spPr>
         <p:style>
@@ -12362,15 +12419,15 @@
         </p:nvCxnSpPr>
         <p:spPr>
           <a:xfrm>
-            <a:off x="17172432" y="2971800"/>
-            <a:ext cx="0" cy="137160"/>
+            <a:off x="14804136" y="2743200"/>
+            <a:ext cx="310896" cy="0"/>
           </a:xfrm>
           <a:prstGeom prst="line">
             <a:avLst/>
           </a:prstGeom>
           <a:ln w="28575">
             <a:solidFill>
-              <a:srgbClr val="F5EFE9"/>
+              <a:srgbClr val="E6ECF2"/>
             </a:solidFill>
             <a:tailEnd type="triangle" w="med" len="med"/>
           </a:ln>
@@ -12398,7 +12455,7 @@
         </p:nvCxnSpPr>
         <p:spPr>
           <a:xfrm>
-            <a:off x="17172432" y="3794760"/>
+            <a:off x="17172432" y="2971800"/>
             <a:ext cx="0" cy="137160"/>
           </a:xfrm>
           <a:prstGeom prst="line">
@@ -12406,7 +12463,7 @@
           </a:prstGeom>
           <a:ln w="28575">
             <a:solidFill>
-              <a:srgbClr val="F5EFE9"/>
+              <a:srgbClr val="E6ECF2"/>
             </a:solidFill>
             <a:tailEnd type="triangle" w="med" len="med"/>
           </a:ln>
@@ -12434,7 +12491,7 @@
         </p:nvCxnSpPr>
         <p:spPr>
           <a:xfrm>
-            <a:off x="17172432" y="4937760"/>
+            <a:off x="17172432" y="3794760"/>
             <a:ext cx="0" cy="137160"/>
           </a:xfrm>
           <a:prstGeom prst="line">
@@ -12442,7 +12499,7 @@
           </a:prstGeom>
           <a:ln w="28575">
             <a:solidFill>
-              <a:srgbClr val="F5EFE9"/>
+              <a:srgbClr val="E6ECF2"/>
             </a:solidFill>
             <a:tailEnd type="triangle" w="med" len="med"/>
           </a:ln>
@@ -12470,163 +12527,15 @@
         </p:nvCxnSpPr>
         <p:spPr>
           <a:xfrm>
-            <a:off x="17858232" y="5486400"/>
-            <a:ext cx="457200" cy="0"/>
+            <a:off x="17172432" y="4937760"/>
+            <a:ext cx="0" cy="137160"/>
           </a:xfrm>
           <a:prstGeom prst="line">
             <a:avLst/>
           </a:prstGeom>
           <a:ln w="28575">
             <a:solidFill>
-              <a:srgbClr val="F5EFE9"/>
-            </a:solidFill>
-            <a:tailEnd type="triangle" w="med" len="med"/>
-          </a:ln>
-        </p:spPr>
-        <p:style>
-          <a:lnRef idx="2">
-            <a:schemeClr val="accent1"/>
-          </a:lnRef>
-          <a:fillRef idx="0">
-            <a:schemeClr val="accent1"/>
-          </a:fillRef>
-          <a:effectRef idx="1">
-            <a:schemeClr val="accent1"/>
-          </a:effectRef>
-          <a:fontRef idx="minor">
-            <a:schemeClr val="tx1"/>
-          </a:fontRef>
-        </p:style>
-      </p:cxnSp>
-      <p:sp>
-        <p:nvSpPr>
-          <p:cNvPr id="97" name="TextBox 96"/>
-          <p:cNvSpPr txBox="1"/>
-          <p:nvPr/>
-        </p:nvSpPr>
-        <p:spPr>
-          <a:xfrm>
-            <a:off x="17538192" y="5175504"/>
-            <a:ext cx="1097280" cy="274320"/>
-          </a:xfrm>
-          <a:prstGeom prst="rect">
-            <a:avLst/>
-          </a:prstGeom>
-          <a:noFill/>
-        </p:spPr>
-        <p:txBody>
-          <a:bodyPr wrap="square" anchor="b" lIns="0" rIns="0" tIns="54864" bIns="54864">
-            <a:spAutoFit/>
-          </a:bodyPr>
-          <a:lstStyle/>
-          <a:p>
-            <a:pPr algn="ctr">
-              <a:spcAft>
-                <a:spcPts val="600"/>
-              </a:spcAft>
-            </a:pPr>
-            <a:r>
-              <a:rPr sz="1100" b="1">
-                <a:solidFill>
-                  <a:srgbClr val="F5EFE9"/>
-                </a:solidFill>
-              </a:rPr>
-              <a:t>no</a:t>
-            </a:r>
-          </a:p>
-        </p:txBody>
-      </p:sp>
-      <p:cxnSp>
-        <p:nvCxnSpPr>
-          <p:cNvPr id="98" name="Connector 97"/>
-          <p:cNvCxnSpPr/>
-          <p:nvPr/>
-        </p:nvCxnSpPr>
-        <p:spPr>
-          <a:xfrm>
-            <a:off x="17172432" y="5897880"/>
-            <a:ext cx="0" cy="137160"/>
-          </a:xfrm>
-          <a:prstGeom prst="line">
-            <a:avLst/>
-          </a:prstGeom>
-          <a:ln w="28575">
-            <a:solidFill>
-              <a:srgbClr val="F5EFE9"/>
-            </a:solidFill>
-            <a:tailEnd type="triangle" w="med" len="med"/>
-          </a:ln>
-        </p:spPr>
-        <p:style>
-          <a:lnRef idx="2">
-            <a:schemeClr val="accent1"/>
-          </a:lnRef>
-          <a:fillRef idx="0">
-            <a:schemeClr val="accent1"/>
-          </a:fillRef>
-          <a:effectRef idx="1">
-            <a:schemeClr val="accent1"/>
-          </a:effectRef>
-          <a:fontRef idx="minor">
-            <a:schemeClr val="tx1"/>
-          </a:fontRef>
-        </p:style>
-      </p:cxnSp>
-      <p:sp>
-        <p:nvSpPr>
-          <p:cNvPr id="99" name="TextBox 98"/>
-          <p:cNvSpPr txBox="1"/>
-          <p:nvPr/>
-        </p:nvSpPr>
-        <p:spPr>
-          <a:xfrm>
-            <a:off x="17236440" y="5829300"/>
-            <a:ext cx="1097280" cy="274320"/>
-          </a:xfrm>
-          <a:prstGeom prst="rect">
-            <a:avLst/>
-          </a:prstGeom>
-          <a:noFill/>
-        </p:spPr>
-        <p:txBody>
-          <a:bodyPr wrap="square" anchor="ctr" lIns="0" rIns="0" tIns="54864" bIns="54864">
-            <a:spAutoFit/>
-          </a:bodyPr>
-          <a:lstStyle/>
-          <a:p>
-            <a:pPr algn="l">
-              <a:spcAft>
-                <a:spcPts val="600"/>
-              </a:spcAft>
-            </a:pPr>
-            <a:r>
-              <a:rPr sz="1100" b="1">
-                <a:solidFill>
-                  <a:srgbClr val="F5EFE9"/>
-                </a:solidFill>
-              </a:rPr>
-              <a:t>yes</a:t>
-            </a:r>
-          </a:p>
-        </p:txBody>
-      </p:sp>
-      <p:cxnSp>
-        <p:nvCxnSpPr>
-          <p:cNvPr id="100" name="Connector 99"/>
-          <p:cNvCxnSpPr/>
-          <p:nvPr/>
-        </p:nvCxnSpPr>
-        <p:spPr>
-          <a:xfrm>
-            <a:off x="17172432" y="6720840"/>
-            <a:ext cx="0" cy="137160"/>
-          </a:xfrm>
-          <a:prstGeom prst="line">
-            <a:avLst/>
-          </a:prstGeom>
-          <a:ln w="28575">
-            <a:solidFill>
-              <a:srgbClr val="F5EFE9"/>
+              <a:srgbClr val="E6ECF2"/>
             </a:solidFill>
             <a:tailEnd type="triangle" w="med" len="med"/>
           </a:ln>
@@ -12648,22 +12557,171 @@
       </p:cxnSp>
       <p:cxnSp>
         <p:nvCxnSpPr>
+          <p:cNvPr id="97" name="Connector 96"/>
+          <p:cNvCxnSpPr/>
+          <p:nvPr/>
+        </p:nvCxnSpPr>
+        <p:spPr>
+          <a:xfrm>
+            <a:off x="17858232" y="5486400"/>
+            <a:ext cx="457200" cy="0"/>
+          </a:xfrm>
+          <a:prstGeom prst="line">
+            <a:avLst/>
+          </a:prstGeom>
+          <a:ln w="28575">
+            <a:solidFill>
+              <a:srgbClr val="E6ECF2"/>
+            </a:solidFill>
+            <a:tailEnd type="triangle" w="med" len="med"/>
+          </a:ln>
+        </p:spPr>
+        <p:style>
+          <a:lnRef idx="2">
+            <a:schemeClr val="accent1"/>
+          </a:lnRef>
+          <a:fillRef idx="0">
+            <a:schemeClr val="accent1"/>
+          </a:fillRef>
+          <a:effectRef idx="1">
+            <a:schemeClr val="accent1"/>
+          </a:effectRef>
+          <a:fontRef idx="minor">
+            <a:schemeClr val="tx1"/>
+          </a:fontRef>
+        </p:style>
+      </p:cxnSp>
+      <p:sp>
+        <p:nvSpPr>
+          <p:cNvPr id="98" name="TextBox 97"/>
+          <p:cNvSpPr txBox="1"/>
+          <p:nvPr/>
+        </p:nvSpPr>
+        <p:spPr>
+          <a:xfrm>
+            <a:off x="17538192" y="5175504"/>
+            <a:ext cx="1097280" cy="274320"/>
+          </a:xfrm>
+          <a:prstGeom prst="rect">
+            <a:avLst/>
+          </a:prstGeom>
+          <a:noFill/>
+        </p:spPr>
+        <p:txBody>
+          <a:bodyPr wrap="square" anchor="b" lIns="0" rIns="0" tIns="54864" bIns="54864">
+            <a:spAutoFit/>
+          </a:bodyPr>
+          <a:lstStyle/>
+          <a:p>
+            <a:pPr algn="ctr">
+              <a:spcAft>
+                <a:spcPts val="600"/>
+              </a:spcAft>
+            </a:pPr>
+            <a:r>
+              <a:rPr sz="1100" b="1">
+                <a:solidFill>
+                  <a:srgbClr val="E6ECF2"/>
+                </a:solidFill>
+              </a:rPr>
+              <a:t>no</a:t>
+            </a:r>
+          </a:p>
+        </p:txBody>
+      </p:sp>
+      <p:cxnSp>
+        <p:nvCxnSpPr>
+          <p:cNvPr id="99" name="Connector 98"/>
+          <p:cNvCxnSpPr/>
+          <p:nvPr/>
+        </p:nvCxnSpPr>
+        <p:spPr>
+          <a:xfrm>
+            <a:off x="17172432" y="5897880"/>
+            <a:ext cx="0" cy="137160"/>
+          </a:xfrm>
+          <a:prstGeom prst="line">
+            <a:avLst/>
+          </a:prstGeom>
+          <a:ln w="28575">
+            <a:solidFill>
+              <a:srgbClr val="E6ECF2"/>
+            </a:solidFill>
+            <a:tailEnd type="triangle" w="med" len="med"/>
+          </a:ln>
+        </p:spPr>
+        <p:style>
+          <a:lnRef idx="2">
+            <a:schemeClr val="accent1"/>
+          </a:lnRef>
+          <a:fillRef idx="0">
+            <a:schemeClr val="accent1"/>
+          </a:fillRef>
+          <a:effectRef idx="1">
+            <a:schemeClr val="accent1"/>
+          </a:effectRef>
+          <a:fontRef idx="minor">
+            <a:schemeClr val="tx1"/>
+          </a:fontRef>
+        </p:style>
+      </p:cxnSp>
+      <p:sp>
+        <p:nvSpPr>
+          <p:cNvPr id="100" name="TextBox 99"/>
+          <p:cNvSpPr txBox="1"/>
+          <p:nvPr/>
+        </p:nvSpPr>
+        <p:spPr>
+          <a:xfrm>
+            <a:off x="17236440" y="5829300"/>
+            <a:ext cx="1097280" cy="274320"/>
+          </a:xfrm>
+          <a:prstGeom prst="rect">
+            <a:avLst/>
+          </a:prstGeom>
+          <a:noFill/>
+        </p:spPr>
+        <p:txBody>
+          <a:bodyPr wrap="square" anchor="ctr" lIns="0" rIns="0" tIns="54864" bIns="54864">
+            <a:spAutoFit/>
+          </a:bodyPr>
+          <a:lstStyle/>
+          <a:p>
+            <a:pPr algn="l">
+              <a:spcAft>
+                <a:spcPts val="600"/>
+              </a:spcAft>
+            </a:pPr>
+            <a:r>
+              <a:rPr sz="1100" b="1">
+                <a:solidFill>
+                  <a:srgbClr val="E6ECF2"/>
+                </a:solidFill>
+              </a:rPr>
+              <a:t>yes</a:t>
+            </a:r>
+          </a:p>
+        </p:txBody>
+      </p:sp>
+      <p:cxnSp>
+        <p:nvCxnSpPr>
           <p:cNvPr id="101" name="Connector 100"/>
           <p:cNvCxnSpPr/>
           <p:nvPr/>
         </p:nvCxnSpPr>
         <p:spPr>
           <a:xfrm>
-            <a:off x="17172432" y="7635240"/>
-            <a:ext cx="0" cy="777240"/>
+            <a:off x="17172432" y="6720840"/>
+            <a:ext cx="0" cy="137160"/>
           </a:xfrm>
           <a:prstGeom prst="line">
             <a:avLst/>
           </a:prstGeom>
           <a:ln w="28575">
             <a:solidFill>
-              <a:srgbClr val="F5EFE9"/>
+              <a:srgbClr val="E6ECF2"/>
             </a:solidFill>
+            <a:tailEnd type="triangle" w="med" len="med"/>
           </a:ln>
         </p:spPr>
         <p:style>
@@ -12688,16 +12746,16 @@
           <p:nvPr/>
         </p:nvCxnSpPr>
         <p:spPr>
-          <a:xfrm flipH="1">
-            <a:off x="16276320" y="8412480"/>
-            <a:ext cx="896112" cy="0"/>
+          <a:xfrm>
+            <a:off x="17172432" y="7635240"/>
+            <a:ext cx="0" cy="777240"/>
           </a:xfrm>
           <a:prstGeom prst="line">
             <a:avLst/>
           </a:prstGeom>
           <a:ln w="28575">
             <a:solidFill>
-              <a:srgbClr val="F5EFE9"/>
+              <a:srgbClr val="E6ECF2"/>
             </a:solidFill>
           </a:ln>
         </p:spPr>
@@ -12723,18 +12781,17 @@
           <p:nvPr/>
         </p:nvCxnSpPr>
         <p:spPr>
-          <a:xfrm>
+          <a:xfrm flipH="1">
             <a:off x="16276320" y="8412480"/>
-            <a:ext cx="0" cy="685800"/>
+            <a:ext cx="896112" cy="0"/>
           </a:xfrm>
           <a:prstGeom prst="line">
             <a:avLst/>
           </a:prstGeom>
           <a:ln w="28575">
             <a:solidFill>
-              <a:srgbClr val="F5EFE9"/>
+              <a:srgbClr val="E6ECF2"/>
             </a:solidFill>
-            <a:tailEnd type="triangle" w="med" len="med"/>
           </a:ln>
         </p:spPr>
         <p:style>
@@ -12760,16 +12817,17 @@
         </p:nvCxnSpPr>
         <p:spPr>
           <a:xfrm>
-            <a:off x="19202400" y="9578340"/>
-            <a:ext cx="457200" cy="0"/>
+            <a:off x="16276320" y="8412480"/>
+            <a:ext cx="0" cy="685800"/>
           </a:xfrm>
           <a:prstGeom prst="line">
             <a:avLst/>
           </a:prstGeom>
           <a:ln w="28575">
             <a:solidFill>
-              <a:srgbClr val="F5EFE9"/>
+              <a:srgbClr val="E6ECF2"/>
             </a:solidFill>
+            <a:tailEnd type="triangle" w="med" len="med"/>
           </a:ln>
         </p:spPr>
         <p:style>
@@ -12794,16 +12852,16 @@
           <p:nvPr/>
         </p:nvCxnSpPr>
         <p:spPr>
-          <a:xfrm flipV="1">
-            <a:off x="19659600" y="1691640"/>
-            <a:ext cx="0" cy="7886700"/>
+          <a:xfrm>
+            <a:off x="19202400" y="9578340"/>
+            <a:ext cx="457200" cy="0"/>
           </a:xfrm>
           <a:prstGeom prst="line">
             <a:avLst/>
           </a:prstGeom>
           <a:ln w="28575">
             <a:solidFill>
-              <a:srgbClr val="F5EFE9"/>
+              <a:srgbClr val="E6ECF2"/>
             </a:solidFill>
           </a:ln>
         </p:spPr>
@@ -12829,16 +12887,16 @@
           <p:nvPr/>
         </p:nvCxnSpPr>
         <p:spPr>
-          <a:xfrm flipH="1">
-            <a:off x="12435840" y="1691640"/>
-            <a:ext cx="7223760" cy="0"/>
+          <a:xfrm flipV="1">
+            <a:off x="19659600" y="1691640"/>
+            <a:ext cx="0" cy="7886700"/>
           </a:xfrm>
           <a:prstGeom prst="line">
             <a:avLst/>
           </a:prstGeom>
           <a:ln w="28575">
             <a:solidFill>
-              <a:srgbClr val="F5EFE9"/>
+              <a:srgbClr val="E6ECF2"/>
             </a:solidFill>
           </a:ln>
         </p:spPr>
@@ -12864,18 +12922,17 @@
           <p:nvPr/>
         </p:nvCxnSpPr>
         <p:spPr>
-          <a:xfrm>
+          <a:xfrm flipH="1">
             <a:off x="12435840" y="1691640"/>
-            <a:ext cx="0" cy="822960"/>
+            <a:ext cx="7223760" cy="0"/>
           </a:xfrm>
           <a:prstGeom prst="line">
             <a:avLst/>
           </a:prstGeom>
           <a:ln w="28575">
             <a:solidFill>
-              <a:srgbClr val="F5EFE9"/>
+              <a:srgbClr val="E6ECF2"/>
             </a:solidFill>
-            <a:tailEnd type="triangle" w="med" len="med"/>
           </a:ln>
         </p:spPr>
         <p:style>
@@ -12893,9 +12950,45 @@
           </a:fontRef>
         </p:style>
       </p:cxnSp>
-      <p:sp>
-        <p:nvSpPr>
-          <p:cNvPr id="108" name="TextBox 107"/>
+      <p:cxnSp>
+        <p:nvCxnSpPr>
+          <p:cNvPr id="108" name="Connector 107"/>
+          <p:cNvCxnSpPr/>
+          <p:nvPr/>
+        </p:nvCxnSpPr>
+        <p:spPr>
+          <a:xfrm>
+            <a:off x="12435840" y="1691640"/>
+            <a:ext cx="0" cy="822960"/>
+          </a:xfrm>
+          <a:prstGeom prst="line">
+            <a:avLst/>
+          </a:prstGeom>
+          <a:ln w="28575">
+            <a:solidFill>
+              <a:srgbClr val="E6ECF2"/>
+            </a:solidFill>
+            <a:tailEnd type="triangle" w="med" len="med"/>
+          </a:ln>
+        </p:spPr>
+        <p:style>
+          <a:lnRef idx="2">
+            <a:schemeClr val="accent1"/>
+          </a:lnRef>
+          <a:fillRef idx="0">
+            <a:schemeClr val="accent1"/>
+          </a:fillRef>
+          <a:effectRef idx="1">
+            <a:schemeClr val="accent1"/>
+          </a:effectRef>
+          <a:fontRef idx="minor">
+            <a:schemeClr val="tx1"/>
+          </a:fontRef>
+        </p:style>
+      </p:cxnSp>
+      <p:sp>
+        <p:nvSpPr>
+          <p:cNvPr id="109" name="TextBox 108"/>
           <p:cNvSpPr txBox="1"/>
           <p:nvPr/>
         </p:nvSpPr>
@@ -12923,10 +13016,10 @@
             <a:r>
               <a:rPr sz="1200" b="0">
                 <a:solidFill>
-                  <a:srgbClr val="F5EFE9"/>
-                </a:solidFill>
-              </a:rPr>
-              <a:t>Orange diamonds are gates: yes continues, no stops the run and names the rollback. Numbers are the order of one full promotion. The Workstreams tree is never moved; the offering is a curated copy promoted org by org.</a:t>
+                  <a:srgbClr val="E6ECF2"/>
+                </a:solidFill>
+              </a:rPr>
+              <a:t>Blue diamonds are gates: yes continues, no stops the run and names the rollback. Numbers are the order of one full promotion. The Workstreams tree is never moved; the offering is a curated copy promoted org by org.</a:t>
             </a:r>
           </a:p>
         </p:txBody>
@@ -12951,7 +13044,51 @@
       <p:grpSpPr/>
       <p:sp>
         <p:nvSpPr>
-          <p:cNvPr id="2" name="TextBox 1"/>
+          <p:cNvPr id="2" name="Rectangle 1"/>
+          <p:cNvSpPr/>
+          <p:nvPr/>
+        </p:nvSpPr>
+        <p:spPr>
+          <a:xfrm>
+            <a:off x="0" y="0"/>
+            <a:ext cx="20116800" cy="11315700"/>
+          </a:xfrm>
+          <a:prstGeom prst="rect">
+            <a:avLst/>
+          </a:prstGeom>
+          <a:solidFill>
+            <a:srgbClr val="0B1723"/>
+          </a:solidFill>
+          <a:ln>
+            <a:noFill/>
+          </a:ln>
+          <a:effectLst/>
+        </p:spPr>
+        <p:style>
+          <a:lnRef idx="1">
+            <a:schemeClr val="accent1"/>
+          </a:lnRef>
+          <a:fillRef idx="3">
+            <a:schemeClr val="accent1"/>
+          </a:fillRef>
+          <a:effectRef idx="2">
+            <a:schemeClr val="accent1"/>
+          </a:effectRef>
+          <a:fontRef idx="minor">
+            <a:schemeClr val="lt1"/>
+          </a:fontRef>
+        </p:style>
+        <p:txBody>
+          <a:bodyPr rtlCol="0" anchor="ctr"/>
+          <a:lstStyle/>
+          <a:p>
+            <a:pPr algn="ctr"/>
+          </a:p>
+        </p:txBody>
+      </p:sp>
+      <p:sp>
+        <p:nvSpPr>
+          <p:cNvPr id="3" name="TextBox 2"/>
           <p:cNvSpPr txBox="1"/>
           <p:nvPr/>
         </p:nvSpPr>
@@ -12979,7 +13116,7 @@
             <a:r>
               <a:rPr sz="6000" b="0">
                 <a:solidFill>
-                  <a:srgbClr val="F5EFE9"/>
+                  <a:srgbClr val="E6ECF2"/>
                 </a:solidFill>
               </a:rPr>
               <a:t>Database Deployment Flow</a:t>
@@ -12989,7 +13126,7 @@
       </p:sp>
       <p:sp>
         <p:nvSpPr>
-          <p:cNvPr id="3" name="Rounded Rectangle 2"/>
+          <p:cNvPr id="4" name="Rounded Rectangle 3"/>
           <p:cNvSpPr/>
           <p:nvPr/>
         </p:nvSpPr>
@@ -13004,7 +13141,7 @@
             </a:avLst>
           </a:prstGeom>
           <a:solidFill>
-            <a:srgbClr val="FFA418"/>
+            <a:srgbClr val="006FAC"/>
           </a:solidFill>
           <a:ln>
             <a:noFill/>
@@ -13037,7 +13174,7 @@
             <a:r>
               <a:rPr sz="1600" b="1">
                 <a:solidFill>
-                  <a:srgbClr val="0B3D7A"/>
+                  <a:srgbClr val="FFFFFF"/>
                 </a:solidFill>
               </a:rPr>
               <a:t>V2</a:t>
@@ -13047,7 +13184,7 @@
       </p:sp>
       <p:sp>
         <p:nvSpPr>
-          <p:cNvPr id="4" name="TextBox 3"/>
+          <p:cNvPr id="5" name="TextBox 4"/>
           <p:cNvSpPr txBox="1"/>
           <p:nvPr/>
         </p:nvSpPr>
@@ -13075,7 +13212,7 @@
             <a:r>
               <a:rPr sz="1050" b="1">
                 <a:solidFill>
-                  <a:srgbClr val="F5EFE9"/>
+                  <a:srgbClr val="E6ECF2"/>
                 </a:solidFill>
               </a:rPr>
               <a:t>@2026, Origin Utility, Inc / Proprietary &amp; Confidential / Internal Use Only</a:t>
@@ -13085,7 +13222,7 @@
       </p:sp>
       <p:sp>
         <p:nvSpPr>
-          <p:cNvPr id="5" name="Rounded Rectangle 4"/>
+          <p:cNvPr id="6" name="Rounded Rectangle 5"/>
           <p:cNvSpPr/>
           <p:nvPr/>
         </p:nvSpPr>
@@ -13102,7 +13239,7 @@
           <a:noFill/>
           <a:ln w="19050">
             <a:solidFill>
-              <a:srgbClr val="F5EFE9"/>
+              <a:srgbClr val="8ACAD4"/>
             </a:solidFill>
           </a:ln>
           <a:effectLst/>
@@ -13131,7 +13268,7 @@
       </p:sp>
       <p:sp>
         <p:nvSpPr>
-          <p:cNvPr id="6" name="TextBox 5"/>
+          <p:cNvPr id="7" name="TextBox 6"/>
           <p:cNvSpPr txBox="1"/>
           <p:nvPr/>
         </p:nvSpPr>
@@ -13159,7 +13296,7 @@
             <a:r>
               <a:rPr sz="1400" b="1">
                 <a:solidFill>
-                  <a:srgbClr val="F5EFE9"/>
+                  <a:srgbClr val="E6ECF2"/>
                 </a:solidFill>
               </a:rPr>
               <a:t>5. Submit 8 baselines as parallel scheduler jobs</a:t>
@@ -13174,7 +13311,7 @@
             <a:r>
               <a:rPr sz="1100" b="0">
                 <a:solidFill>
-                  <a:srgbClr val="F5EFE9"/>
+                  <a:srgbClr val="E6ECF2"/>
                 </a:solidFill>
               </a:rPr>
               <a:t>unattended; they survive a dropped connection</a:t>
@@ -13184,7 +13321,7 @@
       </p:sp>
       <p:sp>
         <p:nvSpPr>
-          <p:cNvPr id="7" name="Rounded Rectangle 6"/>
+          <p:cNvPr id="8" name="Rounded Rectangle 7"/>
           <p:cNvSpPr/>
           <p:nvPr/>
         </p:nvSpPr>
@@ -13201,7 +13338,7 @@
           <a:noFill/>
           <a:ln w="19050">
             <a:solidFill>
-              <a:srgbClr val="F5EFE9"/>
+              <a:srgbClr val="8ACAD4"/>
             </a:solidFill>
           </a:ln>
           <a:effectLst/>
@@ -13230,7 +13367,7 @@
       </p:sp>
       <p:sp>
         <p:nvSpPr>
-          <p:cNvPr id="8" name="TextBox 7"/>
+          <p:cNvPr id="9" name="TextBox 8"/>
           <p:cNvSpPr txBox="1"/>
           <p:nvPr/>
         </p:nvSpPr>
@@ -13258,7 +13395,7 @@
             <a:r>
               <a:rPr sz="1400" b="1">
                 <a:solidFill>
-                  <a:srgbClr val="F5EFE9"/>
+                  <a:srgbClr val="E6ECF2"/>
                 </a:solidFill>
               </a:rPr>
               <a:t>What the domains read</a:t>
@@ -13273,7 +13410,7 @@
             <a:r>
               <a:rPr sz="1100" b="0">
                 <a:solidFill>
-                  <a:srgbClr val="F5EFE9"/>
+                  <a:srgbClr val="E6ECF2"/>
                 </a:solidFill>
               </a:rPr>
               <a:t>created in steps 2 and 3, validated at step 7 before anything is scheduled; each outlined stack feeds the domain chip beneath it</a:t>
@@ -13283,7 +13420,7 @@
       </p:sp>
       <p:sp>
         <p:nvSpPr>
-          <p:cNvPr id="9" name="Rounded Rectangle 8"/>
+          <p:cNvPr id="10" name="Rounded Rectangle 9"/>
           <p:cNvSpPr/>
           <p:nvPr/>
         </p:nvSpPr>
@@ -13300,7 +13437,7 @@
           <a:noFill/>
           <a:ln w="19050">
             <a:solidFill>
-              <a:srgbClr val="F5EFE9"/>
+              <a:srgbClr val="8ACAD4"/>
             </a:solidFill>
           </a:ln>
           <a:effectLst/>
@@ -13329,7 +13466,7 @@
       </p:sp>
       <p:sp>
         <p:nvSpPr>
-          <p:cNvPr id="10" name="TextBox 9"/>
+          <p:cNvPr id="11" name="TextBox 10"/>
           <p:cNvSpPr txBox="1"/>
           <p:nvPr/>
         </p:nvSpPr>
@@ -13357,7 +13494,7 @@
             <a:r>
               <a:rPr sz="1400" b="1">
                 <a:solidFill>
-                  <a:srgbClr val="F5EFE9"/>
+                  <a:srgbClr val="E6ECF2"/>
                 </a:solidFill>
               </a:rPr>
               <a:t>Finance tables</a:t>
@@ -13367,7 +13504,7 @@
       </p:sp>
       <p:sp>
         <p:nvSpPr>
-          <p:cNvPr id="11" name="Rounded Rectangle 10"/>
+          <p:cNvPr id="12" name="Rounded Rectangle 11"/>
           <p:cNvSpPr/>
           <p:nvPr/>
         </p:nvSpPr>
@@ -13384,7 +13521,7 @@
           <a:noFill/>
           <a:ln w="19050">
             <a:solidFill>
-              <a:srgbClr val="F5EFE9"/>
+              <a:srgbClr val="8ACAD4"/>
             </a:solidFill>
           </a:ln>
           <a:effectLst/>
@@ -13413,7 +13550,7 @@
       </p:sp>
       <p:sp>
         <p:nvSpPr>
-          <p:cNvPr id="12" name="TextBox 11"/>
+          <p:cNvPr id="13" name="TextBox 12"/>
           <p:cNvSpPr txBox="1"/>
           <p:nvPr/>
         </p:nvSpPr>
@@ -13441,7 +13578,7 @@
             <a:r>
               <a:rPr sz="1400" b="1">
                 <a:solidFill>
-                  <a:srgbClr val="F5EFE9"/>
+                  <a:srgbClr val="E6ECF2"/>
                 </a:solidFill>
               </a:rPr>
               <a:t>Billing tables</a:t>
@@ -13451,7 +13588,7 @@
       </p:sp>
       <p:sp>
         <p:nvSpPr>
-          <p:cNvPr id="13" name="Rounded Rectangle 12"/>
+          <p:cNvPr id="14" name="Rounded Rectangle 13"/>
           <p:cNvSpPr/>
           <p:nvPr/>
         </p:nvSpPr>
@@ -13468,7 +13605,7 @@
           <a:noFill/>
           <a:ln w="19050">
             <a:solidFill>
-              <a:srgbClr val="F5EFE9"/>
+              <a:srgbClr val="8ACAD4"/>
             </a:solidFill>
           </a:ln>
           <a:effectLst/>
@@ -13497,7 +13634,7 @@
       </p:sp>
       <p:sp>
         <p:nvSpPr>
-          <p:cNvPr id="14" name="TextBox 13"/>
+          <p:cNvPr id="15" name="TextBox 14"/>
           <p:cNvSpPr txBox="1"/>
           <p:nvPr/>
         </p:nvSpPr>
@@ -13525,7 +13662,7 @@
             <a:r>
               <a:rPr sz="1400" b="1">
                 <a:solidFill>
-                  <a:srgbClr val="F5EFE9"/>
+                  <a:srgbClr val="E6ECF2"/>
                 </a:solidFill>
               </a:rPr>
               <a:t>Meter Ops tables</a:t>
@@ -13535,7 +13672,7 @@
       </p:sp>
       <p:sp>
         <p:nvSpPr>
-          <p:cNvPr id="15" name="Rounded Rectangle 14"/>
+          <p:cNvPr id="16" name="Rounded Rectangle 15"/>
           <p:cNvSpPr/>
           <p:nvPr/>
         </p:nvSpPr>
@@ -13552,7 +13689,7 @@
           <a:noFill/>
           <a:ln w="19050">
             <a:solidFill>
-              <a:srgbClr val="F5EFE9"/>
+              <a:srgbClr val="8ACAD4"/>
             </a:solidFill>
           </a:ln>
           <a:effectLst/>
@@ -13581,7 +13718,7 @@
       </p:sp>
       <p:sp>
         <p:nvSpPr>
-          <p:cNvPr id="16" name="TextBox 15"/>
+          <p:cNvPr id="17" name="TextBox 16"/>
           <p:cNvSpPr txBox="1"/>
           <p:nvPr/>
         </p:nvSpPr>
@@ -13609,7 +13746,7 @@
             <a:r>
               <a:rPr sz="1400" b="1">
                 <a:solidFill>
-                  <a:srgbClr val="F5EFE9"/>
+                  <a:srgbClr val="E6ECF2"/>
                 </a:solidFill>
               </a:rPr>
               <a:t>Debt Mgmt objects</a:t>
@@ -13619,7 +13756,7 @@
       </p:sp>
       <p:sp>
         <p:nvSpPr>
-          <p:cNvPr id="17" name="Rounded Rectangle 16"/>
+          <p:cNvPr id="18" name="Rounded Rectangle 17"/>
           <p:cNvSpPr/>
           <p:nvPr/>
         </p:nvSpPr>
@@ -13636,7 +13773,7 @@
           <a:noFill/>
           <a:ln w="19050">
             <a:solidFill>
-              <a:srgbClr val="F5EFE9"/>
+              <a:srgbClr val="8ACAD4"/>
             </a:solidFill>
           </a:ln>
           <a:effectLst/>
@@ -13665,7 +13802,7 @@
       </p:sp>
       <p:sp>
         <p:nvSpPr>
-          <p:cNvPr id="18" name="TextBox 17"/>
+          <p:cNvPr id="19" name="TextBox 18"/>
           <p:cNvSpPr txBox="1"/>
           <p:nvPr/>
         </p:nvSpPr>
@@ -13693,7 +13830,7 @@
             <a:r>
               <a:rPr sz="1400" b="1">
                 <a:solidFill>
-                  <a:srgbClr val="F5EFE9"/>
+                  <a:srgbClr val="E6ECF2"/>
                 </a:solidFill>
               </a:rPr>
               <a:t>Meter Ops views</a:t>
@@ -13703,7 +13840,7 @@
       </p:sp>
       <p:sp>
         <p:nvSpPr>
-          <p:cNvPr id="19" name="Rounded Rectangle 18"/>
+          <p:cNvPr id="20" name="Rounded Rectangle 19"/>
           <p:cNvSpPr/>
           <p:nvPr/>
         </p:nvSpPr>
@@ -13720,7 +13857,7 @@
           <a:noFill/>
           <a:ln w="19050">
             <a:solidFill>
-              <a:srgbClr val="F5EFE9"/>
+              <a:srgbClr val="8ACAD4"/>
             </a:solidFill>
           </a:ln>
           <a:effectLst/>
@@ -13749,7 +13886,7 @@
       </p:sp>
       <p:sp>
         <p:nvSpPr>
-          <p:cNvPr id="20" name="TextBox 19"/>
+          <p:cNvPr id="21" name="TextBox 20"/>
           <p:cNvSpPr txBox="1"/>
           <p:nvPr/>
         </p:nvSpPr>
@@ -13777,7 +13914,7 @@
             <a:r>
               <a:rPr sz="1400" b="1">
                 <a:solidFill>
-                  <a:srgbClr val="F5EFE9"/>
+                  <a:srgbClr val="E6ECF2"/>
                 </a:solidFill>
               </a:rPr>
               <a:t>Field Ops views</a:t>
@@ -13787,7 +13924,7 @@
       </p:sp>
       <p:sp>
         <p:nvSpPr>
-          <p:cNvPr id="21" name="Rounded Rectangle 20"/>
+          <p:cNvPr id="22" name="Rounded Rectangle 21"/>
           <p:cNvSpPr/>
           <p:nvPr/>
         </p:nvSpPr>
@@ -13804,7 +13941,7 @@
           <a:noFill/>
           <a:ln w="19050">
             <a:solidFill>
-              <a:srgbClr val="F5EFE9"/>
+              <a:srgbClr val="8ACAD4"/>
             </a:solidFill>
           </a:ln>
           <a:effectLst/>
@@ -13833,7 +13970,7 @@
       </p:sp>
       <p:sp>
         <p:nvSpPr>
-          <p:cNvPr id="22" name="TextBox 21"/>
+          <p:cNvPr id="23" name="TextBox 22"/>
           <p:cNvSpPr txBox="1"/>
           <p:nvPr/>
         </p:nvSpPr>
@@ -13861,7 +13998,7 @@
             <a:r>
               <a:rPr sz="1400" b="1">
                 <a:solidFill>
-                  <a:srgbClr val="F5EFE9"/>
+                  <a:srgbClr val="E6ECF2"/>
                 </a:solidFill>
               </a:rPr>
               <a:t>Customer Ops views</a:t>
@@ -13871,7 +14008,7 @@
       </p:sp>
       <p:sp>
         <p:nvSpPr>
-          <p:cNvPr id="23" name="Rounded Rectangle 22"/>
+          <p:cNvPr id="24" name="Rounded Rectangle 23"/>
           <p:cNvSpPr/>
           <p:nvPr/>
         </p:nvSpPr>
@@ -13886,7 +14023,7 @@
             </a:avLst>
           </a:prstGeom>
           <a:solidFill>
-            <a:srgbClr val="F5EFE9"/>
+            <a:srgbClr val="F2F5F8"/>
           </a:solidFill>
           <a:ln>
             <a:noFill/>
@@ -13919,7 +14056,7 @@
             <a:r>
               <a:rPr sz="1400" b="1">
                 <a:solidFill>
-                  <a:srgbClr val="0B3D7A"/>
+                  <a:srgbClr val="004B86"/>
                 </a:solidFill>
               </a:rPr>
               <a:t>Preflight</a:t>
@@ -13934,7 +14071,7 @@
             <a:r>
               <a:rPr sz="1100" b="0">
                 <a:solidFill>
-                  <a:srgbClr val="4C5D69"/>
+                  <a:srgbClr val="56636E"/>
                 </a:solidFill>
               </a:rPr>
               <a:t>the deploy user can read every source table and write the targets</a:t>
@@ -13944,7 +14081,7 @@
       </p:sp>
       <p:sp>
         <p:nvSpPr>
-          <p:cNvPr id="24" name="Oval 23"/>
+          <p:cNvPr id="25" name="Oval 24"/>
           <p:cNvSpPr/>
           <p:nvPr/>
         </p:nvSpPr>
@@ -13957,7 +14094,7 @@
             <a:avLst/>
           </a:prstGeom>
           <a:solidFill>
-            <a:srgbClr val="FFA418"/>
+            <a:srgbClr val="006FAC"/>
           </a:solidFill>
           <a:ln>
             <a:noFill/>
@@ -13990,7 +14127,7 @@
             <a:r>
               <a:rPr sz="1000" b="1">
                 <a:solidFill>
-                  <a:srgbClr val="0B3D7A"/>
+                  <a:srgbClr val="FFFFFF"/>
                 </a:solidFill>
               </a:rPr>
               <a:t>1</a:t>
@@ -14000,7 +14137,7 @@
       </p:sp>
       <p:sp>
         <p:nvSpPr>
-          <p:cNvPr id="25" name="Rounded Rectangle 24"/>
+          <p:cNvPr id="26" name="Rounded Rectangle 25"/>
           <p:cNvSpPr/>
           <p:nvPr/>
         </p:nvSpPr>
@@ -14015,7 +14152,7 @@
             </a:avLst>
           </a:prstGeom>
           <a:solidFill>
-            <a:srgbClr val="F5EFE9"/>
+            <a:srgbClr val="F2F5F8"/>
           </a:solidFill>
           <a:ln>
             <a:noFill/>
@@ -14048,7 +14185,7 @@
             <a:r>
               <a:rPr sz="1400" b="1">
                 <a:solidFill>
-                  <a:srgbClr val="0B3D7A"/>
+                  <a:srgbClr val="004B86"/>
                 </a:solidFill>
               </a:rPr>
               <a:t>Create the 7 snapshot tables</a:t>
@@ -14063,7 +14200,7 @@
             <a:r>
               <a:rPr sz="1100" b="0">
                 <a:solidFill>
-                  <a:srgbClr val="4C5D69"/>
+                  <a:srgbClr val="56636E"/>
                 </a:solidFill>
               </a:rPr>
               <a:t>empty, with their keys</a:t>
@@ -14073,7 +14210,7 @@
       </p:sp>
       <p:sp>
         <p:nvSpPr>
-          <p:cNvPr id="26" name="Oval 25"/>
+          <p:cNvPr id="27" name="Oval 26"/>
           <p:cNvSpPr/>
           <p:nvPr/>
         </p:nvSpPr>
@@ -14086,7 +14223,7 @@
             <a:avLst/>
           </a:prstGeom>
           <a:solidFill>
-            <a:srgbClr val="FFA418"/>
+            <a:srgbClr val="006FAC"/>
           </a:solidFill>
           <a:ln>
             <a:noFill/>
@@ -14119,7 +14256,7 @@
             <a:r>
               <a:rPr sz="1000" b="1">
                 <a:solidFill>
-                  <a:srgbClr val="0B3D7A"/>
+                  <a:srgbClr val="FFFFFF"/>
                 </a:solidFill>
               </a:rPr>
               <a:t>2</a:t>
@@ -14129,7 +14266,7 @@
       </p:sp>
       <p:sp>
         <p:nvSpPr>
-          <p:cNvPr id="27" name="Rounded Rectangle 26"/>
+          <p:cNvPr id="28" name="Rounded Rectangle 27"/>
           <p:cNvSpPr/>
           <p:nvPr/>
         </p:nvSpPr>
@@ -14144,7 +14281,7 @@
             </a:avLst>
           </a:prstGeom>
           <a:solidFill>
-            <a:srgbClr val="F5EFE9"/>
+            <a:srgbClr val="F2F5F8"/>
           </a:solidFill>
           <a:ln>
             <a:noFill/>
@@ -14177,7 +14314,7 @@
             <a:r>
               <a:rPr sz="1400" b="1">
                 <a:solidFill>
-                  <a:srgbClr val="0B3D7A"/>
+                  <a:srgbClr val="004B86"/>
                 </a:solidFill>
               </a:rPr>
               <a:t>Create the domain-support objects</a:t>
@@ -14192,7 +14329,7 @@
             <a:r>
               <a:rPr sz="1100" b="0">
                 <a:solidFill>
-                  <a:srgbClr val="4C5D69"/>
+                  <a:srgbClr val="56636E"/>
                 </a:solidFill>
               </a:rPr>
               <a:t>SA snapshot table, lookup seed, 8 CMS views, grants, synonyms</a:t>
@@ -14202,7 +14339,7 @@
       </p:sp>
       <p:sp>
         <p:nvSpPr>
-          <p:cNvPr id="28" name="Oval 27"/>
+          <p:cNvPr id="29" name="Oval 28"/>
           <p:cNvSpPr/>
           <p:nvPr/>
         </p:nvSpPr>
@@ -14215,7 +14352,7 @@
             <a:avLst/>
           </a:prstGeom>
           <a:solidFill>
-            <a:srgbClr val="FFA418"/>
+            <a:srgbClr val="006FAC"/>
           </a:solidFill>
           <a:ln>
             <a:noFill/>
@@ -14248,7 +14385,7 @@
             <a:r>
               <a:rPr sz="1000" b="1">
                 <a:solidFill>
-                  <a:srgbClr val="0B3D7A"/>
+                  <a:srgbClr val="FFFFFF"/>
                 </a:solidFill>
               </a:rPr>
               <a:t>3</a:t>
@@ -14258,7 +14395,7 @@
       </p:sp>
       <p:sp>
         <p:nvSpPr>
-          <p:cNvPr id="29" name="Rounded Rectangle 28"/>
+          <p:cNvPr id="30" name="Rounded Rectangle 29"/>
           <p:cNvSpPr/>
           <p:nvPr/>
         </p:nvSpPr>
@@ -14273,7 +14410,7 @@
             </a:avLst>
           </a:prstGeom>
           <a:solidFill>
-            <a:srgbClr val="F5EFE9"/>
+            <a:srgbClr val="F2F5F8"/>
           </a:solidFill>
           <a:ln>
             <a:noFill/>
@@ -14306,7 +14443,7 @@
             <a:r>
               <a:rPr sz="1400" b="1">
                 <a:solidFill>
-                  <a:srgbClr val="0B3D7A"/>
+                  <a:srgbClr val="004B86"/>
                 </a:solidFill>
               </a:rPr>
               <a:t>Deploy the procedures</a:t>
@@ -14321,7 +14458,7 @@
             <a:r>
               <a:rPr sz="1100" b="0">
                 <a:solidFill>
-                  <a:srgbClr val="4C5D69"/>
+                  <a:srgbClr val="56636E"/>
                 </a:solidFill>
               </a:rPr>
               <a:t>baseline (the retained 24 months, once) and operational per table; the SA aged-balance refresh</a:t>
@@ -14331,7 +14468,7 @@
       </p:sp>
       <p:sp>
         <p:nvSpPr>
-          <p:cNvPr id="30" name="Oval 29"/>
+          <p:cNvPr id="31" name="Oval 30"/>
           <p:cNvSpPr/>
           <p:nvPr/>
         </p:nvSpPr>
@@ -14344,7 +14481,7 @@
             <a:avLst/>
           </a:prstGeom>
           <a:solidFill>
-            <a:srgbClr val="FFA418"/>
+            <a:srgbClr val="006FAC"/>
           </a:solidFill>
           <a:ln>
             <a:noFill/>
@@ -14377,7 +14514,7 @@
             <a:r>
               <a:rPr sz="1000" b="1">
                 <a:solidFill>
-                  <a:srgbClr val="0B3D7A"/>
+                  <a:srgbClr val="FFFFFF"/>
                 </a:solidFill>
               </a:rPr>
               <a:t>4</a:t>
@@ -14387,7 +14524,7 @@
       </p:sp>
       <p:sp>
         <p:nvSpPr>
-          <p:cNvPr id="31" name="Rounded Rectangle 30"/>
+          <p:cNvPr id="32" name="Rounded Rectangle 31"/>
           <p:cNvSpPr/>
           <p:nvPr/>
         </p:nvSpPr>
@@ -14402,7 +14539,7 @@
             </a:avLst>
           </a:prstGeom>
           <a:solidFill>
-            <a:srgbClr val="F5EFE9"/>
+            <a:srgbClr val="F2F5F8"/>
           </a:solidFill>
           <a:ln>
             <a:noFill/>
@@ -14435,7 +14572,7 @@
             <a:r>
               <a:rPr sz="1000" b="1">
                 <a:solidFill>
-                  <a:srgbClr val="0B3D7A"/>
+                  <a:srgbClr val="004B86"/>
                 </a:solidFill>
               </a:rPr>
               <a:t>FT</a:t>
@@ -14445,7 +14582,7 @@
       </p:sp>
       <p:sp>
         <p:nvSpPr>
-          <p:cNvPr id="32" name="Rounded Rectangle 31"/>
+          <p:cNvPr id="33" name="Rounded Rectangle 32"/>
           <p:cNvSpPr/>
           <p:nvPr/>
         </p:nvSpPr>
@@ -14460,7 +14597,7 @@
             </a:avLst>
           </a:prstGeom>
           <a:solidFill>
-            <a:srgbClr val="F5EFE9"/>
+            <a:srgbClr val="F2F5F8"/>
           </a:solidFill>
           <a:ln>
             <a:noFill/>
@@ -14493,7 +14630,7 @@
             <a:r>
               <a:rPr sz="1000" b="1">
                 <a:solidFill>
-                  <a:srgbClr val="0B3D7A"/>
+                  <a:srgbClr val="004B86"/>
                 </a:solidFill>
               </a:rPr>
               <a:t>Billed usage</a:t>
@@ -14503,7 +14640,7 @@
       </p:sp>
       <p:sp>
         <p:nvSpPr>
-          <p:cNvPr id="33" name="Rounded Rectangle 32"/>
+          <p:cNvPr id="34" name="Rounded Rectangle 33"/>
           <p:cNvSpPr/>
           <p:nvPr/>
         </p:nvSpPr>
@@ -14518,7 +14655,7 @@
             </a:avLst>
           </a:prstGeom>
           <a:solidFill>
-            <a:srgbClr val="F5EFE9"/>
+            <a:srgbClr val="F2F5F8"/>
           </a:solidFill>
           <a:ln>
             <a:noFill/>
@@ -14551,7 +14688,7 @@
             <a:r>
               <a:rPr sz="1000" b="1">
                 <a:solidFill>
-                  <a:srgbClr val="0B3D7A"/>
+                  <a:srgbClr val="004B86"/>
                 </a:solidFill>
               </a:rPr>
               <a:t>SQ usage</a:t>
@@ -14561,7 +14698,7 @@
       </p:sp>
       <p:sp>
         <p:nvSpPr>
-          <p:cNvPr id="34" name="Rounded Rectangle 33"/>
+          <p:cNvPr id="35" name="Rounded Rectangle 34"/>
           <p:cNvSpPr/>
           <p:nvPr/>
         </p:nvSpPr>
@@ -14576,7 +14713,7 @@
             </a:avLst>
           </a:prstGeom>
           <a:solidFill>
-            <a:srgbClr val="F5EFE9"/>
+            <a:srgbClr val="F2F5F8"/>
           </a:solidFill>
           <a:ln>
             <a:noFill/>
@@ -14609,7 +14746,7 @@
             <a:r>
               <a:rPr sz="1000" b="1">
                 <a:solidFill>
-                  <a:srgbClr val="0B3D7A"/>
+                  <a:srgbClr val="004B86"/>
                 </a:solidFill>
               </a:rPr>
               <a:t>GL distribution</a:t>
@@ -14619,7 +14756,7 @@
       </p:sp>
       <p:sp>
         <p:nvSpPr>
-          <p:cNvPr id="35" name="Rounded Rectangle 34"/>
+          <p:cNvPr id="36" name="Rounded Rectangle 35"/>
           <p:cNvSpPr/>
           <p:nvPr/>
         </p:nvSpPr>
@@ -14634,7 +14771,7 @@
             </a:avLst>
           </a:prstGeom>
           <a:solidFill>
-            <a:srgbClr val="F5EFE9"/>
+            <a:srgbClr val="F2F5F8"/>
           </a:solidFill>
           <a:ln>
             <a:noFill/>
@@ -14667,7 +14804,7 @@
             <a:r>
               <a:rPr sz="1000" b="1">
                 <a:solidFill>
-                  <a:srgbClr val="0B3D7A"/>
+                  <a:srgbClr val="004B86"/>
                 </a:solidFill>
               </a:rPr>
               <a:t>Measurement</a:t>
@@ -14677,7 +14814,7 @@
       </p:sp>
       <p:sp>
         <p:nvSpPr>
-          <p:cNvPr id="36" name="Rounded Rectangle 35"/>
+          <p:cNvPr id="37" name="Rounded Rectangle 36"/>
           <p:cNvSpPr/>
           <p:nvPr/>
         </p:nvSpPr>
@@ -14692,7 +14829,7 @@
             </a:avLst>
           </a:prstGeom>
           <a:solidFill>
-            <a:srgbClr val="F5EFE9"/>
+            <a:srgbClr val="F2F5F8"/>
           </a:solidFill>
           <a:ln>
             <a:noFill/>
@@ -14725,7 +14862,7 @@
             <a:r>
               <a:rPr sz="1000" b="1">
                 <a:solidFill>
-                  <a:srgbClr val="0B3D7A"/>
+                  <a:srgbClr val="004B86"/>
                 </a:solidFill>
               </a:rPr>
               <a:t>Usage</a:t>
@@ -14735,7 +14872,7 @@
       </p:sp>
       <p:sp>
         <p:nvSpPr>
-          <p:cNvPr id="37" name="Rounded Rectangle 36"/>
+          <p:cNvPr id="38" name="Rounded Rectangle 37"/>
           <p:cNvSpPr/>
           <p:nvPr/>
         </p:nvSpPr>
@@ -14750,7 +14887,7 @@
             </a:avLst>
           </a:prstGeom>
           <a:solidFill>
-            <a:srgbClr val="F5EFE9"/>
+            <a:srgbClr val="F2F5F8"/>
           </a:solidFill>
           <a:ln>
             <a:noFill/>
@@ -14783,7 +14920,7 @@
             <a:r>
               <a:rPr sz="1000" b="1">
                 <a:solidFill>
-                  <a:srgbClr val="0B3D7A"/>
+                  <a:srgbClr val="004B86"/>
                 </a:solidFill>
               </a:rPr>
               <a:t>Usage scalar detail</a:t>
@@ -14793,7 +14930,7 @@
       </p:sp>
       <p:sp>
         <p:nvSpPr>
-          <p:cNvPr id="38" name="Rounded Rectangle 37"/>
+          <p:cNvPr id="39" name="Rounded Rectangle 38"/>
           <p:cNvSpPr/>
           <p:nvPr/>
         </p:nvSpPr>
@@ -14808,7 +14945,7 @@
             </a:avLst>
           </a:prstGeom>
           <a:solidFill>
-            <a:srgbClr val="F5EFE9"/>
+            <a:srgbClr val="F2F5F8"/>
           </a:solidFill>
           <a:ln>
             <a:noFill/>
@@ -14841,7 +14978,7 @@
             <a:r>
               <a:rPr sz="1000" b="1">
                 <a:solidFill>
-                  <a:srgbClr val="0B3D7A"/>
+                  <a:srgbClr val="004B86"/>
                 </a:solidFill>
               </a:rPr>
               <a:t>SA snapshot refresh</a:t>
@@ -14851,7 +14988,7 @@
       </p:sp>
       <p:sp>
         <p:nvSpPr>
-          <p:cNvPr id="39" name="Diamond 38"/>
+          <p:cNvPr id="40" name="Diamond 39"/>
           <p:cNvSpPr/>
           <p:nvPr/>
         </p:nvSpPr>
@@ -14864,7 +15001,7 @@
             <a:avLst/>
           </a:prstGeom>
           <a:solidFill>
-            <a:srgbClr val="FFA418"/>
+            <a:srgbClr val="006FAC"/>
           </a:solidFill>
           <a:ln>
             <a:noFill/>
@@ -14897,7 +15034,7 @@
             <a:r>
               <a:rPr sz="1000" b="1">
                 <a:solidFill>
-                  <a:srgbClr val="0B3D7A"/>
+                  <a:srgbClr val="FFFFFF"/>
                 </a:solidFill>
               </a:rPr>
               <a:t>ready gate: every job SUCCEEDED?</a:t>
@@ -14907,7 +15044,7 @@
       </p:sp>
       <p:sp>
         <p:nvSpPr>
-          <p:cNvPr id="40" name="Oval 39"/>
+          <p:cNvPr id="41" name="Oval 40"/>
           <p:cNvSpPr/>
           <p:nvPr/>
         </p:nvSpPr>
@@ -14920,7 +15057,7 @@
             <a:avLst/>
           </a:prstGeom>
           <a:solidFill>
-            <a:srgbClr val="FFA418"/>
+            <a:srgbClr val="006FAC"/>
           </a:solidFill>
           <a:ln>
             <a:noFill/>
@@ -14953,7 +15090,7 @@
             <a:r>
               <a:rPr sz="1000" b="1">
                 <a:solidFill>
-                  <a:srgbClr val="0B3D7A"/>
+                  <a:srgbClr val="FFFFFF"/>
                 </a:solidFill>
               </a:rPr>
               <a:t>6</a:t>
@@ -14963,7 +15100,7 @@
       </p:sp>
       <p:sp>
         <p:nvSpPr>
-          <p:cNvPr id="41" name="Rounded Rectangle 40"/>
+          <p:cNvPr id="42" name="Rounded Rectangle 41"/>
           <p:cNvSpPr/>
           <p:nvPr/>
         </p:nvSpPr>
@@ -14978,7 +15115,7 @@
             </a:avLst>
           </a:prstGeom>
           <a:solidFill>
-            <a:srgbClr val="F5EFE9"/>
+            <a:srgbClr val="F2F5F8"/>
           </a:solidFill>
           <a:ln>
             <a:noFill/>
@@ -15011,7 +15148,7 @@
             <a:r>
               <a:rPr sz="900" b="1">
                 <a:solidFill>
-                  <a:srgbClr val="0B3D7A"/>
+                  <a:srgbClr val="004B86"/>
                 </a:solidFill>
               </a:rPr>
               <a:t>stop, fix, re-run</a:t>
@@ -15021,7 +15158,7 @@
       </p:sp>
       <p:sp>
         <p:nvSpPr>
-          <p:cNvPr id="42" name="Diamond 41"/>
+          <p:cNvPr id="43" name="Diamond 42"/>
           <p:cNvSpPr/>
           <p:nvPr/>
         </p:nvSpPr>
@@ -15034,7 +15171,7 @@
             <a:avLst/>
           </a:prstGeom>
           <a:solidFill>
-            <a:srgbClr val="FFA418"/>
+            <a:srgbClr val="006FAC"/>
           </a:solidFill>
           <a:ln>
             <a:noFill/>
@@ -15067,7 +15204,7 @@
             <a:r>
               <a:rPr sz="1000" b="1">
                 <a:solidFill>
-                  <a:srgbClr val="0B3D7A"/>
+                  <a:srgbClr val="FFFFFF"/>
                 </a:solidFill>
               </a:rPr>
               <a:t>validate and install gates pass?</a:t>
@@ -15077,7 +15214,7 @@
       </p:sp>
       <p:sp>
         <p:nvSpPr>
-          <p:cNvPr id="43" name="Oval 42"/>
+          <p:cNvPr id="44" name="Oval 43"/>
           <p:cNvSpPr/>
           <p:nvPr/>
         </p:nvSpPr>
@@ -15090,7 +15227,7 @@
             <a:avLst/>
           </a:prstGeom>
           <a:solidFill>
-            <a:srgbClr val="FFA418"/>
+            <a:srgbClr val="006FAC"/>
           </a:solidFill>
           <a:ln>
             <a:noFill/>
@@ -15123,7 +15260,7 @@
             <a:r>
               <a:rPr sz="1000" b="1">
                 <a:solidFill>
-                  <a:srgbClr val="0B3D7A"/>
+                  <a:srgbClr val="FFFFFF"/>
                 </a:solidFill>
               </a:rPr>
               <a:t>7</a:t>
@@ -15133,7 +15270,7 @@
       </p:sp>
       <p:sp>
         <p:nvSpPr>
-          <p:cNvPr id="44" name="Rounded Rectangle 43"/>
+          <p:cNvPr id="45" name="Rounded Rectangle 44"/>
           <p:cNvSpPr/>
           <p:nvPr/>
         </p:nvSpPr>
@@ -15148,7 +15285,7 @@
             </a:avLst>
           </a:prstGeom>
           <a:solidFill>
-            <a:srgbClr val="F5EFE9"/>
+            <a:srgbClr val="F2F5F8"/>
           </a:solidFill>
           <a:ln>
             <a:noFill/>
@@ -15181,7 +15318,7 @@
             <a:r>
               <a:rPr sz="900" b="1">
                 <a:solidFill>
-                  <a:srgbClr val="0B3D7A"/>
+                  <a:srgbClr val="004B86"/>
                 </a:solidFill>
               </a:rPr>
               <a:t>stop, fix, re-run</a:t>
@@ -15191,7 +15328,7 @@
       </p:sp>
       <p:sp>
         <p:nvSpPr>
-          <p:cNvPr id="45" name="Rounded Rectangle 44"/>
+          <p:cNvPr id="46" name="Rounded Rectangle 45"/>
           <p:cNvSpPr/>
           <p:nvPr/>
         </p:nvSpPr>
@@ -15206,7 +15343,7 @@
             </a:avLst>
           </a:prstGeom>
           <a:solidFill>
-            <a:srgbClr val="F5EFE9"/>
+            <a:srgbClr val="F2F5F8"/>
           </a:solidFill>
           <a:ln>
             <a:noFill/>
@@ -15239,7 +15376,7 @@
             <a:r>
               <a:rPr sz="1400" b="1">
                 <a:solidFill>
-                  <a:srgbClr val="0B3D7A"/>
+                  <a:srgbClr val="004B86"/>
                 </a:solidFill>
               </a:rPr>
               <a:t>Post-load indexes</a:t>
@@ -15254,7 +15391,7 @@
             <a:r>
               <a:rPr sz="1100" b="0">
                 <a:solidFill>
-                  <a:srgbClr val="4C5D69"/>
+                  <a:srgbClr val="56636E"/>
                 </a:solidFill>
               </a:rPr>
               <a:t>keys and dates the domains filter on</a:t>
@@ -15264,7 +15401,7 @@
       </p:sp>
       <p:sp>
         <p:nvSpPr>
-          <p:cNvPr id="46" name="Oval 45"/>
+          <p:cNvPr id="47" name="Oval 46"/>
           <p:cNvSpPr/>
           <p:nvPr/>
         </p:nvSpPr>
@@ -15277,7 +15414,7 @@
             <a:avLst/>
           </a:prstGeom>
           <a:solidFill>
-            <a:srgbClr val="FFA418"/>
+            <a:srgbClr val="006FAC"/>
           </a:solidFill>
           <a:ln>
             <a:noFill/>
@@ -15310,7 +15447,7 @@
             <a:r>
               <a:rPr sz="1000" b="1">
                 <a:solidFill>
-                  <a:srgbClr val="0B3D7A"/>
+                  <a:srgbClr val="FFFFFF"/>
                 </a:solidFill>
               </a:rPr>
               <a:t>8</a:t>
@@ -15320,7 +15457,7 @@
       </p:sp>
       <p:sp>
         <p:nvSpPr>
-          <p:cNvPr id="47" name="Rounded Rectangle 46"/>
+          <p:cNvPr id="48" name="Rounded Rectangle 47"/>
           <p:cNvSpPr/>
           <p:nvPr/>
         </p:nvSpPr>
@@ -15335,7 +15472,7 @@
             </a:avLst>
           </a:prstGeom>
           <a:solidFill>
-            <a:srgbClr val="F5EFE9"/>
+            <a:srgbClr val="F2F5F8"/>
           </a:solidFill>
           <a:ln>
             <a:noFill/>
@@ -15368,7 +15505,7 @@
             <a:r>
               <a:rPr sz="1400" b="1">
                 <a:solidFill>
-                  <a:srgbClr val="0B3D7A"/>
+                  <a:srgbClr val="004B86"/>
                 </a:solidFill>
               </a:rPr>
               <a:t>Rolling procedures</a:t>
@@ -15383,7 +15520,7 @@
             <a:r>
               <a:rPr sz="1100" b="0">
                 <a:solidFill>
-                  <a:srgbClr val="4C5D69"/>
+                  <a:srgbClr val="56636E"/>
                 </a:solidFill>
               </a:rPr>
               <a:t>3 months rebuilt, 24 kept; one operational refresh run by hand</a:t>
@@ -15393,7 +15530,7 @@
       </p:sp>
       <p:sp>
         <p:nvSpPr>
-          <p:cNvPr id="48" name="Oval 47"/>
+          <p:cNvPr id="49" name="Oval 48"/>
           <p:cNvSpPr/>
           <p:nvPr/>
         </p:nvSpPr>
@@ -15406,7 +15543,7 @@
             <a:avLst/>
           </a:prstGeom>
           <a:solidFill>
-            <a:srgbClr val="FFA418"/>
+            <a:srgbClr val="006FAC"/>
           </a:solidFill>
           <a:ln>
             <a:noFill/>
@@ -15439,7 +15576,7 @@
             <a:r>
               <a:rPr sz="1000" b="1">
                 <a:solidFill>
-                  <a:srgbClr val="0B3D7A"/>
+                  <a:srgbClr val="FFFFFF"/>
                 </a:solidFill>
               </a:rPr>
               <a:t>9</a:t>
@@ -15449,7 +15586,7 @@
       </p:sp>
       <p:sp>
         <p:nvSpPr>
-          <p:cNvPr id="49" name="Diamond 48"/>
+          <p:cNvPr id="50" name="Diamond 49"/>
           <p:cNvSpPr/>
           <p:nvPr/>
         </p:nvSpPr>
@@ -15462,7 +15599,7 @@
             <a:avLst/>
           </a:prstGeom>
           <a:solidFill>
-            <a:srgbClr val="FFA418"/>
+            <a:srgbClr val="006FAC"/>
           </a:solidFill>
           <a:ln>
             <a:noFill/>
@@ -15495,7 +15632,7 @@
             <a:r>
               <a:rPr sz="1000" b="1">
                 <a:solidFill>
-                  <a:srgbClr val="0B3D7A"/>
+                  <a:srgbClr val="FFFFFF"/>
                 </a:solidFill>
               </a:rPr>
               <a:t>validated again?</a:t>
@@ -15505,7 +15642,7 @@
       </p:sp>
       <p:sp>
         <p:nvSpPr>
-          <p:cNvPr id="50" name="Oval 49"/>
+          <p:cNvPr id="51" name="Oval 50"/>
           <p:cNvSpPr/>
           <p:nvPr/>
         </p:nvSpPr>
@@ -15518,7 +15655,7 @@
             <a:avLst/>
           </a:prstGeom>
           <a:solidFill>
-            <a:srgbClr val="FFA418"/>
+            <a:srgbClr val="006FAC"/>
           </a:solidFill>
           <a:ln>
             <a:noFill/>
@@ -15551,7 +15688,7 @@
             <a:r>
               <a:rPr sz="1000" b="1">
                 <a:solidFill>
-                  <a:srgbClr val="0B3D7A"/>
+                  <a:srgbClr val="FFFFFF"/>
                 </a:solidFill>
               </a:rPr>
               <a:t>10</a:t>
@@ -15561,7 +15698,7 @@
       </p:sp>
       <p:sp>
         <p:nvSpPr>
-          <p:cNvPr id="51" name="Rounded Rectangle 50"/>
+          <p:cNvPr id="52" name="Rounded Rectangle 51"/>
           <p:cNvSpPr/>
           <p:nvPr/>
         </p:nvSpPr>
@@ -15576,7 +15713,7 @@
             </a:avLst>
           </a:prstGeom>
           <a:solidFill>
-            <a:srgbClr val="F5EFE9"/>
+            <a:srgbClr val="F2F5F8"/>
           </a:solidFill>
           <a:ln>
             <a:noFill/>
@@ -15609,7 +15746,7 @@
             <a:r>
               <a:rPr sz="900" b="1">
                 <a:solidFill>
-                  <a:srgbClr val="0B3D7A"/>
+                  <a:srgbClr val="004B86"/>
                 </a:solidFill>
               </a:rPr>
               <a:t>stop, fix, re-run</a:t>
@@ -15619,7 +15756,7 @@
       </p:sp>
       <p:sp>
         <p:nvSpPr>
-          <p:cNvPr id="52" name="Rounded Rectangle 51"/>
+          <p:cNvPr id="53" name="Rounded Rectangle 52"/>
           <p:cNvSpPr/>
           <p:nvPr/>
         </p:nvSpPr>
@@ -15634,7 +15771,7 @@
             </a:avLst>
           </a:prstGeom>
           <a:solidFill>
-            <a:srgbClr val="F5EFE9"/>
+            <a:srgbClr val="F2F5F8"/>
           </a:solidFill>
           <a:ln>
             <a:noFill/>
@@ -15667,7 +15804,7 @@
             <a:r>
               <a:rPr sz="1400" b="1">
                 <a:solidFill>
-                  <a:srgbClr val="0B3D7A"/>
+                  <a:srgbClr val="004B86"/>
                 </a:solidFill>
               </a:rPr>
               <a:t>Schedule</a:t>
@@ -15682,7 +15819,7 @@
             <a:r>
               <a:rPr sz="1100" b="0">
                 <a:solidFill>
-                  <a:srgbClr val="4C5D69"/>
+                  <a:srgbClr val="56636E"/>
                 </a:solidFill>
               </a:rPr>
               <a:t>twice daily from 10:00 and 16:00 UTC, 30-minute stagger; held on TEST until approved</a:t>
@@ -15692,7 +15829,7 @@
       </p:sp>
       <p:sp>
         <p:nvSpPr>
-          <p:cNvPr id="53" name="Oval 52"/>
+          <p:cNvPr id="54" name="Oval 53"/>
           <p:cNvSpPr/>
           <p:nvPr/>
         </p:nvSpPr>
@@ -15705,7 +15842,7 @@
             <a:avLst/>
           </a:prstGeom>
           <a:solidFill>
-            <a:srgbClr val="FFA418"/>
+            <a:srgbClr val="006FAC"/>
           </a:solidFill>
           <a:ln>
             <a:noFill/>
@@ -15738,7 +15875,7 @@
             <a:r>
               <a:rPr sz="1000" b="1">
                 <a:solidFill>
-                  <a:srgbClr val="0B3D7A"/>
+                  <a:srgbClr val="FFFFFF"/>
                 </a:solidFill>
               </a:rPr>
               <a:t>11</a:t>
@@ -15748,7 +15885,7 @@
       </p:sp>
       <p:sp>
         <p:nvSpPr>
-          <p:cNvPr id="54" name="Rounded Rectangle 53"/>
+          <p:cNvPr id="55" name="Rounded Rectangle 54"/>
           <p:cNvSpPr/>
           <p:nvPr/>
         </p:nvSpPr>
@@ -15763,7 +15900,7 @@
             </a:avLst>
           </a:prstGeom>
           <a:solidFill>
-            <a:srgbClr val="F5EFE9"/>
+            <a:srgbClr val="F2F5F8"/>
           </a:solidFill>
           <a:ln>
             <a:noFill/>
@@ -15796,7 +15933,7 @@
             <a:r>
               <a:rPr sz="1400" b="1">
                 <a:solidFill>
-                  <a:srgbClr val="0B3D7A"/>
+                  <a:srgbClr val="004B86"/>
                 </a:solidFill>
               </a:rPr>
               <a:t>Capture runs, data quality</a:t>
@@ -15811,7 +15948,7 @@
             <a:r>
               <a:rPr sz="1100" b="0">
                 <a:solidFill>
-                  <a:srgbClr val="4C5D69"/>
+                  <a:srgbClr val="56636E"/>
                 </a:solidFill>
               </a:rPr>
               <a:t>per client, kept with the log</a:t>
@@ -15821,7 +15958,7 @@
       </p:sp>
       <p:sp>
         <p:nvSpPr>
-          <p:cNvPr id="55" name="Oval 54"/>
+          <p:cNvPr id="56" name="Oval 55"/>
           <p:cNvSpPr/>
           <p:nvPr/>
         </p:nvSpPr>
@@ -15834,7 +15971,7 @@
             <a:avLst/>
           </a:prstGeom>
           <a:solidFill>
-            <a:srgbClr val="FFA418"/>
+            <a:srgbClr val="006FAC"/>
           </a:solidFill>
           <a:ln>
             <a:noFill/>
@@ -15867,7 +16004,7 @@
             <a:r>
               <a:rPr sz="1000" b="1">
                 <a:solidFill>
-                  <a:srgbClr val="0B3D7A"/>
+                  <a:srgbClr val="FFFFFF"/>
                 </a:solidFill>
               </a:rPr>
               <a:t>12</a:t>
@@ -15877,7 +16014,7 @@
       </p:sp>
       <p:sp>
         <p:nvSpPr>
-          <p:cNvPr id="56" name="TextBox 55"/>
+          <p:cNvPr id="57" name="TextBox 56"/>
           <p:cNvSpPr txBox="1"/>
           <p:nvPr/>
         </p:nvSpPr>
@@ -15905,7 +16042,7 @@
             <a:r>
               <a:rPr sz="1200" b="1">
                 <a:solidFill>
-                  <a:srgbClr val="F5EFE9"/>
+                  <a:srgbClr val="E6ECF2"/>
                 </a:solidFill>
               </a:rPr>
               <a:t>runs at (UTC), one job every 30 minutes</a:t>
@@ -15920,7 +16057,7 @@
             <a:r>
               <a:rPr sz="1100" b="0">
                 <a:solidFill>
-                  <a:srgbClr val="F5EFE9"/>
+                  <a:srgbClr val="E6ECF2"/>
                 </a:solidFill>
               </a:rPr>
               <a:t>10:00 to 13:30, then again 16:00 to 19:30</a:t>
@@ -15930,7 +16067,7 @@
       </p:sp>
       <p:sp>
         <p:nvSpPr>
-          <p:cNvPr id="57" name="Rounded Rectangle 56"/>
+          <p:cNvPr id="58" name="Rounded Rectangle 57"/>
           <p:cNvSpPr/>
           <p:nvPr/>
         </p:nvSpPr>
@@ -15945,7 +16082,7 @@
             </a:avLst>
           </a:prstGeom>
           <a:solidFill>
-            <a:srgbClr val="F5EFE9"/>
+            <a:srgbClr val="F2F5F8"/>
           </a:solidFill>
           <a:ln>
             <a:noFill/>
@@ -15978,7 +16115,7 @@
             <a:r>
               <a:rPr sz="900" b="1">
                 <a:solidFill>
-                  <a:srgbClr val="0B3D7A"/>
+                  <a:srgbClr val="004B86"/>
                 </a:solidFill>
               </a:rPr>
               <a:t>FT_RPT_CURR</a:t>
@@ -15993,7 +16130,7 @@
             <a:r>
               <a:rPr sz="950" b="0">
                 <a:solidFill>
-                  <a:srgbClr val="4C5D69"/>
+                  <a:srgbClr val="56636E"/>
                 </a:solidFill>
               </a:rPr>
               <a:t>financial transactions</a:t>
@@ -16003,7 +16140,7 @@
       </p:sp>
       <p:sp>
         <p:nvSpPr>
-          <p:cNvPr id="58" name="Rounded Rectangle 57"/>
+          <p:cNvPr id="59" name="Rounded Rectangle 58"/>
           <p:cNvSpPr/>
           <p:nvPr/>
         </p:nvSpPr>
@@ -16018,7 +16155,7 @@
             </a:avLst>
           </a:prstGeom>
           <a:solidFill>
-            <a:srgbClr val="F5EFE9"/>
+            <a:srgbClr val="F2F5F8"/>
           </a:solidFill>
           <a:ln>
             <a:noFill/>
@@ -16051,7 +16188,7 @@
             <a:r>
               <a:rPr sz="900" b="1">
                 <a:solidFill>
-                  <a:srgbClr val="0B3D7A"/>
+                  <a:srgbClr val="004B86"/>
                 </a:solidFill>
               </a:rPr>
               <a:t>FT_GL_DISTRIBUTION_RPT_CURR</a:t>
@@ -16066,7 +16203,7 @@
             <a:r>
               <a:rPr sz="950" b="0">
                 <a:solidFill>
-                  <a:srgbClr val="4C5D69"/>
+                  <a:srgbClr val="56636E"/>
                 </a:solidFill>
               </a:rPr>
               <a:t>GL distribution</a:t>
@@ -16076,7 +16213,7 @@
       </p:sp>
       <p:sp>
         <p:nvSpPr>
-          <p:cNvPr id="59" name="Rounded Rectangle 58"/>
+          <p:cNvPr id="60" name="Rounded Rectangle 59"/>
           <p:cNvSpPr/>
           <p:nvPr/>
         </p:nvSpPr>
@@ -16091,7 +16228,7 @@
             </a:avLst>
           </a:prstGeom>
           <a:solidFill>
-            <a:srgbClr val="F5EFE9"/>
+            <a:srgbClr val="F2F5F8"/>
           </a:solidFill>
           <a:ln>
             <a:noFill/>
@@ -16124,7 +16261,7 @@
             <a:r>
               <a:rPr sz="900" b="1">
                 <a:solidFill>
-                  <a:srgbClr val="0B3D7A"/>
+                  <a:srgbClr val="004B86"/>
                 </a:solidFill>
               </a:rPr>
               <a:t>BSEG_BILLED_USAGE_RPT_CURR</a:t>
@@ -16139,7 +16276,7 @@
             <a:r>
               <a:rPr sz="950" b="0">
                 <a:solidFill>
-                  <a:srgbClr val="4C5D69"/>
+                  <a:srgbClr val="56636E"/>
                 </a:solidFill>
               </a:rPr>
               <a:t>billed usage per segment</a:t>
@@ -16149,7 +16286,7 @@
       </p:sp>
       <p:sp>
         <p:nvSpPr>
-          <p:cNvPr id="60" name="Rounded Rectangle 59"/>
+          <p:cNvPr id="61" name="Rounded Rectangle 60"/>
           <p:cNvSpPr/>
           <p:nvPr/>
         </p:nvSpPr>
@@ -16164,7 +16301,7 @@
             </a:avLst>
           </a:prstGeom>
           <a:solidFill>
-            <a:srgbClr val="F5EFE9"/>
+            <a:srgbClr val="F2F5F8"/>
           </a:solidFill>
           <a:ln>
             <a:noFill/>
@@ -16197,7 +16334,7 @@
             <a:r>
               <a:rPr sz="900" b="1">
                 <a:solidFill>
-                  <a:srgbClr val="0B3D7A"/>
+                  <a:srgbClr val="004B86"/>
                 </a:solidFill>
               </a:rPr>
               <a:t>BSEG_SQ_USAGE_RPT_CURR</a:t>
@@ -16212,7 +16349,7 @@
             <a:r>
               <a:rPr sz="950" b="0">
                 <a:solidFill>
-                  <a:srgbClr val="4C5D69"/>
+                  <a:srgbClr val="56636E"/>
                 </a:solidFill>
               </a:rPr>
               <a:t>service quantities</a:t>
@@ -16222,7 +16359,7 @@
       </p:sp>
       <p:sp>
         <p:nvSpPr>
-          <p:cNvPr id="61" name="Rounded Rectangle 60"/>
+          <p:cNvPr id="62" name="Rounded Rectangle 61"/>
           <p:cNvSpPr/>
           <p:nvPr/>
         </p:nvSpPr>
@@ -16237,7 +16374,7 @@
             </a:avLst>
           </a:prstGeom>
           <a:solidFill>
-            <a:srgbClr val="F5EFE9"/>
+            <a:srgbClr val="F2F5F8"/>
           </a:solidFill>
           <a:ln>
             <a:noFill/>
@@ -16270,7 +16407,7 @@
             <a:r>
               <a:rPr sz="900" b="1">
                 <a:solidFill>
-                  <a:srgbClr val="0B3D7A"/>
+                  <a:srgbClr val="004B86"/>
                 </a:solidFill>
               </a:rPr>
               <a:t>D1_MSRMT_RPT_CURR</a:t>
@@ -16285,7 +16422,7 @@
             <a:r>
               <a:rPr sz="950" b="0">
                 <a:solidFill>
-                  <a:srgbClr val="4C5D69"/>
+                  <a:srgbClr val="56636E"/>
                 </a:solidFill>
               </a:rPr>
               <a:t>measurements</a:t>
@@ -16295,7 +16432,7 @@
       </p:sp>
       <p:sp>
         <p:nvSpPr>
-          <p:cNvPr id="62" name="Rounded Rectangle 61"/>
+          <p:cNvPr id="63" name="Rounded Rectangle 62"/>
           <p:cNvSpPr/>
           <p:nvPr/>
         </p:nvSpPr>
@@ -16310,7 +16447,7 @@
             </a:avLst>
           </a:prstGeom>
           <a:solidFill>
-            <a:srgbClr val="F5EFE9"/>
+            <a:srgbClr val="F2F5F8"/>
           </a:solidFill>
           <a:ln>
             <a:noFill/>
@@ -16343,7 +16480,7 @@
             <a:r>
               <a:rPr sz="900" b="1">
                 <a:solidFill>
-                  <a:srgbClr val="0B3D7A"/>
+                  <a:srgbClr val="004B86"/>
                 </a:solidFill>
               </a:rPr>
               <a:t>D1_USAGE_RPT_CURR</a:t>
@@ -16358,7 +16495,7 @@
             <a:r>
               <a:rPr sz="950" b="0">
                 <a:solidFill>
-                  <a:srgbClr val="4C5D69"/>
+                  <a:srgbClr val="56636E"/>
                 </a:solidFill>
               </a:rPr>
               <a:t>usage transactions</a:t>
@@ -16368,7 +16505,7 @@
       </p:sp>
       <p:sp>
         <p:nvSpPr>
-          <p:cNvPr id="63" name="Rounded Rectangle 62"/>
+          <p:cNvPr id="64" name="Rounded Rectangle 63"/>
           <p:cNvSpPr/>
           <p:nvPr/>
         </p:nvSpPr>
@@ -16383,7 +16520,7 @@
             </a:avLst>
           </a:prstGeom>
           <a:solidFill>
-            <a:srgbClr val="F5EFE9"/>
+            <a:srgbClr val="F2F5F8"/>
           </a:solidFill>
           <a:ln>
             <a:noFill/>
@@ -16416,7 +16553,7 @@
             <a:r>
               <a:rPr sz="900" b="1">
                 <a:solidFill>
-                  <a:srgbClr val="0B3D7A"/>
+                  <a:srgbClr val="004B86"/>
                 </a:solidFill>
               </a:rPr>
               <a:t>D1_USAGE_SCALAR_DTL_RPT_CURR</a:t>
@@ -16431,7 +16568,7 @@
             <a:r>
               <a:rPr sz="950" b="0">
                 <a:solidFill>
-                  <a:srgbClr val="4C5D69"/>
+                  <a:srgbClr val="56636E"/>
                 </a:solidFill>
               </a:rPr>
               <a:t>usage scalar detail</a:t>
@@ -16441,7 +16578,7 @@
       </p:sp>
       <p:sp>
         <p:nvSpPr>
-          <p:cNvPr id="64" name="Rounded Rectangle 63"/>
+          <p:cNvPr id="65" name="Rounded Rectangle 64"/>
           <p:cNvSpPr/>
           <p:nvPr/>
         </p:nvSpPr>
@@ -16489,7 +16626,7 @@
             <a:r>
               <a:rPr sz="1100" b="1">
                 <a:solidFill>
-                  <a:srgbClr val="0B3D7A"/>
+                  <a:srgbClr val="004B86"/>
                 </a:solidFill>
               </a:rPr>
               <a:t>Finance domains</a:t>
@@ -16499,7 +16636,7 @@
       </p:sp>
       <p:sp>
         <p:nvSpPr>
-          <p:cNvPr id="65" name="Rounded Rectangle 64"/>
+          <p:cNvPr id="66" name="Rounded Rectangle 65"/>
           <p:cNvSpPr/>
           <p:nvPr/>
         </p:nvSpPr>
@@ -16547,7 +16684,7 @@
             <a:r>
               <a:rPr sz="1000" b="1">
                 <a:solidFill>
-                  <a:srgbClr val="0B3D7A"/>
+                  <a:srgbClr val="004B86"/>
                 </a:solidFill>
               </a:rPr>
               <a:t>Billing and Rates domains</a:t>
@@ -16557,7 +16694,7 @@
       </p:sp>
       <p:sp>
         <p:nvSpPr>
-          <p:cNvPr id="66" name="Rounded Rectangle 65"/>
+          <p:cNvPr id="67" name="Rounded Rectangle 66"/>
           <p:cNvSpPr/>
           <p:nvPr/>
         </p:nvSpPr>
@@ -16605,7 +16742,7 @@
             <a:r>
               <a:rPr sz="1000" b="1">
                 <a:solidFill>
-                  <a:srgbClr val="0B3D7A"/>
+                  <a:srgbClr val="004B86"/>
                 </a:solidFill>
               </a:rPr>
               <a:t>Usage and measurement domains</a:t>
@@ -16615,7 +16752,7 @@
       </p:sp>
       <p:sp>
         <p:nvSpPr>
-          <p:cNvPr id="67" name="Rounded Rectangle 66"/>
+          <p:cNvPr id="68" name="Rounded Rectangle 67"/>
           <p:cNvSpPr/>
           <p:nvPr/>
         </p:nvSpPr>
@@ -16630,7 +16767,7 @@
             </a:avLst>
           </a:prstGeom>
           <a:solidFill>
-            <a:srgbClr val="F5EFE9"/>
+            <a:srgbClr val="F2F5F8"/>
           </a:solidFill>
           <a:ln>
             <a:noFill/>
@@ -16663,7 +16800,7 @@
             <a:r>
               <a:rPr sz="1000" b="1">
                 <a:solidFill>
-                  <a:srgbClr val="0B3D7A"/>
+                  <a:srgbClr val="004B86"/>
                 </a:solidFill>
               </a:rPr>
               <a:t>CMS_SA_SNAPSHOT</a:t>
@@ -16678,7 +16815,7 @@
             <a:r>
               <a:rPr sz="950" b="0">
                 <a:solidFill>
-                  <a:srgbClr val="4C5D69"/>
+                  <a:srgbClr val="56636E"/>
                 </a:solidFill>
               </a:rPr>
               <a:t>aged balance per SA, refreshed by procedure</a:t>
@@ -16688,7 +16825,7 @@
       </p:sp>
       <p:sp>
         <p:nvSpPr>
-          <p:cNvPr id="68" name="Rounded Rectangle 67"/>
+          <p:cNvPr id="69" name="Rounded Rectangle 68"/>
           <p:cNvSpPr/>
           <p:nvPr/>
         </p:nvSpPr>
@@ -16703,7 +16840,7 @@
             </a:avLst>
           </a:prstGeom>
           <a:solidFill>
-            <a:srgbClr val="F5EFE9"/>
+            <a:srgbClr val="F2F5F8"/>
           </a:solidFill>
           <a:ln>
             <a:noFill/>
@@ -16736,7 +16873,7 @@
             <a:r>
               <a:rPr sz="1000" b="1">
                 <a:solidFill>
-                  <a:srgbClr val="0B3D7A"/>
+                  <a:srgbClr val="004B86"/>
                 </a:solidFill>
               </a:rPr>
               <a:t>CM_SNAPSHOT_TYPE_FLG</a:t>
@@ -16751,7 +16888,7 @@
             <a:r>
               <a:rPr sz="950" b="0">
                 <a:solidFill>
-                  <a:srgbClr val="4C5D69"/>
+                  <a:srgbClr val="56636E"/>
                 </a:solidFill>
               </a:rPr>
               <a:t>lookup seed: LDAY, EMON, ARCH, LEMN</a:t>
@@ -16761,7 +16898,7 @@
       </p:sp>
       <p:sp>
         <p:nvSpPr>
-          <p:cNvPr id="69" name="Rounded Rectangle 68"/>
+          <p:cNvPr id="70" name="Rounded Rectangle 69"/>
           <p:cNvSpPr/>
           <p:nvPr/>
         </p:nvSpPr>
@@ -16809,7 +16946,7 @@
             <a:r>
               <a:rPr sz="1000" b="1">
                 <a:solidFill>
-                  <a:srgbClr val="0B3D7A"/>
+                  <a:srgbClr val="004B86"/>
                 </a:solidFill>
               </a:rPr>
               <a:t>SA Snapshot Aged Balance domain</a:t>
@@ -16819,7 +16956,7 @@
       </p:sp>
       <p:sp>
         <p:nvSpPr>
-          <p:cNvPr id="70" name="Rounded Rectangle 69"/>
+          <p:cNvPr id="71" name="Rounded Rectangle 70"/>
           <p:cNvSpPr/>
           <p:nvPr/>
         </p:nvSpPr>
@@ -16834,7 +16971,7 @@
             </a:avLst>
           </a:prstGeom>
           <a:solidFill>
-            <a:srgbClr val="F5EFE9"/>
+            <a:srgbClr val="F2F5F8"/>
           </a:solidFill>
           <a:ln>
             <a:noFill/>
@@ -16867,7 +17004,7 @@
             <a:r>
               <a:rPr sz="900" b="1">
                 <a:solidFill>
-                  <a:srgbClr val="0B3D7A"/>
+                  <a:srgbClr val="004B86"/>
                 </a:solidFill>
               </a:rPr>
               <a:t>CMS_D1_DVC_IDENTIFIER_VW</a:t>
@@ -16877,7 +17014,7 @@
       </p:sp>
       <p:sp>
         <p:nvSpPr>
-          <p:cNvPr id="71" name="Rounded Rectangle 70"/>
+          <p:cNvPr id="72" name="Rounded Rectangle 71"/>
           <p:cNvSpPr/>
           <p:nvPr/>
         </p:nvSpPr>
@@ -16892,7 +17029,7 @@
             </a:avLst>
           </a:prstGeom>
           <a:solidFill>
-            <a:srgbClr val="F5EFE9"/>
+            <a:srgbClr val="F2F5F8"/>
           </a:solidFill>
           <a:ln>
             <a:noFill/>
@@ -16925,7 +17062,7 @@
             <a:r>
               <a:rPr sz="900" b="1">
                 <a:solidFill>
-                  <a:srgbClr val="0B3D7A"/>
+                  <a:srgbClr val="004B86"/>
                 </a:solidFill>
               </a:rPr>
               <a:t>CMS_D1_DVC_BODA_VW</a:t>
@@ -16935,7 +17072,7 @@
       </p:sp>
       <p:sp>
         <p:nvSpPr>
-          <p:cNvPr id="72" name="Rounded Rectangle 71"/>
+          <p:cNvPr id="73" name="Rounded Rectangle 72"/>
           <p:cNvSpPr/>
           <p:nvPr/>
         </p:nvSpPr>
@@ -16950,7 +17087,7 @@
             </a:avLst>
           </a:prstGeom>
           <a:solidFill>
-            <a:srgbClr val="F5EFE9"/>
+            <a:srgbClr val="F2F5F8"/>
           </a:solidFill>
           <a:ln>
             <a:noFill/>
@@ -16983,7 +17120,7 @@
             <a:r>
               <a:rPr sz="900" b="1">
                 <a:solidFill>
-                  <a:srgbClr val="0B3D7A"/>
+                  <a:srgbClr val="004B86"/>
                 </a:solidFill>
               </a:rPr>
               <a:t>CMS_W1_ASSET_IDENTIFIER_VW</a:t>
@@ -16993,7 +17130,7 @@
       </p:sp>
       <p:sp>
         <p:nvSpPr>
-          <p:cNvPr id="73" name="Rounded Rectangle 72"/>
+          <p:cNvPr id="74" name="Rounded Rectangle 73"/>
           <p:cNvSpPr/>
           <p:nvPr/>
         </p:nvSpPr>
@@ -17041,7 +17178,7 @@
             <a:r>
               <a:rPr sz="1000" b="1">
                 <a:solidFill>
-                  <a:srgbClr val="0B3D7A"/>
+                  <a:srgbClr val="004B86"/>
                 </a:solidFill>
               </a:rPr>
               <a:t>Device domain</a:t>
@@ -17051,7 +17188,7 @@
       </p:sp>
       <p:sp>
         <p:nvSpPr>
-          <p:cNvPr id="74" name="Rounded Rectangle 73"/>
+          <p:cNvPr id="75" name="Rounded Rectangle 74"/>
           <p:cNvSpPr/>
           <p:nvPr/>
         </p:nvSpPr>
@@ -17099,7 +17236,7 @@
             <a:r>
               <a:rPr sz="1000" b="1">
                 <a:solidFill>
-                  <a:srgbClr val="0B3D7A"/>
+                  <a:srgbClr val="004B86"/>
                 </a:solidFill>
               </a:rPr>
               <a:t>Asset domain</a:t>
@@ -17109,7 +17246,7 @@
       </p:sp>
       <p:sp>
         <p:nvSpPr>
-          <p:cNvPr id="75" name="Rounded Rectangle 74"/>
+          <p:cNvPr id="76" name="Rounded Rectangle 75"/>
           <p:cNvSpPr/>
           <p:nvPr/>
         </p:nvSpPr>
@@ -17124,7 +17261,7 @@
             </a:avLst>
           </a:prstGeom>
           <a:solidFill>
-            <a:srgbClr val="F5EFE9"/>
+            <a:srgbClr val="F2F5F8"/>
           </a:solidFill>
           <a:ln>
             <a:noFill/>
@@ -17157,7 +17294,7 @@
             <a:r>
               <a:rPr sz="900" b="1">
                 <a:solidFill>
-                  <a:srgbClr val="0B3D7A"/>
+                  <a:srgbClr val="004B86"/>
                 </a:solidFill>
               </a:rPr>
               <a:t>CMS_C1_REPRESENTATIVE_BODA_VW</a:t>
@@ -17167,7 +17304,7 @@
       </p:sp>
       <p:sp>
         <p:nvSpPr>
-          <p:cNvPr id="76" name="Rounded Rectangle 75"/>
+          <p:cNvPr id="77" name="Rounded Rectangle 76"/>
           <p:cNvSpPr/>
           <p:nvPr/>
         </p:nvSpPr>
@@ -17182,7 +17319,7 @@
             </a:avLst>
           </a:prstGeom>
           <a:solidFill>
-            <a:srgbClr val="F5EFE9"/>
+            <a:srgbClr val="F2F5F8"/>
           </a:solidFill>
           <a:ln>
             <a:noFill/>
@@ -17215,7 +17352,7 @@
             <a:r>
               <a:rPr sz="900" b="1">
                 <a:solidFill>
-                  <a:srgbClr val="0B3D7A"/>
+                  <a:srgbClr val="004B86"/>
                 </a:solidFill>
               </a:rPr>
               <a:t>CMS_D1_ACTIVITY_CHAR_VW</a:t>
@@ -17225,7 +17362,7 @@
       </p:sp>
       <p:sp>
         <p:nvSpPr>
-          <p:cNvPr id="77" name="Rounded Rectangle 76"/>
+          <p:cNvPr id="78" name="Rounded Rectangle 77"/>
           <p:cNvSpPr/>
           <p:nvPr/>
         </p:nvSpPr>
@@ -17240,7 +17377,7 @@
             </a:avLst>
           </a:prstGeom>
           <a:solidFill>
-            <a:srgbClr val="F5EFE9"/>
+            <a:srgbClr val="F2F5F8"/>
           </a:solidFill>
           <a:ln>
             <a:noFill/>
@@ -17273,7 +17410,7 @@
             <a:r>
               <a:rPr sz="900" b="1">
                 <a:solidFill>
-                  <a:srgbClr val="0B3D7A"/>
+                  <a:srgbClr val="004B86"/>
                 </a:solidFill>
               </a:rPr>
               <a:t>CMS_D1_ACTIVITY_D1FA_BODA_VW</a:t>
@@ -17283,7 +17420,7 @@
       </p:sp>
       <p:sp>
         <p:nvSpPr>
-          <p:cNvPr id="78" name="Rounded Rectangle 77"/>
+          <p:cNvPr id="79" name="Rounded Rectangle 78"/>
           <p:cNvSpPr/>
           <p:nvPr/>
         </p:nvSpPr>
@@ -17331,7 +17468,7 @@
             <a:r>
               <a:rPr sz="1000" b="1">
                 <a:solidFill>
-                  <a:srgbClr val="0B3D7A"/>
+                  <a:srgbClr val="004B86"/>
                 </a:solidFill>
               </a:rPr>
               <a:t>Crew domain</a:t>
@@ -17341,7 +17478,7 @@
       </p:sp>
       <p:sp>
         <p:nvSpPr>
-          <p:cNvPr id="79" name="Rounded Rectangle 78"/>
+          <p:cNvPr id="80" name="Rounded Rectangle 79"/>
           <p:cNvSpPr/>
           <p:nvPr/>
         </p:nvSpPr>
@@ -17389,7 +17526,7 @@
             <a:r>
               <a:rPr sz="1000" b="1">
                 <a:solidFill>
-                  <a:srgbClr val="0B3D7A"/>
+                  <a:srgbClr val="004B86"/>
                 </a:solidFill>
               </a:rPr>
               <a:t>Field Activity domain</a:t>
@@ -17399,7 +17536,7 @@
       </p:sp>
       <p:sp>
         <p:nvSpPr>
-          <p:cNvPr id="80" name="Rounded Rectangle 79"/>
+          <p:cNvPr id="81" name="Rounded Rectangle 80"/>
           <p:cNvSpPr/>
           <p:nvPr/>
         </p:nvSpPr>
@@ -17414,7 +17551,7 @@
             </a:avLst>
           </a:prstGeom>
           <a:solidFill>
-            <a:srgbClr val="F5EFE9"/>
+            <a:srgbClr val="F2F5F8"/>
           </a:solidFill>
           <a:ln>
             <a:noFill/>
@@ -17447,7 +17584,7 @@
             <a:r>
               <a:rPr sz="900" b="1">
                 <a:solidFill>
-                  <a:srgbClr val="0B3D7A"/>
+                  <a:srgbClr val="004B86"/>
                 </a:solidFill>
               </a:rPr>
               <a:t>CMS_CI_CASE_VW</a:t>
@@ -17457,7 +17594,7 @@
       </p:sp>
       <p:sp>
         <p:nvSpPr>
-          <p:cNvPr id="81" name="Rounded Rectangle 80"/>
+          <p:cNvPr id="82" name="Rounded Rectangle 81"/>
           <p:cNvSpPr/>
           <p:nvPr/>
         </p:nvSpPr>
@@ -17472,7 +17609,7 @@
             </a:avLst>
           </a:prstGeom>
           <a:solidFill>
-            <a:srgbClr val="F5EFE9"/>
+            <a:srgbClr val="F2F5F8"/>
           </a:solidFill>
           <a:ln>
             <a:noFill/>
@@ -17505,7 +17642,7 @@
             <a:r>
               <a:rPr sz="900" b="1">
                 <a:solidFill>
-                  <a:srgbClr val="0B3D7A"/>
+                  <a:srgbClr val="004B86"/>
                 </a:solidFill>
               </a:rPr>
               <a:t>CMS_CI_CASE_LOG_VW</a:t>
@@ -17515,7 +17652,7 @@
       </p:sp>
       <p:sp>
         <p:nvSpPr>
-          <p:cNvPr id="82" name="Rounded Rectangle 81"/>
+          <p:cNvPr id="83" name="Rounded Rectangle 82"/>
           <p:cNvSpPr/>
           <p:nvPr/>
         </p:nvSpPr>
@@ -17563,7 +17700,7 @@
             <a:r>
               <a:rPr sz="1000" b="1">
                 <a:solidFill>
-                  <a:srgbClr val="0B3D7A"/>
+                  <a:srgbClr val="004B86"/>
                 </a:solidFill>
               </a:rPr>
               <a:t>Case domain</a:t>
@@ -17571,42 +17708,6 @@
           </a:p>
         </p:txBody>
       </p:sp>
-      <p:cxnSp>
-        <p:nvCxnSpPr>
-          <p:cNvPr id="83" name="Connector 82"/>
-          <p:cNvCxnSpPr/>
-          <p:nvPr/>
-        </p:nvCxnSpPr>
-        <p:spPr>
-          <a:xfrm>
-            <a:off x="3026664" y="2743200"/>
-            <a:ext cx="274320" cy="0"/>
-          </a:xfrm>
-          <a:prstGeom prst="line">
-            <a:avLst/>
-          </a:prstGeom>
-          <a:ln w="28575">
-            <a:solidFill>
-              <a:srgbClr val="F5EFE9"/>
-            </a:solidFill>
-            <a:tailEnd type="triangle" w="med" len="med"/>
-          </a:ln>
-        </p:spPr>
-        <p:style>
-          <a:lnRef idx="2">
-            <a:schemeClr val="accent1"/>
-          </a:lnRef>
-          <a:fillRef idx="0">
-            <a:schemeClr val="accent1"/>
-          </a:fillRef>
-          <a:effectRef idx="1">
-            <a:schemeClr val="accent1"/>
-          </a:effectRef>
-          <a:fontRef idx="minor">
-            <a:schemeClr val="tx1"/>
-          </a:fontRef>
-        </p:style>
-      </p:cxnSp>
       <p:cxnSp>
         <p:nvCxnSpPr>
           <p:cNvPr id="84" name="Connector 83"/>
@@ -17615,7 +17716,7 @@
         </p:nvCxnSpPr>
         <p:spPr>
           <a:xfrm>
-            <a:off x="5952744" y="2743200"/>
+            <a:off x="3026664" y="2743200"/>
             <a:ext cx="274320" cy="0"/>
           </a:xfrm>
           <a:prstGeom prst="line">
@@ -17623,7 +17724,7 @@
           </a:prstGeom>
           <a:ln w="28575">
             <a:solidFill>
-              <a:srgbClr val="F5EFE9"/>
+              <a:srgbClr val="E6ECF2"/>
             </a:solidFill>
             <a:tailEnd type="triangle" w="med" len="med"/>
           </a:ln>
@@ -17651,7 +17752,7 @@
         </p:nvCxnSpPr>
         <p:spPr>
           <a:xfrm>
-            <a:off x="9061704" y="2743200"/>
+            <a:off x="5952744" y="2743200"/>
             <a:ext cx="274320" cy="0"/>
           </a:xfrm>
           <a:prstGeom prst="line">
@@ -17659,7 +17760,7 @@
           </a:prstGeom>
           <a:ln w="28575">
             <a:solidFill>
-              <a:srgbClr val="F5EFE9"/>
+              <a:srgbClr val="E6ECF2"/>
             </a:solidFill>
             <a:tailEnd type="triangle" w="med" len="med"/>
           </a:ln>
@@ -17686,16 +17787,16 @@
           <p:nvPr/>
         </p:nvCxnSpPr>
         <p:spPr>
-          <a:xfrm flipV="1">
-            <a:off x="11987784" y="2720339"/>
-            <a:ext cx="274320" cy="22861"/>
+          <a:xfrm>
+            <a:off x="9061704" y="2743200"/>
+            <a:ext cx="274320" cy="0"/>
           </a:xfrm>
           <a:prstGeom prst="line">
             <a:avLst/>
           </a:prstGeom>
           <a:ln w="28575">
             <a:solidFill>
-              <a:srgbClr val="F5EFE9"/>
+              <a:srgbClr val="E6ECF2"/>
             </a:solidFill>
             <a:tailEnd type="triangle" w="med" len="med"/>
           </a:ln>
@@ -17722,17 +17823,18 @@
           <p:nvPr/>
         </p:nvCxnSpPr>
         <p:spPr>
-          <a:xfrm>
-            <a:off x="15828263" y="3474720"/>
-            <a:ext cx="0" cy="274319"/>
+          <a:xfrm flipV="1">
+            <a:off x="11987784" y="2720339"/>
+            <a:ext cx="274320" cy="22861"/>
           </a:xfrm>
           <a:prstGeom prst="line">
             <a:avLst/>
           </a:prstGeom>
           <a:ln w="28575">
             <a:solidFill>
-              <a:srgbClr val="F5EFE9"/>
+              <a:srgbClr val="E6ECF2"/>
             </a:solidFill>
+            <a:tailEnd type="triangle" w="med" len="med"/>
           </a:ln>
         </p:spPr>
         <p:style>
@@ -17758,15 +17860,15 @@
         </p:nvCxnSpPr>
         <p:spPr>
           <a:xfrm>
-            <a:off x="15828263" y="3749039"/>
-            <a:ext cx="2322577" cy="0"/>
+            <a:off x="15828263" y="3474720"/>
+            <a:ext cx="0" cy="274319"/>
           </a:xfrm>
           <a:prstGeom prst="line">
             <a:avLst/>
           </a:prstGeom>
           <a:ln w="28575">
             <a:solidFill>
-              <a:srgbClr val="F5EFE9"/>
+              <a:srgbClr val="E6ECF2"/>
             </a:solidFill>
           </a:ln>
         </p:spPr>
@@ -17792,18 +17894,17 @@
           <p:nvPr/>
         </p:nvCxnSpPr>
         <p:spPr>
-          <a:xfrm flipH="1">
-            <a:off x="18150839" y="3749039"/>
-            <a:ext cx="1" cy="320041"/>
+          <a:xfrm>
+            <a:off x="15828263" y="3749039"/>
+            <a:ext cx="2322577" cy="0"/>
           </a:xfrm>
           <a:prstGeom prst="line">
             <a:avLst/>
           </a:prstGeom>
           <a:ln w="28575">
             <a:solidFill>
-              <a:srgbClr val="F5EFE9"/>
+              <a:srgbClr val="E6ECF2"/>
             </a:solidFill>
-            <a:tailEnd type="triangle" w="med" len="med"/>
           </a:ln>
         </p:spPr>
         <p:style>
@@ -17828,312 +17929,16 @@
           <p:nvPr/>
         </p:nvCxnSpPr>
         <p:spPr>
-          <a:xfrm>
-            <a:off x="18150839" y="4937760"/>
-            <a:ext cx="0" cy="320040"/>
+          <a:xfrm flipH="1">
+            <a:off x="18150839" y="3749039"/>
+            <a:ext cx="1" cy="320041"/>
           </a:xfrm>
           <a:prstGeom prst="line">
             <a:avLst/>
           </a:prstGeom>
           <a:ln w="28575">
             <a:solidFill>
-              <a:srgbClr val="F5EFE9"/>
-            </a:solidFill>
-            <a:tailEnd type="triangle" w="med" len="med"/>
-          </a:ln>
-        </p:spPr>
-        <p:style>
-          <a:lnRef idx="2">
-            <a:schemeClr val="accent1"/>
-          </a:lnRef>
-          <a:fillRef idx="0">
-            <a:schemeClr val="accent1"/>
-          </a:fillRef>
-          <a:effectRef idx="1">
-            <a:schemeClr val="accent1"/>
-          </a:effectRef>
-          <a:fontRef idx="minor">
-            <a:schemeClr val="tx1"/>
-          </a:fontRef>
-        </p:style>
-      </p:cxnSp>
-      <p:sp>
-        <p:nvSpPr>
-          <p:cNvPr id="91" name="TextBox 90"/>
-          <p:cNvSpPr txBox="1"/>
-          <p:nvPr/>
-        </p:nvSpPr>
-        <p:spPr>
-          <a:xfrm>
-            <a:off x="18214848" y="4960620"/>
-            <a:ext cx="1097280" cy="274320"/>
-          </a:xfrm>
-          <a:prstGeom prst="rect">
-            <a:avLst/>
-          </a:prstGeom>
-          <a:noFill/>
-        </p:spPr>
-        <p:txBody>
-          <a:bodyPr wrap="square" anchor="ctr" lIns="0" rIns="0" tIns="54864" bIns="54864">
-            <a:spAutoFit/>
-          </a:bodyPr>
-          <a:lstStyle/>
-          <a:p>
-            <a:pPr algn="l">
-              <a:spcAft>
-                <a:spcPts val="600"/>
-              </a:spcAft>
-            </a:pPr>
-            <a:r>
-              <a:rPr sz="1100" b="1">
-                <a:solidFill>
-                  <a:srgbClr val="F5EFE9"/>
-                </a:solidFill>
-              </a:rPr>
-              <a:t>no</a:t>
-            </a:r>
-          </a:p>
-        </p:txBody>
-      </p:sp>
-      <p:cxnSp>
-        <p:nvCxnSpPr>
-          <p:cNvPr id="92" name="Connector 91"/>
-          <p:cNvCxnSpPr/>
-          <p:nvPr/>
-        </p:nvCxnSpPr>
-        <p:spPr>
-          <a:xfrm flipH="1">
-            <a:off x="16642080" y="4503420"/>
-            <a:ext cx="457200" cy="0"/>
-          </a:xfrm>
-          <a:prstGeom prst="line">
-            <a:avLst/>
-          </a:prstGeom>
-          <a:ln w="28575">
-            <a:solidFill>
-              <a:srgbClr val="F5EFE9"/>
-            </a:solidFill>
-            <a:tailEnd type="triangle" w="med" len="med"/>
-          </a:ln>
-        </p:spPr>
-        <p:style>
-          <a:lnRef idx="2">
-            <a:schemeClr val="accent1"/>
-          </a:lnRef>
-          <a:fillRef idx="0">
-            <a:schemeClr val="accent1"/>
-          </a:fillRef>
-          <a:effectRef idx="1">
-            <a:schemeClr val="accent1"/>
-          </a:effectRef>
-          <a:fontRef idx="minor">
-            <a:schemeClr val="tx1"/>
-          </a:fontRef>
-        </p:style>
-      </p:cxnSp>
-      <p:sp>
-        <p:nvSpPr>
-          <p:cNvPr id="93" name="TextBox 92"/>
-          <p:cNvSpPr txBox="1"/>
-          <p:nvPr/>
-        </p:nvSpPr>
-        <p:spPr>
-          <a:xfrm>
-            <a:off x="16322039" y="4192524"/>
-            <a:ext cx="1097280" cy="274320"/>
-          </a:xfrm>
-          <a:prstGeom prst="rect">
-            <a:avLst/>
-          </a:prstGeom>
-          <a:noFill/>
-        </p:spPr>
-        <p:txBody>
-          <a:bodyPr wrap="square" anchor="b" lIns="0" rIns="0" tIns="54864" bIns="54864">
-            <a:spAutoFit/>
-          </a:bodyPr>
-          <a:lstStyle/>
-          <a:p>
-            <a:pPr algn="ctr">
-              <a:spcAft>
-                <a:spcPts val="600"/>
-              </a:spcAft>
-            </a:pPr>
-            <a:r>
-              <a:rPr sz="1100" b="1">
-                <a:solidFill>
-                  <a:srgbClr val="F5EFE9"/>
-                </a:solidFill>
-              </a:rPr>
-              <a:t>yes</a:t>
-            </a:r>
-          </a:p>
-        </p:txBody>
-      </p:sp>
-      <p:cxnSp>
-        <p:nvCxnSpPr>
-          <p:cNvPr id="94" name="Connector 93"/>
-          <p:cNvCxnSpPr/>
-          <p:nvPr/>
-        </p:nvCxnSpPr>
-        <p:spPr>
-          <a:xfrm>
-            <a:off x="15453359" y="4937760"/>
-            <a:ext cx="0" cy="320040"/>
-          </a:xfrm>
-          <a:prstGeom prst="line">
-            <a:avLst/>
-          </a:prstGeom>
-          <a:ln w="28575">
-            <a:solidFill>
-              <a:srgbClr val="F5EFE9"/>
-            </a:solidFill>
-            <a:tailEnd type="triangle" w="med" len="med"/>
-          </a:ln>
-        </p:spPr>
-        <p:style>
-          <a:lnRef idx="2">
-            <a:schemeClr val="accent1"/>
-          </a:lnRef>
-          <a:fillRef idx="0">
-            <a:schemeClr val="accent1"/>
-          </a:fillRef>
-          <a:effectRef idx="1">
-            <a:schemeClr val="accent1"/>
-          </a:effectRef>
-          <a:fontRef idx="minor">
-            <a:schemeClr val="tx1"/>
-          </a:fontRef>
-        </p:style>
-      </p:cxnSp>
-      <p:sp>
-        <p:nvSpPr>
-          <p:cNvPr id="95" name="TextBox 94"/>
-          <p:cNvSpPr txBox="1"/>
-          <p:nvPr/>
-        </p:nvSpPr>
-        <p:spPr>
-          <a:xfrm>
-            <a:off x="15517367" y="4960620"/>
-            <a:ext cx="1097280" cy="274320"/>
-          </a:xfrm>
-          <a:prstGeom prst="rect">
-            <a:avLst/>
-          </a:prstGeom>
-          <a:noFill/>
-        </p:spPr>
-        <p:txBody>
-          <a:bodyPr wrap="square" anchor="ctr" lIns="0" rIns="0" tIns="54864" bIns="54864">
-            <a:spAutoFit/>
-          </a:bodyPr>
-          <a:lstStyle/>
-          <a:p>
-            <a:pPr algn="l">
-              <a:spcAft>
-                <a:spcPts val="600"/>
-              </a:spcAft>
-            </a:pPr>
-            <a:r>
-              <a:rPr sz="1100" b="1">
-                <a:solidFill>
-                  <a:srgbClr val="F5EFE9"/>
-                </a:solidFill>
-              </a:rPr>
-              <a:t>no</a:t>
-            </a:r>
-          </a:p>
-        </p:txBody>
-      </p:sp>
-      <p:cxnSp>
-        <p:nvCxnSpPr>
-          <p:cNvPr id="96" name="Connector 95"/>
-          <p:cNvCxnSpPr/>
-          <p:nvPr/>
-        </p:nvCxnSpPr>
-        <p:spPr>
-          <a:xfrm flipH="1">
-            <a:off x="13807440" y="4503420"/>
-            <a:ext cx="457200" cy="0"/>
-          </a:xfrm>
-          <a:prstGeom prst="line">
-            <a:avLst/>
-          </a:prstGeom>
-          <a:ln w="28575">
-            <a:solidFill>
-              <a:srgbClr val="F5EFE9"/>
-            </a:solidFill>
-            <a:tailEnd type="triangle" w="med" len="med"/>
-          </a:ln>
-        </p:spPr>
-        <p:style>
-          <a:lnRef idx="2">
-            <a:schemeClr val="accent1"/>
-          </a:lnRef>
-          <a:fillRef idx="0">
-            <a:schemeClr val="accent1"/>
-          </a:fillRef>
-          <a:effectRef idx="1">
-            <a:schemeClr val="accent1"/>
-          </a:effectRef>
-          <a:fontRef idx="minor">
-            <a:schemeClr val="tx1"/>
-          </a:fontRef>
-        </p:style>
-      </p:cxnSp>
-      <p:sp>
-        <p:nvSpPr>
-          <p:cNvPr id="97" name="TextBox 96"/>
-          <p:cNvSpPr txBox="1"/>
-          <p:nvPr/>
-        </p:nvSpPr>
-        <p:spPr>
-          <a:xfrm>
-            <a:off x="13487400" y="4192524"/>
-            <a:ext cx="1097280" cy="274320"/>
-          </a:xfrm>
-          <a:prstGeom prst="rect">
-            <a:avLst/>
-          </a:prstGeom>
-          <a:noFill/>
-        </p:spPr>
-        <p:txBody>
-          <a:bodyPr wrap="square" anchor="b" lIns="0" rIns="0" tIns="54864" bIns="54864">
-            <a:spAutoFit/>
-          </a:bodyPr>
-          <a:lstStyle/>
-          <a:p>
-            <a:pPr algn="ctr">
-              <a:spcAft>
-                <a:spcPts val="600"/>
-              </a:spcAft>
-            </a:pPr>
-            <a:r>
-              <a:rPr sz="1100" b="1">
-                <a:solidFill>
-                  <a:srgbClr val="F5EFE9"/>
-                </a:solidFill>
-              </a:rPr>
-              <a:t>yes</a:t>
-            </a:r>
-          </a:p>
-        </p:txBody>
-      </p:sp>
-      <p:cxnSp>
-        <p:nvCxnSpPr>
-          <p:cNvPr id="98" name="Connector 97"/>
-          <p:cNvCxnSpPr/>
-          <p:nvPr/>
-        </p:nvCxnSpPr>
-        <p:spPr>
-          <a:xfrm flipH="1">
-            <a:off x="11155680" y="4503420"/>
-            <a:ext cx="457200" cy="0"/>
-          </a:xfrm>
-          <a:prstGeom prst="line">
-            <a:avLst/>
-          </a:prstGeom>
-          <a:ln w="28575">
-            <a:solidFill>
-              <a:srgbClr val="F5EFE9"/>
+              <a:srgbClr val="E6ECF2"/>
             </a:solidFill>
             <a:tailEnd type="triangle" w="med" len="med"/>
           </a:ln>
@@ -18155,21 +17960,317 @@
       </p:cxnSp>
       <p:cxnSp>
         <p:nvCxnSpPr>
+          <p:cNvPr id="91" name="Connector 90"/>
+          <p:cNvCxnSpPr/>
+          <p:nvPr/>
+        </p:nvCxnSpPr>
+        <p:spPr>
+          <a:xfrm>
+            <a:off x="18150839" y="4937760"/>
+            <a:ext cx="0" cy="320040"/>
+          </a:xfrm>
+          <a:prstGeom prst="line">
+            <a:avLst/>
+          </a:prstGeom>
+          <a:ln w="28575">
+            <a:solidFill>
+              <a:srgbClr val="E6ECF2"/>
+            </a:solidFill>
+            <a:tailEnd type="triangle" w="med" len="med"/>
+          </a:ln>
+        </p:spPr>
+        <p:style>
+          <a:lnRef idx="2">
+            <a:schemeClr val="accent1"/>
+          </a:lnRef>
+          <a:fillRef idx="0">
+            <a:schemeClr val="accent1"/>
+          </a:fillRef>
+          <a:effectRef idx="1">
+            <a:schemeClr val="accent1"/>
+          </a:effectRef>
+          <a:fontRef idx="minor">
+            <a:schemeClr val="tx1"/>
+          </a:fontRef>
+        </p:style>
+      </p:cxnSp>
+      <p:sp>
+        <p:nvSpPr>
+          <p:cNvPr id="92" name="TextBox 91"/>
+          <p:cNvSpPr txBox="1"/>
+          <p:nvPr/>
+        </p:nvSpPr>
+        <p:spPr>
+          <a:xfrm>
+            <a:off x="18214848" y="4960620"/>
+            <a:ext cx="1097280" cy="274320"/>
+          </a:xfrm>
+          <a:prstGeom prst="rect">
+            <a:avLst/>
+          </a:prstGeom>
+          <a:noFill/>
+        </p:spPr>
+        <p:txBody>
+          <a:bodyPr wrap="square" anchor="ctr" lIns="0" rIns="0" tIns="54864" bIns="54864">
+            <a:spAutoFit/>
+          </a:bodyPr>
+          <a:lstStyle/>
+          <a:p>
+            <a:pPr algn="l">
+              <a:spcAft>
+                <a:spcPts val="600"/>
+              </a:spcAft>
+            </a:pPr>
+            <a:r>
+              <a:rPr sz="1100" b="1">
+                <a:solidFill>
+                  <a:srgbClr val="E6ECF2"/>
+                </a:solidFill>
+              </a:rPr>
+              <a:t>no</a:t>
+            </a:r>
+          </a:p>
+        </p:txBody>
+      </p:sp>
+      <p:cxnSp>
+        <p:nvCxnSpPr>
+          <p:cNvPr id="93" name="Connector 92"/>
+          <p:cNvCxnSpPr/>
+          <p:nvPr/>
+        </p:nvCxnSpPr>
+        <p:spPr>
+          <a:xfrm flipH="1">
+            <a:off x="16642080" y="4503420"/>
+            <a:ext cx="457200" cy="0"/>
+          </a:xfrm>
+          <a:prstGeom prst="line">
+            <a:avLst/>
+          </a:prstGeom>
+          <a:ln w="28575">
+            <a:solidFill>
+              <a:srgbClr val="E6ECF2"/>
+            </a:solidFill>
+            <a:tailEnd type="triangle" w="med" len="med"/>
+          </a:ln>
+        </p:spPr>
+        <p:style>
+          <a:lnRef idx="2">
+            <a:schemeClr val="accent1"/>
+          </a:lnRef>
+          <a:fillRef idx="0">
+            <a:schemeClr val="accent1"/>
+          </a:fillRef>
+          <a:effectRef idx="1">
+            <a:schemeClr val="accent1"/>
+          </a:effectRef>
+          <a:fontRef idx="minor">
+            <a:schemeClr val="tx1"/>
+          </a:fontRef>
+        </p:style>
+      </p:cxnSp>
+      <p:sp>
+        <p:nvSpPr>
+          <p:cNvPr id="94" name="TextBox 93"/>
+          <p:cNvSpPr txBox="1"/>
+          <p:nvPr/>
+        </p:nvSpPr>
+        <p:spPr>
+          <a:xfrm>
+            <a:off x="16322039" y="4192524"/>
+            <a:ext cx="1097280" cy="274320"/>
+          </a:xfrm>
+          <a:prstGeom prst="rect">
+            <a:avLst/>
+          </a:prstGeom>
+          <a:noFill/>
+        </p:spPr>
+        <p:txBody>
+          <a:bodyPr wrap="square" anchor="b" lIns="0" rIns="0" tIns="54864" bIns="54864">
+            <a:spAutoFit/>
+          </a:bodyPr>
+          <a:lstStyle/>
+          <a:p>
+            <a:pPr algn="ctr">
+              <a:spcAft>
+                <a:spcPts val="600"/>
+              </a:spcAft>
+            </a:pPr>
+            <a:r>
+              <a:rPr sz="1100" b="1">
+                <a:solidFill>
+                  <a:srgbClr val="E6ECF2"/>
+                </a:solidFill>
+              </a:rPr>
+              <a:t>yes</a:t>
+            </a:r>
+          </a:p>
+        </p:txBody>
+      </p:sp>
+      <p:cxnSp>
+        <p:nvCxnSpPr>
+          <p:cNvPr id="95" name="Connector 94"/>
+          <p:cNvCxnSpPr/>
+          <p:nvPr/>
+        </p:nvCxnSpPr>
+        <p:spPr>
+          <a:xfrm>
+            <a:off x="15453359" y="4937760"/>
+            <a:ext cx="0" cy="320040"/>
+          </a:xfrm>
+          <a:prstGeom prst="line">
+            <a:avLst/>
+          </a:prstGeom>
+          <a:ln w="28575">
+            <a:solidFill>
+              <a:srgbClr val="E6ECF2"/>
+            </a:solidFill>
+            <a:tailEnd type="triangle" w="med" len="med"/>
+          </a:ln>
+        </p:spPr>
+        <p:style>
+          <a:lnRef idx="2">
+            <a:schemeClr val="accent1"/>
+          </a:lnRef>
+          <a:fillRef idx="0">
+            <a:schemeClr val="accent1"/>
+          </a:fillRef>
+          <a:effectRef idx="1">
+            <a:schemeClr val="accent1"/>
+          </a:effectRef>
+          <a:fontRef idx="minor">
+            <a:schemeClr val="tx1"/>
+          </a:fontRef>
+        </p:style>
+      </p:cxnSp>
+      <p:sp>
+        <p:nvSpPr>
+          <p:cNvPr id="96" name="TextBox 95"/>
+          <p:cNvSpPr txBox="1"/>
+          <p:nvPr/>
+        </p:nvSpPr>
+        <p:spPr>
+          <a:xfrm>
+            <a:off x="15517367" y="4960620"/>
+            <a:ext cx="1097280" cy="274320"/>
+          </a:xfrm>
+          <a:prstGeom prst="rect">
+            <a:avLst/>
+          </a:prstGeom>
+          <a:noFill/>
+        </p:spPr>
+        <p:txBody>
+          <a:bodyPr wrap="square" anchor="ctr" lIns="0" rIns="0" tIns="54864" bIns="54864">
+            <a:spAutoFit/>
+          </a:bodyPr>
+          <a:lstStyle/>
+          <a:p>
+            <a:pPr algn="l">
+              <a:spcAft>
+                <a:spcPts val="600"/>
+              </a:spcAft>
+            </a:pPr>
+            <a:r>
+              <a:rPr sz="1100" b="1">
+                <a:solidFill>
+                  <a:srgbClr val="E6ECF2"/>
+                </a:solidFill>
+              </a:rPr>
+              <a:t>no</a:t>
+            </a:r>
+          </a:p>
+        </p:txBody>
+      </p:sp>
+      <p:cxnSp>
+        <p:nvCxnSpPr>
+          <p:cNvPr id="97" name="Connector 96"/>
+          <p:cNvCxnSpPr/>
+          <p:nvPr/>
+        </p:nvCxnSpPr>
+        <p:spPr>
+          <a:xfrm flipH="1">
+            <a:off x="13807440" y="4503420"/>
+            <a:ext cx="457200" cy="0"/>
+          </a:xfrm>
+          <a:prstGeom prst="line">
+            <a:avLst/>
+          </a:prstGeom>
+          <a:ln w="28575">
+            <a:solidFill>
+              <a:srgbClr val="E6ECF2"/>
+            </a:solidFill>
+            <a:tailEnd type="triangle" w="med" len="med"/>
+          </a:ln>
+        </p:spPr>
+        <p:style>
+          <a:lnRef idx="2">
+            <a:schemeClr val="accent1"/>
+          </a:lnRef>
+          <a:fillRef idx="0">
+            <a:schemeClr val="accent1"/>
+          </a:fillRef>
+          <a:effectRef idx="1">
+            <a:schemeClr val="accent1"/>
+          </a:effectRef>
+          <a:fontRef idx="minor">
+            <a:schemeClr val="tx1"/>
+          </a:fontRef>
+        </p:style>
+      </p:cxnSp>
+      <p:sp>
+        <p:nvSpPr>
+          <p:cNvPr id="98" name="TextBox 97"/>
+          <p:cNvSpPr txBox="1"/>
+          <p:nvPr/>
+        </p:nvSpPr>
+        <p:spPr>
+          <a:xfrm>
+            <a:off x="13487400" y="4192524"/>
+            <a:ext cx="1097280" cy="274320"/>
+          </a:xfrm>
+          <a:prstGeom prst="rect">
+            <a:avLst/>
+          </a:prstGeom>
+          <a:noFill/>
+        </p:spPr>
+        <p:txBody>
+          <a:bodyPr wrap="square" anchor="b" lIns="0" rIns="0" tIns="54864" bIns="54864">
+            <a:spAutoFit/>
+          </a:bodyPr>
+          <a:lstStyle/>
+          <a:p>
+            <a:pPr algn="ctr">
+              <a:spcAft>
+                <a:spcPts val="600"/>
+              </a:spcAft>
+            </a:pPr>
+            <a:r>
+              <a:rPr sz="1100" b="1">
+                <a:solidFill>
+                  <a:srgbClr val="E6ECF2"/>
+                </a:solidFill>
+              </a:rPr>
+              <a:t>yes</a:t>
+            </a:r>
+          </a:p>
+        </p:txBody>
+      </p:sp>
+      <p:cxnSp>
+        <p:nvCxnSpPr>
           <p:cNvPr id="99" name="Connector 98"/>
           <p:cNvCxnSpPr/>
           <p:nvPr/>
         </p:nvCxnSpPr>
         <p:spPr>
           <a:xfrm flipH="1">
-            <a:off x="7955279" y="4503420"/>
-            <a:ext cx="457201" cy="0"/>
+            <a:off x="11155680" y="4503420"/>
+            <a:ext cx="457200" cy="0"/>
           </a:xfrm>
           <a:prstGeom prst="line">
             <a:avLst/>
           </a:prstGeom>
           <a:ln w="28575">
             <a:solidFill>
-              <a:srgbClr val="F5EFE9"/>
+              <a:srgbClr val="E6ECF2"/>
             </a:solidFill>
             <a:tailEnd type="triangle" w="med" len="med"/>
           </a:ln>
@@ -18196,164 +18297,16 @@
           <p:nvPr/>
         </p:nvCxnSpPr>
         <p:spPr>
-          <a:xfrm flipV="1">
-            <a:off x="6949440" y="3721608"/>
-            <a:ext cx="0" cy="347472"/>
+          <a:xfrm flipH="1">
+            <a:off x="7955279" y="4503420"/>
+            <a:ext cx="457201" cy="0"/>
           </a:xfrm>
           <a:prstGeom prst="line">
             <a:avLst/>
           </a:prstGeom>
           <a:ln w="28575">
             <a:solidFill>
-              <a:srgbClr val="F5EFE9"/>
-            </a:solidFill>
-            <a:tailEnd type="triangle" w="med" len="med"/>
-          </a:ln>
-        </p:spPr>
-        <p:style>
-          <a:lnRef idx="2">
-            <a:schemeClr val="accent1"/>
-          </a:lnRef>
-          <a:fillRef idx="0">
-            <a:schemeClr val="accent1"/>
-          </a:fillRef>
-          <a:effectRef idx="1">
-            <a:schemeClr val="accent1"/>
-          </a:effectRef>
-          <a:fontRef idx="minor">
-            <a:schemeClr val="tx1"/>
-          </a:fontRef>
-        </p:style>
-      </p:cxnSp>
-      <p:sp>
-        <p:nvSpPr>
-          <p:cNvPr id="101" name="TextBox 100"/>
-          <p:cNvSpPr txBox="1"/>
-          <p:nvPr/>
-        </p:nvSpPr>
-        <p:spPr>
-          <a:xfrm>
-            <a:off x="7013448" y="3758183"/>
-            <a:ext cx="1097280" cy="274320"/>
-          </a:xfrm>
-          <a:prstGeom prst="rect">
-            <a:avLst/>
-          </a:prstGeom>
-          <a:noFill/>
-        </p:spPr>
-        <p:txBody>
-          <a:bodyPr wrap="square" anchor="ctr" lIns="0" rIns="0" tIns="54864" bIns="54864">
-            <a:spAutoFit/>
-          </a:bodyPr>
-          <a:lstStyle/>
-          <a:p>
-            <a:pPr algn="l">
-              <a:spcAft>
-                <a:spcPts val="600"/>
-              </a:spcAft>
-            </a:pPr>
-            <a:r>
-              <a:rPr sz="1100" b="1">
-                <a:solidFill>
-                  <a:srgbClr val="F5EFE9"/>
-                </a:solidFill>
-              </a:rPr>
-              <a:t>no</a:t>
-            </a:r>
-          </a:p>
-        </p:txBody>
-      </p:sp>
-      <p:cxnSp>
-        <p:nvCxnSpPr>
-          <p:cNvPr id="102" name="Connector 101"/>
-          <p:cNvCxnSpPr/>
-          <p:nvPr/>
-        </p:nvCxnSpPr>
-        <p:spPr>
-          <a:xfrm flipH="1">
-            <a:off x="5532120" y="4503420"/>
-            <a:ext cx="411480" cy="0"/>
-          </a:xfrm>
-          <a:prstGeom prst="line">
-            <a:avLst/>
-          </a:prstGeom>
-          <a:ln w="28575">
-            <a:solidFill>
-              <a:srgbClr val="F5EFE9"/>
-            </a:solidFill>
-            <a:tailEnd type="triangle" w="med" len="med"/>
-          </a:ln>
-        </p:spPr>
-        <p:style>
-          <a:lnRef idx="2">
-            <a:schemeClr val="accent1"/>
-          </a:lnRef>
-          <a:fillRef idx="0">
-            <a:schemeClr val="accent1"/>
-          </a:fillRef>
-          <a:effectRef idx="1">
-            <a:schemeClr val="accent1"/>
-          </a:effectRef>
-          <a:fontRef idx="minor">
-            <a:schemeClr val="tx1"/>
-          </a:fontRef>
-        </p:style>
-      </p:cxnSp>
-      <p:sp>
-        <p:nvSpPr>
-          <p:cNvPr id="103" name="TextBox 102"/>
-          <p:cNvSpPr txBox="1"/>
-          <p:nvPr/>
-        </p:nvSpPr>
-        <p:spPr>
-          <a:xfrm>
-            <a:off x="5189220" y="4192524"/>
-            <a:ext cx="1097280" cy="274320"/>
-          </a:xfrm>
-          <a:prstGeom prst="rect">
-            <a:avLst/>
-          </a:prstGeom>
-          <a:noFill/>
-        </p:spPr>
-        <p:txBody>
-          <a:bodyPr wrap="square" anchor="b" lIns="0" rIns="0" tIns="54864" bIns="54864">
-            <a:spAutoFit/>
-          </a:bodyPr>
-          <a:lstStyle/>
-          <a:p>
-            <a:pPr algn="ctr">
-              <a:spcAft>
-                <a:spcPts val="600"/>
-              </a:spcAft>
-            </a:pPr>
-            <a:r>
-              <a:rPr sz="1100" b="1">
-                <a:solidFill>
-                  <a:srgbClr val="F5EFE9"/>
-                </a:solidFill>
-              </a:rPr>
-              <a:t>yes</a:t>
-            </a:r>
-          </a:p>
-        </p:txBody>
-      </p:sp>
-      <p:cxnSp>
-        <p:nvCxnSpPr>
-          <p:cNvPr id="104" name="Connector 103"/>
-          <p:cNvCxnSpPr/>
-          <p:nvPr/>
-        </p:nvCxnSpPr>
-        <p:spPr>
-          <a:xfrm flipH="1">
-            <a:off x="2660904" y="4503420"/>
-            <a:ext cx="402336" cy="0"/>
-          </a:xfrm>
-          <a:prstGeom prst="line">
-            <a:avLst/>
-          </a:prstGeom>
-          <a:ln w="28575">
-            <a:solidFill>
-              <a:srgbClr val="F5EFE9"/>
+              <a:srgbClr val="E6ECF2"/>
             </a:solidFill>
             <a:tailEnd type="triangle" w="med" len="med"/>
           </a:ln>
@@ -18375,22 +18328,171 @@
       </p:cxnSp>
       <p:cxnSp>
         <p:nvCxnSpPr>
+          <p:cNvPr id="101" name="Connector 100"/>
+          <p:cNvCxnSpPr/>
+          <p:nvPr/>
+        </p:nvCxnSpPr>
+        <p:spPr>
+          <a:xfrm flipV="1">
+            <a:off x="6949440" y="3721608"/>
+            <a:ext cx="0" cy="347472"/>
+          </a:xfrm>
+          <a:prstGeom prst="line">
+            <a:avLst/>
+          </a:prstGeom>
+          <a:ln w="28575">
+            <a:solidFill>
+              <a:srgbClr val="E6ECF2"/>
+            </a:solidFill>
+            <a:tailEnd type="triangle" w="med" len="med"/>
+          </a:ln>
+        </p:spPr>
+        <p:style>
+          <a:lnRef idx="2">
+            <a:schemeClr val="accent1"/>
+          </a:lnRef>
+          <a:fillRef idx="0">
+            <a:schemeClr val="accent1"/>
+          </a:fillRef>
+          <a:effectRef idx="1">
+            <a:schemeClr val="accent1"/>
+          </a:effectRef>
+          <a:fontRef idx="minor">
+            <a:schemeClr val="tx1"/>
+          </a:fontRef>
+        </p:style>
+      </p:cxnSp>
+      <p:sp>
+        <p:nvSpPr>
+          <p:cNvPr id="102" name="TextBox 101"/>
+          <p:cNvSpPr txBox="1"/>
+          <p:nvPr/>
+        </p:nvSpPr>
+        <p:spPr>
+          <a:xfrm>
+            <a:off x="7013448" y="3758183"/>
+            <a:ext cx="1097280" cy="274320"/>
+          </a:xfrm>
+          <a:prstGeom prst="rect">
+            <a:avLst/>
+          </a:prstGeom>
+          <a:noFill/>
+        </p:spPr>
+        <p:txBody>
+          <a:bodyPr wrap="square" anchor="ctr" lIns="0" rIns="0" tIns="54864" bIns="54864">
+            <a:spAutoFit/>
+          </a:bodyPr>
+          <a:lstStyle/>
+          <a:p>
+            <a:pPr algn="l">
+              <a:spcAft>
+                <a:spcPts val="600"/>
+              </a:spcAft>
+            </a:pPr>
+            <a:r>
+              <a:rPr sz="1100" b="1">
+                <a:solidFill>
+                  <a:srgbClr val="E6ECF2"/>
+                </a:solidFill>
+              </a:rPr>
+              <a:t>no</a:t>
+            </a:r>
+          </a:p>
+        </p:txBody>
+      </p:sp>
+      <p:cxnSp>
+        <p:nvCxnSpPr>
+          <p:cNvPr id="103" name="Connector 102"/>
+          <p:cNvCxnSpPr/>
+          <p:nvPr/>
+        </p:nvCxnSpPr>
+        <p:spPr>
+          <a:xfrm flipH="1">
+            <a:off x="5532120" y="4503420"/>
+            <a:ext cx="411480" cy="0"/>
+          </a:xfrm>
+          <a:prstGeom prst="line">
+            <a:avLst/>
+          </a:prstGeom>
+          <a:ln w="28575">
+            <a:solidFill>
+              <a:srgbClr val="E6ECF2"/>
+            </a:solidFill>
+            <a:tailEnd type="triangle" w="med" len="med"/>
+          </a:ln>
+        </p:spPr>
+        <p:style>
+          <a:lnRef idx="2">
+            <a:schemeClr val="accent1"/>
+          </a:lnRef>
+          <a:fillRef idx="0">
+            <a:schemeClr val="accent1"/>
+          </a:fillRef>
+          <a:effectRef idx="1">
+            <a:schemeClr val="accent1"/>
+          </a:effectRef>
+          <a:fontRef idx="minor">
+            <a:schemeClr val="tx1"/>
+          </a:fontRef>
+        </p:style>
+      </p:cxnSp>
+      <p:sp>
+        <p:nvSpPr>
+          <p:cNvPr id="104" name="TextBox 103"/>
+          <p:cNvSpPr txBox="1"/>
+          <p:nvPr/>
+        </p:nvSpPr>
+        <p:spPr>
+          <a:xfrm>
+            <a:off x="5189220" y="4192524"/>
+            <a:ext cx="1097280" cy="274320"/>
+          </a:xfrm>
+          <a:prstGeom prst="rect">
+            <a:avLst/>
+          </a:prstGeom>
+          <a:noFill/>
+        </p:spPr>
+        <p:txBody>
+          <a:bodyPr wrap="square" anchor="b" lIns="0" rIns="0" tIns="54864" bIns="54864">
+            <a:spAutoFit/>
+          </a:bodyPr>
+          <a:lstStyle/>
+          <a:p>
+            <a:pPr algn="ctr">
+              <a:spcAft>
+                <a:spcPts val="600"/>
+              </a:spcAft>
+            </a:pPr>
+            <a:r>
+              <a:rPr sz="1100" b="1">
+                <a:solidFill>
+                  <a:srgbClr val="E6ECF2"/>
+                </a:solidFill>
+              </a:rPr>
+              <a:t>yes</a:t>
+            </a:r>
+          </a:p>
+        </p:txBody>
+      </p:sp>
+      <p:cxnSp>
+        <p:nvCxnSpPr>
           <p:cNvPr id="105" name="Connector 104"/>
           <p:cNvCxnSpPr/>
           <p:nvPr/>
         </p:nvCxnSpPr>
         <p:spPr>
-          <a:xfrm>
-            <a:off x="4297680" y="4937760"/>
-            <a:ext cx="0" cy="411480"/>
+          <a:xfrm flipH="1">
+            <a:off x="2660904" y="4503420"/>
+            <a:ext cx="402336" cy="0"/>
           </a:xfrm>
           <a:prstGeom prst="line">
             <a:avLst/>
           </a:prstGeom>
           <a:ln w="28575">
             <a:solidFill>
-              <a:srgbClr val="F5EFE9"/>
+              <a:srgbClr val="E6ECF2"/>
             </a:solidFill>
+            <a:tailEnd type="triangle" w="med" len="med"/>
           </a:ln>
         </p:spPr>
         <p:style>
@@ -18416,15 +18518,15 @@
         </p:nvCxnSpPr>
         <p:spPr>
           <a:xfrm>
-            <a:off x="4297680" y="5349240"/>
-            <a:ext cx="5486400" cy="0"/>
+            <a:off x="4297680" y="4937760"/>
+            <a:ext cx="0" cy="411480"/>
           </a:xfrm>
           <a:prstGeom prst="line">
             <a:avLst/>
           </a:prstGeom>
           <a:ln w="28575">
             <a:solidFill>
-              <a:srgbClr val="F5EFE9"/>
+              <a:srgbClr val="E6ECF2"/>
             </a:solidFill>
           </a:ln>
         </p:spPr>
@@ -18450,92 +18552,17 @@
           <p:nvPr/>
         </p:nvCxnSpPr>
         <p:spPr>
-          <a:xfrm flipV="1">
-            <a:off x="9784080" y="4937760"/>
-            <a:ext cx="0" cy="411480"/>
+          <a:xfrm>
+            <a:off x="4297680" y="5349240"/>
+            <a:ext cx="5486400" cy="0"/>
           </a:xfrm>
           <a:prstGeom prst="line">
             <a:avLst/>
           </a:prstGeom>
           <a:ln w="28575">
             <a:solidFill>
-              <a:srgbClr val="F5EFE9"/>
+              <a:srgbClr val="E6ECF2"/>
             </a:solidFill>
-            <a:tailEnd type="triangle" w="med" len="med"/>
-          </a:ln>
-        </p:spPr>
-        <p:style>
-          <a:lnRef idx="2">
-            <a:schemeClr val="accent1"/>
-          </a:lnRef>
-          <a:fillRef idx="0">
-            <a:schemeClr val="accent1"/>
-          </a:fillRef>
-          <a:effectRef idx="1">
-            <a:schemeClr val="accent1"/>
-          </a:effectRef>
-          <a:fontRef idx="minor">
-            <a:schemeClr val="tx1"/>
-          </a:fontRef>
-        </p:style>
-      </p:cxnSp>
-      <p:sp>
-        <p:nvSpPr>
-          <p:cNvPr id="108" name="TextBox 107"/>
-          <p:cNvSpPr txBox="1"/>
-          <p:nvPr/>
-        </p:nvSpPr>
-        <p:spPr>
-          <a:xfrm>
-            <a:off x="4572000" y="5029200"/>
-            <a:ext cx="5486400" cy="365760"/>
-          </a:xfrm>
-          <a:prstGeom prst="rect">
-            <a:avLst/>
-          </a:prstGeom>
-          <a:noFill/>
-        </p:spPr>
-        <p:txBody>
-          <a:bodyPr wrap="square" anchor="b" lIns="0" rIns="0" tIns="54864" bIns="54864">
-            <a:spAutoFit/>
-          </a:bodyPr>
-          <a:lstStyle/>
-          <a:p>
-            <a:pPr algn="l">
-              <a:spcAft>
-                <a:spcPts val="600"/>
-              </a:spcAft>
-            </a:pPr>
-            <a:r>
-              <a:rPr sz="1100" b="1">
-                <a:solidFill>
-                  <a:srgbClr val="F5EFE9"/>
-                </a:solidFill>
-              </a:rPr>
-              <a:t>every 12 hours: the newest 3 months rebuilt, older rows kept</a:t>
-            </a:r>
-          </a:p>
-        </p:txBody>
-      </p:sp>
-      <p:cxnSp>
-        <p:nvCxnSpPr>
-          <p:cNvPr id="109" name="Connector 108"/>
-          <p:cNvCxnSpPr/>
-          <p:nvPr/>
-        </p:nvCxnSpPr>
-        <p:spPr>
-          <a:xfrm>
-            <a:off x="2171700" y="8732520"/>
-            <a:ext cx="0" cy="274320"/>
-          </a:xfrm>
-          <a:prstGeom prst="line">
-            <a:avLst/>
-          </a:prstGeom>
-          <a:ln w="28575">
-            <a:solidFill>
-              <a:srgbClr val="F5EFE9"/>
-            </a:solidFill>
-            <a:tailEnd type="triangle" w="med" len="med"/>
           </a:ln>
         </p:spPr>
         <p:style>
@@ -18555,13 +18582,87 @@
       </p:cxnSp>
       <p:cxnSp>
         <p:nvCxnSpPr>
+          <p:cNvPr id="108" name="Connector 107"/>
+          <p:cNvCxnSpPr/>
+          <p:nvPr/>
+        </p:nvCxnSpPr>
+        <p:spPr>
+          <a:xfrm flipV="1">
+            <a:off x="9784080" y="4937760"/>
+            <a:ext cx="0" cy="411480"/>
+          </a:xfrm>
+          <a:prstGeom prst="line">
+            <a:avLst/>
+          </a:prstGeom>
+          <a:ln w="28575">
+            <a:solidFill>
+              <a:srgbClr val="E6ECF2"/>
+            </a:solidFill>
+            <a:tailEnd type="triangle" w="med" len="med"/>
+          </a:ln>
+        </p:spPr>
+        <p:style>
+          <a:lnRef idx="2">
+            <a:schemeClr val="accent1"/>
+          </a:lnRef>
+          <a:fillRef idx="0">
+            <a:schemeClr val="accent1"/>
+          </a:fillRef>
+          <a:effectRef idx="1">
+            <a:schemeClr val="accent1"/>
+          </a:effectRef>
+          <a:fontRef idx="minor">
+            <a:schemeClr val="tx1"/>
+          </a:fontRef>
+        </p:style>
+      </p:cxnSp>
+      <p:sp>
+        <p:nvSpPr>
+          <p:cNvPr id="109" name="TextBox 108"/>
+          <p:cNvSpPr txBox="1"/>
+          <p:nvPr/>
+        </p:nvSpPr>
+        <p:spPr>
+          <a:xfrm>
+            <a:off x="4572000" y="5029200"/>
+            <a:ext cx="5486400" cy="365760"/>
+          </a:xfrm>
+          <a:prstGeom prst="rect">
+            <a:avLst/>
+          </a:prstGeom>
+          <a:noFill/>
+        </p:spPr>
+        <p:txBody>
+          <a:bodyPr wrap="square" anchor="b" lIns="0" rIns="0" tIns="54864" bIns="54864">
+            <a:spAutoFit/>
+          </a:bodyPr>
+          <a:lstStyle/>
+          <a:p>
+            <a:pPr algn="l">
+              <a:spcAft>
+                <a:spcPts val="600"/>
+              </a:spcAft>
+            </a:pPr>
+            <a:r>
+              <a:rPr sz="1100" b="1">
+                <a:solidFill>
+                  <a:srgbClr val="E6ECF2"/>
+                </a:solidFill>
+              </a:rPr>
+              <a:t>every 12 hours: the newest 3 months rebuilt, older rows kept</a:t>
+            </a:r>
+          </a:p>
+        </p:txBody>
+      </p:sp>
+      <p:cxnSp>
+        <p:nvCxnSpPr>
           <p:cNvPr id="110" name="Connector 109"/>
           <p:cNvCxnSpPr/>
           <p:nvPr/>
         </p:nvCxnSpPr>
         <p:spPr>
           <a:xfrm>
-            <a:off x="4887468" y="8732520"/>
+            <a:off x="2171700" y="8732520"/>
             <a:ext cx="0" cy="274320"/>
           </a:xfrm>
           <a:prstGeom prst="line">
@@ -18569,7 +18670,7 @@
           </a:prstGeom>
           <a:ln w="28575">
             <a:solidFill>
-              <a:srgbClr val="F5EFE9"/>
+              <a:srgbClr val="E6ECF2"/>
             </a:solidFill>
             <a:tailEnd type="triangle" w="med" len="med"/>
           </a:ln>
@@ -18597,7 +18698,7 @@
         </p:nvCxnSpPr>
         <p:spPr>
           <a:xfrm>
-            <a:off x="7603236" y="8732520"/>
+            <a:off x="4887468" y="8732520"/>
             <a:ext cx="0" cy="274320"/>
           </a:xfrm>
           <a:prstGeom prst="line">
@@ -18605,7 +18706,7 @@
           </a:prstGeom>
           <a:ln w="28575">
             <a:solidFill>
-              <a:srgbClr val="F5EFE9"/>
+              <a:srgbClr val="E6ECF2"/>
             </a:solidFill>
             <a:tailEnd type="triangle" w="med" len="med"/>
           </a:ln>
@@ -18633,7 +18734,7 @@
         </p:nvCxnSpPr>
         <p:spPr>
           <a:xfrm>
-            <a:off x="10204704" y="8732520"/>
+            <a:off x="7603236" y="8732520"/>
             <a:ext cx="0" cy="274320"/>
           </a:xfrm>
           <a:prstGeom prst="line">
@@ -18641,7 +18742,7 @@
           </a:prstGeom>
           <a:ln w="28575">
             <a:solidFill>
-              <a:srgbClr val="F5EFE9"/>
+              <a:srgbClr val="E6ECF2"/>
             </a:solidFill>
             <a:tailEnd type="triangle" w="med" len="med"/>
           </a:ln>
@@ -18669,16 +18770,17 @@
         </p:nvCxnSpPr>
         <p:spPr>
           <a:xfrm>
-            <a:off x="12829032" y="8732520"/>
-            <a:ext cx="0" cy="137160"/>
+            <a:off x="10204704" y="8732520"/>
+            <a:ext cx="0" cy="274320"/>
           </a:xfrm>
           <a:prstGeom prst="line">
             <a:avLst/>
           </a:prstGeom>
           <a:ln w="28575">
             <a:solidFill>
-              <a:srgbClr val="F5EFE9"/>
+              <a:srgbClr val="E6ECF2"/>
             </a:solidFill>
+            <a:tailEnd type="triangle" w="med" len="med"/>
           </a:ln>
         </p:spPr>
         <p:style>
@@ -18703,16 +18805,16 @@
           <p:nvPr/>
         </p:nvCxnSpPr>
         <p:spPr>
-          <a:xfrm flipH="1">
-            <a:off x="12143232" y="8869680"/>
-            <a:ext cx="685800" cy="0"/>
+          <a:xfrm>
+            <a:off x="12829032" y="8732520"/>
+            <a:ext cx="0" cy="137160"/>
           </a:xfrm>
           <a:prstGeom prst="line">
             <a:avLst/>
           </a:prstGeom>
           <a:ln w="28575">
             <a:solidFill>
-              <a:srgbClr val="F5EFE9"/>
+              <a:srgbClr val="E6ECF2"/>
             </a:solidFill>
           </a:ln>
         </p:spPr>
@@ -18738,18 +18840,17 @@
           <p:nvPr/>
         </p:nvCxnSpPr>
         <p:spPr>
-          <a:xfrm>
+          <a:xfrm flipH="1">
             <a:off x="12143232" y="8869680"/>
-            <a:ext cx="0" cy="137160"/>
+            <a:ext cx="685800" cy="0"/>
           </a:xfrm>
           <a:prstGeom prst="line">
             <a:avLst/>
           </a:prstGeom>
           <a:ln w="28575">
             <a:solidFill>
-              <a:srgbClr val="F5EFE9"/>
+              <a:srgbClr val="E6ECF2"/>
             </a:solidFill>
-            <a:tailEnd type="triangle" w="med" len="med"/>
           </a:ln>
         </p:spPr>
         <p:style>
@@ -18775,7 +18876,7 @@
         </p:nvCxnSpPr>
         <p:spPr>
           <a:xfrm>
-            <a:off x="12829032" y="8732520"/>
+            <a:off x="12143232" y="8869680"/>
             <a:ext cx="0" cy="137160"/>
           </a:xfrm>
           <a:prstGeom prst="line">
@@ -18783,8 +18884,9 @@
           </a:prstGeom>
           <a:ln w="28575">
             <a:solidFill>
-              <a:srgbClr val="F5EFE9"/>
+              <a:srgbClr val="E6ECF2"/>
             </a:solidFill>
+            <a:tailEnd type="triangle" w="med" len="med"/>
           </a:ln>
         </p:spPr>
         <p:style>
@@ -18810,15 +18912,15 @@
         </p:nvCxnSpPr>
         <p:spPr>
           <a:xfrm>
-            <a:off x="12829032" y="8869680"/>
-            <a:ext cx="685800" cy="0"/>
+            <a:off x="12829032" y="8732520"/>
+            <a:ext cx="0" cy="137160"/>
           </a:xfrm>
           <a:prstGeom prst="line">
             <a:avLst/>
           </a:prstGeom>
           <a:ln w="28575">
             <a:solidFill>
-              <a:srgbClr val="F5EFE9"/>
+              <a:srgbClr val="E6ECF2"/>
             </a:solidFill>
           </a:ln>
         </p:spPr>
@@ -18845,17 +18947,16 @@
         </p:nvCxnSpPr>
         <p:spPr>
           <a:xfrm>
-            <a:off x="13514832" y="8869680"/>
-            <a:ext cx="0" cy="137160"/>
+            <a:off x="12829032" y="8869680"/>
+            <a:ext cx="685800" cy="0"/>
           </a:xfrm>
           <a:prstGeom prst="line">
             <a:avLst/>
           </a:prstGeom>
           <a:ln w="28575">
             <a:solidFill>
-              <a:srgbClr val="F5EFE9"/>
+              <a:srgbClr val="E6ECF2"/>
             </a:solidFill>
-            <a:tailEnd type="triangle" w="med" len="med"/>
           </a:ln>
         </p:spPr>
         <p:style>
@@ -18881,7 +18982,7 @@
         </p:nvCxnSpPr>
         <p:spPr>
           <a:xfrm>
-            <a:off x="15613380" y="8732520"/>
+            <a:off x="13514832" y="8869680"/>
             <a:ext cx="0" cy="137160"/>
           </a:xfrm>
           <a:prstGeom prst="line">
@@ -18889,8 +18990,9 @@
           </a:prstGeom>
           <a:ln w="28575">
             <a:solidFill>
-              <a:srgbClr val="F5EFE9"/>
+              <a:srgbClr val="E6ECF2"/>
             </a:solidFill>
+            <a:tailEnd type="triangle" w="med" len="med"/>
           </a:ln>
         </p:spPr>
         <p:style>
@@ -18915,16 +19017,16 @@
           <p:nvPr/>
         </p:nvCxnSpPr>
         <p:spPr>
-          <a:xfrm flipH="1">
-            <a:off x="14913863" y="8869680"/>
-            <a:ext cx="699517" cy="0"/>
+          <a:xfrm>
+            <a:off x="15613380" y="8732520"/>
+            <a:ext cx="0" cy="137160"/>
           </a:xfrm>
           <a:prstGeom prst="line">
             <a:avLst/>
           </a:prstGeom>
           <a:ln w="28575">
             <a:solidFill>
-              <a:srgbClr val="F5EFE9"/>
+              <a:srgbClr val="E6ECF2"/>
             </a:solidFill>
           </a:ln>
         </p:spPr>
@@ -18950,18 +19052,17 @@
           <p:nvPr/>
         </p:nvCxnSpPr>
         <p:spPr>
-          <a:xfrm>
+          <a:xfrm flipH="1">
             <a:off x="14913863" y="8869680"/>
-            <a:ext cx="0" cy="137160"/>
+            <a:ext cx="699517" cy="0"/>
           </a:xfrm>
           <a:prstGeom prst="line">
             <a:avLst/>
           </a:prstGeom>
           <a:ln w="28575">
             <a:solidFill>
-              <a:srgbClr val="F5EFE9"/>
+              <a:srgbClr val="E6ECF2"/>
             </a:solidFill>
-            <a:tailEnd type="triangle" w="med" len="med"/>
           </a:ln>
         </p:spPr>
         <p:style>
@@ -18987,7 +19088,7 @@
         </p:nvCxnSpPr>
         <p:spPr>
           <a:xfrm>
-            <a:off x="15613380" y="8732520"/>
+            <a:off x="14913863" y="8869680"/>
             <a:ext cx="0" cy="137160"/>
           </a:xfrm>
           <a:prstGeom prst="line">
@@ -18995,8 +19096,9 @@
           </a:prstGeom>
           <a:ln w="28575">
             <a:solidFill>
-              <a:srgbClr val="F5EFE9"/>
+              <a:srgbClr val="E6ECF2"/>
             </a:solidFill>
+            <a:tailEnd type="triangle" w="med" len="med"/>
           </a:ln>
         </p:spPr>
         <p:style>
@@ -19022,15 +19124,15 @@
         </p:nvCxnSpPr>
         <p:spPr>
           <a:xfrm>
-            <a:off x="15613380" y="8869680"/>
-            <a:ext cx="699516" cy="0"/>
+            <a:off x="15613380" y="8732520"/>
+            <a:ext cx="0" cy="137160"/>
           </a:xfrm>
           <a:prstGeom prst="line">
             <a:avLst/>
           </a:prstGeom>
           <a:ln w="28575">
             <a:solidFill>
-              <a:srgbClr val="F5EFE9"/>
+              <a:srgbClr val="E6ECF2"/>
             </a:solidFill>
           </a:ln>
         </p:spPr>
@@ -19057,17 +19159,16 @@
         </p:nvCxnSpPr>
         <p:spPr>
           <a:xfrm>
-            <a:off x="16312896" y="8869680"/>
-            <a:ext cx="0" cy="137160"/>
+            <a:off x="15613380" y="8869680"/>
+            <a:ext cx="699516" cy="0"/>
           </a:xfrm>
           <a:prstGeom prst="line">
             <a:avLst/>
           </a:prstGeom>
           <a:ln w="28575">
             <a:solidFill>
-              <a:srgbClr val="F5EFE9"/>
+              <a:srgbClr val="E6ECF2"/>
             </a:solidFill>
-            <a:tailEnd type="triangle" w="med" len="med"/>
           </a:ln>
         </p:spPr>
         <p:style>
@@ -19093,15 +19194,15 @@
         </p:nvCxnSpPr>
         <p:spPr>
           <a:xfrm>
-            <a:off x="18146268" y="8732520"/>
-            <a:ext cx="0" cy="274320"/>
+            <a:off x="16312896" y="8869680"/>
+            <a:ext cx="0" cy="137160"/>
           </a:xfrm>
           <a:prstGeom prst="line">
             <a:avLst/>
           </a:prstGeom>
           <a:ln w="28575">
             <a:solidFill>
-              <a:srgbClr val="F5EFE9"/>
+              <a:srgbClr val="E6ECF2"/>
             </a:solidFill>
             <a:tailEnd type="triangle" w="med" len="med"/>
           </a:ln>
@@ -19121,9 +19222,45 @@
           </a:fontRef>
         </p:style>
       </p:cxnSp>
-      <p:sp>
-        <p:nvSpPr>
-          <p:cNvPr id="126" name="TextBox 125"/>
+      <p:cxnSp>
+        <p:nvCxnSpPr>
+          <p:cNvPr id="126" name="Connector 125"/>
+          <p:cNvCxnSpPr/>
+          <p:nvPr/>
+        </p:nvCxnSpPr>
+        <p:spPr>
+          <a:xfrm>
+            <a:off x="18146268" y="8732520"/>
+            <a:ext cx="0" cy="274320"/>
+          </a:xfrm>
+          <a:prstGeom prst="line">
+            <a:avLst/>
+          </a:prstGeom>
+          <a:ln w="28575">
+            <a:solidFill>
+              <a:srgbClr val="E6ECF2"/>
+            </a:solidFill>
+            <a:tailEnd type="triangle" w="med" len="med"/>
+          </a:ln>
+        </p:spPr>
+        <p:style>
+          <a:lnRef idx="2">
+            <a:schemeClr val="accent1"/>
+          </a:lnRef>
+          <a:fillRef idx="0">
+            <a:schemeClr val="accent1"/>
+          </a:fillRef>
+          <a:effectRef idx="1">
+            <a:schemeClr val="accent1"/>
+          </a:effectRef>
+          <a:fontRef idx="minor">
+            <a:schemeClr val="tx1"/>
+          </a:fontRef>
+        </p:style>
+      </p:cxnSp>
+      <p:sp>
+        <p:nvSpPr>
+          <p:cNvPr id="127" name="TextBox 126"/>
           <p:cNvSpPr txBox="1"/>
           <p:nvPr/>
         </p:nvSpPr>
@@ -19151,10 +19288,10 @@
             <a:r>
               <a:rPr sz="1200" b="0">
                 <a:solidFill>
-                  <a:srgbClr val="F5EFE9"/>
-                </a:solidFill>
-              </a:rPr>
-              <a:t>Every box in the map is one database object the domains read: seven rolling snapshot tables, the SA aged-balance table with its lookup seed, and eight CMS views. Numbers are the order of one rollout; orange diamonds are gates: yes continues, no stops the rollout there. The loop under the second row is the twice-daily rolling refresh (3 months rebuilt, 24 kept; 6 months at CityCorp and Odessa).</a:t>
+                  <a:srgbClr val="E6ECF2"/>
+                </a:solidFill>
+              </a:rPr>
+              <a:t>Every box in the map is one database object the domains read: seven rolling snapshot tables, the SA aged-balance table with its lookup seed, and eight CMS views. Numbers are the order of one rollout; blue diamonds are gates: yes continues, no stops the rollout there. The loop under the second row is the twice-daily rolling refresh (3 months rebuilt, 24 kept; 6 months at CityCorp and Odessa).</a:t>
             </a:r>
           </a:p>
         </p:txBody>
@@ -19179,7 +19316,51 @@
       <p:grpSpPr/>
       <p:sp>
         <p:nvSpPr>
-          <p:cNvPr id="2" name="TextBox 1"/>
+          <p:cNvPr id="2" name="Rectangle 1"/>
+          <p:cNvSpPr/>
+          <p:nvPr/>
+        </p:nvSpPr>
+        <p:spPr>
+          <a:xfrm>
+            <a:off x="0" y="0"/>
+            <a:ext cx="20116800" cy="11315700"/>
+          </a:xfrm>
+          <a:prstGeom prst="rect">
+            <a:avLst/>
+          </a:prstGeom>
+          <a:solidFill>
+            <a:srgbClr val="0B1723"/>
+          </a:solidFill>
+          <a:ln>
+            <a:noFill/>
+          </a:ln>
+          <a:effectLst/>
+        </p:spPr>
+        <p:style>
+          <a:lnRef idx="1">
+            <a:schemeClr val="accent1"/>
+          </a:lnRef>
+          <a:fillRef idx="3">
+            <a:schemeClr val="accent1"/>
+          </a:fillRef>
+          <a:effectRef idx="2">
+            <a:schemeClr val="accent1"/>
+          </a:effectRef>
+          <a:fontRef idx="minor">
+            <a:schemeClr val="lt1"/>
+          </a:fontRef>
+        </p:style>
+        <p:txBody>
+          <a:bodyPr rtlCol="0" anchor="ctr"/>
+          <a:lstStyle/>
+          <a:p>
+            <a:pPr algn="ctr"/>
+          </a:p>
+        </p:txBody>
+      </p:sp>
+      <p:sp>
+        <p:nvSpPr>
+          <p:cNvPr id="3" name="TextBox 2"/>
           <p:cNvSpPr txBox="1"/>
           <p:nvPr/>
         </p:nvSpPr>
@@ -19207,7 +19388,7 @@
             <a:r>
               <a:rPr sz="4600" b="0">
                 <a:solidFill>
-                  <a:srgbClr val="F5EFE9"/>
+                  <a:srgbClr val="E6ECF2"/>
                 </a:solidFill>
               </a:rPr>
               <a:t>The Objects The Domains Depend On (1 of 2)</a:t>
@@ -19217,7 +19398,7 @@
       </p:sp>
       <p:sp>
         <p:nvSpPr>
-          <p:cNvPr id="3" name="Rounded Rectangle 2"/>
+          <p:cNvPr id="4" name="Rounded Rectangle 3"/>
           <p:cNvSpPr/>
           <p:nvPr/>
         </p:nvSpPr>
@@ -19232,7 +19413,7 @@
             </a:avLst>
           </a:prstGeom>
           <a:solidFill>
-            <a:srgbClr val="FFA418"/>
+            <a:srgbClr val="006FAC"/>
           </a:solidFill>
           <a:ln>
             <a:noFill/>
@@ -19265,7 +19446,7 @@
             <a:r>
               <a:rPr sz="1600" b="1">
                 <a:solidFill>
-                  <a:srgbClr val="0B3D7A"/>
+                  <a:srgbClr val="FFFFFF"/>
                 </a:solidFill>
               </a:rPr>
               <a:t>V3</a:t>
@@ -19275,7 +19456,7 @@
       </p:sp>
       <p:sp>
         <p:nvSpPr>
-          <p:cNvPr id="4" name="TextBox 3"/>
+          <p:cNvPr id="5" name="TextBox 4"/>
           <p:cNvSpPr txBox="1"/>
           <p:nvPr/>
         </p:nvSpPr>
@@ -19303,7 +19484,7 @@
             <a:r>
               <a:rPr sz="1050" b="1">
                 <a:solidFill>
-                  <a:srgbClr val="F5EFE9"/>
+                  <a:srgbClr val="E6ECF2"/>
                 </a:solidFill>
               </a:rPr>
               <a:t>@2026, Origin Utility, Inc / Proprietary &amp; Confidential / Internal Use Only</a:t>
@@ -19313,7 +19494,7 @@
       </p:sp>
       <p:graphicFrame>
         <p:nvGraphicFramePr>
-          <p:cNvPr id="5" name="Table 4"/>
+          <p:cNvPr id="6" name="Table 5"/>
           <p:cNvGraphicFramePr>
             <a:graphicFrameLocks noGrp="1"/>
           </p:cNvGraphicFramePr>
@@ -19349,7 +19530,7 @@
                       <a:r>
                         <a:rPr sz="2200" b="1">
                           <a:solidFill>
-                            <a:srgbClr val="F5EFE9"/>
+                            <a:srgbClr val="FFFFFF"/>
                           </a:solidFill>
                         </a:rPr>
                         <a:t>Object</a:t>
@@ -19358,7 +19539,7 @@
                   </a:txBody>
                   <a:tcPr>
                     <a:solidFill>
-                      <a:srgbClr val="0B3D7A"/>
+                      <a:srgbClr val="006FAC"/>
                     </a:solidFill>
                   </a:tcPr>
                 </a:tc>
@@ -19375,7 +19556,7 @@
                       <a:r>
                         <a:rPr sz="2200" b="1">
                           <a:solidFill>
-                            <a:srgbClr val="F5EFE9"/>
+                            <a:srgbClr val="FFFFFF"/>
                           </a:solidFill>
                         </a:rPr>
                         <a:t>Kind</a:t>
@@ -19384,7 +19565,7 @@
                   </a:txBody>
                   <a:tcPr>
                     <a:solidFill>
-                      <a:srgbClr val="0B3D7A"/>
+                      <a:srgbClr val="006FAC"/>
                     </a:solidFill>
                   </a:tcPr>
                 </a:tc>
@@ -19401,7 +19582,7 @@
                       <a:r>
                         <a:rPr sz="2200" b="1">
                           <a:solidFill>
-                            <a:srgbClr val="F5EFE9"/>
+                            <a:srgbClr val="FFFFFF"/>
                           </a:solidFill>
                         </a:rPr>
                         <a:t>What it is</a:t>
@@ -19410,7 +19591,7 @@
                   </a:txBody>
                   <a:tcPr>
                     <a:solidFill>
-                      <a:srgbClr val="0B3D7A"/>
+                      <a:srgbClr val="006FAC"/>
                     </a:solidFill>
                   </a:tcPr>
                 </a:tc>
@@ -19427,7 +19608,7 @@
                       <a:r>
                         <a:rPr sz="2200" b="1">
                           <a:solidFill>
-                            <a:srgbClr val="F5EFE9"/>
+                            <a:srgbClr val="FFFFFF"/>
                           </a:solidFill>
                         </a:rPr>
                         <a:t>Depended on by</a:t>
@@ -19436,7 +19617,7 @@
                   </a:txBody>
                   <a:tcPr>
                     <a:solidFill>
-                      <a:srgbClr val="0B3D7A"/>
+                      <a:srgbClr val="006FAC"/>
                     </a:solidFill>
                   </a:tcPr>
                 </a:tc>
@@ -19455,7 +19636,7 @@
                       <a:r>
                         <a:rPr sz="1600" b="1">
                           <a:solidFill>
-                            <a:srgbClr val="0B3D7A"/>
+                            <a:srgbClr val="004B86"/>
                           </a:solidFill>
                         </a:rPr>
                         <a:t>CMS_SA_SNAPSHOT</a:t>
@@ -19464,7 +19645,7 @@
                   </a:txBody>
                   <a:tcPr>
                     <a:solidFill>
-                      <a:srgbClr val="F5EFE9"/>
+                      <a:srgbClr val="E6ECF2"/>
                     </a:solidFill>
                   </a:tcPr>
                 </a:tc>
@@ -19481,7 +19662,7 @@
                       <a:r>
                         <a:rPr sz="1600" b="0">
                           <a:solidFill>
-                            <a:srgbClr val="4C5D69"/>
+                            <a:srgbClr val="56636E"/>
                           </a:solidFill>
                         </a:rPr>
                         <a:t>table + refresh procedure</a:t>
@@ -19490,7 +19671,7 @@
                   </a:txBody>
                   <a:tcPr>
                     <a:solidFill>
-                      <a:srgbClr val="F5EFE9"/>
+                      <a:srgbClr val="E6ECF2"/>
                     </a:solidFill>
                   </a:tcPr>
                 </a:tc>
@@ -19507,7 +19688,7 @@
                       <a:r>
                         <a:rPr sz="1600" b="0">
                           <a:solidFill>
-                            <a:srgbClr val="4C5D69"/>
+                            <a:srgbClr val="56636E"/>
                           </a:solidFill>
                         </a:rPr>
                         <a:t>One end-of-day (LDAY) aged-balance row per service agreement: current and payoff balance, new charges, and ten aging buckets built from frozen ARS financial transactions dated up to today. Credits and payments retire the oldest debt first; excess credit sits in the current bucket; buckets 1 to 5 always sum to the current balance; future-dated amounts are excluded.</a:t>
@@ -19516,7 +19697,7 @@
                   </a:txBody>
                   <a:tcPr>
                     <a:solidFill>
-                      <a:srgbClr val="F5EFE9"/>
+                      <a:srgbClr val="E6ECF2"/>
                     </a:solidFill>
                   </a:tcPr>
                 </a:tc>
@@ -19533,7 +19714,7 @@
                       <a:r>
                         <a:rPr sz="1600" b="0">
                           <a:solidFill>
-                            <a:srgbClr val="4C5D69"/>
+                            <a:srgbClr val="56636E"/>
                           </a:solidFill>
                         </a:rPr>
                         <a:t>Debt Management: the SA Snapshot Aged Balance domain, its account roll-up (a derived query over this table, not a second object), and every aged-debt view and dashboard on it</a:t>
@@ -19542,7 +19723,7 @@
                   </a:txBody>
                   <a:tcPr>
                     <a:solidFill>
-                      <a:srgbClr val="F5EFE9"/>
+                      <a:srgbClr val="E6ECF2"/>
                     </a:solidFill>
                   </a:tcPr>
                 </a:tc>
@@ -19561,7 +19742,7 @@
                       <a:r>
                         <a:rPr sz="1600" b="1">
                           <a:solidFill>
-                            <a:srgbClr val="0B3D7A"/>
+                            <a:srgbClr val="004B86"/>
                           </a:solidFill>
                         </a:rPr>
                         <a:t>CM_SNAPSHOT_TYPE_FLG</a:t>
@@ -19570,7 +19751,7 @@
                   </a:txBody>
                   <a:tcPr>
                     <a:solidFill>
-                      <a:srgbClr val="F5EFE9"/>
+                      <a:srgbClr val="E6ECF2"/>
                     </a:solidFill>
                   </a:tcPr>
                 </a:tc>
@@ -19587,7 +19768,7 @@
                       <a:r>
                         <a:rPr sz="1600" b="0">
                           <a:solidFill>
-                            <a:srgbClr val="4C5D69"/>
+                            <a:srgbClr val="56636E"/>
                           </a:solidFill>
                         </a:rPr>
                         <a:t>lookup seed</a:t>
@@ -19596,7 +19777,7 @@
                   </a:txBody>
                   <a:tcPr>
                     <a:solidFill>
-                      <a:srgbClr val="F5EFE9"/>
+                      <a:srgbClr val="E6ECF2"/>
                     </a:solidFill>
                   </a:tcPr>
                 </a:tc>
@@ -19613,7 +19794,7 @@
                       <a:r>
                         <a:rPr sz="1600" b="0">
                           <a:solidFill>
-                            <a:srgbClr val="4C5D69"/>
+                            <a:srgbClr val="56636E"/>
                           </a:solidFill>
                         </a:rPr>
                         <a:t>The four snapshot-type codes (LDAY, EMON, ARCH, LEMN) written into the C2M lookup tables. The domain inner-joins them, so a fresh database without the seed returns zero rows in every Ad Hoc view.</a:t>
@@ -19622,7 +19803,7 @@
                   </a:txBody>
                   <a:tcPr>
                     <a:solidFill>
-                      <a:srgbClr val="F5EFE9"/>
+                      <a:srgbClr val="E6ECF2"/>
                     </a:solidFill>
                   </a:tcPr>
                 </a:tc>
@@ -19639,7 +19820,7 @@
                       <a:r>
                         <a:rPr sz="1600" b="0">
                           <a:solidFill>
-                            <a:srgbClr val="4C5D69"/>
+                            <a:srgbClr val="56636E"/>
                           </a:solidFill>
                         </a:rPr>
                         <a:t>Debt Management: SA Snapshot Aged Balance domain</a:t>
@@ -19648,7 +19829,7 @@
                   </a:txBody>
                   <a:tcPr>
                     <a:solidFill>
-                      <a:srgbClr val="F5EFE9"/>
+                      <a:srgbClr val="E6ECF2"/>
                     </a:solidFill>
                   </a:tcPr>
                 </a:tc>
@@ -19667,7 +19848,7 @@
                       <a:r>
                         <a:rPr sz="1600" b="1">
                           <a:solidFill>
-                            <a:srgbClr val="0B3D7A"/>
+                            <a:srgbClr val="004B86"/>
                           </a:solidFill>
                         </a:rPr>
                         <a:t>CMS_D1_DVC_IDENTIFIER_VW</a:t>
@@ -19676,7 +19857,7 @@
                   </a:txBody>
                   <a:tcPr>
                     <a:solidFill>
-                      <a:srgbClr val="F5EFE9"/>
+                      <a:srgbClr val="E6ECF2"/>
                     </a:solidFill>
                   </a:tcPr>
                 </a:tc>
@@ -19693,7 +19874,7 @@
                       <a:r>
                         <a:rPr sz="1600" b="0">
                           <a:solidFill>
-                            <a:srgbClr val="4C5D69"/>
+                            <a:srgbClr val="56636E"/>
                           </a:solidFill>
                         </a:rPr>
                         <a:t>view</a:t>
@@ -19702,7 +19883,7 @@
                   </a:txBody>
                   <a:tcPr>
                     <a:solidFill>
-                      <a:srgbClr val="F5EFE9"/>
+                      <a:srgbClr val="E6ECF2"/>
                     </a:solidFill>
                   </a:tcPr>
                 </a:tc>
@@ -19719,7 +19900,7 @@
                       <a:r>
                         <a:rPr sz="1600" b="0">
                           <a:solidFill>
-                            <a:srgbClr val="4C5D69"/>
+                            <a:srgbClr val="56636E"/>
                           </a:solidFill>
                         </a:rPr>
                         <a:t>One row per device with its identifiers pivoted from rows into columns: asset id, badge number, serial number, internal meter number, external and MDM ids, NIC id and serial, name, utility device id.</a:t>
@@ -19728,7 +19909,7 @@
                   </a:txBody>
                   <a:tcPr>
                     <a:solidFill>
-                      <a:srgbClr val="F5EFE9"/>
+                      <a:srgbClr val="E6ECF2"/>
                     </a:solidFill>
                   </a:tcPr>
                 </a:tc>
@@ -19745,7 +19926,7 @@
                       <a:r>
                         <a:rPr sz="1600" b="0">
                           <a:solidFill>
-                            <a:srgbClr val="4C5D69"/>
+                            <a:srgbClr val="56636E"/>
                           </a:solidFill>
                         </a:rPr>
                         <a:t>Meter Operations: Device domain; Daily Installations, Disconnected Service Points, Meters Not Recently Read</a:t>
@@ -19754,7 +19935,7 @@
                   </a:txBody>
                   <a:tcPr>
                     <a:solidFill>
-                      <a:srgbClr val="F5EFE9"/>
+                      <a:srgbClr val="E6ECF2"/>
                     </a:solidFill>
                   </a:tcPr>
                 </a:tc>
@@ -19773,7 +19954,7 @@
                       <a:r>
                         <a:rPr sz="1600" b="1">
                           <a:solidFill>
-                            <a:srgbClr val="0B3D7A"/>
+                            <a:srgbClr val="004B86"/>
                           </a:solidFill>
                         </a:rPr>
                         <a:t>CMS_D1_DVC_BODA_VW</a:t>
@@ -19782,7 +19963,7 @@
                   </a:txBody>
                   <a:tcPr>
                     <a:solidFill>
-                      <a:srgbClr val="F5EFE9"/>
+                      <a:srgbClr val="E6ECF2"/>
                     </a:solidFill>
                   </a:tcPr>
                 </a:tc>
@@ -19799,7 +19980,7 @@
                       <a:r>
                         <a:rPr sz="1600" b="0">
                           <a:solidFill>
-                            <a:srgbClr val="4C5D69"/>
+                            <a:srgbClr val="56636E"/>
                           </a:solidFill>
                         </a:rPr>
                         <a:t>view</a:t>
@@ -19808,7 +19989,7 @@
                   </a:txBody>
                   <a:tcPr>
                     <a:solidFill>
-                      <a:srgbClr val="F5EFE9"/>
+                      <a:srgbClr val="E6ECF2"/>
                     </a:solidFill>
                   </a:tcPr>
                 </a:tc>
@@ -19825,7 +20006,7 @@
                       <a:r>
                         <a:rPr sz="1600" b="0">
                           <a:solidFill>
-                            <a:srgbClr val="4C5D69"/>
+                            <a:srgbClr val="56636E"/>
                           </a:solidFill>
                         </a:rPr>
                         <a:t>The device's business-object data area parsed out of its XML: business object code, latest status, retirement date and time. One row per device.</a:t>
@@ -19834,7 +20015,7 @@
                   </a:txBody>
                   <a:tcPr>
                     <a:solidFill>
-                      <a:srgbClr val="F5EFE9"/>
+                      <a:srgbClr val="E6ECF2"/>
                     </a:solidFill>
                   </a:tcPr>
                 </a:tc>
@@ -19851,7 +20032,7 @@
                       <a:r>
                         <a:rPr sz="1600" b="0">
                           <a:solidFill>
-                            <a:srgbClr val="4C5D69"/>
+                            <a:srgbClr val="56636E"/>
                           </a:solidFill>
                         </a:rPr>
                         <a:t>Meter Operations: Device domain</a:t>
@@ -19860,7 +20041,7 @@
                   </a:txBody>
                   <a:tcPr>
                     <a:solidFill>
-                      <a:srgbClr val="F5EFE9"/>
+                      <a:srgbClr val="E6ECF2"/>
                     </a:solidFill>
                   </a:tcPr>
                 </a:tc>
@@ -19879,7 +20060,7 @@
                       <a:r>
                         <a:rPr sz="1600" b="1">
                           <a:solidFill>
-                            <a:srgbClr val="0B3D7A"/>
+                            <a:srgbClr val="004B86"/>
                           </a:solidFill>
                         </a:rPr>
                         <a:t>CMS_W1_ASSET_IDENTIFIER_VW</a:t>
@@ -19888,7 +20069,7 @@
                   </a:txBody>
                   <a:tcPr>
                     <a:solidFill>
-                      <a:srgbClr val="F5EFE9"/>
+                      <a:srgbClr val="E6ECF2"/>
                     </a:solidFill>
                   </a:tcPr>
                 </a:tc>
@@ -19905,7 +20086,7 @@
                       <a:r>
                         <a:rPr sz="1600" b="0">
                           <a:solidFill>
-                            <a:srgbClr val="4C5D69"/>
+                            <a:srgbClr val="56636E"/>
                           </a:solidFill>
                         </a:rPr>
                         <a:t>view</a:t>
@@ -19914,7 +20095,7 @@
                   </a:txBody>
                   <a:tcPr>
                     <a:solidFill>
-                      <a:srgbClr val="F5EFE9"/>
+                      <a:srgbClr val="E6ECF2"/>
                     </a:solidFill>
                   </a:tcPr>
                 </a:tc>
@@ -19931,7 +20112,7 @@
                       <a:r>
                         <a:rPr sz="1600" b="0">
                           <a:solidFill>
-                            <a:srgbClr val="4C5D69"/>
+                            <a:srgbClr val="56636E"/>
                           </a:solidFill>
                         </a:rPr>
                         <a:t>One row per asset with its identifiers pivoted into columns, the asset-side twin of the device identifier view, so the Asset domain can join by badge, serial or external id.</a:t>
@@ -19940,7 +20121,7 @@
                   </a:txBody>
                   <a:tcPr>
                     <a:solidFill>
-                      <a:srgbClr val="F5EFE9"/>
+                      <a:srgbClr val="E6ECF2"/>
                     </a:solidFill>
                   </a:tcPr>
                 </a:tc>
@@ -19957,7 +20138,7 @@
                       <a:r>
                         <a:rPr sz="1600" b="0">
                           <a:solidFill>
-                            <a:srgbClr val="4C5D69"/>
+                            <a:srgbClr val="56636E"/>
                           </a:solidFill>
                         </a:rPr>
                         <a:t>Meter Operations: Asset domain; In Storage, Distribution of Installed Assets, Non-Meter Assets</a:t>
@@ -19966,7 +20147,7 @@
                   </a:txBody>
                   <a:tcPr>
                     <a:solidFill>
-                      <a:srgbClr val="F5EFE9"/>
+                      <a:srgbClr val="E6ECF2"/>
                     </a:solidFill>
                   </a:tcPr>
                 </a:tc>
@@ -19995,7 +20176,51 @@
       <p:grpSpPr/>
       <p:sp>
         <p:nvSpPr>
-          <p:cNvPr id="2" name="TextBox 1"/>
+          <p:cNvPr id="2" name="Rectangle 1"/>
+          <p:cNvSpPr/>
+          <p:nvPr/>
+        </p:nvSpPr>
+        <p:spPr>
+          <a:xfrm>
+            <a:off x="0" y="0"/>
+            <a:ext cx="20116800" cy="11315700"/>
+          </a:xfrm>
+          <a:prstGeom prst="rect">
+            <a:avLst/>
+          </a:prstGeom>
+          <a:solidFill>
+            <a:srgbClr val="0B1723"/>
+          </a:solidFill>
+          <a:ln>
+            <a:noFill/>
+          </a:ln>
+          <a:effectLst/>
+        </p:spPr>
+        <p:style>
+          <a:lnRef idx="1">
+            <a:schemeClr val="accent1"/>
+          </a:lnRef>
+          <a:fillRef idx="3">
+            <a:schemeClr val="accent1"/>
+          </a:fillRef>
+          <a:effectRef idx="2">
+            <a:schemeClr val="accent1"/>
+          </a:effectRef>
+          <a:fontRef idx="minor">
+            <a:schemeClr val="lt1"/>
+          </a:fontRef>
+        </p:style>
+        <p:txBody>
+          <a:bodyPr rtlCol="0" anchor="ctr"/>
+          <a:lstStyle/>
+          <a:p>
+            <a:pPr algn="ctr"/>
+          </a:p>
+        </p:txBody>
+      </p:sp>
+      <p:sp>
+        <p:nvSpPr>
+          <p:cNvPr id="3" name="TextBox 2"/>
           <p:cNvSpPr txBox="1"/>
           <p:nvPr/>
         </p:nvSpPr>
@@ -20023,7 +20248,7 @@
             <a:r>
               <a:rPr sz="4600" b="0">
                 <a:solidFill>
-                  <a:srgbClr val="F5EFE9"/>
+                  <a:srgbClr val="E6ECF2"/>
                 </a:solidFill>
               </a:rPr>
               <a:t>The Objects The Domains Depend On (2 of 2)</a:t>
@@ -20033,7 +20258,7 @@
       </p:sp>
       <p:sp>
         <p:nvSpPr>
-          <p:cNvPr id="3" name="Rounded Rectangle 2"/>
+          <p:cNvPr id="4" name="Rounded Rectangle 3"/>
           <p:cNvSpPr/>
           <p:nvPr/>
         </p:nvSpPr>
@@ -20048,7 +20273,7 @@
             </a:avLst>
           </a:prstGeom>
           <a:solidFill>
-            <a:srgbClr val="FFA418"/>
+            <a:srgbClr val="006FAC"/>
           </a:solidFill>
           <a:ln>
             <a:noFill/>
@@ -20081,7 +20306,7 @@
             <a:r>
               <a:rPr sz="1600" b="1">
                 <a:solidFill>
-                  <a:srgbClr val="0B3D7A"/>
+                  <a:srgbClr val="FFFFFF"/>
                 </a:solidFill>
               </a:rPr>
               <a:t>V4</a:t>
@@ -20091,7 +20316,7 @@
       </p:sp>
       <p:sp>
         <p:nvSpPr>
-          <p:cNvPr id="4" name="TextBox 3"/>
+          <p:cNvPr id="5" name="TextBox 4"/>
           <p:cNvSpPr txBox="1"/>
           <p:nvPr/>
         </p:nvSpPr>
@@ -20119,7 +20344,7 @@
             <a:r>
               <a:rPr sz="1050" b="1">
                 <a:solidFill>
-                  <a:srgbClr val="F5EFE9"/>
+                  <a:srgbClr val="E6ECF2"/>
                 </a:solidFill>
               </a:rPr>
               <a:t>@2026, Origin Utility, Inc / Proprietary &amp; Confidential / Internal Use Only</a:t>
@@ -20129,7 +20354,7 @@
       </p:sp>
       <p:graphicFrame>
         <p:nvGraphicFramePr>
-          <p:cNvPr id="5" name="Table 4"/>
+          <p:cNvPr id="6" name="Table 5"/>
           <p:cNvGraphicFramePr>
             <a:graphicFrameLocks noGrp="1"/>
           </p:cNvGraphicFramePr>
@@ -20165,7 +20390,7 @@
                       <a:r>
                         <a:rPr sz="2200" b="1">
                           <a:solidFill>
-                            <a:srgbClr val="F5EFE9"/>
+                            <a:srgbClr val="FFFFFF"/>
                           </a:solidFill>
                         </a:rPr>
                         <a:t>Object</a:t>
@@ -20174,7 +20399,7 @@
                   </a:txBody>
                   <a:tcPr>
                     <a:solidFill>
-                      <a:srgbClr val="0B3D7A"/>
+                      <a:srgbClr val="006FAC"/>
                     </a:solidFill>
                   </a:tcPr>
                 </a:tc>
@@ -20191,7 +20416,7 @@
                       <a:r>
                         <a:rPr sz="2200" b="1">
                           <a:solidFill>
-                            <a:srgbClr val="F5EFE9"/>
+                            <a:srgbClr val="FFFFFF"/>
                           </a:solidFill>
                         </a:rPr>
                         <a:t>Kind</a:t>
@@ -20200,7 +20425,7 @@
                   </a:txBody>
                   <a:tcPr>
                     <a:solidFill>
-                      <a:srgbClr val="0B3D7A"/>
+                      <a:srgbClr val="006FAC"/>
                     </a:solidFill>
                   </a:tcPr>
                 </a:tc>
@@ -20217,7 +20442,7 @@
                       <a:r>
                         <a:rPr sz="2200" b="1">
                           <a:solidFill>
-                            <a:srgbClr val="F5EFE9"/>
+                            <a:srgbClr val="FFFFFF"/>
                           </a:solidFill>
                         </a:rPr>
                         <a:t>What it is</a:t>
@@ -20226,7 +20451,7 @@
                   </a:txBody>
                   <a:tcPr>
                     <a:solidFill>
-                      <a:srgbClr val="0B3D7A"/>
+                      <a:srgbClr val="006FAC"/>
                     </a:solidFill>
                   </a:tcPr>
                 </a:tc>
@@ -20243,7 +20468,7 @@
                       <a:r>
                         <a:rPr sz="2200" b="1">
                           <a:solidFill>
-                            <a:srgbClr val="F5EFE9"/>
+                            <a:srgbClr val="FFFFFF"/>
                           </a:solidFill>
                         </a:rPr>
                         <a:t>Depended on by</a:t>
@@ -20252,7 +20477,7 @@
                   </a:txBody>
                   <a:tcPr>
                     <a:solidFill>
-                      <a:srgbClr val="0B3D7A"/>
+                      <a:srgbClr val="006FAC"/>
                     </a:solidFill>
                   </a:tcPr>
                 </a:tc>
@@ -20271,7 +20496,7 @@
                       <a:r>
                         <a:rPr sz="1600" b="1">
                           <a:solidFill>
-                            <a:srgbClr val="0B3D7A"/>
+                            <a:srgbClr val="004B86"/>
                           </a:solidFill>
                         </a:rPr>
                         <a:t>CMS_C1_REPRESENTATIVE_BODA_VW</a:t>
@@ -20280,7 +20505,7 @@
                   </a:txBody>
                   <a:tcPr>
                     <a:solidFill>
-                      <a:srgbClr val="F5EFE9"/>
+                      <a:srgbClr val="E6ECF2"/>
                     </a:solidFill>
                   </a:tcPr>
                 </a:tc>
@@ -20297,7 +20522,7 @@
                       <a:r>
                         <a:rPr sz="1600" b="0">
                           <a:solidFill>
-                            <a:srgbClr val="4C5D69"/>
+                            <a:srgbClr val="56636E"/>
                           </a:solidFill>
                         </a:rPr>
                         <a:t>view</a:t>
@@ -20306,7 +20531,7 @@
                   </a:txBody>
                   <a:tcPr>
                     <a:solidFill>
-                      <a:srgbClr val="F5EFE9"/>
+                      <a:srgbClr val="E6ECF2"/>
                     </a:solidFill>
                   </a:tcPr>
                 </a:tc>
@@ -20323,7 +20548,7 @@
                       <a:r>
                         <a:rPr sz="1600" b="0">
                           <a:solidFill>
-                            <a:srgbClr val="4C5D69"/>
+                            <a:srgbClr val="56636E"/>
                           </a:solidFill>
                         </a:rPr>
                         <a:t>Field representative (crew member) mobile details parsed out of the representative's XML data area: the service areas they cover and their worker capabilities, one row per representative and area or capability.</a:t>
@@ -20332,7 +20557,7 @@
                   </a:txBody>
                   <a:tcPr>
                     <a:solidFill>
-                      <a:srgbClr val="F5EFE9"/>
+                      <a:srgbClr val="E6ECF2"/>
                     </a:solidFill>
                   </a:tcPr>
                 </a:tc>
@@ -20349,7 +20574,7 @@
                       <a:r>
                         <a:rPr sz="1600" b="0">
                           <a:solidFill>
-                            <a:srgbClr val="4C5D69"/>
+                            <a:srgbClr val="56636E"/>
                           </a:solidFill>
                         </a:rPr>
                         <a:t>Field Operations: Crew domain and its views</a:t>
@@ -20358,7 +20583,7 @@
                   </a:txBody>
                   <a:tcPr>
                     <a:solidFill>
-                      <a:srgbClr val="F5EFE9"/>
+                      <a:srgbClr val="E6ECF2"/>
                     </a:solidFill>
                   </a:tcPr>
                 </a:tc>
@@ -20377,7 +20602,7 @@
                       <a:r>
                         <a:rPr sz="1600" b="1">
                           <a:solidFill>
-                            <a:srgbClr val="0B3D7A"/>
+                            <a:srgbClr val="004B86"/>
                           </a:solidFill>
                         </a:rPr>
                         <a:t>CMS_D1_ACTIVITY_CHAR_VW</a:t>
@@ -20386,7 +20611,7 @@
                   </a:txBody>
                   <a:tcPr>
                     <a:solidFill>
-                      <a:srgbClr val="F5EFE9"/>
+                      <a:srgbClr val="E6ECF2"/>
                     </a:solidFill>
                   </a:tcPr>
                 </a:tc>
@@ -20403,7 +20628,7 @@
                       <a:r>
                         <a:rPr sz="1600" b="0">
                           <a:solidFill>
-                            <a:srgbClr val="4C5D69"/>
+                            <a:srgbClr val="56636E"/>
                           </a:solidFill>
                         </a:rPr>
                         <a:t>view</a:t>
@@ -20412,7 +20637,7 @@
                   </a:txBody>
                   <a:tcPr>
                     <a:solidFill>
-                      <a:srgbClr val="F5EFE9"/>
+                      <a:srgbClr val="E6ECF2"/>
                     </a:solidFill>
                   </a:tcPr>
                 </a:tc>
@@ -20429,7 +20654,7 @@
                       <a:r>
                         <a:rPr sz="1600" b="0">
                           <a:solidFill>
-                            <a:srgbClr val="4C5D69"/>
+                            <a:srgbClr val="56636E"/>
                           </a:solidFill>
                         </a:rPr>
                         <a:t>Activity characteristics pivoted per field activity: internal field-activity status, priority, and the third-party representative code, so the domain filters on them as columns.</a:t>
@@ -20438,7 +20663,7 @@
                   </a:txBody>
                   <a:tcPr>
                     <a:solidFill>
-                      <a:srgbClr val="F5EFE9"/>
+                      <a:srgbClr val="E6ECF2"/>
                     </a:solidFill>
                   </a:tcPr>
                 </a:tc>
@@ -20455,7 +20680,7 @@
                       <a:r>
                         <a:rPr sz="1600" b="0">
                           <a:solidFill>
-                            <a:srgbClr val="4C5D69"/>
+                            <a:srgbClr val="56636E"/>
                           </a:solidFill>
                         </a:rPr>
                         <a:t>Field Operations: Crew domain</a:t>
@@ -20464,7 +20689,7 @@
                   </a:txBody>
                   <a:tcPr>
                     <a:solidFill>
-                      <a:srgbClr val="F5EFE9"/>
+                      <a:srgbClr val="E6ECF2"/>
                     </a:solidFill>
                   </a:tcPr>
                 </a:tc>
@@ -20483,7 +20708,7 @@
                       <a:r>
                         <a:rPr sz="1600" b="1">
                           <a:solidFill>
-                            <a:srgbClr val="0B3D7A"/>
+                            <a:srgbClr val="004B86"/>
                           </a:solidFill>
                         </a:rPr>
                         <a:t>CMS_D1_ACTIVITY_D1FA_BODA_VW</a:t>
@@ -20492,7 +20717,7 @@
                   </a:txBody>
                   <a:tcPr>
                     <a:solidFill>
-                      <a:srgbClr val="F5EFE9"/>
+                      <a:srgbClr val="E6ECF2"/>
                     </a:solidFill>
                   </a:tcPr>
                 </a:tc>
@@ -20509,7 +20734,7 @@
                       <a:r>
                         <a:rPr sz="1600" b="0">
                           <a:solidFill>
-                            <a:srgbClr val="4C5D69"/>
+                            <a:srgbClr val="56636E"/>
                           </a:solidFill>
                         </a:rPr>
                         <a:t>view</a:t>
@@ -20518,7 +20743,7 @@
                   </a:txBody>
                   <a:tcPr>
                     <a:solidFill>
-                      <a:srgbClr val="F5EFE9"/>
+                      <a:srgbClr val="E6ECF2"/>
                     </a:solidFill>
                   </a:tcPr>
                 </a:tc>
@@ -20535,7 +20760,7 @@
                       <a:r>
                         <a:rPr sz="1600" b="0">
                           <a:solidFill>
-                            <a:srgbClr val="4C5D69"/>
+                            <a:srgbClr val="56636E"/>
                           </a:solidFill>
                         </a:rPr>
                         <a:t>The field activity's business-object data parsed from XML: instructions and comments, the appointment window and who took it, expiration, requester, external references, and the customer and contact names and phone numbers.</a:t>
@@ -20544,7 +20769,7 @@
                   </a:txBody>
                   <a:tcPr>
                     <a:solidFill>
-                      <a:srgbClr val="F5EFE9"/>
+                      <a:srgbClr val="E6ECF2"/>
                     </a:solidFill>
                   </a:tcPr>
                 </a:tc>
@@ -20561,7 +20786,7 @@
                       <a:r>
                         <a:rPr sz="1600" b="0">
                           <a:solidFill>
-                            <a:srgbClr val="4C5D69"/>
+                            <a:srgbClr val="56636E"/>
                           </a:solidFill>
                         </a:rPr>
                         <a:t>Field Operations: Crew and Field Activity domains; Upcoming Field Work, Cancelations, Average Days per Field Task</a:t>
@@ -20570,7 +20795,7 @@
                   </a:txBody>
                   <a:tcPr>
                     <a:solidFill>
-                      <a:srgbClr val="F5EFE9"/>
+                      <a:srgbClr val="E6ECF2"/>
                     </a:solidFill>
                   </a:tcPr>
                 </a:tc>
@@ -20589,7 +20814,7 @@
                       <a:r>
                         <a:rPr sz="1600" b="1">
                           <a:solidFill>
-                            <a:srgbClr val="0B3D7A"/>
+                            <a:srgbClr val="004B86"/>
                           </a:solidFill>
                         </a:rPr>
                         <a:t>CMS_CI_CASE_VW</a:t>
@@ -20598,7 +20823,7 @@
                   </a:txBody>
                   <a:tcPr>
                     <a:solidFill>
-                      <a:srgbClr val="F5EFE9"/>
+                      <a:srgbClr val="E6ECF2"/>
                     </a:solidFill>
                   </a:tcPr>
                 </a:tc>
@@ -20615,7 +20840,7 @@
                       <a:r>
                         <a:rPr sz="1600" b="0">
                           <a:solidFill>
-                            <a:srgbClr val="4C5D69"/>
+                            <a:srgbClr val="56636E"/>
                           </a:solidFill>
                         </a:rPr>
                         <a:t>view</a:t>
@@ -20624,7 +20849,7 @@
                   </a:txBody>
                   <a:tcPr>
                     <a:solidFill>
-                      <a:srgbClr val="F5EFE9"/>
+                      <a:srgbClr val="E6ECF2"/>
                     </a:solidFill>
                   </a:tcPr>
                 </a:tc>
@@ -20641,7 +20866,7 @@
                       <a:r>
                         <a:rPr sz="1600" b="0">
                           <a:solidFill>
-                            <a:srgbClr val="4C5D69"/>
+                            <a:srgbClr val="56636E"/>
                           </a:solidFill>
                         </a:rPr>
                         <a:t>One row per case with its create and close timestamps derived from the case log (the case-created entry and the closing status entry) and the duration in minutes, measured to now while the case is open.</a:t>
@@ -20650,7 +20875,7 @@
                   </a:txBody>
                   <a:tcPr>
                     <a:solidFill>
-                      <a:srgbClr val="F5EFE9"/>
+                      <a:srgbClr val="E6ECF2"/>
                     </a:solidFill>
                   </a:tcPr>
                 </a:tc>
@@ -20667,7 +20892,7 @@
                       <a:r>
                         <a:rPr sz="1600" b="0">
                           <a:solidFill>
-                            <a:srgbClr val="4C5D69"/>
+                            <a:srgbClr val="56636E"/>
                           </a:solidFill>
                         </a:rPr>
                         <a:t>Customer Operations: Case domain and every case view</a:t>
@@ -20676,7 +20901,7 @@
                   </a:txBody>
                   <a:tcPr>
                     <a:solidFill>
-                      <a:srgbClr val="F5EFE9"/>
+                      <a:srgbClr val="E6ECF2"/>
                     </a:solidFill>
                   </a:tcPr>
                 </a:tc>
@@ -20695,7 +20920,7 @@
                       <a:r>
                         <a:rPr sz="1600" b="1">
                           <a:solidFill>
-                            <a:srgbClr val="0B3D7A"/>
+                            <a:srgbClr val="004B86"/>
                           </a:solidFill>
                         </a:rPr>
                         <a:t>CMS_CI_CASE_LOG_VW</a:t>
@@ -20704,7 +20929,7 @@
                   </a:txBody>
                   <a:tcPr>
                     <a:solidFill>
-                      <a:srgbClr val="F5EFE9"/>
+                      <a:srgbClr val="E6ECF2"/>
                     </a:solidFill>
                   </a:tcPr>
                 </a:tc>
@@ -20721,7 +20946,7 @@
                       <a:r>
                         <a:rPr sz="1600" b="0">
                           <a:solidFill>
-                            <a:srgbClr val="4C5D69"/>
+                            <a:srgbClr val="56636E"/>
                           </a:solidFill>
                         </a:rPr>
                         <a:t>view</a:t>
@@ -20730,7 +20955,7 @@
                   </a:txBody>
                   <a:tcPr>
                     <a:solidFill>
-                      <a:srgbClr val="F5EFE9"/>
+                      <a:srgbClr val="E6ECF2"/>
                     </a:solidFill>
                   </a:tcPr>
                 </a:tc>
@@ -20747,7 +20972,7 @@
                       <a:r>
                         <a:rPr sz="1600" b="0">
                           <a:solidFill>
-                            <a:srgbClr val="4C5D69"/>
+                            <a:srgbClr val="56636E"/>
                           </a:solidFill>
                         </a:rPr>
                         <a:t>The case log as a timeline: every status change with the previous status, the previous log time, and how long the case sat in the previous and the current state.</a:t>
@@ -20756,7 +20981,7 @@
                   </a:txBody>
                   <a:tcPr>
                     <a:solidFill>
-                      <a:srgbClr val="F5EFE9"/>
+                      <a:srgbClr val="E6ECF2"/>
                     </a:solidFill>
                   </a:tcPr>
                 </a:tc>
@@ -20773,7 +20998,7 @@
                       <a:r>
                         <a:rPr sz="1600" b="0">
                           <a:solidFill>
-                            <a:srgbClr val="4C5D69"/>
+                            <a:srgbClr val="56636E"/>
                           </a:solidFill>
                         </a:rPr>
                         <a:t>Customer Operations: Case domain (state durations and the case timeline views)</a:t>
@@ -20782,7 +21007,7 @@
                   </a:txBody>
                   <a:tcPr>
                     <a:solidFill>
-                      <a:srgbClr val="F5EFE9"/>
+                      <a:srgbClr val="E6ECF2"/>
                     </a:solidFill>
                   </a:tcPr>
                 </a:tc>

--- a/jaspersoft/docs/deployment_deck/visuals/Standard_Offering_and_Database_Steps.pptx
+++ b/jaspersoft/docs/deployment_deck/visuals/Standard_Offering_and_Database_Steps.pptx
@@ -7589,7 +7589,7 @@
             <a:avLst/>
           </a:prstGeom>
           <a:solidFill>
-            <a:srgbClr val="0B1723"/>
+            <a:srgbClr val="16283C"/>
           </a:solidFill>
           <a:ln>
             <a:noFill/>
@@ -7715,7 +7715,7 @@
             <a:avLst/>
           </a:prstGeom>
           <a:solidFill>
-            <a:srgbClr val="0B1723"/>
+            <a:srgbClr val="16283C"/>
           </a:solidFill>
           <a:ln>
             <a:noFill/>
@@ -13057,7 +13057,7 @@
             <a:avLst/>
           </a:prstGeom>
           <a:solidFill>
-            <a:srgbClr val="0B1723"/>
+            <a:srgbClr val="16283C"/>
           </a:solidFill>
           <a:ln>
             <a:noFill/>
@@ -19329,7 +19329,7 @@
             <a:avLst/>
           </a:prstGeom>
           <a:solidFill>
-            <a:srgbClr val="0B1723"/>
+            <a:srgbClr val="16283C"/>
           </a:solidFill>
           <a:ln>
             <a:noFill/>
@@ -20189,7 +20189,7 @@
             <a:avLst/>
           </a:prstGeom>
           <a:solidFill>
-            <a:srgbClr val="0B1723"/>
+            <a:srgbClr val="16283C"/>
           </a:solidFill>
           <a:ln>
             <a:noFill/>
